--- a/slides/Session 1 - Meet Your Agent.pptx
+++ b/slides/Session 1 - Meet Your Agent.pptx
@@ -27,9 +27,10 @@
     <p:sldId id="275" r:id="rId21"/>
     <p:sldId id="276" r:id="rId22"/>
     <p:sldId id="277" r:id="rId23"/>
+    <p:sldId id="278" r:id="rId24"/>
   </p:sldIdLst>
   <p:notesMasterIdLst>
-    <p:notesMasterId r:id="rId24"/>
+    <p:notesMasterId r:id="rId25"/>
   </p:notesMasterIdLst>
   <p:sldSz cx="12192000" cy="6858000"/>
   <p:notesSz cx="6858000" cy="12192000"/>
@@ -1403,7 +1404,7 @@
           <a:p>
             <a:r>
               <a:rPr lang="en-US" dirty="0"/>
-              <a:t>Show the real test file on screen. Ask them to predict which of the seven tests would still pass if the scaling were wrong. Answer: all but two.</a:t>
+              <a:t>The first sight of the thing they build all day. Point at the spike heights: 1.0 and 0.5 are the numbers they typed in - that equality is the entire lab. If it looks unimpressive, good: the point is that correctness, not spectacle, is what they are chasing.</a:t>
             </a:r>
             <a:endParaRPr lang="en-US" dirty="0"/>
           </a:p>
@@ -1579,7 +1580,7 @@
           <a:p>
             <a:r>
               <a:rPr lang="en-US" dirty="0"/>
-              <a:t>Last fifteen minutes, everyone, whether or not their app worked. Insist on the mutation exercise: two tests fail, the peak-location test stays green, and the chart still looks perfectly reasonable.</a:t>
+              <a:t>Show the real test file on screen. Ask them to predict which of the seven tests would still pass if the scaling were wrong. Answer: all but two.</a:t>
             </a:r>
             <a:endParaRPr lang="en-US" dirty="0"/>
           </a:p>
@@ -1667,7 +1668,7 @@
           <a:p>
             <a:r>
               <a:rPr lang="en-US" dirty="0"/>
-              <a:t>Leave this up for a moment; this is the slide they photograph. Then homework, then the closing slide for questions.</a:t>
+              <a:t>Last fifteen minutes, everyone, whether or not their app worked. Insist on the mutation exercise: two tests fail, the peak-location test stays green, and the chart still looks perfectly reasonable.</a:t>
             </a:r>
             <a:endParaRPr lang="en-US" dirty="0"/>
           </a:p>
@@ -1755,7 +1756,7 @@
           <a:p>
             <a:r>
               <a:rPr lang="en-US" dirty="0"/>
-              <a:t>Leave up during questions. Stress the log: three things the agent got wrong. Anyone who writes 'it all worked fine' did not look hard enough, and it is thirty per cent of the individual mark.</a:t>
+              <a:t>Leave this up for a moment; this is the slide they photograph. Then homework, then the closing slide for questions.</a:t>
             </a:r>
             <a:endParaRPr lang="en-US" dirty="0"/>
           </a:p>
@@ -1779,6 +1780,94 @@
             <a:fld id="{F7021451-1387-4CA6-816F-3879F97B5CBC}" type="slidenum">
               <a:rPr lang="en-US"/>
               <a:t>22</a:t>
+            </a:fld>
+            <a:endParaRPr lang="en-US"/>
+          </a:p>
+        </p:txBody>
+      </p:sp>
+    </p:spTree>
+    <p:extLst>
+      <p:ext uri="{BB962C8B-B14F-4D97-AF65-F5344CB8AC3E}">
+        <p14:creationId xmlns:p14="http://schemas.microsoft.com/office/powerpoint/2010/main" val="1024086991"/>
+      </p:ext>
+    </p:extLst>
+  </p:cSld>
+  <p:clrMapOvr>
+    <a:masterClrMapping/>
+  </p:clrMapOvr>
+</p:notes>
+</file>
+
+<file path=ppt/notesSlides/notesSlide23.xml><?xml version="1.0" encoding="utf-8"?>
+<p:notes xmlns:a="http://schemas.openxmlformats.org/drawingml/2006/main" xmlns:r="http://schemas.openxmlformats.org/officeDocument/2006/relationships" xmlns:p="http://schemas.openxmlformats.org/presentationml/2006/main">
+  <p:cSld>
+    <p:spTree>
+      <p:nvGrpSpPr>
+        <p:cNvPr id="1" name=""/>
+        <p:cNvGrpSpPr/>
+        <p:nvPr/>
+      </p:nvGrpSpPr>
+      <p:grpSpPr>
+        <a:xfrm>
+          <a:off x="0" y="0"/>
+          <a:ext cx="0" cy="0"/>
+          <a:chOff x="0" y="0"/>
+          <a:chExt cx="0" cy="0"/>
+        </a:xfrm>
+      </p:grpSpPr>
+      <p:sp>
+        <p:nvSpPr>
+          <p:cNvPr id="2" name="Slide Image Placeholder 1"/>
+          <p:cNvSpPr>
+            <a:spLocks noGrp="1" noRot="1" noChangeAspect="1"/>
+          </p:cNvSpPr>
+          <p:nvPr>
+            <p:ph type="sldImg"/>
+          </p:nvPr>
+        </p:nvSpPr>
+        <p:spPr/>
+      </p:sp>
+      <p:sp>
+        <p:nvSpPr>
+          <p:cNvPr id="3" name="Notes Placeholder 2"/>
+          <p:cNvSpPr>
+            <a:spLocks noGrp="1"/>
+          </p:cNvSpPr>
+          <p:nvPr>
+            <p:ph type="body" idx="1"/>
+          </p:nvPr>
+        </p:nvSpPr>
+        <p:spPr/>
+        <p:txBody>
+          <a:bodyPr/>
+          <a:lstStyle/>
+          <a:p>
+            <a:r>
+              <a:rPr lang="en-US" dirty="0"/>
+              <a:t>Leave up during questions. Stress the log: three things the agent got wrong. Anyone who writes 'it all worked fine' did not look hard enough, and it is thirty per cent of the individual mark.</a:t>
+            </a:r>
+            <a:endParaRPr lang="en-US" dirty="0"/>
+          </a:p>
+        </p:txBody>
+      </p:sp>
+      <p:sp>
+        <p:nvSpPr>
+          <p:cNvPr id="4" name="Slide Number Placeholder 3"/>
+          <p:cNvSpPr>
+            <a:spLocks noGrp="1"/>
+          </p:cNvSpPr>
+          <p:nvPr>
+            <p:ph type="sldNum" sz="quarter" idx="10"/>
+          </p:nvPr>
+        </p:nvSpPr>
+        <p:spPr/>
+        <p:txBody>
+          <a:bodyPr/>
+          <a:lstStyle/>
+          <a:p>
+            <a:fld id="{F7021451-1387-4CA6-816F-3879F97B5CBC}" type="slidenum">
+              <a:rPr lang="en-US"/>
+              <a:t>23</a:t>
             </a:fld>
             <a:endParaRPr lang="en-US"/>
           </a:p>
@@ -2019,7 +2108,7 @@
           <a:p>
             <a:r>
               <a:rPr lang="en-US" dirty="0"/>
-              <a:t>Walk the loop out loud with a concrete example: add a plot of the frequency response. Read the file, propose the edit, apply, run, read the error, go round again. The last line sets up the quota slide.</a:t>
+              <a:t>Walk the loop out loud with a concrete example: add a plot of the frequency response. Read the file, propose the edit, apply, run, read the error, go round again. The second paragraph sets up the quota slide.</a:t>
             </a:r>
             <a:endParaRPr lang="en-US" dirty="0"/>
           </a:p>
@@ -4475,407 +4564,152 @@
           </a:p>
         </p:txBody>
       </p:sp>
-      <p:sp>
-        <p:nvSpPr>
-          <p:cNvPr id="7" name="Text 5"/>
-          <p:cNvSpPr/>
-          <p:nvPr/>
-        </p:nvSpPr>
+      <p:pic>
+        <p:nvPicPr>
+          <p:cNvPr id="7" name="Image 0" descr="figures/fig-four-gates.png">    </p:cNvPr>
+          <p:cNvPicPr>
+            <a:picLocks noChangeAspect="1"/>
+          </p:cNvPicPr>
+          <p:nvPr/>
+        </p:nvPicPr>
+        <p:blipFill>
+          <a:blip r:embed="rId1"/>
+          <a:srcRect l="0" r="0" t="0" b="0"/>
+          <a:stretch/>
+        </p:blipFill>
         <p:spPr>
           <a:xfrm>
             <a:off x="558800" y="1511300"/>
-            <a:ext cx="190500" cy="317500"/>
-          </a:xfrm>
-          <a:prstGeom prst="rect">
-            <a:avLst/>
-          </a:prstGeom>
-          <a:noFill/>
-          <a:ln/>
-        </p:spPr>
-        <p:txBody>
-          <a:bodyPr wrap="square" lIns="0" tIns="0" rIns="0" bIns="0" rtlCol="0" anchor="t"/>
-          <a:lstStyle/>
-          <a:p>
-            <a:pPr algn="l" indent="0" marL="0">
-              <a:lnSpc>
-                <a:spcPct val="140000"/>
-              </a:lnSpc>
-              <a:buNone/>
-            </a:pPr>
-            <a:r>
-              <a:rPr lang="en-US" sz="1700" dirty="0">
-                <a:solidFill>
-                  <a:srgbClr val="A87A2E"/>
+            <a:ext cx="6134100" cy="4572000"/>
+          </a:xfrm>
+          <a:prstGeom prst="rect">
+            <a:avLst/>
+          </a:prstGeom>
+        </p:spPr>
+      </p:pic>
+      <p:sp>
+        <p:nvSpPr>
+          <p:cNvPr id="8" name="Text 5"/>
+          <p:cNvSpPr/>
+          <p:nvPr/>
+        </p:nvSpPr>
+        <p:spPr>
+          <a:xfrm>
+            <a:off x="7099300" y="1511300"/>
+            <a:ext cx="4533900" cy="1270000"/>
+          </a:xfrm>
+          <a:prstGeom prst="rect">
+            <a:avLst/>
+          </a:prstGeom>
+          <a:noFill/>
+          <a:ln/>
+        </p:spPr>
+        <p:txBody>
+          <a:bodyPr wrap="square" lIns="0" tIns="0" rIns="0" bIns="0" rtlCol="0" anchor="t"/>
+          <a:lstStyle/>
+          <a:p>
+            <a:pPr algn="l" indent="0" marL="0">
+              <a:lnSpc>
+                <a:spcPct val="145000"/>
+              </a:lnSpc>
+              <a:buNone/>
+            </a:pPr>
+            <a:r>
+              <a:rPr lang="en-US" sz="1600" dirty="0">
+                <a:solidFill>
+                  <a:srgbClr val="332F2A"/>
                 </a:solidFill>
                 <a:latin typeface="Libre Franklin" pitchFamily="34" charset="0"/>
                 <a:ea typeface="Libre Franklin" pitchFamily="34" charset="-122"/>
                 <a:cs typeface="Libre Franklin" pitchFamily="34" charset="-120"/>
               </a:rPr>
-              <a:t>—</a:t>
-            </a:r>
-            <a:endParaRPr lang="en-US" sz="1700" dirty="0"/>
-          </a:p>
-        </p:txBody>
-      </p:sp>
-      <p:sp>
-        <p:nvSpPr>
-          <p:cNvPr id="8" name="Text 6"/>
-          <p:cNvSpPr/>
-          <p:nvPr/>
-        </p:nvSpPr>
-        <p:spPr>
-          <a:xfrm>
-            <a:off x="927100" y="1511300"/>
-            <a:ext cx="9156700" cy="753110"/>
-          </a:xfrm>
-          <a:prstGeom prst="rect">
-            <a:avLst/>
-          </a:prstGeom>
-          <a:noFill/>
-          <a:ln/>
-        </p:spPr>
-        <p:txBody>
-          <a:bodyPr wrap="square" lIns="0" tIns="0" rIns="0" bIns="0" rtlCol="0" anchor="t"/>
-          <a:lstStyle/>
-          <a:p>
-            <a:pPr algn="l" indent="0" marL="0">
-              <a:lnSpc>
-                <a:spcPct val="145000"/>
-              </a:lnSpc>
-              <a:buNone/>
-            </a:pPr>
-            <a:r>
-              <a:rPr lang="en-US" sz="1700" b="1" dirty="0">
-                <a:solidFill>
-                  <a:srgbClr val="332F2A"/>
+              <a:t>A gate is where the agent stops and a person decides. You write the intent; the agent drafts the spec and the plan.</a:t>
+            </a:r>
+            <a:endParaRPr lang="en-US" sz="1600" dirty="0"/>
+          </a:p>
+        </p:txBody>
+      </p:sp>
+      <p:sp>
+        <p:nvSpPr>
+          <p:cNvPr id="9" name="Text 6"/>
+          <p:cNvSpPr/>
+          <p:nvPr/>
+        </p:nvSpPr>
+        <p:spPr>
+          <a:xfrm>
+            <a:off x="7099300" y="2844800"/>
+            <a:ext cx="4533900" cy="1270000"/>
+          </a:xfrm>
+          <a:prstGeom prst="rect">
+            <a:avLst/>
+          </a:prstGeom>
+          <a:noFill/>
+          <a:ln/>
+        </p:spPr>
+        <p:txBody>
+          <a:bodyPr wrap="square" lIns="0" tIns="0" rIns="0" bIns="0" rtlCol="0" anchor="t"/>
+          <a:lstStyle/>
+          <a:p>
+            <a:pPr algn="l" indent="0" marL="0">
+              <a:lnSpc>
+                <a:spcPct val="145000"/>
+              </a:lnSpc>
+              <a:buNone/>
+            </a:pPr>
+            <a:r>
+              <a:rPr lang="en-US" sz="1600" dirty="0">
+                <a:solidFill>
+                  <a:srgbClr val="77726A"/>
                 </a:solidFill>
                 <a:latin typeface="Libre Franklin" pitchFamily="34" charset="0"/>
                 <a:ea typeface="Libre Franklin" pitchFamily="34" charset="-122"/>
                 <a:cs typeface="Libre Franklin" pitchFamily="34" charset="-120"/>
               </a:rPr>
-              <a:t>Intent. </a:t>
-            </a:r>
-            <a:pPr algn="l" indent="0" marL="0">
-              <a:lnSpc>
-                <a:spcPct val="145000"/>
-              </a:lnSpc>
-              <a:buNone/>
-            </a:pPr>
-            <a:r>
-              <a:rPr lang="en-US" sz="1700" dirty="0">
-                <a:solidFill>
-                  <a:srgbClr val="332F2A"/>
-                </a:solidFill>
-                <a:latin typeface="Libre Franklin" pitchFamily="34" charset="0"/>
-                <a:ea typeface="Libre Franklin" pitchFamily="34" charset="-122"/>
-                <a:cs typeface="Libre Franklin" pitchFamily="34" charset="-120"/>
-              </a:rPr>
-              <a:t>You write one paragraph: who it is for, what problem it solves, what finished looks like.</a:t>
-            </a:r>
-            <a:endParaRPr lang="en-US" sz="1700" dirty="0"/>
-          </a:p>
-        </p:txBody>
-      </p:sp>
-      <p:sp>
-        <p:nvSpPr>
-          <p:cNvPr id="9" name="Text 7"/>
-          <p:cNvSpPr/>
-          <p:nvPr/>
-        </p:nvSpPr>
-        <p:spPr>
-          <a:xfrm>
-            <a:off x="558800" y="2391410"/>
-            <a:ext cx="190500" cy="317500"/>
-          </a:xfrm>
-          <a:prstGeom prst="rect">
-            <a:avLst/>
-          </a:prstGeom>
-          <a:noFill/>
-          <a:ln/>
-        </p:spPr>
-        <p:txBody>
-          <a:bodyPr wrap="square" lIns="0" tIns="0" rIns="0" bIns="0" rtlCol="0" anchor="t"/>
-          <a:lstStyle/>
-          <a:p>
-            <a:pPr algn="l" indent="0" marL="0">
-              <a:lnSpc>
-                <a:spcPct val="140000"/>
-              </a:lnSpc>
-              <a:buNone/>
-            </a:pPr>
-            <a:r>
-              <a:rPr lang="en-US" sz="1700" dirty="0">
-                <a:solidFill>
-                  <a:srgbClr val="A87A2E"/>
-                </a:solidFill>
-                <a:latin typeface="Libre Franklin" pitchFamily="34" charset="0"/>
-                <a:ea typeface="Libre Franklin" pitchFamily="34" charset="-122"/>
-                <a:cs typeface="Libre Franklin" pitchFamily="34" charset="-120"/>
-              </a:rPr>
-              <a:t>—</a:t>
-            </a:r>
-            <a:endParaRPr lang="en-US" sz="1700" dirty="0"/>
-          </a:p>
-        </p:txBody>
-      </p:sp>
-      <p:sp>
-        <p:nvSpPr>
-          <p:cNvPr id="10" name="Text 8"/>
-          <p:cNvSpPr/>
-          <p:nvPr/>
-        </p:nvSpPr>
-        <p:spPr>
-          <a:xfrm>
-            <a:off x="927100" y="2391410"/>
-            <a:ext cx="9156700" cy="753110"/>
-          </a:xfrm>
-          <a:prstGeom prst="rect">
-            <a:avLst/>
-          </a:prstGeom>
-          <a:noFill/>
-          <a:ln/>
-        </p:spPr>
-        <p:txBody>
-          <a:bodyPr wrap="square" lIns="0" tIns="0" rIns="0" bIns="0" rtlCol="0" anchor="t"/>
-          <a:lstStyle/>
-          <a:p>
-            <a:pPr algn="l" indent="0" marL="0">
-              <a:lnSpc>
-                <a:spcPct val="145000"/>
-              </a:lnSpc>
-              <a:buNone/>
-            </a:pPr>
-            <a:r>
-              <a:rPr lang="en-US" sz="1700" b="1" dirty="0">
-                <a:solidFill>
-                  <a:srgbClr val="332F2A"/>
-                </a:solidFill>
-                <a:latin typeface="Libre Franklin" pitchFamily="34" charset="0"/>
-                <a:ea typeface="Libre Franklin" pitchFamily="34" charset="-122"/>
-                <a:cs typeface="Libre Franklin" pitchFamily="34" charset="-120"/>
-              </a:rPr>
-              <a:t>Spec. </a:t>
-            </a:r>
-            <a:pPr algn="l" indent="0" marL="0">
-              <a:lnSpc>
-                <a:spcPct val="145000"/>
-              </a:lnSpc>
-              <a:buNone/>
-            </a:pPr>
-            <a:r>
-              <a:rPr lang="en-US" sz="1700" dirty="0">
-                <a:solidFill>
-                  <a:srgbClr val="332F2A"/>
-                </a:solidFill>
-                <a:latin typeface="Libre Franklin" pitchFamily="34" charset="0"/>
-                <a:ea typeface="Libre Franklin" pitchFamily="34" charset="-122"/>
-                <a:cs typeface="Libre Franklin" pitchFamily="34" charset="-120"/>
-              </a:rPr>
-              <a:t>The agent drafts requirements. Each needs a criterion you can check by running something.</a:t>
-            </a:r>
-            <a:endParaRPr lang="en-US" sz="1700" dirty="0"/>
-          </a:p>
-        </p:txBody>
-      </p:sp>
-      <p:sp>
-        <p:nvSpPr>
-          <p:cNvPr id="11" name="Text 9"/>
-          <p:cNvSpPr/>
-          <p:nvPr/>
-        </p:nvSpPr>
-        <p:spPr>
-          <a:xfrm>
-            <a:off x="558800" y="3271520"/>
-            <a:ext cx="190500" cy="317500"/>
-          </a:xfrm>
-          <a:prstGeom prst="rect">
-            <a:avLst/>
-          </a:prstGeom>
-          <a:noFill/>
-          <a:ln/>
-        </p:spPr>
-        <p:txBody>
-          <a:bodyPr wrap="square" lIns="0" tIns="0" rIns="0" bIns="0" rtlCol="0" anchor="t"/>
-          <a:lstStyle/>
-          <a:p>
-            <a:pPr algn="l" indent="0" marL="0">
-              <a:lnSpc>
-                <a:spcPct val="140000"/>
-              </a:lnSpc>
-              <a:buNone/>
-            </a:pPr>
-            <a:r>
-              <a:rPr lang="en-US" sz="1700" dirty="0">
-                <a:solidFill>
-                  <a:srgbClr val="A87A2E"/>
-                </a:solidFill>
-                <a:latin typeface="Libre Franklin" pitchFamily="34" charset="0"/>
-                <a:ea typeface="Libre Franklin" pitchFamily="34" charset="-122"/>
-                <a:cs typeface="Libre Franklin" pitchFamily="34" charset="-120"/>
-              </a:rPr>
-              <a:t>—</a:t>
-            </a:r>
-            <a:endParaRPr lang="en-US" sz="1700" dirty="0"/>
-          </a:p>
-        </p:txBody>
-      </p:sp>
-      <p:sp>
-        <p:nvSpPr>
-          <p:cNvPr id="12" name="Text 10"/>
-          <p:cNvSpPr/>
-          <p:nvPr/>
-        </p:nvSpPr>
-        <p:spPr>
-          <a:xfrm>
-            <a:off x="927100" y="3271520"/>
-            <a:ext cx="9156700" cy="753110"/>
-          </a:xfrm>
-          <a:prstGeom prst="rect">
-            <a:avLst/>
-          </a:prstGeom>
-          <a:noFill/>
-          <a:ln/>
-        </p:spPr>
-        <p:txBody>
-          <a:bodyPr wrap="square" lIns="0" tIns="0" rIns="0" bIns="0" rtlCol="0" anchor="t"/>
-          <a:lstStyle/>
-          <a:p>
-            <a:pPr algn="l" indent="0" marL="0">
-              <a:lnSpc>
-                <a:spcPct val="145000"/>
-              </a:lnSpc>
-              <a:buNone/>
-            </a:pPr>
-            <a:r>
-              <a:rPr lang="en-US" sz="1700" b="1" dirty="0">
-                <a:solidFill>
-                  <a:srgbClr val="332F2A"/>
-                </a:solidFill>
-                <a:latin typeface="Libre Franklin" pitchFamily="34" charset="0"/>
-                <a:ea typeface="Libre Franklin" pitchFamily="34" charset="-122"/>
-                <a:cs typeface="Libre Franklin" pitchFamily="34" charset="-120"/>
-              </a:rPr>
-              <a:t>Plan. </a:t>
-            </a:r>
-            <a:pPr algn="l" indent="0" marL="0">
-              <a:lnSpc>
-                <a:spcPct val="145000"/>
-              </a:lnSpc>
-              <a:buNone/>
-            </a:pPr>
-            <a:r>
-              <a:rPr lang="en-US" sz="1700" dirty="0">
-                <a:solidFill>
-                  <a:srgbClr val="332F2A"/>
-                </a:solidFill>
-                <a:latin typeface="Libre Franklin" pitchFamily="34" charset="0"/>
-                <a:ea typeface="Libre Franklin" pitchFamily="34" charset="-122"/>
-                <a:cs typeface="Libre Franklin" pitchFamily="34" charset="-120"/>
-              </a:rPr>
-              <a:t>The agent proposes files and a task list. One task owns one file, and no file has two owners.</a:t>
-            </a:r>
-            <a:endParaRPr lang="en-US" sz="1700" dirty="0"/>
-          </a:p>
-        </p:txBody>
-      </p:sp>
-      <p:sp>
-        <p:nvSpPr>
-          <p:cNvPr id="13" name="Text 11"/>
-          <p:cNvSpPr/>
-          <p:nvPr/>
-        </p:nvSpPr>
-        <p:spPr>
-          <a:xfrm>
-            <a:off x="558800" y="4151630"/>
-            <a:ext cx="190500" cy="317500"/>
-          </a:xfrm>
-          <a:prstGeom prst="rect">
-            <a:avLst/>
-          </a:prstGeom>
-          <a:noFill/>
-          <a:ln/>
-        </p:spPr>
-        <p:txBody>
-          <a:bodyPr wrap="square" lIns="0" tIns="0" rIns="0" bIns="0" rtlCol="0" anchor="t"/>
-          <a:lstStyle/>
-          <a:p>
-            <a:pPr algn="l" indent="0" marL="0">
-              <a:lnSpc>
-                <a:spcPct val="140000"/>
-              </a:lnSpc>
-              <a:buNone/>
-            </a:pPr>
-            <a:r>
-              <a:rPr lang="en-US" sz="1700" dirty="0">
-                <a:solidFill>
-                  <a:srgbClr val="A87A2E"/>
-                </a:solidFill>
-                <a:latin typeface="Libre Franklin" pitchFamily="34" charset="0"/>
-                <a:ea typeface="Libre Franklin" pitchFamily="34" charset="-122"/>
-                <a:cs typeface="Libre Franklin" pitchFamily="34" charset="-120"/>
-              </a:rPr>
-              <a:t>—</a:t>
-            </a:r>
-            <a:endParaRPr lang="en-US" sz="1700" dirty="0"/>
-          </a:p>
-        </p:txBody>
-      </p:sp>
-      <p:sp>
-        <p:nvSpPr>
-          <p:cNvPr id="14" name="Text 12"/>
-          <p:cNvSpPr/>
-          <p:nvPr/>
-        </p:nvSpPr>
-        <p:spPr>
-          <a:xfrm>
-            <a:off x="927100" y="4151630"/>
-            <a:ext cx="9156700" cy="753110"/>
-          </a:xfrm>
-          <a:prstGeom prst="rect">
-            <a:avLst/>
-          </a:prstGeom>
-          <a:noFill/>
-          <a:ln/>
-        </p:spPr>
-        <p:txBody>
-          <a:bodyPr wrap="square" lIns="0" tIns="0" rIns="0" bIns="0" rtlCol="0" anchor="t"/>
-          <a:lstStyle/>
-          <a:p>
-            <a:pPr algn="l" indent="0" marL="0">
-              <a:lnSpc>
-                <a:spcPct val="145000"/>
-              </a:lnSpc>
-              <a:buNone/>
-            </a:pPr>
-            <a:r>
-              <a:rPr lang="en-US" sz="1700" b="1" dirty="0">
-                <a:solidFill>
-                  <a:srgbClr val="332F2A"/>
-                </a:solidFill>
-                <a:latin typeface="Libre Franklin" pitchFamily="34" charset="0"/>
-                <a:ea typeface="Libre Franklin" pitchFamily="34" charset="-122"/>
-                <a:cs typeface="Libre Franklin" pitchFamily="34" charset="-120"/>
-              </a:rPr>
-              <a:t>Build. </a:t>
-            </a:r>
-            <a:pPr algn="l" indent="0" marL="0">
-              <a:lnSpc>
-                <a:spcPct val="145000"/>
-              </a:lnSpc>
-              <a:buNone/>
-            </a:pPr>
-            <a:r>
-              <a:rPr lang="en-US" sz="1700" dirty="0">
-                <a:solidFill>
-                  <a:srgbClr val="332F2A"/>
-                </a:solidFill>
-                <a:latin typeface="Libre Franklin" pitchFamily="34" charset="0"/>
-                <a:ea typeface="Libre Franklin" pitchFamily="34" charset="-122"/>
-                <a:cs typeface="Libre Franklin" pitchFamily="34" charset="-120"/>
-              </a:rPr>
-              <a:t>One task at a time. Tests run, you read the diff, and only then does the next task start.</a:t>
-            </a:r>
-            <a:endParaRPr lang="en-US" sz="1700" dirty="0"/>
+              <a:t>You approve each before anything moves. Build then runs one task at a time — tests pass, you read the diff, and only then does the next task start.</a:t>
+            </a:r>
+            <a:endParaRPr lang="en-US" sz="1600" dirty="0"/>
+          </a:p>
+        </p:txBody>
+      </p:sp>
+      <p:sp>
+        <p:nvSpPr>
+          <p:cNvPr id="10" name="Text 7"/>
+          <p:cNvSpPr/>
+          <p:nvPr/>
+        </p:nvSpPr>
+        <p:spPr>
+          <a:xfrm>
+            <a:off x="7099300" y="5956300"/>
+            <a:ext cx="4533900" cy="215900"/>
+          </a:xfrm>
+          <a:prstGeom prst="rect">
+            <a:avLst/>
+          </a:prstGeom>
+          <a:noFill/>
+          <a:ln/>
+        </p:spPr>
+        <p:txBody>
+          <a:bodyPr wrap="square" lIns="0" tIns="0" rIns="0" bIns="0" rtlCol="0" anchor="t"/>
+          <a:lstStyle/>
+          <a:p>
+            <a:pPr algn="l" indent="0" marL="0">
+              <a:lnSpc>
+                <a:spcPct val="145000"/>
+              </a:lnSpc>
+              <a:buNone/>
+            </a:pPr>
+            <a:r>
+              <a:rPr lang="en-US" sz="1200" dirty="0">
+                <a:solidFill>
+                  <a:srgbClr val="99948B"/>
+                </a:solidFill>
+                <a:latin typeface="IBM Plex Mono" pitchFamily="34" charset="0"/>
+                <a:ea typeface="IBM Plex Mono" pitchFamily="34" charset="-122"/>
+                <a:cs typeface="IBM Plex Mono" pitchFamily="34" charset="-120"/>
+              </a:rPr>
+              <a:t>Fig. 3 — the agent proposes, you approve</a:t>
+            </a:r>
+            <a:endParaRPr lang="en-US" sz="1200" dirty="0"/>
           </a:p>
         </p:txBody>
       </p:sp>
@@ -6808,7 +6642,7 @@
                 <a:ea typeface="Libre Franklin" pitchFamily="34" charset="-122"/>
                 <a:cs typeface="Libre Franklin" pitchFamily="34" charset="-120"/>
               </a:rPr>
-              <a:t>Your customer wrote the tests</a:t>
+              <a:t>What you are building</a:t>
             </a:r>
             <a:endParaRPr lang="en-US" sz="2800" dirty="0"/>
           </a:p>
@@ -6918,365 +6752,152 @@
           </a:p>
         </p:txBody>
       </p:sp>
-      <p:sp>
-        <p:nvSpPr>
-          <p:cNvPr id="7" name="Shape 5"/>
-          <p:cNvSpPr/>
-          <p:nvPr/>
-        </p:nvSpPr>
+      <p:pic>
+        <p:nvPicPr>
+          <p:cNvPr id="7" name="Image 0" descr="figures/fig-spectrum.png">    </p:cNvPr>
+          <p:cNvPicPr>
+            <a:picLocks noChangeAspect="1"/>
+          </p:cNvPicPr>
+          <p:nvPr/>
+        </p:nvPicPr>
+        <p:blipFill>
+          <a:blip r:embed="rId1"/>
+          <a:srcRect l="0" r="0" t="0" b="0"/>
+          <a:stretch/>
+        </p:blipFill>
         <p:spPr>
           <a:xfrm>
             <a:off x="558800" y="1511300"/>
-            <a:ext cx="6517030" cy="4572000"/>
-          </a:xfrm>
-          <a:prstGeom prst="rect">
-            <a:avLst/>
-          </a:prstGeom>
-          <a:solidFill>
-            <a:srgbClr val="F5F2EC"/>
-          </a:solidFill>
-          <a:ln w="6350">
-            <a:solidFill>
-              <a:srgbClr val="E1DED7"/>
-            </a:solidFill>
-            <a:prstDash val="solid"/>
-          </a:ln>
-        </p:spPr>
-      </p:sp>
-      <p:sp>
-        <p:nvSpPr>
-          <p:cNvPr id="8" name="Text 6"/>
-          <p:cNvSpPr/>
-          <p:nvPr/>
-        </p:nvSpPr>
-        <p:spPr>
-          <a:xfrm>
-            <a:off x="800100" y="1727200"/>
-            <a:ext cx="6034430" cy="4140200"/>
-          </a:xfrm>
-          <a:prstGeom prst="rect">
-            <a:avLst/>
-          </a:prstGeom>
-          <a:noFill/>
-          <a:ln/>
-        </p:spPr>
-        <p:txBody>
-          <a:bodyPr wrap="square" lIns="0" tIns="0" rIns="0" bIns="0" rtlCol="0" anchor="t"/>
-          <a:lstStyle/>
-          <a:p>
-            <a:pPr indent="0" marL="0">
-              <a:lnSpc>
-                <a:spcPct val="160000"/>
-              </a:lnSpc>
-              <a:buNone/>
-            </a:pPr>
-            <a:r>
-              <a:rPr lang="en-US" sz="1400" dirty="0">
+            <a:ext cx="6134100" cy="4572000"/>
+          </a:xfrm>
+          <a:prstGeom prst="rect">
+            <a:avLst/>
+          </a:prstGeom>
+        </p:spPr>
+      </p:pic>
+      <p:sp>
+        <p:nvSpPr>
+          <p:cNvPr id="8" name="Text 5"/>
+          <p:cNvSpPr/>
+          <p:nvPr/>
+        </p:nvSpPr>
+        <p:spPr>
+          <a:xfrm>
+            <a:off x="7099300" y="1511300"/>
+            <a:ext cx="4533900" cy="1270000"/>
+          </a:xfrm>
+          <a:prstGeom prst="rect">
+            <a:avLst/>
+          </a:prstGeom>
+          <a:noFill/>
+          <a:ln/>
+        </p:spPr>
+        <p:txBody>
+          <a:bodyPr wrap="square" lIns="0" tIns="0" rIns="0" bIns="0" rtlCol="0" anchor="t"/>
+          <a:lstStyle/>
+          <a:p>
+            <a:pPr algn="l" indent="0" marL="0">
+              <a:lnSpc>
+                <a:spcPct val="145000"/>
+              </a:lnSpc>
+              <a:buNone/>
+            </a:pPr>
+            <a:r>
+              <a:rPr lang="en-US" sz="1600" dirty="0">
                 <a:solidFill>
                   <a:srgbClr val="332F2A"/>
+                </a:solidFill>
+                <a:latin typeface="Libre Franklin" pitchFamily="34" charset="0"/>
+                <a:ea typeface="Libre Franklin" pitchFamily="34" charset="-122"/>
+                <a:cs typeface="Libre Franklin" pitchFamily="34" charset="-120"/>
+              </a:rPr>
+              <a:t>Two sine waves in, and a chart that finds them again: spikes at exactly the frequencies you chose, at exactly the heights you set.</a:t>
+            </a:r>
+            <a:endParaRPr lang="en-US" sz="1600" dirty="0"/>
+          </a:p>
+        </p:txBody>
+      </p:sp>
+      <p:sp>
+        <p:nvSpPr>
+          <p:cNvPr id="9" name="Text 6"/>
+          <p:cNvSpPr/>
+          <p:nvPr/>
+        </p:nvSpPr>
+        <p:spPr>
+          <a:xfrm>
+            <a:off x="7099300" y="2844800"/>
+            <a:ext cx="4533900" cy="1270000"/>
+          </a:xfrm>
+          <a:prstGeom prst="rect">
+            <a:avLst/>
+          </a:prstGeom>
+          <a:noFill/>
+          <a:ln/>
+        </p:spPr>
+        <p:txBody>
+          <a:bodyPr wrap="square" lIns="0" tIns="0" rIns="0" bIns="0" rtlCol="0" anchor="t"/>
+          <a:lstStyle/>
+          <a:p>
+            <a:pPr algn="l" indent="0" marL="0">
+              <a:lnSpc>
+                <a:spcPct val="145000"/>
+              </a:lnSpc>
+              <a:buNone/>
+            </a:pPr>
+            <a:r>
+              <a:rPr lang="en-US" sz="1600" dirty="0">
+                <a:solidFill>
+                  <a:srgbClr val="77726A"/>
+                </a:solidFill>
+                <a:latin typeface="Libre Franklin" pitchFamily="34" charset="0"/>
+                <a:ea typeface="Libre Franklin" pitchFamily="34" charset="-122"/>
+                <a:cs typeface="Libre Franklin" pitchFamily="34" charset="-120"/>
+              </a:rPr>
+              <a:t>The heights are the check. A spectrum can put every spike in the right place and still be wrong by a factor of five hundred.</a:t>
+            </a:r>
+            <a:endParaRPr lang="en-US" sz="1600" dirty="0"/>
+          </a:p>
+        </p:txBody>
+      </p:sp>
+      <p:sp>
+        <p:nvSpPr>
+          <p:cNvPr id="10" name="Text 7"/>
+          <p:cNvSpPr/>
+          <p:nvPr/>
+        </p:nvSpPr>
+        <p:spPr>
+          <a:xfrm>
+            <a:off x="7099300" y="5956300"/>
+            <a:ext cx="4533900" cy="215900"/>
+          </a:xfrm>
+          <a:prstGeom prst="rect">
+            <a:avLst/>
+          </a:prstGeom>
+          <a:noFill/>
+          <a:ln/>
+        </p:spPr>
+        <p:txBody>
+          <a:bodyPr wrap="square" lIns="0" tIns="0" rIns="0" bIns="0" rtlCol="0" anchor="t"/>
+          <a:lstStyle/>
+          <a:p>
+            <a:pPr algn="l" indent="0" marL="0">
+              <a:lnSpc>
+                <a:spcPct val="145000"/>
+              </a:lnSpc>
+              <a:buNone/>
+            </a:pPr>
+            <a:r>
+              <a:rPr lang="en-US" sz="1200" dirty="0">
+                <a:solidFill>
+                  <a:srgbClr val="99948B"/>
                 </a:solidFill>
                 <a:latin typeface="IBM Plex Mono" pitchFamily="34" charset="0"/>
                 <a:ea typeface="IBM Plex Mono" pitchFamily="34" charset="-122"/>
                 <a:cs typeface="IBM Plex Mono" pitchFamily="34" charset="-120"/>
               </a:rPr>
-              <a:t># tests/test_spectrum.py</a:t>
-            </a:r>
-            <a:endParaRPr lang="en-US" sz="1400" dirty="0"/>
-          </a:p>
-          <a:p>
-            <a:pPr indent="0" marL="0">
-              <a:lnSpc>
-                <a:spcPct val="160000"/>
-              </a:lnSpc>
-              <a:buNone/>
-            </a:pPr>
-            <a:endParaRPr lang="en-US" sz="1400" dirty="0"/>
-          </a:p>
-          <a:p>
-            <a:pPr indent="0" marL="0">
-              <a:lnSpc>
-                <a:spcPct val="160000"/>
-              </a:lnSpc>
-              <a:buNone/>
-            </a:pPr>
-            <a:r>
-              <a:rPr lang="en-US" sz="1400" dirty="0">
-                <a:solidFill>
-                  <a:srgbClr val="332F2A"/>
-                </a:solidFill>
-                <a:latin typeface="IBM Plex Mono" pitchFamily="34" charset="0"/>
-                <a:ea typeface="IBM Plex Mono" pitchFamily="34" charset="-122"/>
-                <a:cs typeface="IBM Plex Mono" pitchFamily="34" charset="-120"/>
-              </a:rPr>
-              <a:t>def test_a_one_volt_sine_shows</a:t>
-            </a:r>
-            <a:endParaRPr lang="en-US" sz="1400" dirty="0"/>
-          </a:p>
-          <a:p>
-            <a:pPr indent="0" marL="0">
-              <a:lnSpc>
-                <a:spcPct val="160000"/>
-              </a:lnSpc>
-              <a:buNone/>
-            </a:pPr>
-            <a:r>
-              <a:rPr lang="en-US" sz="1400" dirty="0">
-                <a:solidFill>
-                  <a:srgbClr val="332F2A"/>
-                </a:solidFill>
-                <a:latin typeface="IBM Plex Mono" pitchFamily="34" charset="0"/>
-                <a:ea typeface="IBM Plex Mono" pitchFamily="34" charset="-122"/>
-                <a:cs typeface="IBM Plex Mono" pitchFamily="34" charset="-120"/>
-              </a:rPr>
-              <a:t>        _an_amplitude_of_one():</a:t>
-            </a:r>
-            <a:endParaRPr lang="en-US" sz="1400" dirty="0"/>
-          </a:p>
-          <a:p>
-            <a:pPr indent="0" marL="0">
-              <a:lnSpc>
-                <a:spcPct val="160000"/>
-              </a:lnSpc>
-              <a:buNone/>
-            </a:pPr>
-            <a:r>
-              <a:rPr lang="en-US" sz="1400" dirty="0">
-                <a:solidFill>
-                  <a:srgbClr val="332F2A"/>
-                </a:solidFill>
-                <a:latin typeface="IBM Plex Mono" pitchFamily="34" charset="0"/>
-                <a:ea typeface="IBM Plex Mono" pitchFamily="34" charset="-122"/>
-                <a:cs typeface="IBM Plex Mono" pitchFamily="34" charset="-120"/>
-              </a:rPr>
-              <a:t>    _, sig = make_signal(</a:t>
-            </a:r>
-            <a:endParaRPr lang="en-US" sz="1400" dirty="0"/>
-          </a:p>
-          <a:p>
-            <a:pPr indent="0" marL="0">
-              <a:lnSpc>
-                <a:spcPct val="160000"/>
-              </a:lnSpc>
-              <a:buNone/>
-            </a:pPr>
-            <a:r>
-              <a:rPr lang="en-US" sz="1400" dirty="0">
-                <a:solidFill>
-                  <a:srgbClr val="332F2A"/>
-                </a:solidFill>
-                <a:latin typeface="IBM Plex Mono" pitchFamily="34" charset="0"/>
-                <a:ea typeface="IBM Plex Mono" pitchFamily="34" charset="-122"/>
-                <a:cs typeface="IBM Plex Mono" pitchFamily="34" charset="-120"/>
-              </a:rPr>
-              <a:t>        [(50.0, 1.0)], FS, DURATION)</a:t>
-            </a:r>
-            <a:endParaRPr lang="en-US" sz="1400" dirty="0"/>
-          </a:p>
-          <a:p>
-            <a:pPr indent="0" marL="0">
-              <a:lnSpc>
-                <a:spcPct val="160000"/>
-              </a:lnSpc>
-              <a:buNone/>
-            </a:pPr>
-            <a:r>
-              <a:rPr lang="en-US" sz="1400" dirty="0">
-                <a:solidFill>
-                  <a:srgbClr val="332F2A"/>
-                </a:solidFill>
-                <a:latin typeface="IBM Plex Mono" pitchFamily="34" charset="0"/>
-                <a:ea typeface="IBM Plex Mono" pitchFamily="34" charset="-122"/>
-                <a:cs typeface="IBM Plex Mono" pitchFamily="34" charset="-120"/>
-              </a:rPr>
-              <a:t>    f, mag = spectrum(sig, FS)</a:t>
-            </a:r>
-            <a:endParaRPr lang="en-US" sz="1400" dirty="0"/>
-          </a:p>
-          <a:p>
-            <a:pPr indent="0" marL="0">
-              <a:lnSpc>
-                <a:spcPct val="160000"/>
-              </a:lnSpc>
-              <a:buNone/>
-            </a:pPr>
-            <a:r>
-              <a:rPr lang="en-US" sz="1400" dirty="0">
-                <a:solidFill>
-                  <a:srgbClr val="332F2A"/>
-                </a:solidFill>
-                <a:latin typeface="IBM Plex Mono" pitchFamily="34" charset="0"/>
-                <a:ea typeface="IBM Plex Mono" pitchFamily="34" charset="-122"/>
-                <a:cs typeface="IBM Plex Mono" pitchFamily="34" charset="-120"/>
-              </a:rPr>
-              <a:t>    assert mag[argmax(mag)] == approx(</a:t>
-            </a:r>
-            <a:endParaRPr lang="en-US" sz="1400" dirty="0"/>
-          </a:p>
-          <a:p>
-            <a:pPr indent="0" marL="0">
-              <a:lnSpc>
-                <a:spcPct val="160000"/>
-              </a:lnSpc>
-              <a:buNone/>
-            </a:pPr>
-            <a:r>
-              <a:rPr lang="en-US" sz="1400" dirty="0">
-                <a:solidFill>
-                  <a:srgbClr val="332F2A"/>
-                </a:solidFill>
-                <a:latin typeface="IBM Plex Mono" pitchFamily="34" charset="0"/>
-                <a:ea typeface="IBM Plex Mono" pitchFamily="34" charset="-122"/>
-                <a:cs typeface="IBM Plex Mono" pitchFamily="34" charset="-120"/>
-              </a:rPr>
-              <a:t>        1.0, abs=0.001)</a:t>
-            </a:r>
-            <a:endParaRPr lang="en-US" sz="1400" dirty="0"/>
-          </a:p>
-        </p:txBody>
-      </p:sp>
-      <p:sp>
-        <p:nvSpPr>
-          <p:cNvPr id="9" name="Text 7"/>
-          <p:cNvSpPr/>
-          <p:nvPr/>
-        </p:nvSpPr>
-        <p:spPr>
-          <a:xfrm>
-            <a:off x="7431430" y="1511300"/>
-            <a:ext cx="4201770" cy="1270000"/>
-          </a:xfrm>
-          <a:prstGeom prst="rect">
-            <a:avLst/>
-          </a:prstGeom>
-          <a:noFill/>
-          <a:ln/>
-        </p:spPr>
-        <p:txBody>
-          <a:bodyPr wrap="square" lIns="0" tIns="0" rIns="0" bIns="0" rtlCol="0" anchor="t"/>
-          <a:lstStyle/>
-          <a:p>
-            <a:pPr algn="l" indent="0" marL="0">
-              <a:lnSpc>
-                <a:spcPct val="145000"/>
-              </a:lnSpc>
-              <a:buNone/>
-            </a:pPr>
-            <a:r>
-              <a:rPr lang="en-US" sz="1600" dirty="0">
-                <a:solidFill>
-                  <a:srgbClr val="332F2A"/>
-                </a:solidFill>
-                <a:latin typeface="Libre Franklin" pitchFamily="34" charset="0"/>
-                <a:ea typeface="Libre Franklin" pitchFamily="34" charset="-122"/>
-                <a:cs typeface="Libre Franklin" pitchFamily="34" charset="-120"/>
-              </a:rPr>
-              <a:t>Seven tests are already in your repository. Your app is finished when they pass.</a:t>
-            </a:r>
-            <a:endParaRPr lang="en-US" sz="1600" dirty="0"/>
-          </a:p>
-        </p:txBody>
-      </p:sp>
-      <p:sp>
-        <p:nvSpPr>
-          <p:cNvPr id="10" name="Text 8"/>
-          <p:cNvSpPr/>
-          <p:nvPr/>
-        </p:nvSpPr>
-        <p:spPr>
-          <a:xfrm>
-            <a:off x="7431430" y="2781300"/>
-            <a:ext cx="4201770" cy="1270000"/>
-          </a:xfrm>
-          <a:prstGeom prst="rect">
-            <a:avLst/>
-          </a:prstGeom>
-          <a:noFill/>
-          <a:ln/>
-        </p:spPr>
-        <p:txBody>
-          <a:bodyPr wrap="square" lIns="0" tIns="0" rIns="0" bIns="0" rtlCol="0" anchor="t"/>
-          <a:lstStyle/>
-          <a:p>
-            <a:pPr algn="l" indent="0" marL="0">
-              <a:lnSpc>
-                <a:spcPct val="145000"/>
-              </a:lnSpc>
-              <a:buNone/>
-            </a:pPr>
-            <a:r>
-              <a:rPr lang="en-US" sz="1600" dirty="0">
-                <a:solidFill>
-                  <a:srgbClr val="77726A"/>
-                </a:solidFill>
-                <a:latin typeface="Libre Franklin" pitchFamily="34" charset="0"/>
-                <a:ea typeface="Libre Franklin" pitchFamily="34" charset="-122"/>
-                <a:cs typeface="Libre Franklin" pitchFamily="34" charset="-120"/>
-              </a:rPr>
-              <a:t>Before you read them, write down in your own words how you would check the chart is right. Then compare.</a:t>
-            </a:r>
-            <a:endParaRPr lang="en-US" sz="1600" dirty="0"/>
-          </a:p>
-        </p:txBody>
-      </p:sp>
-      <p:sp>
-        <p:nvSpPr>
-          <p:cNvPr id="11" name="Shape 9"/>
-          <p:cNvSpPr/>
-          <p:nvPr/>
-        </p:nvSpPr>
-        <p:spPr>
-          <a:xfrm>
-            <a:off x="7431430" y="5384800"/>
-            <a:ext cx="12700" cy="698500"/>
-          </a:xfrm>
-          <a:prstGeom prst="rect">
-            <a:avLst/>
-          </a:prstGeom>
-          <a:solidFill>
-            <a:srgbClr val="A87A2E"/>
-          </a:solidFill>
-          <a:ln/>
-        </p:spPr>
-      </p:sp>
-      <p:sp>
-        <p:nvSpPr>
-          <p:cNvPr id="12" name="Text 10"/>
-          <p:cNvSpPr/>
-          <p:nvPr/>
-        </p:nvSpPr>
-        <p:spPr>
-          <a:xfrm>
-            <a:off x="7596530" y="5416550"/>
-            <a:ext cx="4036670" cy="698500"/>
-          </a:xfrm>
-          <a:prstGeom prst="rect">
-            <a:avLst/>
-          </a:prstGeom>
-          <a:noFill/>
-          <a:ln/>
-        </p:spPr>
-        <p:txBody>
-          <a:bodyPr wrap="square" lIns="0" tIns="0" rIns="0" bIns="0" rtlCol="0" anchor="t"/>
-          <a:lstStyle/>
-          <a:p>
-            <a:pPr algn="l" indent="0" marL="0">
-              <a:lnSpc>
-                <a:spcPct val="140000"/>
-              </a:lnSpc>
-              <a:buNone/>
-            </a:pPr>
-            <a:r>
-              <a:rPr lang="en-US" sz="1500" dirty="0">
-                <a:solidFill>
-                  <a:srgbClr val="332F2A"/>
-                </a:solidFill>
-                <a:latin typeface="Libre Franklin" pitchFamily="34" charset="0"/>
-                <a:ea typeface="Libre Franklin" pitchFamily="34" charset="-122"/>
-                <a:cs typeface="Libre Franklin" pitchFamily="34" charset="-120"/>
-              </a:rPr>
-              <a:t>A spectrum can have every peak in exactly the right place and still be wrong by a factor of five hundred.</a:t>
-            </a:r>
-            <a:endParaRPr lang="en-US" sz="1500" dirty="0"/>
+              <a:t>Fig. 4 — output of pages/2_Spectrum_Analyzer.py</a:t>
+            </a:r>
+            <a:endParaRPr lang="en-US" sz="1200" dirty="0"/>
           </a:p>
         </p:txBody>
       </p:sp>
@@ -8072,7 +7693,7 @@
                 <a:ea typeface="IBM Plex Mono" pitchFamily="34" charset="-122"/>
                 <a:cs typeface="IBM Plex Mono" pitchFamily="34" charset="-120"/>
               </a:rPr>
-              <a:t>SECTION 06</a:t>
+              <a:t>WORKSHOP 05</a:t>
             </a:r>
             <a:endParaRPr lang="en-US" sz="1200" dirty="0"/>
           </a:p>
@@ -8114,7 +7735,7 @@
                 <a:ea typeface="Libre Franklin" pitchFamily="34" charset="-122"/>
                 <a:cs typeface="Libre Franklin" pitchFamily="34" charset="-120"/>
               </a:rPr>
-              <a:t>Read the reference before you leave</a:t>
+              <a:t>Your customer wrote the tests</a:t>
             </a:r>
             <a:endParaRPr lang="en-US" sz="2800" dirty="0"/>
           </a:p>
@@ -8226,92 +7847,353 @@
       </p:sp>
       <p:sp>
         <p:nvSpPr>
-          <p:cNvPr id="7" name="Text 5"/>
+          <p:cNvPr id="7" name="Shape 5"/>
           <p:cNvSpPr/>
           <p:nvPr/>
         </p:nvSpPr>
         <p:spPr>
           <a:xfrm>
             <a:off x="558800" y="1511300"/>
-            <a:ext cx="190500" cy="317500"/>
-          </a:xfrm>
-          <a:prstGeom prst="rect">
-            <a:avLst/>
-          </a:prstGeom>
-          <a:noFill/>
-          <a:ln/>
-        </p:spPr>
-        <p:txBody>
-          <a:bodyPr wrap="square" lIns="0" tIns="0" rIns="0" bIns="0" rtlCol="0" anchor="t"/>
-          <a:lstStyle/>
-          <a:p>
-            <a:pPr algn="l" indent="0" marL="0">
-              <a:lnSpc>
-                <a:spcPct val="140000"/>
-              </a:lnSpc>
-              <a:buNone/>
-            </a:pPr>
-            <a:r>
-              <a:rPr lang="en-US" sz="1700" dirty="0">
-                <a:solidFill>
-                  <a:srgbClr val="A87A2E"/>
+            <a:ext cx="6517030" cy="4572000"/>
+          </a:xfrm>
+          <a:prstGeom prst="rect">
+            <a:avLst/>
+          </a:prstGeom>
+          <a:solidFill>
+            <a:srgbClr val="F5F2EC"/>
+          </a:solidFill>
+          <a:ln w="6350">
+            <a:solidFill>
+              <a:srgbClr val="E1DED7"/>
+            </a:solidFill>
+            <a:prstDash val="solid"/>
+          </a:ln>
+        </p:spPr>
+      </p:sp>
+      <p:sp>
+        <p:nvSpPr>
+          <p:cNvPr id="8" name="Text 6"/>
+          <p:cNvSpPr/>
+          <p:nvPr/>
+        </p:nvSpPr>
+        <p:spPr>
+          <a:xfrm>
+            <a:off x="800100" y="1727200"/>
+            <a:ext cx="6034430" cy="4140200"/>
+          </a:xfrm>
+          <a:prstGeom prst="rect">
+            <a:avLst/>
+          </a:prstGeom>
+          <a:noFill/>
+          <a:ln/>
+        </p:spPr>
+        <p:txBody>
+          <a:bodyPr wrap="square" lIns="0" tIns="0" rIns="0" bIns="0" rtlCol="0" anchor="t"/>
+          <a:lstStyle/>
+          <a:p>
+            <a:pPr indent="0" marL="0">
+              <a:lnSpc>
+                <a:spcPct val="160000"/>
+              </a:lnSpc>
+              <a:buNone/>
+            </a:pPr>
+            <a:r>
+              <a:rPr lang="en-US" sz="1400" dirty="0">
+                <a:solidFill>
+                  <a:srgbClr val="332F2A"/>
+                </a:solidFill>
+                <a:latin typeface="IBM Plex Mono" pitchFamily="34" charset="0"/>
+                <a:ea typeface="IBM Plex Mono" pitchFamily="34" charset="-122"/>
+                <a:cs typeface="IBM Plex Mono" pitchFamily="34" charset="-120"/>
+              </a:rPr>
+              <a:t># tests/test_spectrum.py</a:t>
+            </a:r>
+            <a:endParaRPr lang="en-US" sz="1400" dirty="0"/>
+          </a:p>
+          <a:p>
+            <a:pPr indent="0" marL="0">
+              <a:lnSpc>
+                <a:spcPct val="160000"/>
+              </a:lnSpc>
+              <a:buNone/>
+            </a:pPr>
+            <a:endParaRPr lang="en-US" sz="1400" dirty="0"/>
+          </a:p>
+          <a:p>
+            <a:pPr indent="0" marL="0">
+              <a:lnSpc>
+                <a:spcPct val="160000"/>
+              </a:lnSpc>
+              <a:buNone/>
+            </a:pPr>
+            <a:r>
+              <a:rPr lang="en-US" sz="1400" dirty="0">
+                <a:solidFill>
+                  <a:srgbClr val="332F2A"/>
+                </a:solidFill>
+                <a:latin typeface="IBM Plex Mono" pitchFamily="34" charset="0"/>
+                <a:ea typeface="IBM Plex Mono" pitchFamily="34" charset="-122"/>
+                <a:cs typeface="IBM Plex Mono" pitchFamily="34" charset="-120"/>
+              </a:rPr>
+              <a:t>def test_a_one_volt_sine_shows</a:t>
+            </a:r>
+            <a:endParaRPr lang="en-US" sz="1400" dirty="0"/>
+          </a:p>
+          <a:p>
+            <a:pPr indent="0" marL="0">
+              <a:lnSpc>
+                <a:spcPct val="160000"/>
+              </a:lnSpc>
+              <a:buNone/>
+            </a:pPr>
+            <a:r>
+              <a:rPr lang="en-US" sz="1400" dirty="0">
+                <a:solidFill>
+                  <a:srgbClr val="332F2A"/>
+                </a:solidFill>
+                <a:latin typeface="IBM Plex Mono" pitchFamily="34" charset="0"/>
+                <a:ea typeface="IBM Plex Mono" pitchFamily="34" charset="-122"/>
+                <a:cs typeface="IBM Plex Mono" pitchFamily="34" charset="-120"/>
+              </a:rPr>
+              <a:t>        _an_amplitude_of_one():</a:t>
+            </a:r>
+            <a:endParaRPr lang="en-US" sz="1400" dirty="0"/>
+          </a:p>
+          <a:p>
+            <a:pPr indent="0" marL="0">
+              <a:lnSpc>
+                <a:spcPct val="160000"/>
+              </a:lnSpc>
+              <a:buNone/>
+            </a:pPr>
+            <a:r>
+              <a:rPr lang="en-US" sz="1400" dirty="0">
+                <a:solidFill>
+                  <a:srgbClr val="332F2A"/>
+                </a:solidFill>
+                <a:latin typeface="IBM Plex Mono" pitchFamily="34" charset="0"/>
+                <a:ea typeface="IBM Plex Mono" pitchFamily="34" charset="-122"/>
+                <a:cs typeface="IBM Plex Mono" pitchFamily="34" charset="-120"/>
+              </a:rPr>
+              <a:t>    _, sig = make_signal(</a:t>
+            </a:r>
+            <a:endParaRPr lang="en-US" sz="1400" dirty="0"/>
+          </a:p>
+          <a:p>
+            <a:pPr indent="0" marL="0">
+              <a:lnSpc>
+                <a:spcPct val="160000"/>
+              </a:lnSpc>
+              <a:buNone/>
+            </a:pPr>
+            <a:r>
+              <a:rPr lang="en-US" sz="1400" dirty="0">
+                <a:solidFill>
+                  <a:srgbClr val="332F2A"/>
+                </a:solidFill>
+                <a:latin typeface="IBM Plex Mono" pitchFamily="34" charset="0"/>
+                <a:ea typeface="IBM Plex Mono" pitchFamily="34" charset="-122"/>
+                <a:cs typeface="IBM Plex Mono" pitchFamily="34" charset="-120"/>
+              </a:rPr>
+              <a:t>        [(50.0, 1.0)], FS, DURATION)</a:t>
+            </a:r>
+            <a:endParaRPr lang="en-US" sz="1400" dirty="0"/>
+          </a:p>
+          <a:p>
+            <a:pPr indent="0" marL="0">
+              <a:lnSpc>
+                <a:spcPct val="160000"/>
+              </a:lnSpc>
+              <a:buNone/>
+            </a:pPr>
+            <a:r>
+              <a:rPr lang="en-US" sz="1400" dirty="0">
+                <a:solidFill>
+                  <a:srgbClr val="332F2A"/>
+                </a:solidFill>
+                <a:latin typeface="IBM Plex Mono" pitchFamily="34" charset="0"/>
+                <a:ea typeface="IBM Plex Mono" pitchFamily="34" charset="-122"/>
+                <a:cs typeface="IBM Plex Mono" pitchFamily="34" charset="-120"/>
+              </a:rPr>
+              <a:t>    f, mag = spectrum(sig, FS)</a:t>
+            </a:r>
+            <a:endParaRPr lang="en-US" sz="1400" dirty="0"/>
+          </a:p>
+          <a:p>
+            <a:pPr indent="0" marL="0">
+              <a:lnSpc>
+                <a:spcPct val="160000"/>
+              </a:lnSpc>
+              <a:buNone/>
+            </a:pPr>
+            <a:r>
+              <a:rPr lang="en-US" sz="1400" dirty="0">
+                <a:solidFill>
+                  <a:srgbClr val="332F2A"/>
+                </a:solidFill>
+                <a:latin typeface="IBM Plex Mono" pitchFamily="34" charset="0"/>
+                <a:ea typeface="IBM Plex Mono" pitchFamily="34" charset="-122"/>
+                <a:cs typeface="IBM Plex Mono" pitchFamily="34" charset="-120"/>
+              </a:rPr>
+              <a:t>    assert mag[argmax(mag)] == approx(</a:t>
+            </a:r>
+            <a:endParaRPr lang="en-US" sz="1400" dirty="0"/>
+          </a:p>
+          <a:p>
+            <a:pPr indent="0" marL="0">
+              <a:lnSpc>
+                <a:spcPct val="160000"/>
+              </a:lnSpc>
+              <a:buNone/>
+            </a:pPr>
+            <a:r>
+              <a:rPr lang="en-US" sz="1400" dirty="0">
+                <a:solidFill>
+                  <a:srgbClr val="332F2A"/>
+                </a:solidFill>
+                <a:latin typeface="IBM Plex Mono" pitchFamily="34" charset="0"/>
+                <a:ea typeface="IBM Plex Mono" pitchFamily="34" charset="-122"/>
+                <a:cs typeface="IBM Plex Mono" pitchFamily="34" charset="-120"/>
+              </a:rPr>
+              <a:t>        1.0, abs=0.001)</a:t>
+            </a:r>
+            <a:endParaRPr lang="en-US" sz="1400" dirty="0"/>
+          </a:p>
+        </p:txBody>
+      </p:sp>
+      <p:sp>
+        <p:nvSpPr>
+          <p:cNvPr id="9" name="Text 7"/>
+          <p:cNvSpPr/>
+          <p:nvPr/>
+        </p:nvSpPr>
+        <p:spPr>
+          <a:xfrm>
+            <a:off x="7431430" y="1511300"/>
+            <a:ext cx="4201770" cy="1270000"/>
+          </a:xfrm>
+          <a:prstGeom prst="rect">
+            <a:avLst/>
+          </a:prstGeom>
+          <a:noFill/>
+          <a:ln/>
+        </p:spPr>
+        <p:txBody>
+          <a:bodyPr wrap="square" lIns="0" tIns="0" rIns="0" bIns="0" rtlCol="0" anchor="t"/>
+          <a:lstStyle/>
+          <a:p>
+            <a:pPr algn="l" indent="0" marL="0">
+              <a:lnSpc>
+                <a:spcPct val="145000"/>
+              </a:lnSpc>
+              <a:buNone/>
+            </a:pPr>
+            <a:r>
+              <a:rPr lang="en-US" sz="1600" dirty="0">
+                <a:solidFill>
+                  <a:srgbClr val="332F2A"/>
                 </a:solidFill>
                 <a:latin typeface="Libre Franklin" pitchFamily="34" charset="0"/>
                 <a:ea typeface="Libre Franklin" pitchFamily="34" charset="-122"/>
                 <a:cs typeface="Libre Franklin" pitchFamily="34" charset="-120"/>
               </a:rPr>
-              <a:t>—</a:t>
-            </a:r>
-            <a:endParaRPr lang="en-US" sz="1700" dirty="0"/>
-          </a:p>
-        </p:txBody>
-      </p:sp>
-      <p:sp>
-        <p:nvSpPr>
-          <p:cNvPr id="8" name="Text 6"/>
-          <p:cNvSpPr/>
-          <p:nvPr/>
-        </p:nvSpPr>
-        <p:spPr>
-          <a:xfrm>
-            <a:off x="927100" y="1511300"/>
-            <a:ext cx="9156700" cy="753110"/>
-          </a:xfrm>
-          <a:prstGeom prst="rect">
-            <a:avLst/>
-          </a:prstGeom>
-          <a:noFill/>
-          <a:ln/>
-        </p:spPr>
-        <p:txBody>
-          <a:bodyPr wrap="square" lIns="0" tIns="0" rIns="0" bIns="0" rtlCol="0" anchor="t"/>
-          <a:lstStyle/>
-          <a:p>
-            <a:pPr algn="l" indent="0" marL="0">
-              <a:lnSpc>
-                <a:spcPct val="145000"/>
-              </a:lnSpc>
-              <a:buNone/>
-            </a:pPr>
-            <a:r>
-              <a:rPr lang="en-US" sz="1700" b="1" dirty="0">
-                <a:solidFill>
-                  <a:srgbClr val="332F2A"/>
+              <a:t>Seven tests are already in your repository. Your app is finished when they pass.</a:t>
+            </a:r>
+            <a:endParaRPr lang="en-US" sz="1600" dirty="0"/>
+          </a:p>
+        </p:txBody>
+      </p:sp>
+      <p:sp>
+        <p:nvSpPr>
+          <p:cNvPr id="10" name="Text 8"/>
+          <p:cNvSpPr/>
+          <p:nvPr/>
+        </p:nvSpPr>
+        <p:spPr>
+          <a:xfrm>
+            <a:off x="7431430" y="2781300"/>
+            <a:ext cx="4201770" cy="1270000"/>
+          </a:xfrm>
+          <a:prstGeom prst="rect">
+            <a:avLst/>
+          </a:prstGeom>
+          <a:noFill/>
+          <a:ln/>
+        </p:spPr>
+        <p:txBody>
+          <a:bodyPr wrap="square" lIns="0" tIns="0" rIns="0" bIns="0" rtlCol="0" anchor="t"/>
+          <a:lstStyle/>
+          <a:p>
+            <a:pPr algn="l" indent="0" marL="0">
+              <a:lnSpc>
+                <a:spcPct val="145000"/>
+              </a:lnSpc>
+              <a:buNone/>
+            </a:pPr>
+            <a:r>
+              <a:rPr lang="en-US" sz="1600" dirty="0">
+                <a:solidFill>
+                  <a:srgbClr val="77726A"/>
                 </a:solidFill>
                 <a:latin typeface="Libre Franklin" pitchFamily="34" charset="0"/>
                 <a:ea typeface="Libre Franklin" pitchFamily="34" charset="-122"/>
                 <a:cs typeface="Libre Franklin" pitchFamily="34" charset="-120"/>
               </a:rPr>
-              <a:t>Everyone does this, </a:t>
-            </a:r>
-            <a:pPr algn="l" indent="0" marL="0">
-              <a:lnSpc>
-                <a:spcPct val="145000"/>
-              </a:lnSpc>
-              <a:buNone/>
-            </a:pPr>
-            <a:r>
-              <a:rPr lang="en-US" sz="1700" dirty="0">
+              <a:t>Before you read them, write down in your own words how you would check the chart is right. Then compare.</a:t>
+            </a:r>
+            <a:endParaRPr lang="en-US" sz="1600" dirty="0"/>
+          </a:p>
+        </p:txBody>
+      </p:sp>
+      <p:sp>
+        <p:nvSpPr>
+          <p:cNvPr id="11" name="Shape 9"/>
+          <p:cNvSpPr/>
+          <p:nvPr/>
+        </p:nvSpPr>
+        <p:spPr>
+          <a:xfrm>
+            <a:off x="7431430" y="5384800"/>
+            <a:ext cx="12700" cy="698500"/>
+          </a:xfrm>
+          <a:prstGeom prst="rect">
+            <a:avLst/>
+          </a:prstGeom>
+          <a:solidFill>
+            <a:srgbClr val="A87A2E"/>
+          </a:solidFill>
+          <a:ln/>
+        </p:spPr>
+      </p:sp>
+      <p:sp>
+        <p:nvSpPr>
+          <p:cNvPr id="12" name="Text 10"/>
+          <p:cNvSpPr/>
+          <p:nvPr/>
+        </p:nvSpPr>
+        <p:spPr>
+          <a:xfrm>
+            <a:off x="7596530" y="5416550"/>
+            <a:ext cx="4036670" cy="698500"/>
+          </a:xfrm>
+          <a:prstGeom prst="rect">
+            <a:avLst/>
+          </a:prstGeom>
+          <a:noFill/>
+          <a:ln/>
+        </p:spPr>
+        <p:txBody>
+          <a:bodyPr wrap="square" lIns="0" tIns="0" rIns="0" bIns="0" rtlCol="0" anchor="t"/>
+          <a:lstStyle/>
+          <a:p>
+            <a:pPr algn="l" indent="0" marL="0">
+              <a:lnSpc>
+                <a:spcPct val="140000"/>
+              </a:lnSpc>
+              <a:buNone/>
+            </a:pPr>
+            <a:r>
+              <a:rPr lang="en-US" sz="1500" dirty="0">
                 <a:solidFill>
                   <a:srgbClr val="332F2A"/>
                 </a:solidFill>
@@ -8319,295 +8201,9 @@
                 <a:ea typeface="Libre Franklin" pitchFamily="34" charset="-122"/>
                 <a:cs typeface="Libre Franklin" pitchFamily="34" charset="-120"/>
               </a:rPr>
-              <a:t>whether your own version works or not. The prompts are in labs/EXPLAIN.md.</a:t>
-            </a:r>
-            <a:endParaRPr lang="en-US" sz="1700" dirty="0"/>
-          </a:p>
-        </p:txBody>
-      </p:sp>
-      <p:sp>
-        <p:nvSpPr>
-          <p:cNvPr id="9" name="Text 7"/>
-          <p:cNvSpPr/>
-          <p:nvPr/>
-        </p:nvSpPr>
-        <p:spPr>
-          <a:xfrm>
-            <a:off x="558800" y="2391410"/>
-            <a:ext cx="190500" cy="317500"/>
-          </a:xfrm>
-          <a:prstGeom prst="rect">
-            <a:avLst/>
-          </a:prstGeom>
-          <a:noFill/>
-          <a:ln/>
-        </p:spPr>
-        <p:txBody>
-          <a:bodyPr wrap="square" lIns="0" tIns="0" rIns="0" bIns="0" rtlCol="0" anchor="t"/>
-          <a:lstStyle/>
-          <a:p>
-            <a:pPr algn="l" indent="0" marL="0">
-              <a:lnSpc>
-                <a:spcPct val="140000"/>
-              </a:lnSpc>
-              <a:buNone/>
-            </a:pPr>
-            <a:r>
-              <a:rPr lang="en-US" sz="1700" dirty="0">
-                <a:solidFill>
-                  <a:srgbClr val="A87A2E"/>
-                </a:solidFill>
-                <a:latin typeface="Libre Franklin" pitchFamily="34" charset="0"/>
-                <a:ea typeface="Libre Franklin" pitchFamily="34" charset="-122"/>
-                <a:cs typeface="Libre Franklin" pitchFamily="34" charset="-120"/>
-              </a:rPr>
-              <a:t>—</a:t>
-            </a:r>
-            <a:endParaRPr lang="en-US" sz="1700" dirty="0"/>
-          </a:p>
-        </p:txBody>
-      </p:sp>
-      <p:sp>
-        <p:nvSpPr>
-          <p:cNvPr id="10" name="Text 8"/>
-          <p:cNvSpPr/>
-          <p:nvPr/>
-        </p:nvSpPr>
-        <p:spPr>
-          <a:xfrm>
-            <a:off x="927100" y="2391410"/>
-            <a:ext cx="9156700" cy="753110"/>
-          </a:xfrm>
-          <a:prstGeom prst="rect">
-            <a:avLst/>
-          </a:prstGeom>
-          <a:noFill/>
-          <a:ln/>
-        </p:spPr>
-        <p:txBody>
-          <a:bodyPr wrap="square" lIns="0" tIns="0" rIns="0" bIns="0" rtlCol="0" anchor="t"/>
-          <a:lstStyle/>
-          <a:p>
-            <a:pPr algn="l" indent="0" marL="0">
-              <a:lnSpc>
-                <a:spcPct val="145000"/>
-              </a:lnSpc>
-              <a:buNone/>
-            </a:pPr>
-            <a:r>
-              <a:rPr lang="en-US" sz="1700" b="1" dirty="0">
-                <a:solidFill>
-                  <a:srgbClr val="332F2A"/>
-                </a:solidFill>
-                <a:latin typeface="Libre Franklin" pitchFamily="34" charset="0"/>
-                <a:ea typeface="Libre Franklin" pitchFamily="34" charset="-122"/>
-                <a:cs typeface="Libre Franklin" pitchFamily="34" charset="-120"/>
-              </a:rPr>
-              <a:t>Ask it to break the code. </a:t>
-            </a:r>
-            <a:pPr algn="l" indent="0" marL="0">
-              <a:lnSpc>
-                <a:spcPct val="145000"/>
-              </a:lnSpc>
-              <a:buNone/>
-            </a:pPr>
-            <a:r>
-              <a:rPr lang="en-US" sz="1700" dirty="0">
-                <a:solidFill>
-                  <a:srgbClr val="332F2A"/>
-                </a:solidFill>
-                <a:latin typeface="Libre Franklin" pitchFamily="34" charset="0"/>
-                <a:ea typeface="Libre Franklin" pitchFamily="34" charset="-122"/>
-                <a:cs typeface="Libre Franklin" pitchFamily="34" charset="-120"/>
-              </a:rPr>
-              <a:t>Change the 2/n to 1/n, run the tests, watch which two fail, then change it back.</a:t>
-            </a:r>
-            <a:endParaRPr lang="en-US" sz="1700" dirty="0"/>
-          </a:p>
-        </p:txBody>
-      </p:sp>
-      <p:sp>
-        <p:nvSpPr>
-          <p:cNvPr id="11" name="Text 9"/>
-          <p:cNvSpPr/>
-          <p:nvPr/>
-        </p:nvSpPr>
-        <p:spPr>
-          <a:xfrm>
-            <a:off x="558800" y="3271520"/>
-            <a:ext cx="190500" cy="317500"/>
-          </a:xfrm>
-          <a:prstGeom prst="rect">
-            <a:avLst/>
-          </a:prstGeom>
-          <a:noFill/>
-          <a:ln/>
-        </p:spPr>
-        <p:txBody>
-          <a:bodyPr wrap="square" lIns="0" tIns="0" rIns="0" bIns="0" rtlCol="0" anchor="t"/>
-          <a:lstStyle/>
-          <a:p>
-            <a:pPr algn="l" indent="0" marL="0">
-              <a:lnSpc>
-                <a:spcPct val="140000"/>
-              </a:lnSpc>
-              <a:buNone/>
-            </a:pPr>
-            <a:r>
-              <a:rPr lang="en-US" sz="1700" dirty="0">
-                <a:solidFill>
-                  <a:srgbClr val="A87A2E"/>
-                </a:solidFill>
-                <a:latin typeface="Libre Franklin" pitchFamily="34" charset="0"/>
-                <a:ea typeface="Libre Franklin" pitchFamily="34" charset="-122"/>
-                <a:cs typeface="Libre Franklin" pitchFamily="34" charset="-120"/>
-              </a:rPr>
-              <a:t>—</a:t>
-            </a:r>
-            <a:endParaRPr lang="en-US" sz="1700" dirty="0"/>
-          </a:p>
-        </p:txBody>
-      </p:sp>
-      <p:sp>
-        <p:nvSpPr>
-          <p:cNvPr id="12" name="Text 10"/>
-          <p:cNvSpPr/>
-          <p:nvPr/>
-        </p:nvSpPr>
-        <p:spPr>
-          <a:xfrm>
-            <a:off x="927100" y="3271520"/>
-            <a:ext cx="9156700" cy="753110"/>
-          </a:xfrm>
-          <a:prstGeom prst="rect">
-            <a:avLst/>
-          </a:prstGeom>
-          <a:noFill/>
-          <a:ln/>
-        </p:spPr>
-        <p:txBody>
-          <a:bodyPr wrap="square" lIns="0" tIns="0" rIns="0" bIns="0" rtlCol="0" anchor="t"/>
-          <a:lstStyle/>
-          <a:p>
-            <a:pPr algn="l" indent="0" marL="0">
-              <a:lnSpc>
-                <a:spcPct val="145000"/>
-              </a:lnSpc>
-              <a:buNone/>
-            </a:pPr>
-            <a:r>
-              <a:rPr lang="en-US" sz="1700" b="1" dirty="0">
-                <a:solidFill>
-                  <a:srgbClr val="332F2A"/>
-                </a:solidFill>
-                <a:latin typeface="Libre Franklin" pitchFamily="34" charset="0"/>
-                <a:ea typeface="Libre Franklin" pitchFamily="34" charset="-122"/>
-                <a:cs typeface="Libre Franklin" pitchFamily="34" charset="-120"/>
-              </a:rPr>
-              <a:t>Nothing here edits your work, </a:t>
-            </a:r>
-            <a:pPr algn="l" indent="0" marL="0">
-              <a:lnSpc>
-                <a:spcPct val="145000"/>
-              </a:lnSpc>
-              <a:buNone/>
-            </a:pPr>
-            <a:r>
-              <a:rPr lang="en-US" sz="1700" dirty="0">
-                <a:solidFill>
-                  <a:srgbClr val="332F2A"/>
-                </a:solidFill>
-                <a:latin typeface="Libre Franklin" pitchFamily="34" charset="0"/>
-                <a:ea typeface="Libre Franklin" pitchFamily="34" charset="-122"/>
-                <a:cs typeface="Libre Franklin" pitchFamily="34" charset="-120"/>
-              </a:rPr>
-              <a:t>so none of it can break your project. Explaining is the safest thing an agent does.</a:t>
-            </a:r>
-            <a:endParaRPr lang="en-US" sz="1700" dirty="0"/>
-          </a:p>
-        </p:txBody>
-      </p:sp>
-      <p:sp>
-        <p:nvSpPr>
-          <p:cNvPr id="13" name="Text 11"/>
-          <p:cNvSpPr/>
-          <p:nvPr/>
-        </p:nvSpPr>
-        <p:spPr>
-          <a:xfrm>
-            <a:off x="558800" y="4151630"/>
-            <a:ext cx="190500" cy="317500"/>
-          </a:xfrm>
-          <a:prstGeom prst="rect">
-            <a:avLst/>
-          </a:prstGeom>
-          <a:noFill/>
-          <a:ln/>
-        </p:spPr>
-        <p:txBody>
-          <a:bodyPr wrap="square" lIns="0" tIns="0" rIns="0" bIns="0" rtlCol="0" anchor="t"/>
-          <a:lstStyle/>
-          <a:p>
-            <a:pPr algn="l" indent="0" marL="0">
-              <a:lnSpc>
-                <a:spcPct val="140000"/>
-              </a:lnSpc>
-              <a:buNone/>
-            </a:pPr>
-            <a:r>
-              <a:rPr lang="en-US" sz="1700" dirty="0">
-                <a:solidFill>
-                  <a:srgbClr val="A87A2E"/>
-                </a:solidFill>
-                <a:latin typeface="Libre Franklin" pitchFamily="34" charset="0"/>
-                <a:ea typeface="Libre Franklin" pitchFamily="34" charset="-122"/>
-                <a:cs typeface="Libre Franklin" pitchFamily="34" charset="-120"/>
-              </a:rPr>
-              <a:t>—</a:t>
-            </a:r>
-            <a:endParaRPr lang="en-US" sz="1700" dirty="0"/>
-          </a:p>
-        </p:txBody>
-      </p:sp>
-      <p:sp>
-        <p:nvSpPr>
-          <p:cNvPr id="14" name="Text 12"/>
-          <p:cNvSpPr/>
-          <p:nvPr/>
-        </p:nvSpPr>
-        <p:spPr>
-          <a:xfrm>
-            <a:off x="927100" y="4151630"/>
-            <a:ext cx="9156700" cy="753110"/>
-          </a:xfrm>
-          <a:prstGeom prst="rect">
-            <a:avLst/>
-          </a:prstGeom>
-          <a:noFill/>
-          <a:ln/>
-        </p:spPr>
-        <p:txBody>
-          <a:bodyPr wrap="square" lIns="0" tIns="0" rIns="0" bIns="0" rtlCol="0" anchor="t"/>
-          <a:lstStyle/>
-          <a:p>
-            <a:pPr algn="l" indent="0" marL="0">
-              <a:lnSpc>
-                <a:spcPct val="145000"/>
-              </a:lnSpc>
-              <a:buNone/>
-            </a:pPr>
-            <a:r>
-              <a:rPr lang="en-US" sz="1700" dirty="0">
-                <a:solidFill>
-                  <a:srgbClr val="332F2A"/>
-                </a:solidFill>
-                <a:latin typeface="Libre Franklin" pitchFamily="34" charset="0"/>
-                <a:ea typeface="Libre Franklin" pitchFamily="34" charset="-122"/>
-                <a:cs typeface="Libre Franklin" pitchFamily="34" charset="-120"/>
-              </a:rPr>
-              <a:t>Reading code you did not write, with an AI explaining it, is the most common way these tools are used at work.</a:t>
-            </a:r>
-            <a:endParaRPr lang="en-US" sz="1700" dirty="0"/>
+              <a:t>A spectrum can have every peak in exactly the right place and still be wrong by a factor of five hundred.</a:t>
+            </a:r>
+            <a:endParaRPr lang="en-US" sz="1500" dirty="0"/>
           </a:p>
         </p:txBody>
       </p:sp>
@@ -8622,6 +8218,613 @@
 <file path=ppt/slides/slide21.xml><?xml version="1.0" encoding="utf-8"?>
 <p:sld xmlns:a="http://schemas.openxmlformats.org/drawingml/2006/main" xmlns:r="http://schemas.openxmlformats.org/officeDocument/2006/relationships" xmlns:p="http://schemas.openxmlformats.org/presentationml/2006/main">
   <p:cSld name="Slide 21">
+    <p:bg>
+      <p:bgPr>
+        <a:solidFill>
+          <a:srgbClr val="FCFBF8"/>
+        </a:solidFill>
+      </p:bgPr>
+    </p:bg>
+    <p:spTree>
+      <p:nvGrpSpPr>
+        <p:cNvPr id="1" name=""/>
+        <p:cNvGrpSpPr/>
+        <p:nvPr/>
+      </p:nvGrpSpPr>
+      <p:grpSpPr>
+        <a:xfrm>
+          <a:off x="0" y="0"/>
+          <a:ext cx="0" cy="0"/>
+          <a:chOff x="0" y="0"/>
+          <a:chExt cx="0" cy="0"/>
+        </a:xfrm>
+      </p:grpSpPr>
+      <p:sp>
+        <p:nvSpPr>
+          <p:cNvPr id="2" name="Text 0"/>
+          <p:cNvSpPr/>
+          <p:nvPr/>
+        </p:nvSpPr>
+        <p:spPr>
+          <a:xfrm>
+            <a:off x="558800" y="355600"/>
+            <a:ext cx="11074400" cy="215900"/>
+          </a:xfrm>
+          <a:prstGeom prst="rect">
+            <a:avLst/>
+          </a:prstGeom>
+          <a:noFill/>
+          <a:ln/>
+        </p:spPr>
+        <p:txBody>
+          <a:bodyPr wrap="square" lIns="0" tIns="0" rIns="0" bIns="0" rtlCol="0" anchor="t"/>
+          <a:lstStyle/>
+          <a:p>
+            <a:pPr algn="l" indent="0" marL="0">
+              <a:lnSpc>
+                <a:spcPct val="145000"/>
+              </a:lnSpc>
+              <a:buNone/>
+            </a:pPr>
+            <a:r>
+              <a:rPr lang="en-US" sz="1200" spc="168" kern="0" dirty="0">
+                <a:solidFill>
+                  <a:srgbClr val="77726A"/>
+                </a:solidFill>
+                <a:latin typeface="IBM Plex Mono" pitchFamily="34" charset="0"/>
+                <a:ea typeface="IBM Plex Mono" pitchFamily="34" charset="-122"/>
+                <a:cs typeface="IBM Plex Mono" pitchFamily="34" charset="-120"/>
+              </a:rPr>
+              <a:t>SECTION 06</a:t>
+            </a:r>
+            <a:endParaRPr lang="en-US" sz="1200" dirty="0"/>
+          </a:p>
+        </p:txBody>
+      </p:sp>
+      <p:sp>
+        <p:nvSpPr>
+          <p:cNvPr id="3" name="Text 1"/>
+          <p:cNvSpPr/>
+          <p:nvPr/>
+        </p:nvSpPr>
+        <p:spPr>
+          <a:xfrm>
+            <a:off x="558800" y="635000"/>
+            <a:ext cx="11074400" cy="508000"/>
+          </a:xfrm>
+          <a:prstGeom prst="rect">
+            <a:avLst/>
+          </a:prstGeom>
+          <a:noFill/>
+          <a:ln/>
+        </p:spPr>
+        <p:txBody>
+          <a:bodyPr wrap="square" lIns="0" tIns="0" rIns="0" bIns="0" rtlCol="0" anchor="t"/>
+          <a:lstStyle/>
+          <a:p>
+            <a:pPr algn="l" indent="0" marL="0">
+              <a:lnSpc>
+                <a:spcPct val="110000"/>
+              </a:lnSpc>
+              <a:buNone/>
+            </a:pPr>
+            <a:r>
+              <a:rPr lang="en-US" sz="2800" b="1" dirty="0">
+                <a:solidFill>
+                  <a:srgbClr val="332F2A"/>
+                </a:solidFill>
+                <a:latin typeface="Libre Franklin" pitchFamily="34" charset="0"/>
+                <a:ea typeface="Libre Franklin" pitchFamily="34" charset="-122"/>
+                <a:cs typeface="Libre Franklin" pitchFamily="34" charset="-120"/>
+              </a:rPr>
+              <a:t>Read the reference before you leave</a:t>
+            </a:r>
+            <a:endParaRPr lang="en-US" sz="2800" dirty="0"/>
+          </a:p>
+        </p:txBody>
+      </p:sp>
+      <p:sp>
+        <p:nvSpPr>
+          <p:cNvPr id="4" name="Shape 2"/>
+          <p:cNvSpPr/>
+          <p:nvPr/>
+        </p:nvSpPr>
+        <p:spPr>
+          <a:xfrm>
+            <a:off x="558800" y="1181100"/>
+            <a:ext cx="11074400" cy="6350"/>
+          </a:xfrm>
+          <a:prstGeom prst="rect">
+            <a:avLst/>
+          </a:prstGeom>
+          <a:solidFill>
+            <a:srgbClr val="E1DED7"/>
+          </a:solidFill>
+          <a:ln/>
+        </p:spPr>
+      </p:sp>
+      <p:sp>
+        <p:nvSpPr>
+          <p:cNvPr id="5" name="Text 3"/>
+          <p:cNvSpPr/>
+          <p:nvPr/>
+        </p:nvSpPr>
+        <p:spPr>
+          <a:xfrm>
+            <a:off x="558800" y="6337300"/>
+            <a:ext cx="9804400" cy="215900"/>
+          </a:xfrm>
+          <a:prstGeom prst="rect">
+            <a:avLst/>
+          </a:prstGeom>
+          <a:noFill/>
+          <a:ln/>
+        </p:spPr>
+        <p:txBody>
+          <a:bodyPr wrap="square" lIns="0" tIns="0" rIns="0" bIns="0" rtlCol="0" anchor="t"/>
+          <a:lstStyle/>
+          <a:p>
+            <a:pPr algn="l" indent="0" marL="0">
+              <a:lnSpc>
+                <a:spcPct val="145000"/>
+              </a:lnSpc>
+              <a:buNone/>
+            </a:pPr>
+            <a:r>
+              <a:rPr lang="en-US" sz="1200" dirty="0">
+                <a:solidFill>
+                  <a:srgbClr val="99948B"/>
+                </a:solidFill>
+                <a:latin typeface="IBM Plex Mono" pitchFamily="34" charset="0"/>
+                <a:ea typeface="IBM Plex Mono" pitchFamily="34" charset="-122"/>
+                <a:cs typeface="IBM Plex Mono" pitchFamily="34" charset="-120"/>
+              </a:rPr>
+              <a:t>AI for Software Development · Session 1</a:t>
+            </a:r>
+            <a:endParaRPr lang="en-US" sz="1200" dirty="0"/>
+          </a:p>
+        </p:txBody>
+      </p:sp>
+      <p:sp>
+        <p:nvSpPr>
+          <p:cNvPr id="6" name="Text 4"/>
+          <p:cNvSpPr/>
+          <p:nvPr/>
+        </p:nvSpPr>
+        <p:spPr>
+          <a:xfrm>
+            <a:off x="10363200" y="6337300"/>
+            <a:ext cx="1270000" cy="215900"/>
+          </a:xfrm>
+          <a:prstGeom prst="rect">
+            <a:avLst/>
+          </a:prstGeom>
+          <a:noFill/>
+          <a:ln/>
+        </p:spPr>
+        <p:txBody>
+          <a:bodyPr wrap="square" lIns="0" tIns="0" rIns="0" bIns="0" rtlCol="0" anchor="t"/>
+          <a:lstStyle/>
+          <a:p>
+            <a:pPr algn="r" indent="0" marL="0">
+              <a:lnSpc>
+                <a:spcPct val="145000"/>
+              </a:lnSpc>
+              <a:buNone/>
+            </a:pPr>
+            <a:r>
+              <a:rPr lang="en-US" sz="1200" dirty="0">
+                <a:solidFill>
+                  <a:srgbClr val="99948B"/>
+                </a:solidFill>
+                <a:latin typeface="IBM Plex Mono" pitchFamily="34" charset="0"/>
+                <a:ea typeface="IBM Plex Mono" pitchFamily="34" charset="-122"/>
+                <a:cs typeface="IBM Plex Mono" pitchFamily="34" charset="-120"/>
+              </a:rPr>
+              <a:t>21</a:t>
+            </a:r>
+            <a:endParaRPr lang="en-US" sz="1200" dirty="0"/>
+          </a:p>
+        </p:txBody>
+      </p:sp>
+      <p:sp>
+        <p:nvSpPr>
+          <p:cNvPr id="7" name="Text 5"/>
+          <p:cNvSpPr/>
+          <p:nvPr/>
+        </p:nvSpPr>
+        <p:spPr>
+          <a:xfrm>
+            <a:off x="558800" y="1511300"/>
+            <a:ext cx="190500" cy="317500"/>
+          </a:xfrm>
+          <a:prstGeom prst="rect">
+            <a:avLst/>
+          </a:prstGeom>
+          <a:noFill/>
+          <a:ln/>
+        </p:spPr>
+        <p:txBody>
+          <a:bodyPr wrap="square" lIns="0" tIns="0" rIns="0" bIns="0" rtlCol="0" anchor="t"/>
+          <a:lstStyle/>
+          <a:p>
+            <a:pPr algn="l" indent="0" marL="0">
+              <a:lnSpc>
+                <a:spcPct val="140000"/>
+              </a:lnSpc>
+              <a:buNone/>
+            </a:pPr>
+            <a:r>
+              <a:rPr lang="en-US" sz="1700" dirty="0">
+                <a:solidFill>
+                  <a:srgbClr val="A87A2E"/>
+                </a:solidFill>
+                <a:latin typeface="Libre Franklin" pitchFamily="34" charset="0"/>
+                <a:ea typeface="Libre Franklin" pitchFamily="34" charset="-122"/>
+                <a:cs typeface="Libre Franklin" pitchFamily="34" charset="-120"/>
+              </a:rPr>
+              <a:t>—</a:t>
+            </a:r>
+            <a:endParaRPr lang="en-US" sz="1700" dirty="0"/>
+          </a:p>
+        </p:txBody>
+      </p:sp>
+      <p:sp>
+        <p:nvSpPr>
+          <p:cNvPr id="8" name="Text 6"/>
+          <p:cNvSpPr/>
+          <p:nvPr/>
+        </p:nvSpPr>
+        <p:spPr>
+          <a:xfrm>
+            <a:off x="927100" y="1511300"/>
+            <a:ext cx="9156700" cy="753110"/>
+          </a:xfrm>
+          <a:prstGeom prst="rect">
+            <a:avLst/>
+          </a:prstGeom>
+          <a:noFill/>
+          <a:ln/>
+        </p:spPr>
+        <p:txBody>
+          <a:bodyPr wrap="square" lIns="0" tIns="0" rIns="0" bIns="0" rtlCol="0" anchor="t"/>
+          <a:lstStyle/>
+          <a:p>
+            <a:pPr algn="l" indent="0" marL="0">
+              <a:lnSpc>
+                <a:spcPct val="145000"/>
+              </a:lnSpc>
+              <a:buNone/>
+            </a:pPr>
+            <a:r>
+              <a:rPr lang="en-US" sz="1700" b="1" dirty="0">
+                <a:solidFill>
+                  <a:srgbClr val="332F2A"/>
+                </a:solidFill>
+                <a:latin typeface="Libre Franklin" pitchFamily="34" charset="0"/>
+                <a:ea typeface="Libre Franklin" pitchFamily="34" charset="-122"/>
+                <a:cs typeface="Libre Franklin" pitchFamily="34" charset="-120"/>
+              </a:rPr>
+              <a:t>Everyone does this, </a:t>
+            </a:r>
+            <a:pPr algn="l" indent="0" marL="0">
+              <a:lnSpc>
+                <a:spcPct val="145000"/>
+              </a:lnSpc>
+              <a:buNone/>
+            </a:pPr>
+            <a:r>
+              <a:rPr lang="en-US" sz="1700" dirty="0">
+                <a:solidFill>
+                  <a:srgbClr val="332F2A"/>
+                </a:solidFill>
+                <a:latin typeface="Libre Franklin" pitchFamily="34" charset="0"/>
+                <a:ea typeface="Libre Franklin" pitchFamily="34" charset="-122"/>
+                <a:cs typeface="Libre Franklin" pitchFamily="34" charset="-120"/>
+              </a:rPr>
+              <a:t>whether your own version works or not. The prompts are in labs/EXPLAIN.md.</a:t>
+            </a:r>
+            <a:endParaRPr lang="en-US" sz="1700" dirty="0"/>
+          </a:p>
+        </p:txBody>
+      </p:sp>
+      <p:sp>
+        <p:nvSpPr>
+          <p:cNvPr id="9" name="Text 7"/>
+          <p:cNvSpPr/>
+          <p:nvPr/>
+        </p:nvSpPr>
+        <p:spPr>
+          <a:xfrm>
+            <a:off x="558800" y="2391410"/>
+            <a:ext cx="190500" cy="317500"/>
+          </a:xfrm>
+          <a:prstGeom prst="rect">
+            <a:avLst/>
+          </a:prstGeom>
+          <a:noFill/>
+          <a:ln/>
+        </p:spPr>
+        <p:txBody>
+          <a:bodyPr wrap="square" lIns="0" tIns="0" rIns="0" bIns="0" rtlCol="0" anchor="t"/>
+          <a:lstStyle/>
+          <a:p>
+            <a:pPr algn="l" indent="0" marL="0">
+              <a:lnSpc>
+                <a:spcPct val="140000"/>
+              </a:lnSpc>
+              <a:buNone/>
+            </a:pPr>
+            <a:r>
+              <a:rPr lang="en-US" sz="1700" dirty="0">
+                <a:solidFill>
+                  <a:srgbClr val="A87A2E"/>
+                </a:solidFill>
+                <a:latin typeface="Libre Franklin" pitchFamily="34" charset="0"/>
+                <a:ea typeface="Libre Franklin" pitchFamily="34" charset="-122"/>
+                <a:cs typeface="Libre Franklin" pitchFamily="34" charset="-120"/>
+              </a:rPr>
+              <a:t>—</a:t>
+            </a:r>
+            <a:endParaRPr lang="en-US" sz="1700" dirty="0"/>
+          </a:p>
+        </p:txBody>
+      </p:sp>
+      <p:sp>
+        <p:nvSpPr>
+          <p:cNvPr id="10" name="Text 8"/>
+          <p:cNvSpPr/>
+          <p:nvPr/>
+        </p:nvSpPr>
+        <p:spPr>
+          <a:xfrm>
+            <a:off x="927100" y="2391410"/>
+            <a:ext cx="9156700" cy="753110"/>
+          </a:xfrm>
+          <a:prstGeom prst="rect">
+            <a:avLst/>
+          </a:prstGeom>
+          <a:noFill/>
+          <a:ln/>
+        </p:spPr>
+        <p:txBody>
+          <a:bodyPr wrap="square" lIns="0" tIns="0" rIns="0" bIns="0" rtlCol="0" anchor="t"/>
+          <a:lstStyle/>
+          <a:p>
+            <a:pPr algn="l" indent="0" marL="0">
+              <a:lnSpc>
+                <a:spcPct val="145000"/>
+              </a:lnSpc>
+              <a:buNone/>
+            </a:pPr>
+            <a:r>
+              <a:rPr lang="en-US" sz="1700" b="1" dirty="0">
+                <a:solidFill>
+                  <a:srgbClr val="332F2A"/>
+                </a:solidFill>
+                <a:latin typeface="Libre Franklin" pitchFamily="34" charset="0"/>
+                <a:ea typeface="Libre Franklin" pitchFamily="34" charset="-122"/>
+                <a:cs typeface="Libre Franklin" pitchFamily="34" charset="-120"/>
+              </a:rPr>
+              <a:t>Ask it to break the code. </a:t>
+            </a:r>
+            <a:pPr algn="l" indent="0" marL="0">
+              <a:lnSpc>
+                <a:spcPct val="145000"/>
+              </a:lnSpc>
+              <a:buNone/>
+            </a:pPr>
+            <a:r>
+              <a:rPr lang="en-US" sz="1700" dirty="0">
+                <a:solidFill>
+                  <a:srgbClr val="332F2A"/>
+                </a:solidFill>
+                <a:latin typeface="Libre Franklin" pitchFamily="34" charset="0"/>
+                <a:ea typeface="Libre Franklin" pitchFamily="34" charset="-122"/>
+                <a:cs typeface="Libre Franklin" pitchFamily="34" charset="-120"/>
+              </a:rPr>
+              <a:t>Change the 2/n to 1/n, run the tests, watch which two fail, then change it back.</a:t>
+            </a:r>
+            <a:endParaRPr lang="en-US" sz="1700" dirty="0"/>
+          </a:p>
+        </p:txBody>
+      </p:sp>
+      <p:sp>
+        <p:nvSpPr>
+          <p:cNvPr id="11" name="Text 9"/>
+          <p:cNvSpPr/>
+          <p:nvPr/>
+        </p:nvSpPr>
+        <p:spPr>
+          <a:xfrm>
+            <a:off x="558800" y="3271520"/>
+            <a:ext cx="190500" cy="317500"/>
+          </a:xfrm>
+          <a:prstGeom prst="rect">
+            <a:avLst/>
+          </a:prstGeom>
+          <a:noFill/>
+          <a:ln/>
+        </p:spPr>
+        <p:txBody>
+          <a:bodyPr wrap="square" lIns="0" tIns="0" rIns="0" bIns="0" rtlCol="0" anchor="t"/>
+          <a:lstStyle/>
+          <a:p>
+            <a:pPr algn="l" indent="0" marL="0">
+              <a:lnSpc>
+                <a:spcPct val="140000"/>
+              </a:lnSpc>
+              <a:buNone/>
+            </a:pPr>
+            <a:r>
+              <a:rPr lang="en-US" sz="1700" dirty="0">
+                <a:solidFill>
+                  <a:srgbClr val="A87A2E"/>
+                </a:solidFill>
+                <a:latin typeface="Libre Franklin" pitchFamily="34" charset="0"/>
+                <a:ea typeface="Libre Franklin" pitchFamily="34" charset="-122"/>
+                <a:cs typeface="Libre Franklin" pitchFamily="34" charset="-120"/>
+              </a:rPr>
+              <a:t>—</a:t>
+            </a:r>
+            <a:endParaRPr lang="en-US" sz="1700" dirty="0"/>
+          </a:p>
+        </p:txBody>
+      </p:sp>
+      <p:sp>
+        <p:nvSpPr>
+          <p:cNvPr id="12" name="Text 10"/>
+          <p:cNvSpPr/>
+          <p:nvPr/>
+        </p:nvSpPr>
+        <p:spPr>
+          <a:xfrm>
+            <a:off x="927100" y="3271520"/>
+            <a:ext cx="9156700" cy="753110"/>
+          </a:xfrm>
+          <a:prstGeom prst="rect">
+            <a:avLst/>
+          </a:prstGeom>
+          <a:noFill/>
+          <a:ln/>
+        </p:spPr>
+        <p:txBody>
+          <a:bodyPr wrap="square" lIns="0" tIns="0" rIns="0" bIns="0" rtlCol="0" anchor="t"/>
+          <a:lstStyle/>
+          <a:p>
+            <a:pPr algn="l" indent="0" marL="0">
+              <a:lnSpc>
+                <a:spcPct val="145000"/>
+              </a:lnSpc>
+              <a:buNone/>
+            </a:pPr>
+            <a:r>
+              <a:rPr lang="en-US" sz="1700" b="1" dirty="0">
+                <a:solidFill>
+                  <a:srgbClr val="332F2A"/>
+                </a:solidFill>
+                <a:latin typeface="Libre Franklin" pitchFamily="34" charset="0"/>
+                <a:ea typeface="Libre Franklin" pitchFamily="34" charset="-122"/>
+                <a:cs typeface="Libre Franklin" pitchFamily="34" charset="-120"/>
+              </a:rPr>
+              <a:t>Nothing here edits your work, </a:t>
+            </a:r>
+            <a:pPr algn="l" indent="0" marL="0">
+              <a:lnSpc>
+                <a:spcPct val="145000"/>
+              </a:lnSpc>
+              <a:buNone/>
+            </a:pPr>
+            <a:r>
+              <a:rPr lang="en-US" sz="1700" dirty="0">
+                <a:solidFill>
+                  <a:srgbClr val="332F2A"/>
+                </a:solidFill>
+                <a:latin typeface="Libre Franklin" pitchFamily="34" charset="0"/>
+                <a:ea typeface="Libre Franklin" pitchFamily="34" charset="-122"/>
+                <a:cs typeface="Libre Franklin" pitchFamily="34" charset="-120"/>
+              </a:rPr>
+              <a:t>so none of it can break your project. Explaining is the safest thing an agent does.</a:t>
+            </a:r>
+            <a:endParaRPr lang="en-US" sz="1700" dirty="0"/>
+          </a:p>
+        </p:txBody>
+      </p:sp>
+      <p:sp>
+        <p:nvSpPr>
+          <p:cNvPr id="13" name="Text 11"/>
+          <p:cNvSpPr/>
+          <p:nvPr/>
+        </p:nvSpPr>
+        <p:spPr>
+          <a:xfrm>
+            <a:off x="558800" y="4151630"/>
+            <a:ext cx="190500" cy="317500"/>
+          </a:xfrm>
+          <a:prstGeom prst="rect">
+            <a:avLst/>
+          </a:prstGeom>
+          <a:noFill/>
+          <a:ln/>
+        </p:spPr>
+        <p:txBody>
+          <a:bodyPr wrap="square" lIns="0" tIns="0" rIns="0" bIns="0" rtlCol="0" anchor="t"/>
+          <a:lstStyle/>
+          <a:p>
+            <a:pPr algn="l" indent="0" marL="0">
+              <a:lnSpc>
+                <a:spcPct val="140000"/>
+              </a:lnSpc>
+              <a:buNone/>
+            </a:pPr>
+            <a:r>
+              <a:rPr lang="en-US" sz="1700" dirty="0">
+                <a:solidFill>
+                  <a:srgbClr val="A87A2E"/>
+                </a:solidFill>
+                <a:latin typeface="Libre Franklin" pitchFamily="34" charset="0"/>
+                <a:ea typeface="Libre Franklin" pitchFamily="34" charset="-122"/>
+                <a:cs typeface="Libre Franklin" pitchFamily="34" charset="-120"/>
+              </a:rPr>
+              <a:t>—</a:t>
+            </a:r>
+            <a:endParaRPr lang="en-US" sz="1700" dirty="0"/>
+          </a:p>
+        </p:txBody>
+      </p:sp>
+      <p:sp>
+        <p:nvSpPr>
+          <p:cNvPr id="14" name="Text 12"/>
+          <p:cNvSpPr/>
+          <p:nvPr/>
+        </p:nvSpPr>
+        <p:spPr>
+          <a:xfrm>
+            <a:off x="927100" y="4151630"/>
+            <a:ext cx="9156700" cy="753110"/>
+          </a:xfrm>
+          <a:prstGeom prst="rect">
+            <a:avLst/>
+          </a:prstGeom>
+          <a:noFill/>
+          <a:ln/>
+        </p:spPr>
+        <p:txBody>
+          <a:bodyPr wrap="square" lIns="0" tIns="0" rIns="0" bIns="0" rtlCol="0" anchor="t"/>
+          <a:lstStyle/>
+          <a:p>
+            <a:pPr algn="l" indent="0" marL="0">
+              <a:lnSpc>
+                <a:spcPct val="145000"/>
+              </a:lnSpc>
+              <a:buNone/>
+            </a:pPr>
+            <a:r>
+              <a:rPr lang="en-US" sz="1700" dirty="0">
+                <a:solidFill>
+                  <a:srgbClr val="332F2A"/>
+                </a:solidFill>
+                <a:latin typeface="Libre Franklin" pitchFamily="34" charset="0"/>
+                <a:ea typeface="Libre Franklin" pitchFamily="34" charset="-122"/>
+                <a:cs typeface="Libre Franklin" pitchFamily="34" charset="-120"/>
+              </a:rPr>
+              <a:t>Reading code you did not write, with an AI explaining it, is the most common way these tools are used at work.</a:t>
+            </a:r>
+            <a:endParaRPr lang="en-US" sz="1700" dirty="0"/>
+          </a:p>
+        </p:txBody>
+      </p:sp>
+    </p:spTree>
+  </p:cSld>
+  <p:clrMapOvr>
+    <a:masterClrMapping/>
+  </p:clrMapOvr>
+</p:sld>
+</file>
+
+<file path=ppt/slides/slide22.xml><?xml version="1.0" encoding="utf-8"?>
+<p:sld xmlns:a="http://schemas.openxmlformats.org/drawingml/2006/main" xmlns:r="http://schemas.openxmlformats.org/officeDocument/2006/relationships" xmlns:p="http://schemas.openxmlformats.org/presentationml/2006/main">
+  <p:cSld name="Slide 22">
     <p:bg>
       <p:bgPr>
         <a:solidFill>
@@ -8825,7 +9028,7 @@
                 <a:ea typeface="IBM Plex Mono" pitchFamily="34" charset="-122"/>
                 <a:cs typeface="IBM Plex Mono" pitchFamily="34" charset="-120"/>
               </a:rPr>
-              <a:t>21</a:t>
+              <a:t>22</a:t>
             </a:r>
             <a:endParaRPr lang="en-US" sz="1200" dirty="0"/>
           </a:p>
@@ -9091,9 +9294,9 @@
 </p:sld>
 </file>
 
-<file path=ppt/slides/slide22.xml><?xml version="1.0" encoding="utf-8"?>
+<file path=ppt/slides/slide23.xml><?xml version="1.0" encoding="utf-8"?>
 <p:sld xmlns:a="http://schemas.openxmlformats.org/drawingml/2006/main" xmlns:r="http://schemas.openxmlformats.org/officeDocument/2006/relationships" xmlns:p="http://schemas.openxmlformats.org/presentationml/2006/main">
-  <p:cSld name="Slide 22">
+  <p:cSld name="Slide 23">
     <p:bg>
       <p:bgPr>
         <a:solidFill>
@@ -9423,7 +9626,7 @@
                 <a:ea typeface="IBM Plex Mono" pitchFamily="34" charset="-122"/>
                 <a:cs typeface="IBM Plex Mono" pitchFamily="34" charset="-120"/>
               </a:rPr>
-              <a:t>22</a:t>
+              <a:t>23</a:t>
             </a:r>
             <a:endParaRPr lang="en-US" sz="1200" dirty="0"/>
           </a:p>
@@ -9807,255 +10010,152 @@
           </a:p>
         </p:txBody>
       </p:sp>
-      <p:sp>
-        <p:nvSpPr>
-          <p:cNvPr id="7" name="Text 5"/>
-          <p:cNvSpPr/>
-          <p:nvPr/>
-        </p:nvSpPr>
+      <p:pic>
+        <p:nvPicPr>
+          <p:cNvPr id="7" name="Image 0" descr="figures/fig-harness-model.png">    </p:cNvPr>
+          <p:cNvPicPr>
+            <a:picLocks noChangeAspect="1"/>
+          </p:cNvPicPr>
+          <p:nvPr/>
+        </p:nvPicPr>
+        <p:blipFill>
+          <a:blip r:embed="rId1"/>
+          <a:srcRect l="0" r="0" t="0" b="0"/>
+          <a:stretch/>
+        </p:blipFill>
         <p:spPr>
           <a:xfrm>
             <a:off x="558800" y="1511300"/>
-            <a:ext cx="5283200" cy="254000"/>
-          </a:xfrm>
-          <a:prstGeom prst="rect">
-            <a:avLst/>
-          </a:prstGeom>
-          <a:noFill/>
-          <a:ln/>
-        </p:spPr>
-        <p:txBody>
-          <a:bodyPr wrap="square" lIns="0" tIns="0" rIns="0" bIns="0" rtlCol="0" anchor="t"/>
-          <a:lstStyle/>
-          <a:p>
-            <a:pPr algn="l" indent="0" marL="0">
-              <a:lnSpc>
-                <a:spcPct val="145000"/>
-              </a:lnSpc>
-              <a:buNone/>
-            </a:pPr>
-            <a:r>
-              <a:rPr lang="en-US" sz="1300" spc="130" kern="0" dirty="0">
-                <a:solidFill>
-                  <a:srgbClr val="A87A2E"/>
+            <a:ext cx="6134100" cy="4572000"/>
+          </a:xfrm>
+          <a:prstGeom prst="rect">
+            <a:avLst/>
+          </a:prstGeom>
+        </p:spPr>
+      </p:pic>
+      <p:sp>
+        <p:nvSpPr>
+          <p:cNvPr id="8" name="Text 5"/>
+          <p:cNvSpPr/>
+          <p:nvPr/>
+        </p:nvSpPr>
+        <p:spPr>
+          <a:xfrm>
+            <a:off x="7099300" y="1511300"/>
+            <a:ext cx="4533900" cy="1270000"/>
+          </a:xfrm>
+          <a:prstGeom prst="rect">
+            <a:avLst/>
+          </a:prstGeom>
+          <a:noFill/>
+          <a:ln/>
+        </p:spPr>
+        <p:txBody>
+          <a:bodyPr wrap="square" lIns="0" tIns="0" rIns="0" bIns="0" rtlCol="0" anchor="t"/>
+          <a:lstStyle/>
+          <a:p>
+            <a:pPr algn="l" indent="0" marL="0">
+              <a:lnSpc>
+                <a:spcPct val="145000"/>
+              </a:lnSpc>
+              <a:buNone/>
+            </a:pPr>
+            <a:r>
+              <a:rPr lang="en-US" sz="1600" dirty="0">
+                <a:solidFill>
+                  <a:srgbClr val="332F2A"/>
+                </a:solidFill>
+                <a:latin typeface="Libre Franklin" pitchFamily="34" charset="0"/>
+                <a:ea typeface="Libre Franklin" pitchFamily="34" charset="-122"/>
+                <a:cs typeface="Libre Franklin" pitchFamily="34" charset="-120"/>
+              </a:rPr>
+              <a:t>Cline is the program in your editor: it reads your files, applies the edits, runs the commands. It has no intelligence of its own — it is plumbing.</a:t>
+            </a:r>
+            <a:endParaRPr lang="en-US" sz="1600" dirty="0"/>
+          </a:p>
+        </p:txBody>
+      </p:sp>
+      <p:sp>
+        <p:nvSpPr>
+          <p:cNvPr id="9" name="Text 6"/>
+          <p:cNvSpPr/>
+          <p:nvPr/>
+        </p:nvSpPr>
+        <p:spPr>
+          <a:xfrm>
+            <a:off x="7099300" y="2844800"/>
+            <a:ext cx="4533900" cy="1270000"/>
+          </a:xfrm>
+          <a:prstGeom prst="rect">
+            <a:avLst/>
+          </a:prstGeom>
+          <a:noFill/>
+          <a:ln/>
+        </p:spPr>
+        <p:txBody>
+          <a:bodyPr wrap="square" lIns="0" tIns="0" rIns="0" bIns="0" rtlCol="0" anchor="t"/>
+          <a:lstStyle/>
+          <a:p>
+            <a:pPr algn="l" indent="0" marL="0">
+              <a:lnSpc>
+                <a:spcPct val="145000"/>
+              </a:lnSpc>
+              <a:buNone/>
+            </a:pPr>
+            <a:r>
+              <a:rPr lang="en-US" sz="1600" dirty="0">
+                <a:solidFill>
+                  <a:srgbClr val="77726A"/>
+                </a:solidFill>
+                <a:latin typeface="Libre Franklin" pitchFamily="34" charset="0"/>
+                <a:ea typeface="Libre Franklin" pitchFamily="34" charset="-122"/>
+                <a:cs typeface="Libre Franklin" pitchFamily="34" charset="-120"/>
+              </a:rPr>
+              <a:t>The model is a service somewhere else that predicts text. It never sees your disk, and you can swap it for another in three clicks.</a:t>
+            </a:r>
+            <a:endParaRPr lang="en-US" sz="1600" dirty="0"/>
+          </a:p>
+        </p:txBody>
+      </p:sp>
+      <p:sp>
+        <p:nvSpPr>
+          <p:cNvPr id="10" name="Text 7"/>
+          <p:cNvSpPr/>
+          <p:nvPr/>
+        </p:nvSpPr>
+        <p:spPr>
+          <a:xfrm>
+            <a:off x="7099300" y="5956300"/>
+            <a:ext cx="4533900" cy="215900"/>
+          </a:xfrm>
+          <a:prstGeom prst="rect">
+            <a:avLst/>
+          </a:prstGeom>
+          <a:noFill/>
+          <a:ln/>
+        </p:spPr>
+        <p:txBody>
+          <a:bodyPr wrap="square" lIns="0" tIns="0" rIns="0" bIns="0" rtlCol="0" anchor="t"/>
+          <a:lstStyle/>
+          <a:p>
+            <a:pPr algn="l" indent="0" marL="0">
+              <a:lnSpc>
+                <a:spcPct val="145000"/>
+              </a:lnSpc>
+              <a:buNone/>
+            </a:pPr>
+            <a:r>
+              <a:rPr lang="en-US" sz="1200" dirty="0">
+                <a:solidFill>
+                  <a:srgbClr val="99948B"/>
                 </a:solidFill>
                 <a:latin typeface="IBM Plex Mono" pitchFamily="34" charset="0"/>
                 <a:ea typeface="IBM Plex Mono" pitchFamily="34" charset="-122"/>
                 <a:cs typeface="IBM Plex Mono" pitchFamily="34" charset="-120"/>
               </a:rPr>
-              <a:t>HARNESS — CLINE</a:t>
-            </a:r>
-            <a:endParaRPr lang="en-US" sz="1300" dirty="0"/>
-          </a:p>
-        </p:txBody>
-      </p:sp>
-      <p:sp>
-        <p:nvSpPr>
-          <p:cNvPr id="8" name="Text 6"/>
-          <p:cNvSpPr/>
-          <p:nvPr/>
-        </p:nvSpPr>
-        <p:spPr>
-          <a:xfrm>
-            <a:off x="558800" y="1917700"/>
-            <a:ext cx="5283200" cy="1270000"/>
-          </a:xfrm>
-          <a:prstGeom prst="rect">
-            <a:avLst/>
-          </a:prstGeom>
-          <a:noFill/>
-          <a:ln/>
-        </p:spPr>
-        <p:txBody>
-          <a:bodyPr wrap="square" lIns="0" tIns="0" rIns="0" bIns="0" rtlCol="0" anchor="t"/>
-          <a:lstStyle/>
-          <a:p>
-            <a:pPr algn="l" indent="0" marL="0">
-              <a:lnSpc>
-                <a:spcPct val="145000"/>
-              </a:lnSpc>
-              <a:buNone/>
-            </a:pPr>
-            <a:r>
-              <a:rPr lang="en-US" sz="1600" dirty="0">
-                <a:solidFill>
-                  <a:srgbClr val="332F2A"/>
-                </a:solidFill>
-                <a:latin typeface="Libre Franklin" pitchFamily="34" charset="0"/>
-                <a:ea typeface="Libre Franklin" pitchFamily="34" charset="-122"/>
-                <a:cs typeface="Libre Franklin" pitchFamily="34" charset="-120"/>
-              </a:rPr>
-              <a:t>The program running inside your editor. It reads your files, decides what to send, applies the edits, and runs the commands.</a:t>
-            </a:r>
-            <a:endParaRPr lang="en-US" sz="1600" dirty="0"/>
-          </a:p>
-        </p:txBody>
-      </p:sp>
-      <p:sp>
-        <p:nvSpPr>
-          <p:cNvPr id="9" name="Text 7"/>
-          <p:cNvSpPr/>
-          <p:nvPr/>
-        </p:nvSpPr>
-        <p:spPr>
-          <a:xfrm>
-            <a:off x="558800" y="3162300"/>
-            <a:ext cx="5283200" cy="1270000"/>
-          </a:xfrm>
-          <a:prstGeom prst="rect">
-            <a:avLst/>
-          </a:prstGeom>
-          <a:noFill/>
-          <a:ln/>
-        </p:spPr>
-        <p:txBody>
-          <a:bodyPr wrap="square" lIns="0" tIns="0" rIns="0" bIns="0" rtlCol="0" anchor="t"/>
-          <a:lstStyle/>
-          <a:p>
-            <a:pPr algn="l" indent="0" marL="0">
-              <a:lnSpc>
-                <a:spcPct val="145000"/>
-              </a:lnSpc>
-              <a:buNone/>
-            </a:pPr>
-            <a:r>
-              <a:rPr lang="en-US" sz="1600" dirty="0">
-                <a:solidFill>
-                  <a:srgbClr val="77726A"/>
-                </a:solidFill>
-                <a:latin typeface="Libre Franklin" pitchFamily="34" charset="0"/>
-                <a:ea typeface="Libre Franklin" pitchFamily="34" charset="-122"/>
-                <a:cs typeface="Libre Franklin" pitchFamily="34" charset="-120"/>
-              </a:rPr>
-              <a:t>It has no intelligence of its own. It is plumbing, and plumbing is where a surprising number of failures live.</a:t>
-            </a:r>
-            <a:endParaRPr lang="en-US" sz="1600" dirty="0"/>
-          </a:p>
-        </p:txBody>
-      </p:sp>
-      <p:sp>
-        <p:nvSpPr>
-          <p:cNvPr id="10" name="Text 8"/>
-          <p:cNvSpPr/>
-          <p:nvPr/>
-        </p:nvSpPr>
-        <p:spPr>
-          <a:xfrm>
-            <a:off x="6350000" y="1511300"/>
-            <a:ext cx="5283200" cy="254000"/>
-          </a:xfrm>
-          <a:prstGeom prst="rect">
-            <a:avLst/>
-          </a:prstGeom>
-          <a:noFill/>
-          <a:ln/>
-        </p:spPr>
-        <p:txBody>
-          <a:bodyPr wrap="square" lIns="0" tIns="0" rIns="0" bIns="0" rtlCol="0" anchor="t"/>
-          <a:lstStyle/>
-          <a:p>
-            <a:pPr algn="l" indent="0" marL="0">
-              <a:lnSpc>
-                <a:spcPct val="145000"/>
-              </a:lnSpc>
-              <a:buNone/>
-            </a:pPr>
-            <a:r>
-              <a:rPr lang="en-US" sz="1300" spc="130" kern="0" dirty="0">
-                <a:solidFill>
-                  <a:srgbClr val="A87A2E"/>
-                </a:solidFill>
-                <a:latin typeface="IBM Plex Mono" pitchFamily="34" charset="0"/>
-                <a:ea typeface="IBM Plex Mono" pitchFamily="34" charset="-122"/>
-                <a:cs typeface="IBM Plex Mono" pitchFamily="34" charset="-120"/>
-              </a:rPr>
-              <a:t>MODEL — GEMINI, MISTRAL</a:t>
-            </a:r>
-            <a:endParaRPr lang="en-US" sz="1300" dirty="0"/>
-          </a:p>
-        </p:txBody>
-      </p:sp>
-      <p:sp>
-        <p:nvSpPr>
-          <p:cNvPr id="11" name="Text 9"/>
-          <p:cNvSpPr/>
-          <p:nvPr/>
-        </p:nvSpPr>
-        <p:spPr>
-          <a:xfrm>
-            <a:off x="6350000" y="1917700"/>
-            <a:ext cx="5283200" cy="1270000"/>
-          </a:xfrm>
-          <a:prstGeom prst="rect">
-            <a:avLst/>
-          </a:prstGeom>
-          <a:noFill/>
-          <a:ln/>
-        </p:spPr>
-        <p:txBody>
-          <a:bodyPr wrap="square" lIns="0" tIns="0" rIns="0" bIns="0" rtlCol="0" anchor="t"/>
-          <a:lstStyle/>
-          <a:p>
-            <a:pPr algn="l" indent="0" marL="0">
-              <a:lnSpc>
-                <a:spcPct val="145000"/>
-              </a:lnSpc>
-              <a:buNone/>
-            </a:pPr>
-            <a:r>
-              <a:rPr lang="en-US" sz="1600" dirty="0">
-                <a:solidFill>
-                  <a:srgbClr val="332F2A"/>
-                </a:solidFill>
-                <a:latin typeface="Libre Franklin" pitchFamily="34" charset="0"/>
-                <a:ea typeface="Libre Franklin" pitchFamily="34" charset="-122"/>
-                <a:cs typeface="Libre Franklin" pitchFamily="34" charset="-120"/>
-              </a:rPr>
-              <a:t>A service somewhere else that receives text and predicts what text should come next. It never sees your disk.</a:t>
-            </a:r>
-            <a:endParaRPr lang="en-US" sz="1600" dirty="0"/>
-          </a:p>
-        </p:txBody>
-      </p:sp>
-      <p:sp>
-        <p:nvSpPr>
-          <p:cNvPr id="12" name="Text 10"/>
-          <p:cNvSpPr/>
-          <p:nvPr/>
-        </p:nvSpPr>
-        <p:spPr>
-          <a:xfrm>
-            <a:off x="6350000" y="3162300"/>
-            <a:ext cx="5283200" cy="1270000"/>
-          </a:xfrm>
-          <a:prstGeom prst="rect">
-            <a:avLst/>
-          </a:prstGeom>
-          <a:noFill/>
-          <a:ln/>
-        </p:spPr>
-        <p:txBody>
-          <a:bodyPr wrap="square" lIns="0" tIns="0" rIns="0" bIns="0" rtlCol="0" anchor="t"/>
-          <a:lstStyle/>
-          <a:p>
-            <a:pPr algn="l" indent="0" marL="0">
-              <a:lnSpc>
-                <a:spcPct val="145000"/>
-              </a:lnSpc>
-              <a:buNone/>
-            </a:pPr>
-            <a:r>
-              <a:rPr lang="en-US" sz="1600" dirty="0">
-                <a:solidFill>
-                  <a:srgbClr val="77726A"/>
-                </a:solidFill>
-                <a:latin typeface="Libre Franklin" pitchFamily="34" charset="0"/>
-                <a:ea typeface="Libre Franklin" pitchFamily="34" charset="-122"/>
-                <a:cs typeface="Libre Franklin" pitchFamily="34" charset="-120"/>
-              </a:rPr>
-              <a:t>You can swap it for another in three clicks. You will do exactly that when a free allowance runs out.</a:t>
-            </a:r>
-            <a:endParaRPr lang="en-US" sz="1600" dirty="0"/>
+              <a:t>Fig. 1 — the two pieces you are driving</a:t>
+            </a:r>
+            <a:endParaRPr lang="en-US" sz="1200" dirty="0"/>
           </a:p>
         </p:txBody>
       </p:sp>
@@ -10279,390 +10379,152 @@
           </a:p>
         </p:txBody>
       </p:sp>
-      <p:sp>
-        <p:nvSpPr>
-          <p:cNvPr id="7" name="Text 5"/>
-          <p:cNvSpPr/>
-          <p:nvPr/>
-        </p:nvSpPr>
+      <p:pic>
+        <p:nvPicPr>
+          <p:cNvPr id="7" name="Image 0" descr="figures/fig-agent-loop.png">    </p:cNvPr>
+          <p:cNvPicPr>
+            <a:picLocks noChangeAspect="1"/>
+          </p:cNvPicPr>
+          <p:nvPr/>
+        </p:nvPicPr>
+        <p:blipFill>
+          <a:blip r:embed="rId1"/>
+          <a:srcRect l="0" r="0" t="0" b="0"/>
+          <a:stretch/>
+        </p:blipFill>
         <p:spPr>
           <a:xfrm>
             <a:off x="558800" y="1511300"/>
-            <a:ext cx="190500" cy="317500"/>
-          </a:xfrm>
-          <a:prstGeom prst="rect">
-            <a:avLst/>
-          </a:prstGeom>
-          <a:noFill/>
-          <a:ln/>
-        </p:spPr>
-        <p:txBody>
-          <a:bodyPr wrap="square" lIns="0" tIns="0" rIns="0" bIns="0" rtlCol="0" anchor="t"/>
-          <a:lstStyle/>
-          <a:p>
-            <a:pPr algn="l" indent="0" marL="0">
-              <a:lnSpc>
-                <a:spcPct val="140000"/>
-              </a:lnSpc>
-              <a:buNone/>
-            </a:pPr>
-            <a:r>
-              <a:rPr lang="en-US" sz="1700" dirty="0">
-                <a:solidFill>
-                  <a:srgbClr val="A87A2E"/>
+            <a:ext cx="6134100" cy="4572000"/>
+          </a:xfrm>
+          <a:prstGeom prst="rect">
+            <a:avLst/>
+          </a:prstGeom>
+        </p:spPr>
+      </p:pic>
+      <p:sp>
+        <p:nvSpPr>
+          <p:cNvPr id="8" name="Text 5"/>
+          <p:cNvSpPr/>
+          <p:nvPr/>
+        </p:nvSpPr>
+        <p:spPr>
+          <a:xfrm>
+            <a:off x="7099300" y="1511300"/>
+            <a:ext cx="4533900" cy="1270000"/>
+          </a:xfrm>
+          <a:prstGeom prst="rect">
+            <a:avLst/>
+          </a:prstGeom>
+          <a:noFill/>
+          <a:ln/>
+        </p:spPr>
+        <p:txBody>
+          <a:bodyPr wrap="square" lIns="0" tIns="0" rIns="0" bIns="0" rtlCol="0" anchor="t"/>
+          <a:lstStyle/>
+          <a:p>
+            <a:pPr algn="l" indent="0" marL="0">
+              <a:lnSpc>
+                <a:spcPct val="145000"/>
+              </a:lnSpc>
+              <a:buNone/>
+            </a:pPr>
+            <a:r>
+              <a:rPr lang="en-US" sz="1600" dirty="0">
+                <a:solidFill>
+                  <a:srgbClr val="332F2A"/>
                 </a:solidFill>
                 <a:latin typeface="Libre Franklin" pitchFamily="34" charset="0"/>
                 <a:ea typeface="Libre Franklin" pitchFamily="34" charset="-122"/>
                 <a:cs typeface="Libre Franklin" pitchFamily="34" charset="-120"/>
               </a:rPr>
-              <a:t>—</a:t>
-            </a:r>
-            <a:endParaRPr lang="en-US" sz="1700" dirty="0"/>
-          </a:p>
-        </p:txBody>
-      </p:sp>
-      <p:sp>
-        <p:nvSpPr>
-          <p:cNvPr id="8" name="Text 6"/>
-          <p:cNvSpPr/>
-          <p:nvPr/>
-        </p:nvSpPr>
-        <p:spPr>
-          <a:xfrm>
-            <a:off x="927100" y="1511300"/>
-            <a:ext cx="9156700" cy="753110"/>
-          </a:xfrm>
-          <a:prstGeom prst="rect">
-            <a:avLst/>
-          </a:prstGeom>
-          <a:noFill/>
-          <a:ln/>
-        </p:spPr>
-        <p:txBody>
-          <a:bodyPr wrap="square" lIns="0" tIns="0" rIns="0" bIns="0" rtlCol="0" anchor="t"/>
-          <a:lstStyle/>
-          <a:p>
-            <a:pPr algn="l" indent="0" marL="0">
-              <a:lnSpc>
-                <a:spcPct val="145000"/>
-              </a:lnSpc>
-              <a:buNone/>
-            </a:pPr>
-            <a:r>
-              <a:rPr lang="en-US" sz="1700" b="1" dirty="0">
-                <a:solidFill>
-                  <a:srgbClr val="332F2A"/>
+              <a:t>Read, plan, edit, run, observe — then round again. The harness drives this loop until the task is done or you stop it.</a:t>
+            </a:r>
+            <a:endParaRPr lang="en-US" sz="1600" dirty="0"/>
+          </a:p>
+        </p:txBody>
+      </p:sp>
+      <p:sp>
+        <p:nvSpPr>
+          <p:cNvPr id="9" name="Text 6"/>
+          <p:cNvSpPr/>
+          <p:nvPr/>
+        </p:nvSpPr>
+        <p:spPr>
+          <a:xfrm>
+            <a:off x="7099300" y="2844800"/>
+            <a:ext cx="4533900" cy="1270000"/>
+          </a:xfrm>
+          <a:prstGeom prst="rect">
+            <a:avLst/>
+          </a:prstGeom>
+          <a:noFill/>
+          <a:ln/>
+        </p:spPr>
+        <p:txBody>
+          <a:bodyPr wrap="square" lIns="0" tIns="0" rIns="0" bIns="0" rtlCol="0" anchor="t"/>
+          <a:lstStyle/>
+          <a:p>
+            <a:pPr algn="l" indent="0" marL="0">
+              <a:lnSpc>
+                <a:spcPct val="145000"/>
+              </a:lnSpc>
+              <a:buNone/>
+            </a:pPr>
+            <a:r>
+              <a:rPr lang="en-US" sz="1600" dirty="0">
+                <a:solidFill>
+                  <a:srgbClr val="77726A"/>
                 </a:solidFill>
                 <a:latin typeface="Libre Franklin" pitchFamily="34" charset="0"/>
                 <a:ea typeface="Libre Franklin" pitchFamily="34" charset="-122"/>
                 <a:cs typeface="Libre Franklin" pitchFamily="34" charset="-120"/>
               </a:rPr>
-              <a:t>Read. </a:t>
-            </a:r>
-            <a:pPr algn="l" indent="0" marL="0">
-              <a:lnSpc>
-                <a:spcPct val="145000"/>
-              </a:lnSpc>
-              <a:buNone/>
-            </a:pPr>
-            <a:r>
-              <a:rPr lang="en-US" sz="1700" dirty="0">
-                <a:solidFill>
-                  <a:srgbClr val="332F2A"/>
-                </a:solidFill>
-                <a:latin typeface="Libre Franklin" pitchFamily="34" charset="0"/>
-                <a:ea typeface="Libre Franklin" pitchFamily="34" charset="-122"/>
-                <a:cs typeface="Libre Franklin" pitchFamily="34" charset="-120"/>
-              </a:rPr>
-              <a:t>The harness opens the files it thinks are relevant and puts their contents into the message.</a:t>
-            </a:r>
-            <a:endParaRPr lang="en-US" sz="1700" dirty="0"/>
-          </a:p>
-        </p:txBody>
-      </p:sp>
-      <p:sp>
-        <p:nvSpPr>
-          <p:cNvPr id="9" name="Text 7"/>
-          <p:cNvSpPr/>
-          <p:nvPr/>
-        </p:nvSpPr>
-        <p:spPr>
-          <a:xfrm>
-            <a:off x="558800" y="2391410"/>
-            <a:ext cx="190500" cy="317500"/>
-          </a:xfrm>
-          <a:prstGeom prst="rect">
-            <a:avLst/>
-          </a:prstGeom>
-          <a:noFill/>
-          <a:ln/>
-        </p:spPr>
-        <p:txBody>
-          <a:bodyPr wrap="square" lIns="0" tIns="0" rIns="0" bIns="0" rtlCol="0" anchor="t"/>
-          <a:lstStyle/>
-          <a:p>
-            <a:pPr algn="l" indent="0" marL="0">
-              <a:lnSpc>
-                <a:spcPct val="140000"/>
-              </a:lnSpc>
-              <a:buNone/>
-            </a:pPr>
-            <a:r>
-              <a:rPr lang="en-US" sz="1700" dirty="0">
-                <a:solidFill>
-                  <a:srgbClr val="A87A2E"/>
-                </a:solidFill>
-                <a:latin typeface="Libre Franklin" pitchFamily="34" charset="0"/>
-                <a:ea typeface="Libre Franklin" pitchFamily="34" charset="-122"/>
-                <a:cs typeface="Libre Franklin" pitchFamily="34" charset="-120"/>
-              </a:rPr>
-              <a:t>—</a:t>
-            </a:r>
-            <a:endParaRPr lang="en-US" sz="1700" dirty="0"/>
-          </a:p>
-        </p:txBody>
-      </p:sp>
-      <p:sp>
-        <p:nvSpPr>
-          <p:cNvPr id="10" name="Text 8"/>
-          <p:cNvSpPr/>
-          <p:nvPr/>
-        </p:nvSpPr>
-        <p:spPr>
-          <a:xfrm>
-            <a:off x="927100" y="2391410"/>
-            <a:ext cx="9156700" cy="753110"/>
-          </a:xfrm>
-          <a:prstGeom prst="rect">
-            <a:avLst/>
-          </a:prstGeom>
-          <a:noFill/>
-          <a:ln/>
-        </p:spPr>
-        <p:txBody>
-          <a:bodyPr wrap="square" lIns="0" tIns="0" rIns="0" bIns="0" rtlCol="0" anchor="t"/>
-          <a:lstStyle/>
-          <a:p>
-            <a:pPr algn="l" indent="0" marL="0">
-              <a:lnSpc>
-                <a:spcPct val="145000"/>
-              </a:lnSpc>
-              <a:buNone/>
-            </a:pPr>
-            <a:r>
-              <a:rPr lang="en-US" sz="1700" b="1" dirty="0">
-                <a:solidFill>
-                  <a:srgbClr val="332F2A"/>
-                </a:solidFill>
-                <a:latin typeface="Libre Franklin" pitchFamily="34" charset="0"/>
-                <a:ea typeface="Libre Franklin" pitchFamily="34" charset="-122"/>
-                <a:cs typeface="Libre Franklin" pitchFamily="34" charset="-120"/>
-              </a:rPr>
-              <a:t>Plan and edit. </a:t>
-            </a:r>
-            <a:pPr algn="l" indent="0" marL="0">
-              <a:lnSpc>
-                <a:spcPct val="145000"/>
-              </a:lnSpc>
-              <a:buNone/>
-            </a:pPr>
-            <a:r>
-              <a:rPr lang="en-US" sz="1700" dirty="0">
-                <a:solidFill>
-                  <a:srgbClr val="332F2A"/>
-                </a:solidFill>
-                <a:latin typeface="Libre Franklin" pitchFamily="34" charset="0"/>
-                <a:ea typeface="Libre Franklin" pitchFamily="34" charset="-122"/>
-                <a:cs typeface="Libre Franklin" pitchFamily="34" charset="-120"/>
-              </a:rPr>
-              <a:t>The model replies with a change to make, and the harness writes it to disk.</a:t>
-            </a:r>
-            <a:endParaRPr lang="en-US" sz="1700" dirty="0"/>
-          </a:p>
-        </p:txBody>
-      </p:sp>
-      <p:sp>
-        <p:nvSpPr>
-          <p:cNvPr id="11" name="Text 9"/>
-          <p:cNvSpPr/>
-          <p:nvPr/>
-        </p:nvSpPr>
-        <p:spPr>
-          <a:xfrm>
-            <a:off x="558800" y="3271520"/>
-            <a:ext cx="190500" cy="317500"/>
-          </a:xfrm>
-          <a:prstGeom prst="rect">
-            <a:avLst/>
-          </a:prstGeom>
-          <a:noFill/>
-          <a:ln/>
-        </p:spPr>
-        <p:txBody>
-          <a:bodyPr wrap="square" lIns="0" tIns="0" rIns="0" bIns="0" rtlCol="0" anchor="t"/>
-          <a:lstStyle/>
-          <a:p>
-            <a:pPr algn="l" indent="0" marL="0">
-              <a:lnSpc>
-                <a:spcPct val="140000"/>
-              </a:lnSpc>
-              <a:buNone/>
-            </a:pPr>
-            <a:r>
-              <a:rPr lang="en-US" sz="1700" dirty="0">
-                <a:solidFill>
-                  <a:srgbClr val="A87A2E"/>
-                </a:solidFill>
-                <a:latin typeface="Libre Franklin" pitchFamily="34" charset="0"/>
-                <a:ea typeface="Libre Franklin" pitchFamily="34" charset="-122"/>
-                <a:cs typeface="Libre Franklin" pitchFamily="34" charset="-120"/>
-              </a:rPr>
-              <a:t>—</a:t>
-            </a:r>
-            <a:endParaRPr lang="en-US" sz="1700" dirty="0"/>
-          </a:p>
-        </p:txBody>
-      </p:sp>
-      <p:sp>
-        <p:nvSpPr>
-          <p:cNvPr id="12" name="Text 10"/>
-          <p:cNvSpPr/>
-          <p:nvPr/>
-        </p:nvSpPr>
-        <p:spPr>
-          <a:xfrm>
-            <a:off x="927100" y="3271520"/>
-            <a:ext cx="9156700" cy="753110"/>
-          </a:xfrm>
-          <a:prstGeom prst="rect">
-            <a:avLst/>
-          </a:prstGeom>
-          <a:noFill/>
-          <a:ln/>
-        </p:spPr>
-        <p:txBody>
-          <a:bodyPr wrap="square" lIns="0" tIns="0" rIns="0" bIns="0" rtlCol="0" anchor="t"/>
-          <a:lstStyle/>
-          <a:p>
-            <a:pPr algn="l" indent="0" marL="0">
-              <a:lnSpc>
-                <a:spcPct val="145000"/>
-              </a:lnSpc>
-              <a:buNone/>
-            </a:pPr>
-            <a:r>
-              <a:rPr lang="en-US" sz="1700" b="1" dirty="0">
-                <a:solidFill>
-                  <a:srgbClr val="332F2A"/>
-                </a:solidFill>
-                <a:latin typeface="Libre Franklin" pitchFamily="34" charset="0"/>
-                <a:ea typeface="Libre Franklin" pitchFamily="34" charset="-122"/>
-                <a:cs typeface="Libre Franklin" pitchFamily="34" charset="-120"/>
-              </a:rPr>
-              <a:t>Run and observe. </a:t>
-            </a:r>
-            <a:pPr algn="l" indent="0" marL="0">
-              <a:lnSpc>
-                <a:spcPct val="145000"/>
-              </a:lnSpc>
-              <a:buNone/>
-            </a:pPr>
-            <a:r>
-              <a:rPr lang="en-US" sz="1700" dirty="0">
-                <a:solidFill>
-                  <a:srgbClr val="332F2A"/>
-                </a:solidFill>
-                <a:latin typeface="Libre Franklin" pitchFamily="34" charset="0"/>
-                <a:ea typeface="Libre Franklin" pitchFamily="34" charset="-122"/>
-                <a:cs typeface="Libre Franklin" pitchFamily="34" charset="-120"/>
-              </a:rPr>
-              <a:t>The harness runs your tests, reads the output, and sends the result back.</a:t>
-            </a:r>
-            <a:endParaRPr lang="en-US" sz="1700" dirty="0"/>
-          </a:p>
-        </p:txBody>
-      </p:sp>
-      <p:sp>
-        <p:nvSpPr>
-          <p:cNvPr id="13" name="Text 11"/>
-          <p:cNvSpPr/>
-          <p:nvPr/>
-        </p:nvSpPr>
-        <p:spPr>
-          <a:xfrm>
-            <a:off x="558800" y="4151630"/>
-            <a:ext cx="190500" cy="317500"/>
-          </a:xfrm>
-          <a:prstGeom prst="rect">
-            <a:avLst/>
-          </a:prstGeom>
-          <a:noFill/>
-          <a:ln/>
-        </p:spPr>
-        <p:txBody>
-          <a:bodyPr wrap="square" lIns="0" tIns="0" rIns="0" bIns="0" rtlCol="0" anchor="t"/>
-          <a:lstStyle/>
-          <a:p>
-            <a:pPr algn="l" indent="0" marL="0">
-              <a:lnSpc>
-                <a:spcPct val="140000"/>
-              </a:lnSpc>
-              <a:buNone/>
-            </a:pPr>
-            <a:r>
-              <a:rPr lang="en-US" sz="1700" dirty="0">
-                <a:solidFill>
-                  <a:srgbClr val="A87A2E"/>
-                </a:solidFill>
-                <a:latin typeface="Libre Franklin" pitchFamily="34" charset="0"/>
-                <a:ea typeface="Libre Franklin" pitchFamily="34" charset="-122"/>
-                <a:cs typeface="Libre Franklin" pitchFamily="34" charset="-120"/>
-              </a:rPr>
-              <a:t>—</a:t>
-            </a:r>
-            <a:endParaRPr lang="en-US" sz="1700" dirty="0"/>
-          </a:p>
-        </p:txBody>
-      </p:sp>
-      <p:sp>
-        <p:nvSpPr>
-          <p:cNvPr id="14" name="Text 12"/>
-          <p:cNvSpPr/>
-          <p:nvPr/>
-        </p:nvSpPr>
-        <p:spPr>
-          <a:xfrm>
-            <a:off x="927100" y="4151630"/>
-            <a:ext cx="9156700" cy="753110"/>
-          </a:xfrm>
-          <a:prstGeom prst="rect">
-            <a:avLst/>
-          </a:prstGeom>
-          <a:noFill/>
-          <a:ln/>
-        </p:spPr>
-        <p:txBody>
-          <a:bodyPr wrap="square" lIns="0" tIns="0" rIns="0" bIns="0" rtlCol="0" anchor="t"/>
-          <a:lstStyle/>
-          <a:p>
-            <a:pPr algn="l" indent="0" marL="0">
-              <a:lnSpc>
-                <a:spcPct val="145000"/>
-              </a:lnSpc>
-              <a:buNone/>
-            </a:pPr>
-            <a:r>
-              <a:rPr lang="en-US" sz="1700" dirty="0">
-                <a:solidFill>
-                  <a:srgbClr val="332F2A"/>
-                </a:solidFill>
-                <a:latin typeface="Libre Franklin" pitchFamily="34" charset="0"/>
-                <a:ea typeface="Libre Franklin" pitchFamily="34" charset="-122"/>
-                <a:cs typeface="Libre Franklin" pitchFamily="34" charset="-120"/>
-              </a:rPr>
-              <a:t>Then it goes round again. One sentence from you becomes four to ten trips through this loop.</a:t>
-            </a:r>
-            <a:endParaRPr lang="en-US" sz="1700" dirty="0"/>
+              <a:t>One sentence from you becomes four to ten laps, and every lap re-sends everything so far. That is where your allowance goes.</a:t>
+            </a:r>
+            <a:endParaRPr lang="en-US" sz="1600" dirty="0"/>
+          </a:p>
+        </p:txBody>
+      </p:sp>
+      <p:sp>
+        <p:nvSpPr>
+          <p:cNvPr id="10" name="Text 7"/>
+          <p:cNvSpPr/>
+          <p:nvPr/>
+        </p:nvSpPr>
+        <p:spPr>
+          <a:xfrm>
+            <a:off x="7099300" y="5956300"/>
+            <a:ext cx="4533900" cy="215900"/>
+          </a:xfrm>
+          <a:prstGeom prst="rect">
+            <a:avLst/>
+          </a:prstGeom>
+          <a:noFill/>
+          <a:ln/>
+        </p:spPr>
+        <p:txBody>
+          <a:bodyPr wrap="square" lIns="0" tIns="0" rIns="0" bIns="0" rtlCol="0" anchor="t"/>
+          <a:lstStyle/>
+          <a:p>
+            <a:pPr algn="l" indent="0" marL="0">
+              <a:lnSpc>
+                <a:spcPct val="145000"/>
+              </a:lnSpc>
+              <a:buNone/>
+            </a:pPr>
+            <a:r>
+              <a:rPr lang="en-US" sz="1200" dirty="0">
+                <a:solidFill>
+                  <a:srgbClr val="99948B"/>
+                </a:solidFill>
+                <a:latin typeface="IBM Plex Mono" pitchFamily="34" charset="0"/>
+                <a:ea typeface="IBM Plex Mono" pitchFamily="34" charset="-122"/>
+                <a:cs typeface="IBM Plex Mono" pitchFamily="34" charset="-120"/>
+              </a:rPr>
+              <a:t>Fig. 2 — one instruction, many laps</a:t>
+            </a:r>
+            <a:endParaRPr lang="en-US" sz="1200" dirty="0"/>
           </a:p>
         </p:txBody>
       </p:sp>
@@ -11830,7 +11692,7 @@
                 <a:ea typeface="IBM Plex Mono" pitchFamily="34" charset="-122"/>
                 <a:cs typeface="IBM Plex Mono" pitchFamily="34" charset="-120"/>
               </a:rPr>
-              <a:t>free tier, Gemini 2.5 Flash</a:t>
+              <a:t>free tier, one Gemini Flash key</a:t>
             </a:r>
             <a:endParaRPr lang="en-US" sz="1400" dirty="0"/>
           </a:p>

--- a/slides/Session 1 - Meet Your Agent.pptx
+++ b/slides/Session 1 - Meet Your Agent.pptx
@@ -3577,7 +3577,7 @@
         <p:spPr>
           <a:xfrm>
             <a:off x="7431430" y="1511300"/>
-            <a:ext cx="4201770" cy="1270000"/>
+            <a:ext cx="4201770" cy="1010920"/>
           </a:xfrm>
           <a:prstGeom prst="rect">
             <a:avLst/>
@@ -3618,8 +3618,8 @@
         </p:nvSpPr>
         <p:spPr>
           <a:xfrm>
-            <a:off x="7431430" y="2781300"/>
-            <a:ext cx="4201770" cy="1270000"/>
+            <a:off x="7431430" y="2649220"/>
+            <a:ext cx="4201770" cy="1010920"/>
           </a:xfrm>
           <a:prstGeom prst="rect">
             <a:avLst/>
@@ -4596,7 +4596,7 @@
         <p:spPr>
           <a:xfrm>
             <a:off x="7099300" y="1511300"/>
-            <a:ext cx="4533900" cy="1270000"/>
+            <a:ext cx="4533900" cy="1010920"/>
           </a:xfrm>
           <a:prstGeom prst="rect">
             <a:avLst/>
@@ -4637,8 +4637,8 @@
         </p:nvSpPr>
         <p:spPr>
           <a:xfrm>
-            <a:off x="7099300" y="2844800"/>
-            <a:ext cx="4533900" cy="1270000"/>
+            <a:off x="7099300" y="2649220"/>
+            <a:ext cx="4533900" cy="1305560"/>
           </a:xfrm>
           <a:prstGeom prst="rect">
             <a:avLst/>
@@ -5158,7 +5158,7 @@
         <p:spPr>
           <a:xfrm>
             <a:off x="7431430" y="1511300"/>
-            <a:ext cx="4201770" cy="1270000"/>
+            <a:ext cx="4201770" cy="1010920"/>
           </a:xfrm>
           <a:prstGeom prst="rect">
             <a:avLst/>
@@ -5199,8 +5199,8 @@
         </p:nvSpPr>
         <p:spPr>
           <a:xfrm>
-            <a:off x="7431430" y="2781300"/>
-            <a:ext cx="4201770" cy="1270000"/>
+            <a:off x="7431430" y="2649220"/>
+            <a:ext cx="4201770" cy="1010920"/>
           </a:xfrm>
           <a:prstGeom prst="rect">
             <a:avLst/>
@@ -6784,7 +6784,7 @@
         <p:spPr>
           <a:xfrm>
             <a:off x="7099300" y="1511300"/>
-            <a:ext cx="4533900" cy="1270000"/>
+            <a:ext cx="4533900" cy="1305560"/>
           </a:xfrm>
           <a:prstGeom prst="rect">
             <a:avLst/>
@@ -6825,8 +6825,8 @@
         </p:nvSpPr>
         <p:spPr>
           <a:xfrm>
-            <a:off x="7099300" y="2844800"/>
-            <a:ext cx="4533900" cy="1270000"/>
+            <a:off x="7099300" y="2943860"/>
+            <a:ext cx="4533900" cy="1305560"/>
           </a:xfrm>
           <a:prstGeom prst="rect">
             <a:avLst/>
@@ -8070,7 +8070,7 @@
         <p:spPr>
           <a:xfrm>
             <a:off x="7431430" y="1511300"/>
-            <a:ext cx="4201770" cy="1270000"/>
+            <a:ext cx="4201770" cy="1010920"/>
           </a:xfrm>
           <a:prstGeom prst="rect">
             <a:avLst/>
@@ -8111,8 +8111,8 @@
         </p:nvSpPr>
         <p:spPr>
           <a:xfrm>
-            <a:off x="7431430" y="2781300"/>
-            <a:ext cx="4201770" cy="1270000"/>
+            <a:off x="7431430" y="2649220"/>
+            <a:ext cx="4201770" cy="1305560"/>
           </a:xfrm>
           <a:prstGeom prst="rect">
             <a:avLst/>
@@ -10042,7 +10042,7 @@
         <p:spPr>
           <a:xfrm>
             <a:off x="7099300" y="1511300"/>
-            <a:ext cx="4533900" cy="1270000"/>
+            <a:ext cx="4533900" cy="1305560"/>
           </a:xfrm>
           <a:prstGeom prst="rect">
             <a:avLst/>
@@ -10083,8 +10083,8 @@
         </p:nvSpPr>
         <p:spPr>
           <a:xfrm>
-            <a:off x="7099300" y="2844800"/>
-            <a:ext cx="4533900" cy="1270000"/>
+            <a:off x="7099300" y="2943860"/>
+            <a:ext cx="4533900" cy="1305560"/>
           </a:xfrm>
           <a:prstGeom prst="rect">
             <a:avLst/>
@@ -10411,7 +10411,7 @@
         <p:spPr>
           <a:xfrm>
             <a:off x="7099300" y="1511300"/>
-            <a:ext cx="4533900" cy="1270000"/>
+            <a:ext cx="4533900" cy="1010920"/>
           </a:xfrm>
           <a:prstGeom prst="rect">
             <a:avLst/>
@@ -10452,8 +10452,8 @@
         </p:nvSpPr>
         <p:spPr>
           <a:xfrm>
-            <a:off x="7099300" y="2844800"/>
-            <a:ext cx="4533900" cy="1270000"/>
+            <a:off x="7099300" y="2649220"/>
+            <a:ext cx="4533900" cy="1305560"/>
           </a:xfrm>
           <a:prstGeom prst="rect">
             <a:avLst/>
@@ -11747,7 +11747,7 @@
         <p:spPr>
           <a:xfrm>
             <a:off x="7431430" y="1511300"/>
-            <a:ext cx="4201770" cy="1270000"/>
+            <a:ext cx="4201770" cy="1010920"/>
           </a:xfrm>
           <a:prstGeom prst="rect">
             <a:avLst/>
@@ -11788,8 +11788,8 @@
         </p:nvSpPr>
         <p:spPr>
           <a:xfrm>
-            <a:off x="7431430" y="2781300"/>
-            <a:ext cx="4201770" cy="1270000"/>
+            <a:off x="7431430" y="2649220"/>
+            <a:ext cx="4201770" cy="1305560"/>
           </a:xfrm>
           <a:prstGeom prst="rect">
             <a:avLst/>

--- a/slides/Session 1 - Meet Your Agent.pptx
+++ b/slides/Session 1 - Meet Your Agent.pptx
@@ -9411,7 +9411,7 @@
         <p:spPr>
           <a:xfrm>
             <a:off x="6350000" y="3556000"/>
-            <a:ext cx="5283200" cy="381000"/>
+            <a:ext cx="5283200" cy="396240"/>
           </a:xfrm>
           <a:prstGeom prst="rect">
             <a:avLst/>
@@ -9453,7 +9453,7 @@
         <p:spPr>
           <a:xfrm>
             <a:off x="6350000" y="3975100"/>
-            <a:ext cx="5283200" cy="381000"/>
+            <a:ext cx="5283200" cy="396240"/>
           </a:xfrm>
           <a:prstGeom prst="rect">
             <a:avLst/>

--- a/slides/Session 1 - Meet Your Agent.pptx
+++ b/slides/Session 1 - Meet Your Agent.pptx
@@ -6355,7 +6355,7 @@
                 <a:ea typeface="IBM Plex Mono" pitchFamily="34" charset="-122"/>
                 <a:cs typeface="IBM Plex Mono" pitchFamily="34" charset="-120"/>
               </a:rPr>
-              <a:t>Build me a spectrum analyser</a:t>
+              <a:t>Build me a spectrum analyser in</a:t>
             </a:r>
             <a:endParaRPr lang="en-US" sz="1400" dirty="0"/>
           </a:p>
@@ -6375,7 +6375,7 @@
                 <a:ea typeface="IBM Plex Mono" pitchFamily="34" charset="-122"/>
                 <a:cs typeface="IBM Plex Mono" pitchFamily="34" charset="-120"/>
               </a:rPr>
-              <a:t>in Streamlit that adds two</a:t>
+              <a:t>Streamlit. I set two sine waves</a:t>
             </a:r>
             <a:endParaRPr lang="en-US" sz="1400" dirty="0"/>
           </a:p>
@@ -6395,7 +6395,7 @@
                 <a:ea typeface="IBM Plex Mono" pitchFamily="34" charset="-122"/>
                 <a:cs typeface="IBM Plex Mono" pitchFamily="34" charset="-120"/>
               </a:rPr>
-              <a:t>sine waves together and plots</a:t>
+              <a:t>- a frequency and an amplitude</a:t>
             </a:r>
             <a:endParaRPr lang="en-US" sz="1400" dirty="0"/>
           </a:p>
@@ -6415,7 +6415,67 @@
                 <a:ea typeface="IBM Plex Mono" pitchFamily="34" charset="-122"/>
                 <a:cs typeface="IBM Plex Mono" pitchFamily="34" charset="-120"/>
               </a:rPr>
-              <a:t>the frequency spectrum.</a:t>
+              <a:t>for each - and it adds them</a:t>
+            </a:r>
+            <a:endParaRPr lang="en-US" sz="1400" dirty="0"/>
+          </a:p>
+          <a:p>
+            <a:pPr indent="0" marL="0">
+              <a:lnSpc>
+                <a:spcPct val="160000"/>
+              </a:lnSpc>
+              <a:buNone/>
+            </a:pPr>
+            <a:r>
+              <a:rPr lang="en-US" sz="1400" dirty="0">
+                <a:solidFill>
+                  <a:srgbClr val="332F2A"/>
+                </a:solidFill>
+                <a:latin typeface="IBM Plex Mono" pitchFamily="34" charset="0"/>
+                <a:ea typeface="IBM Plex Mono" pitchFamily="34" charset="-122"/>
+                <a:cs typeface="IBM Plex Mono" pitchFamily="34" charset="-120"/>
+              </a:rPr>
+              <a:t>together and plots the</a:t>
+            </a:r>
+            <a:endParaRPr lang="en-US" sz="1400" dirty="0"/>
+          </a:p>
+          <a:p>
+            <a:pPr indent="0" marL="0">
+              <a:lnSpc>
+                <a:spcPct val="160000"/>
+              </a:lnSpc>
+              <a:buNone/>
+            </a:pPr>
+            <a:r>
+              <a:rPr lang="en-US" sz="1400" dirty="0">
+                <a:solidFill>
+                  <a:srgbClr val="332F2A"/>
+                </a:solidFill>
+                <a:latin typeface="IBM Plex Mono" pitchFamily="34" charset="0"/>
+                <a:ea typeface="IBM Plex Mono" pitchFamily="34" charset="-122"/>
+                <a:cs typeface="IBM Plex Mono" pitchFamily="34" charset="-120"/>
+              </a:rPr>
+              <a:t>time-domain waveform and the</a:t>
+            </a:r>
+            <a:endParaRPr lang="en-US" sz="1400" dirty="0"/>
+          </a:p>
+          <a:p>
+            <a:pPr indent="0" marL="0">
+              <a:lnSpc>
+                <a:spcPct val="160000"/>
+              </a:lnSpc>
+              <a:buNone/>
+            </a:pPr>
+            <a:r>
+              <a:rPr lang="en-US" sz="1400" dirty="0">
+                <a:solidFill>
+                  <a:srgbClr val="332F2A"/>
+                </a:solidFill>
+                <a:latin typeface="IBM Plex Mono" pitchFamily="34" charset="0"/>
+                <a:ea typeface="IBM Plex Mono" pitchFamily="34" charset="-122"/>
+                <a:cs typeface="IBM Plex Mono" pitchFamily="34" charset="-120"/>
+              </a:rPr>
+              <a:t>frequency spectrum.</a:t>
             </a:r>
             <a:endParaRPr lang="en-US" sz="1400" dirty="0"/>
           </a:p>

--- a/slides/Session 1 - Meet Your Agent.pptx
+++ b/slides/Session 1 - Meet Your Agent.pptx
@@ -1854,7 +1854,7 @@
           <a:p>
             <a:r>
               <a:rPr lang="en-US" dirty="0"/>
-              <a:t>Open the real .clinerules in the editor here, not just the slide. The point that surprises them: the rules are plain English in a plain file, and they can edit them. Sixty of you and one of me, so the tool holds the line.</a:t>
+              <a:t>Do the copy live, on the projector, and re-ask the Round 1 question so they watch the same agent refuse it. That before-and-after is the argument of the whole session, and it costs thirty seconds. Then open the file: the rules are plain English and they can edit them. Sixty of you and one of me, so the file holds the line rather than me.</a:t>
             </a:r>
             <a:endParaRPr lang="en-US" dirty="0"/>
           </a:p>
@@ -10733,7 +10733,7 @@
                 <a:ea typeface="Libre Franklin" pitchFamily="34" charset="-122"/>
                 <a:cs typeface="Libre Franklin" pitchFamily="34" charset="-120"/>
               </a:rPr>
-              <a:t>The gates live in a file</a:t>
+              <a:t>One command turns them on</a:t>
             </a:r>
             <a:endParaRPr lang="en-US" sz="2800" dirty="0"/>
           </a:p>
@@ -10904,7 +10904,7 @@
                 <a:ea typeface="IBM Plex Mono" pitchFamily="34" charset="-122"/>
                 <a:cs typeface="IBM Plex Mono" pitchFamily="34" charset="-120"/>
               </a:rPr>
-              <a:t># .clinerules</a:t>
+              <a:t>$ cp .clinerules.gates .clinerules</a:t>
             </a:r>
             <a:endParaRPr lang="en-US" sz="1400" dirty="0"/>
           </a:p>
@@ -10933,8 +10933,17 @@
                 <a:ea typeface="IBM Plex Mono" pitchFamily="34" charset="-122"/>
                 <a:cs typeface="IBM Plex Mono" pitchFamily="34" charset="-120"/>
               </a:rPr>
-              <a:t>Gate 2 - Spec. Before any code</a:t>
-            </a:r>
+              <a:t># .clinerules</a:t>
+            </a:r>
+            <a:endParaRPr lang="en-US" sz="1400" dirty="0"/>
+          </a:p>
+          <a:p>
+            <a:pPr indent="0" marL="0">
+              <a:lnSpc>
+                <a:spcPct val="160000"/>
+              </a:lnSpc>
+              <a:buNone/>
+            </a:pPr>
             <a:endParaRPr lang="en-US" sz="1400" dirty="0"/>
           </a:p>
           <a:p>
@@ -10953,7 +10962,7 @@
                 <a:ea typeface="IBM Plex Mono" pitchFamily="34" charset="-122"/>
                 <a:cs typeface="IBM Plex Mono" pitchFamily="34" charset="-120"/>
               </a:rPr>
-              <a:t>exists, aidlc/requirements.md</a:t>
+              <a:t>Gate 2 - Spec. Before any code</a:t>
             </a:r>
             <a:endParaRPr lang="en-US" sz="1400" dirty="0"/>
           </a:p>
@@ -10973,7 +10982,7 @@
                 <a:ea typeface="IBM Plex Mono" pitchFamily="34" charset="-122"/>
                 <a:cs typeface="IBM Plex Mono" pitchFamily="34" charset="-120"/>
               </a:rPr>
-              <a:t>must list numbered requirements,</a:t>
+              <a:t>exists, aidlc/requirements.md</a:t>
             </a:r>
             <a:endParaRPr lang="en-US" sz="1400" dirty="0"/>
           </a:p>
@@ -10993,7 +11002,7 @@
                 <a:ea typeface="IBM Plex Mono" pitchFamily="34" charset="-122"/>
                 <a:cs typeface="IBM Plex Mono" pitchFamily="34" charset="-120"/>
               </a:rPr>
-              <a:t>each with an acceptance criterion</a:t>
+              <a:t>must list numbered requirements,</a:t>
             </a:r>
             <a:endParaRPr lang="en-US" sz="1400" dirty="0"/>
           </a:p>
@@ -11013,7 +11022,7 @@
                 <a:ea typeface="IBM Plex Mono" pitchFamily="34" charset="-122"/>
                 <a:cs typeface="IBM Plex Mono" pitchFamily="34" charset="-120"/>
               </a:rPr>
-              <a:t>that can be checked by running</a:t>
+              <a:t>each with an acceptance criterion</a:t>
             </a:r>
             <a:endParaRPr lang="en-US" sz="1400" dirty="0"/>
           </a:p>
@@ -11033,7 +11042,7 @@
                 <a:ea typeface="IBM Plex Mono" pitchFamily="34" charset="-122"/>
                 <a:cs typeface="IBM Plex Mono" pitchFamily="34" charset="-120"/>
               </a:rPr>
-              <a:t>something. Draft it, then STOP</a:t>
+              <a:t>that can be checked by running</a:t>
             </a:r>
             <a:endParaRPr lang="en-US" sz="1400" dirty="0"/>
           </a:p>
@@ -11053,6 +11062,26 @@
                 <a:ea typeface="IBM Plex Mono" pitchFamily="34" charset="-122"/>
                 <a:cs typeface="IBM Plex Mono" pitchFamily="34" charset="-120"/>
               </a:rPr>
+              <a:t>something. Draft it, then STOP</a:t>
+            </a:r>
+            <a:endParaRPr lang="en-US" sz="1400" dirty="0"/>
+          </a:p>
+          <a:p>
+            <a:pPr indent="0" marL="0">
+              <a:lnSpc>
+                <a:spcPct val="160000"/>
+              </a:lnSpc>
+              <a:buNone/>
+            </a:pPr>
+            <a:r>
+              <a:rPr lang="en-US" sz="1400" dirty="0">
+                <a:solidFill>
+                  <a:srgbClr val="332F2A"/>
+                </a:solidFill>
+                <a:latin typeface="IBM Plex Mono" pitchFamily="34" charset="0"/>
+                <a:ea typeface="IBM Plex Mono" pitchFamily="34" charset="-122"/>
+                <a:cs typeface="IBM Plex Mono" pitchFamily="34" charset="-120"/>
+              </a:rPr>
               <a:t>and ask for approval.</a:t>
             </a:r>
             <a:endParaRPr lang="en-US" sz="1400" dirty="0"/>
@@ -11068,7 +11097,7 @@
         <p:spPr>
           <a:xfrm>
             <a:off x="7431430" y="1511300"/>
-            <a:ext cx="4201770" cy="1010920"/>
+            <a:ext cx="4201770" cy="1600200"/>
           </a:xfrm>
           <a:prstGeom prst="rect">
             <a:avLst/>
@@ -11095,7 +11124,7 @@
                 <a:ea typeface="Libre Franklin" pitchFamily="34" charset="-122"/>
                 <a:cs typeface="Libre Franklin" pitchFamily="34" charset="-120"/>
               </a:rPr>
-              <a:t>Your agent reads this file before every single request, and obeys it.</a:t>
+              <a:t>In Round 1 your agent had no process rules, which is why it went straight to code. This file is the difference, and it was in your repository the whole time.</a:t>
             </a:r>
             <a:endParaRPr lang="en-US" sz="1600" dirty="0"/>
           </a:p>
@@ -11109,7 +11138,7 @@
         </p:nvSpPr>
         <p:spPr>
           <a:xfrm>
-            <a:off x="7431430" y="2649220"/>
+            <a:off x="7431430" y="3238500"/>
             <a:ext cx="4201770" cy="1010920"/>
           </a:xfrm>
           <a:prstGeom prst="rect">
@@ -11137,7 +11166,7 @@
                 <a:ea typeface="Libre Franklin" pitchFamily="34" charset="-122"/>
                 <a:cs typeface="Libre Franklin" pitchFamily="34" charset="-120"/>
               </a:rPr>
-              <a:t>Ask it to skip ahead today and it will refuse. That refusal is the file working.</a:t>
+              <a:t>Same agent, same model, same request. Copy it into place, start a new task, and watch it refuse you.</a:t>
             </a:r>
             <a:endParaRPr lang="en-US" sz="1600" dirty="0"/>
           </a:p>
@@ -11199,7 +11228,7 @@
                 <a:ea typeface="Libre Franklin" pitchFamily="34" charset="-122"/>
                 <a:cs typeface="Libre Franklin" pitchFamily="34" charset="-120"/>
               </a:rPr>
-              <a:t>Open it now. It is plain English, and by Session 2 you will be editing it.</a:t>
+              <a:t>Plain English, in a plain file. By Session 2 you will be editing it.</a:t>
             </a:r>
             <a:endParaRPr lang="en-US" sz="1500" dirty="0"/>
           </a:p>

--- a/slides/Session 1 - Meet Your Agent.pptx
+++ b/slides/Session 1 - Meet Your Agent.pptx
@@ -13970,7 +13970,7 @@
                 <a:ea typeface="Libre Franklin" pitchFamily="34" charset="-122"/>
                 <a:cs typeface="Libre Franklin" pitchFamily="34" charset="-120"/>
               </a:rPr>
-              <a:t>Three minutes reading this saves you twenty later. Two files matter today: tests/test_spectrum.py is what “finished” means, and .clinerules is what your agent obeys before every single request.</a:t>
+              <a:t>Three minutes reading this saves you twenty later. The one to open now is .clinerules — plain English in a plain file, and your agent obeys it before every single request.</a:t>
             </a:r>
             <a:endParaRPr lang="en-US" sz="1600" dirty="0"/>
           </a:p>
@@ -14012,7 +14012,7 @@
                 <a:ea typeface="Libre Franklin" pitchFamily="34" charset="-122"/>
                 <a:cs typeface="Libre Franklin" pitchFamily="34" charset="-120"/>
               </a:rPr>
-              <a:t>Run pytest before you build anything. Seven failed, twenty-two passed is correct — those seven are your specification.</a:t>
+              <a:t>Leave tests/ shut for the moment. You meet it at Gate 2, which is the point where it does the most good.</a:t>
             </a:r>
             <a:endParaRPr lang="en-US" sz="1600" dirty="0"/>
           </a:p>

--- a/slides/Session 1 - Meet Your Agent.pptx
+++ b/slides/Session 1 - Meet Your Agent.pptx
@@ -41,9 +41,10 @@
     <p:sldId id="289" r:id="rId35"/>
     <p:sldId id="290" r:id="rId36"/>
     <p:sldId id="291" r:id="rId37"/>
+    <p:sldId id="292" r:id="rId38"/>
   </p:sldIdLst>
   <p:notesMasterIdLst>
-    <p:notesMasterId r:id="rId38"/>
+    <p:notesMasterId r:id="rId39"/>
   </p:notesMasterIdLst>
   <p:sldSz cx="12192000" cy="6858000"/>
   <p:notesSz cx="6858000" cy="12192000"/>
@@ -1681,7 +1682,7 @@
           <a:p>
             <a:r>
               <a:rPr lang="en-US" dirty="0"/>
-              <a:t>Show the real file. The NOT-included question is worth dwelling on: their warm-up agent invented file loading, windowing and saving because nothing told it to stop. Scope is a decision, and it is theirs.</a:t>
+              <a:t>The slide that stops the gates being magic. A gate is not a feature of Cline - it is a paragraph of English you paste, plus a rules file that makes refusing possible. Read the last three sentences aloud and say where each came from: an agent that asked permission and sat waiting, and an agent that printed a beautiful table in the chat and wrote no file at all. Both cost us a scored run during development.</a:t>
             </a:r>
             <a:endParaRPr lang="en-US" dirty="0"/>
           </a:p>
@@ -1769,7 +1770,7 @@
           <a:p>
             <a:r>
               <a:rPr lang="en-US" dirty="0"/>
-              <a:t>Requirement 5 is the trap that catches everyone, including the agent: the DC term must not be doubled. Ask the room how they would have written the check for requirement 3 — most say “the peak is in the right place”, which is exactly the check that misses a factor of five hundred.</a:t>
+              <a:t>Show the real file. The NOT-included question is worth dwelling on: their warm-up agent invented file loading, windowing and saving because nothing told it to stop. Scope is a decision, and it is theirs.</a:t>
             </a:r>
             <a:endParaRPr lang="en-US" dirty="0"/>
           </a:p>
@@ -1857,7 +1858,7 @@
           <a:p>
             <a:r>
               <a:rPr lang="en-US" dirty="0"/>
-              <a:t>Approve the plan, not the code — no code exists yet. Flag forward to Session 2 explicitly: this is the rule that makes group work survivable without anyone having to learn git branching in an afternoon.</a:t>
+              <a:t>Requirement 5 is the trap that catches everyone, including the agent: the DC term must not be doubled. Ask the room how they would have written the check for requirement 3 — most say “the peak is in the right place”, which is exactly the check that misses a factor of five hundred.</a:t>
             </a:r>
             <a:endParaRPr lang="en-US" dirty="0"/>
           </a:p>
@@ -1945,7 +1946,7 @@
           <a:p>
             <a:r>
               <a:rPr lang="en-US" dirty="0"/>
-              <a:t>Commit every time the tests go green — that is what makes “git checkout the file” a safe escape hatch when the agent later mangles something. The failure mode to name now: approving a diff without reading it, which feels productive and is how the DC bug gets in.</a:t>
+              <a:t>Approve the plan, not the code — no code exists yet. Flag forward to Session 2 explicitly: this is the rule that makes group work survivable without anyone having to learn git branching in an afternoon.</a:t>
             </a:r>
             <a:endParaRPr lang="en-US" dirty="0"/>
           </a:p>
@@ -2033,7 +2034,7 @@
           <a:p>
             <a:r>
               <a:rPr lang="en-US" dirty="0"/>
-              <a:t>Do the copy live, on the projector, and re-ask the Round 1 question so they watch the same agent refuse it. That before-and-after is the argument of the whole session, and it costs thirty seconds. Then open the file: the rules are plain English and they can edit them. Sixty of you and one of me, so the file holds the line rather than me.</a:t>
+              <a:t>Commit every time the tests go green — that is what makes “git checkout the file” a safe escape hatch when the agent later mangles something. The failure mode to name now: approving a diff without reading it, which feels productive and is how the DC bug gets in.</a:t>
             </a:r>
             <a:endParaRPr lang="en-US" dirty="0"/>
           </a:p>
@@ -2121,7 +2122,7 @@
           <a:p>
             <a:r>
               <a:rPr lang="en-US" dirty="0"/>
-              <a:t>This is where the software engineering content enters, and it should feel like a reveal. They have not been given four arbitrary hoops; they have walked the standard lifecycle, which predates all of this by fifty years.</a:t>
+              <a:t>Do the copy live, on the projector, and re-ask the Round 1 question so they watch the same agent refuse it. That before-and-after is the argument of the whole session, and it costs thirty seconds. Then open the file: the rules are plain English and they can edit them. Sixty of you and one of me, so the file holds the line rather than me.</a:t>
             </a:r>
             <a:endParaRPr lang="en-US" dirty="0"/>
           </a:p>
@@ -2209,7 +2210,7 @@
           <a:p>
             <a:r>
               <a:rPr lang="en-US" dirty="0"/>
-              <a:t>Credit AWS explicitly; the paper is in the homework. Do not oversell it: AI-DLC targets large systems with many teams, and what they run today is a shrunk version. Say that plainly.</a:t>
+              <a:t>This is where the software engineering content enters, and it should feel like a reveal. They have not been given four arbitrary hoops; they have walked the standard lifecycle, which predates all of this by fifty years.</a:t>
             </a:r>
             <a:endParaRPr lang="en-US" dirty="0"/>
           </a:p>
@@ -2297,7 +2298,7 @@
           <a:p>
             <a:r>
               <a:rPr lang="en-US" dirty="0"/>
-              <a:t>Say the timebox rule out loud before they start: fifteen minutes stuck on one task, then restore the reference and move on. Nobody loses marks for that.</a:t>
+              <a:t>Credit AWS explicitly; the paper is in the homework. Do not oversell it: AI-DLC targets large systems with many teams, and what they run today is a shrunk version. Say that plainly.</a:t>
             </a:r>
             <a:endParaRPr lang="en-US" dirty="0"/>
           </a:p>
@@ -2385,7 +2386,7 @@
           <a:p>
             <a:r>
               <a:rPr lang="en-US" dirty="0"/>
-              <a:t>Do this on the projector with the file tree open, not off the slide. Open tests/test_spectrum.py and read the seven test NAMES aloud - seven plain English sentences, and they are the customer's requirements. Then open .clinerules, so the file is already familiar when Round 2 swaps it.</a:t>
+              <a:t>Say the timebox rule out loud before they start: fifteen minutes stuck on one task, then restore the reference and move on. Nobody loses marks for that.</a:t>
             </a:r>
             <a:endParaRPr lang="en-US" dirty="0"/>
           </a:p>
@@ -2561,7 +2562,7 @@
           <a:p>
             <a:r>
               <a:rPr lang="en-US" dirty="0"/>
-              <a:t>The first sight of the thing they build all day. Point at the spike heights: 1.0 and 0.5 are the numbers they typed in - that equality is the entire lab. If it looks unimpressive, good: the point is that correctness, not spectacle, is what they are chasing.</a:t>
+              <a:t>Do this on the projector with the file tree open, not off the slide. Open tests/test_spectrum.py and read the seven test NAMES aloud - seven plain English sentences, and they are the customer's requirements. Then open .clinerules, so the file is already familiar when Round 2 swaps it.</a:t>
             </a:r>
             <a:endParaRPr lang="en-US" dirty="0"/>
           </a:p>
@@ -2649,7 +2650,7 @@
           <a:p>
             <a:r>
               <a:rPr lang="en-US" dirty="0"/>
-              <a:t>Read this out as the acceptance criteria, because that is what it is. The height requirement is the one they will skip and the one the tests will catch: a chart with both spikes in the right place, five hundred times too short, looks entirely convincing.</a:t>
+              <a:t>The first sight of the thing they build all day. Point at the spike heights: 1.0 and 0.5 are the numbers they typed in - that equality is the entire lab. If it looks unimpressive, good: the point is that correctness, not spectacle, is what they are chasing.</a:t>
             </a:r>
             <a:endParaRPr lang="en-US" dirty="0"/>
           </a:p>
@@ -2737,7 +2738,7 @@
           <a:p>
             <a:r>
               <a:rPr lang="en-US" dirty="0"/>
-              <a:t>Show the real test file on screen. Ask them to predict which of the seven tests would still pass if the scaling were wrong. Answer: all but two.</a:t>
+              <a:t>Read this out as the acceptance criteria, because that is what it is. The height requirement is the one they will skip and the one the tests will catch: a chart with both spikes in the right place, five hundred times too short, looks entirely convincing.</a:t>
             </a:r>
             <a:endParaRPr lang="en-US" dirty="0"/>
           </a:p>
@@ -2825,7 +2826,7 @@
           <a:p>
             <a:r>
               <a:rPr lang="en-US" dirty="0"/>
-              <a:t>Last fifteen minutes, everyone, whether or not their app worked. Insist on the mutation exercise: two tests fail, the peak-location test stays green, and the chart still looks perfectly reasonable.</a:t>
+              <a:t>Show the real test file on screen. Ask them to predict which of the seven tests would still pass if the scaling were wrong. Answer: all but two.</a:t>
             </a:r>
             <a:endParaRPr lang="en-US" dirty="0"/>
           </a:p>
@@ -2913,7 +2914,7 @@
           <a:p>
             <a:r>
               <a:rPr lang="en-US" dirty="0"/>
-              <a:t>The closing idea of the session, and the bridge to Session 2. Say plainly that the documents, not the code, were the work today — the code was the cheap part, and it will only get cheaper. Anyone whose app did not run still has four documents they can show, and that is a real deliverable.</a:t>
+              <a:t>Last fifteen minutes, everyone, whether or not their app worked. Insist on the mutation exercise: two tests fail, the peak-location test stays green, and the chart still looks perfectly reasonable.</a:t>
             </a:r>
             <a:endParaRPr lang="en-US" dirty="0"/>
           </a:p>
@@ -3001,7 +3002,7 @@
           <a:p>
             <a:r>
               <a:rPr lang="en-US" dirty="0"/>
-              <a:t>Leave this up for a moment; this is the slide they photograph. Then homework, then the closing slide for questions.</a:t>
+              <a:t>The closing idea of the session, and the bridge to Session 2. Say plainly that the documents, not the code, were the work today — the code was the cheap part, and it will only get cheaper. Anyone whose app did not run still has four documents they can show, and that is a real deliverable.</a:t>
             </a:r>
             <a:endParaRPr lang="en-US" dirty="0"/>
           </a:p>
@@ -3089,7 +3090,7 @@
           <a:p>
             <a:r>
               <a:rPr lang="en-US" dirty="0"/>
-              <a:t>Leave up during questions. Stress the log: three things the agent got wrong. Anyone who writes 'it all worked fine' did not look hard enough, and it is thirty per cent of the individual mark.</a:t>
+              <a:t>Leave this up for a moment; this is the slide they photograph. Then homework, then the closing slide for questions.</a:t>
             </a:r>
             <a:endParaRPr lang="en-US" dirty="0"/>
           </a:p>
@@ -3113,6 +3114,94 @@
             <a:fld id="{F7021451-1387-4CA6-816F-3879F97B5CBC}" type="slidenum">
               <a:rPr lang="en-US"/>
               <a:t>36</a:t>
+            </a:fld>
+            <a:endParaRPr lang="en-US"/>
+          </a:p>
+        </p:txBody>
+      </p:sp>
+    </p:spTree>
+    <p:extLst>
+      <p:ext uri="{BB962C8B-B14F-4D97-AF65-F5344CB8AC3E}">
+        <p14:creationId xmlns:p14="http://schemas.microsoft.com/office/powerpoint/2010/main" val="1024086991"/>
+      </p:ext>
+    </p:extLst>
+  </p:cSld>
+  <p:clrMapOvr>
+    <a:masterClrMapping/>
+  </p:clrMapOvr>
+</p:notes>
+</file>
+
+<file path=ppt/notesSlides/notesSlide37.xml><?xml version="1.0" encoding="utf-8"?>
+<p:notes xmlns:a="http://schemas.openxmlformats.org/drawingml/2006/main" xmlns:r="http://schemas.openxmlformats.org/officeDocument/2006/relationships" xmlns:p="http://schemas.openxmlformats.org/presentationml/2006/main">
+  <p:cSld>
+    <p:spTree>
+      <p:nvGrpSpPr>
+        <p:cNvPr id="1" name=""/>
+        <p:cNvGrpSpPr/>
+        <p:nvPr/>
+      </p:nvGrpSpPr>
+      <p:grpSpPr>
+        <a:xfrm>
+          <a:off x="0" y="0"/>
+          <a:ext cx="0" cy="0"/>
+          <a:chOff x="0" y="0"/>
+          <a:chExt cx="0" cy="0"/>
+        </a:xfrm>
+      </p:grpSpPr>
+      <p:sp>
+        <p:nvSpPr>
+          <p:cNvPr id="2" name="Slide Image Placeholder 1"/>
+          <p:cNvSpPr>
+            <a:spLocks noGrp="1" noRot="1" noChangeAspect="1"/>
+          </p:cNvSpPr>
+          <p:nvPr>
+            <p:ph type="sldImg"/>
+          </p:nvPr>
+        </p:nvSpPr>
+        <p:spPr/>
+      </p:sp>
+      <p:sp>
+        <p:nvSpPr>
+          <p:cNvPr id="3" name="Notes Placeholder 2"/>
+          <p:cNvSpPr>
+            <a:spLocks noGrp="1"/>
+          </p:cNvSpPr>
+          <p:nvPr>
+            <p:ph type="body" idx="1"/>
+          </p:nvPr>
+        </p:nvSpPr>
+        <p:spPr/>
+        <p:txBody>
+          <a:bodyPr/>
+          <a:lstStyle/>
+          <a:p>
+            <a:r>
+              <a:rPr lang="en-US" dirty="0"/>
+              <a:t>Leave up during questions. Stress the log: three things the agent got wrong. Anyone who writes 'it all worked fine' did not look hard enough, and it is thirty per cent of the individual mark.</a:t>
+            </a:r>
+            <a:endParaRPr lang="en-US" dirty="0"/>
+          </a:p>
+        </p:txBody>
+      </p:sp>
+      <p:sp>
+        <p:nvSpPr>
+          <p:cNvPr id="4" name="Slide Number Placeholder 3"/>
+          <p:cNvSpPr>
+            <a:spLocks noGrp="1"/>
+          </p:cNvSpPr>
+          <p:nvPr>
+            <p:ph type="sldNum" sz="quarter" idx="10"/>
+          </p:nvPr>
+        </p:nvSpPr>
+        <p:spPr/>
+        <p:txBody>
+          <a:bodyPr/>
+          <a:lstStyle/>
+          <a:p>
+            <a:fld id="{F7021451-1387-4CA6-816F-3879F97B5CBC}" type="slidenum">
+              <a:rPr lang="en-US"/>
+              <a:t>37</a:t>
             </a:fld>
             <a:endParaRPr lang="en-US"/>
           </a:p>
@@ -9376,7 +9465,7 @@
                 <a:ea typeface="Libre Franklin" pitchFamily="34" charset="-122"/>
                 <a:cs typeface="Libre Franklin" pitchFamily="34" charset="-120"/>
               </a:rPr>
-              <a:t>Gate 1 — Intent, and you write it</a:t>
+              <a:t>What you actually type</a:t>
             </a:r>
             <a:endParaRPr lang="en-US" sz="2800" dirty="0"/>
           </a:p>
@@ -9547,17 +9636,8 @@
                 <a:ea typeface="IBM Plex Mono" pitchFamily="34" charset="-122"/>
                 <a:cs typeface="IBM Plex Mono" pitchFamily="34" charset="-120"/>
               </a:rPr>
-              <a:t># aidlc/intent.md</a:t>
-            </a:r>
-            <a:endParaRPr lang="en-US" sz="1400" dirty="0"/>
-          </a:p>
-          <a:p>
-            <a:pPr indent="0" marL="0">
-              <a:lnSpc>
-                <a:spcPct val="160000"/>
-              </a:lnSpc>
-              <a:buNone/>
-            </a:pPr>
+              <a:t>Read tests/test_spectrum.py.</a:t>
+            </a:r>
             <a:endParaRPr lang="en-US" sz="1400" dirty="0"/>
           </a:p>
           <a:p>
@@ -9576,7 +9656,7 @@
                 <a:ea typeface="IBM Plex Mono" pitchFamily="34" charset="-122"/>
                 <a:cs typeface="IBM Plex Mono" pitchFamily="34" charset="-120"/>
               </a:rPr>
-              <a:t>Who is this for?</a:t>
+              <a:t>Those tests are the acceptance</a:t>
             </a:r>
             <a:endParaRPr lang="en-US" sz="1400" dirty="0"/>
           </a:p>
@@ -9596,7 +9676,7 @@
                 <a:ea typeface="IBM Plex Mono" pitchFamily="34" charset="-122"/>
                 <a:cs typeface="IBM Plex Mono" pitchFamily="34" charset="-120"/>
               </a:rPr>
-              <a:t>  A student who has just met</a:t>
+              <a:t>criteria. aidlc/intent.md says</a:t>
             </a:r>
             <a:endParaRPr lang="en-US" sz="1400" dirty="0"/>
           </a:p>
@@ -9616,7 +9696,7 @@
                 <a:ea typeface="IBM Plex Mono" pitchFamily="34" charset="-122"/>
                 <a:cs typeface="IBM Plex Mono" pitchFamily="34" charset="-120"/>
               </a:rPr>
-              <a:t>  the Fourier transform.</a:t>
+              <a:t>what we are building.</a:t>
             </a:r>
             <a:endParaRPr lang="en-US" sz="1400" dirty="0"/>
           </a:p>
@@ -9645,7 +9725,7 @@
                 <a:ea typeface="IBM Plex Mono" pitchFamily="34" charset="-122"/>
                 <a:cs typeface="IBM Plex Mono" pitchFamily="34" charset="-120"/>
               </a:rPr>
-              <a:t>What does “done” look like?</a:t>
+              <a:t>Use your file-writing tool to</a:t>
             </a:r>
             <a:endParaRPr lang="en-US" sz="1400" dirty="0"/>
           </a:p>
@@ -9665,8 +9745,17 @@
                 <a:ea typeface="IBM Plex Mono" pitchFamily="34" charset="-122"/>
                 <a:cs typeface="IBM Plex Mono" pitchFamily="34" charset="-120"/>
               </a:rPr>
-              <a:t>  I set two sine waves going</a:t>
-            </a:r>
+              <a:t>WRITE aidlc/requirements.md ...</a:t>
+            </a:r>
+            <a:endParaRPr lang="en-US" sz="1400" dirty="0"/>
+          </a:p>
+          <a:p>
+            <a:pPr indent="0" marL="0">
+              <a:lnSpc>
+                <a:spcPct val="160000"/>
+              </a:lnSpc>
+              <a:buNone/>
+            </a:pPr>
             <a:endParaRPr lang="en-US" sz="1400" dirty="0"/>
           </a:p>
           <a:p>
@@ -9685,7 +9774,7 @@
                 <a:ea typeface="IBM Plex Mono" pitchFamily="34" charset="-122"/>
                 <a:cs typeface="IBM Plex Mono" pitchFamily="34" charset="-120"/>
               </a:rPr>
-              <a:t>  and see a chart with exactly</a:t>
+              <a:t>Write the file now. Do not ask</a:t>
             </a:r>
             <a:endParaRPr lang="en-US" sz="1400" dirty="0"/>
           </a:p>
@@ -9705,7 +9794,7 @@
                 <a:ea typeface="IBM Plex Mono" pitchFamily="34" charset="-122"/>
                 <a:cs typeface="IBM Plex Mono" pitchFamily="34" charset="-120"/>
               </a:rPr>
-              <a:t>  those two frequencies, at the</a:t>
+              <a:t>permission first. Do not print</a:t>
             </a:r>
             <a:endParaRPr lang="en-US" sz="1400" dirty="0"/>
           </a:p>
@@ -9725,7 +9814,27 @@
                 <a:ea typeface="IBM Plex Mono" pitchFamily="34" charset="-122"/>
                 <a:cs typeface="IBM Plex Mono" pitchFamily="34" charset="-120"/>
               </a:rPr>
-              <a:t>  amplitudes I chose.</a:t>
+              <a:t>the table in your reply instead</a:t>
+            </a:r>
+            <a:endParaRPr lang="en-US" sz="1400" dirty="0"/>
+          </a:p>
+          <a:p>
+            <a:pPr indent="0" marL="0">
+              <a:lnSpc>
+                <a:spcPct val="160000"/>
+              </a:lnSpc>
+              <a:buNone/>
+            </a:pPr>
+            <a:r>
+              <a:rPr lang="en-US" sz="1400" dirty="0">
+                <a:solidFill>
+                  <a:srgbClr val="332F2A"/>
+                </a:solidFill>
+                <a:latin typeface="IBM Plex Mono" pitchFamily="34" charset="0"/>
+                <a:ea typeface="IBM Plex Mono" pitchFamily="34" charset="-122"/>
+                <a:cs typeface="IBM Plex Mono" pitchFamily="34" charset="-120"/>
+              </a:rPr>
+              <a:t>of writing it.</a:t>
             </a:r>
             <a:endParaRPr lang="en-US" sz="1400" dirty="0"/>
           </a:p>
@@ -9767,7 +9876,7 @@
                 <a:ea typeface="Libre Franklin" pitchFamily="34" charset="-122"/>
                 <a:cs typeface="Libre Franklin" pitchFamily="34" charset="-120"/>
               </a:rPr>
-              <a:t>The only gate you write yourself, in your own words: who it is for, what problem it solves, what done looks like, and what is deliberately left out.</a:t>
+              <a:t>All four gate prompts are in labs/PROMPTS.md. Copy them exactly today; improvise next week, once you have seen what a good one looks like.</a:t>
             </a:r>
             <a:endParaRPr lang="en-US" sz="1600" dirty="0"/>
           </a:p>
@@ -9782,7 +9891,7 @@
         <p:spPr>
           <a:xfrm>
             <a:off x="7431430" y="3238500"/>
-            <a:ext cx="4201770" cy="1305560"/>
+            <a:ext cx="4201770" cy="1600200"/>
           </a:xfrm>
           <a:prstGeom prst="rect">
             <a:avLst/>
@@ -9809,7 +9918,7 @@
                 <a:ea typeface="Libre Franklin" pitchFamily="34" charset="-122"/>
                 <a:cs typeface="Libre Franklin" pitchFamily="34" charset="-120"/>
               </a:rPr>
-              <a:t>The agent will not start without it. A vague intent does not produce a vague app — it produces a confident, wrong one.</a:t>
+              <a:t>Every sentence in that last paragraph fixes a failure we watched happen: it asked permission and stopped, or it printed the table in the chat and called that done.</a:t>
             </a:r>
             <a:endParaRPr lang="en-US" sz="1600" dirty="0"/>
           </a:p>
@@ -9871,7 +9980,7 @@
                 <a:ea typeface="Libre Franklin" pitchFamily="34" charset="-122"/>
                 <a:cs typeface="Libre Franklin" pitchFamily="34" charset="-120"/>
               </a:rPr>
-              <a:t>The question that saves you is the one about scope: what is deliberately NOT included.</a:t>
+              <a:t>Name the tool. Say where the output goes. Then forbid the near-miss.</a:t>
             </a:r>
             <a:endParaRPr lang="en-US" sz="1500" dirty="0"/>
           </a:p>
@@ -9987,7 +10096,7 @@
                 <a:ea typeface="Libre Franklin" pitchFamily="34" charset="-122"/>
                 <a:cs typeface="Libre Franklin" pitchFamily="34" charset="-120"/>
               </a:rPr>
-              <a:t>Gate 2 — Spec, and you approve it</a:t>
+              <a:t>Gate 1 — Intent, and you write it</a:t>
             </a:r>
             <a:endParaRPr lang="en-US" sz="2800" dirty="0"/>
           </a:p>
@@ -10158,7 +10267,7 @@
                 <a:ea typeface="IBM Plex Mono" pitchFamily="34" charset="-122"/>
                 <a:cs typeface="IBM Plex Mono" pitchFamily="34" charset="-120"/>
               </a:rPr>
-              <a:t># aidlc/requirements.md</a:t>
+              <a:t># aidlc/intent.md</a:t>
             </a:r>
             <a:endParaRPr lang="en-US" sz="1400" dirty="0"/>
           </a:p>
@@ -10187,7 +10296,7 @@
                 <a:ea typeface="IBM Plex Mono" pitchFamily="34" charset="-122"/>
                 <a:cs typeface="IBM Plex Mono" pitchFamily="34" charset="-120"/>
               </a:rPr>
-              <a:t>3. Report the correct amplitude</a:t>
+              <a:t>Who is this for?</a:t>
             </a:r>
             <a:endParaRPr lang="en-US" sz="1400" dirty="0"/>
           </a:p>
@@ -10207,7 +10316,7 @@
                 <a:ea typeface="IBM Plex Mono" pitchFamily="34" charset="-122"/>
                 <a:cs typeface="IBM Plex Mono" pitchFamily="34" charset="-120"/>
               </a:rPr>
-              <a:t>   check: a tone entered at 1.0</a:t>
+              <a:t>  A student who has just met</a:t>
             </a:r>
             <a:endParaRPr lang="en-US" sz="1400" dirty="0"/>
           </a:p>
@@ -10227,7 +10336,7 @@
                 <a:ea typeface="IBM Plex Mono" pitchFamily="34" charset="-122"/>
                 <a:cs typeface="IBM Plex Mono" pitchFamily="34" charset="-120"/>
               </a:rPr>
-              <a:t>   reads back as 1.0, +/- 0.001</a:t>
+              <a:t>  the Fourier transform.</a:t>
             </a:r>
             <a:endParaRPr lang="en-US" sz="1400" dirty="0"/>
           </a:p>
@@ -10256,7 +10365,7 @@
                 <a:ea typeface="IBM Plex Mono" pitchFamily="34" charset="-122"/>
                 <a:cs typeface="IBM Plex Mono" pitchFamily="34" charset="-120"/>
               </a:rPr>
-              <a:t>5. Handle a constant offset</a:t>
+              <a:t>What does “done” look like?</a:t>
             </a:r>
             <a:endParaRPr lang="en-US" sz="1400" dirty="0"/>
           </a:p>
@@ -10276,7 +10385,7 @@
                 <a:ea typeface="IBM Plex Mono" pitchFamily="34" charset="-122"/>
                 <a:cs typeface="IBM Plex Mono" pitchFamily="34" charset="-120"/>
               </a:rPr>
-              <a:t>   check: a DC offset of 2.0</a:t>
+              <a:t>  I set two sine waves going</a:t>
             </a:r>
             <a:endParaRPr lang="en-US" sz="1400" dirty="0"/>
           </a:p>
@@ -10296,7 +10405,7 @@
                 <a:ea typeface="IBM Plex Mono" pitchFamily="34" charset="-122"/>
                 <a:cs typeface="IBM Plex Mono" pitchFamily="34" charset="-120"/>
               </a:rPr>
-              <a:t>   appears at 0 Hz as 2.0,</a:t>
+              <a:t>  and see a chart with exactly</a:t>
             </a:r>
             <a:endParaRPr lang="en-US" sz="1400" dirty="0"/>
           </a:p>
@@ -10316,10 +10425,30 @@
                 <a:ea typeface="IBM Plex Mono" pitchFamily="34" charset="-122"/>
                 <a:cs typeface="IBM Plex Mono" pitchFamily="34" charset="-120"/>
               </a:rPr>
-              <a:t>   not 4.0</a:t>
+              <a:t>  those two frequencies, at the</a:t>
             </a:r>
             <a:endParaRPr lang="en-US" sz="1400" dirty="0"/>
           </a:p>
+          <a:p>
+            <a:pPr indent="0" marL="0">
+              <a:lnSpc>
+                <a:spcPct val="160000"/>
+              </a:lnSpc>
+              <a:buNone/>
+            </a:pPr>
+            <a:r>
+              <a:rPr lang="en-US" sz="1400" dirty="0">
+                <a:solidFill>
+                  <a:srgbClr val="332F2A"/>
+                </a:solidFill>
+                <a:latin typeface="IBM Plex Mono" pitchFamily="34" charset="0"/>
+                <a:ea typeface="IBM Plex Mono" pitchFamily="34" charset="-122"/>
+                <a:cs typeface="IBM Plex Mono" pitchFamily="34" charset="-120"/>
+              </a:rPr>
+              <a:t>  amplitudes I chose.</a:t>
+            </a:r>
+            <a:endParaRPr lang="en-US" sz="1400" dirty="0"/>
+          </a:p>
         </p:txBody>
       </p:sp>
       <p:sp>
@@ -10331,7 +10460,7 @@
         <p:spPr>
           <a:xfrm>
             <a:off x="7431430" y="1511300"/>
-            <a:ext cx="4201770" cy="1305560"/>
+            <a:ext cx="4201770" cy="1894840"/>
           </a:xfrm>
           <a:prstGeom prst="rect">
             <a:avLst/>
@@ -10358,7 +10487,7 @@
                 <a:ea typeface="Libre Franklin" pitchFamily="34" charset="-122"/>
                 <a:cs typeface="Libre Franklin" pitchFamily="34" charset="-120"/>
               </a:rPr>
-              <a:t>The agent drafts these; you read every line and fix what is wrong. It is far better at the requirement than at the check beside it.</a:t>
+              <a:t>The only gate with no prompt to paste — you write it yourself, in your own words: who it is for, what problem it solves, what done looks like, and what is deliberately left out.</a:t>
             </a:r>
             <a:endParaRPr lang="en-US" sz="1600" dirty="0"/>
           </a:p>
@@ -10372,7 +10501,7 @@
         </p:nvSpPr>
         <p:spPr>
           <a:xfrm>
-            <a:off x="7431430" y="2943860"/>
+            <a:off x="7431430" y="3533140"/>
             <a:ext cx="4201770" cy="1305560"/>
           </a:xfrm>
           <a:prstGeom prst="rect">
@@ -10400,7 +10529,7 @@
                 <a:ea typeface="Libre Franklin" pitchFamily="34" charset="-122"/>
                 <a:cs typeface="Libre Franklin" pitchFamily="34" charset="-120"/>
               </a:rPr>
-              <a:t>Every requirement carries something you can run. A requirement you cannot check by running something is not a requirement yet.</a:t>
+              <a:t>The agent will not start without it. A vague intent does not produce a vague app — it produces a confident, wrong one.</a:t>
             </a:r>
             <a:endParaRPr lang="en-US" sz="1600" dirty="0"/>
           </a:p>
@@ -10462,7 +10591,7 @@
                 <a:ea typeface="Libre Franklin" pitchFamily="34" charset="-122"/>
                 <a:cs typeface="Libre Franklin" pitchFamily="34" charset="-120"/>
               </a:rPr>
-              <a:t>Reply “approved” only when every check on the slide could actually fail.</a:t>
+              <a:t>The question that saves you is the one about scope: what is deliberately NOT included.</a:t>
             </a:r>
             <a:endParaRPr lang="en-US" sz="1500" dirty="0"/>
           </a:p>
@@ -10578,7 +10707,7 @@
                 <a:ea typeface="Libre Franklin" pitchFamily="34" charset="-122"/>
                 <a:cs typeface="Libre Franklin" pitchFamily="34" charset="-120"/>
               </a:rPr>
-              <a:t>Gate 3 — Plan, one file per task</a:t>
+              <a:t>Gate 2 — Spec, and you approve it</a:t>
             </a:r>
             <a:endParaRPr lang="en-US" sz="2800" dirty="0"/>
           </a:p>
@@ -10749,7 +10878,7 @@
                 <a:ea typeface="IBM Plex Mono" pitchFamily="34" charset="-122"/>
                 <a:cs typeface="IBM Plex Mono" pitchFamily="34" charset="-120"/>
               </a:rPr>
-              <a:t># aidlc/tasks.md</a:t>
+              <a:t># aidlc/requirements.md</a:t>
             </a:r>
             <a:endParaRPr lang="en-US" sz="1400" dirty="0"/>
           </a:p>
@@ -10778,7 +10907,7 @@
                 <a:ea typeface="IBM Plex Mono" pitchFamily="34" charset="-122"/>
                 <a:cs typeface="IBM Plex Mono" pitchFamily="34" charset="-120"/>
               </a:rPr>
-              <a:t>1. The maths: build a signal,</a:t>
+              <a:t>3. Report the correct amplitude</a:t>
             </a:r>
             <a:endParaRPr lang="en-US" sz="1400" dirty="0"/>
           </a:p>
@@ -10798,7 +10927,7 @@
                 <a:ea typeface="IBM Plex Mono" pitchFamily="34" charset="-122"/>
                 <a:cs typeface="IBM Plex Mono" pitchFamily="34" charset="-120"/>
               </a:rPr>
-              <a:t>   take its spectrum, find the</a:t>
+              <a:t>   check: a tone entered at 1.0</a:t>
             </a:r>
             <a:endParaRPr lang="en-US" sz="1400" dirty="0"/>
           </a:p>
@@ -10818,8 +10947,17 @@
                 <a:ea typeface="IBM Plex Mono" pitchFamily="34" charset="-122"/>
                 <a:cs typeface="IBM Plex Mono" pitchFamily="34" charset="-120"/>
               </a:rPr>
-              <a:t>   strongest frequency</a:t>
-            </a:r>
+              <a:t>   reads back as 1.0, +/- 0.001</a:t>
+            </a:r>
+            <a:endParaRPr lang="en-US" sz="1400" dirty="0"/>
+          </a:p>
+          <a:p>
+            <a:pPr indent="0" marL="0">
+              <a:lnSpc>
+                <a:spcPct val="160000"/>
+              </a:lnSpc>
+              <a:buNone/>
+            </a:pPr>
             <a:endParaRPr lang="en-US" sz="1400" dirty="0"/>
           </a:p>
           <a:p>
@@ -10838,17 +10976,8 @@
                 <a:ea typeface="IBM Plex Mono" pitchFamily="34" charset="-122"/>
                 <a:cs typeface="IBM Plex Mono" pitchFamily="34" charset="-120"/>
               </a:rPr>
-              <a:t>   -&gt; core/spectrum.py</a:t>
-            </a:r>
-            <a:endParaRPr lang="en-US" sz="1400" dirty="0"/>
-          </a:p>
-          <a:p>
-            <a:pPr indent="0" marL="0">
-              <a:lnSpc>
-                <a:spcPct val="160000"/>
-              </a:lnSpc>
-              <a:buNone/>
-            </a:pPr>
+              <a:t>5. Handle a constant offset</a:t>
+            </a:r>
             <a:endParaRPr lang="en-US" sz="1400" dirty="0"/>
           </a:p>
           <a:p>
@@ -10867,7 +10996,7 @@
                 <a:ea typeface="IBM Plex Mono" pitchFamily="34" charset="-122"/>
                 <a:cs typeface="IBM Plex Mono" pitchFamily="34" charset="-120"/>
               </a:rPr>
-              <a:t>2. The screen: two tones in,</a:t>
+              <a:t>   check: a DC offset of 2.0</a:t>
             </a:r>
             <a:endParaRPr lang="en-US" sz="1400" dirty="0"/>
           </a:p>
@@ -10887,7 +11016,7 @@
                 <a:ea typeface="IBM Plex Mono" pitchFamily="34" charset="-122"/>
                 <a:cs typeface="IBM Plex Mono" pitchFamily="34" charset="-120"/>
               </a:rPr>
-              <a:t>   two charts out</a:t>
+              <a:t>   appears at 0 Hz as 2.0,</a:t>
             </a:r>
             <a:endParaRPr lang="en-US" sz="1400" dirty="0"/>
           </a:p>
@@ -10907,7 +11036,7 @@
                 <a:ea typeface="IBM Plex Mono" pitchFamily="34" charset="-122"/>
                 <a:cs typeface="IBM Plex Mono" pitchFamily="34" charset="-120"/>
               </a:rPr>
-              <a:t>   -&gt; pages/2_Spectrum_...py</a:t>
+              <a:t>   not 4.0</a:t>
             </a:r>
             <a:endParaRPr lang="en-US" sz="1400" dirty="0"/>
           </a:p>
@@ -10922,7 +11051,7 @@
         <p:spPr>
           <a:xfrm>
             <a:off x="7431430" y="1511300"/>
-            <a:ext cx="4201770" cy="1305560"/>
+            <a:ext cx="4201770" cy="1894840"/>
           </a:xfrm>
           <a:prstGeom prst="rect">
             <a:avLst/>
@@ -10949,7 +11078,7 @@
                 <a:ea typeface="Libre Franklin" pitchFamily="34" charset="-122"/>
                 <a:cs typeface="Libre Franklin" pitchFamily="34" charset="-120"/>
               </a:rPr>
-              <a:t>Design and a task list, and every task names the ONE file it is allowed to touch. Working alone today that looks like bookkeeping.</a:t>
+              <a:t>Paste the Gate 2 prompt from labs/PROMPTS.md. The agent drafts these; you read every line and fix what is wrong — it is far better at the requirement than at the check beside it.</a:t>
             </a:r>
             <a:endParaRPr lang="en-US" sz="1600" dirty="0"/>
           </a:p>
@@ -10963,7 +11092,7 @@
         </p:nvSpPr>
         <p:spPr>
           <a:xfrm>
-            <a:off x="7431430" y="2943860"/>
+            <a:off x="7431430" y="3533140"/>
             <a:ext cx="4201770" cy="1305560"/>
           </a:xfrm>
           <a:prstGeom prst="rect">
@@ -10991,7 +11120,7 @@
                 <a:ea typeface="Libre Franklin" pitchFamily="34" charset="-122"/>
                 <a:cs typeface="Libre Franklin" pitchFamily="34" charset="-120"/>
               </a:rPr>
-              <a:t>In Session 2 it is the whole trick: four people build at once and never touch the same file, so there is nothing to merge.</a:t>
+              <a:t>Every requirement carries something you can run. A requirement you cannot check by running something is not a requirement yet.</a:t>
             </a:r>
             <a:endParaRPr lang="en-US" sz="1600" dirty="0"/>
           </a:p>
@@ -11053,7 +11182,7 @@
                 <a:ea typeface="Libre Franklin" pitchFamily="34" charset="-122"/>
                 <a:cs typeface="Libre Franklin" pitchFamily="34" charset="-120"/>
               </a:rPr>
-              <a:t>One task, one owner, one file.</a:t>
+              <a:t>Reply “approved” only when every check on the slide could actually fail.</a:t>
             </a:r>
             <a:endParaRPr lang="en-US" sz="1500" dirty="0"/>
           </a:p>
@@ -11169,7 +11298,7 @@
                 <a:ea typeface="Libre Franklin" pitchFamily="34" charset="-122"/>
                 <a:cs typeface="Libre Franklin" pitchFamily="34" charset="-120"/>
               </a:rPr>
-              <a:t>Gate 4 — Build, one task at a time</a:t>
+              <a:t>Gate 3 — Plan, one file per task</a:t>
             </a:r>
             <a:endParaRPr lang="en-US" sz="2800" dirty="0"/>
           </a:p>
@@ -11340,8 +11469,17 @@
                 <a:ea typeface="IBM Plex Mono" pitchFamily="34" charset="-122"/>
                 <a:cs typeface="IBM Plex Mono" pitchFamily="34" charset="-120"/>
               </a:rPr>
-              <a:t>$ pytest tests/test_spectrum.py</a:t>
-            </a:r>
+              <a:t># aidlc/tasks.md</a:t>
+            </a:r>
+            <a:endParaRPr lang="en-US" sz="1400" dirty="0"/>
+          </a:p>
+          <a:p>
+            <a:pPr indent="0" marL="0">
+              <a:lnSpc>
+                <a:spcPct val="160000"/>
+              </a:lnSpc>
+              <a:buNone/>
+            </a:pPr>
             <a:endParaRPr lang="en-US" sz="1400" dirty="0"/>
           </a:p>
           <a:p>
@@ -11360,17 +11498,8 @@
                 <a:ea typeface="IBM Plex Mono" pitchFamily="34" charset="-122"/>
                 <a:cs typeface="IBM Plex Mono" pitchFamily="34" charset="-120"/>
               </a:rPr>
-              <a:t>7 failed</a:t>
-            </a:r>
-            <a:endParaRPr lang="en-US" sz="1400" dirty="0"/>
-          </a:p>
-          <a:p>
-            <a:pPr indent="0" marL="0">
-              <a:lnSpc>
-                <a:spcPct val="160000"/>
-              </a:lnSpc>
-              <a:buNone/>
-            </a:pPr>
+              <a:t>1. The maths: build a signal,</a:t>
+            </a:r>
             <a:endParaRPr lang="en-US" sz="1400" dirty="0"/>
           </a:p>
           <a:p>
@@ -11389,7 +11518,7 @@
                 <a:ea typeface="IBM Plex Mono" pitchFamily="34" charset="-122"/>
                 <a:cs typeface="IBM Plex Mono" pitchFamily="34" charset="-120"/>
               </a:rPr>
-              <a:t>   agent edits core/spectrum.py</a:t>
+              <a:t>   take its spectrum, find the</a:t>
             </a:r>
             <a:endParaRPr lang="en-US" sz="1400" dirty="0"/>
           </a:p>
@@ -11409,17 +11538,8 @@
                 <a:ea typeface="IBM Plex Mono" pitchFamily="34" charset="-122"/>
                 <a:cs typeface="IBM Plex Mono" pitchFamily="34" charset="-120"/>
               </a:rPr>
-              <a:t>   you read the diff</a:t>
-            </a:r>
-            <a:endParaRPr lang="en-US" sz="1400" dirty="0"/>
-          </a:p>
-          <a:p>
-            <a:pPr indent="0" marL="0">
-              <a:lnSpc>
-                <a:spcPct val="160000"/>
-              </a:lnSpc>
-              <a:buNone/>
-            </a:pPr>
+              <a:t>   strongest frequency</a:t>
+            </a:r>
             <a:endParaRPr lang="en-US" sz="1400" dirty="0"/>
           </a:p>
           <a:p>
@@ -11438,8 +11558,17 @@
                 <a:ea typeface="IBM Plex Mono" pitchFamily="34" charset="-122"/>
                 <a:cs typeface="IBM Plex Mono" pitchFamily="34" charset="-120"/>
               </a:rPr>
-              <a:t>$ pytest tests/test_spectrum.py</a:t>
-            </a:r>
+              <a:t>   -&gt; core/spectrum.py</a:t>
+            </a:r>
+            <a:endParaRPr lang="en-US" sz="1400" dirty="0"/>
+          </a:p>
+          <a:p>
+            <a:pPr indent="0" marL="0">
+              <a:lnSpc>
+                <a:spcPct val="160000"/>
+              </a:lnSpc>
+              <a:buNone/>
+            </a:pPr>
             <a:endParaRPr lang="en-US" sz="1400" dirty="0"/>
           </a:p>
           <a:p>
@@ -11458,17 +11587,8 @@
                 <a:ea typeface="IBM Plex Mono" pitchFamily="34" charset="-122"/>
                 <a:cs typeface="IBM Plex Mono" pitchFamily="34" charset="-120"/>
               </a:rPr>
-              <a:t>7 passed</a:t>
-            </a:r>
-            <a:endParaRPr lang="en-US" sz="1400" dirty="0"/>
-          </a:p>
-          <a:p>
-            <a:pPr indent="0" marL="0">
-              <a:lnSpc>
-                <a:spcPct val="160000"/>
-              </a:lnSpc>
-              <a:buNone/>
-            </a:pPr>
+              <a:t>2. The screen: two tones in,</a:t>
+            </a:r>
             <a:endParaRPr lang="en-US" sz="1400" dirty="0"/>
           </a:p>
           <a:p>
@@ -11487,10 +11607,30 @@
                 <a:ea typeface="IBM Plex Mono" pitchFamily="34" charset="-122"/>
                 <a:cs typeface="IBM Plex Mono" pitchFamily="34" charset="-120"/>
               </a:rPr>
-              <a:t>$ git add -A &amp;&amp; git commit</a:t>
+              <a:t>   two charts out</a:t>
             </a:r>
             <a:endParaRPr lang="en-US" sz="1400" dirty="0"/>
           </a:p>
+          <a:p>
+            <a:pPr indent="0" marL="0">
+              <a:lnSpc>
+                <a:spcPct val="160000"/>
+              </a:lnSpc>
+              <a:buNone/>
+            </a:pPr>
+            <a:r>
+              <a:rPr lang="en-US" sz="1400" dirty="0">
+                <a:solidFill>
+                  <a:srgbClr val="332F2A"/>
+                </a:solidFill>
+                <a:latin typeface="IBM Plex Mono" pitchFamily="34" charset="0"/>
+                <a:ea typeface="IBM Plex Mono" pitchFamily="34" charset="-122"/>
+                <a:cs typeface="IBM Plex Mono" pitchFamily="34" charset="-120"/>
+              </a:rPr>
+              <a:t>   -&gt; pages/2_Spectrum_...py</a:t>
+            </a:r>
+            <a:endParaRPr lang="en-US" sz="1400" dirty="0"/>
+          </a:p>
         </p:txBody>
       </p:sp>
       <p:sp>
@@ -11502,7 +11642,7 @@
         <p:spPr>
           <a:xfrm>
             <a:off x="7431430" y="1511300"/>
-            <a:ext cx="4201770" cy="1305560"/>
+            <a:ext cx="4201770" cy="1600200"/>
           </a:xfrm>
           <a:prstGeom prst="rect">
             <a:avLst/>
@@ -11529,7 +11669,7 @@
                 <a:ea typeface="Libre Franklin" pitchFamily="34" charset="-122"/>
                 <a:cs typeface="Libre Franklin" pitchFamily="34" charset="-120"/>
               </a:rPr>
-              <a:t>The only gate with no document. One task: the agent edits a single file, you run the tests, you read the diff, you commit.</a:t>
+              <a:t>Paste the Gate 3 prompt. Design and a task list, and every task names the ONE file it is allowed to touch. Working alone today that looks like bookkeeping.</a:t>
             </a:r>
             <a:endParaRPr lang="en-US" sz="1600" dirty="0"/>
           </a:p>
@@ -11543,7 +11683,7 @@
         </p:nvSpPr>
         <p:spPr>
           <a:xfrm>
-            <a:off x="7431430" y="2943860"/>
+            <a:off x="7431430" y="3238500"/>
             <a:ext cx="4201770" cy="1305560"/>
           </a:xfrm>
           <a:prstGeom prst="rect">
@@ -11571,7 +11711,7 @@
                 <a:ea typeface="Libre Franklin" pitchFamily="34" charset="-122"/>
                 <a:cs typeface="Libre Franklin" pitchFamily="34" charset="-120"/>
               </a:rPr>
-              <a:t>Never let it run three tasks at once. When something breaks you want one small change in front of you, not three.</a:t>
+              <a:t>In Session 2 it is the whole trick: four people build at once and never touch the same file, so there is nothing to merge.</a:t>
             </a:r>
             <a:endParaRPr lang="en-US" sz="1600" dirty="0"/>
           </a:p>
@@ -11633,7 +11773,7 @@
                 <a:ea typeface="Libre Franklin" pitchFamily="34" charset="-122"/>
                 <a:cs typeface="Libre Franklin" pitchFamily="34" charset="-120"/>
               </a:rPr>
-              <a:t>Green tests and a diff you have actually read. Then the next task.</a:t>
+              <a:t>One task, one owner, one file.</a:t>
             </a:r>
             <a:endParaRPr lang="en-US" sz="1500" dirty="0"/>
           </a:p>
@@ -11749,7 +11889,7 @@
                 <a:ea typeface="Libre Franklin" pitchFamily="34" charset="-122"/>
                 <a:cs typeface="Libre Franklin" pitchFamily="34" charset="-120"/>
               </a:rPr>
-              <a:t>One command turns them on</a:t>
+              <a:t>Gate 4 — Build, one task at a time</a:t>
             </a:r>
             <a:endParaRPr lang="en-US" sz="2800" dirty="0"/>
           </a:p>
@@ -11920,17 +12060,8 @@
                 <a:ea typeface="IBM Plex Mono" pitchFamily="34" charset="-122"/>
                 <a:cs typeface="IBM Plex Mono" pitchFamily="34" charset="-120"/>
               </a:rPr>
-              <a:t>$ cp .clinerules.gates .clinerules</a:t>
-            </a:r>
-            <a:endParaRPr lang="en-US" sz="1400" dirty="0"/>
-          </a:p>
-          <a:p>
-            <a:pPr indent="0" marL="0">
-              <a:lnSpc>
-                <a:spcPct val="160000"/>
-              </a:lnSpc>
-              <a:buNone/>
-            </a:pPr>
+              <a:t>$ pytest tests/test_spectrum.py</a:t>
+            </a:r>
             <a:endParaRPr lang="en-US" sz="1400" dirty="0"/>
           </a:p>
           <a:p>
@@ -11949,7 +12080,7 @@
                 <a:ea typeface="IBM Plex Mono" pitchFamily="34" charset="-122"/>
                 <a:cs typeface="IBM Plex Mono" pitchFamily="34" charset="-120"/>
               </a:rPr>
-              <a:t># .clinerules</a:t>
+              <a:t>7 failed</a:t>
             </a:r>
             <a:endParaRPr lang="en-US" sz="1400" dirty="0"/>
           </a:p>
@@ -11978,7 +12109,7 @@
                 <a:ea typeface="IBM Plex Mono" pitchFamily="34" charset="-122"/>
                 <a:cs typeface="IBM Plex Mono" pitchFamily="34" charset="-120"/>
               </a:rPr>
-              <a:t>Gate 2 - Spec. Before any code</a:t>
+              <a:t>   agent edits core/spectrum.py</a:t>
             </a:r>
             <a:endParaRPr lang="en-US" sz="1400" dirty="0"/>
           </a:p>
@@ -11998,8 +12129,17 @@
                 <a:ea typeface="IBM Plex Mono" pitchFamily="34" charset="-122"/>
                 <a:cs typeface="IBM Plex Mono" pitchFamily="34" charset="-120"/>
               </a:rPr>
-              <a:t>exists, aidlc/requirements.md</a:t>
-            </a:r>
+              <a:t>   you read the diff</a:t>
+            </a:r>
+            <a:endParaRPr lang="en-US" sz="1400" dirty="0"/>
+          </a:p>
+          <a:p>
+            <a:pPr indent="0" marL="0">
+              <a:lnSpc>
+                <a:spcPct val="160000"/>
+              </a:lnSpc>
+              <a:buNone/>
+            </a:pPr>
             <a:endParaRPr lang="en-US" sz="1400" dirty="0"/>
           </a:p>
           <a:p>
@@ -12018,7 +12158,7 @@
                 <a:ea typeface="IBM Plex Mono" pitchFamily="34" charset="-122"/>
                 <a:cs typeface="IBM Plex Mono" pitchFamily="34" charset="-120"/>
               </a:rPr>
-              <a:t>must list numbered requirements,</a:t>
+              <a:t>$ pytest tests/test_spectrum.py</a:t>
             </a:r>
             <a:endParaRPr lang="en-US" sz="1400" dirty="0"/>
           </a:p>
@@ -12038,8 +12178,17 @@
                 <a:ea typeface="IBM Plex Mono" pitchFamily="34" charset="-122"/>
                 <a:cs typeface="IBM Plex Mono" pitchFamily="34" charset="-120"/>
               </a:rPr>
-              <a:t>each with an acceptance criterion</a:t>
-            </a:r>
+              <a:t>7 passed</a:t>
+            </a:r>
+            <a:endParaRPr lang="en-US" sz="1400" dirty="0"/>
+          </a:p>
+          <a:p>
+            <a:pPr indent="0" marL="0">
+              <a:lnSpc>
+                <a:spcPct val="160000"/>
+              </a:lnSpc>
+              <a:buNone/>
+            </a:pPr>
             <a:endParaRPr lang="en-US" sz="1400" dirty="0"/>
           </a:p>
           <a:p>
@@ -12058,47 +12207,7 @@
                 <a:ea typeface="IBM Plex Mono" pitchFamily="34" charset="-122"/>
                 <a:cs typeface="IBM Plex Mono" pitchFamily="34" charset="-120"/>
               </a:rPr>
-              <a:t>that can be checked by running</a:t>
-            </a:r>
-            <a:endParaRPr lang="en-US" sz="1400" dirty="0"/>
-          </a:p>
-          <a:p>
-            <a:pPr indent="0" marL="0">
-              <a:lnSpc>
-                <a:spcPct val="160000"/>
-              </a:lnSpc>
-              <a:buNone/>
-            </a:pPr>
-            <a:r>
-              <a:rPr lang="en-US" sz="1400" dirty="0">
-                <a:solidFill>
-                  <a:srgbClr val="332F2A"/>
-                </a:solidFill>
-                <a:latin typeface="IBM Plex Mono" pitchFamily="34" charset="0"/>
-                <a:ea typeface="IBM Plex Mono" pitchFamily="34" charset="-122"/>
-                <a:cs typeface="IBM Plex Mono" pitchFamily="34" charset="-120"/>
-              </a:rPr>
-              <a:t>something. Draft it, then STOP</a:t>
-            </a:r>
-            <a:endParaRPr lang="en-US" sz="1400" dirty="0"/>
-          </a:p>
-          <a:p>
-            <a:pPr indent="0" marL="0">
-              <a:lnSpc>
-                <a:spcPct val="160000"/>
-              </a:lnSpc>
-              <a:buNone/>
-            </a:pPr>
-            <a:r>
-              <a:rPr lang="en-US" sz="1400" dirty="0">
-                <a:solidFill>
-                  <a:srgbClr val="332F2A"/>
-                </a:solidFill>
-                <a:latin typeface="IBM Plex Mono" pitchFamily="34" charset="0"/>
-                <a:ea typeface="IBM Plex Mono" pitchFamily="34" charset="-122"/>
-                <a:cs typeface="IBM Plex Mono" pitchFamily="34" charset="-120"/>
-              </a:rPr>
-              <a:t>and ask for approval.</a:t>
+              <a:t>$ git add -A &amp;&amp; git commit</a:t>
             </a:r>
             <a:endParaRPr lang="en-US" sz="1400" dirty="0"/>
           </a:p>
@@ -12140,7 +12249,7 @@
                 <a:ea typeface="Libre Franklin" pitchFamily="34" charset="-122"/>
                 <a:cs typeface="Libre Franklin" pitchFamily="34" charset="-120"/>
               </a:rPr>
-              <a:t>In Round 1 your agent had no process rules, which is why it went straight to code. This file is the difference, and it was in your repository the whole time.</a:t>
+              <a:t>Two prompts, one per task. The only gate with no document: the agent edits a single file, you run the tests, you read the diff, you commit.</a:t>
             </a:r>
             <a:endParaRPr lang="en-US" sz="1600" dirty="0"/>
           </a:p>
@@ -12155,7 +12264,7 @@
         <p:spPr>
           <a:xfrm>
             <a:off x="7431430" y="3238500"/>
-            <a:ext cx="4201770" cy="1010920"/>
+            <a:ext cx="4201770" cy="1305560"/>
           </a:xfrm>
           <a:prstGeom prst="rect">
             <a:avLst/>
@@ -12182,7 +12291,7 @@
                 <a:ea typeface="Libre Franklin" pitchFamily="34" charset="-122"/>
                 <a:cs typeface="Libre Franklin" pitchFamily="34" charset="-120"/>
               </a:rPr>
-              <a:t>Same agent, same model, same request. Copy it into place, start a new task, and watch it refuse you.</a:t>
+              <a:t>Never let it run three tasks at once. When something breaks you want one small change in front of you, not three.</a:t>
             </a:r>
             <a:endParaRPr lang="en-US" sz="1600" dirty="0"/>
           </a:p>
@@ -12244,7 +12353,7 @@
                 <a:ea typeface="Libre Franklin" pitchFamily="34" charset="-122"/>
                 <a:cs typeface="Libre Franklin" pitchFamily="34" charset="-120"/>
               </a:rPr>
-              <a:t>Plain English, in a plain file. By Session 2 you will be editing it.</a:t>
+              <a:t>Green tests and a diff you have actually read. Then the next task.</a:t>
             </a:r>
             <a:endParaRPr lang="en-US" sz="1500" dirty="0"/>
           </a:p>
@@ -12360,7 +12469,7 @@
                 <a:ea typeface="Libre Franklin" pitchFamily="34" charset="-122"/>
                 <a:cs typeface="Libre Franklin" pitchFamily="34" charset="-120"/>
               </a:rPr>
-              <a:t>You have seen these gates before</a:t>
+              <a:t>One command turns them on</a:t>
             </a:r>
             <a:endParaRPr lang="en-US" sz="2800" dirty="0"/>
           </a:p>
@@ -12472,56 +12581,259 @@
       </p:sp>
       <p:sp>
         <p:nvSpPr>
-          <p:cNvPr id="7" name="Text 5"/>
+          <p:cNvPr id="7" name="Shape 5"/>
           <p:cNvSpPr/>
           <p:nvPr/>
         </p:nvSpPr>
         <p:spPr>
           <a:xfrm>
             <a:off x="558800" y="1511300"/>
-            <a:ext cx="5283200" cy="254000"/>
-          </a:xfrm>
-          <a:prstGeom prst="rect">
-            <a:avLst/>
-          </a:prstGeom>
-          <a:noFill/>
-          <a:ln/>
-        </p:spPr>
-        <p:txBody>
-          <a:bodyPr wrap="square" lIns="0" tIns="0" rIns="0" bIns="0" rtlCol="0" anchor="t"/>
-          <a:lstStyle/>
-          <a:p>
-            <a:pPr algn="l" indent="0" marL="0">
-              <a:lnSpc>
-                <a:spcPct val="145000"/>
-              </a:lnSpc>
-              <a:buNone/>
-            </a:pPr>
-            <a:r>
-              <a:rPr lang="en-US" sz="1300" spc="130" kern="0" dirty="0">
-                <a:solidFill>
-                  <a:srgbClr val="A87A2E"/>
+            <a:ext cx="6517030" cy="4572000"/>
+          </a:xfrm>
+          <a:prstGeom prst="rect">
+            <a:avLst/>
+          </a:prstGeom>
+          <a:solidFill>
+            <a:srgbClr val="F5F2EC"/>
+          </a:solidFill>
+          <a:ln w="6350">
+            <a:solidFill>
+              <a:srgbClr val="E1DED7"/>
+            </a:solidFill>
+            <a:prstDash val="solid"/>
+          </a:ln>
+        </p:spPr>
+      </p:sp>
+      <p:sp>
+        <p:nvSpPr>
+          <p:cNvPr id="8" name="Text 6"/>
+          <p:cNvSpPr/>
+          <p:nvPr/>
+        </p:nvSpPr>
+        <p:spPr>
+          <a:xfrm>
+            <a:off x="800100" y="1727200"/>
+            <a:ext cx="6034430" cy="4140200"/>
+          </a:xfrm>
+          <a:prstGeom prst="rect">
+            <a:avLst/>
+          </a:prstGeom>
+          <a:noFill/>
+          <a:ln/>
+        </p:spPr>
+        <p:txBody>
+          <a:bodyPr wrap="square" lIns="0" tIns="0" rIns="0" bIns="0" rtlCol="0" anchor="t"/>
+          <a:lstStyle/>
+          <a:p>
+            <a:pPr indent="0" marL="0">
+              <a:lnSpc>
+                <a:spcPct val="160000"/>
+              </a:lnSpc>
+              <a:buNone/>
+            </a:pPr>
+            <a:r>
+              <a:rPr lang="en-US" sz="1400" dirty="0">
+                <a:solidFill>
+                  <a:srgbClr val="332F2A"/>
                 </a:solidFill>
                 <a:latin typeface="IBM Plex Mono" pitchFamily="34" charset="0"/>
                 <a:ea typeface="IBM Plex Mono" pitchFamily="34" charset="-122"/>
                 <a:cs typeface="IBM Plex Mono" pitchFamily="34" charset="-120"/>
               </a:rPr>
-              <a:t>THE GATES YOU RUN</a:t>
-            </a:r>
-            <a:endParaRPr lang="en-US" sz="1300" dirty="0"/>
-          </a:p>
-        </p:txBody>
-      </p:sp>
-      <p:sp>
-        <p:nvSpPr>
-          <p:cNvPr id="8" name="Text 6"/>
-          <p:cNvSpPr/>
-          <p:nvPr/>
-        </p:nvSpPr>
-        <p:spPr>
-          <a:xfrm>
-            <a:off x="558800" y="1917700"/>
-            <a:ext cx="5283200" cy="1270000"/>
+              <a:t>$ cp .clinerules.gates .clinerules</a:t>
+            </a:r>
+            <a:endParaRPr lang="en-US" sz="1400" dirty="0"/>
+          </a:p>
+          <a:p>
+            <a:pPr indent="0" marL="0">
+              <a:lnSpc>
+                <a:spcPct val="160000"/>
+              </a:lnSpc>
+              <a:buNone/>
+            </a:pPr>
+            <a:endParaRPr lang="en-US" sz="1400" dirty="0"/>
+          </a:p>
+          <a:p>
+            <a:pPr indent="0" marL="0">
+              <a:lnSpc>
+                <a:spcPct val="160000"/>
+              </a:lnSpc>
+              <a:buNone/>
+            </a:pPr>
+            <a:r>
+              <a:rPr lang="en-US" sz="1400" dirty="0">
+                <a:solidFill>
+                  <a:srgbClr val="332F2A"/>
+                </a:solidFill>
+                <a:latin typeface="IBM Plex Mono" pitchFamily="34" charset="0"/>
+                <a:ea typeface="IBM Plex Mono" pitchFamily="34" charset="-122"/>
+                <a:cs typeface="IBM Plex Mono" pitchFamily="34" charset="-120"/>
+              </a:rPr>
+              <a:t># .clinerules</a:t>
+            </a:r>
+            <a:endParaRPr lang="en-US" sz="1400" dirty="0"/>
+          </a:p>
+          <a:p>
+            <a:pPr indent="0" marL="0">
+              <a:lnSpc>
+                <a:spcPct val="160000"/>
+              </a:lnSpc>
+              <a:buNone/>
+            </a:pPr>
+            <a:endParaRPr lang="en-US" sz="1400" dirty="0"/>
+          </a:p>
+          <a:p>
+            <a:pPr indent="0" marL="0">
+              <a:lnSpc>
+                <a:spcPct val="160000"/>
+              </a:lnSpc>
+              <a:buNone/>
+            </a:pPr>
+            <a:r>
+              <a:rPr lang="en-US" sz="1400" dirty="0">
+                <a:solidFill>
+                  <a:srgbClr val="332F2A"/>
+                </a:solidFill>
+                <a:latin typeface="IBM Plex Mono" pitchFamily="34" charset="0"/>
+                <a:ea typeface="IBM Plex Mono" pitchFamily="34" charset="-122"/>
+                <a:cs typeface="IBM Plex Mono" pitchFamily="34" charset="-120"/>
+              </a:rPr>
+              <a:t>Gate 2 - Spec. Before any code</a:t>
+            </a:r>
+            <a:endParaRPr lang="en-US" sz="1400" dirty="0"/>
+          </a:p>
+          <a:p>
+            <a:pPr indent="0" marL="0">
+              <a:lnSpc>
+                <a:spcPct val="160000"/>
+              </a:lnSpc>
+              <a:buNone/>
+            </a:pPr>
+            <a:r>
+              <a:rPr lang="en-US" sz="1400" dirty="0">
+                <a:solidFill>
+                  <a:srgbClr val="332F2A"/>
+                </a:solidFill>
+                <a:latin typeface="IBM Plex Mono" pitchFamily="34" charset="0"/>
+                <a:ea typeface="IBM Plex Mono" pitchFamily="34" charset="-122"/>
+                <a:cs typeface="IBM Plex Mono" pitchFamily="34" charset="-120"/>
+              </a:rPr>
+              <a:t>exists, aidlc/requirements.md</a:t>
+            </a:r>
+            <a:endParaRPr lang="en-US" sz="1400" dirty="0"/>
+          </a:p>
+          <a:p>
+            <a:pPr indent="0" marL="0">
+              <a:lnSpc>
+                <a:spcPct val="160000"/>
+              </a:lnSpc>
+              <a:buNone/>
+            </a:pPr>
+            <a:r>
+              <a:rPr lang="en-US" sz="1400" dirty="0">
+                <a:solidFill>
+                  <a:srgbClr val="332F2A"/>
+                </a:solidFill>
+                <a:latin typeface="IBM Plex Mono" pitchFamily="34" charset="0"/>
+                <a:ea typeface="IBM Plex Mono" pitchFamily="34" charset="-122"/>
+                <a:cs typeface="IBM Plex Mono" pitchFamily="34" charset="-120"/>
+              </a:rPr>
+              <a:t>must list numbered requirements,</a:t>
+            </a:r>
+            <a:endParaRPr lang="en-US" sz="1400" dirty="0"/>
+          </a:p>
+          <a:p>
+            <a:pPr indent="0" marL="0">
+              <a:lnSpc>
+                <a:spcPct val="160000"/>
+              </a:lnSpc>
+              <a:buNone/>
+            </a:pPr>
+            <a:r>
+              <a:rPr lang="en-US" sz="1400" dirty="0">
+                <a:solidFill>
+                  <a:srgbClr val="332F2A"/>
+                </a:solidFill>
+                <a:latin typeface="IBM Plex Mono" pitchFamily="34" charset="0"/>
+                <a:ea typeface="IBM Plex Mono" pitchFamily="34" charset="-122"/>
+                <a:cs typeface="IBM Plex Mono" pitchFamily="34" charset="-120"/>
+              </a:rPr>
+              <a:t>each with an acceptance criterion</a:t>
+            </a:r>
+            <a:endParaRPr lang="en-US" sz="1400" dirty="0"/>
+          </a:p>
+          <a:p>
+            <a:pPr indent="0" marL="0">
+              <a:lnSpc>
+                <a:spcPct val="160000"/>
+              </a:lnSpc>
+              <a:buNone/>
+            </a:pPr>
+            <a:r>
+              <a:rPr lang="en-US" sz="1400" dirty="0">
+                <a:solidFill>
+                  <a:srgbClr val="332F2A"/>
+                </a:solidFill>
+                <a:latin typeface="IBM Plex Mono" pitchFamily="34" charset="0"/>
+                <a:ea typeface="IBM Plex Mono" pitchFamily="34" charset="-122"/>
+                <a:cs typeface="IBM Plex Mono" pitchFamily="34" charset="-120"/>
+              </a:rPr>
+              <a:t>that can be checked by running</a:t>
+            </a:r>
+            <a:endParaRPr lang="en-US" sz="1400" dirty="0"/>
+          </a:p>
+          <a:p>
+            <a:pPr indent="0" marL="0">
+              <a:lnSpc>
+                <a:spcPct val="160000"/>
+              </a:lnSpc>
+              <a:buNone/>
+            </a:pPr>
+            <a:r>
+              <a:rPr lang="en-US" sz="1400" dirty="0">
+                <a:solidFill>
+                  <a:srgbClr val="332F2A"/>
+                </a:solidFill>
+                <a:latin typeface="IBM Plex Mono" pitchFamily="34" charset="0"/>
+                <a:ea typeface="IBM Plex Mono" pitchFamily="34" charset="-122"/>
+                <a:cs typeface="IBM Plex Mono" pitchFamily="34" charset="-120"/>
+              </a:rPr>
+              <a:t>something. Draft it, then STOP</a:t>
+            </a:r>
+            <a:endParaRPr lang="en-US" sz="1400" dirty="0"/>
+          </a:p>
+          <a:p>
+            <a:pPr indent="0" marL="0">
+              <a:lnSpc>
+                <a:spcPct val="160000"/>
+              </a:lnSpc>
+              <a:buNone/>
+            </a:pPr>
+            <a:r>
+              <a:rPr lang="en-US" sz="1400" dirty="0">
+                <a:solidFill>
+                  <a:srgbClr val="332F2A"/>
+                </a:solidFill>
+                <a:latin typeface="IBM Plex Mono" pitchFamily="34" charset="0"/>
+                <a:ea typeface="IBM Plex Mono" pitchFamily="34" charset="-122"/>
+                <a:cs typeface="IBM Plex Mono" pitchFamily="34" charset="-120"/>
+              </a:rPr>
+              <a:t>and ask for approval.</a:t>
+            </a:r>
+            <a:endParaRPr lang="en-US" sz="1400" dirty="0"/>
+          </a:p>
+        </p:txBody>
+      </p:sp>
+      <p:sp>
+        <p:nvSpPr>
+          <p:cNvPr id="9" name="Text 7"/>
+          <p:cNvSpPr/>
+          <p:nvPr/>
+        </p:nvSpPr>
+        <p:spPr>
+          <a:xfrm>
+            <a:off x="7431430" y="1511300"/>
+            <a:ext cx="4201770" cy="1600200"/>
           </a:xfrm>
           <a:prstGeom prst="rect">
             <a:avLst/>
@@ -12548,7 +12860,7 @@
                 <a:ea typeface="Libre Franklin" pitchFamily="34" charset="-122"/>
                 <a:cs typeface="Libre Franklin" pitchFamily="34" charset="-120"/>
               </a:rPr>
-              <a:t>Intent, then spec, then plan, then build one task at a time, then ship.</a:t>
+              <a:t>In Round 1 your agent had no process rules, which is why it went straight to code. This file is the difference, and it was in your repository the whole time.</a:t>
             </a:r>
             <a:endParaRPr lang="en-US" sz="1600" dirty="0"/>
           </a:p>
@@ -12556,14 +12868,14 @@
       </p:sp>
       <p:sp>
         <p:nvSpPr>
-          <p:cNvPr id="9" name="Text 7"/>
-          <p:cNvSpPr/>
-          <p:nvPr/>
-        </p:nvSpPr>
-        <p:spPr>
-          <a:xfrm>
-            <a:off x="558800" y="3162300"/>
-            <a:ext cx="5283200" cy="1270000"/>
+          <p:cNvPr id="10" name="Text 8"/>
+          <p:cNvSpPr/>
+          <p:nvPr/>
+        </p:nvSpPr>
+        <p:spPr>
+          <a:xfrm>
+            <a:off x="7431430" y="3238500"/>
+            <a:ext cx="4201770" cy="1010920"/>
           </a:xfrm>
           <a:prstGeom prst="rect">
             <a:avLst/>
@@ -12590,7 +12902,7 @@
                 <a:ea typeface="Libre Franklin" pitchFamily="34" charset="-122"/>
                 <a:cs typeface="Libre Franklin" pitchFamily="34" charset="-120"/>
               </a:rPr>
-              <a:t>Five steps that fit in a two-hour lab and produce four short documents.</a:t>
+              <a:t>Same agent, same model, same request. Copy it into place, start a new task, and watch it refuse you.</a:t>
             </a:r>
             <a:endParaRPr lang="en-US" sz="1600" dirty="0"/>
           </a:p>
@@ -12598,75 +12910,53 @@
       </p:sp>
       <p:sp>
         <p:nvSpPr>
-          <p:cNvPr id="10" name="Text 8"/>
-          <p:cNvSpPr/>
-          <p:nvPr/>
-        </p:nvSpPr>
-        <p:spPr>
-          <a:xfrm>
-            <a:off x="6350000" y="1511300"/>
-            <a:ext cx="5283200" cy="254000"/>
-          </a:xfrm>
-          <a:prstGeom prst="rect">
-            <a:avLst/>
-          </a:prstGeom>
-          <a:noFill/>
-          <a:ln/>
-        </p:spPr>
-        <p:txBody>
-          <a:bodyPr wrap="square" lIns="0" tIns="0" rIns="0" bIns="0" rtlCol="0" anchor="t"/>
-          <a:lstStyle/>
-          <a:p>
-            <a:pPr algn="l" indent="0" marL="0">
-              <a:lnSpc>
-                <a:spcPct val="145000"/>
-              </a:lnSpc>
-              <a:buNone/>
-            </a:pPr>
-            <a:r>
-              <a:rPr lang="en-US" sz="1300" spc="130" kern="0" dirty="0">
-                <a:solidFill>
-                  <a:srgbClr val="A87A2E"/>
-                </a:solidFill>
-                <a:latin typeface="IBM Plex Mono" pitchFamily="34" charset="0"/>
-                <a:ea typeface="IBM Plex Mono" pitchFamily="34" charset="-122"/>
-                <a:cs typeface="IBM Plex Mono" pitchFamily="34" charset="-120"/>
-              </a:rPr>
-              <a:t>WHAT IT IS CALLED ELSEWHERE</a:t>
-            </a:r>
-            <a:endParaRPr lang="en-US" sz="1300" dirty="0"/>
-          </a:p>
-        </p:txBody>
-      </p:sp>
-      <p:sp>
-        <p:nvSpPr>
-          <p:cNvPr id="11" name="Text 9"/>
-          <p:cNvSpPr/>
-          <p:nvPr/>
-        </p:nvSpPr>
-        <p:spPr>
-          <a:xfrm>
-            <a:off x="6350000" y="1917700"/>
-            <a:ext cx="5283200" cy="1270000"/>
-          </a:xfrm>
-          <a:prstGeom prst="rect">
-            <a:avLst/>
-          </a:prstGeom>
-          <a:noFill/>
-          <a:ln/>
-        </p:spPr>
-        <p:txBody>
-          <a:bodyPr wrap="square" lIns="0" tIns="0" rIns="0" bIns="0" rtlCol="0" anchor="t"/>
-          <a:lstStyle/>
-          <a:p>
-            <a:pPr algn="l" indent="0" marL="0">
-              <a:lnSpc>
-                <a:spcPct val="145000"/>
-              </a:lnSpc>
-              <a:buNone/>
-            </a:pPr>
-            <a:r>
-              <a:rPr lang="en-US" sz="1600" dirty="0">
+          <p:cNvPr id="11" name="Shape 9"/>
+          <p:cNvSpPr/>
+          <p:nvPr/>
+        </p:nvSpPr>
+        <p:spPr>
+          <a:xfrm>
+            <a:off x="7431430" y="5384800"/>
+            <a:ext cx="12700" cy="698500"/>
+          </a:xfrm>
+          <a:prstGeom prst="rect">
+            <a:avLst/>
+          </a:prstGeom>
+          <a:solidFill>
+            <a:srgbClr val="A87A2E"/>
+          </a:solidFill>
+          <a:ln/>
+        </p:spPr>
+      </p:sp>
+      <p:sp>
+        <p:nvSpPr>
+          <p:cNvPr id="12" name="Text 10"/>
+          <p:cNvSpPr/>
+          <p:nvPr/>
+        </p:nvSpPr>
+        <p:spPr>
+          <a:xfrm>
+            <a:off x="7596530" y="5416550"/>
+            <a:ext cx="4036670" cy="698500"/>
+          </a:xfrm>
+          <a:prstGeom prst="rect">
+            <a:avLst/>
+          </a:prstGeom>
+          <a:noFill/>
+          <a:ln/>
+        </p:spPr>
+        <p:txBody>
+          <a:bodyPr wrap="square" lIns="0" tIns="0" rIns="0" bIns="0" rtlCol="0" anchor="t"/>
+          <a:lstStyle/>
+          <a:p>
+            <a:pPr algn="l" indent="0" marL="0">
+              <a:lnSpc>
+                <a:spcPct val="140000"/>
+              </a:lnSpc>
+              <a:buNone/>
+            </a:pPr>
+            <a:r>
+              <a:rPr lang="en-US" sz="1500" dirty="0">
                 <a:solidFill>
                   <a:srgbClr val="332F2A"/>
                 </a:solidFill>
@@ -12674,51 +12964,9 @@
                 <a:ea typeface="Libre Franklin" pitchFamily="34" charset="-122"/>
                 <a:cs typeface="Libre Franklin" pitchFamily="34" charset="-120"/>
               </a:rPr>
-              <a:t>Requirements, design, implementation, testing, deployment — the software lifecycle, taught since the 1970s.</a:t>
-            </a:r>
-            <a:endParaRPr lang="en-US" sz="1600" dirty="0"/>
-          </a:p>
-        </p:txBody>
-      </p:sp>
-      <p:sp>
-        <p:nvSpPr>
-          <p:cNvPr id="12" name="Text 10"/>
-          <p:cNvSpPr/>
-          <p:nvPr/>
-        </p:nvSpPr>
-        <p:spPr>
-          <a:xfrm>
-            <a:off x="6350000" y="3162300"/>
-            <a:ext cx="5283200" cy="1270000"/>
-          </a:xfrm>
-          <a:prstGeom prst="rect">
-            <a:avLst/>
-          </a:prstGeom>
-          <a:noFill/>
-          <a:ln/>
-        </p:spPr>
-        <p:txBody>
-          <a:bodyPr wrap="square" lIns="0" tIns="0" rIns="0" bIns="0" rtlCol="0" anchor="t"/>
-          <a:lstStyle/>
-          <a:p>
-            <a:pPr algn="l" indent="0" marL="0">
-              <a:lnSpc>
-                <a:spcPct val="145000"/>
-              </a:lnSpc>
-              <a:buNone/>
-            </a:pPr>
-            <a:r>
-              <a:rPr lang="en-US" sz="1600" dirty="0">
-                <a:solidFill>
-                  <a:srgbClr val="77726A"/>
-                </a:solidFill>
-                <a:latin typeface="Libre Franklin" pitchFamily="34" charset="0"/>
-                <a:ea typeface="Libre Franklin" pitchFamily="34" charset="-122"/>
-                <a:cs typeface="Libre Franklin" pitchFamily="34" charset="-120"/>
-              </a:rPr>
-              <a:t>The agent needs these written down for the same reason a team of people does. Neither can read your mind.</a:t>
-            </a:r>
-            <a:endParaRPr lang="en-US" sz="1600" dirty="0"/>
+              <a:t>Plain English, in a plain file. By Session 2 you will be editing it.</a:t>
+            </a:r>
+            <a:endParaRPr lang="en-US" sz="1500" dirty="0"/>
           </a:p>
         </p:txBody>
       </p:sp>
@@ -12832,7 +13080,7 @@
                 <a:ea typeface="Libre Franklin" pitchFamily="34" charset="-122"/>
                 <a:cs typeface="Libre Franklin" pitchFamily="34" charset="-120"/>
               </a:rPr>
-              <a:t>The words used in industry</a:t>
+              <a:t>You have seen these gates before</a:t>
             </a:r>
             <a:endParaRPr lang="en-US" sz="2800" dirty="0"/>
           </a:p>
@@ -12951,85 +13199,194 @@
         <p:spPr>
           <a:xfrm>
             <a:off x="558800" y="1511300"/>
-            <a:ext cx="190500" cy="317500"/>
-          </a:xfrm>
-          <a:prstGeom prst="rect">
-            <a:avLst/>
-          </a:prstGeom>
-          <a:noFill/>
-          <a:ln/>
-        </p:spPr>
-        <p:txBody>
-          <a:bodyPr wrap="square" lIns="0" tIns="0" rIns="0" bIns="0" rtlCol="0" anchor="t"/>
-          <a:lstStyle/>
-          <a:p>
-            <a:pPr algn="l" indent="0" marL="0">
-              <a:lnSpc>
-                <a:spcPct val="140000"/>
-              </a:lnSpc>
-              <a:buNone/>
-            </a:pPr>
-            <a:r>
-              <a:rPr lang="en-US" sz="1700" dirty="0">
+            <a:ext cx="5283200" cy="254000"/>
+          </a:xfrm>
+          <a:prstGeom prst="rect">
+            <a:avLst/>
+          </a:prstGeom>
+          <a:noFill/>
+          <a:ln/>
+        </p:spPr>
+        <p:txBody>
+          <a:bodyPr wrap="square" lIns="0" tIns="0" rIns="0" bIns="0" rtlCol="0" anchor="t"/>
+          <a:lstStyle/>
+          <a:p>
+            <a:pPr algn="l" indent="0" marL="0">
+              <a:lnSpc>
+                <a:spcPct val="145000"/>
+              </a:lnSpc>
+              <a:buNone/>
+            </a:pPr>
+            <a:r>
+              <a:rPr lang="en-US" sz="1300" spc="130" kern="0" dirty="0">
                 <a:solidFill>
                   <a:srgbClr val="A87A2E"/>
+                </a:solidFill>
+                <a:latin typeface="IBM Plex Mono" pitchFamily="34" charset="0"/>
+                <a:ea typeface="IBM Plex Mono" pitchFamily="34" charset="-122"/>
+                <a:cs typeface="IBM Plex Mono" pitchFamily="34" charset="-120"/>
+              </a:rPr>
+              <a:t>THE GATES YOU RUN</a:t>
+            </a:r>
+            <a:endParaRPr lang="en-US" sz="1300" dirty="0"/>
+          </a:p>
+        </p:txBody>
+      </p:sp>
+      <p:sp>
+        <p:nvSpPr>
+          <p:cNvPr id="8" name="Text 6"/>
+          <p:cNvSpPr/>
+          <p:nvPr/>
+        </p:nvSpPr>
+        <p:spPr>
+          <a:xfrm>
+            <a:off x="558800" y="1917700"/>
+            <a:ext cx="5283200" cy="1270000"/>
+          </a:xfrm>
+          <a:prstGeom prst="rect">
+            <a:avLst/>
+          </a:prstGeom>
+          <a:noFill/>
+          <a:ln/>
+        </p:spPr>
+        <p:txBody>
+          <a:bodyPr wrap="square" lIns="0" tIns="0" rIns="0" bIns="0" rtlCol="0" anchor="t"/>
+          <a:lstStyle/>
+          <a:p>
+            <a:pPr algn="l" indent="0" marL="0">
+              <a:lnSpc>
+                <a:spcPct val="145000"/>
+              </a:lnSpc>
+              <a:buNone/>
+            </a:pPr>
+            <a:r>
+              <a:rPr lang="en-US" sz="1600" dirty="0">
+                <a:solidFill>
+                  <a:srgbClr val="332F2A"/>
                 </a:solidFill>
                 <a:latin typeface="Libre Franklin" pitchFamily="34" charset="0"/>
                 <a:ea typeface="Libre Franklin" pitchFamily="34" charset="-122"/>
                 <a:cs typeface="Libre Franklin" pitchFamily="34" charset="-120"/>
               </a:rPr>
-              <a:t>—</a:t>
-            </a:r>
-            <a:endParaRPr lang="en-US" sz="1700" dirty="0"/>
-          </a:p>
-        </p:txBody>
-      </p:sp>
-      <p:sp>
-        <p:nvSpPr>
-          <p:cNvPr id="8" name="Text 6"/>
-          <p:cNvSpPr/>
-          <p:nvPr/>
-        </p:nvSpPr>
-        <p:spPr>
-          <a:xfrm>
-            <a:off x="927100" y="1511300"/>
-            <a:ext cx="9156700" cy="753110"/>
-          </a:xfrm>
-          <a:prstGeom prst="rect">
-            <a:avLst/>
-          </a:prstGeom>
-          <a:noFill/>
-          <a:ln/>
-        </p:spPr>
-        <p:txBody>
-          <a:bodyPr wrap="square" lIns="0" tIns="0" rIns="0" bIns="0" rtlCol="0" anchor="t"/>
-          <a:lstStyle/>
-          <a:p>
-            <a:pPr algn="l" indent="0" marL="0">
-              <a:lnSpc>
-                <a:spcPct val="145000"/>
-              </a:lnSpc>
-              <a:buNone/>
-            </a:pPr>
-            <a:r>
-              <a:rPr lang="en-US" sz="1700" b="1" dirty="0">
-                <a:solidFill>
-                  <a:srgbClr val="332F2A"/>
+              <a:t>Intent, then spec, then plan, then build one task at a time, then ship.</a:t>
+            </a:r>
+            <a:endParaRPr lang="en-US" sz="1600" dirty="0"/>
+          </a:p>
+        </p:txBody>
+      </p:sp>
+      <p:sp>
+        <p:nvSpPr>
+          <p:cNvPr id="9" name="Text 7"/>
+          <p:cNvSpPr/>
+          <p:nvPr/>
+        </p:nvSpPr>
+        <p:spPr>
+          <a:xfrm>
+            <a:off x="558800" y="3162300"/>
+            <a:ext cx="5283200" cy="1270000"/>
+          </a:xfrm>
+          <a:prstGeom prst="rect">
+            <a:avLst/>
+          </a:prstGeom>
+          <a:noFill/>
+          <a:ln/>
+        </p:spPr>
+        <p:txBody>
+          <a:bodyPr wrap="square" lIns="0" tIns="0" rIns="0" bIns="0" rtlCol="0" anchor="t"/>
+          <a:lstStyle/>
+          <a:p>
+            <a:pPr algn="l" indent="0" marL="0">
+              <a:lnSpc>
+                <a:spcPct val="145000"/>
+              </a:lnSpc>
+              <a:buNone/>
+            </a:pPr>
+            <a:r>
+              <a:rPr lang="en-US" sz="1600" dirty="0">
+                <a:solidFill>
+                  <a:srgbClr val="77726A"/>
                 </a:solidFill>
                 <a:latin typeface="Libre Franklin" pitchFamily="34" charset="0"/>
                 <a:ea typeface="Libre Franklin" pitchFamily="34" charset="-122"/>
                 <a:cs typeface="Libre Franklin" pitchFamily="34" charset="-120"/>
               </a:rPr>
-              <a:t>Intent. </a:t>
-            </a:r>
-            <a:pPr algn="l" indent="0" marL="0">
-              <a:lnSpc>
-                <a:spcPct val="145000"/>
-              </a:lnSpc>
-              <a:buNone/>
-            </a:pPr>
-            <a:r>
-              <a:rPr lang="en-US" sz="1700" dirty="0">
+              <a:t>Five steps that fit in a two-hour lab and produce four short documents.</a:t>
+            </a:r>
+            <a:endParaRPr lang="en-US" sz="1600" dirty="0"/>
+          </a:p>
+        </p:txBody>
+      </p:sp>
+      <p:sp>
+        <p:nvSpPr>
+          <p:cNvPr id="10" name="Text 8"/>
+          <p:cNvSpPr/>
+          <p:nvPr/>
+        </p:nvSpPr>
+        <p:spPr>
+          <a:xfrm>
+            <a:off x="6350000" y="1511300"/>
+            <a:ext cx="5283200" cy="254000"/>
+          </a:xfrm>
+          <a:prstGeom prst="rect">
+            <a:avLst/>
+          </a:prstGeom>
+          <a:noFill/>
+          <a:ln/>
+        </p:spPr>
+        <p:txBody>
+          <a:bodyPr wrap="square" lIns="0" tIns="0" rIns="0" bIns="0" rtlCol="0" anchor="t"/>
+          <a:lstStyle/>
+          <a:p>
+            <a:pPr algn="l" indent="0" marL="0">
+              <a:lnSpc>
+                <a:spcPct val="145000"/>
+              </a:lnSpc>
+              <a:buNone/>
+            </a:pPr>
+            <a:r>
+              <a:rPr lang="en-US" sz="1300" spc="130" kern="0" dirty="0">
+                <a:solidFill>
+                  <a:srgbClr val="A87A2E"/>
+                </a:solidFill>
+                <a:latin typeface="IBM Plex Mono" pitchFamily="34" charset="0"/>
+                <a:ea typeface="IBM Plex Mono" pitchFamily="34" charset="-122"/>
+                <a:cs typeface="IBM Plex Mono" pitchFamily="34" charset="-120"/>
+              </a:rPr>
+              <a:t>WHAT IT IS CALLED ELSEWHERE</a:t>
+            </a:r>
+            <a:endParaRPr lang="en-US" sz="1300" dirty="0"/>
+          </a:p>
+        </p:txBody>
+      </p:sp>
+      <p:sp>
+        <p:nvSpPr>
+          <p:cNvPr id="11" name="Text 9"/>
+          <p:cNvSpPr/>
+          <p:nvPr/>
+        </p:nvSpPr>
+        <p:spPr>
+          <a:xfrm>
+            <a:off x="6350000" y="1917700"/>
+            <a:ext cx="5283200" cy="1270000"/>
+          </a:xfrm>
+          <a:prstGeom prst="rect">
+            <a:avLst/>
+          </a:prstGeom>
+          <a:noFill/>
+          <a:ln/>
+        </p:spPr>
+        <p:txBody>
+          <a:bodyPr wrap="square" lIns="0" tIns="0" rIns="0" bIns="0" rtlCol="0" anchor="t"/>
+          <a:lstStyle/>
+          <a:p>
+            <a:pPr algn="l" indent="0" marL="0">
+              <a:lnSpc>
+                <a:spcPct val="145000"/>
+              </a:lnSpc>
+              <a:buNone/>
+            </a:pPr>
+            <a:r>
+              <a:rPr lang="en-US" sz="1600" dirty="0">
                 <a:solidFill>
                   <a:srgbClr val="332F2A"/>
                 </a:solidFill>
@@ -13037,295 +13394,51 @@
                 <a:ea typeface="Libre Franklin" pitchFamily="34" charset="-122"/>
                 <a:cs typeface="Libre Franklin" pitchFamily="34" charset="-120"/>
               </a:rPr>
-              <a:t>The business goal, before anyone has decided how to build it. Your Gate 1.</a:t>
-            </a:r>
-            <a:endParaRPr lang="en-US" sz="1700" dirty="0"/>
-          </a:p>
-        </p:txBody>
-      </p:sp>
-      <p:sp>
-        <p:nvSpPr>
-          <p:cNvPr id="9" name="Text 7"/>
-          <p:cNvSpPr/>
-          <p:nvPr/>
-        </p:nvSpPr>
-        <p:spPr>
-          <a:xfrm>
-            <a:off x="558800" y="2391410"/>
-            <a:ext cx="190500" cy="317500"/>
-          </a:xfrm>
-          <a:prstGeom prst="rect">
-            <a:avLst/>
-          </a:prstGeom>
-          <a:noFill/>
-          <a:ln/>
-        </p:spPr>
-        <p:txBody>
-          <a:bodyPr wrap="square" lIns="0" tIns="0" rIns="0" bIns="0" rtlCol="0" anchor="t"/>
-          <a:lstStyle/>
-          <a:p>
-            <a:pPr algn="l" indent="0" marL="0">
-              <a:lnSpc>
-                <a:spcPct val="140000"/>
-              </a:lnSpc>
-              <a:buNone/>
-            </a:pPr>
-            <a:r>
-              <a:rPr lang="en-US" sz="1700" dirty="0">
-                <a:solidFill>
-                  <a:srgbClr val="A87A2E"/>
+              <a:t>Requirements, design, implementation, testing, deployment — the software lifecycle, taught since the 1970s.</a:t>
+            </a:r>
+            <a:endParaRPr lang="en-US" sz="1600" dirty="0"/>
+          </a:p>
+        </p:txBody>
+      </p:sp>
+      <p:sp>
+        <p:nvSpPr>
+          <p:cNvPr id="12" name="Text 10"/>
+          <p:cNvSpPr/>
+          <p:nvPr/>
+        </p:nvSpPr>
+        <p:spPr>
+          <a:xfrm>
+            <a:off x="6350000" y="3162300"/>
+            <a:ext cx="5283200" cy="1270000"/>
+          </a:xfrm>
+          <a:prstGeom prst="rect">
+            <a:avLst/>
+          </a:prstGeom>
+          <a:noFill/>
+          <a:ln/>
+        </p:spPr>
+        <p:txBody>
+          <a:bodyPr wrap="square" lIns="0" tIns="0" rIns="0" bIns="0" rtlCol="0" anchor="t"/>
+          <a:lstStyle/>
+          <a:p>
+            <a:pPr algn="l" indent="0" marL="0">
+              <a:lnSpc>
+                <a:spcPct val="145000"/>
+              </a:lnSpc>
+              <a:buNone/>
+            </a:pPr>
+            <a:r>
+              <a:rPr lang="en-US" sz="1600" dirty="0">
+                <a:solidFill>
+                  <a:srgbClr val="77726A"/>
                 </a:solidFill>
                 <a:latin typeface="Libre Franklin" pitchFamily="34" charset="0"/>
                 <a:ea typeface="Libre Franklin" pitchFamily="34" charset="-122"/>
                 <a:cs typeface="Libre Franklin" pitchFamily="34" charset="-120"/>
               </a:rPr>
-              <a:t>—</a:t>
-            </a:r>
-            <a:endParaRPr lang="en-US" sz="1700" dirty="0"/>
-          </a:p>
-        </p:txBody>
-      </p:sp>
-      <p:sp>
-        <p:nvSpPr>
-          <p:cNvPr id="10" name="Text 8"/>
-          <p:cNvSpPr/>
-          <p:nvPr/>
-        </p:nvSpPr>
-        <p:spPr>
-          <a:xfrm>
-            <a:off x="927100" y="2391410"/>
-            <a:ext cx="9156700" cy="753110"/>
-          </a:xfrm>
-          <a:prstGeom prst="rect">
-            <a:avLst/>
-          </a:prstGeom>
-          <a:noFill/>
-          <a:ln/>
-        </p:spPr>
-        <p:txBody>
-          <a:bodyPr wrap="square" lIns="0" tIns="0" rIns="0" bIns="0" rtlCol="0" anchor="t"/>
-          <a:lstStyle/>
-          <a:p>
-            <a:pPr algn="l" indent="0" marL="0">
-              <a:lnSpc>
-                <a:spcPct val="145000"/>
-              </a:lnSpc>
-              <a:buNone/>
-            </a:pPr>
-            <a:r>
-              <a:rPr lang="en-US" sz="1700" b="1" dirty="0">
-                <a:solidFill>
-                  <a:srgbClr val="332F2A"/>
-                </a:solidFill>
-                <a:latin typeface="Libre Franklin" pitchFamily="34" charset="0"/>
-                <a:ea typeface="Libre Franklin" pitchFamily="34" charset="-122"/>
-                <a:cs typeface="Libre Franklin" pitchFamily="34" charset="-120"/>
-              </a:rPr>
-              <a:t>Units. </a:t>
-            </a:r>
-            <a:pPr algn="l" indent="0" marL="0">
-              <a:lnSpc>
-                <a:spcPct val="145000"/>
-              </a:lnSpc>
-              <a:buNone/>
-            </a:pPr>
-            <a:r>
-              <a:rPr lang="en-US" sz="1700" dirty="0">
-                <a:solidFill>
-                  <a:srgbClr val="332F2A"/>
-                </a:solidFill>
-                <a:latin typeface="Libre Franklin" pitchFamily="34" charset="0"/>
-                <a:ea typeface="Libre Franklin" pitchFamily="34" charset="-122"/>
-                <a:cs typeface="Libre Franklin" pitchFamily="34" charset="-120"/>
-              </a:rPr>
-              <a:t>The independent pieces an intent breaks into. Next week each of you owns one.</a:t>
-            </a:r>
-            <a:endParaRPr lang="en-US" sz="1700" dirty="0"/>
-          </a:p>
-        </p:txBody>
-      </p:sp>
-      <p:sp>
-        <p:nvSpPr>
-          <p:cNvPr id="11" name="Text 9"/>
-          <p:cNvSpPr/>
-          <p:nvPr/>
-        </p:nvSpPr>
-        <p:spPr>
-          <a:xfrm>
-            <a:off x="558800" y="3271520"/>
-            <a:ext cx="190500" cy="317500"/>
-          </a:xfrm>
-          <a:prstGeom prst="rect">
-            <a:avLst/>
-          </a:prstGeom>
-          <a:noFill/>
-          <a:ln/>
-        </p:spPr>
-        <p:txBody>
-          <a:bodyPr wrap="square" lIns="0" tIns="0" rIns="0" bIns="0" rtlCol="0" anchor="t"/>
-          <a:lstStyle/>
-          <a:p>
-            <a:pPr algn="l" indent="0" marL="0">
-              <a:lnSpc>
-                <a:spcPct val="140000"/>
-              </a:lnSpc>
-              <a:buNone/>
-            </a:pPr>
-            <a:r>
-              <a:rPr lang="en-US" sz="1700" dirty="0">
-                <a:solidFill>
-                  <a:srgbClr val="A87A2E"/>
-                </a:solidFill>
-                <a:latin typeface="Libre Franklin" pitchFamily="34" charset="0"/>
-                <a:ea typeface="Libre Franklin" pitchFamily="34" charset="-122"/>
-                <a:cs typeface="Libre Franklin" pitchFamily="34" charset="-120"/>
-              </a:rPr>
-              <a:t>—</a:t>
-            </a:r>
-            <a:endParaRPr lang="en-US" sz="1700" dirty="0"/>
-          </a:p>
-        </p:txBody>
-      </p:sp>
-      <p:sp>
-        <p:nvSpPr>
-          <p:cNvPr id="12" name="Text 10"/>
-          <p:cNvSpPr/>
-          <p:nvPr/>
-        </p:nvSpPr>
-        <p:spPr>
-          <a:xfrm>
-            <a:off x="927100" y="3271520"/>
-            <a:ext cx="9156700" cy="753110"/>
-          </a:xfrm>
-          <a:prstGeom prst="rect">
-            <a:avLst/>
-          </a:prstGeom>
-          <a:noFill/>
-          <a:ln/>
-        </p:spPr>
-        <p:txBody>
-          <a:bodyPr wrap="square" lIns="0" tIns="0" rIns="0" bIns="0" rtlCol="0" anchor="t"/>
-          <a:lstStyle/>
-          <a:p>
-            <a:pPr algn="l" indent="0" marL="0">
-              <a:lnSpc>
-                <a:spcPct val="145000"/>
-              </a:lnSpc>
-              <a:buNone/>
-            </a:pPr>
-            <a:r>
-              <a:rPr lang="en-US" sz="1700" b="1" dirty="0">
-                <a:solidFill>
-                  <a:srgbClr val="332F2A"/>
-                </a:solidFill>
-                <a:latin typeface="Libre Franklin" pitchFamily="34" charset="0"/>
-                <a:ea typeface="Libre Franklin" pitchFamily="34" charset="-122"/>
-                <a:cs typeface="Libre Franklin" pitchFamily="34" charset="-120"/>
-              </a:rPr>
-              <a:t>Bolts. </a:t>
-            </a:r>
-            <a:pPr algn="l" indent="0" marL="0">
-              <a:lnSpc>
-                <a:spcPct val="145000"/>
-              </a:lnSpc>
-              <a:buNone/>
-            </a:pPr>
-            <a:r>
-              <a:rPr lang="en-US" sz="1700" dirty="0">
-                <a:solidFill>
-                  <a:srgbClr val="332F2A"/>
-                </a:solidFill>
-                <a:latin typeface="Libre Franklin" pitchFamily="34" charset="0"/>
-                <a:ea typeface="Libre Franklin" pitchFamily="34" charset="-122"/>
-                <a:cs typeface="Libre Franklin" pitchFamily="34" charset="-120"/>
-              </a:rPr>
-              <a:t>Build cycles measured in hours rather than the two to six weeks of a sprint.</a:t>
-            </a:r>
-            <a:endParaRPr lang="en-US" sz="1700" dirty="0"/>
-          </a:p>
-        </p:txBody>
-      </p:sp>
-      <p:sp>
-        <p:nvSpPr>
-          <p:cNvPr id="13" name="Text 11"/>
-          <p:cNvSpPr/>
-          <p:nvPr/>
-        </p:nvSpPr>
-        <p:spPr>
-          <a:xfrm>
-            <a:off x="558800" y="4151630"/>
-            <a:ext cx="190500" cy="317500"/>
-          </a:xfrm>
-          <a:prstGeom prst="rect">
-            <a:avLst/>
-          </a:prstGeom>
-          <a:noFill/>
-          <a:ln/>
-        </p:spPr>
-        <p:txBody>
-          <a:bodyPr wrap="square" lIns="0" tIns="0" rIns="0" bIns="0" rtlCol="0" anchor="t"/>
-          <a:lstStyle/>
-          <a:p>
-            <a:pPr algn="l" indent="0" marL="0">
-              <a:lnSpc>
-                <a:spcPct val="140000"/>
-              </a:lnSpc>
-              <a:buNone/>
-            </a:pPr>
-            <a:r>
-              <a:rPr lang="en-US" sz="1700" dirty="0">
-                <a:solidFill>
-                  <a:srgbClr val="A87A2E"/>
-                </a:solidFill>
-                <a:latin typeface="Libre Franklin" pitchFamily="34" charset="0"/>
-                <a:ea typeface="Libre Franklin" pitchFamily="34" charset="-122"/>
-                <a:cs typeface="Libre Franklin" pitchFamily="34" charset="-120"/>
-              </a:rPr>
-              <a:t>—</a:t>
-            </a:r>
-            <a:endParaRPr lang="en-US" sz="1700" dirty="0"/>
-          </a:p>
-        </p:txBody>
-      </p:sp>
-      <p:sp>
-        <p:nvSpPr>
-          <p:cNvPr id="14" name="Text 12"/>
-          <p:cNvSpPr/>
-          <p:nvPr/>
-        </p:nvSpPr>
-        <p:spPr>
-          <a:xfrm>
-            <a:off x="927100" y="4151630"/>
-            <a:ext cx="9156700" cy="753110"/>
-          </a:xfrm>
-          <a:prstGeom prst="rect">
-            <a:avLst/>
-          </a:prstGeom>
-          <a:noFill/>
-          <a:ln/>
-        </p:spPr>
-        <p:txBody>
-          <a:bodyPr wrap="square" lIns="0" tIns="0" rIns="0" bIns="0" rtlCol="0" anchor="t"/>
-          <a:lstStyle/>
-          <a:p>
-            <a:pPr algn="l" indent="0" marL="0">
-              <a:lnSpc>
-                <a:spcPct val="145000"/>
-              </a:lnSpc>
-              <a:buNone/>
-            </a:pPr>
-            <a:r>
-              <a:rPr lang="en-US" sz="1700" dirty="0">
-                <a:solidFill>
-                  <a:srgbClr val="332F2A"/>
-                </a:solidFill>
-                <a:latin typeface="Libre Franklin" pitchFamily="34" charset="0"/>
-                <a:ea typeface="Libre Franklin" pitchFamily="34" charset="-122"/>
-                <a:cs typeface="Libre Franklin" pitchFamily="34" charset="-120"/>
-              </a:rPr>
-              <a:t>From AI-DLC, published by AWS in 2025. Its one rule: the AI proposes, and a human approves.</a:t>
-            </a:r>
-            <a:endParaRPr lang="en-US" sz="1700" dirty="0"/>
+              <a:t>The agent needs these written down for the same reason a team of people does. Neither can read your mind.</a:t>
+            </a:r>
+            <a:endParaRPr lang="en-US" sz="1600" dirty="0"/>
           </a:p>
         </p:txBody>
       </p:sp>
@@ -13340,6 +13453,613 @@
 <file path=ppt/slides/slide28.xml><?xml version="1.0" encoding="utf-8"?>
 <p:sld xmlns:a="http://schemas.openxmlformats.org/drawingml/2006/main" xmlns:r="http://schemas.openxmlformats.org/officeDocument/2006/relationships" xmlns:p="http://schemas.openxmlformats.org/presentationml/2006/main">
   <p:cSld name="Slide 28">
+    <p:bg>
+      <p:bgPr>
+        <a:solidFill>
+          <a:srgbClr val="FCFBF8"/>
+        </a:solidFill>
+      </p:bgPr>
+    </p:bg>
+    <p:spTree>
+      <p:nvGrpSpPr>
+        <p:cNvPr id="1" name=""/>
+        <p:cNvGrpSpPr/>
+        <p:nvPr/>
+      </p:nvGrpSpPr>
+      <p:grpSpPr>
+        <a:xfrm>
+          <a:off x="0" y="0"/>
+          <a:ext cx="0" cy="0"/>
+          <a:chOff x="0" y="0"/>
+          <a:chExt cx="0" cy="0"/>
+        </a:xfrm>
+      </p:grpSpPr>
+      <p:sp>
+        <p:nvSpPr>
+          <p:cNvPr id="2" name="Text 0"/>
+          <p:cNvSpPr/>
+          <p:nvPr/>
+        </p:nvSpPr>
+        <p:spPr>
+          <a:xfrm>
+            <a:off x="558800" y="355600"/>
+            <a:ext cx="11074400" cy="215900"/>
+          </a:xfrm>
+          <a:prstGeom prst="rect">
+            <a:avLst/>
+          </a:prstGeom>
+          <a:noFill/>
+          <a:ln/>
+        </p:spPr>
+        <p:txBody>
+          <a:bodyPr wrap="square" lIns="0" tIns="0" rIns="0" bIns="0" rtlCol="0" anchor="t"/>
+          <a:lstStyle/>
+          <a:p>
+            <a:pPr algn="l" indent="0" marL="0">
+              <a:lnSpc>
+                <a:spcPct val="145000"/>
+              </a:lnSpc>
+              <a:buNone/>
+            </a:pPr>
+            <a:r>
+              <a:rPr lang="en-US" sz="1200" spc="168" kern="0" dirty="0">
+                <a:solidFill>
+                  <a:srgbClr val="77726A"/>
+                </a:solidFill>
+                <a:latin typeface="IBM Plex Mono" pitchFamily="34" charset="0"/>
+                <a:ea typeface="IBM Plex Mono" pitchFamily="34" charset="-122"/>
+                <a:cs typeface="IBM Plex Mono" pitchFamily="34" charset="-120"/>
+              </a:rPr>
+              <a:t>SECTION 04</a:t>
+            </a:r>
+            <a:endParaRPr lang="en-US" sz="1200" dirty="0"/>
+          </a:p>
+        </p:txBody>
+      </p:sp>
+      <p:sp>
+        <p:nvSpPr>
+          <p:cNvPr id="3" name="Text 1"/>
+          <p:cNvSpPr/>
+          <p:nvPr/>
+        </p:nvSpPr>
+        <p:spPr>
+          <a:xfrm>
+            <a:off x="558800" y="635000"/>
+            <a:ext cx="11074400" cy="508000"/>
+          </a:xfrm>
+          <a:prstGeom prst="rect">
+            <a:avLst/>
+          </a:prstGeom>
+          <a:noFill/>
+          <a:ln/>
+        </p:spPr>
+        <p:txBody>
+          <a:bodyPr wrap="square" lIns="0" tIns="0" rIns="0" bIns="0" rtlCol="0" anchor="t"/>
+          <a:lstStyle/>
+          <a:p>
+            <a:pPr algn="l" indent="0" marL="0">
+              <a:lnSpc>
+                <a:spcPct val="110000"/>
+              </a:lnSpc>
+              <a:buNone/>
+            </a:pPr>
+            <a:r>
+              <a:rPr lang="en-US" sz="2800" b="1" dirty="0">
+                <a:solidFill>
+                  <a:srgbClr val="332F2A"/>
+                </a:solidFill>
+                <a:latin typeface="Libre Franklin" pitchFamily="34" charset="0"/>
+                <a:ea typeface="Libre Franklin" pitchFamily="34" charset="-122"/>
+                <a:cs typeface="Libre Franklin" pitchFamily="34" charset="-120"/>
+              </a:rPr>
+              <a:t>The words used in industry</a:t>
+            </a:r>
+            <a:endParaRPr lang="en-US" sz="2800" dirty="0"/>
+          </a:p>
+        </p:txBody>
+      </p:sp>
+      <p:sp>
+        <p:nvSpPr>
+          <p:cNvPr id="4" name="Shape 2"/>
+          <p:cNvSpPr/>
+          <p:nvPr/>
+        </p:nvSpPr>
+        <p:spPr>
+          <a:xfrm>
+            <a:off x="558800" y="1181100"/>
+            <a:ext cx="11074400" cy="6350"/>
+          </a:xfrm>
+          <a:prstGeom prst="rect">
+            <a:avLst/>
+          </a:prstGeom>
+          <a:solidFill>
+            <a:srgbClr val="E1DED7"/>
+          </a:solidFill>
+          <a:ln/>
+        </p:spPr>
+      </p:sp>
+      <p:sp>
+        <p:nvSpPr>
+          <p:cNvPr id="5" name="Text 3"/>
+          <p:cNvSpPr/>
+          <p:nvPr/>
+        </p:nvSpPr>
+        <p:spPr>
+          <a:xfrm>
+            <a:off x="558800" y="6337300"/>
+            <a:ext cx="9804400" cy="215900"/>
+          </a:xfrm>
+          <a:prstGeom prst="rect">
+            <a:avLst/>
+          </a:prstGeom>
+          <a:noFill/>
+          <a:ln/>
+        </p:spPr>
+        <p:txBody>
+          <a:bodyPr wrap="square" lIns="0" tIns="0" rIns="0" bIns="0" rtlCol="0" anchor="t"/>
+          <a:lstStyle/>
+          <a:p>
+            <a:pPr algn="l" indent="0" marL="0">
+              <a:lnSpc>
+                <a:spcPct val="145000"/>
+              </a:lnSpc>
+              <a:buNone/>
+            </a:pPr>
+            <a:r>
+              <a:rPr lang="en-US" sz="1200" dirty="0">
+                <a:solidFill>
+                  <a:srgbClr val="99948B"/>
+                </a:solidFill>
+                <a:latin typeface="IBM Plex Mono" pitchFamily="34" charset="0"/>
+                <a:ea typeface="IBM Plex Mono" pitchFamily="34" charset="-122"/>
+                <a:cs typeface="IBM Plex Mono" pitchFamily="34" charset="-120"/>
+              </a:rPr>
+              <a:t>AI for Software Development · Session 1</a:t>
+            </a:r>
+            <a:endParaRPr lang="en-US" sz="1200" dirty="0"/>
+          </a:p>
+        </p:txBody>
+      </p:sp>
+      <p:sp>
+        <p:nvSpPr>
+          <p:cNvPr id="6" name="Text 4"/>
+          <p:cNvSpPr/>
+          <p:nvPr/>
+        </p:nvSpPr>
+        <p:spPr>
+          <a:xfrm>
+            <a:off x="10363200" y="6337300"/>
+            <a:ext cx="1270000" cy="215900"/>
+          </a:xfrm>
+          <a:prstGeom prst="rect">
+            <a:avLst/>
+          </a:prstGeom>
+          <a:noFill/>
+          <a:ln/>
+        </p:spPr>
+        <p:txBody>
+          <a:bodyPr wrap="square" lIns="0" tIns="0" rIns="0" bIns="0" rtlCol="0" anchor="t"/>
+          <a:lstStyle/>
+          <a:p>
+            <a:pPr algn="r" indent="0" marL="0">
+              <a:lnSpc>
+                <a:spcPct val="145000"/>
+              </a:lnSpc>
+              <a:buNone/>
+            </a:pPr>
+            <a:r>
+              <a:rPr lang="en-US" sz="1200" dirty="0">
+                <a:solidFill>
+                  <a:srgbClr val="99948B"/>
+                </a:solidFill>
+                <a:latin typeface="IBM Plex Mono" pitchFamily="34" charset="0"/>
+                <a:ea typeface="IBM Plex Mono" pitchFamily="34" charset="-122"/>
+                <a:cs typeface="IBM Plex Mono" pitchFamily="34" charset="-120"/>
+              </a:rPr>
+              <a:t>28</a:t>
+            </a:r>
+            <a:endParaRPr lang="en-US" sz="1200" dirty="0"/>
+          </a:p>
+        </p:txBody>
+      </p:sp>
+      <p:sp>
+        <p:nvSpPr>
+          <p:cNvPr id="7" name="Text 5"/>
+          <p:cNvSpPr/>
+          <p:nvPr/>
+        </p:nvSpPr>
+        <p:spPr>
+          <a:xfrm>
+            <a:off x="558800" y="1511300"/>
+            <a:ext cx="190500" cy="317500"/>
+          </a:xfrm>
+          <a:prstGeom prst="rect">
+            <a:avLst/>
+          </a:prstGeom>
+          <a:noFill/>
+          <a:ln/>
+        </p:spPr>
+        <p:txBody>
+          <a:bodyPr wrap="square" lIns="0" tIns="0" rIns="0" bIns="0" rtlCol="0" anchor="t"/>
+          <a:lstStyle/>
+          <a:p>
+            <a:pPr algn="l" indent="0" marL="0">
+              <a:lnSpc>
+                <a:spcPct val="140000"/>
+              </a:lnSpc>
+              <a:buNone/>
+            </a:pPr>
+            <a:r>
+              <a:rPr lang="en-US" sz="1700" dirty="0">
+                <a:solidFill>
+                  <a:srgbClr val="A87A2E"/>
+                </a:solidFill>
+                <a:latin typeface="Libre Franklin" pitchFamily="34" charset="0"/>
+                <a:ea typeface="Libre Franklin" pitchFamily="34" charset="-122"/>
+                <a:cs typeface="Libre Franklin" pitchFamily="34" charset="-120"/>
+              </a:rPr>
+              <a:t>—</a:t>
+            </a:r>
+            <a:endParaRPr lang="en-US" sz="1700" dirty="0"/>
+          </a:p>
+        </p:txBody>
+      </p:sp>
+      <p:sp>
+        <p:nvSpPr>
+          <p:cNvPr id="8" name="Text 6"/>
+          <p:cNvSpPr/>
+          <p:nvPr/>
+        </p:nvSpPr>
+        <p:spPr>
+          <a:xfrm>
+            <a:off x="927100" y="1511300"/>
+            <a:ext cx="9156700" cy="753110"/>
+          </a:xfrm>
+          <a:prstGeom prst="rect">
+            <a:avLst/>
+          </a:prstGeom>
+          <a:noFill/>
+          <a:ln/>
+        </p:spPr>
+        <p:txBody>
+          <a:bodyPr wrap="square" lIns="0" tIns="0" rIns="0" bIns="0" rtlCol="0" anchor="t"/>
+          <a:lstStyle/>
+          <a:p>
+            <a:pPr algn="l" indent="0" marL="0">
+              <a:lnSpc>
+                <a:spcPct val="145000"/>
+              </a:lnSpc>
+              <a:buNone/>
+            </a:pPr>
+            <a:r>
+              <a:rPr lang="en-US" sz="1700" b="1" dirty="0">
+                <a:solidFill>
+                  <a:srgbClr val="332F2A"/>
+                </a:solidFill>
+                <a:latin typeface="Libre Franklin" pitchFamily="34" charset="0"/>
+                <a:ea typeface="Libre Franklin" pitchFamily="34" charset="-122"/>
+                <a:cs typeface="Libre Franklin" pitchFamily="34" charset="-120"/>
+              </a:rPr>
+              <a:t>Intent. </a:t>
+            </a:r>
+            <a:pPr algn="l" indent="0" marL="0">
+              <a:lnSpc>
+                <a:spcPct val="145000"/>
+              </a:lnSpc>
+              <a:buNone/>
+            </a:pPr>
+            <a:r>
+              <a:rPr lang="en-US" sz="1700" dirty="0">
+                <a:solidFill>
+                  <a:srgbClr val="332F2A"/>
+                </a:solidFill>
+                <a:latin typeface="Libre Franklin" pitchFamily="34" charset="0"/>
+                <a:ea typeface="Libre Franklin" pitchFamily="34" charset="-122"/>
+                <a:cs typeface="Libre Franklin" pitchFamily="34" charset="-120"/>
+              </a:rPr>
+              <a:t>The business goal, before anyone has decided how to build it. Your Gate 1.</a:t>
+            </a:r>
+            <a:endParaRPr lang="en-US" sz="1700" dirty="0"/>
+          </a:p>
+        </p:txBody>
+      </p:sp>
+      <p:sp>
+        <p:nvSpPr>
+          <p:cNvPr id="9" name="Text 7"/>
+          <p:cNvSpPr/>
+          <p:nvPr/>
+        </p:nvSpPr>
+        <p:spPr>
+          <a:xfrm>
+            <a:off x="558800" y="2391410"/>
+            <a:ext cx="190500" cy="317500"/>
+          </a:xfrm>
+          <a:prstGeom prst="rect">
+            <a:avLst/>
+          </a:prstGeom>
+          <a:noFill/>
+          <a:ln/>
+        </p:spPr>
+        <p:txBody>
+          <a:bodyPr wrap="square" lIns="0" tIns="0" rIns="0" bIns="0" rtlCol="0" anchor="t"/>
+          <a:lstStyle/>
+          <a:p>
+            <a:pPr algn="l" indent="0" marL="0">
+              <a:lnSpc>
+                <a:spcPct val="140000"/>
+              </a:lnSpc>
+              <a:buNone/>
+            </a:pPr>
+            <a:r>
+              <a:rPr lang="en-US" sz="1700" dirty="0">
+                <a:solidFill>
+                  <a:srgbClr val="A87A2E"/>
+                </a:solidFill>
+                <a:latin typeface="Libre Franklin" pitchFamily="34" charset="0"/>
+                <a:ea typeface="Libre Franklin" pitchFamily="34" charset="-122"/>
+                <a:cs typeface="Libre Franklin" pitchFamily="34" charset="-120"/>
+              </a:rPr>
+              <a:t>—</a:t>
+            </a:r>
+            <a:endParaRPr lang="en-US" sz="1700" dirty="0"/>
+          </a:p>
+        </p:txBody>
+      </p:sp>
+      <p:sp>
+        <p:nvSpPr>
+          <p:cNvPr id="10" name="Text 8"/>
+          <p:cNvSpPr/>
+          <p:nvPr/>
+        </p:nvSpPr>
+        <p:spPr>
+          <a:xfrm>
+            <a:off x="927100" y="2391410"/>
+            <a:ext cx="9156700" cy="753110"/>
+          </a:xfrm>
+          <a:prstGeom prst="rect">
+            <a:avLst/>
+          </a:prstGeom>
+          <a:noFill/>
+          <a:ln/>
+        </p:spPr>
+        <p:txBody>
+          <a:bodyPr wrap="square" lIns="0" tIns="0" rIns="0" bIns="0" rtlCol="0" anchor="t"/>
+          <a:lstStyle/>
+          <a:p>
+            <a:pPr algn="l" indent="0" marL="0">
+              <a:lnSpc>
+                <a:spcPct val="145000"/>
+              </a:lnSpc>
+              <a:buNone/>
+            </a:pPr>
+            <a:r>
+              <a:rPr lang="en-US" sz="1700" b="1" dirty="0">
+                <a:solidFill>
+                  <a:srgbClr val="332F2A"/>
+                </a:solidFill>
+                <a:latin typeface="Libre Franklin" pitchFamily="34" charset="0"/>
+                <a:ea typeface="Libre Franklin" pitchFamily="34" charset="-122"/>
+                <a:cs typeface="Libre Franklin" pitchFamily="34" charset="-120"/>
+              </a:rPr>
+              <a:t>Units. </a:t>
+            </a:r>
+            <a:pPr algn="l" indent="0" marL="0">
+              <a:lnSpc>
+                <a:spcPct val="145000"/>
+              </a:lnSpc>
+              <a:buNone/>
+            </a:pPr>
+            <a:r>
+              <a:rPr lang="en-US" sz="1700" dirty="0">
+                <a:solidFill>
+                  <a:srgbClr val="332F2A"/>
+                </a:solidFill>
+                <a:latin typeface="Libre Franklin" pitchFamily="34" charset="0"/>
+                <a:ea typeface="Libre Franklin" pitchFamily="34" charset="-122"/>
+                <a:cs typeface="Libre Franklin" pitchFamily="34" charset="-120"/>
+              </a:rPr>
+              <a:t>The independent pieces an intent breaks into. Next week each of you owns one.</a:t>
+            </a:r>
+            <a:endParaRPr lang="en-US" sz="1700" dirty="0"/>
+          </a:p>
+        </p:txBody>
+      </p:sp>
+      <p:sp>
+        <p:nvSpPr>
+          <p:cNvPr id="11" name="Text 9"/>
+          <p:cNvSpPr/>
+          <p:nvPr/>
+        </p:nvSpPr>
+        <p:spPr>
+          <a:xfrm>
+            <a:off x="558800" y="3271520"/>
+            <a:ext cx="190500" cy="317500"/>
+          </a:xfrm>
+          <a:prstGeom prst="rect">
+            <a:avLst/>
+          </a:prstGeom>
+          <a:noFill/>
+          <a:ln/>
+        </p:spPr>
+        <p:txBody>
+          <a:bodyPr wrap="square" lIns="0" tIns="0" rIns="0" bIns="0" rtlCol="0" anchor="t"/>
+          <a:lstStyle/>
+          <a:p>
+            <a:pPr algn="l" indent="0" marL="0">
+              <a:lnSpc>
+                <a:spcPct val="140000"/>
+              </a:lnSpc>
+              <a:buNone/>
+            </a:pPr>
+            <a:r>
+              <a:rPr lang="en-US" sz="1700" dirty="0">
+                <a:solidFill>
+                  <a:srgbClr val="A87A2E"/>
+                </a:solidFill>
+                <a:latin typeface="Libre Franklin" pitchFamily="34" charset="0"/>
+                <a:ea typeface="Libre Franklin" pitchFamily="34" charset="-122"/>
+                <a:cs typeface="Libre Franklin" pitchFamily="34" charset="-120"/>
+              </a:rPr>
+              <a:t>—</a:t>
+            </a:r>
+            <a:endParaRPr lang="en-US" sz="1700" dirty="0"/>
+          </a:p>
+        </p:txBody>
+      </p:sp>
+      <p:sp>
+        <p:nvSpPr>
+          <p:cNvPr id="12" name="Text 10"/>
+          <p:cNvSpPr/>
+          <p:nvPr/>
+        </p:nvSpPr>
+        <p:spPr>
+          <a:xfrm>
+            <a:off x="927100" y="3271520"/>
+            <a:ext cx="9156700" cy="753110"/>
+          </a:xfrm>
+          <a:prstGeom prst="rect">
+            <a:avLst/>
+          </a:prstGeom>
+          <a:noFill/>
+          <a:ln/>
+        </p:spPr>
+        <p:txBody>
+          <a:bodyPr wrap="square" lIns="0" tIns="0" rIns="0" bIns="0" rtlCol="0" anchor="t"/>
+          <a:lstStyle/>
+          <a:p>
+            <a:pPr algn="l" indent="0" marL="0">
+              <a:lnSpc>
+                <a:spcPct val="145000"/>
+              </a:lnSpc>
+              <a:buNone/>
+            </a:pPr>
+            <a:r>
+              <a:rPr lang="en-US" sz="1700" b="1" dirty="0">
+                <a:solidFill>
+                  <a:srgbClr val="332F2A"/>
+                </a:solidFill>
+                <a:latin typeface="Libre Franklin" pitchFamily="34" charset="0"/>
+                <a:ea typeface="Libre Franklin" pitchFamily="34" charset="-122"/>
+                <a:cs typeface="Libre Franklin" pitchFamily="34" charset="-120"/>
+              </a:rPr>
+              <a:t>Bolts. </a:t>
+            </a:r>
+            <a:pPr algn="l" indent="0" marL="0">
+              <a:lnSpc>
+                <a:spcPct val="145000"/>
+              </a:lnSpc>
+              <a:buNone/>
+            </a:pPr>
+            <a:r>
+              <a:rPr lang="en-US" sz="1700" dirty="0">
+                <a:solidFill>
+                  <a:srgbClr val="332F2A"/>
+                </a:solidFill>
+                <a:latin typeface="Libre Franklin" pitchFamily="34" charset="0"/>
+                <a:ea typeface="Libre Franklin" pitchFamily="34" charset="-122"/>
+                <a:cs typeface="Libre Franklin" pitchFamily="34" charset="-120"/>
+              </a:rPr>
+              <a:t>Build cycles measured in hours rather than the two to six weeks of a sprint.</a:t>
+            </a:r>
+            <a:endParaRPr lang="en-US" sz="1700" dirty="0"/>
+          </a:p>
+        </p:txBody>
+      </p:sp>
+      <p:sp>
+        <p:nvSpPr>
+          <p:cNvPr id="13" name="Text 11"/>
+          <p:cNvSpPr/>
+          <p:nvPr/>
+        </p:nvSpPr>
+        <p:spPr>
+          <a:xfrm>
+            <a:off x="558800" y="4151630"/>
+            <a:ext cx="190500" cy="317500"/>
+          </a:xfrm>
+          <a:prstGeom prst="rect">
+            <a:avLst/>
+          </a:prstGeom>
+          <a:noFill/>
+          <a:ln/>
+        </p:spPr>
+        <p:txBody>
+          <a:bodyPr wrap="square" lIns="0" tIns="0" rIns="0" bIns="0" rtlCol="0" anchor="t"/>
+          <a:lstStyle/>
+          <a:p>
+            <a:pPr algn="l" indent="0" marL="0">
+              <a:lnSpc>
+                <a:spcPct val="140000"/>
+              </a:lnSpc>
+              <a:buNone/>
+            </a:pPr>
+            <a:r>
+              <a:rPr lang="en-US" sz="1700" dirty="0">
+                <a:solidFill>
+                  <a:srgbClr val="A87A2E"/>
+                </a:solidFill>
+                <a:latin typeface="Libre Franklin" pitchFamily="34" charset="0"/>
+                <a:ea typeface="Libre Franklin" pitchFamily="34" charset="-122"/>
+                <a:cs typeface="Libre Franklin" pitchFamily="34" charset="-120"/>
+              </a:rPr>
+              <a:t>—</a:t>
+            </a:r>
+            <a:endParaRPr lang="en-US" sz="1700" dirty="0"/>
+          </a:p>
+        </p:txBody>
+      </p:sp>
+      <p:sp>
+        <p:nvSpPr>
+          <p:cNvPr id="14" name="Text 12"/>
+          <p:cNvSpPr/>
+          <p:nvPr/>
+        </p:nvSpPr>
+        <p:spPr>
+          <a:xfrm>
+            <a:off x="927100" y="4151630"/>
+            <a:ext cx="9156700" cy="753110"/>
+          </a:xfrm>
+          <a:prstGeom prst="rect">
+            <a:avLst/>
+          </a:prstGeom>
+          <a:noFill/>
+          <a:ln/>
+        </p:spPr>
+        <p:txBody>
+          <a:bodyPr wrap="square" lIns="0" tIns="0" rIns="0" bIns="0" rtlCol="0" anchor="t"/>
+          <a:lstStyle/>
+          <a:p>
+            <a:pPr algn="l" indent="0" marL="0">
+              <a:lnSpc>
+                <a:spcPct val="145000"/>
+              </a:lnSpc>
+              <a:buNone/>
+            </a:pPr>
+            <a:r>
+              <a:rPr lang="en-US" sz="1700" dirty="0">
+                <a:solidFill>
+                  <a:srgbClr val="332F2A"/>
+                </a:solidFill>
+                <a:latin typeface="Libre Franklin" pitchFamily="34" charset="0"/>
+                <a:ea typeface="Libre Franklin" pitchFamily="34" charset="-122"/>
+                <a:cs typeface="Libre Franklin" pitchFamily="34" charset="-120"/>
+              </a:rPr>
+              <a:t>From AI-DLC, published by AWS in 2025. Its one rule: the AI proposes, and a human approves.</a:t>
+            </a:r>
+            <a:endParaRPr lang="en-US" sz="1700" dirty="0"/>
+          </a:p>
+        </p:txBody>
+      </p:sp>
+    </p:spTree>
+  </p:cSld>
+  <p:clrMapOvr>
+    <a:masterClrMapping/>
+  </p:clrMapOvr>
+</p:sld>
+</file>
+
+<file path=ppt/slides/slide29.xml><?xml version="1.0" encoding="utf-8"?>
+<p:sld xmlns:a="http://schemas.openxmlformats.org/drawingml/2006/main" xmlns:r="http://schemas.openxmlformats.org/officeDocument/2006/relationships" xmlns:p="http://schemas.openxmlformats.org/presentationml/2006/main">
+  <p:cSld name="Slide 29">
     <p:bg>
       <p:bgPr>
         <a:solidFill>
@@ -13484,599 +14204,6 @@
               <a:t>Delete the warm-up and build it again through the gates. Instructions in labs/LAB1.md. 70 minutes.</a:t>
             </a:r>
             <a:endParaRPr lang="en-US" sz="1700" dirty="0"/>
-          </a:p>
-        </p:txBody>
-      </p:sp>
-    </p:spTree>
-  </p:cSld>
-  <p:clrMapOvr>
-    <a:masterClrMapping/>
-  </p:clrMapOvr>
-</p:sld>
-</file>
-
-<file path=ppt/slides/slide29.xml><?xml version="1.0" encoding="utf-8"?>
-<p:sld xmlns:a="http://schemas.openxmlformats.org/drawingml/2006/main" xmlns:r="http://schemas.openxmlformats.org/officeDocument/2006/relationships" xmlns:p="http://schemas.openxmlformats.org/presentationml/2006/main">
-  <p:cSld name="Slide 29">
-    <p:bg>
-      <p:bgPr>
-        <a:solidFill>
-          <a:srgbClr val="FCFBF8"/>
-        </a:solidFill>
-      </p:bgPr>
-    </p:bg>
-    <p:spTree>
-      <p:nvGrpSpPr>
-        <p:cNvPr id="1" name=""/>
-        <p:cNvGrpSpPr/>
-        <p:nvPr/>
-      </p:nvGrpSpPr>
-      <p:grpSpPr>
-        <a:xfrm>
-          <a:off x="0" y="0"/>
-          <a:ext cx="0" cy="0"/>
-          <a:chOff x="0" y="0"/>
-          <a:chExt cx="0" cy="0"/>
-        </a:xfrm>
-      </p:grpSpPr>
-      <p:sp>
-        <p:nvSpPr>
-          <p:cNvPr id="2" name="Text 0"/>
-          <p:cNvSpPr/>
-          <p:nvPr/>
-        </p:nvSpPr>
-        <p:spPr>
-          <a:xfrm>
-            <a:off x="558800" y="355600"/>
-            <a:ext cx="11074400" cy="215900"/>
-          </a:xfrm>
-          <a:prstGeom prst="rect">
-            <a:avLst/>
-          </a:prstGeom>
-          <a:noFill/>
-          <a:ln/>
-        </p:spPr>
-        <p:txBody>
-          <a:bodyPr wrap="square" lIns="0" tIns="0" rIns="0" bIns="0" rtlCol="0" anchor="t"/>
-          <a:lstStyle/>
-          <a:p>
-            <a:pPr algn="l" indent="0" marL="0">
-              <a:lnSpc>
-                <a:spcPct val="145000"/>
-              </a:lnSpc>
-              <a:buNone/>
-            </a:pPr>
-            <a:r>
-              <a:rPr lang="en-US" sz="1200" spc="168" kern="0" dirty="0">
-                <a:solidFill>
-                  <a:srgbClr val="77726A"/>
-                </a:solidFill>
-                <a:latin typeface="IBM Plex Mono" pitchFamily="34" charset="0"/>
-                <a:ea typeface="IBM Plex Mono" pitchFamily="34" charset="-122"/>
-                <a:cs typeface="IBM Plex Mono" pitchFamily="34" charset="-120"/>
-              </a:rPr>
-              <a:t>WORKSHOP 05</a:t>
-            </a:r>
-            <a:endParaRPr lang="en-US" sz="1200" dirty="0"/>
-          </a:p>
-        </p:txBody>
-      </p:sp>
-      <p:sp>
-        <p:nvSpPr>
-          <p:cNvPr id="3" name="Text 1"/>
-          <p:cNvSpPr/>
-          <p:nvPr/>
-        </p:nvSpPr>
-        <p:spPr>
-          <a:xfrm>
-            <a:off x="558800" y="635000"/>
-            <a:ext cx="11074400" cy="508000"/>
-          </a:xfrm>
-          <a:prstGeom prst="rect">
-            <a:avLst/>
-          </a:prstGeom>
-          <a:noFill/>
-          <a:ln/>
-        </p:spPr>
-        <p:txBody>
-          <a:bodyPr wrap="square" lIns="0" tIns="0" rIns="0" bIns="0" rtlCol="0" anchor="t"/>
-          <a:lstStyle/>
-          <a:p>
-            <a:pPr algn="l" indent="0" marL="0">
-              <a:lnSpc>
-                <a:spcPct val="110000"/>
-              </a:lnSpc>
-              <a:buNone/>
-            </a:pPr>
-            <a:r>
-              <a:rPr lang="en-US" sz="2800" b="1" dirty="0">
-                <a:solidFill>
-                  <a:srgbClr val="332F2A"/>
-                </a:solidFill>
-                <a:latin typeface="Libre Franklin" pitchFamily="34" charset="0"/>
-                <a:ea typeface="Libre Franklin" pitchFamily="34" charset="-122"/>
-                <a:cs typeface="Libre Franklin" pitchFamily="34" charset="-120"/>
-              </a:rPr>
-              <a:t>What is already in your repository</a:t>
-            </a:r>
-            <a:endParaRPr lang="en-US" sz="2800" dirty="0"/>
-          </a:p>
-        </p:txBody>
-      </p:sp>
-      <p:sp>
-        <p:nvSpPr>
-          <p:cNvPr id="4" name="Shape 2"/>
-          <p:cNvSpPr/>
-          <p:nvPr/>
-        </p:nvSpPr>
-        <p:spPr>
-          <a:xfrm>
-            <a:off x="558800" y="1181100"/>
-            <a:ext cx="11074400" cy="6350"/>
-          </a:xfrm>
-          <a:prstGeom prst="rect">
-            <a:avLst/>
-          </a:prstGeom>
-          <a:solidFill>
-            <a:srgbClr val="E1DED7"/>
-          </a:solidFill>
-          <a:ln/>
-        </p:spPr>
-      </p:sp>
-      <p:sp>
-        <p:nvSpPr>
-          <p:cNvPr id="5" name="Text 3"/>
-          <p:cNvSpPr/>
-          <p:nvPr/>
-        </p:nvSpPr>
-        <p:spPr>
-          <a:xfrm>
-            <a:off x="558800" y="6337300"/>
-            <a:ext cx="9804400" cy="215900"/>
-          </a:xfrm>
-          <a:prstGeom prst="rect">
-            <a:avLst/>
-          </a:prstGeom>
-          <a:noFill/>
-          <a:ln/>
-        </p:spPr>
-        <p:txBody>
-          <a:bodyPr wrap="square" lIns="0" tIns="0" rIns="0" bIns="0" rtlCol="0" anchor="t"/>
-          <a:lstStyle/>
-          <a:p>
-            <a:pPr algn="l" indent="0" marL="0">
-              <a:lnSpc>
-                <a:spcPct val="145000"/>
-              </a:lnSpc>
-              <a:buNone/>
-            </a:pPr>
-            <a:r>
-              <a:rPr lang="en-US" sz="1200" dirty="0">
-                <a:solidFill>
-                  <a:srgbClr val="99948B"/>
-                </a:solidFill>
-                <a:latin typeface="IBM Plex Mono" pitchFamily="34" charset="0"/>
-                <a:ea typeface="IBM Plex Mono" pitchFamily="34" charset="-122"/>
-                <a:cs typeface="IBM Plex Mono" pitchFamily="34" charset="-120"/>
-              </a:rPr>
-              <a:t>AI for Software Development · Session 1</a:t>
-            </a:r>
-            <a:endParaRPr lang="en-US" sz="1200" dirty="0"/>
-          </a:p>
-        </p:txBody>
-      </p:sp>
-      <p:sp>
-        <p:nvSpPr>
-          <p:cNvPr id="6" name="Text 4"/>
-          <p:cNvSpPr/>
-          <p:nvPr/>
-        </p:nvSpPr>
-        <p:spPr>
-          <a:xfrm>
-            <a:off x="10363200" y="6337300"/>
-            <a:ext cx="1270000" cy="215900"/>
-          </a:xfrm>
-          <a:prstGeom prst="rect">
-            <a:avLst/>
-          </a:prstGeom>
-          <a:noFill/>
-          <a:ln/>
-        </p:spPr>
-        <p:txBody>
-          <a:bodyPr wrap="square" lIns="0" tIns="0" rIns="0" bIns="0" rtlCol="0" anchor="t"/>
-          <a:lstStyle/>
-          <a:p>
-            <a:pPr algn="r" indent="0" marL="0">
-              <a:lnSpc>
-                <a:spcPct val="145000"/>
-              </a:lnSpc>
-              <a:buNone/>
-            </a:pPr>
-            <a:r>
-              <a:rPr lang="en-US" sz="1200" dirty="0">
-                <a:solidFill>
-                  <a:srgbClr val="99948B"/>
-                </a:solidFill>
-                <a:latin typeface="IBM Plex Mono" pitchFamily="34" charset="0"/>
-                <a:ea typeface="IBM Plex Mono" pitchFamily="34" charset="-122"/>
-                <a:cs typeface="IBM Plex Mono" pitchFamily="34" charset="-120"/>
-              </a:rPr>
-              <a:t>29</a:t>
-            </a:r>
-            <a:endParaRPr lang="en-US" sz="1200" dirty="0"/>
-          </a:p>
-        </p:txBody>
-      </p:sp>
-      <p:sp>
-        <p:nvSpPr>
-          <p:cNvPr id="7" name="Shape 5"/>
-          <p:cNvSpPr/>
-          <p:nvPr/>
-        </p:nvSpPr>
-        <p:spPr>
-          <a:xfrm>
-            <a:off x="558800" y="1511300"/>
-            <a:ext cx="6517030" cy="4572000"/>
-          </a:xfrm>
-          <a:prstGeom prst="rect">
-            <a:avLst/>
-          </a:prstGeom>
-          <a:solidFill>
-            <a:srgbClr val="F5F2EC"/>
-          </a:solidFill>
-          <a:ln w="6350">
-            <a:solidFill>
-              <a:srgbClr val="E1DED7"/>
-            </a:solidFill>
-            <a:prstDash val="solid"/>
-          </a:ln>
-        </p:spPr>
-      </p:sp>
-      <p:sp>
-        <p:nvSpPr>
-          <p:cNvPr id="8" name="Text 6"/>
-          <p:cNvSpPr/>
-          <p:nvPr/>
-        </p:nvSpPr>
-        <p:spPr>
-          <a:xfrm>
-            <a:off x="800100" y="1727200"/>
-            <a:ext cx="6034430" cy="4140200"/>
-          </a:xfrm>
-          <a:prstGeom prst="rect">
-            <a:avLst/>
-          </a:prstGeom>
-          <a:noFill/>
-          <a:ln/>
-        </p:spPr>
-        <p:txBody>
-          <a:bodyPr wrap="square" lIns="0" tIns="0" rIns="0" bIns="0" rtlCol="0" anchor="t"/>
-          <a:lstStyle/>
-          <a:p>
-            <a:pPr indent="0" marL="0">
-              <a:lnSpc>
-                <a:spcPct val="160000"/>
-              </a:lnSpc>
-              <a:buNone/>
-            </a:pPr>
-            <a:r>
-              <a:rPr lang="en-US" sz="1400" dirty="0">
-                <a:solidFill>
-                  <a:srgbClr val="332F2A"/>
-                </a:solidFill>
-                <a:latin typeface="IBM Plex Mono" pitchFamily="34" charset="0"/>
-                <a:ea typeface="IBM Plex Mono" pitchFamily="34" charset="-122"/>
-                <a:cs typeface="IBM Plex Mono" pitchFamily="34" charset="-120"/>
-              </a:rPr>
-              <a:t>app.py             run this</a:t>
-            </a:r>
-            <a:endParaRPr lang="en-US" sz="1400" dirty="0"/>
-          </a:p>
-          <a:p>
-            <a:pPr indent="0" marL="0">
-              <a:lnSpc>
-                <a:spcPct val="160000"/>
-              </a:lnSpc>
-              <a:buNone/>
-            </a:pPr>
-            <a:r>
-              <a:rPr lang="en-US" sz="1400" dirty="0">
-                <a:solidFill>
-                  <a:srgbClr val="332F2A"/>
-                </a:solidFill>
-                <a:latin typeface="IBM Plex Mono" pitchFamily="34" charset="0"/>
-                <a:ea typeface="IBM Plex Mono" pitchFamily="34" charset="-122"/>
-                <a:cs typeface="IBM Plex Mono" pitchFamily="34" charset="-120"/>
-              </a:rPr>
-              <a:t>pages/             ONE FILE per feature</a:t>
-            </a:r>
-            <a:endParaRPr lang="en-US" sz="1400" dirty="0"/>
-          </a:p>
-          <a:p>
-            <a:pPr indent="0" marL="0">
-              <a:lnSpc>
-                <a:spcPct val="160000"/>
-              </a:lnSpc>
-              <a:buNone/>
-            </a:pPr>
-            <a:r>
-              <a:rPr lang="en-US" sz="1400" dirty="0">
-                <a:solidFill>
-                  <a:srgbClr val="332F2A"/>
-                </a:solidFill>
-                <a:latin typeface="IBM Plex Mono" pitchFamily="34" charset="0"/>
-                <a:ea typeface="IBM Plex Mono" pitchFamily="34" charset="-122"/>
-                <a:cs typeface="IBM Plex Mono" pitchFamily="34" charset="-120"/>
-              </a:rPr>
-              <a:t>core/spectrum.py   &lt;- you build this</a:t>
-            </a:r>
-            <a:endParaRPr lang="en-US" sz="1400" dirty="0"/>
-          </a:p>
-          <a:p>
-            <a:pPr indent="0" marL="0">
-              <a:lnSpc>
-                <a:spcPct val="160000"/>
-              </a:lnSpc>
-              <a:buNone/>
-            </a:pPr>
-            <a:r>
-              <a:rPr lang="en-US" sz="1400" dirty="0">
-                <a:solidFill>
-                  <a:srgbClr val="332F2A"/>
-                </a:solidFill>
-                <a:latin typeface="IBM Plex Mono" pitchFamily="34" charset="0"/>
-                <a:ea typeface="IBM Plex Mono" pitchFamily="34" charset="-122"/>
-                <a:cs typeface="IBM Plex Mono" pitchFamily="34" charset="-120"/>
-              </a:rPr>
-              <a:t>core/llm.py        AI slot, empty till S3</a:t>
-            </a:r>
-            <a:endParaRPr lang="en-US" sz="1400" dirty="0"/>
-          </a:p>
-          <a:p>
-            <a:pPr indent="0" marL="0">
-              <a:lnSpc>
-                <a:spcPct val="160000"/>
-              </a:lnSpc>
-              <a:buNone/>
-            </a:pPr>
-            <a:r>
-              <a:rPr lang="en-US" sz="1400" dirty="0">
-                <a:solidFill>
-                  <a:srgbClr val="332F2A"/>
-                </a:solidFill>
-                <a:latin typeface="IBM Plex Mono" pitchFamily="34" charset="0"/>
-                <a:ea typeface="IBM Plex Mono" pitchFamily="34" charset="-122"/>
-                <a:cs typeface="IBM Plex Mono" pitchFamily="34" charset="-120"/>
-              </a:rPr>
-              <a:t>tests/             &lt;- your specification</a:t>
-            </a:r>
-            <a:endParaRPr lang="en-US" sz="1400" dirty="0"/>
-          </a:p>
-          <a:p>
-            <a:pPr indent="0" marL="0">
-              <a:lnSpc>
-                <a:spcPct val="160000"/>
-              </a:lnSpc>
-              <a:buNone/>
-            </a:pPr>
-            <a:r>
-              <a:rPr lang="en-US" sz="1400" dirty="0">
-                <a:solidFill>
-                  <a:srgbClr val="332F2A"/>
-                </a:solidFill>
-                <a:latin typeface="IBM Plex Mono" pitchFamily="34" charset="0"/>
-                <a:ea typeface="IBM Plex Mono" pitchFamily="34" charset="-122"/>
-                <a:cs typeface="IBM Plex Mono" pitchFamily="34" charset="-120"/>
-              </a:rPr>
-              <a:t>aidlc/             the four gate documents</a:t>
-            </a:r>
-            <a:endParaRPr lang="en-US" sz="1400" dirty="0"/>
-          </a:p>
-          <a:p>
-            <a:pPr indent="0" marL="0">
-              <a:lnSpc>
-                <a:spcPct val="160000"/>
-              </a:lnSpc>
-              <a:buNone/>
-            </a:pPr>
-            <a:r>
-              <a:rPr lang="en-US" sz="1400" dirty="0">
-                <a:solidFill>
-                  <a:srgbClr val="332F2A"/>
-                </a:solidFill>
-                <a:latin typeface="IBM Plex Mono" pitchFamily="34" charset="0"/>
-                <a:ea typeface="IBM Plex Mono" pitchFamily="34" charset="-122"/>
-                <a:cs typeface="IBM Plex Mono" pitchFamily="34" charset="-120"/>
-              </a:rPr>
-              <a:t>.clinerules        rules your agent obeys</a:t>
-            </a:r>
-            <a:endParaRPr lang="en-US" sz="1400" dirty="0"/>
-          </a:p>
-          <a:p>
-            <a:pPr indent="0" marL="0">
-              <a:lnSpc>
-                <a:spcPct val="160000"/>
-              </a:lnSpc>
-              <a:buNone/>
-            </a:pPr>
-            <a:r>
-              <a:rPr lang="en-US" sz="1400" dirty="0">
-                <a:solidFill>
-                  <a:srgbClr val="332F2A"/>
-                </a:solidFill>
-                <a:latin typeface="IBM Plex Mono" pitchFamily="34" charset="0"/>
-                <a:ea typeface="IBM Plex Mono" pitchFamily="34" charset="-122"/>
-                <a:cs typeface="IBM Plex Mono" pitchFamily="34" charset="-120"/>
-              </a:rPr>
-              <a:t>.clinerules.gates  the strict version</a:t>
-            </a:r>
-            <a:endParaRPr lang="en-US" sz="1400" dirty="0"/>
-          </a:p>
-          <a:p>
-            <a:pPr indent="0" marL="0">
-              <a:lnSpc>
-                <a:spcPct val="160000"/>
-              </a:lnSpc>
-              <a:buNone/>
-            </a:pPr>
-            <a:r>
-              <a:rPr lang="en-US" sz="1400" dirty="0">
-                <a:solidFill>
-                  <a:srgbClr val="332F2A"/>
-                </a:solidFill>
-                <a:latin typeface="IBM Plex Mono" pitchFamily="34" charset="0"/>
-                <a:ea typeface="IBM Plex Mono" pitchFamily="34" charset="-122"/>
-                <a:cs typeface="IBM Plex Mono" pitchFamily="34" charset="-120"/>
-              </a:rPr>
-              <a:t>.env               your keys. never commit</a:t>
-            </a:r>
-            <a:endParaRPr lang="en-US" sz="1400" dirty="0"/>
-          </a:p>
-        </p:txBody>
-      </p:sp>
-      <p:sp>
-        <p:nvSpPr>
-          <p:cNvPr id="9" name="Text 7"/>
-          <p:cNvSpPr/>
-          <p:nvPr/>
-        </p:nvSpPr>
-        <p:spPr>
-          <a:xfrm>
-            <a:off x="7431430" y="1511300"/>
-            <a:ext cx="4201770" cy="1894840"/>
-          </a:xfrm>
-          <a:prstGeom prst="rect">
-            <a:avLst/>
-          </a:prstGeom>
-          <a:noFill/>
-          <a:ln/>
-        </p:spPr>
-        <p:txBody>
-          <a:bodyPr wrap="square" lIns="0" tIns="0" rIns="0" bIns="0" rtlCol="0" anchor="t"/>
-          <a:lstStyle/>
-          <a:p>
-            <a:pPr algn="l" indent="0" marL="0">
-              <a:lnSpc>
-                <a:spcPct val="145000"/>
-              </a:lnSpc>
-              <a:buNone/>
-            </a:pPr>
-            <a:r>
-              <a:rPr lang="en-US" sz="1600" dirty="0">
-                <a:solidFill>
-                  <a:srgbClr val="332F2A"/>
-                </a:solidFill>
-                <a:latin typeface="Libre Franklin" pitchFamily="34" charset="0"/>
-                <a:ea typeface="Libre Franklin" pitchFamily="34" charset="-122"/>
-                <a:cs typeface="Libre Franklin" pitchFamily="34" charset="-120"/>
-              </a:rPr>
-              <a:t>Three minutes reading this saves you twenty later. The one to open now is .clinerules — plain English in a plain file, and your agent obeys it before every single request.</a:t>
-            </a:r>
-            <a:endParaRPr lang="en-US" sz="1600" dirty="0"/>
-          </a:p>
-        </p:txBody>
-      </p:sp>
-      <p:sp>
-        <p:nvSpPr>
-          <p:cNvPr id="10" name="Text 8"/>
-          <p:cNvSpPr/>
-          <p:nvPr/>
-        </p:nvSpPr>
-        <p:spPr>
-          <a:xfrm>
-            <a:off x="7431430" y="3533140"/>
-            <a:ext cx="4201770" cy="1305560"/>
-          </a:xfrm>
-          <a:prstGeom prst="rect">
-            <a:avLst/>
-          </a:prstGeom>
-          <a:noFill/>
-          <a:ln/>
-        </p:spPr>
-        <p:txBody>
-          <a:bodyPr wrap="square" lIns="0" tIns="0" rIns="0" bIns="0" rtlCol="0" anchor="t"/>
-          <a:lstStyle/>
-          <a:p>
-            <a:pPr algn="l" indent="0" marL="0">
-              <a:lnSpc>
-                <a:spcPct val="145000"/>
-              </a:lnSpc>
-              <a:buNone/>
-            </a:pPr>
-            <a:r>
-              <a:rPr lang="en-US" sz="1600" dirty="0">
-                <a:solidFill>
-                  <a:srgbClr val="77726A"/>
-                </a:solidFill>
-                <a:latin typeface="Libre Franklin" pitchFamily="34" charset="0"/>
-                <a:ea typeface="Libre Franklin" pitchFamily="34" charset="-122"/>
-                <a:cs typeface="Libre Franklin" pitchFamily="34" charset="-120"/>
-              </a:rPr>
-              <a:t>Leave tests/ shut for the moment. You meet it at Gate 2, which is the point where it does the most good.</a:t>
-            </a:r>
-            <a:endParaRPr lang="en-US" sz="1600" dirty="0"/>
-          </a:p>
-        </p:txBody>
-      </p:sp>
-      <p:sp>
-        <p:nvSpPr>
-          <p:cNvPr id="11" name="Shape 9"/>
-          <p:cNvSpPr/>
-          <p:nvPr/>
-        </p:nvSpPr>
-        <p:spPr>
-          <a:xfrm>
-            <a:off x="7431430" y="5384800"/>
-            <a:ext cx="12700" cy="698500"/>
-          </a:xfrm>
-          <a:prstGeom prst="rect">
-            <a:avLst/>
-          </a:prstGeom>
-          <a:solidFill>
-            <a:srgbClr val="A87A2E"/>
-          </a:solidFill>
-          <a:ln/>
-        </p:spPr>
-      </p:sp>
-      <p:sp>
-        <p:nvSpPr>
-          <p:cNvPr id="12" name="Text 10"/>
-          <p:cNvSpPr/>
-          <p:nvPr/>
-        </p:nvSpPr>
-        <p:spPr>
-          <a:xfrm>
-            <a:off x="7596530" y="5416550"/>
-            <a:ext cx="4036670" cy="698500"/>
-          </a:xfrm>
-          <a:prstGeom prst="rect">
-            <a:avLst/>
-          </a:prstGeom>
-          <a:noFill/>
-          <a:ln/>
-        </p:spPr>
-        <p:txBody>
-          <a:bodyPr wrap="square" lIns="0" tIns="0" rIns="0" bIns="0" rtlCol="0" anchor="t"/>
-          <a:lstStyle/>
-          <a:p>
-            <a:pPr algn="l" indent="0" marL="0">
-              <a:lnSpc>
-                <a:spcPct val="140000"/>
-              </a:lnSpc>
-              <a:buNone/>
-            </a:pPr>
-            <a:r>
-              <a:rPr lang="en-US" sz="1500" dirty="0">
-                <a:solidFill>
-                  <a:srgbClr val="332F2A"/>
-                </a:solidFill>
-                <a:latin typeface="Libre Franklin" pitchFamily="34" charset="0"/>
-                <a:ea typeface="Libre Franklin" pitchFamily="34" charset="-122"/>
-                <a:cs typeface="Libre Franklin" pitchFamily="34" charset="-120"/>
-              </a:rPr>
-              <a:t>One feature, one file. In Session 2 that is what lets four people build at once.</a:t>
-            </a:r>
-            <a:endParaRPr lang="en-US" sz="1500" dirty="0"/>
           </a:p>
         </p:txBody>
       </p:sp>
@@ -14801,7 +14928,7 @@
                 <a:ea typeface="Libre Franklin" pitchFamily="34" charset="-122"/>
                 <a:cs typeface="Libre Franklin" pitchFamily="34" charset="-120"/>
               </a:rPr>
-              <a:t>What you are building</a:t>
+              <a:t>What is already in your repository</a:t>
             </a:r>
             <a:endParaRPr lang="en-US" sz="2800" dirty="0"/>
           </a:p>
@@ -14911,39 +15038,243 @@
           </a:p>
         </p:txBody>
       </p:sp>
-      <p:pic>
-        <p:nvPicPr>
-          <p:cNvPr id="7" name="Image 0" descr="figures/fig-spectrum.png">    </p:cNvPr>
-          <p:cNvPicPr>
-            <a:picLocks noChangeAspect="1"/>
-          </p:cNvPicPr>
-          <p:nvPr/>
-        </p:nvPicPr>
-        <p:blipFill>
-          <a:blip r:embed="rId1"/>
-          <a:srcRect l="0" r="0" t="0" b="0"/>
-          <a:stretch/>
-        </p:blipFill>
+      <p:sp>
+        <p:nvSpPr>
+          <p:cNvPr id="7" name="Shape 5"/>
+          <p:cNvSpPr/>
+          <p:nvPr/>
+        </p:nvSpPr>
         <p:spPr>
           <a:xfrm>
             <a:off x="558800" y="1511300"/>
-            <a:ext cx="6134100" cy="4572000"/>
-          </a:xfrm>
-          <a:prstGeom prst="rect">
-            <a:avLst/>
-          </a:prstGeom>
-        </p:spPr>
-      </p:pic>
-      <p:sp>
-        <p:nvSpPr>
-          <p:cNvPr id="8" name="Text 5"/>
-          <p:cNvSpPr/>
-          <p:nvPr/>
-        </p:nvSpPr>
-        <p:spPr>
-          <a:xfrm>
-            <a:off x="7099300" y="1511300"/>
-            <a:ext cx="4533900" cy="1305560"/>
+            <a:ext cx="6517030" cy="4572000"/>
+          </a:xfrm>
+          <a:prstGeom prst="rect">
+            <a:avLst/>
+          </a:prstGeom>
+          <a:solidFill>
+            <a:srgbClr val="F5F2EC"/>
+          </a:solidFill>
+          <a:ln w="6350">
+            <a:solidFill>
+              <a:srgbClr val="E1DED7"/>
+            </a:solidFill>
+            <a:prstDash val="solid"/>
+          </a:ln>
+        </p:spPr>
+      </p:sp>
+      <p:sp>
+        <p:nvSpPr>
+          <p:cNvPr id="8" name="Text 6"/>
+          <p:cNvSpPr/>
+          <p:nvPr/>
+        </p:nvSpPr>
+        <p:spPr>
+          <a:xfrm>
+            <a:off x="800100" y="1727200"/>
+            <a:ext cx="6034430" cy="4140200"/>
+          </a:xfrm>
+          <a:prstGeom prst="rect">
+            <a:avLst/>
+          </a:prstGeom>
+          <a:noFill/>
+          <a:ln/>
+        </p:spPr>
+        <p:txBody>
+          <a:bodyPr wrap="square" lIns="0" tIns="0" rIns="0" bIns="0" rtlCol="0" anchor="t"/>
+          <a:lstStyle/>
+          <a:p>
+            <a:pPr indent="0" marL="0">
+              <a:lnSpc>
+                <a:spcPct val="160000"/>
+              </a:lnSpc>
+              <a:buNone/>
+            </a:pPr>
+            <a:r>
+              <a:rPr lang="en-US" sz="1400" dirty="0">
+                <a:solidFill>
+                  <a:srgbClr val="332F2A"/>
+                </a:solidFill>
+                <a:latin typeface="IBM Plex Mono" pitchFamily="34" charset="0"/>
+                <a:ea typeface="IBM Plex Mono" pitchFamily="34" charset="-122"/>
+                <a:cs typeface="IBM Plex Mono" pitchFamily="34" charset="-120"/>
+              </a:rPr>
+              <a:t>app.py             run this</a:t>
+            </a:r>
+            <a:endParaRPr lang="en-US" sz="1400" dirty="0"/>
+          </a:p>
+          <a:p>
+            <a:pPr indent="0" marL="0">
+              <a:lnSpc>
+                <a:spcPct val="160000"/>
+              </a:lnSpc>
+              <a:buNone/>
+            </a:pPr>
+            <a:r>
+              <a:rPr lang="en-US" sz="1400" dirty="0">
+                <a:solidFill>
+                  <a:srgbClr val="332F2A"/>
+                </a:solidFill>
+                <a:latin typeface="IBM Plex Mono" pitchFamily="34" charset="0"/>
+                <a:ea typeface="IBM Plex Mono" pitchFamily="34" charset="-122"/>
+                <a:cs typeface="IBM Plex Mono" pitchFamily="34" charset="-120"/>
+              </a:rPr>
+              <a:t>pages/             ONE FILE per feature</a:t>
+            </a:r>
+            <a:endParaRPr lang="en-US" sz="1400" dirty="0"/>
+          </a:p>
+          <a:p>
+            <a:pPr indent="0" marL="0">
+              <a:lnSpc>
+                <a:spcPct val="160000"/>
+              </a:lnSpc>
+              <a:buNone/>
+            </a:pPr>
+            <a:r>
+              <a:rPr lang="en-US" sz="1400" dirty="0">
+                <a:solidFill>
+                  <a:srgbClr val="332F2A"/>
+                </a:solidFill>
+                <a:latin typeface="IBM Plex Mono" pitchFamily="34" charset="0"/>
+                <a:ea typeface="IBM Plex Mono" pitchFamily="34" charset="-122"/>
+                <a:cs typeface="IBM Plex Mono" pitchFamily="34" charset="-120"/>
+              </a:rPr>
+              <a:t>core/spectrum.py   &lt;- you build this</a:t>
+            </a:r>
+            <a:endParaRPr lang="en-US" sz="1400" dirty="0"/>
+          </a:p>
+          <a:p>
+            <a:pPr indent="0" marL="0">
+              <a:lnSpc>
+                <a:spcPct val="160000"/>
+              </a:lnSpc>
+              <a:buNone/>
+            </a:pPr>
+            <a:r>
+              <a:rPr lang="en-US" sz="1400" dirty="0">
+                <a:solidFill>
+                  <a:srgbClr val="332F2A"/>
+                </a:solidFill>
+                <a:latin typeface="IBM Plex Mono" pitchFamily="34" charset="0"/>
+                <a:ea typeface="IBM Plex Mono" pitchFamily="34" charset="-122"/>
+                <a:cs typeface="IBM Plex Mono" pitchFamily="34" charset="-120"/>
+              </a:rPr>
+              <a:t>core/llm.py        AI slot, empty till S3</a:t>
+            </a:r>
+            <a:endParaRPr lang="en-US" sz="1400" dirty="0"/>
+          </a:p>
+          <a:p>
+            <a:pPr indent="0" marL="0">
+              <a:lnSpc>
+                <a:spcPct val="160000"/>
+              </a:lnSpc>
+              <a:buNone/>
+            </a:pPr>
+            <a:r>
+              <a:rPr lang="en-US" sz="1400" dirty="0">
+                <a:solidFill>
+                  <a:srgbClr val="332F2A"/>
+                </a:solidFill>
+                <a:latin typeface="IBM Plex Mono" pitchFamily="34" charset="0"/>
+                <a:ea typeface="IBM Plex Mono" pitchFamily="34" charset="-122"/>
+                <a:cs typeface="IBM Plex Mono" pitchFamily="34" charset="-120"/>
+              </a:rPr>
+              <a:t>tests/             &lt;- your specification</a:t>
+            </a:r>
+            <a:endParaRPr lang="en-US" sz="1400" dirty="0"/>
+          </a:p>
+          <a:p>
+            <a:pPr indent="0" marL="0">
+              <a:lnSpc>
+                <a:spcPct val="160000"/>
+              </a:lnSpc>
+              <a:buNone/>
+            </a:pPr>
+            <a:r>
+              <a:rPr lang="en-US" sz="1400" dirty="0">
+                <a:solidFill>
+                  <a:srgbClr val="332F2A"/>
+                </a:solidFill>
+                <a:latin typeface="IBM Plex Mono" pitchFamily="34" charset="0"/>
+                <a:ea typeface="IBM Plex Mono" pitchFamily="34" charset="-122"/>
+                <a:cs typeface="IBM Plex Mono" pitchFamily="34" charset="-120"/>
+              </a:rPr>
+              <a:t>aidlc/             the four gate documents</a:t>
+            </a:r>
+            <a:endParaRPr lang="en-US" sz="1400" dirty="0"/>
+          </a:p>
+          <a:p>
+            <a:pPr indent="0" marL="0">
+              <a:lnSpc>
+                <a:spcPct val="160000"/>
+              </a:lnSpc>
+              <a:buNone/>
+            </a:pPr>
+            <a:r>
+              <a:rPr lang="en-US" sz="1400" dirty="0">
+                <a:solidFill>
+                  <a:srgbClr val="332F2A"/>
+                </a:solidFill>
+                <a:latin typeface="IBM Plex Mono" pitchFamily="34" charset="0"/>
+                <a:ea typeface="IBM Plex Mono" pitchFamily="34" charset="-122"/>
+                <a:cs typeface="IBM Plex Mono" pitchFamily="34" charset="-120"/>
+              </a:rPr>
+              <a:t>.clinerules        rules your agent obeys</a:t>
+            </a:r>
+            <a:endParaRPr lang="en-US" sz="1400" dirty="0"/>
+          </a:p>
+          <a:p>
+            <a:pPr indent="0" marL="0">
+              <a:lnSpc>
+                <a:spcPct val="160000"/>
+              </a:lnSpc>
+              <a:buNone/>
+            </a:pPr>
+            <a:r>
+              <a:rPr lang="en-US" sz="1400" dirty="0">
+                <a:solidFill>
+                  <a:srgbClr val="332F2A"/>
+                </a:solidFill>
+                <a:latin typeface="IBM Plex Mono" pitchFamily="34" charset="0"/>
+                <a:ea typeface="IBM Plex Mono" pitchFamily="34" charset="-122"/>
+                <a:cs typeface="IBM Plex Mono" pitchFamily="34" charset="-120"/>
+              </a:rPr>
+              <a:t>.clinerules.gates  the strict version</a:t>
+            </a:r>
+            <a:endParaRPr lang="en-US" sz="1400" dirty="0"/>
+          </a:p>
+          <a:p>
+            <a:pPr indent="0" marL="0">
+              <a:lnSpc>
+                <a:spcPct val="160000"/>
+              </a:lnSpc>
+              <a:buNone/>
+            </a:pPr>
+            <a:r>
+              <a:rPr lang="en-US" sz="1400" dirty="0">
+                <a:solidFill>
+                  <a:srgbClr val="332F2A"/>
+                </a:solidFill>
+                <a:latin typeface="IBM Plex Mono" pitchFamily="34" charset="0"/>
+                <a:ea typeface="IBM Plex Mono" pitchFamily="34" charset="-122"/>
+                <a:cs typeface="IBM Plex Mono" pitchFamily="34" charset="-120"/>
+              </a:rPr>
+              <a:t>.env               your keys. never commit</a:t>
+            </a:r>
+            <a:endParaRPr lang="en-US" sz="1400" dirty="0"/>
+          </a:p>
+        </p:txBody>
+      </p:sp>
+      <p:sp>
+        <p:nvSpPr>
+          <p:cNvPr id="9" name="Text 7"/>
+          <p:cNvSpPr/>
+          <p:nvPr/>
+        </p:nvSpPr>
+        <p:spPr>
+          <a:xfrm>
+            <a:off x="7431430" y="1511300"/>
+            <a:ext cx="4201770" cy="1894840"/>
           </a:xfrm>
           <a:prstGeom prst="rect">
             <a:avLst/>
@@ -14970,7 +15301,7 @@
                 <a:ea typeface="Libre Franklin" pitchFamily="34" charset="-122"/>
                 <a:cs typeface="Libre Franklin" pitchFamily="34" charset="-120"/>
               </a:rPr>
-              <a:t>Two sine waves in, and a chart that finds them again: spikes at exactly the frequencies you chose, at exactly the heights you set.</a:t>
+              <a:t>Three minutes reading this saves you twenty later. The one to open now is .clinerules — plain English in a plain file, and your agent obeys it before every single request.</a:t>
             </a:r>
             <a:endParaRPr lang="en-US" sz="1600" dirty="0"/>
           </a:p>
@@ -14978,14 +15309,14 @@
       </p:sp>
       <p:sp>
         <p:nvSpPr>
-          <p:cNvPr id="9" name="Text 6"/>
-          <p:cNvSpPr/>
-          <p:nvPr/>
-        </p:nvSpPr>
-        <p:spPr>
-          <a:xfrm>
-            <a:off x="7099300" y="2943860"/>
-            <a:ext cx="4533900" cy="1305560"/>
+          <p:cNvPr id="10" name="Text 8"/>
+          <p:cNvSpPr/>
+          <p:nvPr/>
+        </p:nvSpPr>
+        <p:spPr>
+          <a:xfrm>
+            <a:off x="7431430" y="3533140"/>
+            <a:ext cx="4201770" cy="1305560"/>
           </a:xfrm>
           <a:prstGeom prst="rect">
             <a:avLst/>
@@ -15012,7 +15343,7 @@
                 <a:ea typeface="Libre Franklin" pitchFamily="34" charset="-122"/>
                 <a:cs typeface="Libre Franklin" pitchFamily="34" charset="-120"/>
               </a:rPr>
-              <a:t>The heights are the check. A spectrum can put every spike in the right place and still be wrong by a factor of five hundred.</a:t>
+              <a:t>Leave tests/ shut for the moment. You meet it at Gate 2, which is the point where it does the most good.</a:t>
             </a:r>
             <a:endParaRPr lang="en-US" sz="1600" dirty="0"/>
           </a:p>
@@ -15020,43 +15351,63 @@
       </p:sp>
       <p:sp>
         <p:nvSpPr>
-          <p:cNvPr id="10" name="Text 7"/>
-          <p:cNvSpPr/>
-          <p:nvPr/>
-        </p:nvSpPr>
-        <p:spPr>
-          <a:xfrm>
-            <a:off x="7099300" y="5956300"/>
-            <a:ext cx="4533900" cy="215900"/>
-          </a:xfrm>
-          <a:prstGeom prst="rect">
-            <a:avLst/>
-          </a:prstGeom>
-          <a:noFill/>
-          <a:ln/>
-        </p:spPr>
-        <p:txBody>
-          <a:bodyPr wrap="square" lIns="0" tIns="0" rIns="0" bIns="0" rtlCol="0" anchor="t"/>
-          <a:lstStyle/>
-          <a:p>
-            <a:pPr algn="l" indent="0" marL="0">
-              <a:lnSpc>
-                <a:spcPct val="145000"/>
-              </a:lnSpc>
-              <a:buNone/>
-            </a:pPr>
-            <a:r>
-              <a:rPr lang="en-US" sz="1200" dirty="0">
-                <a:solidFill>
-                  <a:srgbClr val="99948B"/>
-                </a:solidFill>
-                <a:latin typeface="IBM Plex Mono" pitchFamily="34" charset="0"/>
-                <a:ea typeface="IBM Plex Mono" pitchFamily="34" charset="-122"/>
-                <a:cs typeface="IBM Plex Mono" pitchFamily="34" charset="-120"/>
-              </a:rPr>
-              <a:t>Fig. 6 — output of pages/2_Spectrum_Analyzer.py</a:t>
-            </a:r>
-            <a:endParaRPr lang="en-US" sz="1200" dirty="0"/>
+          <p:cNvPr id="11" name="Shape 9"/>
+          <p:cNvSpPr/>
+          <p:nvPr/>
+        </p:nvSpPr>
+        <p:spPr>
+          <a:xfrm>
+            <a:off x="7431430" y="5384800"/>
+            <a:ext cx="12700" cy="698500"/>
+          </a:xfrm>
+          <a:prstGeom prst="rect">
+            <a:avLst/>
+          </a:prstGeom>
+          <a:solidFill>
+            <a:srgbClr val="A87A2E"/>
+          </a:solidFill>
+          <a:ln/>
+        </p:spPr>
+      </p:sp>
+      <p:sp>
+        <p:nvSpPr>
+          <p:cNvPr id="12" name="Text 10"/>
+          <p:cNvSpPr/>
+          <p:nvPr/>
+        </p:nvSpPr>
+        <p:spPr>
+          <a:xfrm>
+            <a:off x="7596530" y="5416550"/>
+            <a:ext cx="4036670" cy="698500"/>
+          </a:xfrm>
+          <a:prstGeom prst="rect">
+            <a:avLst/>
+          </a:prstGeom>
+          <a:noFill/>
+          <a:ln/>
+        </p:spPr>
+        <p:txBody>
+          <a:bodyPr wrap="square" lIns="0" tIns="0" rIns="0" bIns="0" rtlCol="0" anchor="t"/>
+          <a:lstStyle/>
+          <a:p>
+            <a:pPr algn="l" indent="0" marL="0">
+              <a:lnSpc>
+                <a:spcPct val="140000"/>
+              </a:lnSpc>
+              <a:buNone/>
+            </a:pPr>
+            <a:r>
+              <a:rPr lang="en-US" sz="1500" dirty="0">
+                <a:solidFill>
+                  <a:srgbClr val="332F2A"/>
+                </a:solidFill>
+                <a:latin typeface="Libre Franklin" pitchFamily="34" charset="0"/>
+                <a:ea typeface="Libre Franklin" pitchFamily="34" charset="-122"/>
+                <a:cs typeface="Libre Franklin" pitchFamily="34" charset="-120"/>
+              </a:rPr>
+              <a:t>One feature, one file. In Session 2 that is what lets four people build at once.</a:t>
+            </a:r>
+            <a:endParaRPr lang="en-US" sz="1500" dirty="0"/>
           </a:p>
         </p:txBody>
       </p:sp>
@@ -15170,7 +15521,7 @@
                 <a:ea typeface="Libre Franklin" pitchFamily="34" charset="-122"/>
                 <a:cs typeface="Libre Franklin" pitchFamily="34" charset="-120"/>
               </a:rPr>
-              <a:t>What goes in, what must come out</a:t>
+              <a:t>What you are building</a:t>
             </a:r>
             <a:endParaRPr lang="en-US" sz="2800" dirty="0"/>
           </a:p>
@@ -15280,255 +15631,152 @@
           </a:p>
         </p:txBody>
       </p:sp>
-      <p:sp>
-        <p:nvSpPr>
-          <p:cNvPr id="7" name="Text 5"/>
-          <p:cNvSpPr/>
-          <p:nvPr/>
-        </p:nvSpPr>
+      <p:pic>
+        <p:nvPicPr>
+          <p:cNvPr id="7" name="Image 0" descr="figures/fig-spectrum.png">    </p:cNvPr>
+          <p:cNvPicPr>
+            <a:picLocks noChangeAspect="1"/>
+          </p:cNvPicPr>
+          <p:nvPr/>
+        </p:nvPicPr>
+        <p:blipFill>
+          <a:blip r:embed="rId1"/>
+          <a:srcRect l="0" r="0" t="0" b="0"/>
+          <a:stretch/>
+        </p:blipFill>
         <p:spPr>
           <a:xfrm>
             <a:off x="558800" y="1511300"/>
-            <a:ext cx="5283200" cy="254000"/>
-          </a:xfrm>
-          <a:prstGeom prst="rect">
-            <a:avLst/>
-          </a:prstGeom>
-          <a:noFill/>
-          <a:ln/>
-        </p:spPr>
-        <p:txBody>
-          <a:bodyPr wrap="square" lIns="0" tIns="0" rIns="0" bIns="0" rtlCol="0" anchor="t"/>
-          <a:lstStyle/>
-          <a:p>
-            <a:pPr algn="l" indent="0" marL="0">
-              <a:lnSpc>
-                <a:spcPct val="145000"/>
-              </a:lnSpc>
-              <a:buNone/>
-            </a:pPr>
-            <a:r>
-              <a:rPr lang="en-US" sz="1300" spc="130" kern="0" dirty="0">
-                <a:solidFill>
-                  <a:srgbClr val="A87A2E"/>
+            <a:ext cx="6134100" cy="4572000"/>
+          </a:xfrm>
+          <a:prstGeom prst="rect">
+            <a:avLst/>
+          </a:prstGeom>
+        </p:spPr>
+      </p:pic>
+      <p:sp>
+        <p:nvSpPr>
+          <p:cNvPr id="8" name="Text 5"/>
+          <p:cNvSpPr/>
+          <p:nvPr/>
+        </p:nvSpPr>
+        <p:spPr>
+          <a:xfrm>
+            <a:off x="7099300" y="1511300"/>
+            <a:ext cx="4533900" cy="1305560"/>
+          </a:xfrm>
+          <a:prstGeom prst="rect">
+            <a:avLst/>
+          </a:prstGeom>
+          <a:noFill/>
+          <a:ln/>
+        </p:spPr>
+        <p:txBody>
+          <a:bodyPr wrap="square" lIns="0" tIns="0" rIns="0" bIns="0" rtlCol="0" anchor="t"/>
+          <a:lstStyle/>
+          <a:p>
+            <a:pPr algn="l" indent="0" marL="0">
+              <a:lnSpc>
+                <a:spcPct val="145000"/>
+              </a:lnSpc>
+              <a:buNone/>
+            </a:pPr>
+            <a:r>
+              <a:rPr lang="en-US" sz="1600" dirty="0">
+                <a:solidFill>
+                  <a:srgbClr val="332F2A"/>
+                </a:solidFill>
+                <a:latin typeface="Libre Franklin" pitchFamily="34" charset="0"/>
+                <a:ea typeface="Libre Franklin" pitchFamily="34" charset="-122"/>
+                <a:cs typeface="Libre Franklin" pitchFamily="34" charset="-120"/>
+              </a:rPr>
+              <a:t>Two sine waves in, and a chart that finds them again: spikes at exactly the frequencies you chose, at exactly the heights you set.</a:t>
+            </a:r>
+            <a:endParaRPr lang="en-US" sz="1600" dirty="0"/>
+          </a:p>
+        </p:txBody>
+      </p:sp>
+      <p:sp>
+        <p:nvSpPr>
+          <p:cNvPr id="9" name="Text 6"/>
+          <p:cNvSpPr/>
+          <p:nvPr/>
+        </p:nvSpPr>
+        <p:spPr>
+          <a:xfrm>
+            <a:off x="7099300" y="2943860"/>
+            <a:ext cx="4533900" cy="1305560"/>
+          </a:xfrm>
+          <a:prstGeom prst="rect">
+            <a:avLst/>
+          </a:prstGeom>
+          <a:noFill/>
+          <a:ln/>
+        </p:spPr>
+        <p:txBody>
+          <a:bodyPr wrap="square" lIns="0" tIns="0" rIns="0" bIns="0" rtlCol="0" anchor="t"/>
+          <a:lstStyle/>
+          <a:p>
+            <a:pPr algn="l" indent="0" marL="0">
+              <a:lnSpc>
+                <a:spcPct val="145000"/>
+              </a:lnSpc>
+              <a:buNone/>
+            </a:pPr>
+            <a:r>
+              <a:rPr lang="en-US" sz="1600" dirty="0">
+                <a:solidFill>
+                  <a:srgbClr val="77726A"/>
+                </a:solidFill>
+                <a:latin typeface="Libre Franklin" pitchFamily="34" charset="0"/>
+                <a:ea typeface="Libre Franklin" pitchFamily="34" charset="-122"/>
+                <a:cs typeface="Libre Franklin" pitchFamily="34" charset="-120"/>
+              </a:rPr>
+              <a:t>The heights are the check. A spectrum can put every spike in the right place and still be wrong by a factor of five hundred.</a:t>
+            </a:r>
+            <a:endParaRPr lang="en-US" sz="1600" dirty="0"/>
+          </a:p>
+        </p:txBody>
+      </p:sp>
+      <p:sp>
+        <p:nvSpPr>
+          <p:cNvPr id="10" name="Text 7"/>
+          <p:cNvSpPr/>
+          <p:nvPr/>
+        </p:nvSpPr>
+        <p:spPr>
+          <a:xfrm>
+            <a:off x="7099300" y="5956300"/>
+            <a:ext cx="4533900" cy="215900"/>
+          </a:xfrm>
+          <a:prstGeom prst="rect">
+            <a:avLst/>
+          </a:prstGeom>
+          <a:noFill/>
+          <a:ln/>
+        </p:spPr>
+        <p:txBody>
+          <a:bodyPr wrap="square" lIns="0" tIns="0" rIns="0" bIns="0" rtlCol="0" anchor="t"/>
+          <a:lstStyle/>
+          <a:p>
+            <a:pPr algn="l" indent="0" marL="0">
+              <a:lnSpc>
+                <a:spcPct val="145000"/>
+              </a:lnSpc>
+              <a:buNone/>
+            </a:pPr>
+            <a:r>
+              <a:rPr lang="en-US" sz="1200" dirty="0">
+                <a:solidFill>
+                  <a:srgbClr val="99948B"/>
                 </a:solidFill>
                 <a:latin typeface="IBM Plex Mono" pitchFamily="34" charset="0"/>
                 <a:ea typeface="IBM Plex Mono" pitchFamily="34" charset="-122"/>
                 <a:cs typeface="IBM Plex Mono" pitchFamily="34" charset="-120"/>
               </a:rPr>
-              <a:t>INPUT</a:t>
-            </a:r>
-            <a:endParaRPr lang="en-US" sz="1300" dirty="0"/>
-          </a:p>
-        </p:txBody>
-      </p:sp>
-      <p:sp>
-        <p:nvSpPr>
-          <p:cNvPr id="8" name="Text 6"/>
-          <p:cNvSpPr/>
-          <p:nvPr/>
-        </p:nvSpPr>
-        <p:spPr>
-          <a:xfrm>
-            <a:off x="558800" y="1917700"/>
-            <a:ext cx="5283200" cy="1270000"/>
-          </a:xfrm>
-          <a:prstGeom prst="rect">
-            <a:avLst/>
-          </a:prstGeom>
-          <a:noFill/>
-          <a:ln/>
-        </p:spPr>
-        <p:txBody>
-          <a:bodyPr wrap="square" lIns="0" tIns="0" rIns="0" bIns="0" rtlCol="0" anchor="t"/>
-          <a:lstStyle/>
-          <a:p>
-            <a:pPr algn="l" indent="0" marL="0">
-              <a:lnSpc>
-                <a:spcPct val="145000"/>
-              </a:lnSpc>
-              <a:buNone/>
-            </a:pPr>
-            <a:r>
-              <a:rPr lang="en-US" sz="1600" dirty="0">
-                <a:solidFill>
-                  <a:srgbClr val="332F2A"/>
-                </a:solidFill>
-                <a:latin typeface="Libre Franklin" pitchFamily="34" charset="0"/>
-                <a:ea typeface="Libre Franklin" pitchFamily="34" charset="-122"/>
-                <a:cs typeface="Libre Franklin" pitchFamily="34" charset="-120"/>
-              </a:rPr>
-              <a:t>Two tones, each with a frequency in hertz and an amplitude. A sampling rate in samples per second, and a duration.</a:t>
-            </a:r>
-            <a:endParaRPr lang="en-US" sz="1600" dirty="0"/>
-          </a:p>
-        </p:txBody>
-      </p:sp>
-      <p:sp>
-        <p:nvSpPr>
-          <p:cNvPr id="9" name="Text 7"/>
-          <p:cNvSpPr/>
-          <p:nvPr/>
-        </p:nvSpPr>
-        <p:spPr>
-          <a:xfrm>
-            <a:off x="558800" y="3162300"/>
-            <a:ext cx="5283200" cy="1270000"/>
-          </a:xfrm>
-          <a:prstGeom prst="rect">
-            <a:avLst/>
-          </a:prstGeom>
-          <a:noFill/>
-          <a:ln/>
-        </p:spPr>
-        <p:txBody>
-          <a:bodyPr wrap="square" lIns="0" tIns="0" rIns="0" bIns="0" rtlCol="0" anchor="t"/>
-          <a:lstStyle/>
-          <a:p>
-            <a:pPr algn="l" indent="0" marL="0">
-              <a:lnSpc>
-                <a:spcPct val="145000"/>
-              </a:lnSpc>
-              <a:buNone/>
-            </a:pPr>
-            <a:r>
-              <a:rPr lang="en-US" sz="1600" dirty="0">
-                <a:solidFill>
-                  <a:srgbClr val="77726A"/>
-                </a:solidFill>
-                <a:latin typeface="Libre Franklin" pitchFamily="34" charset="0"/>
-                <a:ea typeface="Libre Franklin" pitchFamily="34" charset="-122"/>
-                <a:cs typeface="Libre Franklin" pitchFamily="34" charset="-120"/>
-              </a:rPr>
-              <a:t>These must work: 50 Hz at 1.0 and 120 Hz at 0.5, sampled at 1000 for one second. They are the numbers the tests use.</a:t>
-            </a:r>
-            <a:endParaRPr lang="en-US" sz="1600" dirty="0"/>
-          </a:p>
-        </p:txBody>
-      </p:sp>
-      <p:sp>
-        <p:nvSpPr>
-          <p:cNvPr id="10" name="Text 8"/>
-          <p:cNvSpPr/>
-          <p:nvPr/>
-        </p:nvSpPr>
-        <p:spPr>
-          <a:xfrm>
-            <a:off x="6350000" y="1511300"/>
-            <a:ext cx="5283200" cy="254000"/>
-          </a:xfrm>
-          <a:prstGeom prst="rect">
-            <a:avLst/>
-          </a:prstGeom>
-          <a:noFill/>
-          <a:ln/>
-        </p:spPr>
-        <p:txBody>
-          <a:bodyPr wrap="square" lIns="0" tIns="0" rIns="0" bIns="0" rtlCol="0" anchor="t"/>
-          <a:lstStyle/>
-          <a:p>
-            <a:pPr algn="l" indent="0" marL="0">
-              <a:lnSpc>
-                <a:spcPct val="145000"/>
-              </a:lnSpc>
-              <a:buNone/>
-            </a:pPr>
-            <a:r>
-              <a:rPr lang="en-US" sz="1300" spc="130" kern="0" dirty="0">
-                <a:solidFill>
-                  <a:srgbClr val="A87A2E"/>
-                </a:solidFill>
-                <a:latin typeface="IBM Plex Mono" pitchFamily="34" charset="0"/>
-                <a:ea typeface="IBM Plex Mono" pitchFamily="34" charset="-122"/>
-                <a:cs typeface="IBM Plex Mono" pitchFamily="34" charset="-120"/>
-              </a:rPr>
-              <a:t>OUTPUT</a:t>
-            </a:r>
-            <a:endParaRPr lang="en-US" sz="1300" dirty="0"/>
-          </a:p>
-        </p:txBody>
-      </p:sp>
-      <p:sp>
-        <p:nvSpPr>
-          <p:cNvPr id="11" name="Text 9"/>
-          <p:cNvSpPr/>
-          <p:nvPr/>
-        </p:nvSpPr>
-        <p:spPr>
-          <a:xfrm>
-            <a:off x="6350000" y="1917700"/>
-            <a:ext cx="5283200" cy="1270000"/>
-          </a:xfrm>
-          <a:prstGeom prst="rect">
-            <a:avLst/>
-          </a:prstGeom>
-          <a:noFill/>
-          <a:ln/>
-        </p:spPr>
-        <p:txBody>
-          <a:bodyPr wrap="square" lIns="0" tIns="0" rIns="0" bIns="0" rtlCol="0" anchor="t"/>
-          <a:lstStyle/>
-          <a:p>
-            <a:pPr algn="l" indent="0" marL="0">
-              <a:lnSpc>
-                <a:spcPct val="145000"/>
-              </a:lnSpc>
-              <a:buNone/>
-            </a:pPr>
-            <a:r>
-              <a:rPr lang="en-US" sz="1600" dirty="0">
-                <a:solidFill>
-                  <a:srgbClr val="332F2A"/>
-                </a:solidFill>
-                <a:latin typeface="Libre Franklin" pitchFamily="34" charset="0"/>
-                <a:ea typeface="Libre Franklin" pitchFamily="34" charset="-122"/>
-                <a:cs typeface="Libre Franklin" pitchFamily="34" charset="-120"/>
-              </a:rPr>
-              <a:t>The combined waveform against time, and beside it the spectrum: one spike per tone, at the right frequency and at the right height.</a:t>
-            </a:r>
-            <a:endParaRPr lang="en-US" sz="1600" dirty="0"/>
-          </a:p>
-        </p:txBody>
-      </p:sp>
-      <p:sp>
-        <p:nvSpPr>
-          <p:cNvPr id="12" name="Text 10"/>
-          <p:cNvSpPr/>
-          <p:nvPr/>
-        </p:nvSpPr>
-        <p:spPr>
-          <a:xfrm>
-            <a:off x="6350000" y="3162300"/>
-            <a:ext cx="5283200" cy="1270000"/>
-          </a:xfrm>
-          <a:prstGeom prst="rect">
-            <a:avLst/>
-          </a:prstGeom>
-          <a:noFill/>
-          <a:ln/>
-        </p:spPr>
-        <p:txBody>
-          <a:bodyPr wrap="square" lIns="0" tIns="0" rIns="0" bIns="0" rtlCol="0" anchor="t"/>
-          <a:lstStyle/>
-          <a:p>
-            <a:pPr algn="l" indent="0" marL="0">
-              <a:lnSpc>
-                <a:spcPct val="145000"/>
-              </a:lnSpc>
-              <a:buNone/>
-            </a:pPr>
-            <a:r>
-              <a:rPr lang="en-US" sz="1600" dirty="0">
-                <a:solidFill>
-                  <a:srgbClr val="77726A"/>
-                </a:solidFill>
-                <a:latin typeface="Libre Franklin" pitchFamily="34" charset="0"/>
-                <a:ea typeface="Libre Franklin" pitchFamily="34" charset="-122"/>
-                <a:cs typeface="Libre Franklin" pitchFamily="34" charset="-120"/>
-              </a:rPr>
-              <a:t>Plus the strongest frequency printed as a number. Seven tests in tests/test_spectrum.py decide whether any of it is right.</a:t>
-            </a:r>
-            <a:endParaRPr lang="en-US" sz="1600" dirty="0"/>
+              <a:t>Fig. 6 — output of pages/2_Spectrum_Analyzer.py</a:t>
+            </a:r>
+            <a:endParaRPr lang="en-US" sz="1200" dirty="0"/>
           </a:p>
         </p:txBody>
       </p:sp>
@@ -15642,7 +15890,7 @@
                 <a:ea typeface="Libre Franklin" pitchFamily="34" charset="-122"/>
                 <a:cs typeface="Libre Franklin" pitchFamily="34" charset="-120"/>
               </a:rPr>
-              <a:t>Your customer wrote the tests</a:t>
+              <a:t>What goes in, what must come out</a:t>
             </a:r>
             <a:endParaRPr lang="en-US" sz="2800" dirty="0"/>
           </a:p>
@@ -15754,230 +16002,182 @@
       </p:sp>
       <p:sp>
         <p:nvSpPr>
-          <p:cNvPr id="7" name="Shape 5"/>
+          <p:cNvPr id="7" name="Text 5"/>
           <p:cNvSpPr/>
           <p:nvPr/>
         </p:nvSpPr>
         <p:spPr>
           <a:xfrm>
             <a:off x="558800" y="1511300"/>
-            <a:ext cx="6517030" cy="4572000"/>
-          </a:xfrm>
-          <a:prstGeom prst="rect">
-            <a:avLst/>
-          </a:prstGeom>
-          <a:solidFill>
-            <a:srgbClr val="F5F2EC"/>
-          </a:solidFill>
-          <a:ln w="6350">
-            <a:solidFill>
-              <a:srgbClr val="E1DED7"/>
-            </a:solidFill>
-            <a:prstDash val="solid"/>
-          </a:ln>
-        </p:spPr>
-      </p:sp>
-      <p:sp>
-        <p:nvSpPr>
-          <p:cNvPr id="8" name="Text 6"/>
-          <p:cNvSpPr/>
-          <p:nvPr/>
-        </p:nvSpPr>
-        <p:spPr>
-          <a:xfrm>
-            <a:off x="800100" y="1727200"/>
-            <a:ext cx="6034430" cy="4140200"/>
-          </a:xfrm>
-          <a:prstGeom prst="rect">
-            <a:avLst/>
-          </a:prstGeom>
-          <a:noFill/>
-          <a:ln/>
-        </p:spPr>
-        <p:txBody>
-          <a:bodyPr wrap="square" lIns="0" tIns="0" rIns="0" bIns="0" rtlCol="0" anchor="t"/>
-          <a:lstStyle/>
-          <a:p>
-            <a:pPr indent="0" marL="0">
-              <a:lnSpc>
-                <a:spcPct val="160000"/>
-              </a:lnSpc>
-              <a:buNone/>
-            </a:pPr>
-            <a:r>
-              <a:rPr lang="en-US" sz="1400" dirty="0">
-                <a:solidFill>
-                  <a:srgbClr val="332F2A"/>
+            <a:ext cx="5283200" cy="254000"/>
+          </a:xfrm>
+          <a:prstGeom prst="rect">
+            <a:avLst/>
+          </a:prstGeom>
+          <a:noFill/>
+          <a:ln/>
+        </p:spPr>
+        <p:txBody>
+          <a:bodyPr wrap="square" lIns="0" tIns="0" rIns="0" bIns="0" rtlCol="0" anchor="t"/>
+          <a:lstStyle/>
+          <a:p>
+            <a:pPr algn="l" indent="0" marL="0">
+              <a:lnSpc>
+                <a:spcPct val="145000"/>
+              </a:lnSpc>
+              <a:buNone/>
+            </a:pPr>
+            <a:r>
+              <a:rPr lang="en-US" sz="1300" spc="130" kern="0" dirty="0">
+                <a:solidFill>
+                  <a:srgbClr val="A87A2E"/>
                 </a:solidFill>
                 <a:latin typeface="IBM Plex Mono" pitchFamily="34" charset="0"/>
                 <a:ea typeface="IBM Plex Mono" pitchFamily="34" charset="-122"/>
                 <a:cs typeface="IBM Plex Mono" pitchFamily="34" charset="-120"/>
               </a:rPr>
-              <a:t># tests/test_spectrum.py</a:t>
-            </a:r>
-            <a:endParaRPr lang="en-US" sz="1400" dirty="0"/>
-          </a:p>
-          <a:p>
-            <a:pPr indent="0" marL="0">
-              <a:lnSpc>
-                <a:spcPct val="160000"/>
-              </a:lnSpc>
-              <a:buNone/>
-            </a:pPr>
-            <a:endParaRPr lang="en-US" sz="1400" dirty="0"/>
-          </a:p>
-          <a:p>
-            <a:pPr indent="0" marL="0">
-              <a:lnSpc>
-                <a:spcPct val="160000"/>
-              </a:lnSpc>
-              <a:buNone/>
-            </a:pPr>
-            <a:r>
-              <a:rPr lang="en-US" sz="1400" dirty="0">
-                <a:solidFill>
-                  <a:srgbClr val="332F2A"/>
+              <a:t>INPUT</a:t>
+            </a:r>
+            <a:endParaRPr lang="en-US" sz="1300" dirty="0"/>
+          </a:p>
+        </p:txBody>
+      </p:sp>
+      <p:sp>
+        <p:nvSpPr>
+          <p:cNvPr id="8" name="Text 6"/>
+          <p:cNvSpPr/>
+          <p:nvPr/>
+        </p:nvSpPr>
+        <p:spPr>
+          <a:xfrm>
+            <a:off x="558800" y="1917700"/>
+            <a:ext cx="5283200" cy="1270000"/>
+          </a:xfrm>
+          <a:prstGeom prst="rect">
+            <a:avLst/>
+          </a:prstGeom>
+          <a:noFill/>
+          <a:ln/>
+        </p:spPr>
+        <p:txBody>
+          <a:bodyPr wrap="square" lIns="0" tIns="0" rIns="0" bIns="0" rtlCol="0" anchor="t"/>
+          <a:lstStyle/>
+          <a:p>
+            <a:pPr algn="l" indent="0" marL="0">
+              <a:lnSpc>
+                <a:spcPct val="145000"/>
+              </a:lnSpc>
+              <a:buNone/>
+            </a:pPr>
+            <a:r>
+              <a:rPr lang="en-US" sz="1600" dirty="0">
+                <a:solidFill>
+                  <a:srgbClr val="332F2A"/>
+                </a:solidFill>
+                <a:latin typeface="Libre Franklin" pitchFamily="34" charset="0"/>
+                <a:ea typeface="Libre Franklin" pitchFamily="34" charset="-122"/>
+                <a:cs typeface="Libre Franklin" pitchFamily="34" charset="-120"/>
+              </a:rPr>
+              <a:t>Two tones, each with a frequency in hertz and an amplitude. A sampling rate in samples per second, and a duration.</a:t>
+            </a:r>
+            <a:endParaRPr lang="en-US" sz="1600" dirty="0"/>
+          </a:p>
+        </p:txBody>
+      </p:sp>
+      <p:sp>
+        <p:nvSpPr>
+          <p:cNvPr id="9" name="Text 7"/>
+          <p:cNvSpPr/>
+          <p:nvPr/>
+        </p:nvSpPr>
+        <p:spPr>
+          <a:xfrm>
+            <a:off x="558800" y="3162300"/>
+            <a:ext cx="5283200" cy="1270000"/>
+          </a:xfrm>
+          <a:prstGeom prst="rect">
+            <a:avLst/>
+          </a:prstGeom>
+          <a:noFill/>
+          <a:ln/>
+        </p:spPr>
+        <p:txBody>
+          <a:bodyPr wrap="square" lIns="0" tIns="0" rIns="0" bIns="0" rtlCol="0" anchor="t"/>
+          <a:lstStyle/>
+          <a:p>
+            <a:pPr algn="l" indent="0" marL="0">
+              <a:lnSpc>
+                <a:spcPct val="145000"/>
+              </a:lnSpc>
+              <a:buNone/>
+            </a:pPr>
+            <a:r>
+              <a:rPr lang="en-US" sz="1600" dirty="0">
+                <a:solidFill>
+                  <a:srgbClr val="77726A"/>
+                </a:solidFill>
+                <a:latin typeface="Libre Franklin" pitchFamily="34" charset="0"/>
+                <a:ea typeface="Libre Franklin" pitchFamily="34" charset="-122"/>
+                <a:cs typeface="Libre Franklin" pitchFamily="34" charset="-120"/>
+              </a:rPr>
+              <a:t>These must work: 50 Hz at 1.0 and 120 Hz at 0.5, sampled at 1000 for one second. They are the numbers the tests use.</a:t>
+            </a:r>
+            <a:endParaRPr lang="en-US" sz="1600" dirty="0"/>
+          </a:p>
+        </p:txBody>
+      </p:sp>
+      <p:sp>
+        <p:nvSpPr>
+          <p:cNvPr id="10" name="Text 8"/>
+          <p:cNvSpPr/>
+          <p:nvPr/>
+        </p:nvSpPr>
+        <p:spPr>
+          <a:xfrm>
+            <a:off x="6350000" y="1511300"/>
+            <a:ext cx="5283200" cy="254000"/>
+          </a:xfrm>
+          <a:prstGeom prst="rect">
+            <a:avLst/>
+          </a:prstGeom>
+          <a:noFill/>
+          <a:ln/>
+        </p:spPr>
+        <p:txBody>
+          <a:bodyPr wrap="square" lIns="0" tIns="0" rIns="0" bIns="0" rtlCol="0" anchor="t"/>
+          <a:lstStyle/>
+          <a:p>
+            <a:pPr algn="l" indent="0" marL="0">
+              <a:lnSpc>
+                <a:spcPct val="145000"/>
+              </a:lnSpc>
+              <a:buNone/>
+            </a:pPr>
+            <a:r>
+              <a:rPr lang="en-US" sz="1300" spc="130" kern="0" dirty="0">
+                <a:solidFill>
+                  <a:srgbClr val="A87A2E"/>
                 </a:solidFill>
                 <a:latin typeface="IBM Plex Mono" pitchFamily="34" charset="0"/>
                 <a:ea typeface="IBM Plex Mono" pitchFamily="34" charset="-122"/>
                 <a:cs typeface="IBM Plex Mono" pitchFamily="34" charset="-120"/>
               </a:rPr>
-              <a:t>def test_a_one_volt_sine_shows</a:t>
-            </a:r>
-            <a:endParaRPr lang="en-US" sz="1400" dirty="0"/>
-          </a:p>
-          <a:p>
-            <a:pPr indent="0" marL="0">
-              <a:lnSpc>
-                <a:spcPct val="160000"/>
-              </a:lnSpc>
-              <a:buNone/>
-            </a:pPr>
-            <a:r>
-              <a:rPr lang="en-US" sz="1400" dirty="0">
-                <a:solidFill>
-                  <a:srgbClr val="332F2A"/>
-                </a:solidFill>
-                <a:latin typeface="IBM Plex Mono" pitchFamily="34" charset="0"/>
-                <a:ea typeface="IBM Plex Mono" pitchFamily="34" charset="-122"/>
-                <a:cs typeface="IBM Plex Mono" pitchFamily="34" charset="-120"/>
-              </a:rPr>
-              <a:t>        _an_amplitude_of_one():</a:t>
-            </a:r>
-            <a:endParaRPr lang="en-US" sz="1400" dirty="0"/>
-          </a:p>
-          <a:p>
-            <a:pPr indent="0" marL="0">
-              <a:lnSpc>
-                <a:spcPct val="160000"/>
-              </a:lnSpc>
-              <a:buNone/>
-            </a:pPr>
-            <a:r>
-              <a:rPr lang="en-US" sz="1400" dirty="0">
-                <a:solidFill>
-                  <a:srgbClr val="332F2A"/>
-                </a:solidFill>
-                <a:latin typeface="IBM Plex Mono" pitchFamily="34" charset="0"/>
-                <a:ea typeface="IBM Plex Mono" pitchFamily="34" charset="-122"/>
-                <a:cs typeface="IBM Plex Mono" pitchFamily="34" charset="-120"/>
-              </a:rPr>
-              <a:t>    _, sig = make_signal(</a:t>
-            </a:r>
-            <a:endParaRPr lang="en-US" sz="1400" dirty="0"/>
-          </a:p>
-          <a:p>
-            <a:pPr indent="0" marL="0">
-              <a:lnSpc>
-                <a:spcPct val="160000"/>
-              </a:lnSpc>
-              <a:buNone/>
-            </a:pPr>
-            <a:r>
-              <a:rPr lang="en-US" sz="1400" dirty="0">
-                <a:solidFill>
-                  <a:srgbClr val="332F2A"/>
-                </a:solidFill>
-                <a:latin typeface="IBM Plex Mono" pitchFamily="34" charset="0"/>
-                <a:ea typeface="IBM Plex Mono" pitchFamily="34" charset="-122"/>
-                <a:cs typeface="IBM Plex Mono" pitchFamily="34" charset="-120"/>
-              </a:rPr>
-              <a:t>        [(50.0, 1.0)], FS, DURATION)</a:t>
-            </a:r>
-            <a:endParaRPr lang="en-US" sz="1400" dirty="0"/>
-          </a:p>
-          <a:p>
-            <a:pPr indent="0" marL="0">
-              <a:lnSpc>
-                <a:spcPct val="160000"/>
-              </a:lnSpc>
-              <a:buNone/>
-            </a:pPr>
-            <a:r>
-              <a:rPr lang="en-US" sz="1400" dirty="0">
-                <a:solidFill>
-                  <a:srgbClr val="332F2A"/>
-                </a:solidFill>
-                <a:latin typeface="IBM Plex Mono" pitchFamily="34" charset="0"/>
-                <a:ea typeface="IBM Plex Mono" pitchFamily="34" charset="-122"/>
-                <a:cs typeface="IBM Plex Mono" pitchFamily="34" charset="-120"/>
-              </a:rPr>
-              <a:t>    f, mag = spectrum(sig, FS)</a:t>
-            </a:r>
-            <a:endParaRPr lang="en-US" sz="1400" dirty="0"/>
-          </a:p>
-          <a:p>
-            <a:pPr indent="0" marL="0">
-              <a:lnSpc>
-                <a:spcPct val="160000"/>
-              </a:lnSpc>
-              <a:buNone/>
-            </a:pPr>
-            <a:r>
-              <a:rPr lang="en-US" sz="1400" dirty="0">
-                <a:solidFill>
-                  <a:srgbClr val="332F2A"/>
-                </a:solidFill>
-                <a:latin typeface="IBM Plex Mono" pitchFamily="34" charset="0"/>
-                <a:ea typeface="IBM Plex Mono" pitchFamily="34" charset="-122"/>
-                <a:cs typeface="IBM Plex Mono" pitchFamily="34" charset="-120"/>
-              </a:rPr>
-              <a:t>    assert mag[argmax(mag)] == approx(</a:t>
-            </a:r>
-            <a:endParaRPr lang="en-US" sz="1400" dirty="0"/>
-          </a:p>
-          <a:p>
-            <a:pPr indent="0" marL="0">
-              <a:lnSpc>
-                <a:spcPct val="160000"/>
-              </a:lnSpc>
-              <a:buNone/>
-            </a:pPr>
-            <a:r>
-              <a:rPr lang="en-US" sz="1400" dirty="0">
-                <a:solidFill>
-                  <a:srgbClr val="332F2A"/>
-                </a:solidFill>
-                <a:latin typeface="IBM Plex Mono" pitchFamily="34" charset="0"/>
-                <a:ea typeface="IBM Plex Mono" pitchFamily="34" charset="-122"/>
-                <a:cs typeface="IBM Plex Mono" pitchFamily="34" charset="-120"/>
-              </a:rPr>
-              <a:t>        1.0, abs=0.001)</a:t>
-            </a:r>
-            <a:endParaRPr lang="en-US" sz="1400" dirty="0"/>
-          </a:p>
-        </p:txBody>
-      </p:sp>
-      <p:sp>
-        <p:nvSpPr>
-          <p:cNvPr id="9" name="Text 7"/>
-          <p:cNvSpPr/>
-          <p:nvPr/>
-        </p:nvSpPr>
-        <p:spPr>
-          <a:xfrm>
-            <a:off x="7431430" y="1511300"/>
-            <a:ext cx="4201770" cy="1010920"/>
+              <a:t>OUTPUT</a:t>
+            </a:r>
+            <a:endParaRPr lang="en-US" sz="1300" dirty="0"/>
+          </a:p>
+        </p:txBody>
+      </p:sp>
+      <p:sp>
+        <p:nvSpPr>
+          <p:cNvPr id="11" name="Text 9"/>
+          <p:cNvSpPr/>
+          <p:nvPr/>
+        </p:nvSpPr>
+        <p:spPr>
+          <a:xfrm>
+            <a:off x="6350000" y="1917700"/>
+            <a:ext cx="5283200" cy="1270000"/>
           </a:xfrm>
           <a:prstGeom prst="rect">
             <a:avLst/>
@@ -16004,7 +16204,7 @@
                 <a:ea typeface="Libre Franklin" pitchFamily="34" charset="-122"/>
                 <a:cs typeface="Libre Franklin" pitchFamily="34" charset="-120"/>
               </a:rPr>
-              <a:t>Seven tests are already in your repository. Your app is finished when they pass.</a:t>
+              <a:t>The combined waveform against time, and beside it the spectrum: one spike per tone, at the right frequency and at the right height.</a:t>
             </a:r>
             <a:endParaRPr lang="en-US" sz="1600" dirty="0"/>
           </a:p>
@@ -16012,14 +16212,14 @@
       </p:sp>
       <p:sp>
         <p:nvSpPr>
-          <p:cNvPr id="10" name="Text 8"/>
-          <p:cNvSpPr/>
-          <p:nvPr/>
-        </p:nvSpPr>
-        <p:spPr>
-          <a:xfrm>
-            <a:off x="7431430" y="2649220"/>
-            <a:ext cx="4201770" cy="1305560"/>
+          <p:cNvPr id="12" name="Text 10"/>
+          <p:cNvSpPr/>
+          <p:nvPr/>
+        </p:nvSpPr>
+        <p:spPr>
+          <a:xfrm>
+            <a:off x="6350000" y="3162300"/>
+            <a:ext cx="5283200" cy="1270000"/>
           </a:xfrm>
           <a:prstGeom prst="rect">
             <a:avLst/>
@@ -16046,71 +16246,9 @@
                 <a:ea typeface="Libre Franklin" pitchFamily="34" charset="-122"/>
                 <a:cs typeface="Libre Franklin" pitchFamily="34" charset="-120"/>
               </a:rPr>
-              <a:t>Before you read them, write down in your own words how you would check the chart is right. Then compare.</a:t>
+              <a:t>Plus the strongest frequency printed as a number. Seven tests in tests/test_spectrum.py decide whether any of it is right.</a:t>
             </a:r>
             <a:endParaRPr lang="en-US" sz="1600" dirty="0"/>
-          </a:p>
-        </p:txBody>
-      </p:sp>
-      <p:sp>
-        <p:nvSpPr>
-          <p:cNvPr id="11" name="Shape 9"/>
-          <p:cNvSpPr/>
-          <p:nvPr/>
-        </p:nvSpPr>
-        <p:spPr>
-          <a:xfrm>
-            <a:off x="7431430" y="5384800"/>
-            <a:ext cx="12700" cy="698500"/>
-          </a:xfrm>
-          <a:prstGeom prst="rect">
-            <a:avLst/>
-          </a:prstGeom>
-          <a:solidFill>
-            <a:srgbClr val="A87A2E"/>
-          </a:solidFill>
-          <a:ln/>
-        </p:spPr>
-      </p:sp>
-      <p:sp>
-        <p:nvSpPr>
-          <p:cNvPr id="12" name="Text 10"/>
-          <p:cNvSpPr/>
-          <p:nvPr/>
-        </p:nvSpPr>
-        <p:spPr>
-          <a:xfrm>
-            <a:off x="7596530" y="5416550"/>
-            <a:ext cx="4036670" cy="698500"/>
-          </a:xfrm>
-          <a:prstGeom prst="rect">
-            <a:avLst/>
-          </a:prstGeom>
-          <a:noFill/>
-          <a:ln/>
-        </p:spPr>
-        <p:txBody>
-          <a:bodyPr wrap="square" lIns="0" tIns="0" rIns="0" bIns="0" rtlCol="0" anchor="t"/>
-          <a:lstStyle/>
-          <a:p>
-            <a:pPr algn="l" indent="0" marL="0">
-              <a:lnSpc>
-                <a:spcPct val="140000"/>
-              </a:lnSpc>
-              <a:buNone/>
-            </a:pPr>
-            <a:r>
-              <a:rPr lang="en-US" sz="1500" dirty="0">
-                <a:solidFill>
-                  <a:srgbClr val="332F2A"/>
-                </a:solidFill>
-                <a:latin typeface="Libre Franklin" pitchFamily="34" charset="0"/>
-                <a:ea typeface="Libre Franklin" pitchFamily="34" charset="-122"/>
-                <a:cs typeface="Libre Franklin" pitchFamily="34" charset="-120"/>
-              </a:rPr>
-              <a:t>A spectrum can have every peak in exactly the right place and still be wrong by a factor of five hundred.</a:t>
-            </a:r>
-            <a:endParaRPr lang="en-US" sz="1500" dirty="0"/>
           </a:p>
         </p:txBody>
       </p:sp>
@@ -16182,7 +16320,7 @@
                 <a:ea typeface="IBM Plex Mono" pitchFamily="34" charset="-122"/>
                 <a:cs typeface="IBM Plex Mono" pitchFamily="34" charset="-120"/>
               </a:rPr>
-              <a:t>SECTION 06</a:t>
+              <a:t>WORKSHOP 05</a:t>
             </a:r>
             <a:endParaRPr lang="en-US" sz="1200" dirty="0"/>
           </a:p>
@@ -16224,7 +16362,7 @@
                 <a:ea typeface="Libre Franklin" pitchFamily="34" charset="-122"/>
                 <a:cs typeface="Libre Franklin" pitchFamily="34" charset="-120"/>
               </a:rPr>
-              <a:t>Read the reference before you leave</a:t>
+              <a:t>Your customer wrote the tests</a:t>
             </a:r>
             <a:endParaRPr lang="en-US" sz="2800" dirty="0"/>
           </a:p>
@@ -16336,92 +16474,353 @@
       </p:sp>
       <p:sp>
         <p:nvSpPr>
-          <p:cNvPr id="7" name="Text 5"/>
+          <p:cNvPr id="7" name="Shape 5"/>
           <p:cNvSpPr/>
           <p:nvPr/>
         </p:nvSpPr>
         <p:spPr>
           <a:xfrm>
             <a:off x="558800" y="1511300"/>
-            <a:ext cx="190500" cy="317500"/>
-          </a:xfrm>
-          <a:prstGeom prst="rect">
-            <a:avLst/>
-          </a:prstGeom>
-          <a:noFill/>
-          <a:ln/>
-        </p:spPr>
-        <p:txBody>
-          <a:bodyPr wrap="square" lIns="0" tIns="0" rIns="0" bIns="0" rtlCol="0" anchor="t"/>
-          <a:lstStyle/>
-          <a:p>
-            <a:pPr algn="l" indent="0" marL="0">
-              <a:lnSpc>
-                <a:spcPct val="140000"/>
-              </a:lnSpc>
-              <a:buNone/>
-            </a:pPr>
-            <a:r>
-              <a:rPr lang="en-US" sz="1700" dirty="0">
-                <a:solidFill>
-                  <a:srgbClr val="A87A2E"/>
+            <a:ext cx="6517030" cy="4572000"/>
+          </a:xfrm>
+          <a:prstGeom prst="rect">
+            <a:avLst/>
+          </a:prstGeom>
+          <a:solidFill>
+            <a:srgbClr val="F5F2EC"/>
+          </a:solidFill>
+          <a:ln w="6350">
+            <a:solidFill>
+              <a:srgbClr val="E1DED7"/>
+            </a:solidFill>
+            <a:prstDash val="solid"/>
+          </a:ln>
+        </p:spPr>
+      </p:sp>
+      <p:sp>
+        <p:nvSpPr>
+          <p:cNvPr id="8" name="Text 6"/>
+          <p:cNvSpPr/>
+          <p:nvPr/>
+        </p:nvSpPr>
+        <p:spPr>
+          <a:xfrm>
+            <a:off x="800100" y="1727200"/>
+            <a:ext cx="6034430" cy="4140200"/>
+          </a:xfrm>
+          <a:prstGeom prst="rect">
+            <a:avLst/>
+          </a:prstGeom>
+          <a:noFill/>
+          <a:ln/>
+        </p:spPr>
+        <p:txBody>
+          <a:bodyPr wrap="square" lIns="0" tIns="0" rIns="0" bIns="0" rtlCol="0" anchor="t"/>
+          <a:lstStyle/>
+          <a:p>
+            <a:pPr indent="0" marL="0">
+              <a:lnSpc>
+                <a:spcPct val="160000"/>
+              </a:lnSpc>
+              <a:buNone/>
+            </a:pPr>
+            <a:r>
+              <a:rPr lang="en-US" sz="1400" dirty="0">
+                <a:solidFill>
+                  <a:srgbClr val="332F2A"/>
+                </a:solidFill>
+                <a:latin typeface="IBM Plex Mono" pitchFamily="34" charset="0"/>
+                <a:ea typeface="IBM Plex Mono" pitchFamily="34" charset="-122"/>
+                <a:cs typeface="IBM Plex Mono" pitchFamily="34" charset="-120"/>
+              </a:rPr>
+              <a:t># tests/test_spectrum.py</a:t>
+            </a:r>
+            <a:endParaRPr lang="en-US" sz="1400" dirty="0"/>
+          </a:p>
+          <a:p>
+            <a:pPr indent="0" marL="0">
+              <a:lnSpc>
+                <a:spcPct val="160000"/>
+              </a:lnSpc>
+              <a:buNone/>
+            </a:pPr>
+            <a:endParaRPr lang="en-US" sz="1400" dirty="0"/>
+          </a:p>
+          <a:p>
+            <a:pPr indent="0" marL="0">
+              <a:lnSpc>
+                <a:spcPct val="160000"/>
+              </a:lnSpc>
+              <a:buNone/>
+            </a:pPr>
+            <a:r>
+              <a:rPr lang="en-US" sz="1400" dirty="0">
+                <a:solidFill>
+                  <a:srgbClr val="332F2A"/>
+                </a:solidFill>
+                <a:latin typeface="IBM Plex Mono" pitchFamily="34" charset="0"/>
+                <a:ea typeface="IBM Plex Mono" pitchFamily="34" charset="-122"/>
+                <a:cs typeface="IBM Plex Mono" pitchFamily="34" charset="-120"/>
+              </a:rPr>
+              <a:t>def test_a_one_volt_sine_shows</a:t>
+            </a:r>
+            <a:endParaRPr lang="en-US" sz="1400" dirty="0"/>
+          </a:p>
+          <a:p>
+            <a:pPr indent="0" marL="0">
+              <a:lnSpc>
+                <a:spcPct val="160000"/>
+              </a:lnSpc>
+              <a:buNone/>
+            </a:pPr>
+            <a:r>
+              <a:rPr lang="en-US" sz="1400" dirty="0">
+                <a:solidFill>
+                  <a:srgbClr val="332F2A"/>
+                </a:solidFill>
+                <a:latin typeface="IBM Plex Mono" pitchFamily="34" charset="0"/>
+                <a:ea typeface="IBM Plex Mono" pitchFamily="34" charset="-122"/>
+                <a:cs typeface="IBM Plex Mono" pitchFamily="34" charset="-120"/>
+              </a:rPr>
+              <a:t>        _an_amplitude_of_one():</a:t>
+            </a:r>
+            <a:endParaRPr lang="en-US" sz="1400" dirty="0"/>
+          </a:p>
+          <a:p>
+            <a:pPr indent="0" marL="0">
+              <a:lnSpc>
+                <a:spcPct val="160000"/>
+              </a:lnSpc>
+              <a:buNone/>
+            </a:pPr>
+            <a:r>
+              <a:rPr lang="en-US" sz="1400" dirty="0">
+                <a:solidFill>
+                  <a:srgbClr val="332F2A"/>
+                </a:solidFill>
+                <a:latin typeface="IBM Plex Mono" pitchFamily="34" charset="0"/>
+                <a:ea typeface="IBM Plex Mono" pitchFamily="34" charset="-122"/>
+                <a:cs typeface="IBM Plex Mono" pitchFamily="34" charset="-120"/>
+              </a:rPr>
+              <a:t>    _, sig = make_signal(</a:t>
+            </a:r>
+            <a:endParaRPr lang="en-US" sz="1400" dirty="0"/>
+          </a:p>
+          <a:p>
+            <a:pPr indent="0" marL="0">
+              <a:lnSpc>
+                <a:spcPct val="160000"/>
+              </a:lnSpc>
+              <a:buNone/>
+            </a:pPr>
+            <a:r>
+              <a:rPr lang="en-US" sz="1400" dirty="0">
+                <a:solidFill>
+                  <a:srgbClr val="332F2A"/>
+                </a:solidFill>
+                <a:latin typeface="IBM Plex Mono" pitchFamily="34" charset="0"/>
+                <a:ea typeface="IBM Plex Mono" pitchFamily="34" charset="-122"/>
+                <a:cs typeface="IBM Plex Mono" pitchFamily="34" charset="-120"/>
+              </a:rPr>
+              <a:t>        [(50.0, 1.0)], FS, DURATION)</a:t>
+            </a:r>
+            <a:endParaRPr lang="en-US" sz="1400" dirty="0"/>
+          </a:p>
+          <a:p>
+            <a:pPr indent="0" marL="0">
+              <a:lnSpc>
+                <a:spcPct val="160000"/>
+              </a:lnSpc>
+              <a:buNone/>
+            </a:pPr>
+            <a:r>
+              <a:rPr lang="en-US" sz="1400" dirty="0">
+                <a:solidFill>
+                  <a:srgbClr val="332F2A"/>
+                </a:solidFill>
+                <a:latin typeface="IBM Plex Mono" pitchFamily="34" charset="0"/>
+                <a:ea typeface="IBM Plex Mono" pitchFamily="34" charset="-122"/>
+                <a:cs typeface="IBM Plex Mono" pitchFamily="34" charset="-120"/>
+              </a:rPr>
+              <a:t>    f, mag = spectrum(sig, FS)</a:t>
+            </a:r>
+            <a:endParaRPr lang="en-US" sz="1400" dirty="0"/>
+          </a:p>
+          <a:p>
+            <a:pPr indent="0" marL="0">
+              <a:lnSpc>
+                <a:spcPct val="160000"/>
+              </a:lnSpc>
+              <a:buNone/>
+            </a:pPr>
+            <a:r>
+              <a:rPr lang="en-US" sz="1400" dirty="0">
+                <a:solidFill>
+                  <a:srgbClr val="332F2A"/>
+                </a:solidFill>
+                <a:latin typeface="IBM Plex Mono" pitchFamily="34" charset="0"/>
+                <a:ea typeface="IBM Plex Mono" pitchFamily="34" charset="-122"/>
+                <a:cs typeface="IBM Plex Mono" pitchFamily="34" charset="-120"/>
+              </a:rPr>
+              <a:t>    assert mag[argmax(mag)] == approx(</a:t>
+            </a:r>
+            <a:endParaRPr lang="en-US" sz="1400" dirty="0"/>
+          </a:p>
+          <a:p>
+            <a:pPr indent="0" marL="0">
+              <a:lnSpc>
+                <a:spcPct val="160000"/>
+              </a:lnSpc>
+              <a:buNone/>
+            </a:pPr>
+            <a:r>
+              <a:rPr lang="en-US" sz="1400" dirty="0">
+                <a:solidFill>
+                  <a:srgbClr val="332F2A"/>
+                </a:solidFill>
+                <a:latin typeface="IBM Plex Mono" pitchFamily="34" charset="0"/>
+                <a:ea typeface="IBM Plex Mono" pitchFamily="34" charset="-122"/>
+                <a:cs typeface="IBM Plex Mono" pitchFamily="34" charset="-120"/>
+              </a:rPr>
+              <a:t>        1.0, abs=0.001)</a:t>
+            </a:r>
+            <a:endParaRPr lang="en-US" sz="1400" dirty="0"/>
+          </a:p>
+        </p:txBody>
+      </p:sp>
+      <p:sp>
+        <p:nvSpPr>
+          <p:cNvPr id="9" name="Text 7"/>
+          <p:cNvSpPr/>
+          <p:nvPr/>
+        </p:nvSpPr>
+        <p:spPr>
+          <a:xfrm>
+            <a:off x="7431430" y="1511300"/>
+            <a:ext cx="4201770" cy="1010920"/>
+          </a:xfrm>
+          <a:prstGeom prst="rect">
+            <a:avLst/>
+          </a:prstGeom>
+          <a:noFill/>
+          <a:ln/>
+        </p:spPr>
+        <p:txBody>
+          <a:bodyPr wrap="square" lIns="0" tIns="0" rIns="0" bIns="0" rtlCol="0" anchor="t"/>
+          <a:lstStyle/>
+          <a:p>
+            <a:pPr algn="l" indent="0" marL="0">
+              <a:lnSpc>
+                <a:spcPct val="145000"/>
+              </a:lnSpc>
+              <a:buNone/>
+            </a:pPr>
+            <a:r>
+              <a:rPr lang="en-US" sz="1600" dirty="0">
+                <a:solidFill>
+                  <a:srgbClr val="332F2A"/>
                 </a:solidFill>
                 <a:latin typeface="Libre Franklin" pitchFamily="34" charset="0"/>
                 <a:ea typeface="Libre Franklin" pitchFamily="34" charset="-122"/>
                 <a:cs typeface="Libre Franklin" pitchFamily="34" charset="-120"/>
               </a:rPr>
-              <a:t>—</a:t>
-            </a:r>
-            <a:endParaRPr lang="en-US" sz="1700" dirty="0"/>
-          </a:p>
-        </p:txBody>
-      </p:sp>
-      <p:sp>
-        <p:nvSpPr>
-          <p:cNvPr id="8" name="Text 6"/>
-          <p:cNvSpPr/>
-          <p:nvPr/>
-        </p:nvSpPr>
-        <p:spPr>
-          <a:xfrm>
-            <a:off x="927100" y="1511300"/>
-            <a:ext cx="9156700" cy="753110"/>
-          </a:xfrm>
-          <a:prstGeom prst="rect">
-            <a:avLst/>
-          </a:prstGeom>
-          <a:noFill/>
-          <a:ln/>
-        </p:spPr>
-        <p:txBody>
-          <a:bodyPr wrap="square" lIns="0" tIns="0" rIns="0" bIns="0" rtlCol="0" anchor="t"/>
-          <a:lstStyle/>
-          <a:p>
-            <a:pPr algn="l" indent="0" marL="0">
-              <a:lnSpc>
-                <a:spcPct val="145000"/>
-              </a:lnSpc>
-              <a:buNone/>
-            </a:pPr>
-            <a:r>
-              <a:rPr lang="en-US" sz="1700" b="1" dirty="0">
-                <a:solidFill>
-                  <a:srgbClr val="332F2A"/>
+              <a:t>Seven tests are already in your repository. Your app is finished when they pass.</a:t>
+            </a:r>
+            <a:endParaRPr lang="en-US" sz="1600" dirty="0"/>
+          </a:p>
+        </p:txBody>
+      </p:sp>
+      <p:sp>
+        <p:nvSpPr>
+          <p:cNvPr id="10" name="Text 8"/>
+          <p:cNvSpPr/>
+          <p:nvPr/>
+        </p:nvSpPr>
+        <p:spPr>
+          <a:xfrm>
+            <a:off x="7431430" y="2649220"/>
+            <a:ext cx="4201770" cy="1305560"/>
+          </a:xfrm>
+          <a:prstGeom prst="rect">
+            <a:avLst/>
+          </a:prstGeom>
+          <a:noFill/>
+          <a:ln/>
+        </p:spPr>
+        <p:txBody>
+          <a:bodyPr wrap="square" lIns="0" tIns="0" rIns="0" bIns="0" rtlCol="0" anchor="t"/>
+          <a:lstStyle/>
+          <a:p>
+            <a:pPr algn="l" indent="0" marL="0">
+              <a:lnSpc>
+                <a:spcPct val="145000"/>
+              </a:lnSpc>
+              <a:buNone/>
+            </a:pPr>
+            <a:r>
+              <a:rPr lang="en-US" sz="1600" dirty="0">
+                <a:solidFill>
+                  <a:srgbClr val="77726A"/>
                 </a:solidFill>
                 <a:latin typeface="Libre Franklin" pitchFamily="34" charset="0"/>
                 <a:ea typeface="Libre Franklin" pitchFamily="34" charset="-122"/>
                 <a:cs typeface="Libre Franklin" pitchFamily="34" charset="-120"/>
               </a:rPr>
-              <a:t>Everyone does this, </a:t>
-            </a:r>
-            <a:pPr algn="l" indent="0" marL="0">
-              <a:lnSpc>
-                <a:spcPct val="145000"/>
-              </a:lnSpc>
-              <a:buNone/>
-            </a:pPr>
-            <a:r>
-              <a:rPr lang="en-US" sz="1700" dirty="0">
+              <a:t>Before you read them, write down in your own words how you would check the chart is right. Then compare.</a:t>
+            </a:r>
+            <a:endParaRPr lang="en-US" sz="1600" dirty="0"/>
+          </a:p>
+        </p:txBody>
+      </p:sp>
+      <p:sp>
+        <p:nvSpPr>
+          <p:cNvPr id="11" name="Shape 9"/>
+          <p:cNvSpPr/>
+          <p:nvPr/>
+        </p:nvSpPr>
+        <p:spPr>
+          <a:xfrm>
+            <a:off x="7431430" y="5384800"/>
+            <a:ext cx="12700" cy="698500"/>
+          </a:xfrm>
+          <a:prstGeom prst="rect">
+            <a:avLst/>
+          </a:prstGeom>
+          <a:solidFill>
+            <a:srgbClr val="A87A2E"/>
+          </a:solidFill>
+          <a:ln/>
+        </p:spPr>
+      </p:sp>
+      <p:sp>
+        <p:nvSpPr>
+          <p:cNvPr id="12" name="Text 10"/>
+          <p:cNvSpPr/>
+          <p:nvPr/>
+        </p:nvSpPr>
+        <p:spPr>
+          <a:xfrm>
+            <a:off x="7596530" y="5416550"/>
+            <a:ext cx="4036670" cy="698500"/>
+          </a:xfrm>
+          <a:prstGeom prst="rect">
+            <a:avLst/>
+          </a:prstGeom>
+          <a:noFill/>
+          <a:ln/>
+        </p:spPr>
+        <p:txBody>
+          <a:bodyPr wrap="square" lIns="0" tIns="0" rIns="0" bIns="0" rtlCol="0" anchor="t"/>
+          <a:lstStyle/>
+          <a:p>
+            <a:pPr algn="l" indent="0" marL="0">
+              <a:lnSpc>
+                <a:spcPct val="140000"/>
+              </a:lnSpc>
+              <a:buNone/>
+            </a:pPr>
+            <a:r>
+              <a:rPr lang="en-US" sz="1500" dirty="0">
                 <a:solidFill>
                   <a:srgbClr val="332F2A"/>
                 </a:solidFill>
@@ -16429,295 +16828,9 @@
                 <a:ea typeface="Libre Franklin" pitchFamily="34" charset="-122"/>
                 <a:cs typeface="Libre Franklin" pitchFamily="34" charset="-120"/>
               </a:rPr>
-              <a:t>whether your own version works or not. The prompts are in labs/EXPLAIN.md.</a:t>
-            </a:r>
-            <a:endParaRPr lang="en-US" sz="1700" dirty="0"/>
-          </a:p>
-        </p:txBody>
-      </p:sp>
-      <p:sp>
-        <p:nvSpPr>
-          <p:cNvPr id="9" name="Text 7"/>
-          <p:cNvSpPr/>
-          <p:nvPr/>
-        </p:nvSpPr>
-        <p:spPr>
-          <a:xfrm>
-            <a:off x="558800" y="2391410"/>
-            <a:ext cx="190500" cy="317500"/>
-          </a:xfrm>
-          <a:prstGeom prst="rect">
-            <a:avLst/>
-          </a:prstGeom>
-          <a:noFill/>
-          <a:ln/>
-        </p:spPr>
-        <p:txBody>
-          <a:bodyPr wrap="square" lIns="0" tIns="0" rIns="0" bIns="0" rtlCol="0" anchor="t"/>
-          <a:lstStyle/>
-          <a:p>
-            <a:pPr algn="l" indent="0" marL="0">
-              <a:lnSpc>
-                <a:spcPct val="140000"/>
-              </a:lnSpc>
-              <a:buNone/>
-            </a:pPr>
-            <a:r>
-              <a:rPr lang="en-US" sz="1700" dirty="0">
-                <a:solidFill>
-                  <a:srgbClr val="A87A2E"/>
-                </a:solidFill>
-                <a:latin typeface="Libre Franklin" pitchFamily="34" charset="0"/>
-                <a:ea typeface="Libre Franklin" pitchFamily="34" charset="-122"/>
-                <a:cs typeface="Libre Franklin" pitchFamily="34" charset="-120"/>
-              </a:rPr>
-              <a:t>—</a:t>
-            </a:r>
-            <a:endParaRPr lang="en-US" sz="1700" dirty="0"/>
-          </a:p>
-        </p:txBody>
-      </p:sp>
-      <p:sp>
-        <p:nvSpPr>
-          <p:cNvPr id="10" name="Text 8"/>
-          <p:cNvSpPr/>
-          <p:nvPr/>
-        </p:nvSpPr>
-        <p:spPr>
-          <a:xfrm>
-            <a:off x="927100" y="2391410"/>
-            <a:ext cx="9156700" cy="753110"/>
-          </a:xfrm>
-          <a:prstGeom prst="rect">
-            <a:avLst/>
-          </a:prstGeom>
-          <a:noFill/>
-          <a:ln/>
-        </p:spPr>
-        <p:txBody>
-          <a:bodyPr wrap="square" lIns="0" tIns="0" rIns="0" bIns="0" rtlCol="0" anchor="t"/>
-          <a:lstStyle/>
-          <a:p>
-            <a:pPr algn="l" indent="0" marL="0">
-              <a:lnSpc>
-                <a:spcPct val="145000"/>
-              </a:lnSpc>
-              <a:buNone/>
-            </a:pPr>
-            <a:r>
-              <a:rPr lang="en-US" sz="1700" b="1" dirty="0">
-                <a:solidFill>
-                  <a:srgbClr val="332F2A"/>
-                </a:solidFill>
-                <a:latin typeface="Libre Franklin" pitchFamily="34" charset="0"/>
-                <a:ea typeface="Libre Franklin" pitchFamily="34" charset="-122"/>
-                <a:cs typeface="Libre Franklin" pitchFamily="34" charset="-120"/>
-              </a:rPr>
-              <a:t>Ask it to break the code. </a:t>
-            </a:r>
-            <a:pPr algn="l" indent="0" marL="0">
-              <a:lnSpc>
-                <a:spcPct val="145000"/>
-              </a:lnSpc>
-              <a:buNone/>
-            </a:pPr>
-            <a:r>
-              <a:rPr lang="en-US" sz="1700" dirty="0">
-                <a:solidFill>
-                  <a:srgbClr val="332F2A"/>
-                </a:solidFill>
-                <a:latin typeface="Libre Franklin" pitchFamily="34" charset="0"/>
-                <a:ea typeface="Libre Franklin" pitchFamily="34" charset="-122"/>
-                <a:cs typeface="Libre Franklin" pitchFamily="34" charset="-120"/>
-              </a:rPr>
-              <a:t>Change the 2/n to 1/n, run the tests, watch which two fail, then change it back.</a:t>
-            </a:r>
-            <a:endParaRPr lang="en-US" sz="1700" dirty="0"/>
-          </a:p>
-        </p:txBody>
-      </p:sp>
-      <p:sp>
-        <p:nvSpPr>
-          <p:cNvPr id="11" name="Text 9"/>
-          <p:cNvSpPr/>
-          <p:nvPr/>
-        </p:nvSpPr>
-        <p:spPr>
-          <a:xfrm>
-            <a:off x="558800" y="3271520"/>
-            <a:ext cx="190500" cy="317500"/>
-          </a:xfrm>
-          <a:prstGeom prst="rect">
-            <a:avLst/>
-          </a:prstGeom>
-          <a:noFill/>
-          <a:ln/>
-        </p:spPr>
-        <p:txBody>
-          <a:bodyPr wrap="square" lIns="0" tIns="0" rIns="0" bIns="0" rtlCol="0" anchor="t"/>
-          <a:lstStyle/>
-          <a:p>
-            <a:pPr algn="l" indent="0" marL="0">
-              <a:lnSpc>
-                <a:spcPct val="140000"/>
-              </a:lnSpc>
-              <a:buNone/>
-            </a:pPr>
-            <a:r>
-              <a:rPr lang="en-US" sz="1700" dirty="0">
-                <a:solidFill>
-                  <a:srgbClr val="A87A2E"/>
-                </a:solidFill>
-                <a:latin typeface="Libre Franklin" pitchFamily="34" charset="0"/>
-                <a:ea typeface="Libre Franklin" pitchFamily="34" charset="-122"/>
-                <a:cs typeface="Libre Franklin" pitchFamily="34" charset="-120"/>
-              </a:rPr>
-              <a:t>—</a:t>
-            </a:r>
-            <a:endParaRPr lang="en-US" sz="1700" dirty="0"/>
-          </a:p>
-        </p:txBody>
-      </p:sp>
-      <p:sp>
-        <p:nvSpPr>
-          <p:cNvPr id="12" name="Text 10"/>
-          <p:cNvSpPr/>
-          <p:nvPr/>
-        </p:nvSpPr>
-        <p:spPr>
-          <a:xfrm>
-            <a:off x="927100" y="3271520"/>
-            <a:ext cx="9156700" cy="753110"/>
-          </a:xfrm>
-          <a:prstGeom prst="rect">
-            <a:avLst/>
-          </a:prstGeom>
-          <a:noFill/>
-          <a:ln/>
-        </p:spPr>
-        <p:txBody>
-          <a:bodyPr wrap="square" lIns="0" tIns="0" rIns="0" bIns="0" rtlCol="0" anchor="t"/>
-          <a:lstStyle/>
-          <a:p>
-            <a:pPr algn="l" indent="0" marL="0">
-              <a:lnSpc>
-                <a:spcPct val="145000"/>
-              </a:lnSpc>
-              <a:buNone/>
-            </a:pPr>
-            <a:r>
-              <a:rPr lang="en-US" sz="1700" b="1" dirty="0">
-                <a:solidFill>
-                  <a:srgbClr val="332F2A"/>
-                </a:solidFill>
-                <a:latin typeface="Libre Franklin" pitchFamily="34" charset="0"/>
-                <a:ea typeface="Libre Franklin" pitchFamily="34" charset="-122"/>
-                <a:cs typeface="Libre Franklin" pitchFamily="34" charset="-120"/>
-              </a:rPr>
-              <a:t>Nothing here edits your work, </a:t>
-            </a:r>
-            <a:pPr algn="l" indent="0" marL="0">
-              <a:lnSpc>
-                <a:spcPct val="145000"/>
-              </a:lnSpc>
-              <a:buNone/>
-            </a:pPr>
-            <a:r>
-              <a:rPr lang="en-US" sz="1700" dirty="0">
-                <a:solidFill>
-                  <a:srgbClr val="332F2A"/>
-                </a:solidFill>
-                <a:latin typeface="Libre Franklin" pitchFamily="34" charset="0"/>
-                <a:ea typeface="Libre Franklin" pitchFamily="34" charset="-122"/>
-                <a:cs typeface="Libre Franklin" pitchFamily="34" charset="-120"/>
-              </a:rPr>
-              <a:t>so none of it can break your project. Explaining is the safest thing an agent does.</a:t>
-            </a:r>
-            <a:endParaRPr lang="en-US" sz="1700" dirty="0"/>
-          </a:p>
-        </p:txBody>
-      </p:sp>
-      <p:sp>
-        <p:nvSpPr>
-          <p:cNvPr id="13" name="Text 11"/>
-          <p:cNvSpPr/>
-          <p:nvPr/>
-        </p:nvSpPr>
-        <p:spPr>
-          <a:xfrm>
-            <a:off x="558800" y="4151630"/>
-            <a:ext cx="190500" cy="317500"/>
-          </a:xfrm>
-          <a:prstGeom prst="rect">
-            <a:avLst/>
-          </a:prstGeom>
-          <a:noFill/>
-          <a:ln/>
-        </p:spPr>
-        <p:txBody>
-          <a:bodyPr wrap="square" lIns="0" tIns="0" rIns="0" bIns="0" rtlCol="0" anchor="t"/>
-          <a:lstStyle/>
-          <a:p>
-            <a:pPr algn="l" indent="0" marL="0">
-              <a:lnSpc>
-                <a:spcPct val="140000"/>
-              </a:lnSpc>
-              <a:buNone/>
-            </a:pPr>
-            <a:r>
-              <a:rPr lang="en-US" sz="1700" dirty="0">
-                <a:solidFill>
-                  <a:srgbClr val="A87A2E"/>
-                </a:solidFill>
-                <a:latin typeface="Libre Franklin" pitchFamily="34" charset="0"/>
-                <a:ea typeface="Libre Franklin" pitchFamily="34" charset="-122"/>
-                <a:cs typeface="Libre Franklin" pitchFamily="34" charset="-120"/>
-              </a:rPr>
-              <a:t>—</a:t>
-            </a:r>
-            <a:endParaRPr lang="en-US" sz="1700" dirty="0"/>
-          </a:p>
-        </p:txBody>
-      </p:sp>
-      <p:sp>
-        <p:nvSpPr>
-          <p:cNvPr id="14" name="Text 12"/>
-          <p:cNvSpPr/>
-          <p:nvPr/>
-        </p:nvSpPr>
-        <p:spPr>
-          <a:xfrm>
-            <a:off x="927100" y="4151630"/>
-            <a:ext cx="9156700" cy="753110"/>
-          </a:xfrm>
-          <a:prstGeom prst="rect">
-            <a:avLst/>
-          </a:prstGeom>
-          <a:noFill/>
-          <a:ln/>
-        </p:spPr>
-        <p:txBody>
-          <a:bodyPr wrap="square" lIns="0" tIns="0" rIns="0" bIns="0" rtlCol="0" anchor="t"/>
-          <a:lstStyle/>
-          <a:p>
-            <a:pPr algn="l" indent="0" marL="0">
-              <a:lnSpc>
-                <a:spcPct val="145000"/>
-              </a:lnSpc>
-              <a:buNone/>
-            </a:pPr>
-            <a:r>
-              <a:rPr lang="en-US" sz="1700" dirty="0">
-                <a:solidFill>
-                  <a:srgbClr val="332F2A"/>
-                </a:solidFill>
-                <a:latin typeface="Libre Franklin" pitchFamily="34" charset="0"/>
-                <a:ea typeface="Libre Franklin" pitchFamily="34" charset="-122"/>
-                <a:cs typeface="Libre Franklin" pitchFamily="34" charset="-120"/>
-              </a:rPr>
-              <a:t>Reading code you did not write, with an AI explaining it, is the most common way these tools are used at work.</a:t>
-            </a:r>
-            <a:endParaRPr lang="en-US" sz="1700" dirty="0"/>
+              <a:t>A spectrum can have every peak in exactly the right place and still be wrong by a factor of five hundred.</a:t>
+            </a:r>
+            <a:endParaRPr lang="en-US" sz="1500" dirty="0"/>
           </a:p>
         </p:txBody>
       </p:sp>
@@ -16831,7 +16944,7 @@
                 <a:ea typeface="Libre Franklin" pitchFamily="34" charset="-122"/>
                 <a:cs typeface="Libre Franklin" pitchFamily="34" charset="-120"/>
               </a:rPr>
-              <a:t>The files a person writes at work</a:t>
+              <a:t>Read the reference before you leave</a:t>
             </a:r>
             <a:endParaRPr lang="en-US" sz="2800" dirty="0"/>
           </a:p>
@@ -17019,7 +17132,7 @@
                 <a:ea typeface="Libre Franklin" pitchFamily="34" charset="-122"/>
                 <a:cs typeface="Libre Franklin" pitchFamily="34" charset="-120"/>
               </a:rPr>
-              <a:t>Open the four you approved. </a:t>
+              <a:t>Everyone does this, </a:t>
             </a:r>
             <a:pPr algn="l" indent="0" marL="0">
               <a:lnSpc>
@@ -17036,7 +17149,7 @@
                 <a:ea typeface="Libre Franklin" pitchFamily="34" charset="-122"/>
                 <a:cs typeface="Libre Franklin" pitchFamily="34" charset="-120"/>
               </a:rPr>
-              <a:t>aidlc/intent.md, requirements.md, design.md and tasks.md — read them as one set, in order.</a:t>
+              <a:t>whether your own version works or not. The prompts are in labs/EXPLAIN.md.</a:t>
             </a:r>
             <a:endParaRPr lang="en-US" sz="1700" dirty="0"/>
           </a:p>
@@ -17120,7 +17233,7 @@
                 <a:ea typeface="Libre Franklin" pitchFamily="34" charset="-122"/>
                 <a:cs typeface="Libre Franklin" pitchFamily="34" charset="-120"/>
               </a:rPr>
-              <a:t>In a real team a person writes these. </a:t>
+              <a:t>Ask it to break the code. </a:t>
             </a:r>
             <a:pPr algn="l" indent="0" marL="0">
               <a:lnSpc>
@@ -17137,7 +17250,7 @@
                 <a:ea typeface="Libre Franklin" pitchFamily="34" charset="-122"/>
                 <a:cs typeface="Libre Franklin" pitchFamily="34" charset="-120"/>
               </a:rPr>
-              <a:t>A product owner or tech lead drafts the intent and spec. The agent drafting them is a start, not a replacement.</a:t>
+              <a:t>Change the 2/n to 1/n, run the tests, watch which two fail, then change it back.</a:t>
             </a:r>
             <a:endParaRPr lang="en-US" sz="1700" dirty="0"/>
           </a:p>
@@ -17221,7 +17334,7 @@
                 <a:ea typeface="Libre Franklin" pitchFamily="34" charset="-122"/>
                 <a:cs typeface="Libre Franklin" pitchFamily="34" charset="-120"/>
               </a:rPr>
-              <a:t>Which is why you approved each one. </a:t>
+              <a:t>Nothing here edits your work, </a:t>
             </a:r>
             <a:pPr algn="l" indent="0" marL="0">
               <a:lnSpc>
@@ -17238,7 +17351,7 @@
                 <a:ea typeface="Libre Franklin" pitchFamily="34" charset="-122"/>
                 <a:cs typeface="Libre Franklin" pitchFamily="34" charset="-120"/>
               </a:rPr>
-              <a:t>Everything built today came out of those four files. A wrong line there becomes a wrong app, quickly and cheaply.</a:t>
+              <a:t>so none of it can break your project. Explaining is the safest thing an agent does.</a:t>
             </a:r>
             <a:endParaRPr lang="en-US" sz="1700" dirty="0"/>
           </a:p>
@@ -17322,7 +17435,7 @@
                 <a:ea typeface="Libre Franklin" pitchFamily="34" charset="-122"/>
                 <a:cs typeface="Libre Franklin" pitchFamily="34" charset="-120"/>
               </a:rPr>
-              <a:t>labs/PROMPTS.md explains why each prompt is worded the way it is. Read it before Session 2 — you will be writing your own.</a:t>
+              <a:t>Reading code you did not write, with an AI explaining it, is the most common way these tools are used at work.</a:t>
             </a:r>
             <a:endParaRPr lang="en-US" sz="1700" dirty="0"/>
           </a:p>
@@ -17339,6 +17452,613 @@
 <file path=ppt/slides/slide35.xml><?xml version="1.0" encoding="utf-8"?>
 <p:sld xmlns:a="http://schemas.openxmlformats.org/drawingml/2006/main" xmlns:r="http://schemas.openxmlformats.org/officeDocument/2006/relationships" xmlns:p="http://schemas.openxmlformats.org/presentationml/2006/main">
   <p:cSld name="Slide 35">
+    <p:bg>
+      <p:bgPr>
+        <a:solidFill>
+          <a:srgbClr val="FCFBF8"/>
+        </a:solidFill>
+      </p:bgPr>
+    </p:bg>
+    <p:spTree>
+      <p:nvGrpSpPr>
+        <p:cNvPr id="1" name=""/>
+        <p:cNvGrpSpPr/>
+        <p:nvPr/>
+      </p:nvGrpSpPr>
+      <p:grpSpPr>
+        <a:xfrm>
+          <a:off x="0" y="0"/>
+          <a:ext cx="0" cy="0"/>
+          <a:chOff x="0" y="0"/>
+          <a:chExt cx="0" cy="0"/>
+        </a:xfrm>
+      </p:grpSpPr>
+      <p:sp>
+        <p:nvSpPr>
+          <p:cNvPr id="2" name="Text 0"/>
+          <p:cNvSpPr/>
+          <p:nvPr/>
+        </p:nvSpPr>
+        <p:spPr>
+          <a:xfrm>
+            <a:off x="558800" y="355600"/>
+            <a:ext cx="11074400" cy="215900"/>
+          </a:xfrm>
+          <a:prstGeom prst="rect">
+            <a:avLst/>
+          </a:prstGeom>
+          <a:noFill/>
+          <a:ln/>
+        </p:spPr>
+        <p:txBody>
+          <a:bodyPr wrap="square" lIns="0" tIns="0" rIns="0" bIns="0" rtlCol="0" anchor="t"/>
+          <a:lstStyle/>
+          <a:p>
+            <a:pPr algn="l" indent="0" marL="0">
+              <a:lnSpc>
+                <a:spcPct val="145000"/>
+              </a:lnSpc>
+              <a:buNone/>
+            </a:pPr>
+            <a:r>
+              <a:rPr lang="en-US" sz="1200" spc="168" kern="0" dirty="0">
+                <a:solidFill>
+                  <a:srgbClr val="77726A"/>
+                </a:solidFill>
+                <a:latin typeface="IBM Plex Mono" pitchFamily="34" charset="0"/>
+                <a:ea typeface="IBM Plex Mono" pitchFamily="34" charset="-122"/>
+                <a:cs typeface="IBM Plex Mono" pitchFamily="34" charset="-120"/>
+              </a:rPr>
+              <a:t>SECTION 06</a:t>
+            </a:r>
+            <a:endParaRPr lang="en-US" sz="1200" dirty="0"/>
+          </a:p>
+        </p:txBody>
+      </p:sp>
+      <p:sp>
+        <p:nvSpPr>
+          <p:cNvPr id="3" name="Text 1"/>
+          <p:cNvSpPr/>
+          <p:nvPr/>
+        </p:nvSpPr>
+        <p:spPr>
+          <a:xfrm>
+            <a:off x="558800" y="635000"/>
+            <a:ext cx="11074400" cy="508000"/>
+          </a:xfrm>
+          <a:prstGeom prst="rect">
+            <a:avLst/>
+          </a:prstGeom>
+          <a:noFill/>
+          <a:ln/>
+        </p:spPr>
+        <p:txBody>
+          <a:bodyPr wrap="square" lIns="0" tIns="0" rIns="0" bIns="0" rtlCol="0" anchor="t"/>
+          <a:lstStyle/>
+          <a:p>
+            <a:pPr algn="l" indent="0" marL="0">
+              <a:lnSpc>
+                <a:spcPct val="110000"/>
+              </a:lnSpc>
+              <a:buNone/>
+            </a:pPr>
+            <a:r>
+              <a:rPr lang="en-US" sz="2800" b="1" dirty="0">
+                <a:solidFill>
+                  <a:srgbClr val="332F2A"/>
+                </a:solidFill>
+                <a:latin typeface="Libre Franklin" pitchFamily="34" charset="0"/>
+                <a:ea typeface="Libre Franklin" pitchFamily="34" charset="-122"/>
+                <a:cs typeface="Libre Franklin" pitchFamily="34" charset="-120"/>
+              </a:rPr>
+              <a:t>The files a person writes at work</a:t>
+            </a:r>
+            <a:endParaRPr lang="en-US" sz="2800" dirty="0"/>
+          </a:p>
+        </p:txBody>
+      </p:sp>
+      <p:sp>
+        <p:nvSpPr>
+          <p:cNvPr id="4" name="Shape 2"/>
+          <p:cNvSpPr/>
+          <p:nvPr/>
+        </p:nvSpPr>
+        <p:spPr>
+          <a:xfrm>
+            <a:off x="558800" y="1181100"/>
+            <a:ext cx="11074400" cy="6350"/>
+          </a:xfrm>
+          <a:prstGeom prst="rect">
+            <a:avLst/>
+          </a:prstGeom>
+          <a:solidFill>
+            <a:srgbClr val="E1DED7"/>
+          </a:solidFill>
+          <a:ln/>
+        </p:spPr>
+      </p:sp>
+      <p:sp>
+        <p:nvSpPr>
+          <p:cNvPr id="5" name="Text 3"/>
+          <p:cNvSpPr/>
+          <p:nvPr/>
+        </p:nvSpPr>
+        <p:spPr>
+          <a:xfrm>
+            <a:off x="558800" y="6337300"/>
+            <a:ext cx="9804400" cy="215900"/>
+          </a:xfrm>
+          <a:prstGeom prst="rect">
+            <a:avLst/>
+          </a:prstGeom>
+          <a:noFill/>
+          <a:ln/>
+        </p:spPr>
+        <p:txBody>
+          <a:bodyPr wrap="square" lIns="0" tIns="0" rIns="0" bIns="0" rtlCol="0" anchor="t"/>
+          <a:lstStyle/>
+          <a:p>
+            <a:pPr algn="l" indent="0" marL="0">
+              <a:lnSpc>
+                <a:spcPct val="145000"/>
+              </a:lnSpc>
+              <a:buNone/>
+            </a:pPr>
+            <a:r>
+              <a:rPr lang="en-US" sz="1200" dirty="0">
+                <a:solidFill>
+                  <a:srgbClr val="99948B"/>
+                </a:solidFill>
+                <a:latin typeface="IBM Plex Mono" pitchFamily="34" charset="0"/>
+                <a:ea typeface="IBM Plex Mono" pitchFamily="34" charset="-122"/>
+                <a:cs typeface="IBM Plex Mono" pitchFamily="34" charset="-120"/>
+              </a:rPr>
+              <a:t>AI for Software Development · Session 1</a:t>
+            </a:r>
+            <a:endParaRPr lang="en-US" sz="1200" dirty="0"/>
+          </a:p>
+        </p:txBody>
+      </p:sp>
+      <p:sp>
+        <p:nvSpPr>
+          <p:cNvPr id="6" name="Text 4"/>
+          <p:cNvSpPr/>
+          <p:nvPr/>
+        </p:nvSpPr>
+        <p:spPr>
+          <a:xfrm>
+            <a:off x="10363200" y="6337300"/>
+            <a:ext cx="1270000" cy="215900"/>
+          </a:xfrm>
+          <a:prstGeom prst="rect">
+            <a:avLst/>
+          </a:prstGeom>
+          <a:noFill/>
+          <a:ln/>
+        </p:spPr>
+        <p:txBody>
+          <a:bodyPr wrap="square" lIns="0" tIns="0" rIns="0" bIns="0" rtlCol="0" anchor="t"/>
+          <a:lstStyle/>
+          <a:p>
+            <a:pPr algn="r" indent="0" marL="0">
+              <a:lnSpc>
+                <a:spcPct val="145000"/>
+              </a:lnSpc>
+              <a:buNone/>
+            </a:pPr>
+            <a:r>
+              <a:rPr lang="en-US" sz="1200" dirty="0">
+                <a:solidFill>
+                  <a:srgbClr val="99948B"/>
+                </a:solidFill>
+                <a:latin typeface="IBM Plex Mono" pitchFamily="34" charset="0"/>
+                <a:ea typeface="IBM Plex Mono" pitchFamily="34" charset="-122"/>
+                <a:cs typeface="IBM Plex Mono" pitchFamily="34" charset="-120"/>
+              </a:rPr>
+              <a:t>35</a:t>
+            </a:r>
+            <a:endParaRPr lang="en-US" sz="1200" dirty="0"/>
+          </a:p>
+        </p:txBody>
+      </p:sp>
+      <p:sp>
+        <p:nvSpPr>
+          <p:cNvPr id="7" name="Text 5"/>
+          <p:cNvSpPr/>
+          <p:nvPr/>
+        </p:nvSpPr>
+        <p:spPr>
+          <a:xfrm>
+            <a:off x="558800" y="1511300"/>
+            <a:ext cx="190500" cy="317500"/>
+          </a:xfrm>
+          <a:prstGeom prst="rect">
+            <a:avLst/>
+          </a:prstGeom>
+          <a:noFill/>
+          <a:ln/>
+        </p:spPr>
+        <p:txBody>
+          <a:bodyPr wrap="square" lIns="0" tIns="0" rIns="0" bIns="0" rtlCol="0" anchor="t"/>
+          <a:lstStyle/>
+          <a:p>
+            <a:pPr algn="l" indent="0" marL="0">
+              <a:lnSpc>
+                <a:spcPct val="140000"/>
+              </a:lnSpc>
+              <a:buNone/>
+            </a:pPr>
+            <a:r>
+              <a:rPr lang="en-US" sz="1700" dirty="0">
+                <a:solidFill>
+                  <a:srgbClr val="A87A2E"/>
+                </a:solidFill>
+                <a:latin typeface="Libre Franklin" pitchFamily="34" charset="0"/>
+                <a:ea typeface="Libre Franklin" pitchFamily="34" charset="-122"/>
+                <a:cs typeface="Libre Franklin" pitchFamily="34" charset="-120"/>
+              </a:rPr>
+              <a:t>—</a:t>
+            </a:r>
+            <a:endParaRPr lang="en-US" sz="1700" dirty="0"/>
+          </a:p>
+        </p:txBody>
+      </p:sp>
+      <p:sp>
+        <p:nvSpPr>
+          <p:cNvPr id="8" name="Text 6"/>
+          <p:cNvSpPr/>
+          <p:nvPr/>
+        </p:nvSpPr>
+        <p:spPr>
+          <a:xfrm>
+            <a:off x="927100" y="1511300"/>
+            <a:ext cx="9156700" cy="753110"/>
+          </a:xfrm>
+          <a:prstGeom prst="rect">
+            <a:avLst/>
+          </a:prstGeom>
+          <a:noFill/>
+          <a:ln/>
+        </p:spPr>
+        <p:txBody>
+          <a:bodyPr wrap="square" lIns="0" tIns="0" rIns="0" bIns="0" rtlCol="0" anchor="t"/>
+          <a:lstStyle/>
+          <a:p>
+            <a:pPr algn="l" indent="0" marL="0">
+              <a:lnSpc>
+                <a:spcPct val="145000"/>
+              </a:lnSpc>
+              <a:buNone/>
+            </a:pPr>
+            <a:r>
+              <a:rPr lang="en-US" sz="1700" b="1" dirty="0">
+                <a:solidFill>
+                  <a:srgbClr val="332F2A"/>
+                </a:solidFill>
+                <a:latin typeface="Libre Franklin" pitchFamily="34" charset="0"/>
+                <a:ea typeface="Libre Franklin" pitchFamily="34" charset="-122"/>
+                <a:cs typeface="Libre Franklin" pitchFamily="34" charset="-120"/>
+              </a:rPr>
+              <a:t>Open the four you approved. </a:t>
+            </a:r>
+            <a:pPr algn="l" indent="0" marL="0">
+              <a:lnSpc>
+                <a:spcPct val="145000"/>
+              </a:lnSpc>
+              <a:buNone/>
+            </a:pPr>
+            <a:r>
+              <a:rPr lang="en-US" sz="1700" dirty="0">
+                <a:solidFill>
+                  <a:srgbClr val="332F2A"/>
+                </a:solidFill>
+                <a:latin typeface="Libre Franklin" pitchFamily="34" charset="0"/>
+                <a:ea typeface="Libre Franklin" pitchFamily="34" charset="-122"/>
+                <a:cs typeface="Libre Franklin" pitchFamily="34" charset="-120"/>
+              </a:rPr>
+              <a:t>aidlc/intent.md, requirements.md, design.md and tasks.md — read them as one set, in order.</a:t>
+            </a:r>
+            <a:endParaRPr lang="en-US" sz="1700" dirty="0"/>
+          </a:p>
+        </p:txBody>
+      </p:sp>
+      <p:sp>
+        <p:nvSpPr>
+          <p:cNvPr id="9" name="Text 7"/>
+          <p:cNvSpPr/>
+          <p:nvPr/>
+        </p:nvSpPr>
+        <p:spPr>
+          <a:xfrm>
+            <a:off x="558800" y="2391410"/>
+            <a:ext cx="190500" cy="317500"/>
+          </a:xfrm>
+          <a:prstGeom prst="rect">
+            <a:avLst/>
+          </a:prstGeom>
+          <a:noFill/>
+          <a:ln/>
+        </p:spPr>
+        <p:txBody>
+          <a:bodyPr wrap="square" lIns="0" tIns="0" rIns="0" bIns="0" rtlCol="0" anchor="t"/>
+          <a:lstStyle/>
+          <a:p>
+            <a:pPr algn="l" indent="0" marL="0">
+              <a:lnSpc>
+                <a:spcPct val="140000"/>
+              </a:lnSpc>
+              <a:buNone/>
+            </a:pPr>
+            <a:r>
+              <a:rPr lang="en-US" sz="1700" dirty="0">
+                <a:solidFill>
+                  <a:srgbClr val="A87A2E"/>
+                </a:solidFill>
+                <a:latin typeface="Libre Franklin" pitchFamily="34" charset="0"/>
+                <a:ea typeface="Libre Franklin" pitchFamily="34" charset="-122"/>
+                <a:cs typeface="Libre Franklin" pitchFamily="34" charset="-120"/>
+              </a:rPr>
+              <a:t>—</a:t>
+            </a:r>
+            <a:endParaRPr lang="en-US" sz="1700" dirty="0"/>
+          </a:p>
+        </p:txBody>
+      </p:sp>
+      <p:sp>
+        <p:nvSpPr>
+          <p:cNvPr id="10" name="Text 8"/>
+          <p:cNvSpPr/>
+          <p:nvPr/>
+        </p:nvSpPr>
+        <p:spPr>
+          <a:xfrm>
+            <a:off x="927100" y="2391410"/>
+            <a:ext cx="9156700" cy="753110"/>
+          </a:xfrm>
+          <a:prstGeom prst="rect">
+            <a:avLst/>
+          </a:prstGeom>
+          <a:noFill/>
+          <a:ln/>
+        </p:spPr>
+        <p:txBody>
+          <a:bodyPr wrap="square" lIns="0" tIns="0" rIns="0" bIns="0" rtlCol="0" anchor="t"/>
+          <a:lstStyle/>
+          <a:p>
+            <a:pPr algn="l" indent="0" marL="0">
+              <a:lnSpc>
+                <a:spcPct val="145000"/>
+              </a:lnSpc>
+              <a:buNone/>
+            </a:pPr>
+            <a:r>
+              <a:rPr lang="en-US" sz="1700" b="1" dirty="0">
+                <a:solidFill>
+                  <a:srgbClr val="332F2A"/>
+                </a:solidFill>
+                <a:latin typeface="Libre Franklin" pitchFamily="34" charset="0"/>
+                <a:ea typeface="Libre Franklin" pitchFamily="34" charset="-122"/>
+                <a:cs typeface="Libre Franklin" pitchFamily="34" charset="-120"/>
+              </a:rPr>
+              <a:t>In a real team a person writes these. </a:t>
+            </a:r>
+            <a:pPr algn="l" indent="0" marL="0">
+              <a:lnSpc>
+                <a:spcPct val="145000"/>
+              </a:lnSpc>
+              <a:buNone/>
+            </a:pPr>
+            <a:r>
+              <a:rPr lang="en-US" sz="1700" dirty="0">
+                <a:solidFill>
+                  <a:srgbClr val="332F2A"/>
+                </a:solidFill>
+                <a:latin typeface="Libre Franklin" pitchFamily="34" charset="0"/>
+                <a:ea typeface="Libre Franklin" pitchFamily="34" charset="-122"/>
+                <a:cs typeface="Libre Franklin" pitchFamily="34" charset="-120"/>
+              </a:rPr>
+              <a:t>A product owner or tech lead drafts the intent and spec. The agent drafting them is a start, not a replacement.</a:t>
+            </a:r>
+            <a:endParaRPr lang="en-US" sz="1700" dirty="0"/>
+          </a:p>
+        </p:txBody>
+      </p:sp>
+      <p:sp>
+        <p:nvSpPr>
+          <p:cNvPr id="11" name="Text 9"/>
+          <p:cNvSpPr/>
+          <p:nvPr/>
+        </p:nvSpPr>
+        <p:spPr>
+          <a:xfrm>
+            <a:off x="558800" y="3271520"/>
+            <a:ext cx="190500" cy="317500"/>
+          </a:xfrm>
+          <a:prstGeom prst="rect">
+            <a:avLst/>
+          </a:prstGeom>
+          <a:noFill/>
+          <a:ln/>
+        </p:spPr>
+        <p:txBody>
+          <a:bodyPr wrap="square" lIns="0" tIns="0" rIns="0" bIns="0" rtlCol="0" anchor="t"/>
+          <a:lstStyle/>
+          <a:p>
+            <a:pPr algn="l" indent="0" marL="0">
+              <a:lnSpc>
+                <a:spcPct val="140000"/>
+              </a:lnSpc>
+              <a:buNone/>
+            </a:pPr>
+            <a:r>
+              <a:rPr lang="en-US" sz="1700" dirty="0">
+                <a:solidFill>
+                  <a:srgbClr val="A87A2E"/>
+                </a:solidFill>
+                <a:latin typeface="Libre Franklin" pitchFamily="34" charset="0"/>
+                <a:ea typeface="Libre Franklin" pitchFamily="34" charset="-122"/>
+                <a:cs typeface="Libre Franklin" pitchFamily="34" charset="-120"/>
+              </a:rPr>
+              <a:t>—</a:t>
+            </a:r>
+            <a:endParaRPr lang="en-US" sz="1700" dirty="0"/>
+          </a:p>
+        </p:txBody>
+      </p:sp>
+      <p:sp>
+        <p:nvSpPr>
+          <p:cNvPr id="12" name="Text 10"/>
+          <p:cNvSpPr/>
+          <p:nvPr/>
+        </p:nvSpPr>
+        <p:spPr>
+          <a:xfrm>
+            <a:off x="927100" y="3271520"/>
+            <a:ext cx="9156700" cy="753110"/>
+          </a:xfrm>
+          <a:prstGeom prst="rect">
+            <a:avLst/>
+          </a:prstGeom>
+          <a:noFill/>
+          <a:ln/>
+        </p:spPr>
+        <p:txBody>
+          <a:bodyPr wrap="square" lIns="0" tIns="0" rIns="0" bIns="0" rtlCol="0" anchor="t"/>
+          <a:lstStyle/>
+          <a:p>
+            <a:pPr algn="l" indent="0" marL="0">
+              <a:lnSpc>
+                <a:spcPct val="145000"/>
+              </a:lnSpc>
+              <a:buNone/>
+            </a:pPr>
+            <a:r>
+              <a:rPr lang="en-US" sz="1700" b="1" dirty="0">
+                <a:solidFill>
+                  <a:srgbClr val="332F2A"/>
+                </a:solidFill>
+                <a:latin typeface="Libre Franklin" pitchFamily="34" charset="0"/>
+                <a:ea typeface="Libre Franklin" pitchFamily="34" charset="-122"/>
+                <a:cs typeface="Libre Franklin" pitchFamily="34" charset="-120"/>
+              </a:rPr>
+              <a:t>Which is why you approved each one. </a:t>
+            </a:r>
+            <a:pPr algn="l" indent="0" marL="0">
+              <a:lnSpc>
+                <a:spcPct val="145000"/>
+              </a:lnSpc>
+              <a:buNone/>
+            </a:pPr>
+            <a:r>
+              <a:rPr lang="en-US" sz="1700" dirty="0">
+                <a:solidFill>
+                  <a:srgbClr val="332F2A"/>
+                </a:solidFill>
+                <a:latin typeface="Libre Franklin" pitchFamily="34" charset="0"/>
+                <a:ea typeface="Libre Franklin" pitchFamily="34" charset="-122"/>
+                <a:cs typeface="Libre Franklin" pitchFamily="34" charset="-120"/>
+              </a:rPr>
+              <a:t>Everything built today came out of those four files. A wrong line there becomes a wrong app, quickly and cheaply.</a:t>
+            </a:r>
+            <a:endParaRPr lang="en-US" sz="1700" dirty="0"/>
+          </a:p>
+        </p:txBody>
+      </p:sp>
+      <p:sp>
+        <p:nvSpPr>
+          <p:cNvPr id="13" name="Text 11"/>
+          <p:cNvSpPr/>
+          <p:nvPr/>
+        </p:nvSpPr>
+        <p:spPr>
+          <a:xfrm>
+            <a:off x="558800" y="4151630"/>
+            <a:ext cx="190500" cy="317500"/>
+          </a:xfrm>
+          <a:prstGeom prst="rect">
+            <a:avLst/>
+          </a:prstGeom>
+          <a:noFill/>
+          <a:ln/>
+        </p:spPr>
+        <p:txBody>
+          <a:bodyPr wrap="square" lIns="0" tIns="0" rIns="0" bIns="0" rtlCol="0" anchor="t"/>
+          <a:lstStyle/>
+          <a:p>
+            <a:pPr algn="l" indent="0" marL="0">
+              <a:lnSpc>
+                <a:spcPct val="140000"/>
+              </a:lnSpc>
+              <a:buNone/>
+            </a:pPr>
+            <a:r>
+              <a:rPr lang="en-US" sz="1700" dirty="0">
+                <a:solidFill>
+                  <a:srgbClr val="A87A2E"/>
+                </a:solidFill>
+                <a:latin typeface="Libre Franklin" pitchFamily="34" charset="0"/>
+                <a:ea typeface="Libre Franklin" pitchFamily="34" charset="-122"/>
+                <a:cs typeface="Libre Franklin" pitchFamily="34" charset="-120"/>
+              </a:rPr>
+              <a:t>—</a:t>
+            </a:r>
+            <a:endParaRPr lang="en-US" sz="1700" dirty="0"/>
+          </a:p>
+        </p:txBody>
+      </p:sp>
+      <p:sp>
+        <p:nvSpPr>
+          <p:cNvPr id="14" name="Text 12"/>
+          <p:cNvSpPr/>
+          <p:nvPr/>
+        </p:nvSpPr>
+        <p:spPr>
+          <a:xfrm>
+            <a:off x="927100" y="4151630"/>
+            <a:ext cx="9156700" cy="753110"/>
+          </a:xfrm>
+          <a:prstGeom prst="rect">
+            <a:avLst/>
+          </a:prstGeom>
+          <a:noFill/>
+          <a:ln/>
+        </p:spPr>
+        <p:txBody>
+          <a:bodyPr wrap="square" lIns="0" tIns="0" rIns="0" bIns="0" rtlCol="0" anchor="t"/>
+          <a:lstStyle/>
+          <a:p>
+            <a:pPr algn="l" indent="0" marL="0">
+              <a:lnSpc>
+                <a:spcPct val="145000"/>
+              </a:lnSpc>
+              <a:buNone/>
+            </a:pPr>
+            <a:r>
+              <a:rPr lang="en-US" sz="1700" dirty="0">
+                <a:solidFill>
+                  <a:srgbClr val="332F2A"/>
+                </a:solidFill>
+                <a:latin typeface="Libre Franklin" pitchFamily="34" charset="0"/>
+                <a:ea typeface="Libre Franklin" pitchFamily="34" charset="-122"/>
+                <a:cs typeface="Libre Franklin" pitchFamily="34" charset="-120"/>
+              </a:rPr>
+              <a:t>labs/PROMPTS.md explains why each prompt is worded the way it is. Read it before Session 2 — you will be writing your own.</a:t>
+            </a:r>
+            <a:endParaRPr lang="en-US" sz="1700" dirty="0"/>
+          </a:p>
+        </p:txBody>
+      </p:sp>
+    </p:spTree>
+  </p:cSld>
+  <p:clrMapOvr>
+    <a:masterClrMapping/>
+  </p:clrMapOvr>
+</p:sld>
+</file>
+
+<file path=ppt/slides/slide36.xml><?xml version="1.0" encoding="utf-8"?>
+<p:sld xmlns:a="http://schemas.openxmlformats.org/drawingml/2006/main" xmlns:r="http://schemas.openxmlformats.org/officeDocument/2006/relationships" xmlns:p="http://schemas.openxmlformats.org/presentationml/2006/main">
+  <p:cSld name="Slide 36">
     <p:bg>
       <p:bgPr>
         <a:solidFill>
@@ -17542,7 +18262,7 @@
                 <a:ea typeface="IBM Plex Mono" pitchFamily="34" charset="-122"/>
                 <a:cs typeface="IBM Plex Mono" pitchFamily="34" charset="-120"/>
               </a:rPr>
-              <a:t>35</a:t>
+              <a:t>36</a:t>
             </a:r>
             <a:endParaRPr lang="en-US" sz="1200" dirty="0"/>
           </a:p>
@@ -17808,9 +18528,9 @@
 </p:sld>
 </file>
 
-<file path=ppt/slides/slide36.xml><?xml version="1.0" encoding="utf-8"?>
+<file path=ppt/slides/slide37.xml><?xml version="1.0" encoding="utf-8"?>
 <p:sld xmlns:a="http://schemas.openxmlformats.org/drawingml/2006/main" xmlns:r="http://schemas.openxmlformats.org/officeDocument/2006/relationships" xmlns:p="http://schemas.openxmlformats.org/presentationml/2006/main">
-  <p:cSld name="Slide 36">
+  <p:cSld name="Slide 37">
     <p:bg>
       <p:bgPr>
         <a:solidFill>
@@ -18140,7 +18860,7 @@
                 <a:ea typeface="IBM Plex Mono" pitchFamily="34" charset="-122"/>
                 <a:cs typeface="IBM Plex Mono" pitchFamily="34" charset="-120"/>
               </a:rPr>
-              <a:t>36</a:t>
+              <a:t>37</a:t>
             </a:r>
             <a:endParaRPr lang="en-US" sz="1200" dirty="0"/>
           </a:p>

--- a/slides/Session 1 - Meet Your Agent.pptx
+++ b/slides/Session 1 - Meet Your Agent.pptx
@@ -2122,7 +2122,7 @@
           <a:p>
             <a:r>
               <a:rPr lang="en-US" dirty="0"/>
-              <a:t>Do the copy live, on the projector, and re-ask the Round 1 question so they watch the same agent refuse it. That before-and-after is the argument of the whole session, and it costs thirty seconds. Then open the file: the rules are plain English and they can edit them. Sixty of you and one of me, so the file holds the line rather than me.</a:t>
+              <a:t>Do the copy live and re-ask the Round 1 question so they watch the same agent refuse it. Budget two minutes, not thirty seconds: it is a real free-tier call and it can rate-limit on the projector, so have a screenshot of the refusal ready as a fallback. Commit the file in front of them - without the commit the next checkout silently restores the ungated version, which is the confusing failure LAB1 warns about. Then open the file: the rules are plain English and they can edit them. Sixty of you and one of me, so the file holds the line rather than me.</a:t>
             </a:r>
             <a:endParaRPr lang="en-US" dirty="0"/>
           </a:p>
@@ -2562,7 +2562,7 @@
           <a:p>
             <a:r>
               <a:rPr lang="en-US" dirty="0"/>
-              <a:t>Do this on the projector with the file tree open, not off the slide. Open tests/test_spectrum.py and read the seven test NAMES aloud - seven plain English sentences, and they are the customer's requirements. Then open .clinerules, so the file is already familiar when Round 2 swaps it.</a:t>
+              <a:t>Do this on the projector with the file tree open, not off the slide. Open .clinerules and read a rule or two aloud, so the file is familiar before Round 2 swaps it. Do NOT open tests/ here, however tempting - the seven test names give away what Round 1 exists to let them discover. They meet the tests at Gate 2, on slide 33.</a:t>
             </a:r>
             <a:endParaRPr lang="en-US" dirty="0"/>
           </a:p>
@@ -2738,7 +2738,7 @@
           <a:p>
             <a:r>
               <a:rPr lang="en-US" dirty="0"/>
-              <a:t>Read this out as the acceptance criteria, because that is what it is. The height requirement is the one they will skip and the one the tests will catch: a chart with both spikes in the right place, five hundred times too short, looks entirely convincing.</a:t>
+              <a:t>Read this out as the acceptance criteria, because that is what it is. The height requirement is the one they will skip and the one the tests will catch: a chart with both spikes in exactly the right place and every height wrong looks entirely convincing. Get the direction right if they ask: drop the 1/N and a unit tone reads N/2 - five hundred times too TALL at these settings, not too short.</a:t>
             </a:r>
             <a:endParaRPr lang="en-US" dirty="0"/>
           </a:p>
@@ -7226,7 +7226,7 @@
         <p:spPr>
           <a:xfrm>
             <a:off x="7431430" y="1511300"/>
-            <a:ext cx="4201770" cy="1010920"/>
+            <a:ext cx="4201770" cy="1894840"/>
           </a:xfrm>
           <a:prstGeom prst="rect">
             <a:avLst/>
@@ -7253,7 +7253,7 @@
                 <a:ea typeface="Libre Franklin" pitchFamily="34" charset="-122"/>
                 <a:cs typeface="Libre Franklin" pitchFamily="34" charset="-120"/>
               </a:rPr>
-              <a:t>Accept whatever it gives you. Do not plan, do not correct it, do not write anything down first.</a:t>
+              <a:t>First run Step 1 in labs/LAB1.md — one command, and it is what lets you compare the two rounds at the end. Then paste this and accept whatever it gives you: do not plan, do not correct it.</a:t>
             </a:r>
             <a:endParaRPr lang="en-US" sz="1600" dirty="0"/>
           </a:p>
@@ -7267,7 +7267,7 @@
         </p:nvSpPr>
         <p:spPr>
           <a:xfrm>
-            <a:off x="7431430" y="2649220"/>
+            <a:off x="7431430" y="3533140"/>
             <a:ext cx="4201770" cy="1010920"/>
           </a:xfrm>
           <a:prstGeom prst="rect">
@@ -11684,7 +11684,7 @@
         <p:spPr>
           <a:xfrm>
             <a:off x="7431430" y="3238500"/>
-            <a:ext cx="4201770" cy="1305560"/>
+            <a:ext cx="4201770" cy="1894840"/>
           </a:xfrm>
           <a:prstGeom prst="rect">
             <a:avLst/>
@@ -11711,7 +11711,7 @@
                 <a:ea typeface="Libre Franklin" pitchFamily="34" charset="-122"/>
                 <a:cs typeface="Libre Franklin" pitchFamily="34" charset="-120"/>
               </a:rPr>
-              <a:t>In Session 2 it is the whole trick: four people build at once and never touch the same file, so there is nothing to merge.</a:t>
+              <a:t>In Session 2 it is the whole trick: four people build at once and never touch the same file, so nothing has to be merged and nobody needs to learn branching to collaborate.</a:t>
             </a:r>
             <a:endParaRPr lang="en-US" sz="1600" dirty="0"/>
           </a:p>
@@ -12651,15 +12651,6 @@
               </a:lnSpc>
               <a:buNone/>
             </a:pPr>
-            <a:endParaRPr lang="en-US" sz="1400" dirty="0"/>
-          </a:p>
-          <a:p>
-            <a:pPr indent="0" marL="0">
-              <a:lnSpc>
-                <a:spcPct val="160000"/>
-              </a:lnSpc>
-              <a:buNone/>
-            </a:pPr>
             <a:r>
               <a:rPr lang="en-US" sz="1400" dirty="0">
                 <a:solidFill>
@@ -12669,17 +12660,8 @@
                 <a:ea typeface="IBM Plex Mono" pitchFamily="34" charset="-122"/>
                 <a:cs typeface="IBM Plex Mono" pitchFamily="34" charset="-120"/>
               </a:rPr>
-              <a:t># .clinerules</a:t>
-            </a:r>
-            <a:endParaRPr lang="en-US" sz="1400" dirty="0"/>
-          </a:p>
-          <a:p>
-            <a:pPr indent="0" marL="0">
-              <a:lnSpc>
-                <a:spcPct val="160000"/>
-              </a:lnSpc>
-              <a:buNone/>
-            </a:pPr>
+              <a:t>$ git add .clinerules &amp;&amp; git commit</a:t>
+            </a:r>
             <a:endParaRPr lang="en-US" sz="1400" dirty="0"/>
           </a:p>
           <a:p>
@@ -12698,8 +12680,17 @@
                 <a:ea typeface="IBM Plex Mono" pitchFamily="34" charset="-122"/>
                 <a:cs typeface="IBM Plex Mono" pitchFamily="34" charset="-120"/>
               </a:rPr>
-              <a:t>Gate 2 - Spec. Before any code</a:t>
-            </a:r>
+              <a:t>        -m "turn the gates on"</a:t>
+            </a:r>
+            <a:endParaRPr lang="en-US" sz="1400" dirty="0"/>
+          </a:p>
+          <a:p>
+            <a:pPr indent="0" marL="0">
+              <a:lnSpc>
+                <a:spcPct val="160000"/>
+              </a:lnSpc>
+              <a:buNone/>
+            </a:pPr>
             <a:endParaRPr lang="en-US" sz="1400" dirty="0"/>
           </a:p>
           <a:p>
@@ -12718,7 +12709,7 @@
                 <a:ea typeface="IBM Plex Mono" pitchFamily="34" charset="-122"/>
                 <a:cs typeface="IBM Plex Mono" pitchFamily="34" charset="-120"/>
               </a:rPr>
-              <a:t>exists, aidlc/requirements.md</a:t>
+              <a:t># then START A NEW CLINE TASK</a:t>
             </a:r>
             <a:endParaRPr lang="en-US" sz="1400" dirty="0"/>
           </a:p>
@@ -12738,8 +12729,17 @@
                 <a:ea typeface="IBM Plex Mono" pitchFamily="34" charset="-122"/>
                 <a:cs typeface="IBM Plex Mono" pitchFamily="34" charset="-120"/>
               </a:rPr>
-              <a:t>must list numbered requirements,</a:t>
-            </a:r>
+              <a:t># rules load when a task begins</a:t>
+            </a:r>
+            <a:endParaRPr lang="en-US" sz="1400" dirty="0"/>
+          </a:p>
+          <a:p>
+            <a:pPr indent="0" marL="0">
+              <a:lnSpc>
+                <a:spcPct val="160000"/>
+              </a:lnSpc>
+              <a:buNone/>
+            </a:pPr>
             <a:endParaRPr lang="en-US" sz="1400" dirty="0"/>
           </a:p>
           <a:p>
@@ -12758,7 +12758,7 @@
                 <a:ea typeface="IBM Plex Mono" pitchFamily="34" charset="-122"/>
                 <a:cs typeface="IBM Plex Mono" pitchFamily="34" charset="-120"/>
               </a:rPr>
-              <a:t>each with an acceptance criterion</a:t>
+              <a:t># .clinerules</a:t>
             </a:r>
             <a:endParaRPr lang="en-US" sz="1400" dirty="0"/>
           </a:p>
@@ -12778,7 +12778,7 @@
                 <a:ea typeface="IBM Plex Mono" pitchFamily="34" charset="-122"/>
                 <a:cs typeface="IBM Plex Mono" pitchFamily="34" charset="-120"/>
               </a:rPr>
-              <a:t>that can be checked by running</a:t>
+              <a:t>Gate 2 - Spec. Draft the</a:t>
             </a:r>
             <a:endParaRPr lang="en-US" sz="1400" dirty="0"/>
           </a:p>
@@ -12798,7 +12798,7 @@
                 <a:ea typeface="IBM Plex Mono" pitchFamily="34" charset="-122"/>
                 <a:cs typeface="IBM Plex Mono" pitchFamily="34" charset="-120"/>
               </a:rPr>
-              <a:t>something. Draft it, then STOP</a:t>
+              <a:t>requirements, then STOP and</a:t>
             </a:r>
             <a:endParaRPr lang="en-US" sz="1400" dirty="0"/>
           </a:p>
@@ -12818,7 +12818,7 @@
                 <a:ea typeface="IBM Plex Mono" pitchFamily="34" charset="-122"/>
                 <a:cs typeface="IBM Plex Mono" pitchFamily="34" charset="-120"/>
               </a:rPr>
-              <a:t>and ask for approval.</a:t>
+              <a:t>ask for approval.</a:t>
             </a:r>
             <a:endParaRPr lang="en-US" sz="1400" dirty="0"/>
           </a:p>

--- a/slides/Session 1 - Meet Your Agent.pptx
+++ b/slides/Session 1 - Meet Your Agent.pptx
@@ -3266,7 +3266,7 @@
           <a:p>
             <a:r>
               <a:rPr lang="en-US" dirty="0"/>
-              <a:t>The single most likely way for a student to arrive unable to work, and it is invisible: every check passes, then Cline opens on a configuration screen nobody mentioned. Walk the room on this one specifically. The model names in Cline are Cline's own list and will not match the names in .env, which confuses people who are paying attention.</a:t>
+              <a:t>The single most likely way for a student to arrive unable to work, and it is invisible: every check passes, then Cline opens on a configuration screen nobody mentioned - with the wrong option already selected for them. Do this one on the projector rather than describing it, because the free option is the big attractive button and taking it leaves their key unused with no error to tell them. Cline's model list is its own: it uses dated names and has no latest, so anything you read elsewhere will not match it.</a:t>
             </a:r>
             <a:endParaRPr lang="en-US" dirty="0"/>
           </a:p>
@@ -19137,7 +19137,7 @@
         <p:spPr>
           <a:xfrm>
             <a:off x="927100" y="1511300"/>
-            <a:ext cx="9156700" cy="1066165"/>
+            <a:ext cx="9156700" cy="753110"/>
           </a:xfrm>
           <a:prstGeom prst="rect">
             <a:avLst/>
@@ -19181,7 +19181,7 @@
                 <a:ea typeface="Libre Franklin" pitchFamily="34" charset="-122"/>
                 <a:cs typeface="Libre Franklin" pitchFamily="34" charset="-120"/>
               </a:rPr>
-              <a:t>check_setup.py and core/llm.py read it. Cline never does — it is a separate extension, with its own settings and its own copy of the key.</a:t>
+              <a:t>check_setup.py and core/llm.py read it. Cline never does — separate program, separate settings, its own copy of the key.</a:t>
             </a:r>
             <a:endParaRPr lang="en-US" sz="1700" dirty="0"/>
           </a:p>
@@ -19195,7 +19195,7 @@
         </p:nvSpPr>
         <p:spPr>
           <a:xfrm>
-            <a:off x="558800" y="2704465"/>
+            <a:off x="558800" y="2391410"/>
             <a:ext cx="190500" cy="317500"/>
           </a:xfrm>
           <a:prstGeom prst="rect">
@@ -19237,8 +19237,8 @@
         </p:nvSpPr>
         <p:spPr>
           <a:xfrm>
-            <a:off x="927100" y="2704465"/>
-            <a:ext cx="9156700" cy="753110"/>
+            <a:off x="927100" y="2391410"/>
+            <a:ext cx="9156700" cy="1066165"/>
           </a:xfrm>
           <a:prstGeom prst="rect">
             <a:avLst/>
@@ -19265,7 +19265,7 @@
                 <a:ea typeface="Libre Franklin" pitchFamily="34" charset="-122"/>
                 <a:cs typeface="Libre Franklin" pitchFamily="34" charset="-120"/>
               </a:rPr>
-              <a:t>Point it at a provider yourself. </a:t>
+              <a:t>It opens on a screen nobody expects. </a:t>
             </a:r>
             <a:pPr algn="l" indent="0" marL="0">
               <a:lnSpc>
@@ -19282,7 +19282,7 @@
                 <a:ea typeface="Libre Franklin" pitchFamily="34" charset="-122"/>
                 <a:cs typeface="Libre Franklin" pitchFamily="34" charset="-120"/>
               </a:rPr>
-              <a:t>Cline icon in the sidebar, choose Google Gemini, paste the key, pick any current Flash model.</a:t>
+              <a:t>“How will you use Cline?”, with Absolutely Free already ticked. Do not take it — choose Bring my own API key, or your key is never used.</a:t>
             </a:r>
             <a:endParaRPr lang="en-US" sz="1700" dirty="0"/>
           </a:p>
@@ -19339,7 +19339,7 @@
         <p:spPr>
           <a:xfrm>
             <a:off x="927100" y="3584575"/>
-            <a:ext cx="9156700" cy="753110"/>
+            <a:ext cx="9156700" cy="1066165"/>
           </a:xfrm>
           <a:prstGeom prst="rect">
             <a:avLst/>
@@ -19366,7 +19366,7 @@
                 <a:ea typeface="Libre Franklin" pitchFamily="34" charset="-122"/>
                 <a:cs typeface="Libre Franklin" pitchFamily="34" charset="-120"/>
               </a:rPr>
-              <a:t>Add Mistral as a second provider. </a:t>
+              <a:t>Then provider, then model. </a:t>
             </a:r>
             <a:pPr algn="l" indent="0" marL="0">
               <a:lnSpc>
@@ -19383,7 +19383,7 @@
                 <a:ea typeface="Libre Franklin" pitchFamily="34" charset="-122"/>
                 <a:cs typeface="Libre Franklin" pitchFamily="34" charset="-120"/>
               </a:rPr>
-              <a:t>Model devstral-medium-latest. Two providers is a dropdown change instead of a dead stop.</a:t>
+              <a:t>Mistral or Gemini, paste the key. Model names carry a date — devstral-2512, not devstral-latest. Prefer a devstral if you see one.</a:t>
             </a:r>
             <a:endParaRPr lang="en-US" sz="1700" dirty="0"/>
           </a:p>
@@ -19397,7 +19397,7 @@
         </p:nvSpPr>
         <p:spPr>
           <a:xfrm>
-            <a:off x="558800" y="4464685"/>
+            <a:off x="558800" y="4777740"/>
             <a:ext cx="190500" cy="317500"/>
           </a:xfrm>
           <a:prstGeom prst="rect">
@@ -19439,7 +19439,7 @@
         </p:nvSpPr>
         <p:spPr>
           <a:xfrm>
-            <a:off x="927100" y="4464685"/>
+            <a:off x="927100" y="4777740"/>
             <a:ext cx="9156700" cy="753110"/>
           </a:xfrm>
           <a:prstGeom prst="rect">
@@ -19467,7 +19467,7 @@
                 <a:ea typeface="Libre Franklin" pitchFamily="34" charset="-122"/>
                 <a:cs typeface="Libre Franklin" pitchFamily="34" charset="-120"/>
               </a:rPr>
-              <a:t>Type “hello” into Cline before we begin. Passing setup tells you nothing about whether your agent can talk to anything.</a:t>
+              <a:t>Check the model name after any reload: Cline can reset itself, sometimes to a paid one. A price per million tokens beside it means change it back.</a:t>
             </a:r>
             <a:endParaRPr lang="en-US" sz="1700" dirty="0"/>
           </a:p>

--- a/slides/Session 1 - Meet Your Agent.pptx
+++ b/slides/Session 1 - Meet Your Agent.pptx
@@ -1242,7 +1242,7 @@
           <a:p>
             <a:r>
               <a:rPr lang="en-US" dirty="0"/>
-              <a:t>This is the bridge out of the warm-up and into the gates, and it is the strongest thing in the deck because it is not an argument, it is a measurement. Ask the room how many of them checked the spike height before this slide appeared. Then say the sentence the whole session rests on: the gates did not make the agent correct, they made it wrong out loud.</a:t>
+              <a:t>The bridge out of the warm-up and into the gates. Do NOT claim everyone got this - across four runs of Round 1 while building this lab, one read 0.5 for a 1.0 tone, one crashed before drawing a spectrum at all, and one was simply correct. Poll the room for those three outcomes by show of hands; you will get all three, and the spread is the point. Then land it: not one of you could tell which you had, and the ones who were right were right by luck. The gates did not make the agent correct - they made it wrong out loud. If a student says theirs worked, agree, and ask how they would have known if it had not.</a:t>
             </a:r>
             <a:endParaRPr lang="en-US" dirty="0"/>
           </a:p>
@@ -7726,7 +7726,7 @@
                 <a:ea typeface="IBM Plex Mono" pitchFamily="34" charset="-122"/>
                 <a:cs typeface="IBM Plex Mono" pitchFamily="34" charset="-120"/>
               </a:rPr>
-              <a:t>Fig. 4 — measured in the dry run, 1 September 2026</a:t>
+              <a:t>Fig. 4 — one measured run, 1 September 2026. Yours will differ.</a:t>
             </a:r>
             <a:endParaRPr lang="en-US" sz="1200" dirty="0"/>
           </a:p>

--- a/slides/Session 1 - Meet Your Agent.pptx
+++ b/slides/Session 1 - Meet Your Agent.pptx
@@ -42,9 +42,10 @@
     <p:sldId id="290" r:id="rId36"/>
     <p:sldId id="291" r:id="rId37"/>
     <p:sldId id="292" r:id="rId38"/>
+    <p:sldId id="293" r:id="rId39"/>
   </p:sldIdLst>
   <p:notesMasterIdLst>
-    <p:notesMasterId r:id="rId39"/>
+    <p:notesMasterId r:id="rId40"/>
   </p:notesMasterIdLst>
   <p:sldSz cx="12192000" cy="6858000"/>
   <p:notesSz cx="6858000" cy="12192000"/>
@@ -2914,7 +2915,7 @@
           <a:p>
             <a:r>
               <a:rPr lang="en-US" dirty="0"/>
-              <a:t>Last fifteen minutes, everyone, whether or not their app worked. Insist on the mutation exercise: two tests fail, the peak-location test stays green, and the chart still looks perfectly reasonable.</a:t>
+              <a:t>Ten minutes is tight and it depends on someone else's servers, so say the fallback BEFORE they start rather than after it goes wrong. Two things break most often: they forgot to push, so the cloud builds an empty repo; and they point it at the wrong main file. Neither is worth your time individually - put both on the board. Nothing in Lab 1 needs an API key, so the deploy is genuinely simple today. It stops being simple in Session 3, when the app starts calling a model and .env is not in the repository - that is what Streamlit's Secrets box is for, and LAB2 says so at the point it starts to matter.</a:t>
             </a:r>
             <a:endParaRPr lang="en-US" dirty="0"/>
           </a:p>
@@ -3002,7 +3003,7 @@
           <a:p>
             <a:r>
               <a:rPr lang="en-US" dirty="0"/>
-              <a:t>The closing idea of the session, and the bridge to Session 2. Say plainly that the documents, not the code, were the work today — the code was the cheap part, and it will only get cheaper. Anyone whose app did not run still has four documents they can show, and that is a real deliverable.</a:t>
+              <a:t>Last fifteen minutes, everyone, whether or not their app worked. Insist on the mutation exercise: two tests fail, the peak-location test stays green, and the chart still looks perfectly reasonable.</a:t>
             </a:r>
             <a:endParaRPr lang="en-US" dirty="0"/>
           </a:p>
@@ -3090,7 +3091,7 @@
           <a:p>
             <a:r>
               <a:rPr lang="en-US" dirty="0"/>
-              <a:t>Leave this up for a moment; this is the slide they photograph. Then homework, then the closing slide for questions.</a:t>
+              <a:t>The closing idea of the session, and the bridge to Session 2. Say plainly that the documents, not the code, were the work today — the code was the cheap part, and it will only get cheaper. Anyone whose app did not run still has four documents they can show, and that is a real deliverable.</a:t>
             </a:r>
             <a:endParaRPr lang="en-US" dirty="0"/>
           </a:p>
@@ -3178,7 +3179,7 @@
           <a:p>
             <a:r>
               <a:rPr lang="en-US" dirty="0"/>
-              <a:t>Leave up during questions. Stress the log: three things the agent got wrong. Anyone who writes 'it all worked fine' did not look hard enough, and it is thirty per cent of the individual mark.</a:t>
+              <a:t>Leave this up for a moment; this is the slide they photograph. Then homework, then the closing slide for questions.</a:t>
             </a:r>
             <a:endParaRPr lang="en-US" dirty="0"/>
           </a:p>
@@ -3202,6 +3203,94 @@
             <a:fld id="{F7021451-1387-4CA6-816F-3879F97B5CBC}" type="slidenum">
               <a:rPr lang="en-US"/>
               <a:t>37</a:t>
+            </a:fld>
+            <a:endParaRPr lang="en-US"/>
+          </a:p>
+        </p:txBody>
+      </p:sp>
+    </p:spTree>
+    <p:extLst>
+      <p:ext uri="{BB962C8B-B14F-4D97-AF65-F5344CB8AC3E}">
+        <p14:creationId xmlns:p14="http://schemas.microsoft.com/office/powerpoint/2010/main" val="1024086991"/>
+      </p:ext>
+    </p:extLst>
+  </p:cSld>
+  <p:clrMapOvr>
+    <a:masterClrMapping/>
+  </p:clrMapOvr>
+</p:notes>
+</file>
+
+<file path=ppt/notesSlides/notesSlide38.xml><?xml version="1.0" encoding="utf-8"?>
+<p:notes xmlns:a="http://schemas.openxmlformats.org/drawingml/2006/main" xmlns:r="http://schemas.openxmlformats.org/officeDocument/2006/relationships" xmlns:p="http://schemas.openxmlformats.org/presentationml/2006/main">
+  <p:cSld>
+    <p:spTree>
+      <p:nvGrpSpPr>
+        <p:cNvPr id="1" name=""/>
+        <p:cNvGrpSpPr/>
+        <p:nvPr/>
+      </p:nvGrpSpPr>
+      <p:grpSpPr>
+        <a:xfrm>
+          <a:off x="0" y="0"/>
+          <a:ext cx="0" cy="0"/>
+          <a:chOff x="0" y="0"/>
+          <a:chExt cx="0" cy="0"/>
+        </a:xfrm>
+      </p:grpSpPr>
+      <p:sp>
+        <p:nvSpPr>
+          <p:cNvPr id="2" name="Slide Image Placeholder 1"/>
+          <p:cNvSpPr>
+            <a:spLocks noGrp="1" noRot="1" noChangeAspect="1"/>
+          </p:cNvSpPr>
+          <p:nvPr>
+            <p:ph type="sldImg"/>
+          </p:nvPr>
+        </p:nvSpPr>
+        <p:spPr/>
+      </p:sp>
+      <p:sp>
+        <p:nvSpPr>
+          <p:cNvPr id="3" name="Notes Placeholder 2"/>
+          <p:cNvSpPr>
+            <a:spLocks noGrp="1"/>
+          </p:cNvSpPr>
+          <p:nvPr>
+            <p:ph type="body" idx="1"/>
+          </p:nvPr>
+        </p:nvSpPr>
+        <p:spPr/>
+        <p:txBody>
+          <a:bodyPr/>
+          <a:lstStyle/>
+          <a:p>
+            <a:r>
+              <a:rPr lang="en-US" dirty="0"/>
+              <a:t>Leave up during questions. Stress the log: three things the agent got wrong. Anyone who writes 'it all worked fine' did not look hard enough, and it is thirty per cent of the individual mark.</a:t>
+            </a:r>
+            <a:endParaRPr lang="en-US" dirty="0"/>
+          </a:p>
+        </p:txBody>
+      </p:sp>
+      <p:sp>
+        <p:nvSpPr>
+          <p:cNvPr id="4" name="Slide Number Placeholder 3"/>
+          <p:cNvSpPr>
+            <a:spLocks noGrp="1"/>
+          </p:cNvSpPr>
+          <p:nvPr>
+            <p:ph type="sldNum" sz="quarter" idx="10"/>
+          </p:nvPr>
+        </p:nvSpPr>
+        <p:spPr/>
+        <p:txBody>
+          <a:bodyPr/>
+          <a:lstStyle/>
+          <a:p>
+            <a:fld id="{F7021451-1387-4CA6-816F-3879F97B5CBC}" type="slidenum">
+              <a:rPr lang="en-US"/>
+              <a:t>38</a:t>
             </a:fld>
             <a:endParaRPr lang="en-US"/>
           </a:p>
@@ -16902,7 +16991,7 @@
                 <a:ea typeface="IBM Plex Mono" pitchFamily="34" charset="-122"/>
                 <a:cs typeface="IBM Plex Mono" pitchFamily="34" charset="-120"/>
               </a:rPr>
-              <a:t>SECTION 06</a:t>
+              <a:t>WORKSHOP 05</a:t>
             </a:r>
             <a:endParaRPr lang="en-US" sz="1200" dirty="0"/>
           </a:p>
@@ -16944,7 +17033,7 @@
                 <a:ea typeface="Libre Franklin" pitchFamily="34" charset="-122"/>
                 <a:cs typeface="Libre Franklin" pitchFamily="34" charset="-120"/>
               </a:rPr>
-              <a:t>Read the reference before you leave</a:t>
+              <a:t>Ship it — ten minutes</a:t>
             </a:r>
             <a:endParaRPr lang="en-US" sz="2800" dirty="0"/>
           </a:p>
@@ -17056,92 +17145,391 @@
       </p:sp>
       <p:sp>
         <p:nvSpPr>
-          <p:cNvPr id="7" name="Text 5"/>
+          <p:cNvPr id="7" name="Shape 5"/>
           <p:cNvSpPr/>
           <p:nvPr/>
         </p:nvSpPr>
         <p:spPr>
           <a:xfrm>
             <a:off x="558800" y="1511300"/>
-            <a:ext cx="190500" cy="317500"/>
-          </a:xfrm>
-          <a:prstGeom prst="rect">
-            <a:avLst/>
-          </a:prstGeom>
-          <a:noFill/>
-          <a:ln/>
-        </p:spPr>
-        <p:txBody>
-          <a:bodyPr wrap="square" lIns="0" tIns="0" rIns="0" bIns="0" rtlCol="0" anchor="t"/>
-          <a:lstStyle/>
-          <a:p>
-            <a:pPr algn="l" indent="0" marL="0">
-              <a:lnSpc>
-                <a:spcPct val="140000"/>
-              </a:lnSpc>
-              <a:buNone/>
-            </a:pPr>
-            <a:r>
-              <a:rPr lang="en-US" sz="1700" dirty="0">
-                <a:solidFill>
-                  <a:srgbClr val="A87A2E"/>
+            <a:ext cx="6517030" cy="4572000"/>
+          </a:xfrm>
+          <a:prstGeom prst="rect">
+            <a:avLst/>
+          </a:prstGeom>
+          <a:solidFill>
+            <a:srgbClr val="F5F2EC"/>
+          </a:solidFill>
+          <a:ln w="6350">
+            <a:solidFill>
+              <a:srgbClr val="E1DED7"/>
+            </a:solidFill>
+            <a:prstDash val="solid"/>
+          </a:ln>
+        </p:spPr>
+      </p:sp>
+      <p:sp>
+        <p:nvSpPr>
+          <p:cNvPr id="8" name="Text 6"/>
+          <p:cNvSpPr/>
+          <p:nvPr/>
+        </p:nvSpPr>
+        <p:spPr>
+          <a:xfrm>
+            <a:off x="800100" y="1727200"/>
+            <a:ext cx="6034430" cy="4140200"/>
+          </a:xfrm>
+          <a:prstGeom prst="rect">
+            <a:avLst/>
+          </a:prstGeom>
+          <a:noFill/>
+          <a:ln/>
+        </p:spPr>
+        <p:txBody>
+          <a:bodyPr wrap="square" lIns="0" tIns="0" rIns="0" bIns="0" rtlCol="0" anchor="t"/>
+          <a:lstStyle/>
+          <a:p>
+            <a:pPr indent="0" marL="0">
+              <a:lnSpc>
+                <a:spcPct val="160000"/>
+              </a:lnSpc>
+              <a:buNone/>
+            </a:pPr>
+            <a:r>
+              <a:rPr lang="en-US" sz="1400" dirty="0">
+                <a:solidFill>
+                  <a:srgbClr val="332F2A"/>
+                </a:solidFill>
+                <a:latin typeface="IBM Plex Mono" pitchFamily="34" charset="0"/>
+                <a:ea typeface="IBM Plex Mono" pitchFamily="34" charset="-122"/>
+                <a:cs typeface="IBM Plex Mono" pitchFamily="34" charset="-120"/>
+              </a:rPr>
+              <a:t>$ git push</a:t>
+            </a:r>
+            <a:endParaRPr lang="en-US" sz="1400" dirty="0"/>
+          </a:p>
+          <a:p>
+            <a:pPr indent="0" marL="0">
+              <a:lnSpc>
+                <a:spcPct val="160000"/>
+              </a:lnSpc>
+              <a:buNone/>
+            </a:pPr>
+            <a:endParaRPr lang="en-US" sz="1400" dirty="0"/>
+          </a:p>
+          <a:p>
+            <a:pPr indent="0" marL="0">
+              <a:lnSpc>
+                <a:spcPct val="160000"/>
+              </a:lnSpc>
+              <a:buNone/>
+            </a:pPr>
+            <a:r>
+              <a:rPr lang="en-US" sz="1400" dirty="0">
+                <a:solidFill>
+                  <a:srgbClr val="332F2A"/>
+                </a:solidFill>
+                <a:latin typeface="IBM Plex Mono" pitchFamily="34" charset="0"/>
+                <a:ea typeface="IBM Plex Mono" pitchFamily="34" charset="-122"/>
+                <a:cs typeface="IBM Plex Mono" pitchFamily="34" charset="-120"/>
+              </a:rPr>
+              <a:t>share.streamlit.io</a:t>
+            </a:r>
+            <a:endParaRPr lang="en-US" sz="1400" dirty="0"/>
+          </a:p>
+          <a:p>
+            <a:pPr indent="0" marL="0">
+              <a:lnSpc>
+                <a:spcPct val="160000"/>
+              </a:lnSpc>
+              <a:buNone/>
+            </a:pPr>
+            <a:r>
+              <a:rPr lang="en-US" sz="1400" dirty="0">
+                <a:solidFill>
+                  <a:srgbClr val="332F2A"/>
+                </a:solidFill>
+                <a:latin typeface="IBM Plex Mono" pitchFamily="34" charset="0"/>
+                <a:ea typeface="IBM Plex Mono" pitchFamily="34" charset="-122"/>
+                <a:cs typeface="IBM Plex Mono" pitchFamily="34" charset="-120"/>
+              </a:rPr>
+              <a:t>  Continue to sign-in</a:t>
+            </a:r>
+            <a:endParaRPr lang="en-US" sz="1400" dirty="0"/>
+          </a:p>
+          <a:p>
+            <a:pPr indent="0" marL="0">
+              <a:lnSpc>
+                <a:spcPct val="160000"/>
+              </a:lnSpc>
+              <a:buNone/>
+            </a:pPr>
+            <a:r>
+              <a:rPr lang="en-US" sz="1400" dirty="0">
+                <a:solidFill>
+                  <a:srgbClr val="332F2A"/>
+                </a:solidFill>
+                <a:latin typeface="IBM Plex Mono" pitchFamily="34" charset="0"/>
+                <a:ea typeface="IBM Plex Mono" pitchFamily="34" charset="-122"/>
+                <a:cs typeface="IBM Plex Mono" pitchFamily="34" charset="-120"/>
+              </a:rPr>
+              <a:t>  authorise GitHub  (first time)</a:t>
+            </a:r>
+            <a:endParaRPr lang="en-US" sz="1400" dirty="0"/>
+          </a:p>
+          <a:p>
+            <a:pPr indent="0" marL="0">
+              <a:lnSpc>
+                <a:spcPct val="160000"/>
+              </a:lnSpc>
+              <a:buNone/>
+            </a:pPr>
+            <a:r>
+              <a:rPr lang="en-US" sz="1400" dirty="0">
+                <a:solidFill>
+                  <a:srgbClr val="332F2A"/>
+                </a:solidFill>
+                <a:latin typeface="IBM Plex Mono" pitchFamily="34" charset="0"/>
+                <a:ea typeface="IBM Plex Mono" pitchFamily="34" charset="-122"/>
+                <a:cs typeface="IBM Plex Mono" pitchFamily="34" charset="-120"/>
+              </a:rPr>
+              <a:t>  New app -&gt; from existing repo</a:t>
+            </a:r>
+            <a:endParaRPr lang="en-US" sz="1400" dirty="0"/>
+          </a:p>
+          <a:p>
+            <a:pPr indent="0" marL="0">
+              <a:lnSpc>
+                <a:spcPct val="160000"/>
+              </a:lnSpc>
+              <a:buNone/>
+            </a:pPr>
+            <a:endParaRPr lang="en-US" sz="1400" dirty="0"/>
+          </a:p>
+          <a:p>
+            <a:pPr indent="0" marL="0">
+              <a:lnSpc>
+                <a:spcPct val="160000"/>
+              </a:lnSpc>
+              <a:buNone/>
+            </a:pPr>
+            <a:r>
+              <a:rPr lang="en-US" sz="1400" dirty="0">
+                <a:solidFill>
+                  <a:srgbClr val="332F2A"/>
+                </a:solidFill>
+                <a:latin typeface="IBM Plex Mono" pitchFamily="34" charset="0"/>
+                <a:ea typeface="IBM Plex Mono" pitchFamily="34" charset="-122"/>
+                <a:cs typeface="IBM Plex Mono" pitchFamily="34" charset="-120"/>
+              </a:rPr>
+              <a:t>    repo    your-repo</a:t>
+            </a:r>
+            <a:endParaRPr lang="en-US" sz="1400" dirty="0"/>
+          </a:p>
+          <a:p>
+            <a:pPr indent="0" marL="0">
+              <a:lnSpc>
+                <a:spcPct val="160000"/>
+              </a:lnSpc>
+              <a:buNone/>
+            </a:pPr>
+            <a:r>
+              <a:rPr lang="en-US" sz="1400" dirty="0">
+                <a:solidFill>
+                  <a:srgbClr val="332F2A"/>
+                </a:solidFill>
+                <a:latin typeface="IBM Plex Mono" pitchFamily="34" charset="0"/>
+                <a:ea typeface="IBM Plex Mono" pitchFamily="34" charset="-122"/>
+                <a:cs typeface="IBM Plex Mono" pitchFamily="34" charset="-120"/>
+              </a:rPr>
+              <a:t>    branch  main</a:t>
+            </a:r>
+            <a:endParaRPr lang="en-US" sz="1400" dirty="0"/>
+          </a:p>
+          <a:p>
+            <a:pPr indent="0" marL="0">
+              <a:lnSpc>
+                <a:spcPct val="160000"/>
+              </a:lnSpc>
+              <a:buNone/>
+            </a:pPr>
+            <a:r>
+              <a:rPr lang="en-US" sz="1400" dirty="0">
+                <a:solidFill>
+                  <a:srgbClr val="332F2A"/>
+                </a:solidFill>
+                <a:latin typeface="IBM Plex Mono" pitchFamily="34" charset="0"/>
+                <a:ea typeface="IBM Plex Mono" pitchFamily="34" charset="-122"/>
+                <a:cs typeface="IBM Plex Mono" pitchFamily="34" charset="-120"/>
+              </a:rPr>
+              <a:t>    file    app.py</a:t>
+            </a:r>
+            <a:endParaRPr lang="en-US" sz="1400" dirty="0"/>
+          </a:p>
+          <a:p>
+            <a:pPr indent="0" marL="0">
+              <a:lnSpc>
+                <a:spcPct val="160000"/>
+              </a:lnSpc>
+              <a:buNone/>
+            </a:pPr>
+            <a:endParaRPr lang="en-US" sz="1400" dirty="0"/>
+          </a:p>
+          <a:p>
+            <a:pPr indent="0" marL="0">
+              <a:lnSpc>
+                <a:spcPct val="160000"/>
+              </a:lnSpc>
+              <a:buNone/>
+            </a:pPr>
+            <a:r>
+              <a:rPr lang="en-US" sz="1400" dirty="0">
+                <a:solidFill>
+                  <a:srgbClr val="332F2A"/>
+                </a:solidFill>
+                <a:latin typeface="IBM Plex Mono" pitchFamily="34" charset="0"/>
+                <a:ea typeface="IBM Plex Mono" pitchFamily="34" charset="-122"/>
+                <a:cs typeface="IBM Plex Mono" pitchFamily="34" charset="-120"/>
+              </a:rPr>
+              <a:t>  Deploy</a:t>
+            </a:r>
+            <a:endParaRPr lang="en-US" sz="1400" dirty="0"/>
+          </a:p>
+        </p:txBody>
+      </p:sp>
+      <p:sp>
+        <p:nvSpPr>
+          <p:cNvPr id="9" name="Text 7"/>
+          <p:cNvSpPr/>
+          <p:nvPr/>
+        </p:nvSpPr>
+        <p:spPr>
+          <a:xfrm>
+            <a:off x="7431430" y="1511300"/>
+            <a:ext cx="4201770" cy="1600200"/>
+          </a:xfrm>
+          <a:prstGeom prst="rect">
+            <a:avLst/>
+          </a:prstGeom>
+          <a:noFill/>
+          <a:ln/>
+        </p:spPr>
+        <p:txBody>
+          <a:bodyPr wrap="square" lIns="0" tIns="0" rIns="0" bIns="0" rtlCol="0" anchor="t"/>
+          <a:lstStyle/>
+          <a:p>
+            <a:pPr algn="l" indent="0" marL="0">
+              <a:lnSpc>
+                <a:spcPct val="145000"/>
+              </a:lnSpc>
+              <a:buNone/>
+            </a:pPr>
+            <a:r>
+              <a:rPr lang="en-US" sz="1600" dirty="0">
+                <a:solidFill>
+                  <a:srgbClr val="332F2A"/>
                 </a:solidFill>
                 <a:latin typeface="Libre Franklin" pitchFamily="34" charset="0"/>
                 <a:ea typeface="Libre Franklin" pitchFamily="34" charset="-122"/>
                 <a:cs typeface="Libre Franklin" pitchFamily="34" charset="-120"/>
               </a:rPr>
-              <a:t>—</a:t>
-            </a:r>
-            <a:endParaRPr lang="en-US" sz="1700" dirty="0"/>
-          </a:p>
-        </p:txBody>
-      </p:sp>
-      <p:sp>
-        <p:nvSpPr>
-          <p:cNvPr id="8" name="Text 6"/>
-          <p:cNvSpPr/>
-          <p:nvPr/>
-        </p:nvSpPr>
-        <p:spPr>
-          <a:xfrm>
-            <a:off x="927100" y="1511300"/>
-            <a:ext cx="9156700" cy="753110"/>
-          </a:xfrm>
-          <a:prstGeom prst="rect">
-            <a:avLst/>
-          </a:prstGeom>
-          <a:noFill/>
-          <a:ln/>
-        </p:spPr>
-        <p:txBody>
-          <a:bodyPr wrap="square" lIns="0" tIns="0" rIns="0" bIns="0" rtlCol="0" anchor="t"/>
-          <a:lstStyle/>
-          <a:p>
-            <a:pPr algn="l" indent="0" marL="0">
-              <a:lnSpc>
-                <a:spcPct val="145000"/>
-              </a:lnSpc>
-              <a:buNone/>
-            </a:pPr>
-            <a:r>
-              <a:rPr lang="en-US" sz="1700" b="1" dirty="0">
-                <a:solidFill>
-                  <a:srgbClr val="332F2A"/>
+              <a:t>Push first. Your Codespace is not the internet — the cloud builds from GitHub, so anything you have not pushed does not exist as far as it is concerned.</a:t>
+            </a:r>
+            <a:endParaRPr lang="en-US" sz="1600" dirty="0"/>
+          </a:p>
+        </p:txBody>
+      </p:sp>
+      <p:sp>
+        <p:nvSpPr>
+          <p:cNvPr id="10" name="Text 8"/>
+          <p:cNvSpPr/>
+          <p:nvPr/>
+        </p:nvSpPr>
+        <p:spPr>
+          <a:xfrm>
+            <a:off x="7431430" y="3238500"/>
+            <a:ext cx="4201770" cy="1600200"/>
+          </a:xfrm>
+          <a:prstGeom prst="rect">
+            <a:avLst/>
+          </a:prstGeom>
+          <a:noFill/>
+          <a:ln/>
+        </p:spPr>
+        <p:txBody>
+          <a:bodyPr wrap="square" lIns="0" tIns="0" rIns="0" bIns="0" rtlCol="0" anchor="t"/>
+          <a:lstStyle/>
+          <a:p>
+            <a:pPr algn="l" indent="0" marL="0">
+              <a:lnSpc>
+                <a:spcPct val="145000"/>
+              </a:lnSpc>
+              <a:buNone/>
+            </a:pPr>
+            <a:r>
+              <a:rPr lang="en-US" sz="1600" dirty="0">
+                <a:solidFill>
+                  <a:srgbClr val="77726A"/>
                 </a:solidFill>
                 <a:latin typeface="Libre Franklin" pitchFamily="34" charset="0"/>
                 <a:ea typeface="Libre Franklin" pitchFamily="34" charset="-122"/>
                 <a:cs typeface="Libre Franklin" pitchFamily="34" charset="-120"/>
               </a:rPr>
-              <a:t>Everyone does this, </a:t>
-            </a:r>
-            <a:pPr algn="l" indent="0" marL="0">
-              <a:lnSpc>
-                <a:spcPct val="145000"/>
-              </a:lnSpc>
-              <a:buNone/>
-            </a:pPr>
-            <a:r>
-              <a:rPr lang="en-US" sz="1700" dirty="0">
+              <a:t>The first deploy makes you a Streamlit account and asks for access to your repositories. Builds take two to five minutes, and sixty of us are building at once.</a:t>
+            </a:r>
+            <a:endParaRPr lang="en-US" sz="1600" dirty="0"/>
+          </a:p>
+        </p:txBody>
+      </p:sp>
+      <p:sp>
+        <p:nvSpPr>
+          <p:cNvPr id="11" name="Shape 9"/>
+          <p:cNvSpPr/>
+          <p:nvPr/>
+        </p:nvSpPr>
+        <p:spPr>
+          <a:xfrm>
+            <a:off x="7431430" y="5384800"/>
+            <a:ext cx="12700" cy="698500"/>
+          </a:xfrm>
+          <a:prstGeom prst="rect">
+            <a:avLst/>
+          </a:prstGeom>
+          <a:solidFill>
+            <a:srgbClr val="A87A2E"/>
+          </a:solidFill>
+          <a:ln/>
+        </p:spPr>
+      </p:sp>
+      <p:sp>
+        <p:nvSpPr>
+          <p:cNvPr id="12" name="Text 10"/>
+          <p:cNvSpPr/>
+          <p:nvPr/>
+        </p:nvSpPr>
+        <p:spPr>
+          <a:xfrm>
+            <a:off x="7596530" y="5416550"/>
+            <a:ext cx="4036670" cy="698500"/>
+          </a:xfrm>
+          <a:prstGeom prst="rect">
+            <a:avLst/>
+          </a:prstGeom>
+          <a:noFill/>
+          <a:ln/>
+        </p:spPr>
+        <p:txBody>
+          <a:bodyPr wrap="square" lIns="0" tIns="0" rIns="0" bIns="0" rtlCol="0" anchor="t"/>
+          <a:lstStyle/>
+          <a:p>
+            <a:pPr algn="l" indent="0" marL="0">
+              <a:lnSpc>
+                <a:spcPct val="140000"/>
+              </a:lnSpc>
+              <a:buNone/>
+            </a:pPr>
+            <a:r>
+              <a:rPr lang="en-US" sz="1500" dirty="0">
                 <a:solidFill>
                   <a:srgbClr val="332F2A"/>
                 </a:solidFill>
@@ -17149,295 +17537,9 @@
                 <a:ea typeface="Libre Franklin" pitchFamily="34" charset="-122"/>
                 <a:cs typeface="Libre Franklin" pitchFamily="34" charset="-120"/>
               </a:rPr>
-              <a:t>whether your own version works or not. The prompts are in labs/EXPLAIN.md.</a:t>
-            </a:r>
-            <a:endParaRPr lang="en-US" sz="1700" dirty="0"/>
-          </a:p>
-        </p:txBody>
-      </p:sp>
-      <p:sp>
-        <p:nvSpPr>
-          <p:cNvPr id="9" name="Text 7"/>
-          <p:cNvSpPr/>
-          <p:nvPr/>
-        </p:nvSpPr>
-        <p:spPr>
-          <a:xfrm>
-            <a:off x="558800" y="2391410"/>
-            <a:ext cx="190500" cy="317500"/>
-          </a:xfrm>
-          <a:prstGeom prst="rect">
-            <a:avLst/>
-          </a:prstGeom>
-          <a:noFill/>
-          <a:ln/>
-        </p:spPr>
-        <p:txBody>
-          <a:bodyPr wrap="square" lIns="0" tIns="0" rIns="0" bIns="0" rtlCol="0" anchor="t"/>
-          <a:lstStyle/>
-          <a:p>
-            <a:pPr algn="l" indent="0" marL="0">
-              <a:lnSpc>
-                <a:spcPct val="140000"/>
-              </a:lnSpc>
-              <a:buNone/>
-            </a:pPr>
-            <a:r>
-              <a:rPr lang="en-US" sz="1700" dirty="0">
-                <a:solidFill>
-                  <a:srgbClr val="A87A2E"/>
-                </a:solidFill>
-                <a:latin typeface="Libre Franklin" pitchFamily="34" charset="0"/>
-                <a:ea typeface="Libre Franklin" pitchFamily="34" charset="-122"/>
-                <a:cs typeface="Libre Franklin" pitchFamily="34" charset="-120"/>
-              </a:rPr>
-              <a:t>—</a:t>
-            </a:r>
-            <a:endParaRPr lang="en-US" sz="1700" dirty="0"/>
-          </a:p>
-        </p:txBody>
-      </p:sp>
-      <p:sp>
-        <p:nvSpPr>
-          <p:cNvPr id="10" name="Text 8"/>
-          <p:cNvSpPr/>
-          <p:nvPr/>
-        </p:nvSpPr>
-        <p:spPr>
-          <a:xfrm>
-            <a:off x="927100" y="2391410"/>
-            <a:ext cx="9156700" cy="753110"/>
-          </a:xfrm>
-          <a:prstGeom prst="rect">
-            <a:avLst/>
-          </a:prstGeom>
-          <a:noFill/>
-          <a:ln/>
-        </p:spPr>
-        <p:txBody>
-          <a:bodyPr wrap="square" lIns="0" tIns="0" rIns="0" bIns="0" rtlCol="0" anchor="t"/>
-          <a:lstStyle/>
-          <a:p>
-            <a:pPr algn="l" indent="0" marL="0">
-              <a:lnSpc>
-                <a:spcPct val="145000"/>
-              </a:lnSpc>
-              <a:buNone/>
-            </a:pPr>
-            <a:r>
-              <a:rPr lang="en-US" sz="1700" b="1" dirty="0">
-                <a:solidFill>
-                  <a:srgbClr val="332F2A"/>
-                </a:solidFill>
-                <a:latin typeface="Libre Franklin" pitchFamily="34" charset="0"/>
-                <a:ea typeface="Libre Franklin" pitchFamily="34" charset="-122"/>
-                <a:cs typeface="Libre Franklin" pitchFamily="34" charset="-120"/>
-              </a:rPr>
-              <a:t>Ask it to break the code. </a:t>
-            </a:r>
-            <a:pPr algn="l" indent="0" marL="0">
-              <a:lnSpc>
-                <a:spcPct val="145000"/>
-              </a:lnSpc>
-              <a:buNone/>
-            </a:pPr>
-            <a:r>
-              <a:rPr lang="en-US" sz="1700" dirty="0">
-                <a:solidFill>
-                  <a:srgbClr val="332F2A"/>
-                </a:solidFill>
-                <a:latin typeface="Libre Franklin" pitchFamily="34" charset="0"/>
-                <a:ea typeface="Libre Franklin" pitchFamily="34" charset="-122"/>
-                <a:cs typeface="Libre Franklin" pitchFamily="34" charset="-120"/>
-              </a:rPr>
-              <a:t>Change the 2/n to 1/n, run the tests, watch which two fail, then change it back.</a:t>
-            </a:r>
-            <a:endParaRPr lang="en-US" sz="1700" dirty="0"/>
-          </a:p>
-        </p:txBody>
-      </p:sp>
-      <p:sp>
-        <p:nvSpPr>
-          <p:cNvPr id="11" name="Text 9"/>
-          <p:cNvSpPr/>
-          <p:nvPr/>
-        </p:nvSpPr>
-        <p:spPr>
-          <a:xfrm>
-            <a:off x="558800" y="3271520"/>
-            <a:ext cx="190500" cy="317500"/>
-          </a:xfrm>
-          <a:prstGeom prst="rect">
-            <a:avLst/>
-          </a:prstGeom>
-          <a:noFill/>
-          <a:ln/>
-        </p:spPr>
-        <p:txBody>
-          <a:bodyPr wrap="square" lIns="0" tIns="0" rIns="0" bIns="0" rtlCol="0" anchor="t"/>
-          <a:lstStyle/>
-          <a:p>
-            <a:pPr algn="l" indent="0" marL="0">
-              <a:lnSpc>
-                <a:spcPct val="140000"/>
-              </a:lnSpc>
-              <a:buNone/>
-            </a:pPr>
-            <a:r>
-              <a:rPr lang="en-US" sz="1700" dirty="0">
-                <a:solidFill>
-                  <a:srgbClr val="A87A2E"/>
-                </a:solidFill>
-                <a:latin typeface="Libre Franklin" pitchFamily="34" charset="0"/>
-                <a:ea typeface="Libre Franklin" pitchFamily="34" charset="-122"/>
-                <a:cs typeface="Libre Franklin" pitchFamily="34" charset="-120"/>
-              </a:rPr>
-              <a:t>—</a:t>
-            </a:r>
-            <a:endParaRPr lang="en-US" sz="1700" dirty="0"/>
-          </a:p>
-        </p:txBody>
-      </p:sp>
-      <p:sp>
-        <p:nvSpPr>
-          <p:cNvPr id="12" name="Text 10"/>
-          <p:cNvSpPr/>
-          <p:nvPr/>
-        </p:nvSpPr>
-        <p:spPr>
-          <a:xfrm>
-            <a:off x="927100" y="3271520"/>
-            <a:ext cx="9156700" cy="753110"/>
-          </a:xfrm>
-          <a:prstGeom prst="rect">
-            <a:avLst/>
-          </a:prstGeom>
-          <a:noFill/>
-          <a:ln/>
-        </p:spPr>
-        <p:txBody>
-          <a:bodyPr wrap="square" lIns="0" tIns="0" rIns="0" bIns="0" rtlCol="0" anchor="t"/>
-          <a:lstStyle/>
-          <a:p>
-            <a:pPr algn="l" indent="0" marL="0">
-              <a:lnSpc>
-                <a:spcPct val="145000"/>
-              </a:lnSpc>
-              <a:buNone/>
-            </a:pPr>
-            <a:r>
-              <a:rPr lang="en-US" sz="1700" b="1" dirty="0">
-                <a:solidFill>
-                  <a:srgbClr val="332F2A"/>
-                </a:solidFill>
-                <a:latin typeface="Libre Franklin" pitchFamily="34" charset="0"/>
-                <a:ea typeface="Libre Franklin" pitchFamily="34" charset="-122"/>
-                <a:cs typeface="Libre Franklin" pitchFamily="34" charset="-120"/>
-              </a:rPr>
-              <a:t>Nothing here edits your work, </a:t>
-            </a:r>
-            <a:pPr algn="l" indent="0" marL="0">
-              <a:lnSpc>
-                <a:spcPct val="145000"/>
-              </a:lnSpc>
-              <a:buNone/>
-            </a:pPr>
-            <a:r>
-              <a:rPr lang="en-US" sz="1700" dirty="0">
-                <a:solidFill>
-                  <a:srgbClr val="332F2A"/>
-                </a:solidFill>
-                <a:latin typeface="Libre Franklin" pitchFamily="34" charset="0"/>
-                <a:ea typeface="Libre Franklin" pitchFamily="34" charset="-122"/>
-                <a:cs typeface="Libre Franklin" pitchFamily="34" charset="-120"/>
-              </a:rPr>
-              <a:t>so none of it can break your project. Explaining is the safest thing an agent does.</a:t>
-            </a:r>
-            <a:endParaRPr lang="en-US" sz="1700" dirty="0"/>
-          </a:p>
-        </p:txBody>
-      </p:sp>
-      <p:sp>
-        <p:nvSpPr>
-          <p:cNvPr id="13" name="Text 11"/>
-          <p:cNvSpPr/>
-          <p:nvPr/>
-        </p:nvSpPr>
-        <p:spPr>
-          <a:xfrm>
-            <a:off x="558800" y="4151630"/>
-            <a:ext cx="190500" cy="317500"/>
-          </a:xfrm>
-          <a:prstGeom prst="rect">
-            <a:avLst/>
-          </a:prstGeom>
-          <a:noFill/>
-          <a:ln/>
-        </p:spPr>
-        <p:txBody>
-          <a:bodyPr wrap="square" lIns="0" tIns="0" rIns="0" bIns="0" rtlCol="0" anchor="t"/>
-          <a:lstStyle/>
-          <a:p>
-            <a:pPr algn="l" indent="0" marL="0">
-              <a:lnSpc>
-                <a:spcPct val="140000"/>
-              </a:lnSpc>
-              <a:buNone/>
-            </a:pPr>
-            <a:r>
-              <a:rPr lang="en-US" sz="1700" dirty="0">
-                <a:solidFill>
-                  <a:srgbClr val="A87A2E"/>
-                </a:solidFill>
-                <a:latin typeface="Libre Franklin" pitchFamily="34" charset="0"/>
-                <a:ea typeface="Libre Franklin" pitchFamily="34" charset="-122"/>
-                <a:cs typeface="Libre Franklin" pitchFamily="34" charset="-120"/>
-              </a:rPr>
-              <a:t>—</a:t>
-            </a:r>
-            <a:endParaRPr lang="en-US" sz="1700" dirty="0"/>
-          </a:p>
-        </p:txBody>
-      </p:sp>
-      <p:sp>
-        <p:nvSpPr>
-          <p:cNvPr id="14" name="Text 12"/>
-          <p:cNvSpPr/>
-          <p:nvPr/>
-        </p:nvSpPr>
-        <p:spPr>
-          <a:xfrm>
-            <a:off x="927100" y="4151630"/>
-            <a:ext cx="9156700" cy="753110"/>
-          </a:xfrm>
-          <a:prstGeom prst="rect">
-            <a:avLst/>
-          </a:prstGeom>
-          <a:noFill/>
-          <a:ln/>
-        </p:spPr>
-        <p:txBody>
-          <a:bodyPr wrap="square" lIns="0" tIns="0" rIns="0" bIns="0" rtlCol="0" anchor="t"/>
-          <a:lstStyle/>
-          <a:p>
-            <a:pPr algn="l" indent="0" marL="0">
-              <a:lnSpc>
-                <a:spcPct val="145000"/>
-              </a:lnSpc>
-              <a:buNone/>
-            </a:pPr>
-            <a:r>
-              <a:rPr lang="en-US" sz="1700" dirty="0">
-                <a:solidFill>
-                  <a:srgbClr val="332F2A"/>
-                </a:solidFill>
-                <a:latin typeface="Libre Franklin" pitchFamily="34" charset="0"/>
-                <a:ea typeface="Libre Franklin" pitchFamily="34" charset="-122"/>
-                <a:cs typeface="Libre Franklin" pitchFamily="34" charset="-120"/>
-              </a:rPr>
-              <a:t>Reading code you did not write, with an AI explaining it, is the most common way these tools are used at work.</a:t>
-            </a:r>
-            <a:endParaRPr lang="en-US" sz="1700" dirty="0"/>
+              <a:t>Not live by 2:45? Push, and deploy at home. The code and the four documents are the deliverable; the URL is a bonus.</a:t>
+            </a:r>
+            <a:endParaRPr lang="en-US" sz="1500" dirty="0"/>
           </a:p>
         </p:txBody>
       </p:sp>
@@ -17551,7 +17653,7 @@
                 <a:ea typeface="Libre Franklin" pitchFamily="34" charset="-122"/>
                 <a:cs typeface="Libre Franklin" pitchFamily="34" charset="-120"/>
               </a:rPr>
-              <a:t>The files a person writes at work</a:t>
+              <a:t>Read the reference before you leave</a:t>
             </a:r>
             <a:endParaRPr lang="en-US" sz="2800" dirty="0"/>
           </a:p>
@@ -17739,7 +17841,7 @@
                 <a:ea typeface="Libre Franklin" pitchFamily="34" charset="-122"/>
                 <a:cs typeface="Libre Franklin" pitchFamily="34" charset="-120"/>
               </a:rPr>
-              <a:t>Open the four you approved. </a:t>
+              <a:t>Everyone does this, </a:t>
             </a:r>
             <a:pPr algn="l" indent="0" marL="0">
               <a:lnSpc>
@@ -17756,7 +17858,7 @@
                 <a:ea typeface="Libre Franklin" pitchFamily="34" charset="-122"/>
                 <a:cs typeface="Libre Franklin" pitchFamily="34" charset="-120"/>
               </a:rPr>
-              <a:t>aidlc/intent.md, requirements.md, design.md and tasks.md — read them as one set, in order.</a:t>
+              <a:t>whether your own version works or not. The prompts are in labs/EXPLAIN.md.</a:t>
             </a:r>
             <a:endParaRPr lang="en-US" sz="1700" dirty="0"/>
           </a:p>
@@ -17840,7 +17942,7 @@
                 <a:ea typeface="Libre Franklin" pitchFamily="34" charset="-122"/>
                 <a:cs typeface="Libre Franklin" pitchFamily="34" charset="-120"/>
               </a:rPr>
-              <a:t>In a real team a person writes these. </a:t>
+              <a:t>Ask it to break the code. </a:t>
             </a:r>
             <a:pPr algn="l" indent="0" marL="0">
               <a:lnSpc>
@@ -17857,7 +17959,7 @@
                 <a:ea typeface="Libre Franklin" pitchFamily="34" charset="-122"/>
                 <a:cs typeface="Libre Franklin" pitchFamily="34" charset="-120"/>
               </a:rPr>
-              <a:t>A product owner or tech lead drafts the intent and spec. The agent drafting them is a start, not a replacement.</a:t>
+              <a:t>Change the 2/n to 1/n, run the tests, watch which two fail, then change it back.</a:t>
             </a:r>
             <a:endParaRPr lang="en-US" sz="1700" dirty="0"/>
           </a:p>
@@ -17941,7 +18043,7 @@
                 <a:ea typeface="Libre Franklin" pitchFamily="34" charset="-122"/>
                 <a:cs typeface="Libre Franklin" pitchFamily="34" charset="-120"/>
               </a:rPr>
-              <a:t>Which is why you approved each one. </a:t>
+              <a:t>Nothing here edits your work, </a:t>
             </a:r>
             <a:pPr algn="l" indent="0" marL="0">
               <a:lnSpc>
@@ -17958,7 +18060,7 @@
                 <a:ea typeface="Libre Franklin" pitchFamily="34" charset="-122"/>
                 <a:cs typeface="Libre Franklin" pitchFamily="34" charset="-120"/>
               </a:rPr>
-              <a:t>Everything built today came out of those four files. A wrong line there becomes a wrong app, quickly and cheaply.</a:t>
+              <a:t>so none of it can break your project. Explaining is the safest thing an agent does.</a:t>
             </a:r>
             <a:endParaRPr lang="en-US" sz="1700" dirty="0"/>
           </a:p>
@@ -18042,7 +18144,7 @@
                 <a:ea typeface="Libre Franklin" pitchFamily="34" charset="-122"/>
                 <a:cs typeface="Libre Franklin" pitchFamily="34" charset="-120"/>
               </a:rPr>
-              <a:t>labs/PROMPTS.md explains why each prompt is worded the way it is. Read it before Session 2 — you will be writing your own.</a:t>
+              <a:t>Reading code you did not write, with an AI explaining it, is the most common way these tools are used at work.</a:t>
             </a:r>
             <a:endParaRPr lang="en-US" sz="1700" dirty="0"/>
           </a:p>
@@ -18059,6 +18161,613 @@
 <file path=ppt/slides/slide36.xml><?xml version="1.0" encoding="utf-8"?>
 <p:sld xmlns:a="http://schemas.openxmlformats.org/drawingml/2006/main" xmlns:r="http://schemas.openxmlformats.org/officeDocument/2006/relationships" xmlns:p="http://schemas.openxmlformats.org/presentationml/2006/main">
   <p:cSld name="Slide 36">
+    <p:bg>
+      <p:bgPr>
+        <a:solidFill>
+          <a:srgbClr val="FCFBF8"/>
+        </a:solidFill>
+      </p:bgPr>
+    </p:bg>
+    <p:spTree>
+      <p:nvGrpSpPr>
+        <p:cNvPr id="1" name=""/>
+        <p:cNvGrpSpPr/>
+        <p:nvPr/>
+      </p:nvGrpSpPr>
+      <p:grpSpPr>
+        <a:xfrm>
+          <a:off x="0" y="0"/>
+          <a:ext cx="0" cy="0"/>
+          <a:chOff x="0" y="0"/>
+          <a:chExt cx="0" cy="0"/>
+        </a:xfrm>
+      </p:grpSpPr>
+      <p:sp>
+        <p:nvSpPr>
+          <p:cNvPr id="2" name="Text 0"/>
+          <p:cNvSpPr/>
+          <p:nvPr/>
+        </p:nvSpPr>
+        <p:spPr>
+          <a:xfrm>
+            <a:off x="558800" y="355600"/>
+            <a:ext cx="11074400" cy="215900"/>
+          </a:xfrm>
+          <a:prstGeom prst="rect">
+            <a:avLst/>
+          </a:prstGeom>
+          <a:noFill/>
+          <a:ln/>
+        </p:spPr>
+        <p:txBody>
+          <a:bodyPr wrap="square" lIns="0" tIns="0" rIns="0" bIns="0" rtlCol="0" anchor="t"/>
+          <a:lstStyle/>
+          <a:p>
+            <a:pPr algn="l" indent="0" marL="0">
+              <a:lnSpc>
+                <a:spcPct val="145000"/>
+              </a:lnSpc>
+              <a:buNone/>
+            </a:pPr>
+            <a:r>
+              <a:rPr lang="en-US" sz="1200" spc="168" kern="0" dirty="0">
+                <a:solidFill>
+                  <a:srgbClr val="77726A"/>
+                </a:solidFill>
+                <a:latin typeface="IBM Plex Mono" pitchFamily="34" charset="0"/>
+                <a:ea typeface="IBM Plex Mono" pitchFamily="34" charset="-122"/>
+                <a:cs typeface="IBM Plex Mono" pitchFamily="34" charset="-120"/>
+              </a:rPr>
+              <a:t>SECTION 06</a:t>
+            </a:r>
+            <a:endParaRPr lang="en-US" sz="1200" dirty="0"/>
+          </a:p>
+        </p:txBody>
+      </p:sp>
+      <p:sp>
+        <p:nvSpPr>
+          <p:cNvPr id="3" name="Text 1"/>
+          <p:cNvSpPr/>
+          <p:nvPr/>
+        </p:nvSpPr>
+        <p:spPr>
+          <a:xfrm>
+            <a:off x="558800" y="635000"/>
+            <a:ext cx="11074400" cy="508000"/>
+          </a:xfrm>
+          <a:prstGeom prst="rect">
+            <a:avLst/>
+          </a:prstGeom>
+          <a:noFill/>
+          <a:ln/>
+        </p:spPr>
+        <p:txBody>
+          <a:bodyPr wrap="square" lIns="0" tIns="0" rIns="0" bIns="0" rtlCol="0" anchor="t"/>
+          <a:lstStyle/>
+          <a:p>
+            <a:pPr algn="l" indent="0" marL="0">
+              <a:lnSpc>
+                <a:spcPct val="110000"/>
+              </a:lnSpc>
+              <a:buNone/>
+            </a:pPr>
+            <a:r>
+              <a:rPr lang="en-US" sz="2800" b="1" dirty="0">
+                <a:solidFill>
+                  <a:srgbClr val="332F2A"/>
+                </a:solidFill>
+                <a:latin typeface="Libre Franklin" pitchFamily="34" charset="0"/>
+                <a:ea typeface="Libre Franklin" pitchFamily="34" charset="-122"/>
+                <a:cs typeface="Libre Franklin" pitchFamily="34" charset="-120"/>
+              </a:rPr>
+              <a:t>The files a person writes at work</a:t>
+            </a:r>
+            <a:endParaRPr lang="en-US" sz="2800" dirty="0"/>
+          </a:p>
+        </p:txBody>
+      </p:sp>
+      <p:sp>
+        <p:nvSpPr>
+          <p:cNvPr id="4" name="Shape 2"/>
+          <p:cNvSpPr/>
+          <p:nvPr/>
+        </p:nvSpPr>
+        <p:spPr>
+          <a:xfrm>
+            <a:off x="558800" y="1181100"/>
+            <a:ext cx="11074400" cy="6350"/>
+          </a:xfrm>
+          <a:prstGeom prst="rect">
+            <a:avLst/>
+          </a:prstGeom>
+          <a:solidFill>
+            <a:srgbClr val="E1DED7"/>
+          </a:solidFill>
+          <a:ln/>
+        </p:spPr>
+      </p:sp>
+      <p:sp>
+        <p:nvSpPr>
+          <p:cNvPr id="5" name="Text 3"/>
+          <p:cNvSpPr/>
+          <p:nvPr/>
+        </p:nvSpPr>
+        <p:spPr>
+          <a:xfrm>
+            <a:off x="558800" y="6337300"/>
+            <a:ext cx="9804400" cy="215900"/>
+          </a:xfrm>
+          <a:prstGeom prst="rect">
+            <a:avLst/>
+          </a:prstGeom>
+          <a:noFill/>
+          <a:ln/>
+        </p:spPr>
+        <p:txBody>
+          <a:bodyPr wrap="square" lIns="0" tIns="0" rIns="0" bIns="0" rtlCol="0" anchor="t"/>
+          <a:lstStyle/>
+          <a:p>
+            <a:pPr algn="l" indent="0" marL="0">
+              <a:lnSpc>
+                <a:spcPct val="145000"/>
+              </a:lnSpc>
+              <a:buNone/>
+            </a:pPr>
+            <a:r>
+              <a:rPr lang="en-US" sz="1200" dirty="0">
+                <a:solidFill>
+                  <a:srgbClr val="99948B"/>
+                </a:solidFill>
+                <a:latin typeface="IBM Plex Mono" pitchFamily="34" charset="0"/>
+                <a:ea typeface="IBM Plex Mono" pitchFamily="34" charset="-122"/>
+                <a:cs typeface="IBM Plex Mono" pitchFamily="34" charset="-120"/>
+              </a:rPr>
+              <a:t>AI for Software Development · Session 1</a:t>
+            </a:r>
+            <a:endParaRPr lang="en-US" sz="1200" dirty="0"/>
+          </a:p>
+        </p:txBody>
+      </p:sp>
+      <p:sp>
+        <p:nvSpPr>
+          <p:cNvPr id="6" name="Text 4"/>
+          <p:cNvSpPr/>
+          <p:nvPr/>
+        </p:nvSpPr>
+        <p:spPr>
+          <a:xfrm>
+            <a:off x="10363200" y="6337300"/>
+            <a:ext cx="1270000" cy="215900"/>
+          </a:xfrm>
+          <a:prstGeom prst="rect">
+            <a:avLst/>
+          </a:prstGeom>
+          <a:noFill/>
+          <a:ln/>
+        </p:spPr>
+        <p:txBody>
+          <a:bodyPr wrap="square" lIns="0" tIns="0" rIns="0" bIns="0" rtlCol="0" anchor="t"/>
+          <a:lstStyle/>
+          <a:p>
+            <a:pPr algn="r" indent="0" marL="0">
+              <a:lnSpc>
+                <a:spcPct val="145000"/>
+              </a:lnSpc>
+              <a:buNone/>
+            </a:pPr>
+            <a:r>
+              <a:rPr lang="en-US" sz="1200" dirty="0">
+                <a:solidFill>
+                  <a:srgbClr val="99948B"/>
+                </a:solidFill>
+                <a:latin typeface="IBM Plex Mono" pitchFamily="34" charset="0"/>
+                <a:ea typeface="IBM Plex Mono" pitchFamily="34" charset="-122"/>
+                <a:cs typeface="IBM Plex Mono" pitchFamily="34" charset="-120"/>
+              </a:rPr>
+              <a:t>36</a:t>
+            </a:r>
+            <a:endParaRPr lang="en-US" sz="1200" dirty="0"/>
+          </a:p>
+        </p:txBody>
+      </p:sp>
+      <p:sp>
+        <p:nvSpPr>
+          <p:cNvPr id="7" name="Text 5"/>
+          <p:cNvSpPr/>
+          <p:nvPr/>
+        </p:nvSpPr>
+        <p:spPr>
+          <a:xfrm>
+            <a:off x="558800" y="1511300"/>
+            <a:ext cx="190500" cy="317500"/>
+          </a:xfrm>
+          <a:prstGeom prst="rect">
+            <a:avLst/>
+          </a:prstGeom>
+          <a:noFill/>
+          <a:ln/>
+        </p:spPr>
+        <p:txBody>
+          <a:bodyPr wrap="square" lIns="0" tIns="0" rIns="0" bIns="0" rtlCol="0" anchor="t"/>
+          <a:lstStyle/>
+          <a:p>
+            <a:pPr algn="l" indent="0" marL="0">
+              <a:lnSpc>
+                <a:spcPct val="140000"/>
+              </a:lnSpc>
+              <a:buNone/>
+            </a:pPr>
+            <a:r>
+              <a:rPr lang="en-US" sz="1700" dirty="0">
+                <a:solidFill>
+                  <a:srgbClr val="A87A2E"/>
+                </a:solidFill>
+                <a:latin typeface="Libre Franklin" pitchFamily="34" charset="0"/>
+                <a:ea typeface="Libre Franklin" pitchFamily="34" charset="-122"/>
+                <a:cs typeface="Libre Franklin" pitchFamily="34" charset="-120"/>
+              </a:rPr>
+              <a:t>—</a:t>
+            </a:r>
+            <a:endParaRPr lang="en-US" sz="1700" dirty="0"/>
+          </a:p>
+        </p:txBody>
+      </p:sp>
+      <p:sp>
+        <p:nvSpPr>
+          <p:cNvPr id="8" name="Text 6"/>
+          <p:cNvSpPr/>
+          <p:nvPr/>
+        </p:nvSpPr>
+        <p:spPr>
+          <a:xfrm>
+            <a:off x="927100" y="1511300"/>
+            <a:ext cx="9156700" cy="753110"/>
+          </a:xfrm>
+          <a:prstGeom prst="rect">
+            <a:avLst/>
+          </a:prstGeom>
+          <a:noFill/>
+          <a:ln/>
+        </p:spPr>
+        <p:txBody>
+          <a:bodyPr wrap="square" lIns="0" tIns="0" rIns="0" bIns="0" rtlCol="0" anchor="t"/>
+          <a:lstStyle/>
+          <a:p>
+            <a:pPr algn="l" indent="0" marL="0">
+              <a:lnSpc>
+                <a:spcPct val="145000"/>
+              </a:lnSpc>
+              <a:buNone/>
+            </a:pPr>
+            <a:r>
+              <a:rPr lang="en-US" sz="1700" b="1" dirty="0">
+                <a:solidFill>
+                  <a:srgbClr val="332F2A"/>
+                </a:solidFill>
+                <a:latin typeface="Libre Franklin" pitchFamily="34" charset="0"/>
+                <a:ea typeface="Libre Franklin" pitchFamily="34" charset="-122"/>
+                <a:cs typeface="Libre Franklin" pitchFamily="34" charset="-120"/>
+              </a:rPr>
+              <a:t>Open the four you approved. </a:t>
+            </a:r>
+            <a:pPr algn="l" indent="0" marL="0">
+              <a:lnSpc>
+                <a:spcPct val="145000"/>
+              </a:lnSpc>
+              <a:buNone/>
+            </a:pPr>
+            <a:r>
+              <a:rPr lang="en-US" sz="1700" dirty="0">
+                <a:solidFill>
+                  <a:srgbClr val="332F2A"/>
+                </a:solidFill>
+                <a:latin typeface="Libre Franklin" pitchFamily="34" charset="0"/>
+                <a:ea typeface="Libre Franklin" pitchFamily="34" charset="-122"/>
+                <a:cs typeface="Libre Franklin" pitchFamily="34" charset="-120"/>
+              </a:rPr>
+              <a:t>aidlc/intent.md, requirements.md, design.md and tasks.md — read them as one set, in order.</a:t>
+            </a:r>
+            <a:endParaRPr lang="en-US" sz="1700" dirty="0"/>
+          </a:p>
+        </p:txBody>
+      </p:sp>
+      <p:sp>
+        <p:nvSpPr>
+          <p:cNvPr id="9" name="Text 7"/>
+          <p:cNvSpPr/>
+          <p:nvPr/>
+        </p:nvSpPr>
+        <p:spPr>
+          <a:xfrm>
+            <a:off x="558800" y="2391410"/>
+            <a:ext cx="190500" cy="317500"/>
+          </a:xfrm>
+          <a:prstGeom prst="rect">
+            <a:avLst/>
+          </a:prstGeom>
+          <a:noFill/>
+          <a:ln/>
+        </p:spPr>
+        <p:txBody>
+          <a:bodyPr wrap="square" lIns="0" tIns="0" rIns="0" bIns="0" rtlCol="0" anchor="t"/>
+          <a:lstStyle/>
+          <a:p>
+            <a:pPr algn="l" indent="0" marL="0">
+              <a:lnSpc>
+                <a:spcPct val="140000"/>
+              </a:lnSpc>
+              <a:buNone/>
+            </a:pPr>
+            <a:r>
+              <a:rPr lang="en-US" sz="1700" dirty="0">
+                <a:solidFill>
+                  <a:srgbClr val="A87A2E"/>
+                </a:solidFill>
+                <a:latin typeface="Libre Franklin" pitchFamily="34" charset="0"/>
+                <a:ea typeface="Libre Franklin" pitchFamily="34" charset="-122"/>
+                <a:cs typeface="Libre Franklin" pitchFamily="34" charset="-120"/>
+              </a:rPr>
+              <a:t>—</a:t>
+            </a:r>
+            <a:endParaRPr lang="en-US" sz="1700" dirty="0"/>
+          </a:p>
+        </p:txBody>
+      </p:sp>
+      <p:sp>
+        <p:nvSpPr>
+          <p:cNvPr id="10" name="Text 8"/>
+          <p:cNvSpPr/>
+          <p:nvPr/>
+        </p:nvSpPr>
+        <p:spPr>
+          <a:xfrm>
+            <a:off x="927100" y="2391410"/>
+            <a:ext cx="9156700" cy="753110"/>
+          </a:xfrm>
+          <a:prstGeom prst="rect">
+            <a:avLst/>
+          </a:prstGeom>
+          <a:noFill/>
+          <a:ln/>
+        </p:spPr>
+        <p:txBody>
+          <a:bodyPr wrap="square" lIns="0" tIns="0" rIns="0" bIns="0" rtlCol="0" anchor="t"/>
+          <a:lstStyle/>
+          <a:p>
+            <a:pPr algn="l" indent="0" marL="0">
+              <a:lnSpc>
+                <a:spcPct val="145000"/>
+              </a:lnSpc>
+              <a:buNone/>
+            </a:pPr>
+            <a:r>
+              <a:rPr lang="en-US" sz="1700" b="1" dirty="0">
+                <a:solidFill>
+                  <a:srgbClr val="332F2A"/>
+                </a:solidFill>
+                <a:latin typeface="Libre Franklin" pitchFamily="34" charset="0"/>
+                <a:ea typeface="Libre Franklin" pitchFamily="34" charset="-122"/>
+                <a:cs typeface="Libre Franklin" pitchFamily="34" charset="-120"/>
+              </a:rPr>
+              <a:t>In a real team a person writes these. </a:t>
+            </a:r>
+            <a:pPr algn="l" indent="0" marL="0">
+              <a:lnSpc>
+                <a:spcPct val="145000"/>
+              </a:lnSpc>
+              <a:buNone/>
+            </a:pPr>
+            <a:r>
+              <a:rPr lang="en-US" sz="1700" dirty="0">
+                <a:solidFill>
+                  <a:srgbClr val="332F2A"/>
+                </a:solidFill>
+                <a:latin typeface="Libre Franklin" pitchFamily="34" charset="0"/>
+                <a:ea typeface="Libre Franklin" pitchFamily="34" charset="-122"/>
+                <a:cs typeface="Libre Franklin" pitchFamily="34" charset="-120"/>
+              </a:rPr>
+              <a:t>A product owner or tech lead drafts the intent and spec. The agent drafting them is a start, not a replacement.</a:t>
+            </a:r>
+            <a:endParaRPr lang="en-US" sz="1700" dirty="0"/>
+          </a:p>
+        </p:txBody>
+      </p:sp>
+      <p:sp>
+        <p:nvSpPr>
+          <p:cNvPr id="11" name="Text 9"/>
+          <p:cNvSpPr/>
+          <p:nvPr/>
+        </p:nvSpPr>
+        <p:spPr>
+          <a:xfrm>
+            <a:off x="558800" y="3271520"/>
+            <a:ext cx="190500" cy="317500"/>
+          </a:xfrm>
+          <a:prstGeom prst="rect">
+            <a:avLst/>
+          </a:prstGeom>
+          <a:noFill/>
+          <a:ln/>
+        </p:spPr>
+        <p:txBody>
+          <a:bodyPr wrap="square" lIns="0" tIns="0" rIns="0" bIns="0" rtlCol="0" anchor="t"/>
+          <a:lstStyle/>
+          <a:p>
+            <a:pPr algn="l" indent="0" marL="0">
+              <a:lnSpc>
+                <a:spcPct val="140000"/>
+              </a:lnSpc>
+              <a:buNone/>
+            </a:pPr>
+            <a:r>
+              <a:rPr lang="en-US" sz="1700" dirty="0">
+                <a:solidFill>
+                  <a:srgbClr val="A87A2E"/>
+                </a:solidFill>
+                <a:latin typeface="Libre Franklin" pitchFamily="34" charset="0"/>
+                <a:ea typeface="Libre Franklin" pitchFamily="34" charset="-122"/>
+                <a:cs typeface="Libre Franklin" pitchFamily="34" charset="-120"/>
+              </a:rPr>
+              <a:t>—</a:t>
+            </a:r>
+            <a:endParaRPr lang="en-US" sz="1700" dirty="0"/>
+          </a:p>
+        </p:txBody>
+      </p:sp>
+      <p:sp>
+        <p:nvSpPr>
+          <p:cNvPr id="12" name="Text 10"/>
+          <p:cNvSpPr/>
+          <p:nvPr/>
+        </p:nvSpPr>
+        <p:spPr>
+          <a:xfrm>
+            <a:off x="927100" y="3271520"/>
+            <a:ext cx="9156700" cy="753110"/>
+          </a:xfrm>
+          <a:prstGeom prst="rect">
+            <a:avLst/>
+          </a:prstGeom>
+          <a:noFill/>
+          <a:ln/>
+        </p:spPr>
+        <p:txBody>
+          <a:bodyPr wrap="square" lIns="0" tIns="0" rIns="0" bIns="0" rtlCol="0" anchor="t"/>
+          <a:lstStyle/>
+          <a:p>
+            <a:pPr algn="l" indent="0" marL="0">
+              <a:lnSpc>
+                <a:spcPct val="145000"/>
+              </a:lnSpc>
+              <a:buNone/>
+            </a:pPr>
+            <a:r>
+              <a:rPr lang="en-US" sz="1700" b="1" dirty="0">
+                <a:solidFill>
+                  <a:srgbClr val="332F2A"/>
+                </a:solidFill>
+                <a:latin typeface="Libre Franklin" pitchFamily="34" charset="0"/>
+                <a:ea typeface="Libre Franklin" pitchFamily="34" charset="-122"/>
+                <a:cs typeface="Libre Franklin" pitchFamily="34" charset="-120"/>
+              </a:rPr>
+              <a:t>Which is why you approved each one. </a:t>
+            </a:r>
+            <a:pPr algn="l" indent="0" marL="0">
+              <a:lnSpc>
+                <a:spcPct val="145000"/>
+              </a:lnSpc>
+              <a:buNone/>
+            </a:pPr>
+            <a:r>
+              <a:rPr lang="en-US" sz="1700" dirty="0">
+                <a:solidFill>
+                  <a:srgbClr val="332F2A"/>
+                </a:solidFill>
+                <a:latin typeface="Libre Franklin" pitchFamily="34" charset="0"/>
+                <a:ea typeface="Libre Franklin" pitchFamily="34" charset="-122"/>
+                <a:cs typeface="Libre Franklin" pitchFamily="34" charset="-120"/>
+              </a:rPr>
+              <a:t>Everything built today came out of those four files. A wrong line there becomes a wrong app, quickly and cheaply.</a:t>
+            </a:r>
+            <a:endParaRPr lang="en-US" sz="1700" dirty="0"/>
+          </a:p>
+        </p:txBody>
+      </p:sp>
+      <p:sp>
+        <p:nvSpPr>
+          <p:cNvPr id="13" name="Text 11"/>
+          <p:cNvSpPr/>
+          <p:nvPr/>
+        </p:nvSpPr>
+        <p:spPr>
+          <a:xfrm>
+            <a:off x="558800" y="4151630"/>
+            <a:ext cx="190500" cy="317500"/>
+          </a:xfrm>
+          <a:prstGeom prst="rect">
+            <a:avLst/>
+          </a:prstGeom>
+          <a:noFill/>
+          <a:ln/>
+        </p:spPr>
+        <p:txBody>
+          <a:bodyPr wrap="square" lIns="0" tIns="0" rIns="0" bIns="0" rtlCol="0" anchor="t"/>
+          <a:lstStyle/>
+          <a:p>
+            <a:pPr algn="l" indent="0" marL="0">
+              <a:lnSpc>
+                <a:spcPct val="140000"/>
+              </a:lnSpc>
+              <a:buNone/>
+            </a:pPr>
+            <a:r>
+              <a:rPr lang="en-US" sz="1700" dirty="0">
+                <a:solidFill>
+                  <a:srgbClr val="A87A2E"/>
+                </a:solidFill>
+                <a:latin typeface="Libre Franklin" pitchFamily="34" charset="0"/>
+                <a:ea typeface="Libre Franklin" pitchFamily="34" charset="-122"/>
+                <a:cs typeface="Libre Franklin" pitchFamily="34" charset="-120"/>
+              </a:rPr>
+              <a:t>—</a:t>
+            </a:r>
+            <a:endParaRPr lang="en-US" sz="1700" dirty="0"/>
+          </a:p>
+        </p:txBody>
+      </p:sp>
+      <p:sp>
+        <p:nvSpPr>
+          <p:cNvPr id="14" name="Text 12"/>
+          <p:cNvSpPr/>
+          <p:nvPr/>
+        </p:nvSpPr>
+        <p:spPr>
+          <a:xfrm>
+            <a:off x="927100" y="4151630"/>
+            <a:ext cx="9156700" cy="753110"/>
+          </a:xfrm>
+          <a:prstGeom prst="rect">
+            <a:avLst/>
+          </a:prstGeom>
+          <a:noFill/>
+          <a:ln/>
+        </p:spPr>
+        <p:txBody>
+          <a:bodyPr wrap="square" lIns="0" tIns="0" rIns="0" bIns="0" rtlCol="0" anchor="t"/>
+          <a:lstStyle/>
+          <a:p>
+            <a:pPr algn="l" indent="0" marL="0">
+              <a:lnSpc>
+                <a:spcPct val="145000"/>
+              </a:lnSpc>
+              <a:buNone/>
+            </a:pPr>
+            <a:r>
+              <a:rPr lang="en-US" sz="1700" dirty="0">
+                <a:solidFill>
+                  <a:srgbClr val="332F2A"/>
+                </a:solidFill>
+                <a:latin typeface="Libre Franklin" pitchFamily="34" charset="0"/>
+                <a:ea typeface="Libre Franklin" pitchFamily="34" charset="-122"/>
+                <a:cs typeface="Libre Franklin" pitchFamily="34" charset="-120"/>
+              </a:rPr>
+              <a:t>labs/PROMPTS.md explains why each prompt is worded the way it is. Read it before Session 2 — you will be writing your own.</a:t>
+            </a:r>
+            <a:endParaRPr lang="en-US" sz="1700" dirty="0"/>
+          </a:p>
+        </p:txBody>
+      </p:sp>
+    </p:spTree>
+  </p:cSld>
+  <p:clrMapOvr>
+    <a:masterClrMapping/>
+  </p:clrMapOvr>
+</p:sld>
+</file>
+
+<file path=ppt/slides/slide37.xml><?xml version="1.0" encoding="utf-8"?>
+<p:sld xmlns:a="http://schemas.openxmlformats.org/drawingml/2006/main" xmlns:r="http://schemas.openxmlformats.org/officeDocument/2006/relationships" xmlns:p="http://schemas.openxmlformats.org/presentationml/2006/main">
+  <p:cSld name="Slide 37">
     <p:bg>
       <p:bgPr>
         <a:solidFill>
@@ -18262,7 +18971,7 @@
                 <a:ea typeface="IBM Plex Mono" pitchFamily="34" charset="-122"/>
                 <a:cs typeface="IBM Plex Mono" pitchFamily="34" charset="-120"/>
               </a:rPr>
-              <a:t>36</a:t>
+              <a:t>37</a:t>
             </a:r>
             <a:endParaRPr lang="en-US" sz="1200" dirty="0"/>
           </a:p>
@@ -18528,9 +19237,9 @@
 </p:sld>
 </file>
 
-<file path=ppt/slides/slide37.xml><?xml version="1.0" encoding="utf-8"?>
+<file path=ppt/slides/slide38.xml><?xml version="1.0" encoding="utf-8"?>
 <p:sld xmlns:a="http://schemas.openxmlformats.org/drawingml/2006/main" xmlns:r="http://schemas.openxmlformats.org/officeDocument/2006/relationships" xmlns:p="http://schemas.openxmlformats.org/presentationml/2006/main">
-  <p:cSld name="Slide 37">
+  <p:cSld name="Slide 38">
     <p:bg>
       <p:bgPr>
         <a:solidFill>
@@ -18860,7 +19569,7 @@
                 <a:ea typeface="IBM Plex Mono" pitchFamily="34" charset="-122"/>
                 <a:cs typeface="IBM Plex Mono" pitchFamily="34" charset="-120"/>
               </a:rPr>
-              <a:t>37</a:t>
+              <a:t>38</a:t>
             </a:r>
             <a:endParaRPr lang="en-US" sz="1200" dirty="0"/>
           </a:p>

--- a/slides/Session 1 - Meet Your Agent.pptx
+++ b/slides/Session 1 - Meet Your Agent.pptx
@@ -11731,7 +11731,7 @@
         <p:spPr>
           <a:xfrm>
             <a:off x="7431430" y="1511300"/>
-            <a:ext cx="4201770" cy="1600200"/>
+            <a:ext cx="4201770" cy="1894840"/>
           </a:xfrm>
           <a:prstGeom prst="rect">
             <a:avLst/>
@@ -11758,7 +11758,7 @@
                 <a:ea typeface="Libre Franklin" pitchFamily="34" charset="-122"/>
                 <a:cs typeface="Libre Franklin" pitchFamily="34" charset="-120"/>
               </a:rPr>
-              <a:t>Paste the Gate 3 prompt. Design and a task list, and every task names the ONE file it is allowed to touch. Working alone today that looks like bookkeeping.</a:t>
+              <a:t>Paste the Gate 3 prompt from labs/PROMPTS.md. Design and a task list, and every task names the ONE file it is allowed to touch. Working alone today that looks like bookkeeping.</a:t>
             </a:r>
             <a:endParaRPr lang="en-US" sz="1600" dirty="0"/>
           </a:p>
@@ -11772,7 +11772,7 @@
         </p:nvSpPr>
         <p:spPr>
           <a:xfrm>
-            <a:off x="7431430" y="3238500"/>
+            <a:off x="7431430" y="3533140"/>
             <a:ext cx="4201770" cy="1894840"/>
           </a:xfrm>
           <a:prstGeom prst="rect">
@@ -12338,7 +12338,7 @@
                 <a:ea typeface="Libre Franklin" pitchFamily="34" charset="-122"/>
                 <a:cs typeface="Libre Franklin" pitchFamily="34" charset="-120"/>
               </a:rPr>
-              <a:t>Two prompts, one per task. The only gate with no document: the agent edits a single file, you run the tests, you read the diff, you commit.</a:t>
+              <a:t>Two prompts in labs/PROMPTS.md, one per task. The only gate with no document of its own: the agent edits a single file, you run the tests, you read the diff, you commit.</a:t>
             </a:r>
             <a:endParaRPr lang="en-US" sz="1600" dirty="0"/>
           </a:p>

--- a/slides/Session 1 - Meet Your Agent.pptx
+++ b/slides/Session 1 - Meet Your Agent.pptx
@@ -10356,7 +10356,7 @@
                 <a:ea typeface="IBM Plex Mono" pitchFamily="34" charset="-122"/>
                 <a:cs typeface="IBM Plex Mono" pitchFamily="34" charset="-120"/>
               </a:rPr>
-              <a:t># aidlc/intent.md</a:t>
+              <a:t>A PERSON WRITES THIS ONE</a:t>
             </a:r>
             <a:endParaRPr lang="en-US" sz="1400" dirty="0"/>
           </a:p>
@@ -10367,6 +10367,17 @@
               </a:lnSpc>
               <a:buNone/>
             </a:pPr>
+            <a:r>
+              <a:rPr lang="en-US" sz="1400" dirty="0">
+                <a:solidFill>
+                  <a:srgbClr val="332F2A"/>
+                </a:solidFill>
+                <a:latin typeface="IBM Plex Mono" pitchFamily="34" charset="0"/>
+                <a:ea typeface="IBM Plex Mono" pitchFamily="34" charset="-122"/>
+                <a:cs typeface="IBM Plex Mono" pitchFamily="34" charset="-120"/>
+              </a:rPr>
+              <a:t>  Who is this for?</a:t>
+            </a:r>
             <a:endParaRPr lang="en-US" sz="1400" dirty="0"/>
           </a:p>
           <a:p>
@@ -10385,7 +10396,7 @@
                 <a:ea typeface="IBM Plex Mono" pitchFamily="34" charset="-122"/>
                 <a:cs typeface="IBM Plex Mono" pitchFamily="34" charset="-120"/>
               </a:rPr>
-              <a:t>Who is this for?</a:t>
+              <a:t>  What problem does it solve?</a:t>
             </a:r>
             <a:endParaRPr lang="en-US" sz="1400" dirty="0"/>
           </a:p>
@@ -10405,7 +10416,7 @@
                 <a:ea typeface="IBM Plex Mono" pitchFamily="34" charset="-122"/>
                 <a:cs typeface="IBM Plex Mono" pitchFamily="34" charset="-120"/>
               </a:rPr>
-              <a:t>  A student who has just met</a:t>
+              <a:t>  What does “done” look like?</a:t>
             </a:r>
             <a:endParaRPr lang="en-US" sz="1400" dirty="0"/>
           </a:p>
@@ -10425,7 +10436,7 @@
                 <a:ea typeface="IBM Plex Mono" pitchFamily="34" charset="-122"/>
                 <a:cs typeface="IBM Plex Mono" pitchFamily="34" charset="-120"/>
               </a:rPr>
-              <a:t>  the Fourier transform.</a:t>
+              <a:t>  What is NOT included?</a:t>
             </a:r>
             <a:endParaRPr lang="en-US" sz="1400" dirty="0"/>
           </a:p>
@@ -10454,7 +10465,7 @@
                 <a:ea typeface="IBM Plex Mono" pitchFamily="34" charset="-122"/>
                 <a:cs typeface="IBM Plex Mono" pitchFamily="34" charset="-120"/>
               </a:rPr>
-              <a:t>What does “done” look like?</a:t>
+              <a:t>-&gt; aidlc/intent.md</a:t>
             </a:r>
             <a:endParaRPr lang="en-US" sz="1400" dirty="0"/>
           </a:p>
@@ -10474,7 +10485,7 @@
                 <a:ea typeface="IBM Plex Mono" pitchFamily="34" charset="-122"/>
                 <a:cs typeface="IBM Plex Mono" pitchFamily="34" charset="-120"/>
               </a:rPr>
-              <a:t>  I set two sine waves going</a:t>
+              <a:t>   “...if I enter an amplitude</a:t>
             </a:r>
             <a:endParaRPr lang="en-US" sz="1400" dirty="0"/>
           </a:p>
@@ -10494,50 +10505,10 @@
                 <a:ea typeface="IBM Plex Mono" pitchFamily="34" charset="-122"/>
                 <a:cs typeface="IBM Plex Mono" pitchFamily="34" charset="-120"/>
               </a:rPr>
-              <a:t>  and see a chart with exactly</a:t>
+              <a:t>    of 1.0, the chart shows 1.0.”</a:t>
             </a:r>
             <a:endParaRPr lang="en-US" sz="1400" dirty="0"/>
           </a:p>
-          <a:p>
-            <a:pPr indent="0" marL="0">
-              <a:lnSpc>
-                <a:spcPct val="160000"/>
-              </a:lnSpc>
-              <a:buNone/>
-            </a:pPr>
-            <a:r>
-              <a:rPr lang="en-US" sz="1400" dirty="0">
-                <a:solidFill>
-                  <a:srgbClr val="332F2A"/>
-                </a:solidFill>
-                <a:latin typeface="IBM Plex Mono" pitchFamily="34" charset="0"/>
-                <a:ea typeface="IBM Plex Mono" pitchFamily="34" charset="-122"/>
-                <a:cs typeface="IBM Plex Mono" pitchFamily="34" charset="-120"/>
-              </a:rPr>
-              <a:t>  those two frequencies, at the</a:t>
-            </a:r>
-            <a:endParaRPr lang="en-US" sz="1400" dirty="0"/>
-          </a:p>
-          <a:p>
-            <a:pPr indent="0" marL="0">
-              <a:lnSpc>
-                <a:spcPct val="160000"/>
-              </a:lnSpc>
-              <a:buNone/>
-            </a:pPr>
-            <a:r>
-              <a:rPr lang="en-US" sz="1400" dirty="0">
-                <a:solidFill>
-                  <a:srgbClr val="332F2A"/>
-                </a:solidFill>
-                <a:latin typeface="IBM Plex Mono" pitchFamily="34" charset="0"/>
-                <a:ea typeface="IBM Plex Mono" pitchFamily="34" charset="-122"/>
-                <a:cs typeface="IBM Plex Mono" pitchFamily="34" charset="-120"/>
-              </a:rPr>
-              <a:t>  amplitudes I chose.</a:t>
-            </a:r>
-            <a:endParaRPr lang="en-US" sz="1400" dirty="0"/>
-          </a:p>
         </p:txBody>
       </p:sp>
       <p:sp>
@@ -10549,7 +10520,7 @@
         <p:spPr>
           <a:xfrm>
             <a:off x="7431430" y="1511300"/>
-            <a:ext cx="4201770" cy="1894840"/>
+            <a:ext cx="4201770" cy="1305560"/>
           </a:xfrm>
           <a:prstGeom prst="rect">
             <a:avLst/>
@@ -10576,7 +10547,7 @@
                 <a:ea typeface="Libre Franklin" pitchFamily="34" charset="-122"/>
                 <a:cs typeface="Libre Franklin" pitchFamily="34" charset="-120"/>
               </a:rPr>
-              <a:t>The only gate with no prompt to paste — you write it yourself, in your own words: who it is for, what problem it solves, what done looks like, and what is deliberately left out.</a:t>
+              <a:t>Four questions, answered in your own words. There is no prompt for this one — an agent cannot tell you who your app is for.</a:t>
             </a:r>
             <a:endParaRPr lang="en-US" sz="1600" dirty="0"/>
           </a:p>
@@ -10590,8 +10561,8 @@
         </p:nvSpPr>
         <p:spPr>
           <a:xfrm>
-            <a:off x="7431430" y="3533140"/>
-            <a:ext cx="4201770" cy="1305560"/>
+            <a:off x="7431430" y="2943860"/>
+            <a:ext cx="4201770" cy="1600200"/>
           </a:xfrm>
           <a:prstGeom prst="rect">
             <a:avLst/>
@@ -10618,7 +10589,7 @@
                 <a:ea typeface="Libre Franklin" pitchFamily="34" charset="-122"/>
                 <a:cs typeface="Libre Franklin" pitchFamily="34" charset="-120"/>
               </a:rPr>
-              <a:t>The agent will not start without it. A vague intent does not produce a vague app — it produces a confident, wrong one.</a:t>
+              <a:t>The fourth question is the one that earns its place. Nothing told the Round 1 agent where to stop, so it invented scope; this is where you stop it.</a:t>
             </a:r>
             <a:endParaRPr lang="en-US" sz="1600" dirty="0"/>
           </a:p>
@@ -10680,7 +10651,7 @@
                 <a:ea typeface="Libre Franklin" pitchFamily="34" charset="-122"/>
                 <a:cs typeface="Libre Franklin" pitchFamily="34" charset="-120"/>
               </a:rPr>
-              <a:t>The question that saves you is the one about scope: what is deliberately NOT included.</a:t>
+              <a:t>A vague intent does not produce a vague app. It produces a confident, wrong one.</a:t>
             </a:r>
             <a:endParaRPr lang="en-US" sz="1500" dirty="0"/>
           </a:p>
@@ -10967,7 +10938,7 @@
                 <a:ea typeface="IBM Plex Mono" pitchFamily="34" charset="-122"/>
                 <a:cs typeface="IBM Plex Mono" pitchFamily="34" charset="-120"/>
               </a:rPr>
-              <a:t># aidlc/requirements.md</a:t>
+              <a:t>PROMPT</a:t>
             </a:r>
             <a:endParaRPr lang="en-US" sz="1400" dirty="0"/>
           </a:p>
@@ -10978,6 +10949,17 @@
               </a:lnSpc>
               <a:buNone/>
             </a:pPr>
+            <a:r>
+              <a:rPr lang="en-US" sz="1400" dirty="0">
+                <a:solidFill>
+                  <a:srgbClr val="332F2A"/>
+                </a:solidFill>
+                <a:latin typeface="IBM Plex Mono" pitchFamily="34" charset="0"/>
+                <a:ea typeface="IBM Plex Mono" pitchFamily="34" charset="-122"/>
+                <a:cs typeface="IBM Plex Mono" pitchFamily="34" charset="-120"/>
+              </a:rPr>
+              <a:t>  Read tests/test_spectrum.py.</a:t>
+            </a:r>
             <a:endParaRPr lang="en-US" sz="1400" dirty="0"/>
           </a:p>
           <a:p>
@@ -10996,7 +10978,7 @@
                 <a:ea typeface="IBM Plex Mono" pitchFamily="34" charset="-122"/>
                 <a:cs typeface="IBM Plex Mono" pitchFamily="34" charset="-120"/>
               </a:rPr>
-              <a:t>3. Report the correct amplitude</a:t>
+              <a:t>  WRITE aidlc/requirements.md:</a:t>
             </a:r>
             <a:endParaRPr lang="en-US" sz="1400" dirty="0"/>
           </a:p>
@@ -11016,7 +10998,7 @@
                 <a:ea typeface="IBM Plex Mono" pitchFamily="34" charset="-122"/>
                 <a:cs typeface="IBM Plex Mono" pitchFamily="34" charset="-120"/>
               </a:rPr>
-              <a:t>   check: a tone entered at 1.0</a:t>
+              <a:t>  a numbered table, each row</a:t>
             </a:r>
             <a:endParaRPr lang="en-US" sz="1400" dirty="0"/>
           </a:p>
@@ -11036,7 +11018,7 @@
                 <a:ea typeface="IBM Plex Mono" pitchFamily="34" charset="-122"/>
                 <a:cs typeface="IBM Plex Mono" pitchFamily="34" charset="-120"/>
               </a:rPr>
-              <a:t>   reads back as 1.0, +/- 0.001</a:t>
+              <a:t>  carrying a check that can</a:t>
             </a:r>
             <a:endParaRPr lang="en-US" sz="1400" dirty="0"/>
           </a:p>
@@ -11047,6 +11029,17 @@
               </a:lnSpc>
               <a:buNone/>
             </a:pPr>
+            <a:r>
+              <a:rPr lang="en-US" sz="1400" dirty="0">
+                <a:solidFill>
+                  <a:srgbClr val="332F2A"/>
+                </a:solidFill>
+                <a:latin typeface="IBM Plex Mono" pitchFamily="34" charset="0"/>
+                <a:ea typeface="IBM Plex Mono" pitchFamily="34" charset="-122"/>
+                <a:cs typeface="IBM Plex Mono" pitchFamily="34" charset="-120"/>
+              </a:rPr>
+              <a:t>  be run.</a:t>
+            </a:r>
             <a:endParaRPr lang="en-US" sz="1400" dirty="0"/>
           </a:p>
           <a:p>
@@ -11056,6 +11049,15 @@
               </a:lnSpc>
               <a:buNone/>
             </a:pPr>
+            <a:endParaRPr lang="en-US" sz="1400" dirty="0"/>
+          </a:p>
+          <a:p>
+            <a:pPr indent="0" marL="0">
+              <a:lnSpc>
+                <a:spcPct val="160000"/>
+              </a:lnSpc>
+              <a:buNone/>
+            </a:pPr>
             <a:r>
               <a:rPr lang="en-US" sz="1400" dirty="0">
                 <a:solidFill>
@@ -11065,7 +11067,7 @@
                 <a:ea typeface="IBM Plex Mono" pitchFamily="34" charset="-122"/>
                 <a:cs typeface="IBM Plex Mono" pitchFamily="34" charset="-120"/>
               </a:rPr>
-              <a:t>5. Handle a constant offset</a:t>
+              <a:t>-&gt; aidlc/requirements.md</a:t>
             </a:r>
             <a:endParaRPr lang="en-US" sz="1400" dirty="0"/>
           </a:p>
@@ -11085,7 +11087,7 @@
                 <a:ea typeface="IBM Plex Mono" pitchFamily="34" charset="-122"/>
                 <a:cs typeface="IBM Plex Mono" pitchFamily="34" charset="-120"/>
               </a:rPr>
-              <a:t>   check: a DC offset of 2.0</a:t>
+              <a:t>   | 2 | a tone entered at</a:t>
             </a:r>
             <a:endParaRPr lang="en-US" sz="1400" dirty="0"/>
           </a:p>
@@ -11105,7 +11107,7 @@
                 <a:ea typeface="IBM Plex Mono" pitchFamily="34" charset="-122"/>
                 <a:cs typeface="IBM Plex Mono" pitchFamily="34" charset="-120"/>
               </a:rPr>
-              <a:t>   appears at 0 Hz as 2.0,</a:t>
+              <a:t>        amplitude 1.0 reads</a:t>
             </a:r>
             <a:endParaRPr lang="en-US" sz="1400" dirty="0"/>
           </a:p>
@@ -11125,7 +11127,7 @@
                 <a:ea typeface="IBM Plex Mono" pitchFamily="34" charset="-122"/>
                 <a:cs typeface="IBM Plex Mono" pitchFamily="34" charset="-120"/>
               </a:rPr>
-              <a:t>   not 4.0</a:t>
+              <a:t>        back as 1.0 |</a:t>
             </a:r>
             <a:endParaRPr lang="en-US" sz="1400" dirty="0"/>
           </a:p>
@@ -11140,7 +11142,7 @@
         <p:spPr>
           <a:xfrm>
             <a:off x="7431430" y="1511300"/>
-            <a:ext cx="4201770" cy="1894840"/>
+            <a:ext cx="4201770" cy="1305560"/>
           </a:xfrm>
           <a:prstGeom prst="rect">
             <a:avLst/>
@@ -11167,7 +11169,7 @@
                 <a:ea typeface="Libre Franklin" pitchFamily="34" charset="-122"/>
                 <a:cs typeface="Libre Franklin" pitchFamily="34" charset="-120"/>
               </a:rPr>
-              <a:t>Paste the Gate 2 prompt from labs/PROMPTS.md. The agent drafts these; you read every line and fix what is wrong — it is far better at the requirement than at the check beside it.</a:t>
+              <a:t>The agent drafts; a person reads every line. It is far better at the left column than at the check beside it.</a:t>
             </a:r>
             <a:endParaRPr lang="en-US" sz="1600" dirty="0"/>
           </a:p>
@@ -11181,8 +11183,8 @@
         </p:nvSpPr>
         <p:spPr>
           <a:xfrm>
-            <a:off x="7431430" y="3533140"/>
-            <a:ext cx="4201770" cy="1305560"/>
+            <a:off x="7431430" y="2943860"/>
+            <a:ext cx="4201770" cy="1600200"/>
           </a:xfrm>
           <a:prstGeom prst="rect">
             <a:avLst/>
@@ -11209,7 +11211,7 @@
                 <a:ea typeface="Libre Franklin" pitchFamily="34" charset="-122"/>
                 <a:cs typeface="Libre Franklin" pitchFamily="34" charset="-120"/>
               </a:rPr>
-              <a:t>Every requirement carries something you can run. A requirement you cannot check by running something is not a requirement yet.</a:t>
+              <a:t>Row 2 is the whole lab. The failure Round 1 could not see is now a numbered line in a document — written down before any code exists to get it wrong.</a:t>
             </a:r>
             <a:endParaRPr lang="en-US" sz="1600" dirty="0"/>
           </a:p>
@@ -11271,7 +11273,7 @@
                 <a:ea typeface="Libre Franklin" pitchFamily="34" charset="-122"/>
                 <a:cs typeface="Libre Franklin" pitchFamily="34" charset="-120"/>
               </a:rPr>
-              <a:t>Reply “approved” only when every check on the slide could actually fail.</a:t>
+              <a:t>Approve it only when every right-hand column could actually fail.</a:t>
             </a:r>
             <a:endParaRPr lang="en-US" sz="1500" dirty="0"/>
           </a:p>
@@ -11558,7 +11560,7 @@
                 <a:ea typeface="IBM Plex Mono" pitchFamily="34" charset="-122"/>
                 <a:cs typeface="IBM Plex Mono" pitchFamily="34" charset="-120"/>
               </a:rPr>
-              <a:t># aidlc/tasks.md</a:t>
+              <a:t>PROMPT</a:t>
             </a:r>
             <a:endParaRPr lang="en-US" sz="1400" dirty="0"/>
           </a:p>
@@ -11569,6 +11571,17 @@
               </a:lnSpc>
               <a:buNone/>
             </a:pPr>
+            <a:r>
+              <a:rPr lang="en-US" sz="1400" dirty="0">
+                <a:solidFill>
+                  <a:srgbClr val="332F2A"/>
+                </a:solidFill>
+                <a:latin typeface="IBM Plex Mono" pitchFamily="34" charset="0"/>
+                <a:ea typeface="IBM Plex Mono" pitchFamily="34" charset="-122"/>
+                <a:cs typeface="IBM Plex Mono" pitchFamily="34" charset="-120"/>
+              </a:rPr>
+              <a:t>  requirements.md is approved.</a:t>
+            </a:r>
             <a:endParaRPr lang="en-US" sz="1400" dirty="0"/>
           </a:p>
           <a:p>
@@ -11587,7 +11600,7 @@
                 <a:ea typeface="IBM Plex Mono" pitchFamily="34" charset="-122"/>
                 <a:cs typeface="IBM Plex Mono" pitchFamily="34" charset="-120"/>
               </a:rPr>
-              <a:t>1. The maths: build a signal,</a:t>
+              <a:t>  WRITE design.md and tasks.md.</a:t>
             </a:r>
             <a:endParaRPr lang="en-US" sz="1400" dirty="0"/>
           </a:p>
@@ -11607,7 +11620,7 @@
                 <a:ea typeface="IBM Plex Mono" pitchFamily="34" charset="-122"/>
                 <a:cs typeface="IBM Plex Mono" pitchFamily="34" charset="-120"/>
               </a:rPr>
-              <a:t>   take its spectrum, find the</a:t>
+              <a:t>  Exactly two tasks. One owner,</a:t>
             </a:r>
             <a:endParaRPr lang="en-US" sz="1400" dirty="0"/>
           </a:p>
@@ -11627,7 +11640,7 @@
                 <a:ea typeface="IBM Plex Mono" pitchFamily="34" charset="-122"/>
                 <a:cs typeface="IBM Plex Mono" pitchFamily="34" charset="-120"/>
               </a:rPr>
-              <a:t>   strongest frequency</a:t>
+              <a:t>  one file per row.</a:t>
             </a:r>
             <a:endParaRPr lang="en-US" sz="1400" dirty="0"/>
           </a:p>
@@ -11638,6 +11651,15 @@
               </a:lnSpc>
               <a:buNone/>
             </a:pPr>
+            <a:endParaRPr lang="en-US" sz="1400" dirty="0"/>
+          </a:p>
+          <a:p>
+            <a:pPr indent="0" marL="0">
+              <a:lnSpc>
+                <a:spcPct val="160000"/>
+              </a:lnSpc>
+              <a:buNone/>
+            </a:pPr>
             <a:r>
               <a:rPr lang="en-US" sz="1400" dirty="0">
                 <a:solidFill>
@@ -11647,7 +11669,7 @@
                 <a:ea typeface="IBM Plex Mono" pitchFamily="34" charset="-122"/>
                 <a:cs typeface="IBM Plex Mono" pitchFamily="34" charset="-120"/>
               </a:rPr>
-              <a:t>   -&gt; core/spectrum.py</a:t>
+              <a:t>-&gt; aidlc/tasks.md</a:t>
             </a:r>
             <a:endParaRPr lang="en-US" sz="1400" dirty="0"/>
           </a:p>
@@ -11658,6 +11680,17 @@
               </a:lnSpc>
               <a:buNone/>
             </a:pPr>
+            <a:r>
+              <a:rPr lang="en-US" sz="1400" dirty="0">
+                <a:solidFill>
+                  <a:srgbClr val="332F2A"/>
+                </a:solidFill>
+                <a:latin typeface="IBM Plex Mono" pitchFamily="34" charset="0"/>
+                <a:ea typeface="IBM Plex Mono" pitchFamily="34" charset="-122"/>
+                <a:cs typeface="IBM Plex Mono" pitchFamily="34" charset="-120"/>
+              </a:rPr>
+              <a:t>   | 1 | core/spectrum.py |</a:t>
+            </a:r>
             <a:endParaRPr lang="en-US" sz="1400" dirty="0"/>
           </a:p>
           <a:p>
@@ -11676,50 +11709,10 @@
                 <a:ea typeface="IBM Plex Mono" pitchFamily="34" charset="-122"/>
                 <a:cs typeface="IBM Plex Mono" pitchFamily="34" charset="-120"/>
               </a:rPr>
-              <a:t>2. The screen: two tones in,</a:t>
+              <a:t>   | 2 | pages/2_Spectrum... |</a:t>
             </a:r>
             <a:endParaRPr lang="en-US" sz="1400" dirty="0"/>
           </a:p>
-          <a:p>
-            <a:pPr indent="0" marL="0">
-              <a:lnSpc>
-                <a:spcPct val="160000"/>
-              </a:lnSpc>
-              <a:buNone/>
-            </a:pPr>
-            <a:r>
-              <a:rPr lang="en-US" sz="1400" dirty="0">
-                <a:solidFill>
-                  <a:srgbClr val="332F2A"/>
-                </a:solidFill>
-                <a:latin typeface="IBM Plex Mono" pitchFamily="34" charset="0"/>
-                <a:ea typeface="IBM Plex Mono" pitchFamily="34" charset="-122"/>
-                <a:cs typeface="IBM Plex Mono" pitchFamily="34" charset="-120"/>
-              </a:rPr>
-              <a:t>   two charts out</a:t>
-            </a:r>
-            <a:endParaRPr lang="en-US" sz="1400" dirty="0"/>
-          </a:p>
-          <a:p>
-            <a:pPr indent="0" marL="0">
-              <a:lnSpc>
-                <a:spcPct val="160000"/>
-              </a:lnSpc>
-              <a:buNone/>
-            </a:pPr>
-            <a:r>
-              <a:rPr lang="en-US" sz="1400" dirty="0">
-                <a:solidFill>
-                  <a:srgbClr val="332F2A"/>
-                </a:solidFill>
-                <a:latin typeface="IBM Plex Mono" pitchFamily="34" charset="0"/>
-                <a:ea typeface="IBM Plex Mono" pitchFamily="34" charset="-122"/>
-                <a:cs typeface="IBM Plex Mono" pitchFamily="34" charset="-120"/>
-              </a:rPr>
-              <a:t>   -&gt; pages/2_Spectrum_...py</a:t>
-            </a:r>
-            <a:endParaRPr lang="en-US" sz="1400" dirty="0"/>
-          </a:p>
         </p:txBody>
       </p:sp>
       <p:sp>
@@ -11731,7 +11724,7 @@
         <p:spPr>
           <a:xfrm>
             <a:off x="7431430" y="1511300"/>
-            <a:ext cx="4201770" cy="1894840"/>
+            <a:ext cx="4201770" cy="1305560"/>
           </a:xfrm>
           <a:prstGeom prst="rect">
             <a:avLst/>
@@ -11758,7 +11751,7 @@
                 <a:ea typeface="Libre Franklin" pitchFamily="34" charset="-122"/>
                 <a:cs typeface="Libre Franklin" pitchFamily="34" charset="-120"/>
               </a:rPr>
-              <a:t>Paste the Gate 3 prompt from labs/PROMPTS.md. Design and a task list, and every task names the ONE file it is allowed to touch. Working alone today that looks like bookkeeping.</a:t>
+              <a:t>Design, plus a task list where every task names the ONE file it may touch. Working alone that looks like bookkeeping.</a:t>
             </a:r>
             <a:endParaRPr lang="en-US" sz="1600" dirty="0"/>
           </a:p>
@@ -11772,8 +11765,8 @@
         </p:nvSpPr>
         <p:spPr>
           <a:xfrm>
-            <a:off x="7431430" y="3533140"/>
-            <a:ext cx="4201770" cy="1894840"/>
+            <a:off x="7431430" y="2943860"/>
+            <a:ext cx="4201770" cy="1305560"/>
           </a:xfrm>
           <a:prstGeom prst="rect">
             <a:avLst/>
@@ -11800,7 +11793,7 @@
                 <a:ea typeface="Libre Franklin" pitchFamily="34" charset="-122"/>
                 <a:cs typeface="Libre Franklin" pitchFamily="34" charset="-120"/>
               </a:rPr>
-              <a:t>In Session 2 it is the whole trick: four people build at once and never touch the same file, so nothing has to be merged and nobody needs to learn branching to collaborate.</a:t>
+              <a:t>In Session 2 it is the whole trick: four people build at once, never touch the same file, and there is nothing to merge.</a:t>
             </a:r>
             <a:endParaRPr lang="en-US" sz="1600" dirty="0"/>
           </a:p>
@@ -11862,7 +11855,7 @@
                 <a:ea typeface="Libre Franklin" pitchFamily="34" charset="-122"/>
                 <a:cs typeface="Libre Franklin" pitchFamily="34" charset="-120"/>
               </a:rPr>
-              <a:t>One task, one owner, one file.</a:t>
+              <a:t>You are approving a plan, not code. No code exists yet.</a:t>
             </a:r>
             <a:endParaRPr lang="en-US" sz="1500" dirty="0"/>
           </a:p>
@@ -12149,7 +12142,7 @@
                 <a:ea typeface="IBM Plex Mono" pitchFamily="34" charset="-122"/>
                 <a:cs typeface="IBM Plex Mono" pitchFamily="34" charset="-120"/>
               </a:rPr>
-              <a:t>$ pytest tests/test_spectrum.py</a:t>
+              <a:t>PROMPT</a:t>
             </a:r>
             <a:endParaRPr lang="en-US" sz="1400" dirty="0"/>
           </a:p>
@@ -12169,7 +12162,7 @@
                 <a:ea typeface="IBM Plex Mono" pitchFamily="34" charset="-122"/>
                 <a:cs typeface="IBM Plex Mono" pitchFamily="34" charset="-120"/>
               </a:rPr>
-              <a:t>7 failed</a:t>
+              <a:t>  Implement task 1 only.</a:t>
             </a:r>
             <a:endParaRPr lang="en-US" sz="1400" dirty="0"/>
           </a:p>
@@ -12180,6 +12173,17 @@
               </a:lnSpc>
               <a:buNone/>
             </a:pPr>
+            <a:r>
+              <a:rPr lang="en-US" sz="1400" dirty="0">
+                <a:solidFill>
+                  <a:srgbClr val="332F2A"/>
+                </a:solidFill>
+                <a:latin typeface="IBM Plex Mono" pitchFamily="34" charset="0"/>
+                <a:ea typeface="IBM Plex Mono" pitchFamily="34" charset="-122"/>
+                <a:cs typeface="IBM Plex Mono" pitchFamily="34" charset="-120"/>
+              </a:rPr>
+              <a:t>  OVERWRITE core/spectrum.py.</a:t>
+            </a:r>
             <a:endParaRPr lang="en-US" sz="1400" dirty="0"/>
           </a:p>
           <a:p>
@@ -12198,7 +12202,7 @@
                 <a:ea typeface="IBM Plex Mono" pitchFamily="34" charset="-122"/>
                 <a:cs typeface="IBM Plex Mono" pitchFamily="34" charset="-120"/>
               </a:rPr>
-              <a:t>   agent edits core/spectrum.py</a:t>
+              <a:t>  Then run pytest and paste</a:t>
             </a:r>
             <a:endParaRPr lang="en-US" sz="1400" dirty="0"/>
           </a:p>
@@ -12218,7 +12222,7 @@
                 <a:ea typeface="IBM Plex Mono" pitchFamily="34" charset="-122"/>
                 <a:cs typeface="IBM Plex Mono" pitchFamily="34" charset="-120"/>
               </a:rPr>
-              <a:t>   you read the diff</a:t>
+              <a:t>  the output verbatim.</a:t>
             </a:r>
             <a:endParaRPr lang="en-US" sz="1400" dirty="0"/>
           </a:p>
@@ -12247,7 +12251,7 @@
                 <a:ea typeface="IBM Plex Mono" pitchFamily="34" charset="-122"/>
                 <a:cs typeface="IBM Plex Mono" pitchFamily="34" charset="-120"/>
               </a:rPr>
-              <a:t>$ pytest tests/test_spectrum.py</a:t>
+              <a:t>-&gt; core/spectrum.py</a:t>
             </a:r>
             <a:endParaRPr lang="en-US" sz="1400" dirty="0"/>
           </a:p>
@@ -12267,7 +12271,7 @@
                 <a:ea typeface="IBM Plex Mono" pitchFamily="34" charset="-122"/>
                 <a:cs typeface="IBM Plex Mono" pitchFamily="34" charset="-120"/>
               </a:rPr>
-              <a:t>7 passed</a:t>
+              <a:t>   $ pytest  -&gt;  7 passed</a:t>
             </a:r>
             <a:endParaRPr lang="en-US" sz="1400" dirty="0"/>
           </a:p>
@@ -12296,7 +12300,27 @@
                 <a:ea typeface="IBM Plex Mono" pitchFamily="34" charset="-122"/>
                 <a:cs typeface="IBM Plex Mono" pitchFamily="34" charset="-120"/>
               </a:rPr>
-              <a:t>$ git add -A &amp;&amp; git commit</a:t>
+              <a:t>   (the only gate with no</a:t>
+            </a:r>
+            <a:endParaRPr lang="en-US" sz="1400" dirty="0"/>
+          </a:p>
+          <a:p>
+            <a:pPr indent="0" marL="0">
+              <a:lnSpc>
+                <a:spcPct val="160000"/>
+              </a:lnSpc>
+              <a:buNone/>
+            </a:pPr>
+            <a:r>
+              <a:rPr lang="en-US" sz="1400" dirty="0">
+                <a:solidFill>
+                  <a:srgbClr val="332F2A"/>
+                </a:solidFill>
+                <a:latin typeface="IBM Plex Mono" pitchFamily="34" charset="0"/>
+                <a:ea typeface="IBM Plex Mono" pitchFamily="34" charset="-122"/>
+                <a:cs typeface="IBM Plex Mono" pitchFamily="34" charset="-120"/>
+              </a:rPr>
+              <a:t>    document of its own)</a:t>
             </a:r>
             <a:endParaRPr lang="en-US" sz="1400" dirty="0"/>
           </a:p>
@@ -12338,7 +12362,7 @@
                 <a:ea typeface="Libre Franklin" pitchFamily="34" charset="-122"/>
                 <a:cs typeface="Libre Franklin" pitchFamily="34" charset="-120"/>
               </a:rPr>
-              <a:t>Two prompts in labs/PROMPTS.md, one per task. The only gate with no document of its own: the agent edits a single file, you run the tests, you read the diff, you commit.</a:t>
+              <a:t>One task, one file, tests run, diff read, commit. Never three tasks at once — when something breaks you want one small change in front of you.</a:t>
             </a:r>
             <a:endParaRPr lang="en-US" sz="1600" dirty="0"/>
           </a:p>
@@ -12380,7 +12404,7 @@
                 <a:ea typeface="Libre Franklin" pitchFamily="34" charset="-122"/>
                 <a:cs typeface="Libre Franklin" pitchFamily="34" charset="-120"/>
               </a:rPr>
-              <a:t>Never let it run three tasks at once. When something breaks you want one small change in front of you, not three.</a:t>
+              <a:t>The gates do not make the agent correct. They make it wrong out loud, early, in a place you are looking.</a:t>
             </a:r>
             <a:endParaRPr lang="en-US" sz="1600" dirty="0"/>
           </a:p>

--- a/slides/Session 1 - Meet Your Agent.pptx
+++ b/slides/Session 1 - Meet Your Agent.pptx
@@ -10356,7 +10356,7 @@
                 <a:ea typeface="IBM Plex Mono" pitchFamily="34" charset="-122"/>
                 <a:cs typeface="IBM Plex Mono" pitchFamily="34" charset="-120"/>
               </a:rPr>
-              <a:t>A PERSON WRITES THIS ONE</a:t>
+              <a:t>&gt;INTENT&lt;  spec  plan  build  ship</a:t>
             </a:r>
             <a:endParaRPr lang="en-US" sz="1400" dirty="0"/>
           </a:p>
@@ -10367,6 +10367,15 @@
               </a:lnSpc>
               <a:buNone/>
             </a:pPr>
+            <a:endParaRPr lang="en-US" sz="1400" dirty="0"/>
+          </a:p>
+          <a:p>
+            <a:pPr indent="0" marL="0">
+              <a:lnSpc>
+                <a:spcPct val="160000"/>
+              </a:lnSpc>
+              <a:buNone/>
+            </a:pPr>
             <a:r>
               <a:rPr lang="en-US" sz="1400" dirty="0">
                 <a:solidFill>
@@ -10376,7 +10385,7 @@
                 <a:ea typeface="IBM Plex Mono" pitchFamily="34" charset="-122"/>
                 <a:cs typeface="IBM Plex Mono" pitchFamily="34" charset="-120"/>
               </a:rPr>
-              <a:t>  Who is this for?</a:t>
+              <a:t>READS   nothing. This one is</a:t>
             </a:r>
             <a:endParaRPr lang="en-US" sz="1400" dirty="0"/>
           </a:p>
@@ -10396,7 +10405,7 @@
                 <a:ea typeface="IBM Plex Mono" pitchFamily="34" charset="-122"/>
                 <a:cs typeface="IBM Plex Mono" pitchFamily="34" charset="-120"/>
               </a:rPr>
-              <a:t>  What problem does it solve?</a:t>
+              <a:t>        yours.</a:t>
             </a:r>
             <a:endParaRPr lang="en-US" sz="1400" dirty="0"/>
           </a:p>
@@ -10407,6 +10416,15 @@
               </a:lnSpc>
               <a:buNone/>
             </a:pPr>
+            <a:endParaRPr lang="en-US" sz="1400" dirty="0"/>
+          </a:p>
+          <a:p>
+            <a:pPr indent="0" marL="0">
+              <a:lnSpc>
+                <a:spcPct val="160000"/>
+              </a:lnSpc>
+              <a:buNone/>
+            </a:pPr>
             <a:r>
               <a:rPr lang="en-US" sz="1400" dirty="0">
                 <a:solidFill>
@@ -10416,7 +10434,7 @@
                 <a:ea typeface="IBM Plex Mono" pitchFamily="34" charset="-122"/>
                 <a:cs typeface="IBM Plex Mono" pitchFamily="34" charset="-120"/>
               </a:rPr>
-              <a:t>  What does “done” look like?</a:t>
+              <a:t>YOU ANSWER</a:t>
             </a:r>
             <a:endParaRPr lang="en-US" sz="1400" dirty="0"/>
           </a:p>
@@ -10436,7 +10454,7 @@
                 <a:ea typeface="IBM Plex Mono" pitchFamily="34" charset="-122"/>
                 <a:cs typeface="IBM Plex Mono" pitchFamily="34" charset="-120"/>
               </a:rPr>
-              <a:t>  What is NOT included?</a:t>
+              <a:t>   Who is this for?</a:t>
             </a:r>
             <a:endParaRPr lang="en-US" sz="1400" dirty="0"/>
           </a:p>
@@ -10447,6 +10465,17 @@
               </a:lnSpc>
               <a:buNone/>
             </a:pPr>
+            <a:r>
+              <a:rPr lang="en-US" sz="1400" dirty="0">
+                <a:solidFill>
+                  <a:srgbClr val="332F2A"/>
+                </a:solidFill>
+                <a:latin typeface="IBM Plex Mono" pitchFamily="34" charset="0"/>
+                <a:ea typeface="IBM Plex Mono" pitchFamily="34" charset="-122"/>
+                <a:cs typeface="IBM Plex Mono" pitchFamily="34" charset="-120"/>
+              </a:rPr>
+              <a:t>   What problem does it solve?</a:t>
+            </a:r>
             <a:endParaRPr lang="en-US" sz="1400" dirty="0"/>
           </a:p>
           <a:p>
@@ -10465,7 +10494,7 @@
                 <a:ea typeface="IBM Plex Mono" pitchFamily="34" charset="-122"/>
                 <a:cs typeface="IBM Plex Mono" pitchFamily="34" charset="-120"/>
               </a:rPr>
-              <a:t>-&gt; aidlc/intent.md</a:t>
+              <a:t>   What does “done” look like?</a:t>
             </a:r>
             <a:endParaRPr lang="en-US" sz="1400" dirty="0"/>
           </a:p>
@@ -10485,7 +10514,7 @@
                 <a:ea typeface="IBM Plex Mono" pitchFamily="34" charset="-122"/>
                 <a:cs typeface="IBM Plex Mono" pitchFamily="34" charset="-120"/>
               </a:rPr>
-              <a:t>   “...if I enter an amplitude</a:t>
+              <a:t>   What is NOT included?</a:t>
             </a:r>
             <a:endParaRPr lang="en-US" sz="1400" dirty="0"/>
           </a:p>
@@ -10496,6 +10525,15 @@
               </a:lnSpc>
               <a:buNone/>
             </a:pPr>
+            <a:endParaRPr lang="en-US" sz="1400" dirty="0"/>
+          </a:p>
+          <a:p>
+            <a:pPr indent="0" marL="0">
+              <a:lnSpc>
+                <a:spcPct val="160000"/>
+              </a:lnSpc>
+              <a:buNone/>
+            </a:pPr>
             <a:r>
               <a:rPr lang="en-US" sz="1400" dirty="0">
                 <a:solidFill>
@@ -10505,7 +10543,7 @@
                 <a:ea typeface="IBM Plex Mono" pitchFamily="34" charset="-122"/>
                 <a:cs typeface="IBM Plex Mono" pitchFamily="34" charset="-120"/>
               </a:rPr>
-              <a:t>    of 1.0, the chart shows 1.0.”</a:t>
+              <a:t>WRITES  aidlc/intent.md</a:t>
             </a:r>
             <a:endParaRPr lang="en-US" sz="1400" dirty="0"/>
           </a:p>
@@ -10520,7 +10558,7 @@
         <p:spPr>
           <a:xfrm>
             <a:off x="7431430" y="1511300"/>
-            <a:ext cx="4201770" cy="1305560"/>
+            <a:ext cx="4201770" cy="1600200"/>
           </a:xfrm>
           <a:prstGeom prst="rect">
             <a:avLst/>
@@ -10547,7 +10585,7 @@
                 <a:ea typeface="Libre Franklin" pitchFamily="34" charset="-122"/>
                 <a:cs typeface="Libre Franklin" pitchFamily="34" charset="-120"/>
               </a:rPr>
-              <a:t>Four questions, answered in your own words. There is no prompt for this one — an agent cannot tell you who your app is for.</a:t>
+              <a:t>The first box on the diagram, and the only one an agent cannot do for you. It has no prompt because nobody can tell you who your app is for.</a:t>
             </a:r>
             <a:endParaRPr lang="en-US" sz="1600" dirty="0"/>
           </a:p>
@@ -10561,8 +10599,8 @@
         </p:nvSpPr>
         <p:spPr>
           <a:xfrm>
-            <a:off x="7431430" y="2943860"/>
-            <a:ext cx="4201770" cy="1600200"/>
+            <a:off x="7431430" y="3238500"/>
+            <a:ext cx="4201770" cy="1305560"/>
           </a:xfrm>
           <a:prstGeom prst="rect">
             <a:avLst/>
@@ -10589,7 +10627,7 @@
                 <a:ea typeface="Libre Franklin" pitchFamily="34" charset="-122"/>
                 <a:cs typeface="Libre Franklin" pitchFamily="34" charset="-120"/>
               </a:rPr>
-              <a:t>The fourth question is the one that earns its place. Nothing told the Round 1 agent where to stop, so it invented scope; this is where you stop it.</a:t>
+              <a:t>The fourth question is the one that earns its keep. Nothing told the Round 1 agent where to stop, so it invented scope.</a:t>
             </a:r>
             <a:endParaRPr lang="en-US" sz="1600" dirty="0"/>
           </a:p>
@@ -10938,7 +10976,7 @@
                 <a:ea typeface="IBM Plex Mono" pitchFamily="34" charset="-122"/>
                 <a:cs typeface="IBM Plex Mono" pitchFamily="34" charset="-120"/>
               </a:rPr>
-              <a:t>PROMPT</a:t>
+              <a:t>intent  &gt;SPEC&lt;  plan  build  ship</a:t>
             </a:r>
             <a:endParaRPr lang="en-US" sz="1400" dirty="0"/>
           </a:p>
@@ -10949,6 +10987,15 @@
               </a:lnSpc>
               <a:buNone/>
             </a:pPr>
+            <a:endParaRPr lang="en-US" sz="1400" dirty="0"/>
+          </a:p>
+          <a:p>
+            <a:pPr indent="0" marL="0">
+              <a:lnSpc>
+                <a:spcPct val="160000"/>
+              </a:lnSpc>
+              <a:buNone/>
+            </a:pPr>
             <a:r>
               <a:rPr lang="en-US" sz="1400" dirty="0">
                 <a:solidFill>
@@ -10958,7 +11005,7 @@
                 <a:ea typeface="IBM Plex Mono" pitchFamily="34" charset="-122"/>
                 <a:cs typeface="IBM Plex Mono" pitchFamily="34" charset="-120"/>
               </a:rPr>
-              <a:t>  Read tests/test_spectrum.py.</a:t>
+              <a:t>READS   aidlc/intent.md</a:t>
             </a:r>
             <a:endParaRPr lang="en-US" sz="1400" dirty="0"/>
           </a:p>
@@ -10978,7 +11025,7 @@
                 <a:ea typeface="IBM Plex Mono" pitchFamily="34" charset="-122"/>
                 <a:cs typeface="IBM Plex Mono" pitchFamily="34" charset="-120"/>
               </a:rPr>
-              <a:t>  WRITE aidlc/requirements.md:</a:t>
+              <a:t>        tests/test_spectrum.py</a:t>
             </a:r>
             <a:endParaRPr lang="en-US" sz="1400" dirty="0"/>
           </a:p>
@@ -10989,6 +11036,15 @@
               </a:lnSpc>
               <a:buNone/>
             </a:pPr>
+            <a:endParaRPr lang="en-US" sz="1400" dirty="0"/>
+          </a:p>
+          <a:p>
+            <a:pPr indent="0" marL="0">
+              <a:lnSpc>
+                <a:spcPct val="160000"/>
+              </a:lnSpc>
+              <a:buNone/>
+            </a:pPr>
             <a:r>
               <a:rPr lang="en-US" sz="1400" dirty="0">
                 <a:solidFill>
@@ -10998,7 +11054,7 @@
                 <a:ea typeface="IBM Plex Mono" pitchFamily="34" charset="-122"/>
                 <a:cs typeface="IBM Plex Mono" pitchFamily="34" charset="-120"/>
               </a:rPr>
-              <a:t>  a numbered table, each row</a:t>
+              <a:t>PROMPT  “intent.md says what we</a:t>
             </a:r>
             <a:endParaRPr lang="en-US" sz="1400" dirty="0"/>
           </a:p>
@@ -11018,7 +11074,7 @@
                 <a:ea typeface="IBM Plex Mono" pitchFamily="34" charset="-122"/>
                 <a:cs typeface="IBM Plex Mono" pitchFamily="34" charset="-120"/>
               </a:rPr>
-              <a:t>  carrying a check that can</a:t>
+              <a:t>        are building. Read the</a:t>
             </a:r>
             <a:endParaRPr lang="en-US" sz="1400" dirty="0"/>
           </a:p>
@@ -11038,7 +11094,7 @@
                 <a:ea typeface="IBM Plex Mono" pitchFamily="34" charset="-122"/>
                 <a:cs typeface="IBM Plex Mono" pitchFamily="34" charset="-120"/>
               </a:rPr>
-              <a:t>  be run.</a:t>
+              <a:t>        tests. WRITE a table,</a:t>
             </a:r>
             <a:endParaRPr lang="en-US" sz="1400" dirty="0"/>
           </a:p>
@@ -11049,6 +11105,17 @@
               </a:lnSpc>
               <a:buNone/>
             </a:pPr>
+            <a:r>
+              <a:rPr lang="en-US" sz="1400" dirty="0">
+                <a:solidFill>
+                  <a:srgbClr val="332F2A"/>
+                </a:solidFill>
+                <a:latin typeface="IBM Plex Mono" pitchFamily="34" charset="0"/>
+                <a:ea typeface="IBM Plex Mono" pitchFamily="34" charset="-122"/>
+                <a:cs typeface="IBM Plex Mono" pitchFamily="34" charset="-120"/>
+              </a:rPr>
+              <a:t>        each row with a check</a:t>
+            </a:r>
             <a:endParaRPr lang="en-US" sz="1400" dirty="0"/>
           </a:p>
           <a:p>
@@ -11067,7 +11134,7 @@
                 <a:ea typeface="IBM Plex Mono" pitchFamily="34" charset="-122"/>
                 <a:cs typeface="IBM Plex Mono" pitchFamily="34" charset="-120"/>
               </a:rPr>
-              <a:t>-&gt; aidlc/requirements.md</a:t>
+              <a:t>        that can be run.”</a:t>
             </a:r>
             <a:endParaRPr lang="en-US" sz="1400" dirty="0"/>
           </a:p>
@@ -11078,6 +11145,15 @@
               </a:lnSpc>
               <a:buNone/>
             </a:pPr>
+            <a:endParaRPr lang="en-US" sz="1400" dirty="0"/>
+          </a:p>
+          <a:p>
+            <a:pPr indent="0" marL="0">
+              <a:lnSpc>
+                <a:spcPct val="160000"/>
+              </a:lnSpc>
+              <a:buNone/>
+            </a:pPr>
             <a:r>
               <a:rPr lang="en-US" sz="1400" dirty="0">
                 <a:solidFill>
@@ -11087,50 +11163,10 @@
                 <a:ea typeface="IBM Plex Mono" pitchFamily="34" charset="-122"/>
                 <a:cs typeface="IBM Plex Mono" pitchFamily="34" charset="-120"/>
               </a:rPr>
-              <a:t>   | 2 | a tone entered at</a:t>
+              <a:t>WRITES  aidlc/requirements.md</a:t>
             </a:r>
             <a:endParaRPr lang="en-US" sz="1400" dirty="0"/>
           </a:p>
-          <a:p>
-            <a:pPr indent="0" marL="0">
-              <a:lnSpc>
-                <a:spcPct val="160000"/>
-              </a:lnSpc>
-              <a:buNone/>
-            </a:pPr>
-            <a:r>
-              <a:rPr lang="en-US" sz="1400" dirty="0">
-                <a:solidFill>
-                  <a:srgbClr val="332F2A"/>
-                </a:solidFill>
-                <a:latin typeface="IBM Plex Mono" pitchFamily="34" charset="0"/>
-                <a:ea typeface="IBM Plex Mono" pitchFamily="34" charset="-122"/>
-                <a:cs typeface="IBM Plex Mono" pitchFamily="34" charset="-120"/>
-              </a:rPr>
-              <a:t>        amplitude 1.0 reads</a:t>
-            </a:r>
-            <a:endParaRPr lang="en-US" sz="1400" dirty="0"/>
-          </a:p>
-          <a:p>
-            <a:pPr indent="0" marL="0">
-              <a:lnSpc>
-                <a:spcPct val="160000"/>
-              </a:lnSpc>
-              <a:buNone/>
-            </a:pPr>
-            <a:r>
-              <a:rPr lang="en-US" sz="1400" dirty="0">
-                <a:solidFill>
-                  <a:srgbClr val="332F2A"/>
-                </a:solidFill>
-                <a:latin typeface="IBM Plex Mono" pitchFamily="34" charset="0"/>
-                <a:ea typeface="IBM Plex Mono" pitchFamily="34" charset="-122"/>
-                <a:cs typeface="IBM Plex Mono" pitchFamily="34" charset="-120"/>
-              </a:rPr>
-              <a:t>        back as 1.0 |</a:t>
-            </a:r>
-            <a:endParaRPr lang="en-US" sz="1400" dirty="0"/>
-          </a:p>
         </p:txBody>
       </p:sp>
       <p:sp>
@@ -11142,7 +11178,7 @@
         <p:spPr>
           <a:xfrm>
             <a:off x="7431430" y="1511300"/>
-            <a:ext cx="4201770" cy="1305560"/>
+            <a:ext cx="4201770" cy="1600200"/>
           </a:xfrm>
           <a:prstGeom prst="rect">
             <a:avLst/>
@@ -11169,7 +11205,7 @@
                 <a:ea typeface="Libre Franklin" pitchFamily="34" charset="-122"/>
                 <a:cs typeface="Libre Franklin" pitchFamily="34" charset="-120"/>
               </a:rPr>
-              <a:t>The agent drafts; a person reads every line. It is far better at the left column than at the check beside it.</a:t>
+              <a:t>Notice what it reads: the intent YOU wrote at Gate 1, plus the tests. Each gate consumes what the last one produced — that chain is the whole method.</a:t>
             </a:r>
             <a:endParaRPr lang="en-US" sz="1600" dirty="0"/>
           </a:p>
@@ -11183,8 +11219,8 @@
         </p:nvSpPr>
         <p:spPr>
           <a:xfrm>
-            <a:off x="7431430" y="2943860"/>
-            <a:ext cx="4201770" cy="1600200"/>
+            <a:off x="7431430" y="3238500"/>
+            <a:ext cx="4201770" cy="1305560"/>
           </a:xfrm>
           <a:prstGeom prst="rect">
             <a:avLst/>
@@ -11211,7 +11247,7 @@
                 <a:ea typeface="Libre Franklin" pitchFamily="34" charset="-122"/>
                 <a:cs typeface="Libre Franklin" pitchFamily="34" charset="-120"/>
               </a:rPr>
-              <a:t>Row 2 is the whole lab. The failure Round 1 could not see is now a numbered line in a document — written down before any code exists to get it wrong.</a:t>
+              <a:t>The agent drafts; a person reads every line. It is far better at the left column than at the check beside it.</a:t>
             </a:r>
             <a:endParaRPr lang="en-US" sz="1600" dirty="0"/>
           </a:p>
@@ -11560,7 +11596,7 @@
                 <a:ea typeface="IBM Plex Mono" pitchFamily="34" charset="-122"/>
                 <a:cs typeface="IBM Plex Mono" pitchFamily="34" charset="-120"/>
               </a:rPr>
-              <a:t>PROMPT</a:t>
+              <a:t>intent  spec  &gt;PLAN&lt;  build  ship</a:t>
             </a:r>
             <a:endParaRPr lang="en-US" sz="1400" dirty="0"/>
           </a:p>
@@ -11571,6 +11607,15 @@
               </a:lnSpc>
               <a:buNone/>
             </a:pPr>
+            <a:endParaRPr lang="en-US" sz="1400" dirty="0"/>
+          </a:p>
+          <a:p>
+            <a:pPr indent="0" marL="0">
+              <a:lnSpc>
+                <a:spcPct val="160000"/>
+              </a:lnSpc>
+              <a:buNone/>
+            </a:pPr>
             <a:r>
               <a:rPr lang="en-US" sz="1400" dirty="0">
                 <a:solidFill>
@@ -11580,7 +11625,7 @@
                 <a:ea typeface="IBM Plex Mono" pitchFamily="34" charset="-122"/>
                 <a:cs typeface="IBM Plex Mono" pitchFamily="34" charset="-120"/>
               </a:rPr>
-              <a:t>  requirements.md is approved.</a:t>
+              <a:t>READS   aidlc/requirements.md</a:t>
             </a:r>
             <a:endParaRPr lang="en-US" sz="1400" dirty="0"/>
           </a:p>
@@ -11591,6 +11636,15 @@
               </a:lnSpc>
               <a:buNone/>
             </a:pPr>
+            <a:endParaRPr lang="en-US" sz="1400" dirty="0"/>
+          </a:p>
+          <a:p>
+            <a:pPr indent="0" marL="0">
+              <a:lnSpc>
+                <a:spcPct val="160000"/>
+              </a:lnSpc>
+              <a:buNone/>
+            </a:pPr>
             <a:r>
               <a:rPr lang="en-US" sz="1400" dirty="0">
                 <a:solidFill>
@@ -11600,7 +11654,7 @@
                 <a:ea typeface="IBM Plex Mono" pitchFamily="34" charset="-122"/>
                 <a:cs typeface="IBM Plex Mono" pitchFamily="34" charset="-120"/>
               </a:rPr>
-              <a:t>  WRITE design.md and tasks.md.</a:t>
+              <a:t>PROMPT  “requirements.md is</a:t>
             </a:r>
             <a:endParaRPr lang="en-US" sz="1400" dirty="0"/>
           </a:p>
@@ -11620,7 +11674,7 @@
                 <a:ea typeface="IBM Plex Mono" pitchFamily="34" charset="-122"/>
                 <a:cs typeface="IBM Plex Mono" pitchFamily="34" charset="-120"/>
               </a:rPr>
-              <a:t>  Exactly two tasks. One owner,</a:t>
+              <a:t>        approved. Read it. WRITE</a:t>
             </a:r>
             <a:endParaRPr lang="en-US" sz="1400" dirty="0"/>
           </a:p>
@@ -11640,7 +11694,7 @@
                 <a:ea typeface="IBM Plex Mono" pitchFamily="34" charset="-122"/>
                 <a:cs typeface="IBM Plex Mono" pitchFamily="34" charset="-120"/>
               </a:rPr>
-              <a:t>  one file per row.</a:t>
+              <a:t>        design.md and tasks.md.</a:t>
             </a:r>
             <a:endParaRPr lang="en-US" sz="1400" dirty="0"/>
           </a:p>
@@ -11651,6 +11705,17 @@
               </a:lnSpc>
               <a:buNone/>
             </a:pPr>
+            <a:r>
+              <a:rPr lang="en-US" sz="1400" dirty="0">
+                <a:solidFill>
+                  <a:srgbClr val="332F2A"/>
+                </a:solidFill>
+                <a:latin typeface="IBM Plex Mono" pitchFamily="34" charset="0"/>
+                <a:ea typeface="IBM Plex Mono" pitchFamily="34" charset="-122"/>
+                <a:cs typeface="IBM Plex Mono" pitchFamily="34" charset="-120"/>
+              </a:rPr>
+              <a:t>        Exactly two tasks. One</a:t>
+            </a:r>
             <a:endParaRPr lang="en-US" sz="1400" dirty="0"/>
           </a:p>
           <a:p>
@@ -11669,7 +11734,7 @@
                 <a:ea typeface="IBM Plex Mono" pitchFamily="34" charset="-122"/>
                 <a:cs typeface="IBM Plex Mono" pitchFamily="34" charset="-120"/>
               </a:rPr>
-              <a:t>-&gt; aidlc/tasks.md</a:t>
+              <a:t>        owner, one file per row.”</a:t>
             </a:r>
             <a:endParaRPr lang="en-US" sz="1400" dirty="0"/>
           </a:p>
@@ -11680,6 +11745,15 @@
               </a:lnSpc>
               <a:buNone/>
             </a:pPr>
+            <a:endParaRPr lang="en-US" sz="1400" dirty="0"/>
+          </a:p>
+          <a:p>
+            <a:pPr indent="0" marL="0">
+              <a:lnSpc>
+                <a:spcPct val="160000"/>
+              </a:lnSpc>
+              <a:buNone/>
+            </a:pPr>
             <a:r>
               <a:rPr lang="en-US" sz="1400" dirty="0">
                 <a:solidFill>
@@ -11689,7 +11763,7 @@
                 <a:ea typeface="IBM Plex Mono" pitchFamily="34" charset="-122"/>
                 <a:cs typeface="IBM Plex Mono" pitchFamily="34" charset="-120"/>
               </a:rPr>
-              <a:t>   | 1 | core/spectrum.py |</a:t>
+              <a:t>WRITES  aidlc/design.md</a:t>
             </a:r>
             <a:endParaRPr lang="en-US" sz="1400" dirty="0"/>
           </a:p>
@@ -11709,7 +11783,7 @@
                 <a:ea typeface="IBM Plex Mono" pitchFamily="34" charset="-122"/>
                 <a:cs typeface="IBM Plex Mono" pitchFamily="34" charset="-120"/>
               </a:rPr>
-              <a:t>   | 2 | pages/2_Spectrum... |</a:t>
+              <a:t>        aidlc/tasks.md</a:t>
             </a:r>
             <a:endParaRPr lang="en-US" sz="1400" dirty="0"/>
           </a:p>
@@ -11751,7 +11825,7 @@
                 <a:ea typeface="Libre Franklin" pitchFamily="34" charset="-122"/>
                 <a:cs typeface="Libre Franklin" pitchFamily="34" charset="-120"/>
               </a:rPr>
-              <a:t>Design, plus a task list where every task names the ONE file it may touch. Working alone that looks like bookkeeping.</a:t>
+              <a:t>It reads the spec you just approved, and nothing else. Approve a plan here, not code — no code exists yet.</a:t>
             </a:r>
             <a:endParaRPr lang="en-US" sz="1600" dirty="0"/>
           </a:p>
@@ -11766,7 +11840,7 @@
         <p:spPr>
           <a:xfrm>
             <a:off x="7431430" y="2943860"/>
-            <a:ext cx="4201770" cy="1305560"/>
+            <a:ext cx="4201770" cy="1600200"/>
           </a:xfrm>
           <a:prstGeom prst="rect">
             <a:avLst/>
@@ -11793,7 +11867,7 @@
                 <a:ea typeface="Libre Franklin" pitchFamily="34" charset="-122"/>
                 <a:cs typeface="Libre Franklin" pitchFamily="34" charset="-120"/>
               </a:rPr>
-              <a:t>In Session 2 it is the whole trick: four people build at once, never touch the same file, and there is nothing to merge.</a:t>
+              <a:t>Every task names the ONE file it may touch. Alone that is bookkeeping; in Session 2 it is what lets four people build at once with nothing to merge.</a:t>
             </a:r>
             <a:endParaRPr lang="en-US" sz="1600" dirty="0"/>
           </a:p>
@@ -11855,7 +11929,7 @@
                 <a:ea typeface="Libre Franklin" pitchFamily="34" charset="-122"/>
                 <a:cs typeface="Libre Franklin" pitchFamily="34" charset="-120"/>
               </a:rPr>
-              <a:t>You are approving a plan, not code. No code exists yet.</a:t>
+              <a:t>One task, one owner, one file.</a:t>
             </a:r>
             <a:endParaRPr lang="en-US" sz="1500" dirty="0"/>
           </a:p>
@@ -12142,7 +12216,7 @@
                 <a:ea typeface="IBM Plex Mono" pitchFamily="34" charset="-122"/>
                 <a:cs typeface="IBM Plex Mono" pitchFamily="34" charset="-120"/>
               </a:rPr>
-              <a:t>PROMPT</a:t>
+              <a:t>intent  spec  plan  &gt;BUILD&lt;  ship</a:t>
             </a:r>
             <a:endParaRPr lang="en-US" sz="1400" dirty="0"/>
           </a:p>
@@ -12153,6 +12227,15 @@
               </a:lnSpc>
               <a:buNone/>
             </a:pPr>
+            <a:endParaRPr lang="en-US" sz="1400" dirty="0"/>
+          </a:p>
+          <a:p>
+            <a:pPr indent="0" marL="0">
+              <a:lnSpc>
+                <a:spcPct val="160000"/>
+              </a:lnSpc>
+              <a:buNone/>
+            </a:pPr>
             <a:r>
               <a:rPr lang="en-US" sz="1400" dirty="0">
                 <a:solidFill>
@@ -12162,7 +12245,7 @@
                 <a:ea typeface="IBM Plex Mono" pitchFamily="34" charset="-122"/>
                 <a:cs typeface="IBM Plex Mono" pitchFamily="34" charset="-120"/>
               </a:rPr>
-              <a:t>  Implement task 1 only.</a:t>
+              <a:t>READS   aidlc/design.md</a:t>
             </a:r>
             <a:endParaRPr lang="en-US" sz="1400" dirty="0"/>
           </a:p>
@@ -12182,7 +12265,7 @@
                 <a:ea typeface="IBM Plex Mono" pitchFamily="34" charset="-122"/>
                 <a:cs typeface="IBM Plex Mono" pitchFamily="34" charset="-120"/>
               </a:rPr>
-              <a:t>  OVERWRITE core/spectrum.py.</a:t>
+              <a:t>        aidlc/tasks.md</a:t>
             </a:r>
             <a:endParaRPr lang="en-US" sz="1400" dirty="0"/>
           </a:p>
@@ -12193,6 +12276,15 @@
               </a:lnSpc>
               <a:buNone/>
             </a:pPr>
+            <a:endParaRPr lang="en-US" sz="1400" dirty="0"/>
+          </a:p>
+          <a:p>
+            <a:pPr indent="0" marL="0">
+              <a:lnSpc>
+                <a:spcPct val="160000"/>
+              </a:lnSpc>
+              <a:buNone/>
+            </a:pPr>
             <a:r>
               <a:rPr lang="en-US" sz="1400" dirty="0">
                 <a:solidFill>
@@ -12202,7 +12294,7 @@
                 <a:ea typeface="IBM Plex Mono" pitchFamily="34" charset="-122"/>
                 <a:cs typeface="IBM Plex Mono" pitchFamily="34" charset="-120"/>
               </a:rPr>
-              <a:t>  Then run pytest and paste</a:t>
+              <a:t>PROMPT  “design.md and tasks.md</a:t>
             </a:r>
             <a:endParaRPr lang="en-US" sz="1400" dirty="0"/>
           </a:p>
@@ -12222,7 +12314,7 @@
                 <a:ea typeface="IBM Plex Mono" pitchFamily="34" charset="-122"/>
                 <a:cs typeface="IBM Plex Mono" pitchFamily="34" charset="-120"/>
               </a:rPr>
-              <a:t>  the output verbatim.</a:t>
+              <a:t>        are approved. Implement</a:t>
             </a:r>
             <a:endParaRPr lang="en-US" sz="1400" dirty="0"/>
           </a:p>
@@ -12233,6 +12325,17 @@
               </a:lnSpc>
               <a:buNone/>
             </a:pPr>
+            <a:r>
+              <a:rPr lang="en-US" sz="1400" dirty="0">
+                <a:solidFill>
+                  <a:srgbClr val="332F2A"/>
+                </a:solidFill>
+                <a:latin typeface="IBM Plex Mono" pitchFamily="34" charset="0"/>
+                <a:ea typeface="IBM Plex Mono" pitchFamily="34" charset="-122"/>
+                <a:cs typeface="IBM Plex Mono" pitchFamily="34" charset="-120"/>
+              </a:rPr>
+              <a:t>        task 1 only. OVERWRITE</a:t>
+            </a:r>
             <a:endParaRPr lang="en-US" sz="1400" dirty="0"/>
           </a:p>
           <a:p>
@@ -12251,7 +12354,7 @@
                 <a:ea typeface="IBM Plex Mono" pitchFamily="34" charset="-122"/>
                 <a:cs typeface="IBM Plex Mono" pitchFamily="34" charset="-120"/>
               </a:rPr>
-              <a:t>-&gt; core/spectrum.py</a:t>
+              <a:t>        core/spectrum.py.”</a:t>
             </a:r>
             <a:endParaRPr lang="en-US" sz="1400" dirty="0"/>
           </a:p>
@@ -12262,6 +12365,15 @@
               </a:lnSpc>
               <a:buNone/>
             </a:pPr>
+            <a:endParaRPr lang="en-US" sz="1400" dirty="0"/>
+          </a:p>
+          <a:p>
+            <a:pPr indent="0" marL="0">
+              <a:lnSpc>
+                <a:spcPct val="160000"/>
+              </a:lnSpc>
+              <a:buNone/>
+            </a:pPr>
             <a:r>
               <a:rPr lang="en-US" sz="1400" dirty="0">
                 <a:solidFill>
@@ -12271,7 +12383,7 @@
                 <a:ea typeface="IBM Plex Mono" pitchFamily="34" charset="-122"/>
                 <a:cs typeface="IBM Plex Mono" pitchFamily="34" charset="-120"/>
               </a:rPr>
-              <a:t>   $ pytest  -&gt;  7 passed</a:t>
+              <a:t>WRITES  core/spectrum.py</a:t>
             </a:r>
             <a:endParaRPr lang="en-US" sz="1400" dirty="0"/>
           </a:p>
@@ -12282,15 +12394,6 @@
               </a:lnSpc>
               <a:buNone/>
             </a:pPr>
-            <a:endParaRPr lang="en-US" sz="1400" dirty="0"/>
-          </a:p>
-          <a:p>
-            <a:pPr indent="0" marL="0">
-              <a:lnSpc>
-                <a:spcPct val="160000"/>
-              </a:lnSpc>
-              <a:buNone/>
-            </a:pPr>
             <a:r>
               <a:rPr lang="en-US" sz="1400" dirty="0">
                 <a:solidFill>
@@ -12300,27 +12403,7 @@
                 <a:ea typeface="IBM Plex Mono" pitchFamily="34" charset="-122"/>
                 <a:cs typeface="IBM Plex Mono" pitchFamily="34" charset="-120"/>
               </a:rPr>
-              <a:t>   (the only gate with no</a:t>
-            </a:r>
-            <a:endParaRPr lang="en-US" sz="1400" dirty="0"/>
-          </a:p>
-          <a:p>
-            <a:pPr indent="0" marL="0">
-              <a:lnSpc>
-                <a:spcPct val="160000"/>
-              </a:lnSpc>
-              <a:buNone/>
-            </a:pPr>
-            <a:r>
-              <a:rPr lang="en-US" sz="1400" dirty="0">
-                <a:solidFill>
-                  <a:srgbClr val="332F2A"/>
-                </a:solidFill>
-                <a:latin typeface="IBM Plex Mono" pitchFamily="34" charset="0"/>
-                <a:ea typeface="IBM Plex Mono" pitchFamily="34" charset="-122"/>
-                <a:cs typeface="IBM Plex Mono" pitchFamily="34" charset="-120"/>
-              </a:rPr>
-              <a:t>    document of its own)</a:t>
+              <a:t>        $ pytest -&gt; 7 passed</a:t>
             </a:r>
             <a:endParaRPr lang="en-US" sz="1400" dirty="0"/>
           </a:p>
@@ -12362,7 +12445,7 @@
                 <a:ea typeface="Libre Franklin" pitchFamily="34" charset="-122"/>
                 <a:cs typeface="Libre Franklin" pitchFamily="34" charset="-120"/>
               </a:rPr>
-              <a:t>One task, one file, tests run, diff read, commit. Never three tasks at once — when something breaks you want one small change in front of you.</a:t>
+              <a:t>The only box that produces code instead of a document, and it still reads the two documents before it. One task, one file, tests run, diff read, commit.</a:t>
             </a:r>
             <a:endParaRPr lang="en-US" sz="1600" dirty="0"/>
           </a:p>

--- a/slides/Session 1 - Meet Your Agent.pptx
+++ b/slides/Session 1 - Meet Your Agent.pptx
@@ -10348,6 +10348,23 @@
               <a:buNone/>
             </a:pPr>
             <a:r>
+              <a:rPr lang="en-US" sz="1400" b="1" dirty="0">
+                <a:solidFill>
+                  <a:srgbClr val="332F2A"/>
+                </a:solidFill>
+                <a:latin typeface="IBM Plex Mono" pitchFamily="34" charset="0"/>
+                <a:ea typeface="IBM Plex Mono" pitchFamily="34" charset="-122"/>
+                <a:cs typeface="IBM Plex Mono" pitchFamily="34" charset="-120"/>
+              </a:rPr>
+              <a:t>&gt;INTENT&lt;</a:t>
+            </a:r>
+            <a:pPr indent="0" marL="0">
+              <a:lnSpc>
+                <a:spcPct val="160000"/>
+              </a:lnSpc>
+              <a:buNone/>
+            </a:pPr>
+            <a:r>
               <a:rPr lang="en-US" sz="1400" dirty="0">
                 <a:solidFill>
                   <a:srgbClr val="332F2A"/>
@@ -10356,7 +10373,7 @@
                 <a:ea typeface="IBM Plex Mono" pitchFamily="34" charset="-122"/>
                 <a:cs typeface="IBM Plex Mono" pitchFamily="34" charset="-120"/>
               </a:rPr>
-              <a:t>&gt;INTENT&lt;  spec  plan  build  ship</a:t>
+              <a:t>  spec  plan  build  ship</a:t>
             </a:r>
             <a:endParaRPr lang="en-US" sz="1400" dirty="0"/>
           </a:p>
@@ -10377,6 +10394,23 @@
               <a:buNone/>
             </a:pPr>
             <a:r>
+              <a:rPr lang="en-US" sz="1400" b="1" dirty="0">
+                <a:solidFill>
+                  <a:srgbClr val="332F2A"/>
+                </a:solidFill>
+                <a:latin typeface="IBM Plex Mono" pitchFamily="34" charset="0"/>
+                <a:ea typeface="IBM Plex Mono" pitchFamily="34" charset="-122"/>
+                <a:cs typeface="IBM Plex Mono" pitchFamily="34" charset="-120"/>
+              </a:rPr>
+              <a:t>READS</a:t>
+            </a:r>
+            <a:pPr indent="0" marL="0">
+              <a:lnSpc>
+                <a:spcPct val="160000"/>
+              </a:lnSpc>
+              <a:buNone/>
+            </a:pPr>
+            <a:r>
               <a:rPr lang="en-US" sz="1400" dirty="0">
                 <a:solidFill>
                   <a:srgbClr val="332F2A"/>
@@ -10385,7 +10419,7 @@
                 <a:ea typeface="IBM Plex Mono" pitchFamily="34" charset="-122"/>
                 <a:cs typeface="IBM Plex Mono" pitchFamily="34" charset="-120"/>
               </a:rPr>
-              <a:t>READS   nothing. This one is</a:t>
+              <a:t>   nothing. This one is</a:t>
             </a:r>
             <a:endParaRPr lang="en-US" sz="1400" dirty="0"/>
           </a:p>
@@ -10426,6 +10460,26 @@
               <a:buNone/>
             </a:pPr>
             <a:r>
+              <a:rPr lang="en-US" sz="1400" b="1" dirty="0">
+                <a:solidFill>
+                  <a:srgbClr val="332F2A"/>
+                </a:solidFill>
+                <a:latin typeface="IBM Plex Mono" pitchFamily="34" charset="0"/>
+                <a:ea typeface="IBM Plex Mono" pitchFamily="34" charset="-122"/>
+                <a:cs typeface="IBM Plex Mono" pitchFamily="34" charset="-120"/>
+              </a:rPr>
+              <a:t>YOU ANSWER</a:t>
+            </a:r>
+            <a:endParaRPr lang="en-US" sz="1400" dirty="0"/>
+          </a:p>
+          <a:p>
+            <a:pPr indent="0" marL="0">
+              <a:lnSpc>
+                <a:spcPct val="160000"/>
+              </a:lnSpc>
+              <a:buNone/>
+            </a:pPr>
+            <a:r>
               <a:rPr lang="en-US" sz="1400" dirty="0">
                 <a:solidFill>
                   <a:srgbClr val="332F2A"/>
@@ -10434,7 +10488,7 @@
                 <a:ea typeface="IBM Plex Mono" pitchFamily="34" charset="-122"/>
                 <a:cs typeface="IBM Plex Mono" pitchFamily="34" charset="-120"/>
               </a:rPr>
-              <a:t>YOU ANSWER</a:t>
+              <a:t>   Who is this for?</a:t>
             </a:r>
             <a:endParaRPr lang="en-US" sz="1400" dirty="0"/>
           </a:p>
@@ -10454,7 +10508,7 @@
                 <a:ea typeface="IBM Plex Mono" pitchFamily="34" charset="-122"/>
                 <a:cs typeface="IBM Plex Mono" pitchFamily="34" charset="-120"/>
               </a:rPr>
-              <a:t>   Who is this for?</a:t>
+              <a:t>   What problem does it solve?</a:t>
             </a:r>
             <a:endParaRPr lang="en-US" sz="1400" dirty="0"/>
           </a:p>
@@ -10474,7 +10528,7 @@
                 <a:ea typeface="IBM Plex Mono" pitchFamily="34" charset="-122"/>
                 <a:cs typeface="IBM Plex Mono" pitchFamily="34" charset="-120"/>
               </a:rPr>
-              <a:t>   What problem does it solve?</a:t>
+              <a:t>   What does “done” look like?</a:t>
             </a:r>
             <a:endParaRPr lang="en-US" sz="1400" dirty="0"/>
           </a:p>
@@ -10494,7 +10548,7 @@
                 <a:ea typeface="IBM Plex Mono" pitchFamily="34" charset="-122"/>
                 <a:cs typeface="IBM Plex Mono" pitchFamily="34" charset="-120"/>
               </a:rPr>
-              <a:t>   What does “done” look like?</a:t>
+              <a:t>   What is NOT included?</a:t>
             </a:r>
             <a:endParaRPr lang="en-US" sz="1400" dirty="0"/>
           </a:p>
@@ -10505,6 +10559,32 @@
               </a:lnSpc>
               <a:buNone/>
             </a:pPr>
+            <a:endParaRPr lang="en-US" sz="1400" dirty="0"/>
+          </a:p>
+          <a:p>
+            <a:pPr indent="0" marL="0">
+              <a:lnSpc>
+                <a:spcPct val="160000"/>
+              </a:lnSpc>
+              <a:buNone/>
+            </a:pPr>
+            <a:r>
+              <a:rPr lang="en-US" sz="1400" b="1" dirty="0">
+                <a:solidFill>
+                  <a:srgbClr val="332F2A"/>
+                </a:solidFill>
+                <a:latin typeface="IBM Plex Mono" pitchFamily="34" charset="0"/>
+                <a:ea typeface="IBM Plex Mono" pitchFamily="34" charset="-122"/>
+                <a:cs typeface="IBM Plex Mono" pitchFamily="34" charset="-120"/>
+              </a:rPr>
+              <a:t>WRITES</a:t>
+            </a:r>
+            <a:pPr indent="0" marL="0">
+              <a:lnSpc>
+                <a:spcPct val="160000"/>
+              </a:lnSpc>
+              <a:buNone/>
+            </a:pPr>
             <a:r>
               <a:rPr lang="en-US" sz="1400" dirty="0">
                 <a:solidFill>
@@ -10514,36 +10594,7 @@
                 <a:ea typeface="IBM Plex Mono" pitchFamily="34" charset="-122"/>
                 <a:cs typeface="IBM Plex Mono" pitchFamily="34" charset="-120"/>
               </a:rPr>
-              <a:t>   What is NOT included?</a:t>
-            </a:r>
-            <a:endParaRPr lang="en-US" sz="1400" dirty="0"/>
-          </a:p>
-          <a:p>
-            <a:pPr indent="0" marL="0">
-              <a:lnSpc>
-                <a:spcPct val="160000"/>
-              </a:lnSpc>
-              <a:buNone/>
-            </a:pPr>
-            <a:endParaRPr lang="en-US" sz="1400" dirty="0"/>
-          </a:p>
-          <a:p>
-            <a:pPr indent="0" marL="0">
-              <a:lnSpc>
-                <a:spcPct val="160000"/>
-              </a:lnSpc>
-              <a:buNone/>
-            </a:pPr>
-            <a:r>
-              <a:rPr lang="en-US" sz="1400" dirty="0">
-                <a:solidFill>
-                  <a:srgbClr val="332F2A"/>
-                </a:solidFill>
-                <a:latin typeface="IBM Plex Mono" pitchFamily="34" charset="0"/>
-                <a:ea typeface="IBM Plex Mono" pitchFamily="34" charset="-122"/>
-                <a:cs typeface="IBM Plex Mono" pitchFamily="34" charset="-120"/>
-              </a:rPr>
-              <a:t>WRITES  aidlc/intent.md</a:t>
+              <a:t>  aidlc/intent.md</a:t>
             </a:r>
             <a:endParaRPr lang="en-US" sz="1400" dirty="0"/>
           </a:p>
@@ -10976,7 +11027,41 @@
                 <a:ea typeface="IBM Plex Mono" pitchFamily="34" charset="-122"/>
                 <a:cs typeface="IBM Plex Mono" pitchFamily="34" charset="-120"/>
               </a:rPr>
-              <a:t>intent  &gt;SPEC&lt;  plan  build  ship</a:t>
+              <a:t>intent  </a:t>
+            </a:r>
+            <a:pPr indent="0" marL="0">
+              <a:lnSpc>
+                <a:spcPct val="160000"/>
+              </a:lnSpc>
+              <a:buNone/>
+            </a:pPr>
+            <a:r>
+              <a:rPr lang="en-US" sz="1400" b="1" dirty="0">
+                <a:solidFill>
+                  <a:srgbClr val="332F2A"/>
+                </a:solidFill>
+                <a:latin typeface="IBM Plex Mono" pitchFamily="34" charset="0"/>
+                <a:ea typeface="IBM Plex Mono" pitchFamily="34" charset="-122"/>
+                <a:cs typeface="IBM Plex Mono" pitchFamily="34" charset="-120"/>
+              </a:rPr>
+              <a:t>&gt;SPEC&lt;</a:t>
+            </a:r>
+            <a:pPr indent="0" marL="0">
+              <a:lnSpc>
+                <a:spcPct val="160000"/>
+              </a:lnSpc>
+              <a:buNone/>
+            </a:pPr>
+            <a:r>
+              <a:rPr lang="en-US" sz="1400" dirty="0">
+                <a:solidFill>
+                  <a:srgbClr val="332F2A"/>
+                </a:solidFill>
+                <a:latin typeface="IBM Plex Mono" pitchFamily="34" charset="0"/>
+                <a:ea typeface="IBM Plex Mono" pitchFamily="34" charset="-122"/>
+                <a:cs typeface="IBM Plex Mono" pitchFamily="34" charset="-120"/>
+              </a:rPr>
+              <a:t>  plan  build  ship</a:t>
             </a:r>
             <a:endParaRPr lang="en-US" sz="1400" dirty="0"/>
           </a:p>
@@ -10997,6 +11082,23 @@
               <a:buNone/>
             </a:pPr>
             <a:r>
+              <a:rPr lang="en-US" sz="1400" b="1" dirty="0">
+                <a:solidFill>
+                  <a:srgbClr val="332F2A"/>
+                </a:solidFill>
+                <a:latin typeface="IBM Plex Mono" pitchFamily="34" charset="0"/>
+                <a:ea typeface="IBM Plex Mono" pitchFamily="34" charset="-122"/>
+                <a:cs typeface="IBM Plex Mono" pitchFamily="34" charset="-120"/>
+              </a:rPr>
+              <a:t>READS</a:t>
+            </a:r>
+            <a:pPr indent="0" marL="0">
+              <a:lnSpc>
+                <a:spcPct val="160000"/>
+              </a:lnSpc>
+              <a:buNone/>
+            </a:pPr>
+            <a:r>
               <a:rPr lang="en-US" sz="1400" dirty="0">
                 <a:solidFill>
                   <a:srgbClr val="332F2A"/>
@@ -11005,7 +11107,7 @@
                 <a:ea typeface="IBM Plex Mono" pitchFamily="34" charset="-122"/>
                 <a:cs typeface="IBM Plex Mono" pitchFamily="34" charset="-120"/>
               </a:rPr>
-              <a:t>READS   aidlc/intent.md</a:t>
+              <a:t>   aidlc/intent.md</a:t>
             </a:r>
             <a:endParaRPr lang="en-US" sz="1400" dirty="0"/>
           </a:p>
@@ -11046,6 +11148,23 @@
               <a:buNone/>
             </a:pPr>
             <a:r>
+              <a:rPr lang="en-US" sz="1400" b="1" dirty="0">
+                <a:solidFill>
+                  <a:srgbClr val="332F2A"/>
+                </a:solidFill>
+                <a:latin typeface="IBM Plex Mono" pitchFamily="34" charset="0"/>
+                <a:ea typeface="IBM Plex Mono" pitchFamily="34" charset="-122"/>
+                <a:cs typeface="IBM Plex Mono" pitchFamily="34" charset="-120"/>
+              </a:rPr>
+              <a:t>PROMPT</a:t>
+            </a:r>
+            <a:pPr indent="0" marL="0">
+              <a:lnSpc>
+                <a:spcPct val="160000"/>
+              </a:lnSpc>
+              <a:buNone/>
+            </a:pPr>
+            <a:r>
               <a:rPr lang="en-US" sz="1400" dirty="0">
                 <a:solidFill>
                   <a:srgbClr val="332F2A"/>
@@ -11054,7 +11173,7 @@
                 <a:ea typeface="IBM Plex Mono" pitchFamily="34" charset="-122"/>
                 <a:cs typeface="IBM Plex Mono" pitchFamily="34" charset="-120"/>
               </a:rPr>
-              <a:t>PROMPT  “intent.md says what we</a:t>
+              <a:t>  “intent.md says what we</a:t>
             </a:r>
             <a:endParaRPr lang="en-US" sz="1400" dirty="0"/>
           </a:p>
@@ -11155,6 +11274,23 @@
               <a:buNone/>
             </a:pPr>
             <a:r>
+              <a:rPr lang="en-US" sz="1400" b="1" dirty="0">
+                <a:solidFill>
+                  <a:srgbClr val="332F2A"/>
+                </a:solidFill>
+                <a:latin typeface="IBM Plex Mono" pitchFamily="34" charset="0"/>
+                <a:ea typeface="IBM Plex Mono" pitchFamily="34" charset="-122"/>
+                <a:cs typeface="IBM Plex Mono" pitchFamily="34" charset="-120"/>
+              </a:rPr>
+              <a:t>WRITES</a:t>
+            </a:r>
+            <a:pPr indent="0" marL="0">
+              <a:lnSpc>
+                <a:spcPct val="160000"/>
+              </a:lnSpc>
+              <a:buNone/>
+            </a:pPr>
+            <a:r>
               <a:rPr lang="en-US" sz="1400" dirty="0">
                 <a:solidFill>
                   <a:srgbClr val="332F2A"/>
@@ -11163,7 +11299,7 @@
                 <a:ea typeface="IBM Plex Mono" pitchFamily="34" charset="-122"/>
                 <a:cs typeface="IBM Plex Mono" pitchFamily="34" charset="-120"/>
               </a:rPr>
-              <a:t>WRITES  aidlc/requirements.md</a:t>
+              <a:t>  aidlc/requirements.md</a:t>
             </a:r>
             <a:endParaRPr lang="en-US" sz="1400" dirty="0"/>
           </a:p>
@@ -11596,7 +11732,41 @@
                 <a:ea typeface="IBM Plex Mono" pitchFamily="34" charset="-122"/>
                 <a:cs typeface="IBM Plex Mono" pitchFamily="34" charset="-120"/>
               </a:rPr>
-              <a:t>intent  spec  &gt;PLAN&lt;  build  ship</a:t>
+              <a:t>intent  spec  </a:t>
+            </a:r>
+            <a:pPr indent="0" marL="0">
+              <a:lnSpc>
+                <a:spcPct val="160000"/>
+              </a:lnSpc>
+              <a:buNone/>
+            </a:pPr>
+            <a:r>
+              <a:rPr lang="en-US" sz="1400" b="1" dirty="0">
+                <a:solidFill>
+                  <a:srgbClr val="332F2A"/>
+                </a:solidFill>
+                <a:latin typeface="IBM Plex Mono" pitchFamily="34" charset="0"/>
+                <a:ea typeface="IBM Plex Mono" pitchFamily="34" charset="-122"/>
+                <a:cs typeface="IBM Plex Mono" pitchFamily="34" charset="-120"/>
+              </a:rPr>
+              <a:t>&gt;PLAN&lt;</a:t>
+            </a:r>
+            <a:pPr indent="0" marL="0">
+              <a:lnSpc>
+                <a:spcPct val="160000"/>
+              </a:lnSpc>
+              <a:buNone/>
+            </a:pPr>
+            <a:r>
+              <a:rPr lang="en-US" sz="1400" dirty="0">
+                <a:solidFill>
+                  <a:srgbClr val="332F2A"/>
+                </a:solidFill>
+                <a:latin typeface="IBM Plex Mono" pitchFamily="34" charset="0"/>
+                <a:ea typeface="IBM Plex Mono" pitchFamily="34" charset="-122"/>
+                <a:cs typeface="IBM Plex Mono" pitchFamily="34" charset="-120"/>
+              </a:rPr>
+              <a:t>  build  ship</a:t>
             </a:r>
             <a:endParaRPr lang="en-US" sz="1400" dirty="0"/>
           </a:p>
@@ -11617,6 +11787,23 @@
               <a:buNone/>
             </a:pPr>
             <a:r>
+              <a:rPr lang="en-US" sz="1400" b="1" dirty="0">
+                <a:solidFill>
+                  <a:srgbClr val="332F2A"/>
+                </a:solidFill>
+                <a:latin typeface="IBM Plex Mono" pitchFamily="34" charset="0"/>
+                <a:ea typeface="IBM Plex Mono" pitchFamily="34" charset="-122"/>
+                <a:cs typeface="IBM Plex Mono" pitchFamily="34" charset="-120"/>
+              </a:rPr>
+              <a:t>READS</a:t>
+            </a:r>
+            <a:pPr indent="0" marL="0">
+              <a:lnSpc>
+                <a:spcPct val="160000"/>
+              </a:lnSpc>
+              <a:buNone/>
+            </a:pPr>
+            <a:r>
               <a:rPr lang="en-US" sz="1400" dirty="0">
                 <a:solidFill>
                   <a:srgbClr val="332F2A"/>
@@ -11625,7 +11812,7 @@
                 <a:ea typeface="IBM Plex Mono" pitchFamily="34" charset="-122"/>
                 <a:cs typeface="IBM Plex Mono" pitchFamily="34" charset="-120"/>
               </a:rPr>
-              <a:t>READS   aidlc/requirements.md</a:t>
+              <a:t>   aidlc/requirements.md</a:t>
             </a:r>
             <a:endParaRPr lang="en-US" sz="1400" dirty="0"/>
           </a:p>
@@ -11646,6 +11833,23 @@
               <a:buNone/>
             </a:pPr>
             <a:r>
+              <a:rPr lang="en-US" sz="1400" b="1" dirty="0">
+                <a:solidFill>
+                  <a:srgbClr val="332F2A"/>
+                </a:solidFill>
+                <a:latin typeface="IBM Plex Mono" pitchFamily="34" charset="0"/>
+                <a:ea typeface="IBM Plex Mono" pitchFamily="34" charset="-122"/>
+                <a:cs typeface="IBM Plex Mono" pitchFamily="34" charset="-120"/>
+              </a:rPr>
+              <a:t>PROMPT</a:t>
+            </a:r>
+            <a:pPr indent="0" marL="0">
+              <a:lnSpc>
+                <a:spcPct val="160000"/>
+              </a:lnSpc>
+              <a:buNone/>
+            </a:pPr>
+            <a:r>
               <a:rPr lang="en-US" sz="1400" dirty="0">
                 <a:solidFill>
                   <a:srgbClr val="332F2A"/>
@@ -11654,7 +11858,7 @@
                 <a:ea typeface="IBM Plex Mono" pitchFamily="34" charset="-122"/>
                 <a:cs typeface="IBM Plex Mono" pitchFamily="34" charset="-120"/>
               </a:rPr>
-              <a:t>PROMPT  “requirements.md is</a:t>
+              <a:t>  “requirements.md is</a:t>
             </a:r>
             <a:endParaRPr lang="en-US" sz="1400" dirty="0"/>
           </a:p>
@@ -11755,6 +11959,23 @@
               <a:buNone/>
             </a:pPr>
             <a:r>
+              <a:rPr lang="en-US" sz="1400" b="1" dirty="0">
+                <a:solidFill>
+                  <a:srgbClr val="332F2A"/>
+                </a:solidFill>
+                <a:latin typeface="IBM Plex Mono" pitchFamily="34" charset="0"/>
+                <a:ea typeface="IBM Plex Mono" pitchFamily="34" charset="-122"/>
+                <a:cs typeface="IBM Plex Mono" pitchFamily="34" charset="-120"/>
+              </a:rPr>
+              <a:t>WRITES</a:t>
+            </a:r>
+            <a:pPr indent="0" marL="0">
+              <a:lnSpc>
+                <a:spcPct val="160000"/>
+              </a:lnSpc>
+              <a:buNone/>
+            </a:pPr>
+            <a:r>
               <a:rPr lang="en-US" sz="1400" dirty="0">
                 <a:solidFill>
                   <a:srgbClr val="332F2A"/>
@@ -11763,7 +11984,7 @@
                 <a:ea typeface="IBM Plex Mono" pitchFamily="34" charset="-122"/>
                 <a:cs typeface="IBM Plex Mono" pitchFamily="34" charset="-120"/>
               </a:rPr>
-              <a:t>WRITES  aidlc/design.md</a:t>
+              <a:t>  aidlc/design.md</a:t>
             </a:r>
             <a:endParaRPr lang="en-US" sz="1400" dirty="0"/>
           </a:p>
@@ -12216,7 +12437,41 @@
                 <a:ea typeface="IBM Plex Mono" pitchFamily="34" charset="-122"/>
                 <a:cs typeface="IBM Plex Mono" pitchFamily="34" charset="-120"/>
               </a:rPr>
-              <a:t>intent  spec  plan  &gt;BUILD&lt;  ship</a:t>
+              <a:t>intent  spec  plan  </a:t>
+            </a:r>
+            <a:pPr indent="0" marL="0">
+              <a:lnSpc>
+                <a:spcPct val="160000"/>
+              </a:lnSpc>
+              <a:buNone/>
+            </a:pPr>
+            <a:r>
+              <a:rPr lang="en-US" sz="1400" b="1" dirty="0">
+                <a:solidFill>
+                  <a:srgbClr val="332F2A"/>
+                </a:solidFill>
+                <a:latin typeface="IBM Plex Mono" pitchFamily="34" charset="0"/>
+                <a:ea typeface="IBM Plex Mono" pitchFamily="34" charset="-122"/>
+                <a:cs typeface="IBM Plex Mono" pitchFamily="34" charset="-120"/>
+              </a:rPr>
+              <a:t>&gt;BUILD&lt;</a:t>
+            </a:r>
+            <a:pPr indent="0" marL="0">
+              <a:lnSpc>
+                <a:spcPct val="160000"/>
+              </a:lnSpc>
+              <a:buNone/>
+            </a:pPr>
+            <a:r>
+              <a:rPr lang="en-US" sz="1400" dirty="0">
+                <a:solidFill>
+                  <a:srgbClr val="332F2A"/>
+                </a:solidFill>
+                <a:latin typeface="IBM Plex Mono" pitchFamily="34" charset="0"/>
+                <a:ea typeface="IBM Plex Mono" pitchFamily="34" charset="-122"/>
+                <a:cs typeface="IBM Plex Mono" pitchFamily="34" charset="-120"/>
+              </a:rPr>
+              <a:t>  ship</a:t>
             </a:r>
             <a:endParaRPr lang="en-US" sz="1400" dirty="0"/>
           </a:p>
@@ -12237,6 +12492,23 @@
               <a:buNone/>
             </a:pPr>
             <a:r>
+              <a:rPr lang="en-US" sz="1400" b="1" dirty="0">
+                <a:solidFill>
+                  <a:srgbClr val="332F2A"/>
+                </a:solidFill>
+                <a:latin typeface="IBM Plex Mono" pitchFamily="34" charset="0"/>
+                <a:ea typeface="IBM Plex Mono" pitchFamily="34" charset="-122"/>
+                <a:cs typeface="IBM Plex Mono" pitchFamily="34" charset="-120"/>
+              </a:rPr>
+              <a:t>READS</a:t>
+            </a:r>
+            <a:pPr indent="0" marL="0">
+              <a:lnSpc>
+                <a:spcPct val="160000"/>
+              </a:lnSpc>
+              <a:buNone/>
+            </a:pPr>
+            <a:r>
               <a:rPr lang="en-US" sz="1400" dirty="0">
                 <a:solidFill>
                   <a:srgbClr val="332F2A"/>
@@ -12245,7 +12517,7 @@
                 <a:ea typeface="IBM Plex Mono" pitchFamily="34" charset="-122"/>
                 <a:cs typeface="IBM Plex Mono" pitchFamily="34" charset="-120"/>
               </a:rPr>
-              <a:t>READS   aidlc/design.md</a:t>
+              <a:t>   aidlc/design.md</a:t>
             </a:r>
             <a:endParaRPr lang="en-US" sz="1400" dirty="0"/>
           </a:p>
@@ -12286,6 +12558,23 @@
               <a:buNone/>
             </a:pPr>
             <a:r>
+              <a:rPr lang="en-US" sz="1400" b="1" dirty="0">
+                <a:solidFill>
+                  <a:srgbClr val="332F2A"/>
+                </a:solidFill>
+                <a:latin typeface="IBM Plex Mono" pitchFamily="34" charset="0"/>
+                <a:ea typeface="IBM Plex Mono" pitchFamily="34" charset="-122"/>
+                <a:cs typeface="IBM Plex Mono" pitchFamily="34" charset="-120"/>
+              </a:rPr>
+              <a:t>PROMPT</a:t>
+            </a:r>
+            <a:pPr indent="0" marL="0">
+              <a:lnSpc>
+                <a:spcPct val="160000"/>
+              </a:lnSpc>
+              <a:buNone/>
+            </a:pPr>
+            <a:r>
               <a:rPr lang="en-US" sz="1400" dirty="0">
                 <a:solidFill>
                   <a:srgbClr val="332F2A"/>
@@ -12294,7 +12583,7 @@
                 <a:ea typeface="IBM Plex Mono" pitchFamily="34" charset="-122"/>
                 <a:cs typeface="IBM Plex Mono" pitchFamily="34" charset="-120"/>
               </a:rPr>
-              <a:t>PROMPT  “design.md and tasks.md</a:t>
+              <a:t>  “design.md and tasks.md</a:t>
             </a:r>
             <a:endParaRPr lang="en-US" sz="1400" dirty="0"/>
           </a:p>
@@ -12375,6 +12664,23 @@
               <a:buNone/>
             </a:pPr>
             <a:r>
+              <a:rPr lang="en-US" sz="1400" b="1" dirty="0">
+                <a:solidFill>
+                  <a:srgbClr val="332F2A"/>
+                </a:solidFill>
+                <a:latin typeface="IBM Plex Mono" pitchFamily="34" charset="0"/>
+                <a:ea typeface="IBM Plex Mono" pitchFamily="34" charset="-122"/>
+                <a:cs typeface="IBM Plex Mono" pitchFamily="34" charset="-120"/>
+              </a:rPr>
+              <a:t>WRITES</a:t>
+            </a:r>
+            <a:pPr indent="0" marL="0">
+              <a:lnSpc>
+                <a:spcPct val="160000"/>
+              </a:lnSpc>
+              <a:buNone/>
+            </a:pPr>
+            <a:r>
               <a:rPr lang="en-US" sz="1400" dirty="0">
                 <a:solidFill>
                   <a:srgbClr val="332F2A"/>
@@ -12383,7 +12689,7 @@
                 <a:ea typeface="IBM Plex Mono" pitchFamily="34" charset="-122"/>
                 <a:cs typeface="IBM Plex Mono" pitchFamily="34" charset="-120"/>
               </a:rPr>
-              <a:t>WRITES  core/spectrum.py</a:t>
+              <a:t>  core/spectrum.py</a:t>
             </a:r>
             <a:endParaRPr lang="en-US" sz="1400" dirty="0"/>
           </a:p>

--- a/slides/Session 1 - Meet Your Agent.pptx
+++ b/slides/Session 1 - Meet Your Agent.pptx
@@ -19878,7 +19878,7 @@
                 <a:ea typeface="IBM Plex Mono" pitchFamily="34" charset="-122"/>
                 <a:cs typeface="IBM Plex Mono" pitchFamily="34" charset="-120"/>
               </a:rPr>
-              <a:t>next session · teams of four · bring a project idea</a:t>
+              <a:t>come back in at github.com/codespaces · do not make a new one</a:t>
             </a:r>
             <a:endParaRPr lang="en-US" sz="1300" dirty="0"/>
           </a:p>

--- a/slides/Session 1 - Meet Your Agent.pptx
+++ b/slides/Session 1 - Meet Your Agent.pptx
@@ -12709,7 +12709,7 @@
                 <a:ea typeface="IBM Plex Mono" pitchFamily="34" charset="-122"/>
                 <a:cs typeface="IBM Plex Mono" pitchFamily="34" charset="-120"/>
               </a:rPr>
-              <a:t>        $ pytest -&gt; 7 passed</a:t>
+              <a:t>        7 spectrum tests pass</a:t>
             </a:r>
             <a:endParaRPr lang="en-US" sz="1400" dirty="0"/>
           </a:p>

--- a/slides/Session 1 - Meet Your Agent.pptx
+++ b/slides/Session 1 - Meet Your Agent.pptx
@@ -54,9 +54,11 @@
     <p:sldId id="302" r:id="rId48"/>
     <p:sldId id="303" r:id="rId49"/>
     <p:sldId id="304" r:id="rId50"/>
+    <p:sldId id="305" r:id="rId51"/>
+    <p:sldId id="306" r:id="rId52"/>
   </p:sldIdLst>
   <p:notesMasterIdLst>
-    <p:notesMasterId r:id="rId51"/>
+    <p:notesMasterId r:id="rId53"/>
   </p:notesMasterIdLst>
   <p:sldSz cx="12192000" cy="6858000"/>
   <p:notesSz cx="6858000" cy="12192000"/>
@@ -3982,7 +3984,7 @@
           <a:p>
             <a:r>
               <a:rPr lang="en-US" dirty="0"/>
-              <a:t>Hand this out rather than reading it. The one to actually push is dspguide.com - free, written for engineers who have not done the maths yet, and the book that makes the next signals course easier. Say plainly that the official docs are what the model has read, so quoting them in a prompt works better than describing what you want in your own words.</a:t>
+              <a:t>Show the sidebar next to the file tree so the mapping is literally visible. This is also where the Round 1 mess pays off: their agent knew nothing about pages/ and wrote a loose script at the top level, so the tab never appeared. The convention only looks obvious once you have watched an agent miss it.</a:t>
             </a:r>
             <a:endParaRPr lang="en-US" dirty="0"/>
           </a:p>
@@ -4070,7 +4072,7 @@
           <a:p>
             <a:r>
               <a:rPr lang="en-US" dirty="0"/>
-              <a:t>Last fifteen minutes, everyone, whether or not their app worked. Insist on the mutation exercise: two tests fail, the peak-location test stays green, and the chart still looks perfectly reasonable.</a:t>
+              <a:t>The rerun model is the one thing to make them say back to you: there is no onChange anywhere in this file, and every interaction runs all forty lines again. Then point at the import at the top - core.spectrum knows nothing about Streamlit, and Streamlit knows nothing about FFTs. That split is why the tests could exist before the page did, and it is worth naming as a design choice rather than an accident.</a:t>
             </a:r>
             <a:endParaRPr lang="en-US" dirty="0"/>
           </a:p>
@@ -4158,7 +4160,7 @@
           <a:p>
             <a:r>
               <a:rPr lang="en-US" dirty="0"/>
-              <a:t>The closing idea of the session, and the bridge to Session 2. Say plainly that the documents, not the code, were the work today — the code was the cheap part, and it will only get cheaper. Anyone whose app did not run still has four documents they can show, and that is a real deliverable.</a:t>
+              <a:t>Hand this out rather than reading it. The one to actually push is dspguide.com - free, written for engineers who have not done the maths yet, and the book that makes the next signals course easier. Say plainly that the official docs are what the model has read, so quoting them in a prompt works better than describing what you want in your own words.</a:t>
             </a:r>
             <a:endParaRPr lang="en-US" dirty="0"/>
           </a:p>
@@ -4246,7 +4248,7 @@
           <a:p>
             <a:r>
               <a:rPr lang="en-US" dirty="0"/>
-              <a:t>Leave this up for a moment; this is the slide they photograph. Then homework, then the closing slide for questions.</a:t>
+              <a:t>Last fifteen minutes, everyone, whether or not their app worked. Insist on the mutation exercise: two tests fail, the peak-location test stays green, and the chart still looks perfectly reasonable.</a:t>
             </a:r>
             <a:endParaRPr lang="en-US" dirty="0"/>
           </a:p>
@@ -4334,7 +4336,7 @@
           <a:p>
             <a:r>
               <a:rPr lang="en-US" dirty="0"/>
-              <a:t>Leave up during questions. Stress the log: three things the agent got wrong. Anyone who writes 'it all worked fine' did not look hard enough, and it is thirty per cent of the individual mark.</a:t>
+              <a:t>The closing idea of the session, and the bridge to Session 2. Say plainly that the documents, not the code, were the work today — the code was the cheap part, and it will only get cheaper. Anyone whose app did not run still has four documents they can show, and that is a real deliverable.</a:t>
             </a:r>
             <a:endParaRPr lang="en-US" dirty="0"/>
           </a:p>
@@ -4446,6 +4448,182 @@
             <a:fld id="{F7021451-1387-4CA6-816F-3879F97B5CBC}" type="slidenum">
               <a:rPr lang="en-US"/>
               <a:t>5</a:t>
+            </a:fld>
+            <a:endParaRPr lang="en-US"/>
+          </a:p>
+        </p:txBody>
+      </p:sp>
+    </p:spTree>
+    <p:extLst>
+      <p:ext uri="{BB962C8B-B14F-4D97-AF65-F5344CB8AC3E}">
+        <p14:creationId xmlns:p14="http://schemas.microsoft.com/office/powerpoint/2010/main" val="1024086991"/>
+      </p:ext>
+    </p:extLst>
+  </p:cSld>
+  <p:clrMapOvr>
+    <a:masterClrMapping/>
+  </p:clrMapOvr>
+</p:notes>
+</file>
+
+<file path=ppt/notesSlides/notesSlide50.xml><?xml version="1.0" encoding="utf-8"?>
+<p:notes xmlns:a="http://schemas.openxmlformats.org/drawingml/2006/main" xmlns:r="http://schemas.openxmlformats.org/officeDocument/2006/relationships" xmlns:p="http://schemas.openxmlformats.org/presentationml/2006/main">
+  <p:cSld>
+    <p:spTree>
+      <p:nvGrpSpPr>
+        <p:cNvPr id="1" name=""/>
+        <p:cNvGrpSpPr/>
+        <p:nvPr/>
+      </p:nvGrpSpPr>
+      <p:grpSpPr>
+        <a:xfrm>
+          <a:off x="0" y="0"/>
+          <a:ext cx="0" cy="0"/>
+          <a:chOff x="0" y="0"/>
+          <a:chExt cx="0" cy="0"/>
+        </a:xfrm>
+      </p:grpSpPr>
+      <p:sp>
+        <p:nvSpPr>
+          <p:cNvPr id="2" name="Slide Image Placeholder 1"/>
+          <p:cNvSpPr>
+            <a:spLocks noGrp="1" noRot="1" noChangeAspect="1"/>
+          </p:cNvSpPr>
+          <p:nvPr>
+            <p:ph type="sldImg"/>
+          </p:nvPr>
+        </p:nvSpPr>
+        <p:spPr/>
+      </p:sp>
+      <p:sp>
+        <p:nvSpPr>
+          <p:cNvPr id="3" name="Notes Placeholder 2"/>
+          <p:cNvSpPr>
+            <a:spLocks noGrp="1"/>
+          </p:cNvSpPr>
+          <p:nvPr>
+            <p:ph type="body" idx="1"/>
+          </p:nvPr>
+        </p:nvSpPr>
+        <p:spPr/>
+        <p:txBody>
+          <a:bodyPr/>
+          <a:lstStyle/>
+          <a:p>
+            <a:r>
+              <a:rPr lang="en-US" dirty="0"/>
+              <a:t>Leave this up for a moment; this is the slide they photograph. Then homework, then the closing slide for questions.</a:t>
+            </a:r>
+            <a:endParaRPr lang="en-US" dirty="0"/>
+          </a:p>
+        </p:txBody>
+      </p:sp>
+      <p:sp>
+        <p:nvSpPr>
+          <p:cNvPr id="4" name="Slide Number Placeholder 3"/>
+          <p:cNvSpPr>
+            <a:spLocks noGrp="1"/>
+          </p:cNvSpPr>
+          <p:nvPr>
+            <p:ph type="sldNum" sz="quarter" idx="10"/>
+          </p:nvPr>
+        </p:nvSpPr>
+        <p:spPr/>
+        <p:txBody>
+          <a:bodyPr/>
+          <a:lstStyle/>
+          <a:p>
+            <a:fld id="{F7021451-1387-4CA6-816F-3879F97B5CBC}" type="slidenum">
+              <a:rPr lang="en-US"/>
+              <a:t>50</a:t>
+            </a:fld>
+            <a:endParaRPr lang="en-US"/>
+          </a:p>
+        </p:txBody>
+      </p:sp>
+    </p:spTree>
+    <p:extLst>
+      <p:ext uri="{BB962C8B-B14F-4D97-AF65-F5344CB8AC3E}">
+        <p14:creationId xmlns:p14="http://schemas.microsoft.com/office/powerpoint/2010/main" val="1024086991"/>
+      </p:ext>
+    </p:extLst>
+  </p:cSld>
+  <p:clrMapOvr>
+    <a:masterClrMapping/>
+  </p:clrMapOvr>
+</p:notes>
+</file>
+
+<file path=ppt/notesSlides/notesSlide51.xml><?xml version="1.0" encoding="utf-8"?>
+<p:notes xmlns:a="http://schemas.openxmlformats.org/drawingml/2006/main" xmlns:r="http://schemas.openxmlformats.org/officeDocument/2006/relationships" xmlns:p="http://schemas.openxmlformats.org/presentationml/2006/main">
+  <p:cSld>
+    <p:spTree>
+      <p:nvGrpSpPr>
+        <p:cNvPr id="1" name=""/>
+        <p:cNvGrpSpPr/>
+        <p:nvPr/>
+      </p:nvGrpSpPr>
+      <p:grpSpPr>
+        <a:xfrm>
+          <a:off x="0" y="0"/>
+          <a:ext cx="0" cy="0"/>
+          <a:chOff x="0" y="0"/>
+          <a:chExt cx="0" cy="0"/>
+        </a:xfrm>
+      </p:grpSpPr>
+      <p:sp>
+        <p:nvSpPr>
+          <p:cNvPr id="2" name="Slide Image Placeholder 1"/>
+          <p:cNvSpPr>
+            <a:spLocks noGrp="1" noRot="1" noChangeAspect="1"/>
+          </p:cNvSpPr>
+          <p:nvPr>
+            <p:ph type="sldImg"/>
+          </p:nvPr>
+        </p:nvSpPr>
+        <p:spPr/>
+      </p:sp>
+      <p:sp>
+        <p:nvSpPr>
+          <p:cNvPr id="3" name="Notes Placeholder 2"/>
+          <p:cNvSpPr>
+            <a:spLocks noGrp="1"/>
+          </p:cNvSpPr>
+          <p:nvPr>
+            <p:ph type="body" idx="1"/>
+          </p:nvPr>
+        </p:nvSpPr>
+        <p:spPr/>
+        <p:txBody>
+          <a:bodyPr/>
+          <a:lstStyle/>
+          <a:p>
+            <a:r>
+              <a:rPr lang="en-US" dirty="0"/>
+              <a:t>Leave up during questions. Stress the log: three things the agent got wrong. Anyone who writes 'it all worked fine' did not look hard enough, and it is thirty per cent of the individual mark.</a:t>
+            </a:r>
+            <a:endParaRPr lang="en-US" dirty="0"/>
+          </a:p>
+        </p:txBody>
+      </p:sp>
+      <p:sp>
+        <p:nvSpPr>
+          <p:cNvPr id="4" name="Slide Number Placeholder 3"/>
+          <p:cNvSpPr>
+            <a:spLocks noGrp="1"/>
+          </p:cNvSpPr>
+          <p:nvPr>
+            <p:ph type="sldNum" sz="quarter" idx="10"/>
+          </p:nvPr>
+        </p:nvSpPr>
+        <p:spPr/>
+        <p:txBody>
+          <a:bodyPr/>
+          <a:lstStyle/>
+          <a:p>
+            <a:fld id="{F7021451-1387-4CA6-816F-3879F97B5CBC}" type="slidenum">
+              <a:rPr lang="en-US"/>
+              <a:t>51</a:t>
             </a:fld>
             <a:endParaRPr lang="en-US"/>
           </a:p>
@@ -23403,7 +23581,7 @@
                 <a:ea typeface="Libre Franklin" pitchFamily="34" charset="-122"/>
                 <a:cs typeface="Libre Franklin" pitchFamily="34" charset="-120"/>
               </a:rPr>
-              <a:t>You approved this code. Now read it — forty lines, and two of them are the ones that matter.</a:t>
+              <a:t>You approved this code. Now read it — the maths first, then the page that puts it on screen.</a:t>
             </a:r>
             <a:endParaRPr lang="en-US" sz="1700" dirty="0"/>
           </a:p>
@@ -26073,7 +26251,7 @@
       </p:sp>
       <p:pic>
         <p:nvPicPr>
-          <p:cNvPr id="3" name="Image 0" descr="icons/python.png">    </p:cNvPr>
+          <p:cNvPr id="3" name="Image 0" descr="icons/streamlit.png">    </p:cNvPr>
           <p:cNvPicPr>
             <a:picLocks noChangeAspect="1"/>
           </p:cNvPicPr>
@@ -26087,7 +26265,7 @@
         </p:blipFill>
         <p:spPr>
           <a:xfrm>
-            <a:off x="10401300" y="361950"/>
+            <a:off x="11087100" y="361950"/>
             <a:ext cx="203200" cy="203200"/>
           </a:xfrm>
           <a:prstGeom prst="rect">
@@ -26097,7 +26275,7 @@
       </p:pic>
       <p:pic>
         <p:nvPicPr>
-          <p:cNvPr id="4" name="Image 1" descr="icons/numpy.png">    </p:cNvPr>
+          <p:cNvPr id="4" name="Image 1" descr="icons/python.png">    </p:cNvPr>
           <p:cNvPicPr>
             <a:picLocks noChangeAspect="1"/>
           </p:cNvPicPr>
@@ -26111,54 +26289,6 @@
         </p:blipFill>
         <p:spPr>
           <a:xfrm>
-            <a:off x="10744200" y="361950"/>
-            <a:ext cx="203200" cy="203200"/>
-          </a:xfrm>
-          <a:prstGeom prst="rect">
-            <a:avLst/>
-          </a:prstGeom>
-        </p:spPr>
-      </p:pic>
-      <p:pic>
-        <p:nvPicPr>
-          <p:cNvPr id="5" name="Image 2" descr="icons/streamlit.png">    </p:cNvPr>
-          <p:cNvPicPr>
-            <a:picLocks noChangeAspect="1"/>
-          </p:cNvPicPr>
-          <p:nvPr/>
-        </p:nvPicPr>
-        <p:blipFill>
-          <a:blip r:embed="rId3"/>
-          <a:stretch>
-            <a:fillRect/>
-          </a:stretch>
-        </p:blipFill>
-        <p:spPr>
-          <a:xfrm>
-            <a:off x="11087100" y="361950"/>
-            <a:ext cx="203200" cy="203200"/>
-          </a:xfrm>
-          <a:prstGeom prst="rect">
-            <a:avLst/>
-          </a:prstGeom>
-        </p:spPr>
-      </p:pic>
-      <p:pic>
-        <p:nvPicPr>
-          <p:cNvPr id="6" name="Image 3" descr="icons/pytest.png">    </p:cNvPr>
-          <p:cNvPicPr>
-            <a:picLocks noChangeAspect="1"/>
-          </p:cNvPicPr>
-          <p:nvPr/>
-        </p:nvPicPr>
-        <p:blipFill>
-          <a:blip r:embed="rId4"/>
-          <a:stretch>
-            <a:fillRect/>
-          </a:stretch>
-        </p:blipFill>
-        <p:spPr>
-          <a:xfrm>
             <a:off x="11430000" y="361950"/>
             <a:ext cx="203200" cy="203200"/>
           </a:xfrm>
@@ -26169,7 +26299,7 @@
       </p:pic>
       <p:sp>
         <p:nvSpPr>
-          <p:cNvPr id="7" name="Text 1"/>
+          <p:cNvPr id="5" name="Text 1"/>
           <p:cNvSpPr/>
           <p:nvPr/>
         </p:nvSpPr>
@@ -26203,7 +26333,7 @@
                 <a:ea typeface="Libre Franklin" pitchFamily="34" charset="-122"/>
                 <a:cs typeface="Libre Franklin" pitchFamily="34" charset="-120"/>
               </a:rPr>
-              <a:t>Where to read more</a:t>
+              <a:t>One file per page, and Streamlit finds it</a:t>
             </a:r>
             <a:endParaRPr lang="en-US" sz="2800" dirty="0"/>
           </a:p>
@@ -26211,7 +26341,7 @@
       </p:sp>
       <p:sp>
         <p:nvSpPr>
-          <p:cNvPr id="8" name="Shape 2"/>
+          <p:cNvPr id="6" name="Shape 2"/>
           <p:cNvSpPr/>
           <p:nvPr/>
         </p:nvSpPr>
@@ -26231,7 +26361,7 @@
       </p:sp>
       <p:sp>
         <p:nvSpPr>
-          <p:cNvPr id="9" name="Text 3"/>
+          <p:cNvPr id="7" name="Text 3"/>
           <p:cNvSpPr/>
           <p:nvPr/>
         </p:nvSpPr>
@@ -26273,7 +26403,7 @@
       </p:sp>
       <p:sp>
         <p:nvSpPr>
-          <p:cNvPr id="10" name="Text 4"/>
+          <p:cNvPr id="8" name="Text 4"/>
           <p:cNvSpPr/>
           <p:nvPr/>
         </p:nvSpPr>
@@ -26315,56 +26445,273 @@
       </p:sp>
       <p:sp>
         <p:nvSpPr>
-          <p:cNvPr id="11" name="Text 5"/>
+          <p:cNvPr id="9" name="Shape 5"/>
           <p:cNvSpPr/>
           <p:nvPr/>
         </p:nvSpPr>
         <p:spPr>
           <a:xfrm>
             <a:off x="558800" y="1511300"/>
-            <a:ext cx="5283200" cy="254000"/>
-          </a:xfrm>
-          <a:prstGeom prst="rect">
-            <a:avLst/>
-          </a:prstGeom>
-          <a:noFill/>
-          <a:ln/>
-        </p:spPr>
-        <p:txBody>
-          <a:bodyPr wrap="square" lIns="0" tIns="0" rIns="0" bIns="0" rtlCol="0" anchor="t"/>
-          <a:lstStyle/>
-          <a:p>
-            <a:pPr algn="l" indent="0" marL="0">
-              <a:lnSpc>
-                <a:spcPct val="145000"/>
-              </a:lnSpc>
-              <a:buNone/>
-            </a:pPr>
-            <a:r>
-              <a:rPr lang="en-US" sz="1300" spc="130" kern="0" dirty="0">
-                <a:solidFill>
-                  <a:srgbClr val="A87A2E"/>
-                </a:solidFill>
-                <a:latin typeface="IBM Plex Mono" pitchFamily="34" charset="0"/>
-                <a:ea typeface="IBM Plex Mono" pitchFamily="34" charset="-122"/>
-                <a:cs typeface="IBM Plex Mono" pitchFamily="34" charset="-120"/>
-              </a:rPr>
-              <a:t>THE THEORY</a:t>
-            </a:r>
-            <a:endParaRPr lang="en-US" sz="1300" dirty="0"/>
-          </a:p>
-        </p:txBody>
-      </p:sp>
-      <p:sp>
-        <p:nvSpPr>
-          <p:cNvPr id="12" name="Text 6"/>
-          <p:cNvSpPr/>
-          <p:nvPr/>
-        </p:nvSpPr>
-        <p:spPr>
-          <a:xfrm>
-            <a:off x="558800" y="1917700"/>
-            <a:ext cx="5283200" cy="1270000"/>
+            <a:ext cx="6517030" cy="4572000"/>
+          </a:xfrm>
+          <a:prstGeom prst="rect">
+            <a:avLst/>
+          </a:prstGeom>
+          <a:solidFill>
+            <a:srgbClr val="F5F2EC"/>
+          </a:solidFill>
+          <a:ln w="6350">
+            <a:solidFill>
+              <a:srgbClr val="E1DED7"/>
+            </a:solidFill>
+            <a:prstDash val="solid"/>
+          </a:ln>
+        </p:spPr>
+      </p:sp>
+      <p:sp>
+        <p:nvSpPr>
+          <p:cNvPr id="10" name="Text 6"/>
+          <p:cNvSpPr/>
+          <p:nvPr/>
+        </p:nvSpPr>
+        <p:spPr>
+          <a:xfrm>
+            <a:off x="800100" y="1727200"/>
+            <a:ext cx="6034430" cy="4140200"/>
+          </a:xfrm>
+          <a:prstGeom prst="rect">
+            <a:avLst/>
+          </a:prstGeom>
+          <a:noFill/>
+          <a:ln/>
+        </p:spPr>
+        <p:txBody>
+          <a:bodyPr wrap="square" lIns="0" tIns="0" rIns="0" bIns="0" rtlCol="0" anchor="t"/>
+          <a:lstStyle/>
+          <a:p>
+            <a:pPr indent="0" marL="0">
+              <a:lnSpc>
+                <a:spcPct val="160000"/>
+              </a:lnSpc>
+              <a:buNone/>
+            </a:pPr>
+            <a:r>
+              <a:rPr lang="en-US" sz="1400" b="1" dirty="0">
+                <a:solidFill>
+                  <a:srgbClr val="332F2A"/>
+                </a:solidFill>
+                <a:latin typeface="IBM Plex Mono" pitchFamily="34" charset="0"/>
+                <a:ea typeface="IBM Plex Mono" pitchFamily="34" charset="-122"/>
+                <a:cs typeface="IBM Plex Mono" pitchFamily="34" charset="-120"/>
+              </a:rPr>
+              <a:t>app.py</a:t>
+            </a:r>
+            <a:pPr indent="0" marL="0">
+              <a:lnSpc>
+                <a:spcPct val="160000"/>
+              </a:lnSpc>
+              <a:buNone/>
+            </a:pPr>
+            <a:r>
+              <a:rPr lang="en-US" sz="1400" dirty="0">
+                <a:solidFill>
+                  <a:srgbClr val="332F2A"/>
+                </a:solidFill>
+                <a:latin typeface="IBM Plex Mono" pitchFamily="34" charset="0"/>
+                <a:ea typeface="IBM Plex Mono" pitchFamily="34" charset="-122"/>
+                <a:cs typeface="IBM Plex Mono" pitchFamily="34" charset="-120"/>
+              </a:rPr>
+              <a:t>   run this. the entry point.</a:t>
+            </a:r>
+            <a:endParaRPr lang="en-US" sz="1400" dirty="0"/>
+          </a:p>
+          <a:p>
+            <a:pPr indent="0" marL="0">
+              <a:lnSpc>
+                <a:spcPct val="160000"/>
+              </a:lnSpc>
+              <a:buNone/>
+            </a:pPr>
+            <a:endParaRPr lang="en-US" sz="1400" dirty="0"/>
+          </a:p>
+          <a:p>
+            <a:pPr indent="0" marL="0">
+              <a:lnSpc>
+                <a:spcPct val="160000"/>
+              </a:lnSpc>
+              <a:buNone/>
+            </a:pPr>
+            <a:r>
+              <a:rPr lang="en-US" sz="1400" b="1" dirty="0">
+                <a:solidFill>
+                  <a:srgbClr val="332F2A"/>
+                </a:solidFill>
+                <a:latin typeface="IBM Plex Mono" pitchFamily="34" charset="0"/>
+                <a:ea typeface="IBM Plex Mono" pitchFamily="34" charset="-122"/>
+                <a:cs typeface="IBM Plex Mono" pitchFamily="34" charset="-120"/>
+              </a:rPr>
+              <a:t>pages/</a:t>
+            </a:r>
+            <a:pPr indent="0" marL="0">
+              <a:lnSpc>
+                <a:spcPct val="160000"/>
+              </a:lnSpc>
+              <a:buNone/>
+            </a:pPr>
+            <a:r>
+              <a:rPr lang="en-US" sz="1400" dirty="0">
+                <a:solidFill>
+                  <a:srgbClr val="332F2A"/>
+                </a:solidFill>
+                <a:latin typeface="IBM Plex Mono" pitchFamily="34" charset="0"/>
+                <a:ea typeface="IBM Plex Mono" pitchFamily="34" charset="-122"/>
+                <a:cs typeface="IBM Plex Mono" pitchFamily="34" charset="-120"/>
+              </a:rPr>
+              <a:t>   one file = one tab</a:t>
+            </a:r>
+            <a:endParaRPr lang="en-US" sz="1400" dirty="0"/>
+          </a:p>
+          <a:p>
+            <a:pPr indent="0" marL="0">
+              <a:lnSpc>
+                <a:spcPct val="160000"/>
+              </a:lnSpc>
+              <a:buNone/>
+            </a:pPr>
+            <a:r>
+              <a:rPr lang="en-US" sz="1400" dirty="0">
+                <a:solidFill>
+                  <a:srgbClr val="332F2A"/>
+                </a:solidFill>
+                <a:latin typeface="IBM Plex Mono" pitchFamily="34" charset="0"/>
+                <a:ea typeface="IBM Plex Mono" pitchFamily="34" charset="-122"/>
+                <a:cs typeface="IBM Plex Mono" pitchFamily="34" charset="-120"/>
+              </a:rPr>
+              <a:t>  1_Example.py</a:t>
+            </a:r>
+            <a:endParaRPr lang="en-US" sz="1400" dirty="0"/>
+          </a:p>
+          <a:p>
+            <a:pPr indent="0" marL="0">
+              <a:lnSpc>
+                <a:spcPct val="160000"/>
+              </a:lnSpc>
+              <a:buNone/>
+            </a:pPr>
+            <a:r>
+              <a:rPr lang="en-US" sz="1400" dirty="0">
+                <a:solidFill>
+                  <a:srgbClr val="332F2A"/>
+                </a:solidFill>
+                <a:latin typeface="IBM Plex Mono" pitchFamily="34" charset="0"/>
+                <a:ea typeface="IBM Plex Mono" pitchFamily="34" charset="-122"/>
+                <a:cs typeface="IBM Plex Mono" pitchFamily="34" charset="-120"/>
+              </a:rPr>
+              <a:t>  2_Spectrum_Analyzer.py</a:t>
+            </a:r>
+            <a:endParaRPr lang="en-US" sz="1400" dirty="0"/>
+          </a:p>
+          <a:p>
+            <a:pPr indent="0" marL="0">
+              <a:lnSpc>
+                <a:spcPct val="160000"/>
+              </a:lnSpc>
+              <a:buNone/>
+            </a:pPr>
+            <a:r>
+              <a:rPr lang="en-US" sz="1400" dirty="0">
+                <a:solidFill>
+                  <a:srgbClr val="332F2A"/>
+                </a:solidFill>
+                <a:latin typeface="IBM Plex Mono" pitchFamily="34" charset="0"/>
+                <a:ea typeface="IBM Plex Mono" pitchFamily="34" charset="-122"/>
+                <a:cs typeface="IBM Plex Mono" pitchFamily="34" charset="-120"/>
+              </a:rPr>
+              <a:t>  9_Intake_Desk.py</a:t>
+            </a:r>
+            <a:endParaRPr lang="en-US" sz="1400" dirty="0"/>
+          </a:p>
+          <a:p>
+            <a:pPr indent="0" marL="0">
+              <a:lnSpc>
+                <a:spcPct val="160000"/>
+              </a:lnSpc>
+              <a:buNone/>
+            </a:pPr>
+            <a:endParaRPr lang="en-US" sz="1400" dirty="0"/>
+          </a:p>
+          <a:p>
+            <a:pPr indent="0" marL="0">
+              <a:lnSpc>
+                <a:spcPct val="160000"/>
+              </a:lnSpc>
+              <a:buNone/>
+            </a:pPr>
+            <a:r>
+              <a:rPr lang="en-US" sz="1400" dirty="0">
+                <a:solidFill>
+                  <a:srgbClr val="332F2A"/>
+                </a:solidFill>
+                <a:latin typeface="IBM Plex Mono" pitchFamily="34" charset="0"/>
+                <a:ea typeface="IBM Plex Mono" pitchFamily="34" charset="-122"/>
+                <a:cs typeface="IBM Plex Mono" pitchFamily="34" charset="-120"/>
+              </a:rPr>
+              <a:t>the leading number orders the tabs</a:t>
+            </a:r>
+            <a:endParaRPr lang="en-US" sz="1400" dirty="0"/>
+          </a:p>
+          <a:p>
+            <a:pPr indent="0" marL="0">
+              <a:lnSpc>
+                <a:spcPct val="160000"/>
+              </a:lnSpc>
+              <a:buNone/>
+            </a:pPr>
+            <a:r>
+              <a:rPr lang="en-US" sz="1400" dirty="0">
+                <a:solidFill>
+                  <a:srgbClr val="332F2A"/>
+                </a:solidFill>
+                <a:latin typeface="IBM Plex Mono" pitchFamily="34" charset="0"/>
+                <a:ea typeface="IBM Plex Mono" pitchFamily="34" charset="-122"/>
+                <a:cs typeface="IBM Plex Mono" pitchFamily="34" charset="-120"/>
+              </a:rPr>
+              <a:t>underscores become spaces</a:t>
+            </a:r>
+            <a:endParaRPr lang="en-US" sz="1400" dirty="0"/>
+          </a:p>
+          <a:p>
+            <a:pPr indent="0" marL="0">
+              <a:lnSpc>
+                <a:spcPct val="160000"/>
+              </a:lnSpc>
+              <a:buNone/>
+            </a:pPr>
+            <a:r>
+              <a:rPr lang="en-US" sz="1400" dirty="0">
+                <a:solidFill>
+                  <a:srgbClr val="332F2A"/>
+                </a:solidFill>
+                <a:latin typeface="IBM Plex Mono" pitchFamily="34" charset="0"/>
+                <a:ea typeface="IBM Plex Mono" pitchFamily="34" charset="-122"/>
+                <a:cs typeface="IBM Plex Mono" pitchFamily="34" charset="-120"/>
+              </a:rPr>
+              <a:t>there is no routing code to write</a:t>
+            </a:r>
+            <a:endParaRPr lang="en-US" sz="1400" dirty="0"/>
+          </a:p>
+        </p:txBody>
+      </p:sp>
+      <p:sp>
+        <p:nvSpPr>
+          <p:cNvPr id="11" name="Text 7"/>
+          <p:cNvSpPr/>
+          <p:nvPr/>
+        </p:nvSpPr>
+        <p:spPr>
+          <a:xfrm>
+            <a:off x="7431430" y="1511300"/>
+            <a:ext cx="4201770" cy="1305560"/>
           </a:xfrm>
           <a:prstGeom prst="rect">
             <a:avLst/>
@@ -26391,7 +26738,7 @@
                 <a:ea typeface="Libre Franklin" pitchFamily="34" charset="-122"/>
                 <a:cs typeface="Libre Franklin" pitchFamily="34" charset="-120"/>
               </a:rPr>
-              <a:t>Steven Smith, “The Scientist and Engineer's Guide to Digital Signal Processing” — free in full at dspguide.com. Chapters 8 to 12 cover everything on the last three slides.</a:t>
+              <a:t>Streamlit turns every file in pages/ into a tab by itself. You never register a route or edit a config — you add a file, and it appears.</a:t>
             </a:r>
             <a:endParaRPr lang="en-US" sz="1600" dirty="0"/>
           </a:p>
@@ -26399,14 +26746,14 @@
       </p:sp>
       <p:sp>
         <p:nvSpPr>
-          <p:cNvPr id="13" name="Text 7"/>
-          <p:cNvSpPr/>
-          <p:nvPr/>
-        </p:nvSpPr>
-        <p:spPr>
-          <a:xfrm>
-            <a:off x="558800" y="3274060"/>
-            <a:ext cx="5283200" cy="1270000"/>
+          <p:cNvPr id="12" name="Text 8"/>
+          <p:cNvSpPr/>
+          <p:nvPr/>
+        </p:nvSpPr>
+        <p:spPr>
+          <a:xfrm>
+            <a:off x="7431430" y="2943860"/>
+            <a:ext cx="4201770" cy="1600200"/>
           </a:xfrm>
           <a:prstGeom prst="rect">
             <a:avLst/>
@@ -26433,7 +26780,7 @@
                 <a:ea typeface="Libre Franklin" pitchFamily="34" charset="-122"/>
                 <a:cs typeface="Libre Franklin" pitchFamily="34" charset="-120"/>
               </a:rPr>
-              <a:t>For intuition rather than algebra, 3Blue1Brown's “But what is the Fourier Transform?” is twenty minutes and worth all of them. Search Nyquist–Shannon sampling theorem for the ceiling.</a:t>
+              <a:t>That is why the plan at Gate 3 gives one file to one task. Next week it is one file to one person, and four people never touch the same one.</a:t>
             </a:r>
             <a:endParaRPr lang="en-US" sz="1600" dirty="0"/>
           </a:p>
@@ -26441,75 +26788,53 @@
       </p:sp>
       <p:sp>
         <p:nvSpPr>
-          <p:cNvPr id="14" name="Text 8"/>
-          <p:cNvSpPr/>
-          <p:nvPr/>
-        </p:nvSpPr>
-        <p:spPr>
-          <a:xfrm>
-            <a:off x="6350000" y="1511300"/>
-            <a:ext cx="5283200" cy="254000"/>
-          </a:xfrm>
-          <a:prstGeom prst="rect">
-            <a:avLst/>
-          </a:prstGeom>
-          <a:noFill/>
-          <a:ln/>
-        </p:spPr>
-        <p:txBody>
-          <a:bodyPr wrap="square" lIns="0" tIns="0" rIns="0" bIns="0" rtlCol="0" anchor="t"/>
-          <a:lstStyle/>
-          <a:p>
-            <a:pPr algn="l" indent="0" marL="0">
-              <a:lnSpc>
-                <a:spcPct val="145000"/>
-              </a:lnSpc>
-              <a:buNone/>
-            </a:pPr>
-            <a:r>
-              <a:rPr lang="en-US" sz="1300" spc="130" kern="0" dirty="0">
-                <a:solidFill>
-                  <a:srgbClr val="A87A2E"/>
-                </a:solidFill>
-                <a:latin typeface="IBM Plex Mono" pitchFamily="34" charset="0"/>
-                <a:ea typeface="IBM Plex Mono" pitchFamily="34" charset="-122"/>
-                <a:cs typeface="IBM Plex Mono" pitchFamily="34" charset="-120"/>
-              </a:rPr>
-              <a:t>THE TOOLS</a:t>
-            </a:r>
-            <a:endParaRPr lang="en-US" sz="1300" dirty="0"/>
-          </a:p>
-        </p:txBody>
-      </p:sp>
-      <p:sp>
-        <p:nvSpPr>
-          <p:cNvPr id="15" name="Text 9"/>
-          <p:cNvSpPr/>
-          <p:nvPr/>
-        </p:nvSpPr>
-        <p:spPr>
-          <a:xfrm>
-            <a:off x="6350000" y="1917700"/>
-            <a:ext cx="5283200" cy="1270000"/>
-          </a:xfrm>
-          <a:prstGeom prst="rect">
-            <a:avLst/>
-          </a:prstGeom>
-          <a:noFill/>
-          <a:ln/>
-        </p:spPr>
-        <p:txBody>
-          <a:bodyPr wrap="square" lIns="0" tIns="0" rIns="0" bIns="0" rtlCol="0" anchor="t"/>
-          <a:lstStyle/>
-          <a:p>
-            <a:pPr algn="l" indent="0" marL="0">
-              <a:lnSpc>
-                <a:spcPct val="145000"/>
-              </a:lnSpc>
-              <a:buNone/>
-            </a:pPr>
-            <a:r>
-              <a:rPr lang="en-US" sz="1600" dirty="0">
+          <p:cNvPr id="13" name="Shape 9"/>
+          <p:cNvSpPr/>
+          <p:nvPr/>
+        </p:nvSpPr>
+        <p:spPr>
+          <a:xfrm>
+            <a:off x="7431430" y="5384800"/>
+            <a:ext cx="12700" cy="698500"/>
+          </a:xfrm>
+          <a:prstGeom prst="rect">
+            <a:avLst/>
+          </a:prstGeom>
+          <a:solidFill>
+            <a:srgbClr val="A87A2E"/>
+          </a:solidFill>
+          <a:ln/>
+        </p:spPr>
+      </p:sp>
+      <p:sp>
+        <p:nvSpPr>
+          <p:cNvPr id="14" name="Text 10"/>
+          <p:cNvSpPr/>
+          <p:nvPr/>
+        </p:nvSpPr>
+        <p:spPr>
+          <a:xfrm>
+            <a:off x="7596530" y="5416550"/>
+            <a:ext cx="4036670" cy="698500"/>
+          </a:xfrm>
+          <a:prstGeom prst="rect">
+            <a:avLst/>
+          </a:prstGeom>
+          <a:noFill/>
+          <a:ln/>
+        </p:spPr>
+        <p:txBody>
+          <a:bodyPr wrap="square" lIns="0" tIns="0" rIns="0" bIns="0" rtlCol="0" anchor="t"/>
+          <a:lstStyle/>
+          <a:p>
+            <a:pPr algn="l" indent="0" marL="0">
+              <a:lnSpc>
+                <a:spcPct val="140000"/>
+              </a:lnSpc>
+              <a:buNone/>
+            </a:pPr>
+            <a:r>
+              <a:rPr lang="en-US" sz="1500" dirty="0">
                 <a:solidFill>
                   <a:srgbClr val="332F2A"/>
                 </a:solidFill>
@@ -26517,51 +26842,9 @@
                 <a:ea typeface="Libre Franklin" pitchFamily="34" charset="-122"/>
                 <a:cs typeface="Libre Franklin" pitchFamily="34" charset="-120"/>
               </a:rPr>
-              <a:t>numpy.org documents fft.rfft and fft.rfftfreq, including the normalisation conventions behind every scaling bug you saw today.</a:t>
-            </a:r>
-            <a:endParaRPr lang="en-US" sz="1600" dirty="0"/>
-          </a:p>
-        </p:txBody>
-      </p:sp>
-      <p:sp>
-        <p:nvSpPr>
-          <p:cNvPr id="16" name="Text 10"/>
-          <p:cNvSpPr/>
-          <p:nvPr/>
-        </p:nvSpPr>
-        <p:spPr>
-          <a:xfrm>
-            <a:off x="6350000" y="3274060"/>
-            <a:ext cx="5283200" cy="1270000"/>
-          </a:xfrm>
-          <a:prstGeom prst="rect">
-            <a:avLst/>
-          </a:prstGeom>
-          <a:noFill/>
-          <a:ln/>
-        </p:spPr>
-        <p:txBody>
-          <a:bodyPr wrap="square" lIns="0" tIns="0" rIns="0" bIns="0" rtlCol="0" anchor="t"/>
-          <a:lstStyle/>
-          <a:p>
-            <a:pPr algn="l" indent="0" marL="0">
-              <a:lnSpc>
-                <a:spcPct val="145000"/>
-              </a:lnSpc>
-              <a:buNone/>
-            </a:pPr>
-            <a:r>
-              <a:rPr lang="en-US" sz="1600" dirty="0">
-                <a:solidFill>
-                  <a:srgbClr val="77726A"/>
-                </a:solidFill>
-                <a:latin typeface="Libre Franklin" pitchFamily="34" charset="0"/>
-                <a:ea typeface="Libre Franklin" pitchFamily="34" charset="-122"/>
-                <a:cs typeface="Libre Franklin" pitchFamily="34" charset="-120"/>
-              </a:rPr>
-              <a:t>docs.streamlit.io for the interface and docs.pytest.org for the tests. Both are the official pages, both are shorter than you would expect, and both are what your agent was trained on.</a:t>
-            </a:r>
-            <a:endParaRPr lang="en-US" sz="1600" dirty="0"/>
+              <a:t>The convention doing the real work here is a naming rule, not a framework feature.</a:t>
+            </a:r>
+            <a:endParaRPr lang="en-US" sz="1500" dirty="0"/>
           </a:p>
         </p:txBody>
       </p:sp>
@@ -26633,15 +26916,63 @@
                 <a:ea typeface="IBM Plex Mono" pitchFamily="34" charset="-122"/>
                 <a:cs typeface="IBM Plex Mono" pitchFamily="34" charset="-120"/>
               </a:rPr>
-              <a:t>SECTION 07</a:t>
+              <a:t>SECTION 06</a:t>
             </a:r>
             <a:endParaRPr lang="en-US" sz="1200" dirty="0"/>
           </a:p>
         </p:txBody>
       </p:sp>
-      <p:sp>
-        <p:nvSpPr>
-          <p:cNvPr id="3" name="Text 1"/>
+      <p:pic>
+        <p:nvPicPr>
+          <p:cNvPr id="3" name="Image 0" descr="icons/streamlit.png">    </p:cNvPr>
+          <p:cNvPicPr>
+            <a:picLocks noChangeAspect="1"/>
+          </p:cNvPicPr>
+          <p:nvPr/>
+        </p:nvPicPr>
+        <p:blipFill>
+          <a:blip r:embed="rId1"/>
+          <a:stretch>
+            <a:fillRect/>
+          </a:stretch>
+        </p:blipFill>
+        <p:spPr>
+          <a:xfrm>
+            <a:off x="11087100" y="361950"/>
+            <a:ext cx="203200" cy="203200"/>
+          </a:xfrm>
+          <a:prstGeom prst="rect">
+            <a:avLst/>
+          </a:prstGeom>
+        </p:spPr>
+      </p:pic>
+      <p:pic>
+        <p:nvPicPr>
+          <p:cNvPr id="4" name="Image 1" descr="icons/python.png">    </p:cNvPr>
+          <p:cNvPicPr>
+            <a:picLocks noChangeAspect="1"/>
+          </p:cNvPicPr>
+          <p:nvPr/>
+        </p:nvPicPr>
+        <p:blipFill>
+          <a:blip r:embed="rId2"/>
+          <a:stretch>
+            <a:fillRect/>
+          </a:stretch>
+        </p:blipFill>
+        <p:spPr>
+          <a:xfrm>
+            <a:off x="11430000" y="361950"/>
+            <a:ext cx="203200" cy="203200"/>
+          </a:xfrm>
+          <a:prstGeom prst="rect">
+            <a:avLst/>
+          </a:prstGeom>
+        </p:spPr>
+      </p:pic>
+      <p:sp>
+        <p:nvSpPr>
+          <p:cNvPr id="5" name="Text 1"/>
           <p:cNvSpPr/>
           <p:nvPr/>
         </p:nvSpPr>
@@ -26675,7 +27006,7 @@
                 <a:ea typeface="Libre Franklin" pitchFamily="34" charset="-122"/>
                 <a:cs typeface="Libre Franklin" pitchFamily="34" charset="-120"/>
               </a:rPr>
-              <a:t>Read the reference before you leave</a:t>
+              <a:t>Widgets in, chart out, and it reruns every time</a:t>
             </a:r>
             <a:endParaRPr lang="en-US" sz="2800" dirty="0"/>
           </a:p>
@@ -26683,7 +27014,7 @@
       </p:sp>
       <p:sp>
         <p:nvSpPr>
-          <p:cNvPr id="4" name="Shape 2"/>
+          <p:cNvPr id="6" name="Shape 2"/>
           <p:cNvSpPr/>
           <p:nvPr/>
         </p:nvSpPr>
@@ -26703,7 +27034,7 @@
       </p:sp>
       <p:sp>
         <p:nvSpPr>
-          <p:cNvPr id="5" name="Text 3"/>
+          <p:cNvPr id="7" name="Text 3"/>
           <p:cNvSpPr/>
           <p:nvPr/>
         </p:nvSpPr>
@@ -26745,7 +27076,7 @@
       </p:sp>
       <p:sp>
         <p:nvSpPr>
-          <p:cNvPr id="6" name="Text 4"/>
+          <p:cNvPr id="8" name="Text 4"/>
           <p:cNvSpPr/>
           <p:nvPr/>
         </p:nvSpPr>
@@ -26787,56 +27118,310 @@
       </p:sp>
       <p:sp>
         <p:nvSpPr>
-          <p:cNvPr id="7" name="Text 5"/>
+          <p:cNvPr id="9" name="Shape 5"/>
           <p:cNvSpPr/>
           <p:nvPr/>
         </p:nvSpPr>
         <p:spPr>
           <a:xfrm>
             <a:off x="558800" y="1511300"/>
-            <a:ext cx="190500" cy="317500"/>
-          </a:xfrm>
-          <a:prstGeom prst="rect">
-            <a:avLst/>
-          </a:prstGeom>
-          <a:noFill/>
-          <a:ln/>
-        </p:spPr>
-        <p:txBody>
-          <a:bodyPr wrap="square" lIns="0" tIns="0" rIns="0" bIns="0" rtlCol="0" anchor="t"/>
-          <a:lstStyle/>
-          <a:p>
-            <a:pPr algn="l" indent="0" marL="0">
-              <a:lnSpc>
-                <a:spcPct val="140000"/>
-              </a:lnSpc>
-              <a:buNone/>
-            </a:pPr>
-            <a:r>
-              <a:rPr lang="en-US" sz="1700" dirty="0">
-                <a:solidFill>
-                  <a:srgbClr val="A87A2E"/>
+            <a:ext cx="6517030" cy="4572000"/>
+          </a:xfrm>
+          <a:prstGeom prst="rect">
+            <a:avLst/>
+          </a:prstGeom>
+          <a:solidFill>
+            <a:srgbClr val="F5F2EC"/>
+          </a:solidFill>
+          <a:ln w="6350">
+            <a:solidFill>
+              <a:srgbClr val="E1DED7"/>
+            </a:solidFill>
+            <a:prstDash val="solid"/>
+          </a:ln>
+        </p:spPr>
+      </p:sp>
+      <p:sp>
+        <p:nvSpPr>
+          <p:cNvPr id="10" name="Text 6"/>
+          <p:cNvSpPr/>
+          <p:nvPr/>
+        </p:nvSpPr>
+        <p:spPr>
+          <a:xfrm>
+            <a:off x="800100" y="1727200"/>
+            <a:ext cx="6034430" cy="4140200"/>
+          </a:xfrm>
+          <a:prstGeom prst="rect">
+            <a:avLst/>
+          </a:prstGeom>
+          <a:noFill/>
+          <a:ln/>
+        </p:spPr>
+        <p:txBody>
+          <a:bodyPr wrap="square" lIns="0" tIns="0" rIns="0" bIns="0" rtlCol="0" anchor="t"/>
+          <a:lstStyle/>
+          <a:p>
+            <a:pPr indent="0" marL="0">
+              <a:lnSpc>
+                <a:spcPct val="160000"/>
+              </a:lnSpc>
+              <a:buNone/>
+            </a:pPr>
+            <a:r>
+              <a:rPr lang="en-US" sz="1400" b="1" dirty="0">
+                <a:solidFill>
+                  <a:srgbClr val="332F2A"/>
+                </a:solidFill>
+                <a:latin typeface="IBM Plex Mono" pitchFamily="34" charset="0"/>
+                <a:ea typeface="IBM Plex Mono" pitchFamily="34" charset="-122"/>
+                <a:cs typeface="IBM Plex Mono" pitchFamily="34" charset="-120"/>
+              </a:rPr>
+              <a:t># the page, top to bottom</a:t>
+            </a:r>
+            <a:endParaRPr lang="en-US" sz="1400" dirty="0"/>
+          </a:p>
+          <a:p>
+            <a:pPr indent="0" marL="0">
+              <a:lnSpc>
+                <a:spcPct val="160000"/>
+              </a:lnSpc>
+              <a:buNone/>
+            </a:pPr>
+            <a:endParaRPr lang="en-US" sz="1400" dirty="0"/>
+          </a:p>
+          <a:p>
+            <a:pPr indent="0" marL="0">
+              <a:lnSpc>
+                <a:spcPct val="160000"/>
+              </a:lnSpc>
+              <a:buNone/>
+            </a:pPr>
+            <a:r>
+              <a:rPr lang="en-US" sz="1400" dirty="0">
+                <a:solidFill>
+                  <a:srgbClr val="332F2A"/>
+                </a:solidFill>
+                <a:latin typeface="IBM Plex Mono" pitchFamily="34" charset="0"/>
+                <a:ea typeface="IBM Plex Mono" pitchFamily="34" charset="-122"/>
+                <a:cs typeface="IBM Plex Mono" pitchFamily="34" charset="-120"/>
+              </a:rPr>
+              <a:t>fs = st.select_slider(...)</a:t>
+            </a:r>
+            <a:endParaRPr lang="en-US" sz="1400" dirty="0"/>
+          </a:p>
+          <a:p>
+            <a:pPr indent="0" marL="0">
+              <a:lnSpc>
+                <a:spcPct val="160000"/>
+              </a:lnSpc>
+              <a:buNone/>
+            </a:pPr>
+            <a:r>
+              <a:rPr lang="en-US" sz="1400" dirty="0">
+                <a:solidFill>
+                  <a:srgbClr val="332F2A"/>
+                </a:solidFill>
+                <a:latin typeface="IBM Plex Mono" pitchFamily="34" charset="0"/>
+                <a:ea typeface="IBM Plex Mono" pitchFamily="34" charset="-122"/>
+                <a:cs typeface="IBM Plex Mono" pitchFamily="34" charset="-120"/>
+              </a:rPr>
+              <a:t>freq_a = st.number_input(...)</a:t>
+            </a:r>
+            <a:endParaRPr lang="en-US" sz="1400" dirty="0"/>
+          </a:p>
+          <a:p>
+            <a:pPr indent="0" marL="0">
+              <a:lnSpc>
+                <a:spcPct val="160000"/>
+              </a:lnSpc>
+              <a:buNone/>
+            </a:pPr>
+            <a:r>
+              <a:rPr lang="en-US" sz="1400" dirty="0">
+                <a:solidFill>
+                  <a:srgbClr val="332F2A"/>
+                </a:solidFill>
+                <a:latin typeface="IBM Plex Mono" pitchFamily="34" charset="0"/>
+                <a:ea typeface="IBM Plex Mono" pitchFamily="34" charset="-122"/>
+                <a:cs typeface="IBM Plex Mono" pitchFamily="34" charset="-120"/>
+              </a:rPr>
+              <a:t>amp_a = st.number_input(...)</a:t>
+            </a:r>
+            <a:endParaRPr lang="en-US" sz="1400" dirty="0"/>
+          </a:p>
+          <a:p>
+            <a:pPr indent="0" marL="0">
+              <a:lnSpc>
+                <a:spcPct val="160000"/>
+              </a:lnSpc>
+              <a:buNone/>
+            </a:pPr>
+            <a:endParaRPr lang="en-US" sz="1400" dirty="0"/>
+          </a:p>
+          <a:p>
+            <a:pPr indent="0" marL="0">
+              <a:lnSpc>
+                <a:spcPct val="160000"/>
+              </a:lnSpc>
+              <a:buNone/>
+            </a:pPr>
+            <a:r>
+              <a:rPr lang="en-US" sz="1400" dirty="0">
+                <a:solidFill>
+                  <a:srgbClr val="332F2A"/>
+                </a:solidFill>
+                <a:latin typeface="IBM Plex Mono" pitchFamily="34" charset="0"/>
+                <a:ea typeface="IBM Plex Mono" pitchFamily="34" charset="-122"/>
+                <a:cs typeface="IBM Plex Mono" pitchFamily="34" charset="-120"/>
+              </a:rPr>
+              <a:t>times, sig = make_signal(...)</a:t>
+            </a:r>
+            <a:endParaRPr lang="en-US" sz="1400" dirty="0"/>
+          </a:p>
+          <a:p>
+            <a:pPr indent="0" marL="0">
+              <a:lnSpc>
+                <a:spcPct val="160000"/>
+              </a:lnSpc>
+              <a:buNone/>
+            </a:pPr>
+            <a:r>
+              <a:rPr lang="en-US" sz="1400" dirty="0">
+                <a:solidFill>
+                  <a:srgbClr val="332F2A"/>
+                </a:solidFill>
+                <a:latin typeface="IBM Plex Mono" pitchFamily="34" charset="0"/>
+                <a:ea typeface="IBM Plex Mono" pitchFamily="34" charset="-122"/>
+                <a:cs typeface="IBM Plex Mono" pitchFamily="34" charset="-120"/>
+              </a:rPr>
+              <a:t>freqs, mag = spectrum(sig, fs)</a:t>
+            </a:r>
+            <a:endParaRPr lang="en-US" sz="1400" dirty="0"/>
+          </a:p>
+          <a:p>
+            <a:pPr indent="0" marL="0">
+              <a:lnSpc>
+                <a:spcPct val="160000"/>
+              </a:lnSpc>
+              <a:buNone/>
+            </a:pPr>
+            <a:endParaRPr lang="en-US" sz="1400" dirty="0"/>
+          </a:p>
+          <a:p>
+            <a:pPr indent="0" marL="0">
+              <a:lnSpc>
+                <a:spcPct val="160000"/>
+              </a:lnSpc>
+              <a:buNone/>
+            </a:pPr>
+            <a:r>
+              <a:rPr lang="en-US" sz="1400" dirty="0">
+                <a:solidFill>
+                  <a:srgbClr val="332F2A"/>
+                </a:solidFill>
+                <a:latin typeface="IBM Plex Mono" pitchFamily="34" charset="0"/>
+                <a:ea typeface="IBM Plex Mono" pitchFamily="34" charset="-122"/>
+                <a:cs typeface="IBM Plex Mono" pitchFamily="34" charset="-120"/>
+              </a:rPr>
+              <a:t>st.metric("Strongest frequency", ...)</a:t>
+            </a:r>
+            <a:endParaRPr lang="en-US" sz="1400" dirty="0"/>
+          </a:p>
+          <a:p>
+            <a:pPr indent="0" marL="0">
+              <a:lnSpc>
+                <a:spcPct val="160000"/>
+              </a:lnSpc>
+              <a:buNone/>
+            </a:pPr>
+            <a:r>
+              <a:rPr lang="en-US" sz="1400" dirty="0">
+                <a:solidFill>
+                  <a:srgbClr val="332F2A"/>
+                </a:solidFill>
+                <a:latin typeface="IBM Plex Mono" pitchFamily="34" charset="0"/>
+                <a:ea typeface="IBM Plex Mono" pitchFamily="34" charset="-122"/>
+                <a:cs typeface="IBM Plex Mono" pitchFamily="34" charset="-120"/>
+              </a:rPr>
+              <a:t>st.pyplot(figure)</a:t>
+            </a:r>
+            <a:endParaRPr lang="en-US" sz="1400" dirty="0"/>
+          </a:p>
+          <a:p>
+            <a:pPr indent="0" marL="0">
+              <a:lnSpc>
+                <a:spcPct val="160000"/>
+              </a:lnSpc>
+              <a:buNone/>
+            </a:pPr>
+            <a:r>
+              <a:rPr lang="en-US" sz="1400" dirty="0">
+                <a:solidFill>
+                  <a:srgbClr val="332F2A"/>
+                </a:solidFill>
+                <a:latin typeface="IBM Plex Mono" pitchFamily="34" charset="0"/>
+                <a:ea typeface="IBM Plex Mono" pitchFamily="34" charset="-122"/>
+                <a:cs typeface="IBM Plex Mono" pitchFamily="34" charset="-120"/>
+              </a:rPr>
+              <a:t>st.info("check it yourself ...")</a:t>
+            </a:r>
+            <a:endParaRPr lang="en-US" sz="1400" dirty="0"/>
+          </a:p>
+        </p:txBody>
+      </p:sp>
+      <p:sp>
+        <p:nvSpPr>
+          <p:cNvPr id="11" name="Text 7"/>
+          <p:cNvSpPr/>
+          <p:nvPr/>
+        </p:nvSpPr>
+        <p:spPr>
+          <a:xfrm>
+            <a:off x="7431430" y="1511300"/>
+            <a:ext cx="4201770" cy="1600200"/>
+          </a:xfrm>
+          <a:prstGeom prst="rect">
+            <a:avLst/>
+          </a:prstGeom>
+          <a:noFill/>
+          <a:ln/>
+        </p:spPr>
+        <p:txBody>
+          <a:bodyPr wrap="square" lIns="0" tIns="0" rIns="0" bIns="0" rtlCol="0" anchor="t"/>
+          <a:lstStyle/>
+          <a:p>
+            <a:pPr algn="l" indent="0" marL="0">
+              <a:lnSpc>
+                <a:spcPct val="145000"/>
+              </a:lnSpc>
+              <a:buNone/>
+            </a:pPr>
+            <a:r>
+              <a:rPr lang="en-US" sz="1600" dirty="0">
+                <a:solidFill>
+                  <a:srgbClr val="332F2A"/>
                 </a:solidFill>
                 <a:latin typeface="Libre Franklin" pitchFamily="34" charset="0"/>
                 <a:ea typeface="Libre Franklin" pitchFamily="34" charset="-122"/>
                 <a:cs typeface="Libre Franklin" pitchFamily="34" charset="-120"/>
               </a:rPr>
-              <a:t>—</a:t>
-            </a:r>
-            <a:endParaRPr lang="en-US" sz="1700" dirty="0"/>
-          </a:p>
-        </p:txBody>
-      </p:sp>
-      <p:sp>
-        <p:nvSpPr>
-          <p:cNvPr id="8" name="Text 6"/>
-          <p:cNvSpPr/>
-          <p:nvPr/>
-        </p:nvSpPr>
-        <p:spPr>
-          <a:xfrm>
-            <a:off x="927100" y="1511300"/>
-            <a:ext cx="9156700" cy="753110"/>
+              <a:t>A widget is not an event handler. st.number_input hands back whatever is in the box right now, and the script carries straight on using it.</a:t>
+            </a:r>
+            <a:endParaRPr lang="en-US" sz="1600" dirty="0"/>
+          </a:p>
+        </p:txBody>
+      </p:sp>
+      <p:sp>
+        <p:nvSpPr>
+          <p:cNvPr id="12" name="Text 8"/>
+          <p:cNvSpPr/>
+          <p:nvPr/>
+        </p:nvSpPr>
+        <p:spPr>
+          <a:xfrm>
+            <a:off x="7431430" y="3238500"/>
+            <a:ext cx="4201770" cy="1894840"/>
           </a:xfrm>
           <a:prstGeom prst="rect">
             <a:avLst/>
@@ -26855,24 +27440,69 @@
               <a:buNone/>
             </a:pPr>
             <a:r>
-              <a:rPr lang="en-US" sz="1700" b="1" dirty="0">
-                <a:solidFill>
-                  <a:srgbClr val="332F2A"/>
+              <a:rPr lang="en-US" sz="1600" dirty="0">
+                <a:solidFill>
+                  <a:srgbClr val="77726A"/>
                 </a:solidFill>
                 <a:latin typeface="Libre Franklin" pitchFamily="34" charset="0"/>
                 <a:ea typeface="Libre Franklin" pitchFamily="34" charset="-122"/>
                 <a:cs typeface="Libre Franklin" pitchFamily="34" charset="-120"/>
               </a:rPr>
-              <a:t>Everyone does this, </a:t>
-            </a:r>
-            <a:pPr algn="l" indent="0" marL="0">
-              <a:lnSpc>
-                <a:spcPct val="145000"/>
-              </a:lnSpc>
-              <a:buNone/>
-            </a:pPr>
-            <a:r>
-              <a:rPr lang="en-US" sz="1700" dirty="0">
+              <a:t>Move any control and Streamlit reruns this file from the top — no callbacks, no state to wire. st.columns sets two inputs side by side; st.metric, st.pyplot and st.info are how the page shows a result.</a:t>
+            </a:r>
+            <a:endParaRPr lang="en-US" sz="1600" dirty="0"/>
+          </a:p>
+        </p:txBody>
+      </p:sp>
+      <p:sp>
+        <p:nvSpPr>
+          <p:cNvPr id="13" name="Shape 9"/>
+          <p:cNvSpPr/>
+          <p:nvPr/>
+        </p:nvSpPr>
+        <p:spPr>
+          <a:xfrm>
+            <a:off x="7431430" y="5384800"/>
+            <a:ext cx="12700" cy="698500"/>
+          </a:xfrm>
+          <a:prstGeom prst="rect">
+            <a:avLst/>
+          </a:prstGeom>
+          <a:solidFill>
+            <a:srgbClr val="A87A2E"/>
+          </a:solidFill>
+          <a:ln/>
+        </p:spPr>
+      </p:sp>
+      <p:sp>
+        <p:nvSpPr>
+          <p:cNvPr id="14" name="Text 10"/>
+          <p:cNvSpPr/>
+          <p:nvPr/>
+        </p:nvSpPr>
+        <p:spPr>
+          <a:xfrm>
+            <a:off x="7596530" y="5416550"/>
+            <a:ext cx="4036670" cy="698500"/>
+          </a:xfrm>
+          <a:prstGeom prst="rect">
+            <a:avLst/>
+          </a:prstGeom>
+          <a:noFill/>
+          <a:ln/>
+        </p:spPr>
+        <p:txBody>
+          <a:bodyPr wrap="square" lIns="0" tIns="0" rIns="0" bIns="0" rtlCol="0" anchor="t"/>
+          <a:lstStyle/>
+          <a:p>
+            <a:pPr algn="l" indent="0" marL="0">
+              <a:lnSpc>
+                <a:spcPct val="140000"/>
+              </a:lnSpc>
+              <a:buNone/>
+            </a:pPr>
+            <a:r>
+              <a:rPr lang="en-US" sz="1500" dirty="0">
                 <a:solidFill>
                   <a:srgbClr val="332F2A"/>
                 </a:solidFill>
@@ -26880,295 +27510,9 @@
                 <a:ea typeface="Libre Franklin" pitchFamily="34" charset="-122"/>
                 <a:cs typeface="Libre Franklin" pitchFamily="34" charset="-120"/>
               </a:rPr>
-              <a:t>whether your own version works or not. The prompts are in labs/EXPLAIN.md.</a:t>
-            </a:r>
-            <a:endParaRPr lang="en-US" sz="1700" dirty="0"/>
-          </a:p>
-        </p:txBody>
-      </p:sp>
-      <p:sp>
-        <p:nvSpPr>
-          <p:cNvPr id="9" name="Text 7"/>
-          <p:cNvSpPr/>
-          <p:nvPr/>
-        </p:nvSpPr>
-        <p:spPr>
-          <a:xfrm>
-            <a:off x="558800" y="2391410"/>
-            <a:ext cx="190500" cy="317500"/>
-          </a:xfrm>
-          <a:prstGeom prst="rect">
-            <a:avLst/>
-          </a:prstGeom>
-          <a:noFill/>
-          <a:ln/>
-        </p:spPr>
-        <p:txBody>
-          <a:bodyPr wrap="square" lIns="0" tIns="0" rIns="0" bIns="0" rtlCol="0" anchor="t"/>
-          <a:lstStyle/>
-          <a:p>
-            <a:pPr algn="l" indent="0" marL="0">
-              <a:lnSpc>
-                <a:spcPct val="140000"/>
-              </a:lnSpc>
-              <a:buNone/>
-            </a:pPr>
-            <a:r>
-              <a:rPr lang="en-US" sz="1700" dirty="0">
-                <a:solidFill>
-                  <a:srgbClr val="A87A2E"/>
-                </a:solidFill>
-                <a:latin typeface="Libre Franklin" pitchFamily="34" charset="0"/>
-                <a:ea typeface="Libre Franklin" pitchFamily="34" charset="-122"/>
-                <a:cs typeface="Libre Franklin" pitchFamily="34" charset="-120"/>
-              </a:rPr>
-              <a:t>—</a:t>
-            </a:r>
-            <a:endParaRPr lang="en-US" sz="1700" dirty="0"/>
-          </a:p>
-        </p:txBody>
-      </p:sp>
-      <p:sp>
-        <p:nvSpPr>
-          <p:cNvPr id="10" name="Text 8"/>
-          <p:cNvSpPr/>
-          <p:nvPr/>
-        </p:nvSpPr>
-        <p:spPr>
-          <a:xfrm>
-            <a:off x="927100" y="2391410"/>
-            <a:ext cx="9156700" cy="753110"/>
-          </a:xfrm>
-          <a:prstGeom prst="rect">
-            <a:avLst/>
-          </a:prstGeom>
-          <a:noFill/>
-          <a:ln/>
-        </p:spPr>
-        <p:txBody>
-          <a:bodyPr wrap="square" lIns="0" tIns="0" rIns="0" bIns="0" rtlCol="0" anchor="t"/>
-          <a:lstStyle/>
-          <a:p>
-            <a:pPr algn="l" indent="0" marL="0">
-              <a:lnSpc>
-                <a:spcPct val="145000"/>
-              </a:lnSpc>
-              <a:buNone/>
-            </a:pPr>
-            <a:r>
-              <a:rPr lang="en-US" sz="1700" b="1" dirty="0">
-                <a:solidFill>
-                  <a:srgbClr val="332F2A"/>
-                </a:solidFill>
-                <a:latin typeface="Libre Franklin" pitchFamily="34" charset="0"/>
-                <a:ea typeface="Libre Franklin" pitchFamily="34" charset="-122"/>
-                <a:cs typeface="Libre Franklin" pitchFamily="34" charset="-120"/>
-              </a:rPr>
-              <a:t>Ask it to break the code. </a:t>
-            </a:r>
-            <a:pPr algn="l" indent="0" marL="0">
-              <a:lnSpc>
-                <a:spcPct val="145000"/>
-              </a:lnSpc>
-              <a:buNone/>
-            </a:pPr>
-            <a:r>
-              <a:rPr lang="en-US" sz="1700" dirty="0">
-                <a:solidFill>
-                  <a:srgbClr val="332F2A"/>
-                </a:solidFill>
-                <a:latin typeface="Libre Franklin" pitchFamily="34" charset="0"/>
-                <a:ea typeface="Libre Franklin" pitchFamily="34" charset="-122"/>
-                <a:cs typeface="Libre Franklin" pitchFamily="34" charset="-120"/>
-              </a:rPr>
-              <a:t>Change the 2/n to 1/n, run the tests, watch which two fail, then change it back.</a:t>
-            </a:r>
-            <a:endParaRPr lang="en-US" sz="1700" dirty="0"/>
-          </a:p>
-        </p:txBody>
-      </p:sp>
-      <p:sp>
-        <p:nvSpPr>
-          <p:cNvPr id="11" name="Text 9"/>
-          <p:cNvSpPr/>
-          <p:nvPr/>
-        </p:nvSpPr>
-        <p:spPr>
-          <a:xfrm>
-            <a:off x="558800" y="3271520"/>
-            <a:ext cx="190500" cy="317500"/>
-          </a:xfrm>
-          <a:prstGeom prst="rect">
-            <a:avLst/>
-          </a:prstGeom>
-          <a:noFill/>
-          <a:ln/>
-        </p:spPr>
-        <p:txBody>
-          <a:bodyPr wrap="square" lIns="0" tIns="0" rIns="0" bIns="0" rtlCol="0" anchor="t"/>
-          <a:lstStyle/>
-          <a:p>
-            <a:pPr algn="l" indent="0" marL="0">
-              <a:lnSpc>
-                <a:spcPct val="140000"/>
-              </a:lnSpc>
-              <a:buNone/>
-            </a:pPr>
-            <a:r>
-              <a:rPr lang="en-US" sz="1700" dirty="0">
-                <a:solidFill>
-                  <a:srgbClr val="A87A2E"/>
-                </a:solidFill>
-                <a:latin typeface="Libre Franklin" pitchFamily="34" charset="0"/>
-                <a:ea typeface="Libre Franklin" pitchFamily="34" charset="-122"/>
-                <a:cs typeface="Libre Franklin" pitchFamily="34" charset="-120"/>
-              </a:rPr>
-              <a:t>—</a:t>
-            </a:r>
-            <a:endParaRPr lang="en-US" sz="1700" dirty="0"/>
-          </a:p>
-        </p:txBody>
-      </p:sp>
-      <p:sp>
-        <p:nvSpPr>
-          <p:cNvPr id="12" name="Text 10"/>
-          <p:cNvSpPr/>
-          <p:nvPr/>
-        </p:nvSpPr>
-        <p:spPr>
-          <a:xfrm>
-            <a:off x="927100" y="3271520"/>
-            <a:ext cx="9156700" cy="753110"/>
-          </a:xfrm>
-          <a:prstGeom prst="rect">
-            <a:avLst/>
-          </a:prstGeom>
-          <a:noFill/>
-          <a:ln/>
-        </p:spPr>
-        <p:txBody>
-          <a:bodyPr wrap="square" lIns="0" tIns="0" rIns="0" bIns="0" rtlCol="0" anchor="t"/>
-          <a:lstStyle/>
-          <a:p>
-            <a:pPr algn="l" indent="0" marL="0">
-              <a:lnSpc>
-                <a:spcPct val="145000"/>
-              </a:lnSpc>
-              <a:buNone/>
-            </a:pPr>
-            <a:r>
-              <a:rPr lang="en-US" sz="1700" b="1" dirty="0">
-                <a:solidFill>
-                  <a:srgbClr val="332F2A"/>
-                </a:solidFill>
-                <a:latin typeface="Libre Franklin" pitchFamily="34" charset="0"/>
-                <a:ea typeface="Libre Franklin" pitchFamily="34" charset="-122"/>
-                <a:cs typeface="Libre Franklin" pitchFamily="34" charset="-120"/>
-              </a:rPr>
-              <a:t>Nothing here edits your work, </a:t>
-            </a:r>
-            <a:pPr algn="l" indent="0" marL="0">
-              <a:lnSpc>
-                <a:spcPct val="145000"/>
-              </a:lnSpc>
-              <a:buNone/>
-            </a:pPr>
-            <a:r>
-              <a:rPr lang="en-US" sz="1700" dirty="0">
-                <a:solidFill>
-                  <a:srgbClr val="332F2A"/>
-                </a:solidFill>
-                <a:latin typeface="Libre Franklin" pitchFamily="34" charset="0"/>
-                <a:ea typeface="Libre Franklin" pitchFamily="34" charset="-122"/>
-                <a:cs typeface="Libre Franklin" pitchFamily="34" charset="-120"/>
-              </a:rPr>
-              <a:t>so none of it can break your project. Explaining is the safest thing an agent does.</a:t>
-            </a:r>
-            <a:endParaRPr lang="en-US" sz="1700" dirty="0"/>
-          </a:p>
-        </p:txBody>
-      </p:sp>
-      <p:sp>
-        <p:nvSpPr>
-          <p:cNvPr id="13" name="Text 11"/>
-          <p:cNvSpPr/>
-          <p:nvPr/>
-        </p:nvSpPr>
-        <p:spPr>
-          <a:xfrm>
-            <a:off x="558800" y="4151630"/>
-            <a:ext cx="190500" cy="317500"/>
-          </a:xfrm>
-          <a:prstGeom prst="rect">
-            <a:avLst/>
-          </a:prstGeom>
-          <a:noFill/>
-          <a:ln/>
-        </p:spPr>
-        <p:txBody>
-          <a:bodyPr wrap="square" lIns="0" tIns="0" rIns="0" bIns="0" rtlCol="0" anchor="t"/>
-          <a:lstStyle/>
-          <a:p>
-            <a:pPr algn="l" indent="0" marL="0">
-              <a:lnSpc>
-                <a:spcPct val="140000"/>
-              </a:lnSpc>
-              <a:buNone/>
-            </a:pPr>
-            <a:r>
-              <a:rPr lang="en-US" sz="1700" dirty="0">
-                <a:solidFill>
-                  <a:srgbClr val="A87A2E"/>
-                </a:solidFill>
-                <a:latin typeface="Libre Franklin" pitchFamily="34" charset="0"/>
-                <a:ea typeface="Libre Franklin" pitchFamily="34" charset="-122"/>
-                <a:cs typeface="Libre Franklin" pitchFamily="34" charset="-120"/>
-              </a:rPr>
-              <a:t>—</a:t>
-            </a:r>
-            <a:endParaRPr lang="en-US" sz="1700" dirty="0"/>
-          </a:p>
-        </p:txBody>
-      </p:sp>
-      <p:sp>
-        <p:nvSpPr>
-          <p:cNvPr id="14" name="Text 12"/>
-          <p:cNvSpPr/>
-          <p:nvPr/>
-        </p:nvSpPr>
-        <p:spPr>
-          <a:xfrm>
-            <a:off x="927100" y="4151630"/>
-            <a:ext cx="9156700" cy="753110"/>
-          </a:xfrm>
-          <a:prstGeom prst="rect">
-            <a:avLst/>
-          </a:prstGeom>
-          <a:noFill/>
-          <a:ln/>
-        </p:spPr>
-        <p:txBody>
-          <a:bodyPr wrap="square" lIns="0" tIns="0" rIns="0" bIns="0" rtlCol="0" anchor="t"/>
-          <a:lstStyle/>
-          <a:p>
-            <a:pPr algn="l" indent="0" marL="0">
-              <a:lnSpc>
-                <a:spcPct val="145000"/>
-              </a:lnSpc>
-              <a:buNone/>
-            </a:pPr>
-            <a:r>
-              <a:rPr lang="en-US" sz="1700" dirty="0">
-                <a:solidFill>
-                  <a:srgbClr val="332F2A"/>
-                </a:solidFill>
-                <a:latin typeface="Libre Franklin" pitchFamily="34" charset="0"/>
-                <a:ea typeface="Libre Franklin" pitchFamily="34" charset="-122"/>
-                <a:cs typeface="Libre Franklin" pitchFamily="34" charset="-120"/>
-              </a:rPr>
-              <a:t>Reading code you did not write, with an AI explaining it, is the most common way these tools are used at work.</a:t>
-            </a:r>
-            <a:endParaRPr lang="en-US" sz="1700" dirty="0"/>
+              <a:t>The maths lives in core/ with no Streamlit in it. That is why seven tests can check it without ever opening a browser.</a:t>
+            </a:r>
+            <a:endParaRPr lang="en-US" sz="1500" dirty="0"/>
           </a:p>
         </p:txBody>
       </p:sp>
@@ -27240,15 +27584,111 @@
                 <a:ea typeface="IBM Plex Mono" pitchFamily="34" charset="-122"/>
                 <a:cs typeface="IBM Plex Mono" pitchFamily="34" charset="-120"/>
               </a:rPr>
-              <a:t>SECTION 07</a:t>
+              <a:t>SECTION 06</a:t>
             </a:r>
             <a:endParaRPr lang="en-US" sz="1200" dirty="0"/>
           </a:p>
         </p:txBody>
       </p:sp>
-      <p:sp>
-        <p:nvSpPr>
-          <p:cNvPr id="3" name="Text 1"/>
+      <p:pic>
+        <p:nvPicPr>
+          <p:cNvPr id="3" name="Image 0" descr="icons/python.png">    </p:cNvPr>
+          <p:cNvPicPr>
+            <a:picLocks noChangeAspect="1"/>
+          </p:cNvPicPr>
+          <p:nvPr/>
+        </p:nvPicPr>
+        <p:blipFill>
+          <a:blip r:embed="rId1"/>
+          <a:stretch>
+            <a:fillRect/>
+          </a:stretch>
+        </p:blipFill>
+        <p:spPr>
+          <a:xfrm>
+            <a:off x="10401300" y="361950"/>
+            <a:ext cx="203200" cy="203200"/>
+          </a:xfrm>
+          <a:prstGeom prst="rect">
+            <a:avLst/>
+          </a:prstGeom>
+        </p:spPr>
+      </p:pic>
+      <p:pic>
+        <p:nvPicPr>
+          <p:cNvPr id="4" name="Image 1" descr="icons/numpy.png">    </p:cNvPr>
+          <p:cNvPicPr>
+            <a:picLocks noChangeAspect="1"/>
+          </p:cNvPicPr>
+          <p:nvPr/>
+        </p:nvPicPr>
+        <p:blipFill>
+          <a:blip r:embed="rId2"/>
+          <a:stretch>
+            <a:fillRect/>
+          </a:stretch>
+        </p:blipFill>
+        <p:spPr>
+          <a:xfrm>
+            <a:off x="10744200" y="361950"/>
+            <a:ext cx="203200" cy="203200"/>
+          </a:xfrm>
+          <a:prstGeom prst="rect">
+            <a:avLst/>
+          </a:prstGeom>
+        </p:spPr>
+      </p:pic>
+      <p:pic>
+        <p:nvPicPr>
+          <p:cNvPr id="5" name="Image 2" descr="icons/streamlit.png">    </p:cNvPr>
+          <p:cNvPicPr>
+            <a:picLocks noChangeAspect="1"/>
+          </p:cNvPicPr>
+          <p:nvPr/>
+        </p:nvPicPr>
+        <p:blipFill>
+          <a:blip r:embed="rId3"/>
+          <a:stretch>
+            <a:fillRect/>
+          </a:stretch>
+        </p:blipFill>
+        <p:spPr>
+          <a:xfrm>
+            <a:off x="11087100" y="361950"/>
+            <a:ext cx="203200" cy="203200"/>
+          </a:xfrm>
+          <a:prstGeom prst="rect">
+            <a:avLst/>
+          </a:prstGeom>
+        </p:spPr>
+      </p:pic>
+      <p:pic>
+        <p:nvPicPr>
+          <p:cNvPr id="6" name="Image 3" descr="icons/pytest.png">    </p:cNvPr>
+          <p:cNvPicPr>
+            <a:picLocks noChangeAspect="1"/>
+          </p:cNvPicPr>
+          <p:nvPr/>
+        </p:nvPicPr>
+        <p:blipFill>
+          <a:blip r:embed="rId4"/>
+          <a:stretch>
+            <a:fillRect/>
+          </a:stretch>
+        </p:blipFill>
+        <p:spPr>
+          <a:xfrm>
+            <a:off x="11430000" y="361950"/>
+            <a:ext cx="203200" cy="203200"/>
+          </a:xfrm>
+          <a:prstGeom prst="rect">
+            <a:avLst/>
+          </a:prstGeom>
+        </p:spPr>
+      </p:pic>
+      <p:sp>
+        <p:nvSpPr>
+          <p:cNvPr id="7" name="Text 1"/>
           <p:cNvSpPr/>
           <p:nvPr/>
         </p:nvSpPr>
@@ -27282,7 +27722,7 @@
                 <a:ea typeface="Libre Franklin" pitchFamily="34" charset="-122"/>
                 <a:cs typeface="Libre Franklin" pitchFamily="34" charset="-120"/>
               </a:rPr>
-              <a:t>The files a person writes at work</a:t>
+              <a:t>Where to read more</a:t>
             </a:r>
             <a:endParaRPr lang="en-US" sz="2800" dirty="0"/>
           </a:p>
@@ -27290,7 +27730,7 @@
       </p:sp>
       <p:sp>
         <p:nvSpPr>
-          <p:cNvPr id="4" name="Shape 2"/>
+          <p:cNvPr id="8" name="Shape 2"/>
           <p:cNvSpPr/>
           <p:nvPr/>
         </p:nvSpPr>
@@ -27310,7 +27750,7 @@
       </p:sp>
       <p:sp>
         <p:nvSpPr>
-          <p:cNvPr id="5" name="Text 3"/>
+          <p:cNvPr id="9" name="Text 3"/>
           <p:cNvSpPr/>
           <p:nvPr/>
         </p:nvSpPr>
@@ -27352,7 +27792,7 @@
       </p:sp>
       <p:sp>
         <p:nvSpPr>
-          <p:cNvPr id="6" name="Text 4"/>
+          <p:cNvPr id="10" name="Text 4"/>
           <p:cNvSpPr/>
           <p:nvPr/>
         </p:nvSpPr>
@@ -27394,56 +27834,98 @@
       </p:sp>
       <p:sp>
         <p:nvSpPr>
-          <p:cNvPr id="7" name="Text 5"/>
+          <p:cNvPr id="11" name="Text 5"/>
           <p:cNvSpPr/>
           <p:nvPr/>
         </p:nvSpPr>
         <p:spPr>
           <a:xfrm>
             <a:off x="558800" y="1511300"/>
-            <a:ext cx="190500" cy="317500"/>
-          </a:xfrm>
-          <a:prstGeom prst="rect">
-            <a:avLst/>
-          </a:prstGeom>
-          <a:noFill/>
-          <a:ln/>
-        </p:spPr>
-        <p:txBody>
-          <a:bodyPr wrap="square" lIns="0" tIns="0" rIns="0" bIns="0" rtlCol="0" anchor="t"/>
-          <a:lstStyle/>
-          <a:p>
-            <a:pPr algn="l" indent="0" marL="0">
-              <a:lnSpc>
-                <a:spcPct val="140000"/>
-              </a:lnSpc>
-              <a:buNone/>
-            </a:pPr>
-            <a:r>
-              <a:rPr lang="en-US" sz="1700" dirty="0">
+            <a:ext cx="5283200" cy="254000"/>
+          </a:xfrm>
+          <a:prstGeom prst="rect">
+            <a:avLst/>
+          </a:prstGeom>
+          <a:noFill/>
+          <a:ln/>
+        </p:spPr>
+        <p:txBody>
+          <a:bodyPr wrap="square" lIns="0" tIns="0" rIns="0" bIns="0" rtlCol="0" anchor="t"/>
+          <a:lstStyle/>
+          <a:p>
+            <a:pPr algn="l" indent="0" marL="0">
+              <a:lnSpc>
+                <a:spcPct val="145000"/>
+              </a:lnSpc>
+              <a:buNone/>
+            </a:pPr>
+            <a:r>
+              <a:rPr lang="en-US" sz="1300" spc="130" kern="0" dirty="0">
                 <a:solidFill>
                   <a:srgbClr val="A87A2E"/>
+                </a:solidFill>
+                <a:latin typeface="IBM Plex Mono" pitchFamily="34" charset="0"/>
+                <a:ea typeface="IBM Plex Mono" pitchFamily="34" charset="-122"/>
+                <a:cs typeface="IBM Plex Mono" pitchFamily="34" charset="-120"/>
+              </a:rPr>
+              <a:t>THE THEORY</a:t>
+            </a:r>
+            <a:endParaRPr lang="en-US" sz="1300" dirty="0"/>
+          </a:p>
+        </p:txBody>
+      </p:sp>
+      <p:sp>
+        <p:nvSpPr>
+          <p:cNvPr id="12" name="Text 6"/>
+          <p:cNvSpPr/>
+          <p:nvPr/>
+        </p:nvSpPr>
+        <p:spPr>
+          <a:xfrm>
+            <a:off x="558800" y="1917700"/>
+            <a:ext cx="5283200" cy="1270000"/>
+          </a:xfrm>
+          <a:prstGeom prst="rect">
+            <a:avLst/>
+          </a:prstGeom>
+          <a:noFill/>
+          <a:ln/>
+        </p:spPr>
+        <p:txBody>
+          <a:bodyPr wrap="square" lIns="0" tIns="0" rIns="0" bIns="0" rtlCol="0" anchor="t"/>
+          <a:lstStyle/>
+          <a:p>
+            <a:pPr algn="l" indent="0" marL="0">
+              <a:lnSpc>
+                <a:spcPct val="145000"/>
+              </a:lnSpc>
+              <a:buNone/>
+            </a:pPr>
+            <a:r>
+              <a:rPr lang="en-US" sz="1600" dirty="0">
+                <a:solidFill>
+                  <a:srgbClr val="332F2A"/>
                 </a:solidFill>
                 <a:latin typeface="Libre Franklin" pitchFamily="34" charset="0"/>
                 <a:ea typeface="Libre Franklin" pitchFamily="34" charset="-122"/>
                 <a:cs typeface="Libre Franklin" pitchFamily="34" charset="-120"/>
               </a:rPr>
-              <a:t>—</a:t>
-            </a:r>
-            <a:endParaRPr lang="en-US" sz="1700" dirty="0"/>
-          </a:p>
-        </p:txBody>
-      </p:sp>
-      <p:sp>
-        <p:nvSpPr>
-          <p:cNvPr id="8" name="Text 6"/>
-          <p:cNvSpPr/>
-          <p:nvPr/>
-        </p:nvSpPr>
-        <p:spPr>
-          <a:xfrm>
-            <a:off x="927100" y="1511300"/>
-            <a:ext cx="9156700" cy="753110"/>
+              <a:t>Steven Smith, “The Scientist and Engineer's Guide to Digital Signal Processing” — free in full at dspguide.com. Chapters 8 to 12 cover everything on the last three slides.</a:t>
+            </a:r>
+            <a:endParaRPr lang="en-US" sz="1600" dirty="0"/>
+          </a:p>
+        </p:txBody>
+      </p:sp>
+      <p:sp>
+        <p:nvSpPr>
+          <p:cNvPr id="13" name="Text 7"/>
+          <p:cNvSpPr/>
+          <p:nvPr/>
+        </p:nvSpPr>
+        <p:spPr>
+          <a:xfrm>
+            <a:off x="558800" y="3274060"/>
+            <a:ext cx="5283200" cy="1270000"/>
           </a:xfrm>
           <a:prstGeom prst="rect">
             <a:avLst/>
@@ -27462,16 +27944,41 @@
               <a:buNone/>
             </a:pPr>
             <a:r>
-              <a:rPr lang="en-US" sz="1700" b="1" dirty="0">
-                <a:solidFill>
-                  <a:srgbClr val="332F2A"/>
+              <a:rPr lang="en-US" sz="1600" dirty="0">
+                <a:solidFill>
+                  <a:srgbClr val="77726A"/>
                 </a:solidFill>
                 <a:latin typeface="Libre Franklin" pitchFamily="34" charset="0"/>
                 <a:ea typeface="Libre Franklin" pitchFamily="34" charset="-122"/>
                 <a:cs typeface="Libre Franklin" pitchFamily="34" charset="-120"/>
               </a:rPr>
-              <a:t>Open the four you approved. </a:t>
-            </a:r>
+              <a:t>For intuition rather than algebra, 3Blue1Brown's “But what is the Fourier Transform?” is twenty minutes and worth all of them. Search Nyquist–Shannon sampling theorem for the ceiling.</a:t>
+            </a:r>
+            <a:endParaRPr lang="en-US" sz="1600" dirty="0"/>
+          </a:p>
+        </p:txBody>
+      </p:sp>
+      <p:sp>
+        <p:nvSpPr>
+          <p:cNvPr id="14" name="Text 8"/>
+          <p:cNvSpPr/>
+          <p:nvPr/>
+        </p:nvSpPr>
+        <p:spPr>
+          <a:xfrm>
+            <a:off x="6350000" y="1511300"/>
+            <a:ext cx="5283200" cy="254000"/>
+          </a:xfrm>
+          <a:prstGeom prst="rect">
+            <a:avLst/>
+          </a:prstGeom>
+          <a:noFill/>
+          <a:ln/>
+        </p:spPr>
+        <p:txBody>
+          <a:bodyPr wrap="square" lIns="0" tIns="0" rIns="0" bIns="0" rtlCol="0" anchor="t"/>
+          <a:lstStyle/>
+          <a:p>
             <a:pPr algn="l" indent="0" marL="0">
               <a:lnSpc>
                 <a:spcPct val="145000"/>
@@ -27479,7 +27986,49 @@
               <a:buNone/>
             </a:pPr>
             <a:r>
-              <a:rPr lang="en-US" sz="1700" dirty="0">
+              <a:rPr lang="en-US" sz="1300" spc="130" kern="0" dirty="0">
+                <a:solidFill>
+                  <a:srgbClr val="A87A2E"/>
+                </a:solidFill>
+                <a:latin typeface="IBM Plex Mono" pitchFamily="34" charset="0"/>
+                <a:ea typeface="IBM Plex Mono" pitchFamily="34" charset="-122"/>
+                <a:cs typeface="IBM Plex Mono" pitchFamily="34" charset="-120"/>
+              </a:rPr>
+              <a:t>THE TOOLS</a:t>
+            </a:r>
+            <a:endParaRPr lang="en-US" sz="1300" dirty="0"/>
+          </a:p>
+        </p:txBody>
+      </p:sp>
+      <p:sp>
+        <p:nvSpPr>
+          <p:cNvPr id="15" name="Text 9"/>
+          <p:cNvSpPr/>
+          <p:nvPr/>
+        </p:nvSpPr>
+        <p:spPr>
+          <a:xfrm>
+            <a:off x="6350000" y="1917700"/>
+            <a:ext cx="5283200" cy="1270000"/>
+          </a:xfrm>
+          <a:prstGeom prst="rect">
+            <a:avLst/>
+          </a:prstGeom>
+          <a:noFill/>
+          <a:ln/>
+        </p:spPr>
+        <p:txBody>
+          <a:bodyPr wrap="square" lIns="0" tIns="0" rIns="0" bIns="0" rtlCol="0" anchor="t"/>
+          <a:lstStyle/>
+          <a:p>
+            <a:pPr algn="l" indent="0" marL="0">
+              <a:lnSpc>
+                <a:spcPct val="145000"/>
+              </a:lnSpc>
+              <a:buNone/>
+            </a:pPr>
+            <a:r>
+              <a:rPr lang="en-US" sz="1600" dirty="0">
                 <a:solidFill>
                   <a:srgbClr val="332F2A"/>
                 </a:solidFill>
@@ -27487,295 +28036,51 @@
                 <a:ea typeface="Libre Franklin" pitchFamily="34" charset="-122"/>
                 <a:cs typeface="Libre Franklin" pitchFamily="34" charset="-120"/>
               </a:rPr>
-              <a:t>aidlc/intent.md, requirements.md, design.md and tasks.md — read them as one set, in order.</a:t>
-            </a:r>
-            <a:endParaRPr lang="en-US" sz="1700" dirty="0"/>
-          </a:p>
-        </p:txBody>
-      </p:sp>
-      <p:sp>
-        <p:nvSpPr>
-          <p:cNvPr id="9" name="Text 7"/>
-          <p:cNvSpPr/>
-          <p:nvPr/>
-        </p:nvSpPr>
-        <p:spPr>
-          <a:xfrm>
-            <a:off x="558800" y="2391410"/>
-            <a:ext cx="190500" cy="317500"/>
-          </a:xfrm>
-          <a:prstGeom prst="rect">
-            <a:avLst/>
-          </a:prstGeom>
-          <a:noFill/>
-          <a:ln/>
-        </p:spPr>
-        <p:txBody>
-          <a:bodyPr wrap="square" lIns="0" tIns="0" rIns="0" bIns="0" rtlCol="0" anchor="t"/>
-          <a:lstStyle/>
-          <a:p>
-            <a:pPr algn="l" indent="0" marL="0">
-              <a:lnSpc>
-                <a:spcPct val="140000"/>
-              </a:lnSpc>
-              <a:buNone/>
-            </a:pPr>
-            <a:r>
-              <a:rPr lang="en-US" sz="1700" dirty="0">
-                <a:solidFill>
-                  <a:srgbClr val="A87A2E"/>
+              <a:t>numpy.org documents fft.rfft and fft.rfftfreq, including the normalisation conventions behind every scaling bug you saw today.</a:t>
+            </a:r>
+            <a:endParaRPr lang="en-US" sz="1600" dirty="0"/>
+          </a:p>
+        </p:txBody>
+      </p:sp>
+      <p:sp>
+        <p:nvSpPr>
+          <p:cNvPr id="16" name="Text 10"/>
+          <p:cNvSpPr/>
+          <p:nvPr/>
+        </p:nvSpPr>
+        <p:spPr>
+          <a:xfrm>
+            <a:off x="6350000" y="3274060"/>
+            <a:ext cx="5283200" cy="1270000"/>
+          </a:xfrm>
+          <a:prstGeom prst="rect">
+            <a:avLst/>
+          </a:prstGeom>
+          <a:noFill/>
+          <a:ln/>
+        </p:spPr>
+        <p:txBody>
+          <a:bodyPr wrap="square" lIns="0" tIns="0" rIns="0" bIns="0" rtlCol="0" anchor="t"/>
+          <a:lstStyle/>
+          <a:p>
+            <a:pPr algn="l" indent="0" marL="0">
+              <a:lnSpc>
+                <a:spcPct val="145000"/>
+              </a:lnSpc>
+              <a:buNone/>
+            </a:pPr>
+            <a:r>
+              <a:rPr lang="en-US" sz="1600" dirty="0">
+                <a:solidFill>
+                  <a:srgbClr val="77726A"/>
                 </a:solidFill>
                 <a:latin typeface="Libre Franklin" pitchFamily="34" charset="0"/>
                 <a:ea typeface="Libre Franklin" pitchFamily="34" charset="-122"/>
                 <a:cs typeface="Libre Franklin" pitchFamily="34" charset="-120"/>
               </a:rPr>
-              <a:t>—</a:t>
-            </a:r>
-            <a:endParaRPr lang="en-US" sz="1700" dirty="0"/>
-          </a:p>
-        </p:txBody>
-      </p:sp>
-      <p:sp>
-        <p:nvSpPr>
-          <p:cNvPr id="10" name="Text 8"/>
-          <p:cNvSpPr/>
-          <p:nvPr/>
-        </p:nvSpPr>
-        <p:spPr>
-          <a:xfrm>
-            <a:off x="927100" y="2391410"/>
-            <a:ext cx="9156700" cy="753110"/>
-          </a:xfrm>
-          <a:prstGeom prst="rect">
-            <a:avLst/>
-          </a:prstGeom>
-          <a:noFill/>
-          <a:ln/>
-        </p:spPr>
-        <p:txBody>
-          <a:bodyPr wrap="square" lIns="0" tIns="0" rIns="0" bIns="0" rtlCol="0" anchor="t"/>
-          <a:lstStyle/>
-          <a:p>
-            <a:pPr algn="l" indent="0" marL="0">
-              <a:lnSpc>
-                <a:spcPct val="145000"/>
-              </a:lnSpc>
-              <a:buNone/>
-            </a:pPr>
-            <a:r>
-              <a:rPr lang="en-US" sz="1700" b="1" dirty="0">
-                <a:solidFill>
-                  <a:srgbClr val="332F2A"/>
-                </a:solidFill>
-                <a:latin typeface="Libre Franklin" pitchFamily="34" charset="0"/>
-                <a:ea typeface="Libre Franklin" pitchFamily="34" charset="-122"/>
-                <a:cs typeface="Libre Franklin" pitchFamily="34" charset="-120"/>
-              </a:rPr>
-              <a:t>In a real team a person writes these. </a:t>
-            </a:r>
-            <a:pPr algn="l" indent="0" marL="0">
-              <a:lnSpc>
-                <a:spcPct val="145000"/>
-              </a:lnSpc>
-              <a:buNone/>
-            </a:pPr>
-            <a:r>
-              <a:rPr lang="en-US" sz="1700" dirty="0">
-                <a:solidFill>
-                  <a:srgbClr val="332F2A"/>
-                </a:solidFill>
-                <a:latin typeface="Libre Franklin" pitchFamily="34" charset="0"/>
-                <a:ea typeface="Libre Franklin" pitchFamily="34" charset="-122"/>
-                <a:cs typeface="Libre Franklin" pitchFamily="34" charset="-120"/>
-              </a:rPr>
-              <a:t>A product owner or tech lead drafts the intent and spec. The agent drafting them is a start, not a replacement.</a:t>
-            </a:r>
-            <a:endParaRPr lang="en-US" sz="1700" dirty="0"/>
-          </a:p>
-        </p:txBody>
-      </p:sp>
-      <p:sp>
-        <p:nvSpPr>
-          <p:cNvPr id="11" name="Text 9"/>
-          <p:cNvSpPr/>
-          <p:nvPr/>
-        </p:nvSpPr>
-        <p:spPr>
-          <a:xfrm>
-            <a:off x="558800" y="3271520"/>
-            <a:ext cx="190500" cy="317500"/>
-          </a:xfrm>
-          <a:prstGeom prst="rect">
-            <a:avLst/>
-          </a:prstGeom>
-          <a:noFill/>
-          <a:ln/>
-        </p:spPr>
-        <p:txBody>
-          <a:bodyPr wrap="square" lIns="0" tIns="0" rIns="0" bIns="0" rtlCol="0" anchor="t"/>
-          <a:lstStyle/>
-          <a:p>
-            <a:pPr algn="l" indent="0" marL="0">
-              <a:lnSpc>
-                <a:spcPct val="140000"/>
-              </a:lnSpc>
-              <a:buNone/>
-            </a:pPr>
-            <a:r>
-              <a:rPr lang="en-US" sz="1700" dirty="0">
-                <a:solidFill>
-                  <a:srgbClr val="A87A2E"/>
-                </a:solidFill>
-                <a:latin typeface="Libre Franklin" pitchFamily="34" charset="0"/>
-                <a:ea typeface="Libre Franklin" pitchFamily="34" charset="-122"/>
-                <a:cs typeface="Libre Franklin" pitchFamily="34" charset="-120"/>
-              </a:rPr>
-              <a:t>—</a:t>
-            </a:r>
-            <a:endParaRPr lang="en-US" sz="1700" dirty="0"/>
-          </a:p>
-        </p:txBody>
-      </p:sp>
-      <p:sp>
-        <p:nvSpPr>
-          <p:cNvPr id="12" name="Text 10"/>
-          <p:cNvSpPr/>
-          <p:nvPr/>
-        </p:nvSpPr>
-        <p:spPr>
-          <a:xfrm>
-            <a:off x="927100" y="3271520"/>
-            <a:ext cx="9156700" cy="753110"/>
-          </a:xfrm>
-          <a:prstGeom prst="rect">
-            <a:avLst/>
-          </a:prstGeom>
-          <a:noFill/>
-          <a:ln/>
-        </p:spPr>
-        <p:txBody>
-          <a:bodyPr wrap="square" lIns="0" tIns="0" rIns="0" bIns="0" rtlCol="0" anchor="t"/>
-          <a:lstStyle/>
-          <a:p>
-            <a:pPr algn="l" indent="0" marL="0">
-              <a:lnSpc>
-                <a:spcPct val="145000"/>
-              </a:lnSpc>
-              <a:buNone/>
-            </a:pPr>
-            <a:r>
-              <a:rPr lang="en-US" sz="1700" b="1" dirty="0">
-                <a:solidFill>
-                  <a:srgbClr val="332F2A"/>
-                </a:solidFill>
-                <a:latin typeface="Libre Franklin" pitchFamily="34" charset="0"/>
-                <a:ea typeface="Libre Franklin" pitchFamily="34" charset="-122"/>
-                <a:cs typeface="Libre Franklin" pitchFamily="34" charset="-120"/>
-              </a:rPr>
-              <a:t>Which is why you approved each one. </a:t>
-            </a:r>
-            <a:pPr algn="l" indent="0" marL="0">
-              <a:lnSpc>
-                <a:spcPct val="145000"/>
-              </a:lnSpc>
-              <a:buNone/>
-            </a:pPr>
-            <a:r>
-              <a:rPr lang="en-US" sz="1700" dirty="0">
-                <a:solidFill>
-                  <a:srgbClr val="332F2A"/>
-                </a:solidFill>
-                <a:latin typeface="Libre Franklin" pitchFamily="34" charset="0"/>
-                <a:ea typeface="Libre Franklin" pitchFamily="34" charset="-122"/>
-                <a:cs typeface="Libre Franklin" pitchFamily="34" charset="-120"/>
-              </a:rPr>
-              <a:t>Everything built today came out of those four files. A wrong line there becomes a wrong app, quickly and cheaply.</a:t>
-            </a:r>
-            <a:endParaRPr lang="en-US" sz="1700" dirty="0"/>
-          </a:p>
-        </p:txBody>
-      </p:sp>
-      <p:sp>
-        <p:nvSpPr>
-          <p:cNvPr id="13" name="Text 11"/>
-          <p:cNvSpPr/>
-          <p:nvPr/>
-        </p:nvSpPr>
-        <p:spPr>
-          <a:xfrm>
-            <a:off x="558800" y="4151630"/>
-            <a:ext cx="190500" cy="317500"/>
-          </a:xfrm>
-          <a:prstGeom prst="rect">
-            <a:avLst/>
-          </a:prstGeom>
-          <a:noFill/>
-          <a:ln/>
-        </p:spPr>
-        <p:txBody>
-          <a:bodyPr wrap="square" lIns="0" tIns="0" rIns="0" bIns="0" rtlCol="0" anchor="t"/>
-          <a:lstStyle/>
-          <a:p>
-            <a:pPr algn="l" indent="0" marL="0">
-              <a:lnSpc>
-                <a:spcPct val="140000"/>
-              </a:lnSpc>
-              <a:buNone/>
-            </a:pPr>
-            <a:r>
-              <a:rPr lang="en-US" sz="1700" dirty="0">
-                <a:solidFill>
-                  <a:srgbClr val="A87A2E"/>
-                </a:solidFill>
-                <a:latin typeface="Libre Franklin" pitchFamily="34" charset="0"/>
-                <a:ea typeface="Libre Franklin" pitchFamily="34" charset="-122"/>
-                <a:cs typeface="Libre Franklin" pitchFamily="34" charset="-120"/>
-              </a:rPr>
-              <a:t>—</a:t>
-            </a:r>
-            <a:endParaRPr lang="en-US" sz="1700" dirty="0"/>
-          </a:p>
-        </p:txBody>
-      </p:sp>
-      <p:sp>
-        <p:nvSpPr>
-          <p:cNvPr id="14" name="Text 12"/>
-          <p:cNvSpPr/>
-          <p:nvPr/>
-        </p:nvSpPr>
-        <p:spPr>
-          <a:xfrm>
-            <a:off x="927100" y="4151630"/>
-            <a:ext cx="9156700" cy="753110"/>
-          </a:xfrm>
-          <a:prstGeom prst="rect">
-            <a:avLst/>
-          </a:prstGeom>
-          <a:noFill/>
-          <a:ln/>
-        </p:spPr>
-        <p:txBody>
-          <a:bodyPr wrap="square" lIns="0" tIns="0" rIns="0" bIns="0" rtlCol="0" anchor="t"/>
-          <a:lstStyle/>
-          <a:p>
-            <a:pPr algn="l" indent="0" marL="0">
-              <a:lnSpc>
-                <a:spcPct val="145000"/>
-              </a:lnSpc>
-              <a:buNone/>
-            </a:pPr>
-            <a:r>
-              <a:rPr lang="en-US" sz="1700" dirty="0">
-                <a:solidFill>
-                  <a:srgbClr val="332F2A"/>
-                </a:solidFill>
-                <a:latin typeface="Libre Franklin" pitchFamily="34" charset="0"/>
-                <a:ea typeface="Libre Franklin" pitchFamily="34" charset="-122"/>
-                <a:cs typeface="Libre Franklin" pitchFamily="34" charset="-120"/>
-              </a:rPr>
-              <a:t>labs/PROMPTS.md explains why each prompt is worded the way it is. Read it before Session 2 — you will be writing your own.</a:t>
-            </a:r>
-            <a:endParaRPr lang="en-US" sz="1700" dirty="0"/>
+              <a:t>docs.streamlit.io for the interface and docs.pytest.org for the tests. Both are the official pages, both are shorter than you would expect, and both are what your agent was trained on.</a:t>
+            </a:r>
+            <a:endParaRPr lang="en-US" sz="1600" dirty="0"/>
           </a:p>
         </p:txBody>
       </p:sp>
@@ -27793,7 +28098,7 @@
     <p:bg>
       <p:bgPr>
         <a:solidFill>
-          <a:srgbClr val="F5F2EC"/>
+          <a:srgbClr val="FCFBF8"/>
         </a:solidFill>
       </p:bgPr>
     </p:bg>
@@ -27847,7 +28152,7 @@
                 <a:ea typeface="IBM Plex Mono" pitchFamily="34" charset="-122"/>
                 <a:cs typeface="IBM Plex Mono" pitchFamily="34" charset="-120"/>
               </a:rPr>
-              <a:t>SESSION 01</a:t>
+              <a:t>SECTION 07</a:t>
             </a:r>
             <a:endParaRPr lang="en-US" sz="1200" dirty="0"/>
           </a:p>
@@ -27889,7 +28194,7 @@
                 <a:ea typeface="Libre Franklin" pitchFamily="34" charset="-122"/>
                 <a:cs typeface="Libre Franklin" pitchFamily="34" charset="-120"/>
               </a:rPr>
-              <a:t>What to take away</a:t>
+              <a:t>Read the reference before you leave</a:t>
             </a:r>
             <a:endParaRPr lang="en-US" sz="2800" dirty="0"/>
           </a:p>
@@ -28008,21 +28313,21 @@
         <p:spPr>
           <a:xfrm>
             <a:off x="558800" y="1511300"/>
-            <a:ext cx="444500" cy="317500"/>
-          </a:xfrm>
-          <a:prstGeom prst="rect">
-            <a:avLst/>
-          </a:prstGeom>
-          <a:noFill/>
-          <a:ln/>
-        </p:spPr>
-        <p:txBody>
-          <a:bodyPr wrap="square" lIns="0" tIns="0" rIns="0" bIns="0" rtlCol="0" anchor="t"/>
-          <a:lstStyle/>
-          <a:p>
-            <a:pPr algn="l" indent="0" marL="0">
-              <a:lnSpc>
-                <a:spcPct val="145000"/>
+            <a:ext cx="190500" cy="317500"/>
+          </a:xfrm>
+          <a:prstGeom prst="rect">
+            <a:avLst/>
+          </a:prstGeom>
+          <a:noFill/>
+          <a:ln/>
+        </p:spPr>
+        <p:txBody>
+          <a:bodyPr wrap="square" lIns="0" tIns="0" rIns="0" bIns="0" rtlCol="0" anchor="t"/>
+          <a:lstStyle/>
+          <a:p>
+            <a:pPr algn="l" indent="0" marL="0">
+              <a:lnSpc>
+                <a:spcPct val="140000"/>
               </a:lnSpc>
               <a:buNone/>
             </a:pPr>
@@ -28030,69 +28335,27 @@
               <a:rPr lang="en-US" sz="1700" dirty="0">
                 <a:solidFill>
                   <a:srgbClr val="A87A2E"/>
-                </a:solidFill>
-                <a:latin typeface="IBM Plex Mono" pitchFamily="34" charset="0"/>
-                <a:ea typeface="IBM Plex Mono" pitchFamily="34" charset="-122"/>
-                <a:cs typeface="IBM Plex Mono" pitchFamily="34" charset="-120"/>
-              </a:rPr>
-              <a:t>01</a:t>
-            </a:r>
-            <a:endParaRPr lang="en-US" sz="1700" dirty="0"/>
-          </a:p>
-        </p:txBody>
-      </p:sp>
-      <p:sp>
-        <p:nvSpPr>
-          <p:cNvPr id="8" name="Text 6"/>
-          <p:cNvSpPr/>
-          <p:nvPr/>
-        </p:nvSpPr>
-        <p:spPr>
-          <a:xfrm>
-            <a:off x="1003300" y="1498600"/>
-            <a:ext cx="9461500" cy="447040"/>
-          </a:xfrm>
-          <a:prstGeom prst="rect">
-            <a:avLst/>
-          </a:prstGeom>
-          <a:noFill/>
-          <a:ln/>
-        </p:spPr>
-        <p:txBody>
-          <a:bodyPr wrap="square" lIns="0" tIns="0" rIns="0" bIns="0" rtlCol="0" anchor="t"/>
-          <a:lstStyle/>
-          <a:p>
-            <a:pPr algn="l" indent="0" marL="0">
-              <a:lnSpc>
-                <a:spcPct val="140000"/>
-              </a:lnSpc>
-              <a:buNone/>
-            </a:pPr>
-            <a:r>
-              <a:rPr lang="en-US" sz="1800" dirty="0">
-                <a:solidFill>
-                  <a:srgbClr val="332F2A"/>
                 </a:solidFill>
                 <a:latin typeface="Libre Franklin" pitchFamily="34" charset="0"/>
                 <a:ea typeface="Libre Franklin" pitchFamily="34" charset="-122"/>
                 <a:cs typeface="Libre Franklin" pitchFamily="34" charset="-120"/>
               </a:rPr>
-              <a:t>An agent is a harness driving a model. Knowing which half broke is half the fix.</a:t>
-            </a:r>
-            <a:endParaRPr lang="en-US" sz="1800" dirty="0"/>
-          </a:p>
-        </p:txBody>
-      </p:sp>
-      <p:sp>
-        <p:nvSpPr>
-          <p:cNvPr id="9" name="Text 7"/>
-          <p:cNvSpPr/>
-          <p:nvPr/>
-        </p:nvSpPr>
-        <p:spPr>
-          <a:xfrm>
-            <a:off x="558800" y="2110740"/>
-            <a:ext cx="444500" cy="317500"/>
+              <a:t>—</a:t>
+            </a:r>
+            <a:endParaRPr lang="en-US" sz="1700" dirty="0"/>
+          </a:p>
+        </p:txBody>
+      </p:sp>
+      <p:sp>
+        <p:nvSpPr>
+          <p:cNvPr id="8" name="Text 6"/>
+          <p:cNvSpPr/>
+          <p:nvPr/>
+        </p:nvSpPr>
+        <p:spPr>
+          <a:xfrm>
+            <a:off x="927100" y="1511300"/>
+            <a:ext cx="9156700" cy="753110"/>
           </a:xfrm>
           <a:prstGeom prst="rect">
             <a:avLst/>
@@ -28111,49 +28374,7 @@
               <a:buNone/>
             </a:pPr>
             <a:r>
-              <a:rPr lang="en-US" sz="1700" dirty="0">
-                <a:solidFill>
-                  <a:srgbClr val="A87A2E"/>
-                </a:solidFill>
-                <a:latin typeface="IBM Plex Mono" pitchFamily="34" charset="0"/>
-                <a:ea typeface="IBM Plex Mono" pitchFamily="34" charset="-122"/>
-                <a:cs typeface="IBM Plex Mono" pitchFamily="34" charset="-120"/>
-              </a:rPr>
-              <a:t>02</a:t>
-            </a:r>
-            <a:endParaRPr lang="en-US" sz="1700" dirty="0"/>
-          </a:p>
-        </p:txBody>
-      </p:sp>
-      <p:sp>
-        <p:nvSpPr>
-          <p:cNvPr id="10" name="Text 8"/>
-          <p:cNvSpPr/>
-          <p:nvPr/>
-        </p:nvSpPr>
-        <p:spPr>
-          <a:xfrm>
-            <a:off x="1003300" y="2098040"/>
-            <a:ext cx="9461500" cy="447040"/>
-          </a:xfrm>
-          <a:prstGeom prst="rect">
-            <a:avLst/>
-          </a:prstGeom>
-          <a:noFill/>
-          <a:ln/>
-        </p:spPr>
-        <p:txBody>
-          <a:bodyPr wrap="square" lIns="0" tIns="0" rIns="0" bIns="0" rtlCol="0" anchor="t"/>
-          <a:lstStyle/>
-          <a:p>
-            <a:pPr algn="l" indent="0" marL="0">
-              <a:lnSpc>
-                <a:spcPct val="140000"/>
-              </a:lnSpc>
-              <a:buNone/>
-            </a:pPr>
-            <a:r>
-              <a:rPr lang="en-US" sz="1800" dirty="0">
+              <a:rPr lang="en-US" sz="1700" b="1" dirty="0">
                 <a:solidFill>
                   <a:srgbClr val="332F2A"/>
                 </a:solidFill>
@@ -28161,33 +28382,8 @@
                 <a:ea typeface="Libre Franklin" pitchFamily="34" charset="-122"/>
                 <a:cs typeface="Libre Franklin" pitchFamily="34" charset="-120"/>
               </a:rPr>
-              <a:t>A requirement you cannot check by running something is not a requirement yet.</a:t>
-            </a:r>
-            <a:endParaRPr lang="en-US" sz="1800" dirty="0"/>
-          </a:p>
-        </p:txBody>
-      </p:sp>
-      <p:sp>
-        <p:nvSpPr>
-          <p:cNvPr id="11" name="Text 9"/>
-          <p:cNvSpPr/>
-          <p:nvPr/>
-        </p:nvSpPr>
-        <p:spPr>
-          <a:xfrm>
-            <a:off x="558800" y="2710180"/>
-            <a:ext cx="444500" cy="317500"/>
-          </a:xfrm>
-          <a:prstGeom prst="rect">
-            <a:avLst/>
-          </a:prstGeom>
-          <a:noFill/>
-          <a:ln/>
-        </p:spPr>
-        <p:txBody>
-          <a:bodyPr wrap="square" lIns="0" tIns="0" rIns="0" bIns="0" rtlCol="0" anchor="t"/>
-          <a:lstStyle/>
-          <a:p>
+              <a:t>Everyone does this, </a:t>
+            </a:r>
             <a:pPr algn="l" indent="0" marL="0">
               <a:lnSpc>
                 <a:spcPct val="145000"/>
@@ -28196,48 +28392,6 @@
             </a:pPr>
             <a:r>
               <a:rPr lang="en-US" sz="1700" dirty="0">
-                <a:solidFill>
-                  <a:srgbClr val="A87A2E"/>
-                </a:solidFill>
-                <a:latin typeface="IBM Plex Mono" pitchFamily="34" charset="0"/>
-                <a:ea typeface="IBM Plex Mono" pitchFamily="34" charset="-122"/>
-                <a:cs typeface="IBM Plex Mono" pitchFamily="34" charset="-120"/>
-              </a:rPr>
-              <a:t>03</a:t>
-            </a:r>
-            <a:endParaRPr lang="en-US" sz="1700" dirty="0"/>
-          </a:p>
-        </p:txBody>
-      </p:sp>
-      <p:sp>
-        <p:nvSpPr>
-          <p:cNvPr id="12" name="Text 10"/>
-          <p:cNvSpPr/>
-          <p:nvPr/>
-        </p:nvSpPr>
-        <p:spPr>
-          <a:xfrm>
-            <a:off x="1003300" y="2697480"/>
-            <a:ext cx="9461500" cy="447040"/>
-          </a:xfrm>
-          <a:prstGeom prst="rect">
-            <a:avLst/>
-          </a:prstGeom>
-          <a:noFill/>
-          <a:ln/>
-        </p:spPr>
-        <p:txBody>
-          <a:bodyPr wrap="square" lIns="0" tIns="0" rIns="0" bIns="0" rtlCol="0" anchor="t"/>
-          <a:lstStyle/>
-          <a:p>
-            <a:pPr algn="l" indent="0" marL="0">
-              <a:lnSpc>
-                <a:spcPct val="140000"/>
-              </a:lnSpc>
-              <a:buNone/>
-            </a:pPr>
-            <a:r>
-              <a:rPr lang="en-US" sz="1800" dirty="0">
                 <a:solidFill>
                   <a:srgbClr val="332F2A"/>
                 </a:solidFill>
@@ -28245,9 +28399,295 @@
                 <a:ea typeface="Libre Franklin" pitchFamily="34" charset="-122"/>
                 <a:cs typeface="Libre Franklin" pitchFamily="34" charset="-120"/>
               </a:rPr>
-              <a:t>Looking right and being right differ, and only one of them survives a test.</a:t>
-            </a:r>
-            <a:endParaRPr lang="en-US" sz="1800" dirty="0"/>
+              <a:t>whether your own version works or not. The prompts are in labs/EXPLAIN.md.</a:t>
+            </a:r>
+            <a:endParaRPr lang="en-US" sz="1700" dirty="0"/>
+          </a:p>
+        </p:txBody>
+      </p:sp>
+      <p:sp>
+        <p:nvSpPr>
+          <p:cNvPr id="9" name="Text 7"/>
+          <p:cNvSpPr/>
+          <p:nvPr/>
+        </p:nvSpPr>
+        <p:spPr>
+          <a:xfrm>
+            <a:off x="558800" y="2391410"/>
+            <a:ext cx="190500" cy="317500"/>
+          </a:xfrm>
+          <a:prstGeom prst="rect">
+            <a:avLst/>
+          </a:prstGeom>
+          <a:noFill/>
+          <a:ln/>
+        </p:spPr>
+        <p:txBody>
+          <a:bodyPr wrap="square" lIns="0" tIns="0" rIns="0" bIns="0" rtlCol="0" anchor="t"/>
+          <a:lstStyle/>
+          <a:p>
+            <a:pPr algn="l" indent="0" marL="0">
+              <a:lnSpc>
+                <a:spcPct val="140000"/>
+              </a:lnSpc>
+              <a:buNone/>
+            </a:pPr>
+            <a:r>
+              <a:rPr lang="en-US" sz="1700" dirty="0">
+                <a:solidFill>
+                  <a:srgbClr val="A87A2E"/>
+                </a:solidFill>
+                <a:latin typeface="Libre Franklin" pitchFamily="34" charset="0"/>
+                <a:ea typeface="Libre Franklin" pitchFamily="34" charset="-122"/>
+                <a:cs typeface="Libre Franklin" pitchFamily="34" charset="-120"/>
+              </a:rPr>
+              <a:t>—</a:t>
+            </a:r>
+            <a:endParaRPr lang="en-US" sz="1700" dirty="0"/>
+          </a:p>
+        </p:txBody>
+      </p:sp>
+      <p:sp>
+        <p:nvSpPr>
+          <p:cNvPr id="10" name="Text 8"/>
+          <p:cNvSpPr/>
+          <p:nvPr/>
+        </p:nvSpPr>
+        <p:spPr>
+          <a:xfrm>
+            <a:off x="927100" y="2391410"/>
+            <a:ext cx="9156700" cy="753110"/>
+          </a:xfrm>
+          <a:prstGeom prst="rect">
+            <a:avLst/>
+          </a:prstGeom>
+          <a:noFill/>
+          <a:ln/>
+        </p:spPr>
+        <p:txBody>
+          <a:bodyPr wrap="square" lIns="0" tIns="0" rIns="0" bIns="0" rtlCol="0" anchor="t"/>
+          <a:lstStyle/>
+          <a:p>
+            <a:pPr algn="l" indent="0" marL="0">
+              <a:lnSpc>
+                <a:spcPct val="145000"/>
+              </a:lnSpc>
+              <a:buNone/>
+            </a:pPr>
+            <a:r>
+              <a:rPr lang="en-US" sz="1700" b="1" dirty="0">
+                <a:solidFill>
+                  <a:srgbClr val="332F2A"/>
+                </a:solidFill>
+                <a:latin typeface="Libre Franklin" pitchFamily="34" charset="0"/>
+                <a:ea typeface="Libre Franklin" pitchFamily="34" charset="-122"/>
+                <a:cs typeface="Libre Franklin" pitchFamily="34" charset="-120"/>
+              </a:rPr>
+              <a:t>Ask it to break the code. </a:t>
+            </a:r>
+            <a:pPr algn="l" indent="0" marL="0">
+              <a:lnSpc>
+                <a:spcPct val="145000"/>
+              </a:lnSpc>
+              <a:buNone/>
+            </a:pPr>
+            <a:r>
+              <a:rPr lang="en-US" sz="1700" dirty="0">
+                <a:solidFill>
+                  <a:srgbClr val="332F2A"/>
+                </a:solidFill>
+                <a:latin typeface="Libre Franklin" pitchFamily="34" charset="0"/>
+                <a:ea typeface="Libre Franklin" pitchFamily="34" charset="-122"/>
+                <a:cs typeface="Libre Franklin" pitchFamily="34" charset="-120"/>
+              </a:rPr>
+              <a:t>Change the 2/n to 1/n, run the tests, watch which two fail, then change it back.</a:t>
+            </a:r>
+            <a:endParaRPr lang="en-US" sz="1700" dirty="0"/>
+          </a:p>
+        </p:txBody>
+      </p:sp>
+      <p:sp>
+        <p:nvSpPr>
+          <p:cNvPr id="11" name="Text 9"/>
+          <p:cNvSpPr/>
+          <p:nvPr/>
+        </p:nvSpPr>
+        <p:spPr>
+          <a:xfrm>
+            <a:off x="558800" y="3271520"/>
+            <a:ext cx="190500" cy="317500"/>
+          </a:xfrm>
+          <a:prstGeom prst="rect">
+            <a:avLst/>
+          </a:prstGeom>
+          <a:noFill/>
+          <a:ln/>
+        </p:spPr>
+        <p:txBody>
+          <a:bodyPr wrap="square" lIns="0" tIns="0" rIns="0" bIns="0" rtlCol="0" anchor="t"/>
+          <a:lstStyle/>
+          <a:p>
+            <a:pPr algn="l" indent="0" marL="0">
+              <a:lnSpc>
+                <a:spcPct val="140000"/>
+              </a:lnSpc>
+              <a:buNone/>
+            </a:pPr>
+            <a:r>
+              <a:rPr lang="en-US" sz="1700" dirty="0">
+                <a:solidFill>
+                  <a:srgbClr val="A87A2E"/>
+                </a:solidFill>
+                <a:latin typeface="Libre Franklin" pitchFamily="34" charset="0"/>
+                <a:ea typeface="Libre Franklin" pitchFamily="34" charset="-122"/>
+                <a:cs typeface="Libre Franklin" pitchFamily="34" charset="-120"/>
+              </a:rPr>
+              <a:t>—</a:t>
+            </a:r>
+            <a:endParaRPr lang="en-US" sz="1700" dirty="0"/>
+          </a:p>
+        </p:txBody>
+      </p:sp>
+      <p:sp>
+        <p:nvSpPr>
+          <p:cNvPr id="12" name="Text 10"/>
+          <p:cNvSpPr/>
+          <p:nvPr/>
+        </p:nvSpPr>
+        <p:spPr>
+          <a:xfrm>
+            <a:off x="927100" y="3271520"/>
+            <a:ext cx="9156700" cy="753110"/>
+          </a:xfrm>
+          <a:prstGeom prst="rect">
+            <a:avLst/>
+          </a:prstGeom>
+          <a:noFill/>
+          <a:ln/>
+        </p:spPr>
+        <p:txBody>
+          <a:bodyPr wrap="square" lIns="0" tIns="0" rIns="0" bIns="0" rtlCol="0" anchor="t"/>
+          <a:lstStyle/>
+          <a:p>
+            <a:pPr algn="l" indent="0" marL="0">
+              <a:lnSpc>
+                <a:spcPct val="145000"/>
+              </a:lnSpc>
+              <a:buNone/>
+            </a:pPr>
+            <a:r>
+              <a:rPr lang="en-US" sz="1700" b="1" dirty="0">
+                <a:solidFill>
+                  <a:srgbClr val="332F2A"/>
+                </a:solidFill>
+                <a:latin typeface="Libre Franklin" pitchFamily="34" charset="0"/>
+                <a:ea typeface="Libre Franklin" pitchFamily="34" charset="-122"/>
+                <a:cs typeface="Libre Franklin" pitchFamily="34" charset="-120"/>
+              </a:rPr>
+              <a:t>Nothing here edits your work, </a:t>
+            </a:r>
+            <a:pPr algn="l" indent="0" marL="0">
+              <a:lnSpc>
+                <a:spcPct val="145000"/>
+              </a:lnSpc>
+              <a:buNone/>
+            </a:pPr>
+            <a:r>
+              <a:rPr lang="en-US" sz="1700" dirty="0">
+                <a:solidFill>
+                  <a:srgbClr val="332F2A"/>
+                </a:solidFill>
+                <a:latin typeface="Libre Franklin" pitchFamily="34" charset="0"/>
+                <a:ea typeface="Libre Franklin" pitchFamily="34" charset="-122"/>
+                <a:cs typeface="Libre Franklin" pitchFamily="34" charset="-120"/>
+              </a:rPr>
+              <a:t>so none of it can break your project. Explaining is the safest thing an agent does.</a:t>
+            </a:r>
+            <a:endParaRPr lang="en-US" sz="1700" dirty="0"/>
+          </a:p>
+        </p:txBody>
+      </p:sp>
+      <p:sp>
+        <p:nvSpPr>
+          <p:cNvPr id="13" name="Text 11"/>
+          <p:cNvSpPr/>
+          <p:nvPr/>
+        </p:nvSpPr>
+        <p:spPr>
+          <a:xfrm>
+            <a:off x="558800" y="4151630"/>
+            <a:ext cx="190500" cy="317500"/>
+          </a:xfrm>
+          <a:prstGeom prst="rect">
+            <a:avLst/>
+          </a:prstGeom>
+          <a:noFill/>
+          <a:ln/>
+        </p:spPr>
+        <p:txBody>
+          <a:bodyPr wrap="square" lIns="0" tIns="0" rIns="0" bIns="0" rtlCol="0" anchor="t"/>
+          <a:lstStyle/>
+          <a:p>
+            <a:pPr algn="l" indent="0" marL="0">
+              <a:lnSpc>
+                <a:spcPct val="140000"/>
+              </a:lnSpc>
+              <a:buNone/>
+            </a:pPr>
+            <a:r>
+              <a:rPr lang="en-US" sz="1700" dirty="0">
+                <a:solidFill>
+                  <a:srgbClr val="A87A2E"/>
+                </a:solidFill>
+                <a:latin typeface="Libre Franklin" pitchFamily="34" charset="0"/>
+                <a:ea typeface="Libre Franklin" pitchFamily="34" charset="-122"/>
+                <a:cs typeface="Libre Franklin" pitchFamily="34" charset="-120"/>
+              </a:rPr>
+              <a:t>—</a:t>
+            </a:r>
+            <a:endParaRPr lang="en-US" sz="1700" dirty="0"/>
+          </a:p>
+        </p:txBody>
+      </p:sp>
+      <p:sp>
+        <p:nvSpPr>
+          <p:cNvPr id="14" name="Text 12"/>
+          <p:cNvSpPr/>
+          <p:nvPr/>
+        </p:nvSpPr>
+        <p:spPr>
+          <a:xfrm>
+            <a:off x="927100" y="4151630"/>
+            <a:ext cx="9156700" cy="753110"/>
+          </a:xfrm>
+          <a:prstGeom prst="rect">
+            <a:avLst/>
+          </a:prstGeom>
+          <a:noFill/>
+          <a:ln/>
+        </p:spPr>
+        <p:txBody>
+          <a:bodyPr wrap="square" lIns="0" tIns="0" rIns="0" bIns="0" rtlCol="0" anchor="t"/>
+          <a:lstStyle/>
+          <a:p>
+            <a:pPr algn="l" indent="0" marL="0">
+              <a:lnSpc>
+                <a:spcPct val="145000"/>
+              </a:lnSpc>
+              <a:buNone/>
+            </a:pPr>
+            <a:r>
+              <a:rPr lang="en-US" sz="1700" dirty="0">
+                <a:solidFill>
+                  <a:srgbClr val="332F2A"/>
+                </a:solidFill>
+                <a:latin typeface="Libre Franklin" pitchFamily="34" charset="0"/>
+                <a:ea typeface="Libre Franklin" pitchFamily="34" charset="-122"/>
+                <a:cs typeface="Libre Franklin" pitchFamily="34" charset="-120"/>
+              </a:rPr>
+              <a:t>Reading code you did not write, with an AI explaining it, is the most common way these tools are used at work.</a:t>
+            </a:r>
+            <a:endParaRPr lang="en-US" sz="1700" dirty="0"/>
           </a:p>
         </p:txBody>
       </p:sp>
@@ -28291,8 +28731,8 @@
         </p:nvSpPr>
         <p:spPr>
           <a:xfrm>
-            <a:off x="558800" y="609600"/>
-            <a:ext cx="11074400" cy="254000"/>
+            <a:off x="558800" y="355600"/>
+            <a:ext cx="11074400" cy="215900"/>
           </a:xfrm>
           <a:prstGeom prst="rect">
             <a:avLst/>
@@ -28311,17 +28751,17 @@
               <a:buNone/>
             </a:pPr>
             <a:r>
-              <a:rPr lang="en-US" sz="1300" spc="182" kern="0" dirty="0">
-                <a:solidFill>
-                  <a:srgbClr val="A87A2E"/>
-                </a:solidFill>
-                <a:latin typeface="IBM Plex Mono" pitchFamily="34" charset="0"/>
-                <a:ea typeface="IBM Plex Mono" pitchFamily="34" charset="-122"/>
-                <a:cs typeface="IBM Plex Mono" pitchFamily="34" charset="-120"/>
-              </a:rPr>
-              <a:t>QUESTIONS</a:t>
-            </a:r>
-            <a:endParaRPr lang="en-US" sz="1300" dirty="0"/>
+              <a:rPr lang="en-US" sz="1200" spc="168" kern="0" dirty="0">
+                <a:solidFill>
+                  <a:srgbClr val="77726A"/>
+                </a:solidFill>
+                <a:latin typeface="IBM Plex Mono" pitchFamily="34" charset="0"/>
+                <a:ea typeface="IBM Plex Mono" pitchFamily="34" charset="-122"/>
+                <a:cs typeface="IBM Plex Mono" pitchFamily="34" charset="-120"/>
+              </a:rPr>
+              <a:t>SECTION 07</a:t>
+            </a:r>
+            <a:endParaRPr lang="en-US" sz="1200" dirty="0"/>
           </a:p>
         </p:txBody>
       </p:sp>
@@ -28333,27 +28773,27 @@
         </p:nvSpPr>
         <p:spPr>
           <a:xfrm>
-            <a:off x="558800" y="3048000"/>
-            <a:ext cx="5283200" cy="1524000"/>
-          </a:xfrm>
-          <a:prstGeom prst="rect">
-            <a:avLst/>
-          </a:prstGeom>
-          <a:noFill/>
-          <a:ln/>
-        </p:spPr>
-        <p:txBody>
-          <a:bodyPr wrap="square" lIns="0" tIns="0" rIns="0" bIns="0" rtlCol="0" anchor="t"/>
-          <a:lstStyle/>
-          <a:p>
-            <a:pPr algn="l" indent="0" marL="0">
-              <a:lnSpc>
-                <a:spcPct val="108000"/>
-              </a:lnSpc>
-              <a:buNone/>
-            </a:pPr>
-            <a:r>
-              <a:rPr lang="en-US" sz="4000" b="1" dirty="0">
+            <a:off x="558800" y="635000"/>
+            <a:ext cx="11074400" cy="508000"/>
+          </a:xfrm>
+          <a:prstGeom prst="rect">
+            <a:avLst/>
+          </a:prstGeom>
+          <a:noFill/>
+          <a:ln/>
+        </p:spPr>
+        <p:txBody>
+          <a:bodyPr wrap="square" lIns="0" tIns="0" rIns="0" bIns="0" rtlCol="0" anchor="t"/>
+          <a:lstStyle/>
+          <a:p>
+            <a:pPr algn="l" indent="0" marL="0">
+              <a:lnSpc>
+                <a:spcPct val="110000"/>
+              </a:lnSpc>
+              <a:buNone/>
+            </a:pPr>
+            <a:r>
+              <a:rPr lang="en-US" sz="2800" b="1" dirty="0">
                 <a:solidFill>
                   <a:srgbClr val="332F2A"/>
                 </a:solidFill>
@@ -28361,22 +28801,42 @@
                 <a:ea typeface="Libre Franklin" pitchFamily="34" charset="-122"/>
                 <a:cs typeface="Libre Franklin" pitchFamily="34" charset="-120"/>
               </a:rPr>
-              <a:t>What did your agent get wrong?</a:t>
-            </a:r>
-            <a:endParaRPr lang="en-US" sz="4000" dirty="0"/>
-          </a:p>
-        </p:txBody>
-      </p:sp>
-      <p:sp>
-        <p:nvSpPr>
-          <p:cNvPr id="4" name="Text 2"/>
-          <p:cNvSpPr/>
-          <p:nvPr/>
-        </p:nvSpPr>
-        <p:spPr>
-          <a:xfrm>
-            <a:off x="6350000" y="3556000"/>
-            <a:ext cx="5283200" cy="396240"/>
+              <a:t>The files a person writes at work</a:t>
+            </a:r>
+            <a:endParaRPr lang="en-US" sz="2800" dirty="0"/>
+          </a:p>
+        </p:txBody>
+      </p:sp>
+      <p:sp>
+        <p:nvSpPr>
+          <p:cNvPr id="4" name="Shape 2"/>
+          <p:cNvSpPr/>
+          <p:nvPr/>
+        </p:nvSpPr>
+        <p:spPr>
+          <a:xfrm>
+            <a:off x="558800" y="1181100"/>
+            <a:ext cx="11074400" cy="6350"/>
+          </a:xfrm>
+          <a:prstGeom prst="rect">
+            <a:avLst/>
+          </a:prstGeom>
+          <a:solidFill>
+            <a:srgbClr val="E1DED7"/>
+          </a:solidFill>
+          <a:ln/>
+        </p:spPr>
+      </p:sp>
+      <p:sp>
+        <p:nvSpPr>
+          <p:cNvPr id="5" name="Text 3"/>
+          <p:cNvSpPr/>
+          <p:nvPr/>
+        </p:nvSpPr>
+        <p:spPr>
+          <a:xfrm>
+            <a:off x="558800" y="6337300"/>
+            <a:ext cx="9804400" cy="215900"/>
           </a:xfrm>
           <a:prstGeom prst="rect">
             <a:avLst/>
@@ -28395,30 +28855,114 @@
               <a:buNone/>
             </a:pPr>
             <a:r>
-              <a:rPr lang="en-US" sz="1600" dirty="0">
-                <a:solidFill>
-                  <a:srgbClr val="332F2A"/>
+              <a:rPr lang="en-US" sz="1200" dirty="0">
+                <a:solidFill>
+                  <a:srgbClr val="99948B"/>
+                </a:solidFill>
+                <a:latin typeface="IBM Plex Mono" pitchFamily="34" charset="0"/>
+                <a:ea typeface="IBM Plex Mono" pitchFamily="34" charset="-122"/>
+                <a:cs typeface="IBM Plex Mono" pitchFamily="34" charset="-120"/>
+              </a:rPr>
+              <a:t>AI for Software Development · Session 1</a:t>
+            </a:r>
+            <a:endParaRPr lang="en-US" sz="1200" dirty="0"/>
+          </a:p>
+        </p:txBody>
+      </p:sp>
+      <p:sp>
+        <p:nvSpPr>
+          <p:cNvPr id="6" name="Text 4"/>
+          <p:cNvSpPr/>
+          <p:nvPr/>
+        </p:nvSpPr>
+        <p:spPr>
+          <a:xfrm>
+            <a:off x="10363200" y="6337300"/>
+            <a:ext cx="1270000" cy="215900"/>
+          </a:xfrm>
+          <a:prstGeom prst="rect">
+            <a:avLst/>
+          </a:prstGeom>
+          <a:noFill/>
+          <a:ln/>
+        </p:spPr>
+        <p:txBody>
+          <a:bodyPr wrap="square" lIns="0" tIns="0" rIns="0" bIns="0" rtlCol="0" anchor="t"/>
+          <a:lstStyle/>
+          <a:p>
+            <a:pPr algn="r" indent="0" marL="0">
+              <a:lnSpc>
+                <a:spcPct val="145000"/>
+              </a:lnSpc>
+              <a:buNone/>
+            </a:pPr>
+            <a:r>
+              <a:rPr lang="en-US" sz="1200" dirty="0">
+                <a:solidFill>
+                  <a:srgbClr val="99948B"/>
+                </a:solidFill>
+                <a:latin typeface="IBM Plex Mono" pitchFamily="34" charset="0"/>
+                <a:ea typeface="IBM Plex Mono" pitchFamily="34" charset="-122"/>
+                <a:cs typeface="IBM Plex Mono" pitchFamily="34" charset="-120"/>
+              </a:rPr>
+              <a:t>49</a:t>
+            </a:r>
+            <a:endParaRPr lang="en-US" sz="1200" dirty="0"/>
+          </a:p>
+        </p:txBody>
+      </p:sp>
+      <p:sp>
+        <p:nvSpPr>
+          <p:cNvPr id="7" name="Text 5"/>
+          <p:cNvSpPr/>
+          <p:nvPr/>
+        </p:nvSpPr>
+        <p:spPr>
+          <a:xfrm>
+            <a:off x="558800" y="1511300"/>
+            <a:ext cx="190500" cy="317500"/>
+          </a:xfrm>
+          <a:prstGeom prst="rect">
+            <a:avLst/>
+          </a:prstGeom>
+          <a:noFill/>
+          <a:ln/>
+        </p:spPr>
+        <p:txBody>
+          <a:bodyPr wrap="square" lIns="0" tIns="0" rIns="0" bIns="0" rtlCol="0" anchor="t"/>
+          <a:lstStyle/>
+          <a:p>
+            <a:pPr algn="l" indent="0" marL="0">
+              <a:lnSpc>
+                <a:spcPct val="140000"/>
+              </a:lnSpc>
+              <a:buNone/>
+            </a:pPr>
+            <a:r>
+              <a:rPr lang="en-US" sz="1700" dirty="0">
+                <a:solidFill>
+                  <a:srgbClr val="A87A2E"/>
                 </a:solidFill>
                 <a:latin typeface="Libre Franklin" pitchFamily="34" charset="0"/>
                 <a:ea typeface="Libre Franklin" pitchFamily="34" charset="-122"/>
                 <a:cs typeface="Libre Franklin" pitchFamily="34" charset="-120"/>
               </a:rPr>
-              <a:t>Finish and deploy Lab 1 if it is not live yet</a:t>
-            </a:r>
-            <a:endParaRPr lang="en-US" sz="1600" dirty="0"/>
-          </a:p>
-        </p:txBody>
-      </p:sp>
-      <p:sp>
-        <p:nvSpPr>
-          <p:cNvPr id="5" name="Text 3"/>
-          <p:cNvSpPr/>
-          <p:nvPr/>
-        </p:nvSpPr>
-        <p:spPr>
-          <a:xfrm>
-            <a:off x="6350000" y="3975100"/>
-            <a:ext cx="5283200" cy="396240"/>
+              <a:t>—</a:t>
+            </a:r>
+            <a:endParaRPr lang="en-US" sz="1700" dirty="0"/>
+          </a:p>
+        </p:txBody>
+      </p:sp>
+      <p:sp>
+        <p:nvSpPr>
+          <p:cNvPr id="8" name="Text 6"/>
+          <p:cNvSpPr/>
+          <p:nvPr/>
+        </p:nvSpPr>
+        <p:spPr>
+          <a:xfrm>
+            <a:off x="927100" y="1511300"/>
+            <a:ext cx="9156700" cy="753110"/>
           </a:xfrm>
           <a:prstGeom prst="rect">
             <a:avLst/>
@@ -28437,7 +28981,7 @@
               <a:buNone/>
             </a:pPr>
             <a:r>
-              <a:rPr lang="en-US" sz="1600" dirty="0">
+              <a:rPr lang="en-US" sz="1700" b="1" dirty="0">
                 <a:solidFill>
                   <a:srgbClr val="332F2A"/>
                 </a:solidFill>
@@ -28445,33 +28989,8 @@
                 <a:ea typeface="Libre Franklin" pitchFamily="34" charset="-122"/>
                 <a:cs typeface="Libre Franklin" pitchFamily="34" charset="-120"/>
               </a:rPr>
-              <a:t>Read the AI-DLC notes before Session 2</a:t>
-            </a:r>
-            <a:endParaRPr lang="en-US" sz="1600" dirty="0"/>
-          </a:p>
-        </p:txBody>
-      </p:sp>
-      <p:sp>
-        <p:nvSpPr>
-          <p:cNvPr id="6" name="Text 4"/>
-          <p:cNvSpPr/>
-          <p:nvPr/>
-        </p:nvSpPr>
-        <p:spPr>
-          <a:xfrm>
-            <a:off x="6350000" y="4508500"/>
-            <a:ext cx="5283200" cy="254000"/>
-          </a:xfrm>
-          <a:prstGeom prst="rect">
-            <a:avLst/>
-          </a:prstGeom>
-          <a:noFill/>
-          <a:ln/>
-        </p:spPr>
-        <p:txBody>
-          <a:bodyPr wrap="square" lIns="0" tIns="0" rIns="0" bIns="0" rtlCol="0" anchor="t"/>
-          <a:lstStyle/>
-          <a:p>
+              <a:t>Open the four you approved. </a:t>
+            </a:r>
             <a:pPr algn="l" indent="0" marL="0">
               <a:lnSpc>
                 <a:spcPct val="145000"/>
@@ -28479,50 +28998,72 @@
               <a:buNone/>
             </a:pPr>
             <a:r>
-              <a:rPr lang="en-US" sz="1300" dirty="0">
-                <a:solidFill>
-                  <a:srgbClr val="77726A"/>
-                </a:solidFill>
-                <a:latin typeface="IBM Plex Mono" pitchFamily="34" charset="0"/>
-                <a:ea typeface="IBM Plex Mono" pitchFamily="34" charset="-122"/>
-                <a:cs typeface="IBM Plex Mono" pitchFamily="34" charset="-120"/>
-              </a:rPr>
-              <a:t>come back in at github.com/codespaces · do not make a new one</a:t>
-            </a:r>
-            <a:endParaRPr lang="en-US" sz="1300" dirty="0"/>
-          </a:p>
-        </p:txBody>
-      </p:sp>
-      <p:sp>
-        <p:nvSpPr>
-          <p:cNvPr id="7" name="Shape 5"/>
-          <p:cNvSpPr/>
-          <p:nvPr/>
-        </p:nvSpPr>
-        <p:spPr>
-          <a:xfrm>
-            <a:off x="558800" y="6172200"/>
-            <a:ext cx="11074400" cy="6350"/>
-          </a:xfrm>
-          <a:prstGeom prst="rect">
-            <a:avLst/>
-          </a:prstGeom>
-          <a:solidFill>
-            <a:srgbClr val="E1DED7"/>
-          </a:solidFill>
-          <a:ln/>
-        </p:spPr>
-      </p:sp>
-      <p:sp>
-        <p:nvSpPr>
-          <p:cNvPr id="8" name="Text 6"/>
-          <p:cNvSpPr/>
-          <p:nvPr/>
-        </p:nvSpPr>
-        <p:spPr>
-          <a:xfrm>
-            <a:off x="558800" y="6337300"/>
-            <a:ext cx="7620000" cy="215900"/>
+              <a:rPr lang="en-US" sz="1700" dirty="0">
+                <a:solidFill>
+                  <a:srgbClr val="332F2A"/>
+                </a:solidFill>
+                <a:latin typeface="Libre Franklin" pitchFamily="34" charset="0"/>
+                <a:ea typeface="Libre Franklin" pitchFamily="34" charset="-122"/>
+                <a:cs typeface="Libre Franklin" pitchFamily="34" charset="-120"/>
+              </a:rPr>
+              <a:t>aidlc/intent.md, requirements.md, design.md and tasks.md — read them as one set, in order.</a:t>
+            </a:r>
+            <a:endParaRPr lang="en-US" sz="1700" dirty="0"/>
+          </a:p>
+        </p:txBody>
+      </p:sp>
+      <p:sp>
+        <p:nvSpPr>
+          <p:cNvPr id="9" name="Text 7"/>
+          <p:cNvSpPr/>
+          <p:nvPr/>
+        </p:nvSpPr>
+        <p:spPr>
+          <a:xfrm>
+            <a:off x="558800" y="2391410"/>
+            <a:ext cx="190500" cy="317500"/>
+          </a:xfrm>
+          <a:prstGeom prst="rect">
+            <a:avLst/>
+          </a:prstGeom>
+          <a:noFill/>
+          <a:ln/>
+        </p:spPr>
+        <p:txBody>
+          <a:bodyPr wrap="square" lIns="0" tIns="0" rIns="0" bIns="0" rtlCol="0" anchor="t"/>
+          <a:lstStyle/>
+          <a:p>
+            <a:pPr algn="l" indent="0" marL="0">
+              <a:lnSpc>
+                <a:spcPct val="140000"/>
+              </a:lnSpc>
+              <a:buNone/>
+            </a:pPr>
+            <a:r>
+              <a:rPr lang="en-US" sz="1700" dirty="0">
+                <a:solidFill>
+                  <a:srgbClr val="A87A2E"/>
+                </a:solidFill>
+                <a:latin typeface="Libre Franklin" pitchFamily="34" charset="0"/>
+                <a:ea typeface="Libre Franklin" pitchFamily="34" charset="-122"/>
+                <a:cs typeface="Libre Franklin" pitchFamily="34" charset="-120"/>
+              </a:rPr>
+              <a:t>—</a:t>
+            </a:r>
+            <a:endParaRPr lang="en-US" sz="1700" dirty="0"/>
+          </a:p>
+        </p:txBody>
+      </p:sp>
+      <p:sp>
+        <p:nvSpPr>
+          <p:cNvPr id="10" name="Text 8"/>
+          <p:cNvSpPr/>
+          <p:nvPr/>
+        </p:nvSpPr>
+        <p:spPr>
+          <a:xfrm>
+            <a:off x="927100" y="2391410"/>
+            <a:ext cx="9156700" cy="753110"/>
           </a:xfrm>
           <a:prstGeom prst="rect">
             <a:avLst/>
@@ -28541,59 +29082,219 @@
               <a:buNone/>
             </a:pPr>
             <a:r>
-              <a:rPr lang="en-US" sz="1200" dirty="0">
-                <a:solidFill>
-                  <a:srgbClr val="77726A"/>
-                </a:solidFill>
-                <a:latin typeface="IBM Plex Mono" pitchFamily="34" charset="0"/>
-                <a:ea typeface="IBM Plex Mono" pitchFamily="34" charset="-122"/>
-                <a:cs typeface="IBM Plex Mono" pitchFamily="34" charset="-120"/>
-              </a:rPr>
-              <a:t>Your Name · you@university.ac.th</a:t>
-            </a:r>
-            <a:endParaRPr lang="en-US" sz="1200" dirty="0"/>
-          </a:p>
-        </p:txBody>
-      </p:sp>
-      <p:sp>
-        <p:nvSpPr>
-          <p:cNvPr id="9" name="Text 7"/>
-          <p:cNvSpPr/>
-          <p:nvPr/>
-        </p:nvSpPr>
-        <p:spPr>
-          <a:xfrm>
-            <a:off x="10363200" y="6337300"/>
-            <a:ext cx="1270000" cy="215900"/>
-          </a:xfrm>
-          <a:prstGeom prst="rect">
-            <a:avLst/>
-          </a:prstGeom>
-          <a:noFill/>
-          <a:ln/>
-        </p:spPr>
-        <p:txBody>
-          <a:bodyPr wrap="square" lIns="0" tIns="0" rIns="0" bIns="0" rtlCol="0" anchor="t"/>
-          <a:lstStyle/>
-          <a:p>
-            <a:pPr algn="r" indent="0" marL="0">
+              <a:rPr lang="en-US" sz="1700" b="1" dirty="0">
+                <a:solidFill>
+                  <a:srgbClr val="332F2A"/>
+                </a:solidFill>
+                <a:latin typeface="Libre Franklin" pitchFamily="34" charset="0"/>
+                <a:ea typeface="Libre Franklin" pitchFamily="34" charset="-122"/>
+                <a:cs typeface="Libre Franklin" pitchFamily="34" charset="-120"/>
+              </a:rPr>
+              <a:t>In a real team a person writes these. </a:t>
+            </a:r>
+            <a:pPr algn="l" indent="0" marL="0">
               <a:lnSpc>
                 <a:spcPct val="145000"/>
               </a:lnSpc>
               <a:buNone/>
             </a:pPr>
             <a:r>
-              <a:rPr lang="en-US" sz="1200" dirty="0">
-                <a:solidFill>
-                  <a:srgbClr val="77726A"/>
-                </a:solidFill>
-                <a:latin typeface="IBM Plex Mono" pitchFamily="34" charset="0"/>
-                <a:ea typeface="IBM Plex Mono" pitchFamily="34" charset="-122"/>
-                <a:cs typeface="IBM Plex Mono" pitchFamily="34" charset="-120"/>
-              </a:rPr>
-              <a:t>49</a:t>
-            </a:r>
-            <a:endParaRPr lang="en-US" sz="1200" dirty="0"/>
+              <a:rPr lang="en-US" sz="1700" dirty="0">
+                <a:solidFill>
+                  <a:srgbClr val="332F2A"/>
+                </a:solidFill>
+                <a:latin typeface="Libre Franklin" pitchFamily="34" charset="0"/>
+                <a:ea typeface="Libre Franklin" pitchFamily="34" charset="-122"/>
+                <a:cs typeface="Libre Franklin" pitchFamily="34" charset="-120"/>
+              </a:rPr>
+              <a:t>A product owner or tech lead drafts the intent and spec. The agent drafting them is a start, not a replacement.</a:t>
+            </a:r>
+            <a:endParaRPr lang="en-US" sz="1700" dirty="0"/>
+          </a:p>
+        </p:txBody>
+      </p:sp>
+      <p:sp>
+        <p:nvSpPr>
+          <p:cNvPr id="11" name="Text 9"/>
+          <p:cNvSpPr/>
+          <p:nvPr/>
+        </p:nvSpPr>
+        <p:spPr>
+          <a:xfrm>
+            <a:off x="558800" y="3271520"/>
+            <a:ext cx="190500" cy="317500"/>
+          </a:xfrm>
+          <a:prstGeom prst="rect">
+            <a:avLst/>
+          </a:prstGeom>
+          <a:noFill/>
+          <a:ln/>
+        </p:spPr>
+        <p:txBody>
+          <a:bodyPr wrap="square" lIns="0" tIns="0" rIns="0" bIns="0" rtlCol="0" anchor="t"/>
+          <a:lstStyle/>
+          <a:p>
+            <a:pPr algn="l" indent="0" marL="0">
+              <a:lnSpc>
+                <a:spcPct val="140000"/>
+              </a:lnSpc>
+              <a:buNone/>
+            </a:pPr>
+            <a:r>
+              <a:rPr lang="en-US" sz="1700" dirty="0">
+                <a:solidFill>
+                  <a:srgbClr val="A87A2E"/>
+                </a:solidFill>
+                <a:latin typeface="Libre Franklin" pitchFamily="34" charset="0"/>
+                <a:ea typeface="Libre Franklin" pitchFamily="34" charset="-122"/>
+                <a:cs typeface="Libre Franklin" pitchFamily="34" charset="-120"/>
+              </a:rPr>
+              <a:t>—</a:t>
+            </a:r>
+            <a:endParaRPr lang="en-US" sz="1700" dirty="0"/>
+          </a:p>
+        </p:txBody>
+      </p:sp>
+      <p:sp>
+        <p:nvSpPr>
+          <p:cNvPr id="12" name="Text 10"/>
+          <p:cNvSpPr/>
+          <p:nvPr/>
+        </p:nvSpPr>
+        <p:spPr>
+          <a:xfrm>
+            <a:off x="927100" y="3271520"/>
+            <a:ext cx="9156700" cy="753110"/>
+          </a:xfrm>
+          <a:prstGeom prst="rect">
+            <a:avLst/>
+          </a:prstGeom>
+          <a:noFill/>
+          <a:ln/>
+        </p:spPr>
+        <p:txBody>
+          <a:bodyPr wrap="square" lIns="0" tIns="0" rIns="0" bIns="0" rtlCol="0" anchor="t"/>
+          <a:lstStyle/>
+          <a:p>
+            <a:pPr algn="l" indent="0" marL="0">
+              <a:lnSpc>
+                <a:spcPct val="145000"/>
+              </a:lnSpc>
+              <a:buNone/>
+            </a:pPr>
+            <a:r>
+              <a:rPr lang="en-US" sz="1700" b="1" dirty="0">
+                <a:solidFill>
+                  <a:srgbClr val="332F2A"/>
+                </a:solidFill>
+                <a:latin typeface="Libre Franklin" pitchFamily="34" charset="0"/>
+                <a:ea typeface="Libre Franklin" pitchFamily="34" charset="-122"/>
+                <a:cs typeface="Libre Franklin" pitchFamily="34" charset="-120"/>
+              </a:rPr>
+              <a:t>Which is why you approved each one. </a:t>
+            </a:r>
+            <a:pPr algn="l" indent="0" marL="0">
+              <a:lnSpc>
+                <a:spcPct val="145000"/>
+              </a:lnSpc>
+              <a:buNone/>
+            </a:pPr>
+            <a:r>
+              <a:rPr lang="en-US" sz="1700" dirty="0">
+                <a:solidFill>
+                  <a:srgbClr val="332F2A"/>
+                </a:solidFill>
+                <a:latin typeface="Libre Franklin" pitchFamily="34" charset="0"/>
+                <a:ea typeface="Libre Franklin" pitchFamily="34" charset="-122"/>
+                <a:cs typeface="Libre Franklin" pitchFamily="34" charset="-120"/>
+              </a:rPr>
+              <a:t>Everything built today came out of those four files. A wrong line there becomes a wrong app, quickly and cheaply.</a:t>
+            </a:r>
+            <a:endParaRPr lang="en-US" sz="1700" dirty="0"/>
+          </a:p>
+        </p:txBody>
+      </p:sp>
+      <p:sp>
+        <p:nvSpPr>
+          <p:cNvPr id="13" name="Text 11"/>
+          <p:cNvSpPr/>
+          <p:nvPr/>
+        </p:nvSpPr>
+        <p:spPr>
+          <a:xfrm>
+            <a:off x="558800" y="4151630"/>
+            <a:ext cx="190500" cy="317500"/>
+          </a:xfrm>
+          <a:prstGeom prst="rect">
+            <a:avLst/>
+          </a:prstGeom>
+          <a:noFill/>
+          <a:ln/>
+        </p:spPr>
+        <p:txBody>
+          <a:bodyPr wrap="square" lIns="0" tIns="0" rIns="0" bIns="0" rtlCol="0" anchor="t"/>
+          <a:lstStyle/>
+          <a:p>
+            <a:pPr algn="l" indent="0" marL="0">
+              <a:lnSpc>
+                <a:spcPct val="140000"/>
+              </a:lnSpc>
+              <a:buNone/>
+            </a:pPr>
+            <a:r>
+              <a:rPr lang="en-US" sz="1700" dirty="0">
+                <a:solidFill>
+                  <a:srgbClr val="A87A2E"/>
+                </a:solidFill>
+                <a:latin typeface="Libre Franklin" pitchFamily="34" charset="0"/>
+                <a:ea typeface="Libre Franklin" pitchFamily="34" charset="-122"/>
+                <a:cs typeface="Libre Franklin" pitchFamily="34" charset="-120"/>
+              </a:rPr>
+              <a:t>—</a:t>
+            </a:r>
+            <a:endParaRPr lang="en-US" sz="1700" dirty="0"/>
+          </a:p>
+        </p:txBody>
+      </p:sp>
+      <p:sp>
+        <p:nvSpPr>
+          <p:cNvPr id="14" name="Text 12"/>
+          <p:cNvSpPr/>
+          <p:nvPr/>
+        </p:nvSpPr>
+        <p:spPr>
+          <a:xfrm>
+            <a:off x="927100" y="4151630"/>
+            <a:ext cx="9156700" cy="753110"/>
+          </a:xfrm>
+          <a:prstGeom prst="rect">
+            <a:avLst/>
+          </a:prstGeom>
+          <a:noFill/>
+          <a:ln/>
+        </p:spPr>
+        <p:txBody>
+          <a:bodyPr wrap="square" lIns="0" tIns="0" rIns="0" bIns="0" rtlCol="0" anchor="t"/>
+          <a:lstStyle/>
+          <a:p>
+            <a:pPr algn="l" indent="0" marL="0">
+              <a:lnSpc>
+                <a:spcPct val="145000"/>
+              </a:lnSpc>
+              <a:buNone/>
+            </a:pPr>
+            <a:r>
+              <a:rPr lang="en-US" sz="1700" dirty="0">
+                <a:solidFill>
+                  <a:srgbClr val="332F2A"/>
+                </a:solidFill>
+                <a:latin typeface="Libre Franklin" pitchFamily="34" charset="0"/>
+                <a:ea typeface="Libre Franklin" pitchFamily="34" charset="-122"/>
+                <a:cs typeface="Libre Franklin" pitchFamily="34" charset="-120"/>
+              </a:rPr>
+              <a:t>labs/PROMPTS.md explains why each prompt is worded the way it is. Read it before Session 2 — you will be writing your own.</a:t>
+            </a:r>
+            <a:endParaRPr lang="en-US" sz="1700" dirty="0"/>
           </a:p>
         </p:txBody>
       </p:sp>
@@ -29318,6 +30019,824 @@
               <a:t>Read the reference, then ship</a:t>
             </a:r>
             <a:endParaRPr lang="en-US" sz="1700" dirty="0"/>
+          </a:p>
+        </p:txBody>
+      </p:sp>
+    </p:spTree>
+  </p:cSld>
+  <p:clrMapOvr>
+    <a:masterClrMapping/>
+  </p:clrMapOvr>
+</p:sld>
+</file>
+
+<file path=ppt/slides/slide50.xml><?xml version="1.0" encoding="utf-8"?>
+<p:sld xmlns:a="http://schemas.openxmlformats.org/drawingml/2006/main" xmlns:r="http://schemas.openxmlformats.org/officeDocument/2006/relationships" xmlns:p="http://schemas.openxmlformats.org/presentationml/2006/main">
+  <p:cSld name="Slide 50">
+    <p:bg>
+      <p:bgPr>
+        <a:solidFill>
+          <a:srgbClr val="F5F2EC"/>
+        </a:solidFill>
+      </p:bgPr>
+    </p:bg>
+    <p:spTree>
+      <p:nvGrpSpPr>
+        <p:cNvPr id="1" name=""/>
+        <p:cNvGrpSpPr/>
+        <p:nvPr/>
+      </p:nvGrpSpPr>
+      <p:grpSpPr>
+        <a:xfrm>
+          <a:off x="0" y="0"/>
+          <a:ext cx="0" cy="0"/>
+          <a:chOff x="0" y="0"/>
+          <a:chExt cx="0" cy="0"/>
+        </a:xfrm>
+      </p:grpSpPr>
+      <p:sp>
+        <p:nvSpPr>
+          <p:cNvPr id="2" name="Text 0"/>
+          <p:cNvSpPr/>
+          <p:nvPr/>
+        </p:nvSpPr>
+        <p:spPr>
+          <a:xfrm>
+            <a:off x="558800" y="355600"/>
+            <a:ext cx="11074400" cy="215900"/>
+          </a:xfrm>
+          <a:prstGeom prst="rect">
+            <a:avLst/>
+          </a:prstGeom>
+          <a:noFill/>
+          <a:ln/>
+        </p:spPr>
+        <p:txBody>
+          <a:bodyPr wrap="square" lIns="0" tIns="0" rIns="0" bIns="0" rtlCol="0" anchor="t"/>
+          <a:lstStyle/>
+          <a:p>
+            <a:pPr algn="l" indent="0" marL="0">
+              <a:lnSpc>
+                <a:spcPct val="145000"/>
+              </a:lnSpc>
+              <a:buNone/>
+            </a:pPr>
+            <a:r>
+              <a:rPr lang="en-US" sz="1200" spc="168" kern="0" dirty="0">
+                <a:solidFill>
+                  <a:srgbClr val="77726A"/>
+                </a:solidFill>
+                <a:latin typeface="IBM Plex Mono" pitchFamily="34" charset="0"/>
+                <a:ea typeface="IBM Plex Mono" pitchFamily="34" charset="-122"/>
+                <a:cs typeface="IBM Plex Mono" pitchFamily="34" charset="-120"/>
+              </a:rPr>
+              <a:t>SESSION 01</a:t>
+            </a:r>
+            <a:endParaRPr lang="en-US" sz="1200" dirty="0"/>
+          </a:p>
+        </p:txBody>
+      </p:sp>
+      <p:sp>
+        <p:nvSpPr>
+          <p:cNvPr id="3" name="Text 1"/>
+          <p:cNvSpPr/>
+          <p:nvPr/>
+        </p:nvSpPr>
+        <p:spPr>
+          <a:xfrm>
+            <a:off x="558800" y="635000"/>
+            <a:ext cx="11074400" cy="508000"/>
+          </a:xfrm>
+          <a:prstGeom prst="rect">
+            <a:avLst/>
+          </a:prstGeom>
+          <a:noFill/>
+          <a:ln/>
+        </p:spPr>
+        <p:txBody>
+          <a:bodyPr wrap="square" lIns="0" tIns="0" rIns="0" bIns="0" rtlCol="0" anchor="t"/>
+          <a:lstStyle/>
+          <a:p>
+            <a:pPr algn="l" indent="0" marL="0">
+              <a:lnSpc>
+                <a:spcPct val="110000"/>
+              </a:lnSpc>
+              <a:buNone/>
+            </a:pPr>
+            <a:r>
+              <a:rPr lang="en-US" sz="2800" b="1" dirty="0">
+                <a:solidFill>
+                  <a:srgbClr val="332F2A"/>
+                </a:solidFill>
+                <a:latin typeface="Libre Franklin" pitchFamily="34" charset="0"/>
+                <a:ea typeface="Libre Franklin" pitchFamily="34" charset="-122"/>
+                <a:cs typeface="Libre Franklin" pitchFamily="34" charset="-120"/>
+              </a:rPr>
+              <a:t>What to take away</a:t>
+            </a:r>
+            <a:endParaRPr lang="en-US" sz="2800" dirty="0"/>
+          </a:p>
+        </p:txBody>
+      </p:sp>
+      <p:sp>
+        <p:nvSpPr>
+          <p:cNvPr id="4" name="Shape 2"/>
+          <p:cNvSpPr/>
+          <p:nvPr/>
+        </p:nvSpPr>
+        <p:spPr>
+          <a:xfrm>
+            <a:off x="558800" y="1181100"/>
+            <a:ext cx="11074400" cy="6350"/>
+          </a:xfrm>
+          <a:prstGeom prst="rect">
+            <a:avLst/>
+          </a:prstGeom>
+          <a:solidFill>
+            <a:srgbClr val="E1DED7"/>
+          </a:solidFill>
+          <a:ln/>
+        </p:spPr>
+      </p:sp>
+      <p:sp>
+        <p:nvSpPr>
+          <p:cNvPr id="5" name="Text 3"/>
+          <p:cNvSpPr/>
+          <p:nvPr/>
+        </p:nvSpPr>
+        <p:spPr>
+          <a:xfrm>
+            <a:off x="558800" y="6337300"/>
+            <a:ext cx="9804400" cy="215900"/>
+          </a:xfrm>
+          <a:prstGeom prst="rect">
+            <a:avLst/>
+          </a:prstGeom>
+          <a:noFill/>
+          <a:ln/>
+        </p:spPr>
+        <p:txBody>
+          <a:bodyPr wrap="square" lIns="0" tIns="0" rIns="0" bIns="0" rtlCol="0" anchor="t"/>
+          <a:lstStyle/>
+          <a:p>
+            <a:pPr algn="l" indent="0" marL="0">
+              <a:lnSpc>
+                <a:spcPct val="145000"/>
+              </a:lnSpc>
+              <a:buNone/>
+            </a:pPr>
+            <a:r>
+              <a:rPr lang="en-US" sz="1200" dirty="0">
+                <a:solidFill>
+                  <a:srgbClr val="99948B"/>
+                </a:solidFill>
+                <a:latin typeface="IBM Plex Mono" pitchFamily="34" charset="0"/>
+                <a:ea typeface="IBM Plex Mono" pitchFamily="34" charset="-122"/>
+                <a:cs typeface="IBM Plex Mono" pitchFamily="34" charset="-120"/>
+              </a:rPr>
+              <a:t>AI for Software Development · Session 1</a:t>
+            </a:r>
+            <a:endParaRPr lang="en-US" sz="1200" dirty="0"/>
+          </a:p>
+        </p:txBody>
+      </p:sp>
+      <p:sp>
+        <p:nvSpPr>
+          <p:cNvPr id="6" name="Text 4"/>
+          <p:cNvSpPr/>
+          <p:nvPr/>
+        </p:nvSpPr>
+        <p:spPr>
+          <a:xfrm>
+            <a:off x="10363200" y="6337300"/>
+            <a:ext cx="1270000" cy="215900"/>
+          </a:xfrm>
+          <a:prstGeom prst="rect">
+            <a:avLst/>
+          </a:prstGeom>
+          <a:noFill/>
+          <a:ln/>
+        </p:spPr>
+        <p:txBody>
+          <a:bodyPr wrap="square" lIns="0" tIns="0" rIns="0" bIns="0" rtlCol="0" anchor="t"/>
+          <a:lstStyle/>
+          <a:p>
+            <a:pPr algn="r" indent="0" marL="0">
+              <a:lnSpc>
+                <a:spcPct val="145000"/>
+              </a:lnSpc>
+              <a:buNone/>
+            </a:pPr>
+            <a:r>
+              <a:rPr lang="en-US" sz="1200" dirty="0">
+                <a:solidFill>
+                  <a:srgbClr val="99948B"/>
+                </a:solidFill>
+                <a:latin typeface="IBM Plex Mono" pitchFamily="34" charset="0"/>
+                <a:ea typeface="IBM Plex Mono" pitchFamily="34" charset="-122"/>
+                <a:cs typeface="IBM Plex Mono" pitchFamily="34" charset="-120"/>
+              </a:rPr>
+              <a:t>50</a:t>
+            </a:r>
+            <a:endParaRPr lang="en-US" sz="1200" dirty="0"/>
+          </a:p>
+        </p:txBody>
+      </p:sp>
+      <p:sp>
+        <p:nvSpPr>
+          <p:cNvPr id="7" name="Text 5"/>
+          <p:cNvSpPr/>
+          <p:nvPr/>
+        </p:nvSpPr>
+        <p:spPr>
+          <a:xfrm>
+            <a:off x="558800" y="1511300"/>
+            <a:ext cx="444500" cy="317500"/>
+          </a:xfrm>
+          <a:prstGeom prst="rect">
+            <a:avLst/>
+          </a:prstGeom>
+          <a:noFill/>
+          <a:ln/>
+        </p:spPr>
+        <p:txBody>
+          <a:bodyPr wrap="square" lIns="0" tIns="0" rIns="0" bIns="0" rtlCol="0" anchor="t"/>
+          <a:lstStyle/>
+          <a:p>
+            <a:pPr algn="l" indent="0" marL="0">
+              <a:lnSpc>
+                <a:spcPct val="145000"/>
+              </a:lnSpc>
+              <a:buNone/>
+            </a:pPr>
+            <a:r>
+              <a:rPr lang="en-US" sz="1700" dirty="0">
+                <a:solidFill>
+                  <a:srgbClr val="A87A2E"/>
+                </a:solidFill>
+                <a:latin typeface="IBM Plex Mono" pitchFamily="34" charset="0"/>
+                <a:ea typeface="IBM Plex Mono" pitchFamily="34" charset="-122"/>
+                <a:cs typeface="IBM Plex Mono" pitchFamily="34" charset="-120"/>
+              </a:rPr>
+              <a:t>01</a:t>
+            </a:r>
+            <a:endParaRPr lang="en-US" sz="1700" dirty="0"/>
+          </a:p>
+        </p:txBody>
+      </p:sp>
+      <p:sp>
+        <p:nvSpPr>
+          <p:cNvPr id="8" name="Text 6"/>
+          <p:cNvSpPr/>
+          <p:nvPr/>
+        </p:nvSpPr>
+        <p:spPr>
+          <a:xfrm>
+            <a:off x="1003300" y="1498600"/>
+            <a:ext cx="9461500" cy="447040"/>
+          </a:xfrm>
+          <a:prstGeom prst="rect">
+            <a:avLst/>
+          </a:prstGeom>
+          <a:noFill/>
+          <a:ln/>
+        </p:spPr>
+        <p:txBody>
+          <a:bodyPr wrap="square" lIns="0" tIns="0" rIns="0" bIns="0" rtlCol="0" anchor="t"/>
+          <a:lstStyle/>
+          <a:p>
+            <a:pPr algn="l" indent="0" marL="0">
+              <a:lnSpc>
+                <a:spcPct val="140000"/>
+              </a:lnSpc>
+              <a:buNone/>
+            </a:pPr>
+            <a:r>
+              <a:rPr lang="en-US" sz="1800" dirty="0">
+                <a:solidFill>
+                  <a:srgbClr val="332F2A"/>
+                </a:solidFill>
+                <a:latin typeface="Libre Franklin" pitchFamily="34" charset="0"/>
+                <a:ea typeface="Libre Franklin" pitchFamily="34" charset="-122"/>
+                <a:cs typeface="Libre Franklin" pitchFamily="34" charset="-120"/>
+              </a:rPr>
+              <a:t>An agent is a harness driving a model. Knowing which half broke is half the fix.</a:t>
+            </a:r>
+            <a:endParaRPr lang="en-US" sz="1800" dirty="0"/>
+          </a:p>
+        </p:txBody>
+      </p:sp>
+      <p:sp>
+        <p:nvSpPr>
+          <p:cNvPr id="9" name="Text 7"/>
+          <p:cNvSpPr/>
+          <p:nvPr/>
+        </p:nvSpPr>
+        <p:spPr>
+          <a:xfrm>
+            <a:off x="558800" y="2110740"/>
+            <a:ext cx="444500" cy="317500"/>
+          </a:xfrm>
+          <a:prstGeom prst="rect">
+            <a:avLst/>
+          </a:prstGeom>
+          <a:noFill/>
+          <a:ln/>
+        </p:spPr>
+        <p:txBody>
+          <a:bodyPr wrap="square" lIns="0" tIns="0" rIns="0" bIns="0" rtlCol="0" anchor="t"/>
+          <a:lstStyle/>
+          <a:p>
+            <a:pPr algn="l" indent="0" marL="0">
+              <a:lnSpc>
+                <a:spcPct val="145000"/>
+              </a:lnSpc>
+              <a:buNone/>
+            </a:pPr>
+            <a:r>
+              <a:rPr lang="en-US" sz="1700" dirty="0">
+                <a:solidFill>
+                  <a:srgbClr val="A87A2E"/>
+                </a:solidFill>
+                <a:latin typeface="IBM Plex Mono" pitchFamily="34" charset="0"/>
+                <a:ea typeface="IBM Plex Mono" pitchFamily="34" charset="-122"/>
+                <a:cs typeface="IBM Plex Mono" pitchFamily="34" charset="-120"/>
+              </a:rPr>
+              <a:t>02</a:t>
+            </a:r>
+            <a:endParaRPr lang="en-US" sz="1700" dirty="0"/>
+          </a:p>
+        </p:txBody>
+      </p:sp>
+      <p:sp>
+        <p:nvSpPr>
+          <p:cNvPr id="10" name="Text 8"/>
+          <p:cNvSpPr/>
+          <p:nvPr/>
+        </p:nvSpPr>
+        <p:spPr>
+          <a:xfrm>
+            <a:off x="1003300" y="2098040"/>
+            <a:ext cx="9461500" cy="447040"/>
+          </a:xfrm>
+          <a:prstGeom prst="rect">
+            <a:avLst/>
+          </a:prstGeom>
+          <a:noFill/>
+          <a:ln/>
+        </p:spPr>
+        <p:txBody>
+          <a:bodyPr wrap="square" lIns="0" tIns="0" rIns="0" bIns="0" rtlCol="0" anchor="t"/>
+          <a:lstStyle/>
+          <a:p>
+            <a:pPr algn="l" indent="0" marL="0">
+              <a:lnSpc>
+                <a:spcPct val="140000"/>
+              </a:lnSpc>
+              <a:buNone/>
+            </a:pPr>
+            <a:r>
+              <a:rPr lang="en-US" sz="1800" dirty="0">
+                <a:solidFill>
+                  <a:srgbClr val="332F2A"/>
+                </a:solidFill>
+                <a:latin typeface="Libre Franklin" pitchFamily="34" charset="0"/>
+                <a:ea typeface="Libre Franklin" pitchFamily="34" charset="-122"/>
+                <a:cs typeface="Libre Franklin" pitchFamily="34" charset="-120"/>
+              </a:rPr>
+              <a:t>A requirement you cannot check by running something is not a requirement yet.</a:t>
+            </a:r>
+            <a:endParaRPr lang="en-US" sz="1800" dirty="0"/>
+          </a:p>
+        </p:txBody>
+      </p:sp>
+      <p:sp>
+        <p:nvSpPr>
+          <p:cNvPr id="11" name="Text 9"/>
+          <p:cNvSpPr/>
+          <p:nvPr/>
+        </p:nvSpPr>
+        <p:spPr>
+          <a:xfrm>
+            <a:off x="558800" y="2710180"/>
+            <a:ext cx="444500" cy="317500"/>
+          </a:xfrm>
+          <a:prstGeom prst="rect">
+            <a:avLst/>
+          </a:prstGeom>
+          <a:noFill/>
+          <a:ln/>
+        </p:spPr>
+        <p:txBody>
+          <a:bodyPr wrap="square" lIns="0" tIns="0" rIns="0" bIns="0" rtlCol="0" anchor="t"/>
+          <a:lstStyle/>
+          <a:p>
+            <a:pPr algn="l" indent="0" marL="0">
+              <a:lnSpc>
+                <a:spcPct val="145000"/>
+              </a:lnSpc>
+              <a:buNone/>
+            </a:pPr>
+            <a:r>
+              <a:rPr lang="en-US" sz="1700" dirty="0">
+                <a:solidFill>
+                  <a:srgbClr val="A87A2E"/>
+                </a:solidFill>
+                <a:latin typeface="IBM Plex Mono" pitchFamily="34" charset="0"/>
+                <a:ea typeface="IBM Plex Mono" pitchFamily="34" charset="-122"/>
+                <a:cs typeface="IBM Plex Mono" pitchFamily="34" charset="-120"/>
+              </a:rPr>
+              <a:t>03</a:t>
+            </a:r>
+            <a:endParaRPr lang="en-US" sz="1700" dirty="0"/>
+          </a:p>
+        </p:txBody>
+      </p:sp>
+      <p:sp>
+        <p:nvSpPr>
+          <p:cNvPr id="12" name="Text 10"/>
+          <p:cNvSpPr/>
+          <p:nvPr/>
+        </p:nvSpPr>
+        <p:spPr>
+          <a:xfrm>
+            <a:off x="1003300" y="2697480"/>
+            <a:ext cx="9461500" cy="447040"/>
+          </a:xfrm>
+          <a:prstGeom prst="rect">
+            <a:avLst/>
+          </a:prstGeom>
+          <a:noFill/>
+          <a:ln/>
+        </p:spPr>
+        <p:txBody>
+          <a:bodyPr wrap="square" lIns="0" tIns="0" rIns="0" bIns="0" rtlCol="0" anchor="t"/>
+          <a:lstStyle/>
+          <a:p>
+            <a:pPr algn="l" indent="0" marL="0">
+              <a:lnSpc>
+                <a:spcPct val="140000"/>
+              </a:lnSpc>
+              <a:buNone/>
+            </a:pPr>
+            <a:r>
+              <a:rPr lang="en-US" sz="1800" dirty="0">
+                <a:solidFill>
+                  <a:srgbClr val="332F2A"/>
+                </a:solidFill>
+                <a:latin typeface="Libre Franklin" pitchFamily="34" charset="0"/>
+                <a:ea typeface="Libre Franklin" pitchFamily="34" charset="-122"/>
+                <a:cs typeface="Libre Franklin" pitchFamily="34" charset="-120"/>
+              </a:rPr>
+              <a:t>Looking right and being right differ, and only one of them survives a test.</a:t>
+            </a:r>
+            <a:endParaRPr lang="en-US" sz="1800" dirty="0"/>
+          </a:p>
+        </p:txBody>
+      </p:sp>
+    </p:spTree>
+  </p:cSld>
+  <p:clrMapOvr>
+    <a:masterClrMapping/>
+  </p:clrMapOvr>
+</p:sld>
+</file>
+
+<file path=ppt/slides/slide51.xml><?xml version="1.0" encoding="utf-8"?>
+<p:sld xmlns:a="http://schemas.openxmlformats.org/drawingml/2006/main" xmlns:r="http://schemas.openxmlformats.org/officeDocument/2006/relationships" xmlns:p="http://schemas.openxmlformats.org/presentationml/2006/main">
+  <p:cSld name="Slide 51">
+    <p:bg>
+      <p:bgPr>
+        <a:solidFill>
+          <a:srgbClr val="FCFBF8"/>
+        </a:solidFill>
+      </p:bgPr>
+    </p:bg>
+    <p:spTree>
+      <p:nvGrpSpPr>
+        <p:cNvPr id="1" name=""/>
+        <p:cNvGrpSpPr/>
+        <p:nvPr/>
+      </p:nvGrpSpPr>
+      <p:grpSpPr>
+        <a:xfrm>
+          <a:off x="0" y="0"/>
+          <a:ext cx="0" cy="0"/>
+          <a:chOff x="0" y="0"/>
+          <a:chExt cx="0" cy="0"/>
+        </a:xfrm>
+      </p:grpSpPr>
+      <p:sp>
+        <p:nvSpPr>
+          <p:cNvPr id="2" name="Text 0"/>
+          <p:cNvSpPr/>
+          <p:nvPr/>
+        </p:nvSpPr>
+        <p:spPr>
+          <a:xfrm>
+            <a:off x="558800" y="609600"/>
+            <a:ext cx="11074400" cy="254000"/>
+          </a:xfrm>
+          <a:prstGeom prst="rect">
+            <a:avLst/>
+          </a:prstGeom>
+          <a:noFill/>
+          <a:ln/>
+        </p:spPr>
+        <p:txBody>
+          <a:bodyPr wrap="square" lIns="0" tIns="0" rIns="0" bIns="0" rtlCol="0" anchor="t"/>
+          <a:lstStyle/>
+          <a:p>
+            <a:pPr algn="l" indent="0" marL="0">
+              <a:lnSpc>
+                <a:spcPct val="145000"/>
+              </a:lnSpc>
+              <a:buNone/>
+            </a:pPr>
+            <a:r>
+              <a:rPr lang="en-US" sz="1300" spc="182" kern="0" dirty="0">
+                <a:solidFill>
+                  <a:srgbClr val="A87A2E"/>
+                </a:solidFill>
+                <a:latin typeface="IBM Plex Mono" pitchFamily="34" charset="0"/>
+                <a:ea typeface="IBM Plex Mono" pitchFamily="34" charset="-122"/>
+                <a:cs typeface="IBM Plex Mono" pitchFamily="34" charset="-120"/>
+              </a:rPr>
+              <a:t>QUESTIONS</a:t>
+            </a:r>
+            <a:endParaRPr lang="en-US" sz="1300" dirty="0"/>
+          </a:p>
+        </p:txBody>
+      </p:sp>
+      <p:sp>
+        <p:nvSpPr>
+          <p:cNvPr id="3" name="Text 1"/>
+          <p:cNvSpPr/>
+          <p:nvPr/>
+        </p:nvSpPr>
+        <p:spPr>
+          <a:xfrm>
+            <a:off x="558800" y="3048000"/>
+            <a:ext cx="5283200" cy="1524000"/>
+          </a:xfrm>
+          <a:prstGeom prst="rect">
+            <a:avLst/>
+          </a:prstGeom>
+          <a:noFill/>
+          <a:ln/>
+        </p:spPr>
+        <p:txBody>
+          <a:bodyPr wrap="square" lIns="0" tIns="0" rIns="0" bIns="0" rtlCol="0" anchor="t"/>
+          <a:lstStyle/>
+          <a:p>
+            <a:pPr algn="l" indent="0" marL="0">
+              <a:lnSpc>
+                <a:spcPct val="108000"/>
+              </a:lnSpc>
+              <a:buNone/>
+            </a:pPr>
+            <a:r>
+              <a:rPr lang="en-US" sz="4000" b="1" dirty="0">
+                <a:solidFill>
+                  <a:srgbClr val="332F2A"/>
+                </a:solidFill>
+                <a:latin typeface="Libre Franklin" pitchFamily="34" charset="0"/>
+                <a:ea typeface="Libre Franklin" pitchFamily="34" charset="-122"/>
+                <a:cs typeface="Libre Franklin" pitchFamily="34" charset="-120"/>
+              </a:rPr>
+              <a:t>What did your agent get wrong?</a:t>
+            </a:r>
+            <a:endParaRPr lang="en-US" sz="4000" dirty="0"/>
+          </a:p>
+        </p:txBody>
+      </p:sp>
+      <p:sp>
+        <p:nvSpPr>
+          <p:cNvPr id="4" name="Text 2"/>
+          <p:cNvSpPr/>
+          <p:nvPr/>
+        </p:nvSpPr>
+        <p:spPr>
+          <a:xfrm>
+            <a:off x="6350000" y="3556000"/>
+            <a:ext cx="5283200" cy="396240"/>
+          </a:xfrm>
+          <a:prstGeom prst="rect">
+            <a:avLst/>
+          </a:prstGeom>
+          <a:noFill/>
+          <a:ln/>
+        </p:spPr>
+        <p:txBody>
+          <a:bodyPr wrap="square" lIns="0" tIns="0" rIns="0" bIns="0" rtlCol="0" anchor="t"/>
+          <a:lstStyle/>
+          <a:p>
+            <a:pPr algn="l" indent="0" marL="0">
+              <a:lnSpc>
+                <a:spcPct val="145000"/>
+              </a:lnSpc>
+              <a:buNone/>
+            </a:pPr>
+            <a:r>
+              <a:rPr lang="en-US" sz="1600" dirty="0">
+                <a:solidFill>
+                  <a:srgbClr val="332F2A"/>
+                </a:solidFill>
+                <a:latin typeface="Libre Franklin" pitchFamily="34" charset="0"/>
+                <a:ea typeface="Libre Franklin" pitchFamily="34" charset="-122"/>
+                <a:cs typeface="Libre Franklin" pitchFamily="34" charset="-120"/>
+              </a:rPr>
+              <a:t>Finish and deploy Lab 1 if it is not live yet</a:t>
+            </a:r>
+            <a:endParaRPr lang="en-US" sz="1600" dirty="0"/>
+          </a:p>
+        </p:txBody>
+      </p:sp>
+      <p:sp>
+        <p:nvSpPr>
+          <p:cNvPr id="5" name="Text 3"/>
+          <p:cNvSpPr/>
+          <p:nvPr/>
+        </p:nvSpPr>
+        <p:spPr>
+          <a:xfrm>
+            <a:off x="6350000" y="3975100"/>
+            <a:ext cx="5283200" cy="396240"/>
+          </a:xfrm>
+          <a:prstGeom prst="rect">
+            <a:avLst/>
+          </a:prstGeom>
+          <a:noFill/>
+          <a:ln/>
+        </p:spPr>
+        <p:txBody>
+          <a:bodyPr wrap="square" lIns="0" tIns="0" rIns="0" bIns="0" rtlCol="0" anchor="t"/>
+          <a:lstStyle/>
+          <a:p>
+            <a:pPr algn="l" indent="0" marL="0">
+              <a:lnSpc>
+                <a:spcPct val="145000"/>
+              </a:lnSpc>
+              <a:buNone/>
+            </a:pPr>
+            <a:r>
+              <a:rPr lang="en-US" sz="1600" dirty="0">
+                <a:solidFill>
+                  <a:srgbClr val="332F2A"/>
+                </a:solidFill>
+                <a:latin typeface="Libre Franklin" pitchFamily="34" charset="0"/>
+                <a:ea typeface="Libre Franklin" pitchFamily="34" charset="-122"/>
+                <a:cs typeface="Libre Franklin" pitchFamily="34" charset="-120"/>
+              </a:rPr>
+              <a:t>Read the AI-DLC notes before Session 2</a:t>
+            </a:r>
+            <a:endParaRPr lang="en-US" sz="1600" dirty="0"/>
+          </a:p>
+        </p:txBody>
+      </p:sp>
+      <p:sp>
+        <p:nvSpPr>
+          <p:cNvPr id="6" name="Text 4"/>
+          <p:cNvSpPr/>
+          <p:nvPr/>
+        </p:nvSpPr>
+        <p:spPr>
+          <a:xfrm>
+            <a:off x="6350000" y="4508500"/>
+            <a:ext cx="5283200" cy="254000"/>
+          </a:xfrm>
+          <a:prstGeom prst="rect">
+            <a:avLst/>
+          </a:prstGeom>
+          <a:noFill/>
+          <a:ln/>
+        </p:spPr>
+        <p:txBody>
+          <a:bodyPr wrap="square" lIns="0" tIns="0" rIns="0" bIns="0" rtlCol="0" anchor="t"/>
+          <a:lstStyle/>
+          <a:p>
+            <a:pPr algn="l" indent="0" marL="0">
+              <a:lnSpc>
+                <a:spcPct val="145000"/>
+              </a:lnSpc>
+              <a:buNone/>
+            </a:pPr>
+            <a:r>
+              <a:rPr lang="en-US" sz="1300" dirty="0">
+                <a:solidFill>
+                  <a:srgbClr val="77726A"/>
+                </a:solidFill>
+                <a:latin typeface="IBM Plex Mono" pitchFamily="34" charset="0"/>
+                <a:ea typeface="IBM Plex Mono" pitchFamily="34" charset="-122"/>
+                <a:cs typeface="IBM Plex Mono" pitchFamily="34" charset="-120"/>
+              </a:rPr>
+              <a:t>come back in at github.com/codespaces · do not make a new one</a:t>
+            </a:r>
+            <a:endParaRPr lang="en-US" sz="1300" dirty="0"/>
+          </a:p>
+        </p:txBody>
+      </p:sp>
+      <p:sp>
+        <p:nvSpPr>
+          <p:cNvPr id="7" name="Shape 5"/>
+          <p:cNvSpPr/>
+          <p:nvPr/>
+        </p:nvSpPr>
+        <p:spPr>
+          <a:xfrm>
+            <a:off x="558800" y="6172200"/>
+            <a:ext cx="11074400" cy="6350"/>
+          </a:xfrm>
+          <a:prstGeom prst="rect">
+            <a:avLst/>
+          </a:prstGeom>
+          <a:solidFill>
+            <a:srgbClr val="E1DED7"/>
+          </a:solidFill>
+          <a:ln/>
+        </p:spPr>
+      </p:sp>
+      <p:sp>
+        <p:nvSpPr>
+          <p:cNvPr id="8" name="Text 6"/>
+          <p:cNvSpPr/>
+          <p:nvPr/>
+        </p:nvSpPr>
+        <p:spPr>
+          <a:xfrm>
+            <a:off x="558800" y="6337300"/>
+            <a:ext cx="7620000" cy="215900"/>
+          </a:xfrm>
+          <a:prstGeom prst="rect">
+            <a:avLst/>
+          </a:prstGeom>
+          <a:noFill/>
+          <a:ln/>
+        </p:spPr>
+        <p:txBody>
+          <a:bodyPr wrap="square" lIns="0" tIns="0" rIns="0" bIns="0" rtlCol="0" anchor="t"/>
+          <a:lstStyle/>
+          <a:p>
+            <a:pPr algn="l" indent="0" marL="0">
+              <a:lnSpc>
+                <a:spcPct val="145000"/>
+              </a:lnSpc>
+              <a:buNone/>
+            </a:pPr>
+            <a:r>
+              <a:rPr lang="en-US" sz="1200" dirty="0">
+                <a:solidFill>
+                  <a:srgbClr val="77726A"/>
+                </a:solidFill>
+                <a:latin typeface="IBM Plex Mono" pitchFamily="34" charset="0"/>
+                <a:ea typeface="IBM Plex Mono" pitchFamily="34" charset="-122"/>
+                <a:cs typeface="IBM Plex Mono" pitchFamily="34" charset="-120"/>
+              </a:rPr>
+              <a:t>Your Name · you@university.ac.th</a:t>
+            </a:r>
+            <a:endParaRPr lang="en-US" sz="1200" dirty="0"/>
+          </a:p>
+        </p:txBody>
+      </p:sp>
+      <p:sp>
+        <p:nvSpPr>
+          <p:cNvPr id="9" name="Text 7"/>
+          <p:cNvSpPr/>
+          <p:nvPr/>
+        </p:nvSpPr>
+        <p:spPr>
+          <a:xfrm>
+            <a:off x="10363200" y="6337300"/>
+            <a:ext cx="1270000" cy="215900"/>
+          </a:xfrm>
+          <a:prstGeom prst="rect">
+            <a:avLst/>
+          </a:prstGeom>
+          <a:noFill/>
+          <a:ln/>
+        </p:spPr>
+        <p:txBody>
+          <a:bodyPr wrap="square" lIns="0" tIns="0" rIns="0" bIns="0" rtlCol="0" anchor="t"/>
+          <a:lstStyle/>
+          <a:p>
+            <a:pPr algn="r" indent="0" marL="0">
+              <a:lnSpc>
+                <a:spcPct val="145000"/>
+              </a:lnSpc>
+              <a:buNone/>
+            </a:pPr>
+            <a:r>
+              <a:rPr lang="en-US" sz="1200" dirty="0">
+                <a:solidFill>
+                  <a:srgbClr val="77726A"/>
+                </a:solidFill>
+                <a:latin typeface="IBM Plex Mono" pitchFamily="34" charset="0"/>
+                <a:ea typeface="IBM Plex Mono" pitchFamily="34" charset="-122"/>
+                <a:cs typeface="IBM Plex Mono" pitchFamily="34" charset="-120"/>
+              </a:rPr>
+              <a:t>51</a:t>
+            </a:r>
+            <a:endParaRPr lang="en-US" sz="1200" dirty="0"/>
           </a:p>
         </p:txBody>
       </p:sp>

--- a/slides/Session 1 - Meet Your Agent.pptx
+++ b/slides/Session 1 - Meet Your Agent.pptx
@@ -1872,7 +1872,7 @@
           <a:p>
             <a:r>
               <a:rPr lang="en-US" dirty="0"/>
-              <a:t>Requirement 5 is the trap that catches everyone, including the agent: the DC term must not be doubled. Ask the room how they would have written the check for requirement 3 — most say “the peak is in the right place”, which is exactly the check that misses a factor of five hundred.</a:t>
+              <a:t>Requirement 5 is the trap that catches everyone, including the agent: the DC term must not be doubled. Ask the room how they would have written the check for requirement 3 — most say “the peak is in the right place”, which is exactly the check that misses a factor of five hundred. The EYES row fixes a real failure from this course: a student whose intent asked for readable axes got seven rows, every one a pytest on core/ and nothing about the screen. Every test passed and the chart was unreadable.</a:t>
             </a:r>
             <a:endParaRPr lang="en-US" dirty="0"/>
           </a:p>
@@ -4072,7 +4072,7 @@
           <a:p>
             <a:r>
               <a:rPr lang="en-US" dirty="0"/>
-              <a:t>The rerun model is the one thing to make them say back to you: there is no onChange anywhere in this file, and every interaction runs all forty lines again. Then point at the import at the top - core.spectrum knows nothing about Streamlit, and Streamlit knows nothing about FFTs. That split is why the tests could exist before the page did, and it is worth naming as a design choice rather than an accident.</a:t>
+              <a:t>The rerun model is the one thing to make them say back to you: there is no onChange anywhere in this file, and every interaction runs all forty lines again. Then point at the import at the top - core.spectrum knows nothing about Streamlit, and Streamlit knows nothing about FFTs. That split is why the tests could exist before the page did. Say the st.line_chart trap out loud: a student in this course got a chart with Time and Frequency drawn as data lines, no readable axis at all, while all their tests passed. The legend is the tell - an axis name should never be in it.</a:t>
             </a:r>
             <a:endParaRPr lang="en-US" dirty="0"/>
           </a:p>
@@ -12426,7 +12426,7 @@
                 <a:ea typeface="IBM Plex Mono" pitchFamily="34" charset="-122"/>
                 <a:cs typeface="IBM Plex Mono" pitchFamily="34" charset="-120"/>
               </a:rPr>
-              <a:t>  “intent.md says what we</a:t>
+              <a:t>  “Read intent.md, then</a:t>
             </a:r>
             <a:endParaRPr lang="en-US" sz="1400" dirty="0"/>
           </a:p>
@@ -12446,7 +12446,7 @@
                 <a:ea typeface="IBM Plex Mono" pitchFamily="34" charset="-122"/>
                 <a:cs typeface="IBM Plex Mono" pitchFamily="34" charset="-120"/>
               </a:rPr>
-              <a:t>        are building. Read the</a:t>
+              <a:t>        the tests. WRITE a table.</a:t>
             </a:r>
             <a:endParaRPr lang="en-US" sz="1400" dirty="0"/>
           </a:p>
@@ -12466,7 +12466,7 @@
                 <a:ea typeface="IBM Plex Mono" pitchFamily="34" charset="-122"/>
                 <a:cs typeface="IBM Plex Mono" pitchFamily="34" charset="-120"/>
               </a:rPr>
-              <a:t>        tests. WRITE a table,</a:t>
+              <a:t>        Every done bullet gets a</a:t>
             </a:r>
             <a:endParaRPr lang="en-US" sz="1400" dirty="0"/>
           </a:p>
@@ -12486,7 +12486,7 @@
                 <a:ea typeface="IBM Plex Mono" pitchFamily="34" charset="-122"/>
                 <a:cs typeface="IBM Plex Mono" pitchFamily="34" charset="-120"/>
               </a:rPr>
-              <a:t>        each row with a check</a:t>
+              <a:t>        row. pytest &lt;name&gt;, or</a:t>
             </a:r>
             <a:endParaRPr lang="en-US" sz="1400" dirty="0"/>
           </a:p>
@@ -12506,7 +12506,7 @@
                 <a:ea typeface="IBM Plex Mono" pitchFamily="34" charset="-122"/>
                 <a:cs typeface="IBM Plex Mono" pitchFamily="34" charset="-120"/>
               </a:rPr>
-              <a:t>        that can be run.”</a:t>
+              <a:t>        EYES: &lt;what to look at&gt;.”</a:t>
             </a:r>
             <a:endParaRPr lang="en-US" sz="1400" dirty="0"/>
           </a:p>
@@ -12609,7 +12609,7 @@
         <p:spPr>
           <a:xfrm>
             <a:off x="7431430" y="3238500"/>
-            <a:ext cx="4201770" cy="1305560"/>
+            <a:ext cx="4201770" cy="1600200"/>
           </a:xfrm>
           <a:prstGeom prst="rect">
             <a:avLst/>
@@ -12636,7 +12636,7 @@
                 <a:ea typeface="Libre Franklin" pitchFamily="34" charset="-122"/>
                 <a:cs typeface="Libre Franklin" pitchFamily="34" charset="-120"/>
               </a:rPr>
-              <a:t>The agent drafts; a person reads every line. It is far better at the left column than at the check beside it.</a:t>
+              <a:t>Two kinds of check, and you need both. A test for the maths; a person's eyes for the screen, because no test in this repository ever opens a page.</a:t>
             </a:r>
             <a:endParaRPr lang="en-US" sz="1600" dirty="0"/>
           </a:p>
@@ -12698,7 +12698,7 @@
                 <a:ea typeface="Libre Franklin" pitchFamily="34" charset="-122"/>
                 <a:cs typeface="Libre Franklin" pitchFamily="34" charset="-120"/>
               </a:rPr>
-              <a:t>Approve it only when every right-hand column could actually fail.</a:t>
+              <a:t>Approve it only when every done bullet from your intent has a row that could fail.</a:t>
             </a:r>
             <a:endParaRPr lang="en-US" sz="1500" dirty="0"/>
           </a:p>
@@ -13131,7 +13131,7 @@
                 <a:ea typeface="IBM Plex Mono" pitchFamily="34" charset="-122"/>
                 <a:cs typeface="IBM Plex Mono" pitchFamily="34" charset="-120"/>
               </a:rPr>
-              <a:t>        approved. Read it. WRITE</a:t>
+              <a:t>        approved. WRITE design.md</a:t>
             </a:r>
             <a:endParaRPr lang="en-US" sz="1400" dirty="0"/>
           </a:p>
@@ -13151,7 +13151,7 @@
                 <a:ea typeface="IBM Plex Mono" pitchFamily="34" charset="-122"/>
                 <a:cs typeface="IBM Plex Mono" pitchFamily="34" charset="-120"/>
               </a:rPr>
-              <a:t>        design.md and tasks.md.</a:t>
+              <a:t>        and tasks.md. Two tasks,</a:t>
             </a:r>
             <a:endParaRPr lang="en-US" sz="1400" dirty="0"/>
           </a:p>
@@ -13171,7 +13171,7 @@
                 <a:ea typeface="IBM Plex Mono" pitchFamily="34" charset="-122"/>
                 <a:cs typeface="IBM Plex Mono" pitchFamily="34" charset="-120"/>
               </a:rPr>
-              <a:t>        Exactly two tasks. One</a:t>
+              <a:t>        one file each, and a</a:t>
             </a:r>
             <a:endParaRPr lang="en-US" sz="1400" dirty="0"/>
           </a:p>
@@ -13191,7 +13191,7 @@
                 <a:ea typeface="IBM Plex Mono" pitchFamily="34" charset="-122"/>
                 <a:cs typeface="IBM Plex Mono" pitchFamily="34" charset="-120"/>
               </a:rPr>
-              <a:t>        owner, one file per row.”</a:t>
+              <a:t>        Done when for both.”</a:t>
             </a:r>
             <a:endParaRPr lang="en-US" sz="1400" dirty="0"/>
           </a:p>
@@ -13341,7 +13341,7 @@
                 <a:ea typeface="Libre Franklin" pitchFamily="34" charset="-122"/>
                 <a:cs typeface="Libre Franklin" pitchFamily="34" charset="-120"/>
               </a:rPr>
-              <a:t>Every task names the ONE file it may touch. Alone that is bookkeeping; in Session 2 it is what lets four people build at once with nothing to merge.</a:t>
+              <a:t>Every task names the ONE file it may touch, and the one criterion that says it is finished. A task with no Done when can never be wrong, so it will be.</a:t>
             </a:r>
             <a:endParaRPr lang="en-US" sz="1600" dirty="0"/>
           </a:p>
@@ -13403,7 +13403,7 @@
                 <a:ea typeface="Libre Franklin" pitchFamily="34" charset="-122"/>
                 <a:cs typeface="Libre Franklin" pitchFamily="34" charset="-120"/>
               </a:rPr>
-              <a:t>One task, one owner, one file.</a:t>
+              <a:t>One task, one owner, one file, one check that could fail.</a:t>
             </a:r>
             <a:endParaRPr lang="en-US" sz="1500" dirty="0"/>
           </a:p>
@@ -20345,7 +20345,7 @@
                 <a:ea typeface="IBM Plex Mono" pitchFamily="34" charset="-122"/>
                 <a:cs typeface="IBM Plex Mono" pitchFamily="34" charset="-120"/>
               </a:rPr>
-              <a:t>     start a NEW Cline task</a:t>
+              <a:t>     NEW task, paste "Gate 2"</a:t>
             </a:r>
             <a:endParaRPr lang="en-US" sz="1400" dirty="0"/>
           </a:p>
@@ -20365,7 +20365,7 @@
                 <a:ea typeface="IBM Plex Mono" pitchFamily="34" charset="-122"/>
                 <a:cs typeface="IBM Plex Mono" pitchFamily="34" charset="-120"/>
               </a:rPr>
-              <a:t>       paste "Gate 2" from</a:t>
+              <a:t>       from labs/PROMPTS.md</a:t>
             </a:r>
             <a:endParaRPr lang="en-US" sz="1400" dirty="0"/>
           </a:p>
@@ -20385,7 +20385,7 @@
                 <a:ea typeface="IBM Plex Mono" pitchFamily="34" charset="-122"/>
                 <a:cs typeface="IBM Plex Mono" pitchFamily="34" charset="-120"/>
               </a:rPr>
-              <a:t>       labs/PROMPTS.md</a:t>
+              <a:t>       read it, reply approved</a:t>
             </a:r>
             <a:endParaRPr lang="en-US" sz="1400" dirty="0"/>
           </a:p>
@@ -20396,6 +20396,32 @@
               </a:lnSpc>
               <a:buNone/>
             </a:pPr>
+            <a:endParaRPr lang="en-US" sz="1400" dirty="0"/>
+          </a:p>
+          <a:p>
+            <a:pPr indent="0" marL="0">
+              <a:lnSpc>
+                <a:spcPct val="160000"/>
+              </a:lnSpc>
+              <a:buNone/>
+            </a:pPr>
+            <a:r>
+              <a:rPr lang="en-US" sz="1400" b="1" dirty="0">
+                <a:solidFill>
+                  <a:srgbClr val="332F2A"/>
+                </a:solidFill>
+                <a:latin typeface="IBM Plex Mono" pitchFamily="34" charset="0"/>
+                <a:ea typeface="IBM Plex Mono" pitchFamily="34" charset="-122"/>
+                <a:cs typeface="IBM Plex Mono" pitchFamily="34" charset="-120"/>
+              </a:rPr>
+              <a:t>CHECK</a:t>
+            </a:r>
+            <a:pPr indent="0" marL="0">
+              <a:lnSpc>
+                <a:spcPct val="160000"/>
+              </a:lnSpc>
+              <a:buNone/>
+            </a:pPr>
             <a:r>
               <a:rPr lang="en-US" sz="1400" dirty="0">
                 <a:solidFill>
@@ -20405,7 +20431,7 @@
                 <a:ea typeface="IBM Plex Mono" pitchFamily="34" charset="-122"/>
                 <a:cs typeface="IBM Plex Mono" pitchFamily="34" charset="-120"/>
               </a:rPr>
-              <a:t>       read it, reply approved</a:t>
+              <a:t>  every done bullet from</a:t>
             </a:r>
             <a:endParaRPr lang="en-US" sz="1400" dirty="0"/>
           </a:p>
@@ -20416,6 +20442,17 @@
               </a:lnSpc>
               <a:buNone/>
             </a:pPr>
+            <a:r>
+              <a:rPr lang="en-US" sz="1400" dirty="0">
+                <a:solidFill>
+                  <a:srgbClr val="332F2A"/>
+                </a:solidFill>
+                <a:latin typeface="IBM Plex Mono" pitchFamily="34" charset="0"/>
+                <a:ea typeface="IBM Plex Mono" pitchFamily="34" charset="-122"/>
+                <a:cs typeface="IBM Plex Mono" pitchFamily="34" charset="-120"/>
+              </a:rPr>
+              <a:t>       intent.md has a row.</a:t>
+            </a:r>
             <a:endParaRPr lang="en-US" sz="1400" dirty="0"/>
           </a:p>
           <a:p>
@@ -20426,23 +20463,6 @@
               <a:buNone/>
             </a:pPr>
             <a:r>
-              <a:rPr lang="en-US" sz="1400" b="1" dirty="0">
-                <a:solidFill>
-                  <a:srgbClr val="332F2A"/>
-                </a:solidFill>
-                <a:latin typeface="IBM Plex Mono" pitchFamily="34" charset="0"/>
-                <a:ea typeface="IBM Plex Mono" pitchFamily="34" charset="-122"/>
-                <a:cs typeface="IBM Plex Mono" pitchFamily="34" charset="-120"/>
-              </a:rPr>
-              <a:t>CHECK</a:t>
-            </a:r>
-            <a:pPr indent="0" marL="0">
-              <a:lnSpc>
-                <a:spcPct val="160000"/>
-              </a:lnSpc>
-              <a:buNone/>
-            </a:pPr>
-            <a:r>
               <a:rPr lang="en-US" sz="1400" dirty="0">
                 <a:solidFill>
                   <a:srgbClr val="332F2A"/>
@@ -20451,27 +20471,7 @@
                 <a:ea typeface="IBM Plex Mono" pitchFamily="34" charset="-122"/>
                 <a:cs typeface="IBM Plex Mono" pitchFamily="34" charset="-120"/>
               </a:rPr>
-              <a:t>  could each criterion</a:t>
-            </a:r>
-            <a:endParaRPr lang="en-US" sz="1400" dirty="0"/>
-          </a:p>
-          <a:p>
-            <a:pPr indent="0" marL="0">
-              <a:lnSpc>
-                <a:spcPct val="160000"/>
-              </a:lnSpc>
-              <a:buNone/>
-            </a:pPr>
-            <a:r>
-              <a:rPr lang="en-US" sz="1400" dirty="0">
-                <a:solidFill>
-                  <a:srgbClr val="332F2A"/>
-                </a:solidFill>
-                <a:latin typeface="IBM Plex Mono" pitchFamily="34" charset="0"/>
-                <a:ea typeface="IBM Plex Mono" pitchFamily="34" charset="-122"/>
-                <a:cs typeface="IBM Plex Mono" pitchFamily="34" charset="-120"/>
-              </a:rPr>
-              <a:t>       actually FAIL?</a:t>
+              <a:t>       could each one FAIL?</a:t>
             </a:r>
             <a:endParaRPr lang="en-US" sz="1400" dirty="0"/>
           </a:p>
@@ -20594,7 +20594,7 @@
         <p:spPr>
           <a:xfrm>
             <a:off x="7431430" y="2943860"/>
-            <a:ext cx="4201770" cy="1305560"/>
+            <a:ext cx="4201770" cy="1600200"/>
           </a:xfrm>
           <a:prstGeom prst="rect">
             <a:avLst/>
@@ -20621,7 +20621,7 @@
                 <a:ea typeface="Libre Franklin" pitchFamily="34" charset="-122"/>
                 <a:cs typeface="Libre Franklin" pitchFamily="34" charset="-120"/>
               </a:rPr>
-              <a:t>A criterion that cannot fail is not a criterion. “A spike appears near 50 Hz” passes code that is wrong by a factor of five hundred.</a:t>
+              <a:t>Count the rows against your intent. Anything about the screen cannot cite a test, so it gets EYES: open the app, set 50 Hz at 1.0, read the spike height.</a:t>
             </a:r>
             <a:endParaRPr lang="en-US" sz="1600" dirty="0"/>
           </a:p>
@@ -21119,7 +21119,7 @@
                 <a:ea typeface="IBM Plex Mono" pitchFamily="34" charset="-122"/>
                 <a:cs typeface="IBM Plex Mono" pitchFamily="34" charset="-120"/>
               </a:rPr>
-              <a:t>  exactly two tasks, and</a:t>
+              <a:t>  two tasks, one file each,</a:t>
             </a:r>
             <a:endParaRPr lang="en-US" sz="1400" dirty="0"/>
           </a:p>
@@ -21139,7 +21139,7 @@
                 <a:ea typeface="IBM Plex Mono" pitchFamily="34" charset="-122"/>
                 <a:cs typeface="IBM Plex Mono" pitchFamily="34" charset="-120"/>
               </a:rPr>
-              <a:t>       no task touches two files</a:t>
+              <a:t>       and BOTH have a Done when</a:t>
             </a:r>
             <a:endParaRPr lang="en-US" sz="1400" dirty="0"/>
           </a:p>
@@ -21371,7 +21371,7 @@
                 <a:ea typeface="Libre Franklin" pitchFamily="34" charset="-122"/>
                 <a:cs typeface="Libre Franklin" pitchFamily="34" charset="-120"/>
               </a:rPr>
-              <a:t>If a task touches two files, send it back. That is the whole check.</a:t>
+              <a:t>A task with no Done when can never be wrong. That is how a broken page ships with green tests.</a:t>
             </a:r>
             <a:endParaRPr lang="en-US" sz="1500" dirty="0"/>
           </a:p>
@@ -21721,7 +21721,7 @@
                 <a:ea typeface="IBM Plex Mono" pitchFamily="34" charset="-122"/>
                 <a:cs typeface="IBM Plex Mono" pitchFamily="34" charset="-120"/>
               </a:rPr>
-              <a:t>     NEW task, "Gate 4 task 1"</a:t>
+              <a:t>     a NEW task for each:</a:t>
             </a:r>
             <a:endParaRPr lang="en-US" sz="1400" dirty="0"/>
           </a:p>
@@ -21741,7 +21741,7 @@
                 <a:ea typeface="IBM Plex Mono" pitchFamily="34" charset="-122"/>
                 <a:cs typeface="IBM Plex Mono" pitchFamily="34" charset="-120"/>
               </a:rPr>
-              <a:t>       pytest, then commit</a:t>
+              <a:t>       task 1: pytest, commit</a:t>
             </a:r>
             <a:endParaRPr lang="en-US" sz="1400" dirty="0"/>
           </a:p>
@@ -21761,7 +21761,7 @@
                 <a:ea typeface="IBM Plex Mono" pitchFamily="34" charset="-122"/>
                 <a:cs typeface="IBM Plex Mono" pitchFamily="34" charset="-120"/>
               </a:rPr>
-              <a:t>       NEW task, "Gate 4 task 2"</a:t>
+              <a:t>       task 2: run app, commit</a:t>
             </a:r>
             <a:endParaRPr lang="en-US" sz="1400" dirty="0"/>
           </a:p>
@@ -21772,6 +21772,32 @@
               </a:lnSpc>
               <a:buNone/>
             </a:pPr>
+            <a:endParaRPr lang="en-US" sz="1400" dirty="0"/>
+          </a:p>
+          <a:p>
+            <a:pPr indent="0" marL="0">
+              <a:lnSpc>
+                <a:spcPct val="160000"/>
+              </a:lnSpc>
+              <a:buNone/>
+            </a:pPr>
+            <a:r>
+              <a:rPr lang="en-US" sz="1400" b="1" dirty="0">
+                <a:solidFill>
+                  <a:srgbClr val="332F2A"/>
+                </a:solidFill>
+                <a:latin typeface="IBM Plex Mono" pitchFamily="34" charset="0"/>
+                <a:ea typeface="IBM Plex Mono" pitchFamily="34" charset="-122"/>
+                <a:cs typeface="IBM Plex Mono" pitchFamily="34" charset="-120"/>
+              </a:rPr>
+              <a:t>CHECK</a:t>
+            </a:r>
+            <a:pPr indent="0" marL="0">
+              <a:lnSpc>
+                <a:spcPct val="160000"/>
+              </a:lnSpc>
+              <a:buNone/>
+            </a:pPr>
             <a:r>
               <a:rPr lang="en-US" sz="1400" dirty="0">
                 <a:solidFill>
@@ -21781,7 +21807,7 @@
                 <a:ea typeface="IBM Plex Mono" pitchFamily="34" charset="-122"/>
                 <a:cs typeface="IBM Plex Mono" pitchFamily="34" charset="-120"/>
               </a:rPr>
-              <a:t>       run the app, then commit</a:t>
+              <a:t>  7 spectrum tests pass</a:t>
             </a:r>
             <a:endParaRPr lang="en-US" sz="1400" dirty="0"/>
           </a:p>
@@ -21792,6 +21818,17 @@
               </a:lnSpc>
               <a:buNone/>
             </a:pPr>
+            <a:r>
+              <a:rPr lang="en-US" sz="1400" dirty="0">
+                <a:solidFill>
+                  <a:srgbClr val="332F2A"/>
+                </a:solidFill>
+                <a:latin typeface="IBM Plex Mono" pitchFamily="34" charset="0"/>
+                <a:ea typeface="IBM Plex Mono" pitchFamily="34" charset="-122"/>
+                <a:cs typeface="IBM Plex Mono" pitchFamily="34" charset="-120"/>
+              </a:rPr>
+              <a:t>       50 Hz spike reaches 1.0</a:t>
+            </a:r>
             <a:endParaRPr lang="en-US" sz="1400" dirty="0"/>
           </a:p>
           <a:p>
@@ -21802,23 +21839,6 @@
               <a:buNone/>
             </a:pPr>
             <a:r>
-              <a:rPr lang="en-US" sz="1400" b="1" dirty="0">
-                <a:solidFill>
-                  <a:srgbClr val="332F2A"/>
-                </a:solidFill>
-                <a:latin typeface="IBM Plex Mono" pitchFamily="34" charset="0"/>
-                <a:ea typeface="IBM Plex Mono" pitchFamily="34" charset="-122"/>
-                <a:cs typeface="IBM Plex Mono" pitchFamily="34" charset="-120"/>
-              </a:rPr>
-              <a:t>CHECK</a:t>
-            </a:r>
-            <a:pPr indent="0" marL="0">
-              <a:lnSpc>
-                <a:spcPct val="160000"/>
-              </a:lnSpc>
-              <a:buNone/>
-            </a:pPr>
-            <a:r>
               <a:rPr lang="en-US" sz="1400" dirty="0">
                 <a:solidFill>
                   <a:srgbClr val="332F2A"/>
@@ -21827,27 +21847,7 @@
                 <a:ea typeface="IBM Plex Mono" pitchFamily="34" charset="-122"/>
                 <a:cs typeface="IBM Plex Mono" pitchFamily="34" charset="-120"/>
               </a:rPr>
-              <a:t>  7 spectrum tests pass</a:t>
-            </a:r>
-            <a:endParaRPr lang="en-US" sz="1400" dirty="0"/>
-          </a:p>
-          <a:p>
-            <a:pPr indent="0" marL="0">
-              <a:lnSpc>
-                <a:spcPct val="160000"/>
-              </a:lnSpc>
-              <a:buNone/>
-            </a:pPr>
-            <a:r>
-              <a:rPr lang="en-US" sz="1400" dirty="0">
-                <a:solidFill>
-                  <a:srgbClr val="332F2A"/>
-                </a:solidFill>
-                <a:latin typeface="IBM Plex Mono" pitchFamily="34" charset="0"/>
-                <a:ea typeface="IBM Plex Mono" pitchFamily="34" charset="-122"/>
-                <a:cs typeface="IBM Plex Mono" pitchFamily="34" charset="-120"/>
-              </a:rPr>
-              <a:t>       50 Hz spike reaches 1.0</a:t>
+              <a:t>       no axis name in the legend</a:t>
             </a:r>
             <a:endParaRPr lang="en-US" sz="1400" dirty="0"/>
           </a:p>
@@ -27379,7 +27379,7 @@
         <p:spPr>
           <a:xfrm>
             <a:off x="7431430" y="1511300"/>
-            <a:ext cx="4201770" cy="1600200"/>
+            <a:ext cx="4201770" cy="1894840"/>
           </a:xfrm>
           <a:prstGeom prst="rect">
             <a:avLst/>
@@ -27406,7 +27406,7 @@
                 <a:ea typeface="Libre Franklin" pitchFamily="34" charset="-122"/>
                 <a:cs typeface="Libre Franklin" pitchFamily="34" charset="-120"/>
               </a:rPr>
-              <a:t>A widget is not an event handler. st.number_input hands back whatever is in the box right now, and the script carries straight on using it.</a:t>
+              <a:t>A widget is not an event handler. st.number_input hands back whatever is in the box right now, the script carries on using it, and moving any control reruns the whole file from the top.</a:t>
             </a:r>
             <a:endParaRPr lang="en-US" sz="1600" dirty="0"/>
           </a:p>
@@ -27420,7 +27420,7 @@
         </p:nvSpPr>
         <p:spPr>
           <a:xfrm>
-            <a:off x="7431430" y="3238500"/>
+            <a:off x="7431430" y="3533140"/>
             <a:ext cx="4201770" cy="1894840"/>
           </a:xfrm>
           <a:prstGeom prst="rect">
@@ -27448,7 +27448,7 @@
                 <a:ea typeface="Libre Franklin" pitchFamily="34" charset="-122"/>
                 <a:cs typeface="Libre Franklin" pitchFamily="34" charset="-120"/>
               </a:rPr>
-              <a:t>Move any control and Streamlit reruns this file from the top — no callbacks, no state to wire. st.columns sets two inputs side by side; st.metric, st.pyplot and st.info are how the page shows a result.</a:t>
+              <a:t>st.metric, st.pyplot and st.info are how this page shows a result. If your agent reaches for st.line_chart instead, name the axes with x= and y=, or it draws your x-axis as a second line.</a:t>
             </a:r>
             <a:endParaRPr lang="en-US" sz="1600" dirty="0"/>
           </a:p>

--- a/slides/Session 1 - Meet Your Agent.pptx
+++ b/slides/Session 1 - Meet Your Agent.pptx
@@ -20431,7 +20431,7 @@
                 <a:ea typeface="IBM Plex Mono" pitchFamily="34" charset="-122"/>
                 <a:cs typeface="IBM Plex Mono" pitchFamily="34" charset="-120"/>
               </a:rPr>
-              <a:t>  every done bullet from</a:t>
+              <a:t>  every done bullet has a row</a:t>
             </a:r>
             <a:endParaRPr lang="en-US" sz="1400" dirty="0"/>
           </a:p>
@@ -20451,7 +20451,7 @@
                 <a:ea typeface="IBM Plex Mono" pitchFamily="34" charset="-122"/>
                 <a:cs typeface="IBM Plex Mono" pitchFamily="34" charset="-120"/>
               </a:rPr>
-              <a:t>       intent.md has a row.</a:t>
+              <a:t>       pytest only backs core/</a:t>
             </a:r>
             <a:endParaRPr lang="en-US" sz="1400" dirty="0"/>
           </a:p>
@@ -20621,7 +20621,7 @@
                 <a:ea typeface="Libre Franklin" pitchFamily="34" charset="-122"/>
                 <a:cs typeface="Libre Franklin" pitchFamily="34" charset="-120"/>
               </a:rPr>
-              <a:t>Count the rows against your intent. Anything about the screen cannot cite a test, so it gets EYES: open the app, set 50 Hz at 1.0, read the spike height.</a:t>
+              <a:t>Count the rows against your intent. A pytest criterion may only back a claim about core/ — cite one for what the page does and it passes while the page is blank.</a:t>
             </a:r>
             <a:endParaRPr lang="en-US" sz="1600" dirty="0"/>
           </a:p>
@@ -21119,7 +21119,7 @@
                 <a:ea typeface="IBM Plex Mono" pitchFamily="34" charset="-122"/>
                 <a:cs typeface="IBM Plex Mono" pitchFamily="34" charset="-120"/>
               </a:rPr>
-              <a:t>  two tasks, one file each,</a:t>
+              <a:t>  design.md matches the tests</a:t>
             </a:r>
             <a:endParaRPr lang="en-US" sz="1400" dirty="0"/>
           </a:p>
@@ -21139,7 +21139,7 @@
                 <a:ea typeface="IBM Plex Mono" pitchFamily="34" charset="-122"/>
                 <a:cs typeface="IBM Plex Mono" pitchFamily="34" charset="-120"/>
               </a:rPr>
-              <a:t>       and BOTH have a Done when</a:t>
+              <a:t>       two tasks, one file each</a:t>
             </a:r>
             <a:endParaRPr lang="en-US" sz="1400" dirty="0"/>
           </a:p>
@@ -21371,7 +21371,7 @@
                 <a:ea typeface="Libre Franklin" pitchFamily="34" charset="-122"/>
                 <a:cs typeface="Libre Franklin" pitchFamily="34" charset="-120"/>
               </a:rPr>
-              <a:t>A task with no Done when can never be wrong. That is how a broken page ships with green tests.</a:t>
+              <a:t>The task table is easy to check because the prompt dictated it. design.md is the part nobody dictated.</a:t>
             </a:r>
             <a:endParaRPr lang="en-US" sz="1500" dirty="0"/>
           </a:p>

--- a/slides/Session 1 - Meet Your Agent.pptx
+++ b/slides/Session 1 - Meet Your Agent.pptx
@@ -19152,7 +19152,7 @@
                 <a:ea typeface="IBM Plex Mono" pitchFamily="34" charset="-122"/>
                 <a:cs typeface="IBM Plex Mono" pitchFamily="34" charset="-120"/>
               </a:rPr>
-              <a:t>Now pytest goes 7 failed -&gt; 56 pass.</a:t>
+              <a:t>Now pytest goes 7 failed -&gt; 29 pass.</a:t>
             </a:r>
             <a:endParaRPr lang="en-US" sz="1400" dirty="0"/>
           </a:p>
@@ -21930,7 +21930,7 @@
                 <a:ea typeface="IBM Plex Mono" pitchFamily="34" charset="-122"/>
                 <a:cs typeface="IBM Plex Mono" pitchFamily="34" charset="-120"/>
               </a:rPr>
-              <a:t>pytest 56 pass</a:t>
+              <a:t>pytest 29 pass</a:t>
             </a:r>
             <a:endParaRPr lang="en-US" sz="1400" dirty="0"/>
           </a:p>

--- a/slides/Session 1 - Meet Your Agent.pptx
+++ b/slides/Session 1 - Meet Your Agent.pptx
@@ -20431,7 +20431,7 @@
                 <a:ea typeface="IBM Plex Mono" pitchFamily="34" charset="-122"/>
                 <a:cs typeface="IBM Plex Mono" pitchFamily="34" charset="-120"/>
               </a:rPr>
-              <a:t>  every done bullet has a row</a:t>
+              <a:t>  every bullet has a row,</a:t>
             </a:r>
             <a:endParaRPr lang="en-US" sz="1400" dirty="0"/>
           </a:p>
@@ -20451,7 +20451,7 @@
                 <a:ea typeface="IBM Plex Mono" pitchFamily="34" charset="-122"/>
                 <a:cs typeface="IBM Plex Mono" pitchFamily="34" charset="-120"/>
               </a:rPr>
-              <a:t>       pytest only backs core/</a:t>
+              <a:t>       all 7 tests cited, and</a:t>
             </a:r>
             <a:endParaRPr lang="en-US" sz="1400" dirty="0"/>
           </a:p>
@@ -21827,7 +21827,7 @@
                 <a:ea typeface="IBM Plex Mono" pitchFamily="34" charset="-122"/>
                 <a:cs typeface="IBM Plex Mono" pitchFamily="34" charset="-120"/>
               </a:rPr>
-              <a:t>       50 Hz spike reaches 1.0</a:t>
+              <a:t>       spike 1.0, then 0.3 -&gt; 0.3</a:t>
             </a:r>
             <a:endParaRPr lang="en-US" sz="1400" dirty="0"/>
           </a:p>
@@ -21847,7 +21847,7 @@
                 <a:ea typeface="IBM Plex Mono" pitchFamily="34" charset="-122"/>
                 <a:cs typeface="IBM Plex Mono" pitchFamily="34" charset="-120"/>
               </a:rPr>
-              <a:t>       no axis name in the legend</a:t>
+              <a:t>       and no legend at all</a:t>
             </a:r>
             <a:endParaRPr lang="en-US" sz="1400" dirty="0"/>
           </a:p>

--- a/slides/Session 1 - Meet Your Agent.pptx
+++ b/slides/Session 1 - Meet Your Agent.pptx
@@ -640,7 +640,7 @@
           <a:p>
             <a:r>
               <a:rPr lang="en-US" dirty="0"/>
-              <a:t>Walk the loop out loud with a concrete example: add a plot of the frequency response. Read the file, propose the edit, apply, run, read the error, go round again. The second paragraph sets up the quota slide.</a:t>
+              <a:t>Do this arithmetic on the board with them rather than reading it. The number that lands is roughly one lab session per day on one account. Then the bridge into the gates.</a:t>
             </a:r>
             <a:endParaRPr lang="en-US" dirty="0"/>
           </a:p>
@@ -728,7 +728,7 @@
           <a:p>
             <a:r>
               <a:rPr lang="en-US" dirty="0"/>
-              <a:t>This section is the one that changes their behaviour. Everything here is a constraint they hit today, not theory.</a:t>
+              <a:t>The key sentence is the third. A model cannot report not-knowing, because from the inside it looks the same as knowing. Hence the rule for the whole course: verify by running.</a:t>
             </a:r>
             <a:endParaRPr lang="en-US" dirty="0"/>
           </a:p>
@@ -816,7 +816,7 @@
           <a:p>
             <a:r>
               <a:rPr lang="en-US" dirty="0"/>
-              <a:t>The counter-intuitive point is the last one. Students assume a long conversation means the agent understands more; it means the opposite. The practical instruction is: start a new task per feature.</a:t>
+              <a:t>Setup happens here rather than at the door, so nobody sits idle waiting for the room to catch up - get every check green before anyone pastes a prompt. Then say plainly: this round is meant to go badly, and going badly is the useful part. Do not rescue anyone during it.</a:t>
             </a:r>
             <a:endParaRPr lang="en-US" dirty="0"/>
           </a:p>
@@ -904,7 +904,7 @@
           <a:p>
             <a:r>
               <a:rPr lang="en-US" dirty="0"/>
-              <a:t>Do this arithmetic on the board with them rather than reading it. The number that lands is roughly one lab session per day on one account. Then the bridge into the gates.</a:t>
+              <a:t>This is on screen as they walk in, and stays up for the first fifteen minutes. Say the key rule out loud: the key goes in .env, never in a file you commit, and never pasted into the chat. Walk the room rather than talking — the failures are individual, and the check script names each one.</a:t>
             </a:r>
             <a:endParaRPr lang="en-US" dirty="0"/>
           </a:p>
@@ -992,7 +992,7 @@
           <a:p>
             <a:r>
               <a:rPr lang="en-US" dirty="0"/>
-              <a:t>The key sentence is the third. A model cannot report not-knowing, because from the inside it looks the same as knowing. Hence the rule for the whole course: verify by running.</a:t>
+              <a:t>The most common two failures: the key pasted with a trailing space, and the placeholder text left in place. Both are named explicitly by the script. If a whole row is stuck, it is usually the proxy rather than the student.</a:t>
             </a:r>
             <a:endParaRPr lang="en-US" dirty="0"/>
           </a:p>
@@ -1080,7 +1080,7 @@
           <a:p>
             <a:r>
               <a:rPr lang="en-US" dirty="0"/>
-              <a:t>Say plainly: this round is meant to go badly, and going badly is the useful part. Do not rescue anyone during it.</a:t>
+              <a:t>The single most likely way for a student to arrive unable to work, and it is invisible: every check passes, then Cline opens on a configuration screen nobody mentioned - with the wrong option already selected for them. Do this one on the projector rather than describing it, because the free option is the big attractive button and taking it leaves their key unused with no error to tell them. Cline's model list is its own: it uses dated names and has no latest, so anything you read elsewhere will not match it.</a:t>
             </a:r>
             <a:endParaRPr lang="en-US" dirty="0"/>
           </a:p>
@@ -1520,7 +1520,7 @@
           <a:p>
             <a:r>
               <a:rPr lang="en-US" dirty="0"/>
-              <a:t>This is on screen as they walk in, and stays up for the first fifteen minutes. Say the key rule out loud: the key goes in .env, never in a file you commit, and never pasted into the chat. Walk the room rather than talking — the failures are individual, and the check script names each one.</a:t>
+              <a:t>Agenda. Point out that item 05 is where they build the real thing; everything before it exists to make 05 work.</a:t>
             </a:r>
             <a:endParaRPr lang="en-US" dirty="0"/>
           </a:p>
@@ -2488,7 +2488,7 @@
           <a:p>
             <a:r>
               <a:rPr lang="en-US" dirty="0"/>
-              <a:t>The most common two failures: the key pasted with a trailing space, and the placeholder text left in place. Both are named explicitly by the script. If a whole row is stuck, it is usually the proxy rather than the student.</a:t>
+              <a:t>Before clicking on: ask who has used ChatGPT to write code. Most hands. Then ask who knows what happens between typing the request and the file changing. Few hands. That gap is this section.</a:t>
             </a:r>
             <a:endParaRPr lang="en-US" dirty="0"/>
           </a:p>
@@ -3456,7 +3456,7 @@
           <a:p>
             <a:r>
               <a:rPr lang="en-US" dirty="0"/>
-              <a:t>The single most likely way for a student to arrive unable to work, and it is invisible: every check passes, then Cline opens on a configuration screen nobody mentioned - with the wrong option already selected for them. Do this one on the projector rather than describing it, because the free option is the big attractive button and taking it leaves their key unused with no error to tell them. Cline's model list is its own: it uses dated names and has no latest, so anything you read elsewhere will not match it.</a:t>
+              <a:t>Keep this to three minutes and resist the detail. The two things they must leave with: training happened once and is finished, and the model predicts rather than looks up. Say the cost out loud — training one of these runs to millions of dollars, which is why you rent it instead of building it. Someone always asks whether it is on the internet: no. It is a fixed set of numbers that has been frozen since the day training stopped.</a:t>
             </a:r>
             <a:endParaRPr lang="en-US" dirty="0"/>
           </a:p>
@@ -4424,7 +4424,7 @@
           <a:p>
             <a:r>
               <a:rPr lang="en-US" dirty="0"/>
-              <a:t>Agenda. Point out that item 05 is where they build the real thing; everything before it exists to make 05 work.</a:t>
+              <a:t>The single most useful distinction in the course. When something goes wrong they must ask which half broke: rate limited is a model problem, Diff Edit Failed is a harness problem.</a:t>
             </a:r>
             <a:endParaRPr lang="en-US" dirty="0"/>
           </a:p>
@@ -4688,7 +4688,7 @@
           <a:p>
             <a:r>
               <a:rPr lang="en-US" dirty="0"/>
-              <a:t>Before clicking on: ask who has used ChatGPT to write code. Most hands. Then ask who knows what happens between typing the request and the file changing. Few hands. That gap is this section.</a:t>
+              <a:t>Name-drop deliberately: these are the tools in job adverts, and students should recognise them. The point to land is the last line — when a model runs out of quota this afternoon they will change a dropdown and carry on working, and that only makes sense if they hold the two halves apart.</a:t>
             </a:r>
             <a:endParaRPr lang="en-US" dirty="0"/>
           </a:p>
@@ -4776,7 +4776,7 @@
           <a:p>
             <a:r>
               <a:rPr lang="en-US" dirty="0"/>
-              <a:t>Keep this to three minutes and resist the detail. The two things they must leave with: training happened once and is finished, and the model predicts rather than looks up. Say the cost out loud — training one of these runs to millions of dollars, which is why you rent it instead of building it. Someone always asks whether it is on the internet: no. It is a fixed set of numbers that has been frozen since the day training stopped.</a:t>
+              <a:t>Walk the loop out loud with a concrete example: add a plot of the frequency response. Read the file, propose the edit, apply, run, read the error, go round again. The second paragraph sets up the quota slide.</a:t>
             </a:r>
             <a:endParaRPr lang="en-US" dirty="0"/>
           </a:p>
@@ -4864,7 +4864,7 @@
           <a:p>
             <a:r>
               <a:rPr lang="en-US" dirty="0"/>
-              <a:t>The single most useful distinction in the course. When something goes wrong they must ask which half broke: rate limited is a model problem, Diff Edit Failed is a harness problem.</a:t>
+              <a:t>This section is the one that changes their behaviour. Everything here is a constraint they hit today, not theory.</a:t>
             </a:r>
             <a:endParaRPr lang="en-US" dirty="0"/>
           </a:p>
@@ -4952,7 +4952,7 @@
           <a:p>
             <a:r>
               <a:rPr lang="en-US" dirty="0"/>
-              <a:t>Name-drop deliberately: these are the tools in job adverts, and students should recognise them. The point to land is the last line — when a model runs out of quota this afternoon they will change a dropdown and carry on working, and that only makes sense if they hold the two halves apart.</a:t>
+              <a:t>The counter-intuitive point is the last one. Students assume a long conversation means the agent understands more; it means the opposite. The practical instruction is: start a new task per feature.</a:t>
             </a:r>
             <a:endParaRPr lang="en-US" dirty="0"/>
           </a:p>
@@ -5507,7 +5507,7 @@
                 <a:ea typeface="IBM Plex Mono" pitchFamily="34" charset="-122"/>
                 <a:cs typeface="IBM Plex Mono" pitchFamily="34" charset="-120"/>
               </a:rPr>
-              <a:t>Your Name · Department of Electrical Engineering</a:t>
+              <a:t>Witchapong Daroontham · Department of Electrical Engineering</a:t>
             </a:r>
             <a:endParaRPr lang="en-US" sz="1300" dirty="0"/>
           </a:p>
@@ -5623,7 +5623,7 @@
                 <a:ea typeface="IBM Plex Mono" pitchFamily="34" charset="-122"/>
                 <a:cs typeface="IBM Plex Mono" pitchFamily="34" charset="-120"/>
               </a:rPr>
-              <a:t>SECTION 01</a:t>
+              <a:t>SECTION 02</a:t>
             </a:r>
             <a:endParaRPr lang="en-US" sz="1200" dirty="0"/>
           </a:p>
@@ -5665,7 +5665,7 @@
                 <a:ea typeface="Libre Franklin" pitchFamily="34" charset="-122"/>
                 <a:cs typeface="Libre Franklin" pitchFamily="34" charset="-120"/>
               </a:rPr>
-              <a:t>The loop the agent runs</a:t>
+              <a:t>Your free allowance, and its two failures</a:t>
             </a:r>
             <a:endParaRPr lang="en-US" sz="2800" dirty="0"/>
           </a:p>
@@ -5775,39 +5775,252 @@
           </a:p>
         </p:txBody>
       </p:sp>
-      <p:pic>
-        <p:nvPicPr>
-          <p:cNvPr id="7" name="Image 0" descr="figures/fig-agent-loop.png">    </p:cNvPr>
-          <p:cNvPicPr>
-            <a:picLocks noChangeAspect="1"/>
-          </p:cNvPicPr>
-          <p:nvPr/>
-        </p:nvPicPr>
-        <p:blipFill>
-          <a:blip r:embed="rId1"/>
-          <a:srcRect l="0" r="0" t="0" b="0"/>
-          <a:stretch/>
-        </p:blipFill>
+      <p:sp>
+        <p:nvSpPr>
+          <p:cNvPr id="7" name="Shape 5"/>
+          <p:cNvSpPr/>
+          <p:nvPr/>
+        </p:nvSpPr>
         <p:spPr>
           <a:xfrm>
             <a:off x="558800" y="1511300"/>
-            <a:ext cx="6134100" cy="4572000"/>
-          </a:xfrm>
-          <a:prstGeom prst="rect">
-            <a:avLst/>
-          </a:prstGeom>
-        </p:spPr>
-      </p:pic>
-      <p:sp>
-        <p:nvSpPr>
-          <p:cNvPr id="8" name="Text 5"/>
-          <p:cNvSpPr/>
-          <p:nvPr/>
-        </p:nvSpPr>
-        <p:spPr>
-          <a:xfrm>
-            <a:off x="7099300" y="1511300"/>
-            <a:ext cx="4533900" cy="1010920"/>
+            <a:ext cx="6517030" cy="4572000"/>
+          </a:xfrm>
+          <a:prstGeom prst="rect">
+            <a:avLst/>
+          </a:prstGeom>
+          <a:solidFill>
+            <a:srgbClr val="F5F2EC"/>
+          </a:solidFill>
+          <a:ln w="6350">
+            <a:solidFill>
+              <a:srgbClr val="E1DED7"/>
+            </a:solidFill>
+            <a:prstDash val="solid"/>
+          </a:ln>
+        </p:spPr>
+      </p:sp>
+      <p:sp>
+        <p:nvSpPr>
+          <p:cNvPr id="8" name="Text 6"/>
+          <p:cNvSpPr/>
+          <p:nvPr/>
+        </p:nvSpPr>
+        <p:spPr>
+          <a:xfrm>
+            <a:off x="800100" y="1727200"/>
+            <a:ext cx="6034430" cy="4140200"/>
+          </a:xfrm>
+          <a:prstGeom prst="rect">
+            <a:avLst/>
+          </a:prstGeom>
+          <a:noFill/>
+          <a:ln/>
+        </p:spPr>
+        <p:txBody>
+          <a:bodyPr wrap="square" lIns="0" tIns="0" rIns="0" bIns="0" rtlCol="0" anchor="t"/>
+          <a:lstStyle/>
+          <a:p>
+            <a:pPr indent="0" marL="0">
+              <a:lnSpc>
+                <a:spcPct val="160000"/>
+              </a:lnSpc>
+              <a:buNone/>
+            </a:pPr>
+            <a:r>
+              <a:rPr lang="en-US" sz="1400" dirty="0">
+                <a:solidFill>
+                  <a:srgbClr val="332F2A"/>
+                </a:solidFill>
+                <a:latin typeface="IBM Plex Mono" pitchFamily="34" charset="0"/>
+                <a:ea typeface="IBM Plex Mono" pitchFamily="34" charset="-122"/>
+                <a:cs typeface="IBM Plex Mono" pitchFamily="34" charset="-120"/>
+              </a:rPr>
+              <a:t>one instruction from you</a:t>
+            </a:r>
+            <a:endParaRPr lang="en-US" sz="1400" dirty="0"/>
+          </a:p>
+          <a:p>
+            <a:pPr indent="0" marL="0">
+              <a:lnSpc>
+                <a:spcPct val="160000"/>
+              </a:lnSpc>
+              <a:buNone/>
+            </a:pPr>
+            <a:r>
+              <a:rPr lang="en-US" sz="1400" dirty="0">
+                <a:solidFill>
+                  <a:srgbClr val="332F2A"/>
+                </a:solidFill>
+                <a:latin typeface="IBM Plex Mono" pitchFamily="34" charset="0"/>
+                <a:ea typeface="IBM Plex Mono" pitchFamily="34" charset="-122"/>
+                <a:cs typeface="IBM Plex Mono" pitchFamily="34" charset="-120"/>
+              </a:rPr>
+              <a:t>    -&gt; 4 to 10 requests</a:t>
+            </a:r>
+            <a:endParaRPr lang="en-US" sz="1400" dirty="0"/>
+          </a:p>
+          <a:p>
+            <a:pPr indent="0" marL="0">
+              <a:lnSpc>
+                <a:spcPct val="160000"/>
+              </a:lnSpc>
+              <a:buNone/>
+            </a:pPr>
+            <a:r>
+              <a:rPr lang="en-US" sz="1400" dirty="0">
+                <a:solidFill>
+                  <a:srgbClr val="332F2A"/>
+                </a:solidFill>
+                <a:latin typeface="IBM Plex Mono" pitchFamily="34" charset="0"/>
+                <a:ea typeface="IBM Plex Mono" pitchFamily="34" charset="-122"/>
+                <a:cs typeface="IBM Plex Mono" pitchFamily="34" charset="-120"/>
+              </a:rPr>
+              <a:t>a 2-hour lab</a:t>
+            </a:r>
+            <a:endParaRPr lang="en-US" sz="1400" dirty="0"/>
+          </a:p>
+          <a:p>
+            <a:pPr indent="0" marL="0">
+              <a:lnSpc>
+                <a:spcPct val="160000"/>
+              </a:lnSpc>
+              <a:buNone/>
+            </a:pPr>
+            <a:r>
+              <a:rPr lang="en-US" sz="1400" dirty="0">
+                <a:solidFill>
+                  <a:srgbClr val="332F2A"/>
+                </a:solidFill>
+                <a:latin typeface="IBM Plex Mono" pitchFamily="34" charset="0"/>
+                <a:ea typeface="IBM Plex Mono" pitchFamily="34" charset="-122"/>
+                <a:cs typeface="IBM Plex Mono" pitchFamily="34" charset="-120"/>
+              </a:rPr>
+              <a:t>    ~ 100 to 200 requests</a:t>
+            </a:r>
+            <a:endParaRPr lang="en-US" sz="1400" dirty="0"/>
+          </a:p>
+          <a:p>
+            <a:pPr indent="0" marL="0">
+              <a:lnSpc>
+                <a:spcPct val="160000"/>
+              </a:lnSpc>
+              <a:buNone/>
+            </a:pPr>
+            <a:endParaRPr lang="en-US" sz="1400" dirty="0"/>
+          </a:p>
+          <a:p>
+            <a:pPr indent="0" marL="0">
+              <a:lnSpc>
+                <a:spcPct val="160000"/>
+              </a:lnSpc>
+              <a:buNone/>
+            </a:pPr>
+            <a:r>
+              <a:rPr lang="en-US" sz="1400" dirty="0">
+                <a:solidFill>
+                  <a:srgbClr val="332F2A"/>
+                </a:solidFill>
+                <a:latin typeface="IBM Plex Mono" pitchFamily="34" charset="0"/>
+                <a:ea typeface="IBM Plex Mono" pitchFamily="34" charset="-122"/>
+                <a:cs typeface="IBM Plex Mono" pitchFamily="34" charset="-120"/>
+              </a:rPr>
+              <a:t>Gemini   250 req/day, 10/min</a:t>
+            </a:r>
+            <a:endParaRPr lang="en-US" sz="1400" dirty="0"/>
+          </a:p>
+          <a:p>
+            <a:pPr indent="0" marL="0">
+              <a:lnSpc>
+                <a:spcPct val="160000"/>
+              </a:lnSpc>
+              <a:buNone/>
+            </a:pPr>
+            <a:r>
+              <a:rPr lang="en-US" sz="1400" dirty="0">
+                <a:solidFill>
+                  <a:srgbClr val="332F2A"/>
+                </a:solidFill>
+                <a:latin typeface="IBM Plex Mono" pitchFamily="34" charset="0"/>
+                <a:ea typeface="IBM Plex Mono" pitchFamily="34" charset="-122"/>
+                <a:cs typeface="IBM Plex Mono" pitchFamily="34" charset="-120"/>
+              </a:rPr>
+              <a:t>         ~6s between steps</a:t>
+            </a:r>
+            <a:endParaRPr lang="en-US" sz="1400" dirty="0"/>
+          </a:p>
+          <a:p>
+            <a:pPr indent="0" marL="0">
+              <a:lnSpc>
+                <a:spcPct val="160000"/>
+              </a:lnSpc>
+              <a:buNone/>
+            </a:pPr>
+            <a:r>
+              <a:rPr lang="en-US" sz="1400" dirty="0">
+                <a:solidFill>
+                  <a:srgbClr val="332F2A"/>
+                </a:solidFill>
+                <a:latin typeface="IBM Plex Mono" pitchFamily="34" charset="0"/>
+                <a:ea typeface="IBM Plex Mono" pitchFamily="34" charset="-122"/>
+                <a:cs typeface="IBM Plex Mono" pitchFamily="34" charset="-120"/>
+              </a:rPr>
+              <a:t>Mistral  25,000 tokens/min</a:t>
+            </a:r>
+            <a:endParaRPr lang="en-US" sz="1400" dirty="0"/>
+          </a:p>
+          <a:p>
+            <a:pPr indent="0" marL="0">
+              <a:lnSpc>
+                <a:spcPct val="160000"/>
+              </a:lnSpc>
+              <a:buNone/>
+            </a:pPr>
+            <a:r>
+              <a:rPr lang="en-US" sz="1400" dirty="0">
+                <a:solidFill>
+                  <a:srgbClr val="332F2A"/>
+                </a:solidFill>
+                <a:latin typeface="IBM Plex Mono" pitchFamily="34" charset="0"/>
+                <a:ea typeface="IBM Plex Mono" pitchFamily="34" charset="-122"/>
+                <a:cs typeface="IBM Plex Mono" pitchFamily="34" charset="-120"/>
+              </a:rPr>
+              <a:t>         ~3 req/min</a:t>
+            </a:r>
+            <a:endParaRPr lang="en-US" sz="1400" dirty="0"/>
+          </a:p>
+          <a:p>
+            <a:pPr indent="0" marL="0">
+              <a:lnSpc>
+                <a:spcPct val="160000"/>
+              </a:lnSpc>
+              <a:buNone/>
+            </a:pPr>
+            <a:r>
+              <a:rPr lang="en-US" sz="1400" dirty="0">
+                <a:solidFill>
+                  <a:srgbClr val="332F2A"/>
+                </a:solidFill>
+                <a:latin typeface="IBM Plex Mono" pitchFamily="34" charset="0"/>
+                <a:ea typeface="IBM Plex Mono" pitchFamily="34" charset="-122"/>
+                <a:cs typeface="IBM Plex Mono" pitchFamily="34" charset="-120"/>
+              </a:rPr>
+              <a:t>         ~20s between steps</a:t>
+            </a:r>
+            <a:endParaRPr lang="en-US" sz="1400" dirty="0"/>
+          </a:p>
+        </p:txBody>
+      </p:sp>
+      <p:sp>
+        <p:nvSpPr>
+          <p:cNvPr id="9" name="Text 7"/>
+          <p:cNvSpPr/>
+          <p:nvPr/>
+        </p:nvSpPr>
+        <p:spPr>
+          <a:xfrm>
+            <a:off x="7431430" y="1511300"/>
+            <a:ext cx="4201770" cy="1305560"/>
           </a:xfrm>
           <a:prstGeom prst="rect">
             <a:avLst/>
@@ -5834,7 +6047,7 @@
                 <a:ea typeface="Libre Franklin" pitchFamily="34" charset="-122"/>
                 <a:cs typeface="Libre Franklin" pitchFamily="34" charset="-120"/>
               </a:rPr>
-              <a:t>Read, plan, edit, run, observe — then round again. The harness drives this loop until the task is done or you stop it.</a:t>
+              <a:t>One lab session is roughly one day of your Gemini allowance, and the pauses between steps are the limit working rather than a fault.</a:t>
             </a:r>
             <a:endParaRPr lang="en-US" sz="1600" dirty="0"/>
           </a:p>
@@ -5842,14 +6055,14 @@
       </p:sp>
       <p:sp>
         <p:nvSpPr>
-          <p:cNvPr id="9" name="Text 6"/>
-          <p:cNvSpPr/>
-          <p:nvPr/>
-        </p:nvSpPr>
-        <p:spPr>
-          <a:xfrm>
-            <a:off x="7099300" y="2649220"/>
-            <a:ext cx="4533900" cy="1305560"/>
+          <p:cNvPr id="10" name="Text 8"/>
+          <p:cNvSpPr/>
+          <p:nvPr/>
+        </p:nvSpPr>
+        <p:spPr>
+          <a:xfrm>
+            <a:off x="7431430" y="2943860"/>
+            <a:ext cx="4201770" cy="1894840"/>
           </a:xfrm>
           <a:prstGeom prst="rect">
             <a:avLst/>
@@ -5876,7 +6089,7 @@
                 <a:ea typeface="Libre Franklin" pitchFamily="34" charset="-122"/>
                 <a:cs typeface="Libre Franklin" pitchFamily="34" charset="-120"/>
               </a:rPr>
-              <a:t>One sentence from you becomes four to ten laps, and every lap re-sends everything so far. That is where your allowance goes.</a:t>
+              <a:t>Two different failures, opposite fixes. 429 “rate limited” means wait about a minute. 503 “high demand” means that model is refusing everyone — switch providers, because waiting will not help.</a:t>
             </a:r>
             <a:endParaRPr lang="en-US" sz="1600" dirty="0"/>
           </a:p>
@@ -5884,43 +6097,63 @@
       </p:sp>
       <p:sp>
         <p:nvSpPr>
-          <p:cNvPr id="10" name="Text 7"/>
-          <p:cNvSpPr/>
-          <p:nvPr/>
-        </p:nvSpPr>
-        <p:spPr>
-          <a:xfrm>
-            <a:off x="7099300" y="5956300"/>
-            <a:ext cx="4533900" cy="215900"/>
-          </a:xfrm>
-          <a:prstGeom prst="rect">
-            <a:avLst/>
-          </a:prstGeom>
-          <a:noFill/>
-          <a:ln/>
-        </p:spPr>
-        <p:txBody>
-          <a:bodyPr wrap="square" lIns="0" tIns="0" rIns="0" bIns="0" rtlCol="0" anchor="t"/>
-          <a:lstStyle/>
-          <a:p>
-            <a:pPr algn="l" indent="0" marL="0">
-              <a:lnSpc>
-                <a:spcPct val="145000"/>
-              </a:lnSpc>
-              <a:buNone/>
-            </a:pPr>
-            <a:r>
-              <a:rPr lang="en-US" sz="1200" dirty="0">
-                <a:solidFill>
-                  <a:srgbClr val="99948B"/>
-                </a:solidFill>
-                <a:latin typeface="IBM Plex Mono" pitchFamily="34" charset="0"/>
-                <a:ea typeface="IBM Plex Mono" pitchFamily="34" charset="-122"/>
-                <a:cs typeface="IBM Plex Mono" pitchFamily="34" charset="-120"/>
-              </a:rPr>
-              <a:t>Fig. 3 — one instruction, many laps</a:t>
-            </a:r>
-            <a:endParaRPr lang="en-US" sz="1200" dirty="0"/>
+          <p:cNvPr id="11" name="Shape 9"/>
+          <p:cNvSpPr/>
+          <p:nvPr/>
+        </p:nvSpPr>
+        <p:spPr>
+          <a:xfrm>
+            <a:off x="7431430" y="5384800"/>
+            <a:ext cx="12700" cy="698500"/>
+          </a:xfrm>
+          <a:prstGeom prst="rect">
+            <a:avLst/>
+          </a:prstGeom>
+          <a:solidFill>
+            <a:srgbClr val="A87A2E"/>
+          </a:solidFill>
+          <a:ln/>
+        </p:spPr>
+      </p:sp>
+      <p:sp>
+        <p:nvSpPr>
+          <p:cNvPr id="12" name="Text 10"/>
+          <p:cNvSpPr/>
+          <p:nvPr/>
+        </p:nvSpPr>
+        <p:spPr>
+          <a:xfrm>
+            <a:off x="7596530" y="5416550"/>
+            <a:ext cx="4036670" cy="698500"/>
+          </a:xfrm>
+          <a:prstGeom prst="rect">
+            <a:avLst/>
+          </a:prstGeom>
+          <a:noFill/>
+          <a:ln/>
+        </p:spPr>
+        <p:txBody>
+          <a:bodyPr wrap="square" lIns="0" tIns="0" rIns="0" bIns="0" rtlCol="0" anchor="t"/>
+          <a:lstStyle/>
+          <a:p>
+            <a:pPr algn="l" indent="0" marL="0">
+              <a:lnSpc>
+                <a:spcPct val="140000"/>
+              </a:lnSpc>
+              <a:buNone/>
+            </a:pPr>
+            <a:r>
+              <a:rPr lang="en-US" sz="1500" dirty="0">
+                <a:solidFill>
+                  <a:srgbClr val="332F2A"/>
+                </a:solidFill>
+                <a:latin typeface="Libre Franklin" pitchFamily="34" charset="0"/>
+                <a:ea typeface="Libre Franklin" pitchFamily="34" charset="-122"/>
+                <a:cs typeface="Libre Franklin" pitchFamily="34" charset="-120"/>
+              </a:rPr>
+              <a:t>Everything that cuts your request count is also just good engineering.</a:t>
+            </a:r>
+            <a:endParaRPr lang="en-US" sz="1500" dirty="0"/>
           </a:p>
         </p:txBody>
       </p:sp>
@@ -5935,6 +6168,613 @@
 <file path=ppt/slides/slide11.xml><?xml version="1.0" encoding="utf-8"?>
 <p:sld xmlns:a="http://schemas.openxmlformats.org/drawingml/2006/main" xmlns:r="http://schemas.openxmlformats.org/officeDocument/2006/relationships" xmlns:p="http://schemas.openxmlformats.org/presentationml/2006/main">
   <p:cSld name="Slide 11">
+    <p:bg>
+      <p:bgPr>
+        <a:solidFill>
+          <a:srgbClr val="FCFBF8"/>
+        </a:solidFill>
+      </p:bgPr>
+    </p:bg>
+    <p:spTree>
+      <p:nvGrpSpPr>
+        <p:cNvPr id="1" name=""/>
+        <p:cNvGrpSpPr/>
+        <p:nvPr/>
+      </p:nvGrpSpPr>
+      <p:grpSpPr>
+        <a:xfrm>
+          <a:off x="0" y="0"/>
+          <a:ext cx="0" cy="0"/>
+          <a:chOff x="0" y="0"/>
+          <a:chExt cx="0" cy="0"/>
+        </a:xfrm>
+      </p:grpSpPr>
+      <p:sp>
+        <p:nvSpPr>
+          <p:cNvPr id="2" name="Text 0"/>
+          <p:cNvSpPr/>
+          <p:nvPr/>
+        </p:nvSpPr>
+        <p:spPr>
+          <a:xfrm>
+            <a:off x="558800" y="355600"/>
+            <a:ext cx="11074400" cy="215900"/>
+          </a:xfrm>
+          <a:prstGeom prst="rect">
+            <a:avLst/>
+          </a:prstGeom>
+          <a:noFill/>
+          <a:ln/>
+        </p:spPr>
+        <p:txBody>
+          <a:bodyPr wrap="square" lIns="0" tIns="0" rIns="0" bIns="0" rtlCol="0" anchor="t"/>
+          <a:lstStyle/>
+          <a:p>
+            <a:pPr algn="l" indent="0" marL="0">
+              <a:lnSpc>
+                <a:spcPct val="145000"/>
+              </a:lnSpc>
+              <a:buNone/>
+            </a:pPr>
+            <a:r>
+              <a:rPr lang="en-US" sz="1200" spc="168" kern="0" dirty="0">
+                <a:solidFill>
+                  <a:srgbClr val="77726A"/>
+                </a:solidFill>
+                <a:latin typeface="IBM Plex Mono" pitchFamily="34" charset="0"/>
+                <a:ea typeface="IBM Plex Mono" pitchFamily="34" charset="-122"/>
+                <a:cs typeface="IBM Plex Mono" pitchFamily="34" charset="-120"/>
+              </a:rPr>
+              <a:t>SECTION 02</a:t>
+            </a:r>
+            <a:endParaRPr lang="en-US" sz="1200" dirty="0"/>
+          </a:p>
+        </p:txBody>
+      </p:sp>
+      <p:sp>
+        <p:nvSpPr>
+          <p:cNvPr id="3" name="Text 1"/>
+          <p:cNvSpPr/>
+          <p:nvPr/>
+        </p:nvSpPr>
+        <p:spPr>
+          <a:xfrm>
+            <a:off x="558800" y="635000"/>
+            <a:ext cx="11074400" cy="508000"/>
+          </a:xfrm>
+          <a:prstGeom prst="rect">
+            <a:avLst/>
+          </a:prstGeom>
+          <a:noFill/>
+          <a:ln/>
+        </p:spPr>
+        <p:txBody>
+          <a:bodyPr wrap="square" lIns="0" tIns="0" rIns="0" bIns="0" rtlCol="0" anchor="t"/>
+          <a:lstStyle/>
+          <a:p>
+            <a:pPr algn="l" indent="0" marL="0">
+              <a:lnSpc>
+                <a:spcPct val="110000"/>
+              </a:lnSpc>
+              <a:buNone/>
+            </a:pPr>
+            <a:r>
+              <a:rPr lang="en-US" sz="2800" b="1" dirty="0">
+                <a:solidFill>
+                  <a:srgbClr val="332F2A"/>
+                </a:solidFill>
+                <a:latin typeface="Libre Franklin" pitchFamily="34" charset="0"/>
+                <a:ea typeface="Libre Franklin" pitchFamily="34" charset="-122"/>
+                <a:cs typeface="Libre Franklin" pitchFamily="34" charset="-120"/>
+              </a:rPr>
+              <a:t>Why an agent invents things</a:t>
+            </a:r>
+            <a:endParaRPr lang="en-US" sz="2800" dirty="0"/>
+          </a:p>
+        </p:txBody>
+      </p:sp>
+      <p:sp>
+        <p:nvSpPr>
+          <p:cNvPr id="4" name="Shape 2"/>
+          <p:cNvSpPr/>
+          <p:nvPr/>
+        </p:nvSpPr>
+        <p:spPr>
+          <a:xfrm>
+            <a:off x="558800" y="1181100"/>
+            <a:ext cx="11074400" cy="6350"/>
+          </a:xfrm>
+          <a:prstGeom prst="rect">
+            <a:avLst/>
+          </a:prstGeom>
+          <a:solidFill>
+            <a:srgbClr val="E1DED7"/>
+          </a:solidFill>
+          <a:ln/>
+        </p:spPr>
+      </p:sp>
+      <p:sp>
+        <p:nvSpPr>
+          <p:cNvPr id="5" name="Text 3"/>
+          <p:cNvSpPr/>
+          <p:nvPr/>
+        </p:nvSpPr>
+        <p:spPr>
+          <a:xfrm>
+            <a:off x="558800" y="6337300"/>
+            <a:ext cx="9804400" cy="215900"/>
+          </a:xfrm>
+          <a:prstGeom prst="rect">
+            <a:avLst/>
+          </a:prstGeom>
+          <a:noFill/>
+          <a:ln/>
+        </p:spPr>
+        <p:txBody>
+          <a:bodyPr wrap="square" lIns="0" tIns="0" rIns="0" bIns="0" rtlCol="0" anchor="t"/>
+          <a:lstStyle/>
+          <a:p>
+            <a:pPr algn="l" indent="0" marL="0">
+              <a:lnSpc>
+                <a:spcPct val="145000"/>
+              </a:lnSpc>
+              <a:buNone/>
+            </a:pPr>
+            <a:r>
+              <a:rPr lang="en-US" sz="1200" dirty="0">
+                <a:solidFill>
+                  <a:srgbClr val="99948B"/>
+                </a:solidFill>
+                <a:latin typeface="IBM Plex Mono" pitchFamily="34" charset="0"/>
+                <a:ea typeface="IBM Plex Mono" pitchFamily="34" charset="-122"/>
+                <a:cs typeface="IBM Plex Mono" pitchFamily="34" charset="-120"/>
+              </a:rPr>
+              <a:t>AI for Software Development · Session 1</a:t>
+            </a:r>
+            <a:endParaRPr lang="en-US" sz="1200" dirty="0"/>
+          </a:p>
+        </p:txBody>
+      </p:sp>
+      <p:sp>
+        <p:nvSpPr>
+          <p:cNvPr id="6" name="Text 4"/>
+          <p:cNvSpPr/>
+          <p:nvPr/>
+        </p:nvSpPr>
+        <p:spPr>
+          <a:xfrm>
+            <a:off x="10363200" y="6337300"/>
+            <a:ext cx="1270000" cy="215900"/>
+          </a:xfrm>
+          <a:prstGeom prst="rect">
+            <a:avLst/>
+          </a:prstGeom>
+          <a:noFill/>
+          <a:ln/>
+        </p:spPr>
+        <p:txBody>
+          <a:bodyPr wrap="square" lIns="0" tIns="0" rIns="0" bIns="0" rtlCol="0" anchor="t"/>
+          <a:lstStyle/>
+          <a:p>
+            <a:pPr algn="r" indent="0" marL="0">
+              <a:lnSpc>
+                <a:spcPct val="145000"/>
+              </a:lnSpc>
+              <a:buNone/>
+            </a:pPr>
+            <a:r>
+              <a:rPr lang="en-US" sz="1200" dirty="0">
+                <a:solidFill>
+                  <a:srgbClr val="99948B"/>
+                </a:solidFill>
+                <a:latin typeface="IBM Plex Mono" pitchFamily="34" charset="0"/>
+                <a:ea typeface="IBM Plex Mono" pitchFamily="34" charset="-122"/>
+                <a:cs typeface="IBM Plex Mono" pitchFamily="34" charset="-120"/>
+              </a:rPr>
+              <a:t>11</a:t>
+            </a:r>
+            <a:endParaRPr lang="en-US" sz="1200" dirty="0"/>
+          </a:p>
+        </p:txBody>
+      </p:sp>
+      <p:sp>
+        <p:nvSpPr>
+          <p:cNvPr id="7" name="Text 5"/>
+          <p:cNvSpPr/>
+          <p:nvPr/>
+        </p:nvSpPr>
+        <p:spPr>
+          <a:xfrm>
+            <a:off x="558800" y="1511300"/>
+            <a:ext cx="190500" cy="317500"/>
+          </a:xfrm>
+          <a:prstGeom prst="rect">
+            <a:avLst/>
+          </a:prstGeom>
+          <a:noFill/>
+          <a:ln/>
+        </p:spPr>
+        <p:txBody>
+          <a:bodyPr wrap="square" lIns="0" tIns="0" rIns="0" bIns="0" rtlCol="0" anchor="t"/>
+          <a:lstStyle/>
+          <a:p>
+            <a:pPr algn="l" indent="0" marL="0">
+              <a:lnSpc>
+                <a:spcPct val="140000"/>
+              </a:lnSpc>
+              <a:buNone/>
+            </a:pPr>
+            <a:r>
+              <a:rPr lang="en-US" sz="1700" dirty="0">
+                <a:solidFill>
+                  <a:srgbClr val="A87A2E"/>
+                </a:solidFill>
+                <a:latin typeface="Libre Franklin" pitchFamily="34" charset="0"/>
+                <a:ea typeface="Libre Franklin" pitchFamily="34" charset="-122"/>
+                <a:cs typeface="Libre Franklin" pitchFamily="34" charset="-120"/>
+              </a:rPr>
+              <a:t>—</a:t>
+            </a:r>
+            <a:endParaRPr lang="en-US" sz="1700" dirty="0"/>
+          </a:p>
+        </p:txBody>
+      </p:sp>
+      <p:sp>
+        <p:nvSpPr>
+          <p:cNvPr id="8" name="Text 6"/>
+          <p:cNvSpPr/>
+          <p:nvPr/>
+        </p:nvSpPr>
+        <p:spPr>
+          <a:xfrm>
+            <a:off x="927100" y="1511300"/>
+            <a:ext cx="9156700" cy="753110"/>
+          </a:xfrm>
+          <a:prstGeom prst="rect">
+            <a:avLst/>
+          </a:prstGeom>
+          <a:noFill/>
+          <a:ln/>
+        </p:spPr>
+        <p:txBody>
+          <a:bodyPr wrap="square" lIns="0" tIns="0" rIns="0" bIns="0" rtlCol="0" anchor="t"/>
+          <a:lstStyle/>
+          <a:p>
+            <a:pPr algn="l" indent="0" marL="0">
+              <a:lnSpc>
+                <a:spcPct val="145000"/>
+              </a:lnSpc>
+              <a:buNone/>
+            </a:pPr>
+            <a:r>
+              <a:rPr lang="en-US" sz="1700" b="1" dirty="0">
+                <a:solidFill>
+                  <a:srgbClr val="332F2A"/>
+                </a:solidFill>
+                <a:latin typeface="Libre Franklin" pitchFamily="34" charset="0"/>
+                <a:ea typeface="Libre Franklin" pitchFamily="34" charset="-122"/>
+                <a:cs typeface="Libre Franklin" pitchFamily="34" charset="-120"/>
+              </a:rPr>
+              <a:t>It predicts, it does not look up. </a:t>
+            </a:r>
+            <a:pPr algn="l" indent="0" marL="0">
+              <a:lnSpc>
+                <a:spcPct val="145000"/>
+              </a:lnSpc>
+              <a:buNone/>
+            </a:pPr>
+            <a:r>
+              <a:rPr lang="en-US" sz="1700" dirty="0">
+                <a:solidFill>
+                  <a:srgbClr val="332F2A"/>
+                </a:solidFill>
+                <a:latin typeface="Libre Franklin" pitchFamily="34" charset="0"/>
+                <a:ea typeface="Libre Franklin" pitchFamily="34" charset="-122"/>
+                <a:cs typeface="Libre Franklin" pitchFamily="34" charset="-120"/>
+              </a:rPr>
+              <a:t>The reply is the text most likely to follow your request, not a fact retrieved from anywhere.</a:t>
+            </a:r>
+            <a:endParaRPr lang="en-US" sz="1700" dirty="0"/>
+          </a:p>
+        </p:txBody>
+      </p:sp>
+      <p:sp>
+        <p:nvSpPr>
+          <p:cNvPr id="9" name="Text 7"/>
+          <p:cNvSpPr/>
+          <p:nvPr/>
+        </p:nvSpPr>
+        <p:spPr>
+          <a:xfrm>
+            <a:off x="558800" y="2391410"/>
+            <a:ext cx="190500" cy="317500"/>
+          </a:xfrm>
+          <a:prstGeom prst="rect">
+            <a:avLst/>
+          </a:prstGeom>
+          <a:noFill/>
+          <a:ln/>
+        </p:spPr>
+        <p:txBody>
+          <a:bodyPr wrap="square" lIns="0" tIns="0" rIns="0" bIns="0" rtlCol="0" anchor="t"/>
+          <a:lstStyle/>
+          <a:p>
+            <a:pPr algn="l" indent="0" marL="0">
+              <a:lnSpc>
+                <a:spcPct val="140000"/>
+              </a:lnSpc>
+              <a:buNone/>
+            </a:pPr>
+            <a:r>
+              <a:rPr lang="en-US" sz="1700" dirty="0">
+                <a:solidFill>
+                  <a:srgbClr val="A87A2E"/>
+                </a:solidFill>
+                <a:latin typeface="Libre Franklin" pitchFamily="34" charset="0"/>
+                <a:ea typeface="Libre Franklin" pitchFamily="34" charset="-122"/>
+                <a:cs typeface="Libre Franklin" pitchFamily="34" charset="-120"/>
+              </a:rPr>
+              <a:t>—</a:t>
+            </a:r>
+            <a:endParaRPr lang="en-US" sz="1700" dirty="0"/>
+          </a:p>
+        </p:txBody>
+      </p:sp>
+      <p:sp>
+        <p:nvSpPr>
+          <p:cNvPr id="10" name="Text 8"/>
+          <p:cNvSpPr/>
+          <p:nvPr/>
+        </p:nvSpPr>
+        <p:spPr>
+          <a:xfrm>
+            <a:off x="927100" y="2391410"/>
+            <a:ext cx="9156700" cy="753110"/>
+          </a:xfrm>
+          <a:prstGeom prst="rect">
+            <a:avLst/>
+          </a:prstGeom>
+          <a:noFill/>
+          <a:ln/>
+        </p:spPr>
+        <p:txBody>
+          <a:bodyPr wrap="square" lIns="0" tIns="0" rIns="0" bIns="0" rtlCol="0" anchor="t"/>
+          <a:lstStyle/>
+          <a:p>
+            <a:pPr algn="l" indent="0" marL="0">
+              <a:lnSpc>
+                <a:spcPct val="145000"/>
+              </a:lnSpc>
+              <a:buNone/>
+            </a:pPr>
+            <a:r>
+              <a:rPr lang="en-US" sz="1700" b="1" dirty="0">
+                <a:solidFill>
+                  <a:srgbClr val="332F2A"/>
+                </a:solidFill>
+                <a:latin typeface="Libre Franklin" pitchFamily="34" charset="0"/>
+                <a:ea typeface="Libre Franklin" pitchFamily="34" charset="-122"/>
+                <a:cs typeface="Libre Franklin" pitchFamily="34" charset="-120"/>
+              </a:rPr>
+              <a:t>A plausible function looks real. </a:t>
+            </a:r>
+            <a:pPr algn="l" indent="0" marL="0">
+              <a:lnSpc>
+                <a:spcPct val="145000"/>
+              </a:lnSpc>
+              <a:buNone/>
+            </a:pPr>
+            <a:r>
+              <a:rPr lang="en-US" sz="1700" dirty="0">
+                <a:solidFill>
+                  <a:srgbClr val="332F2A"/>
+                </a:solidFill>
+                <a:latin typeface="Libre Franklin" pitchFamily="34" charset="0"/>
+                <a:ea typeface="Libre Franklin" pitchFamily="34" charset="-122"/>
+                <a:cs typeface="Libre Franklin" pitchFamily="34" charset="-120"/>
+              </a:rPr>
+              <a:t>A library call that ought to exist looks exactly like one that does.</a:t>
+            </a:r>
+            <a:endParaRPr lang="en-US" sz="1700" dirty="0"/>
+          </a:p>
+        </p:txBody>
+      </p:sp>
+      <p:sp>
+        <p:nvSpPr>
+          <p:cNvPr id="11" name="Text 9"/>
+          <p:cNvSpPr/>
+          <p:nvPr/>
+        </p:nvSpPr>
+        <p:spPr>
+          <a:xfrm>
+            <a:off x="558800" y="3271520"/>
+            <a:ext cx="190500" cy="317500"/>
+          </a:xfrm>
+          <a:prstGeom prst="rect">
+            <a:avLst/>
+          </a:prstGeom>
+          <a:noFill/>
+          <a:ln/>
+        </p:spPr>
+        <p:txBody>
+          <a:bodyPr wrap="square" lIns="0" tIns="0" rIns="0" bIns="0" rtlCol="0" anchor="t"/>
+          <a:lstStyle/>
+          <a:p>
+            <a:pPr algn="l" indent="0" marL="0">
+              <a:lnSpc>
+                <a:spcPct val="140000"/>
+              </a:lnSpc>
+              <a:buNone/>
+            </a:pPr>
+            <a:r>
+              <a:rPr lang="en-US" sz="1700" dirty="0">
+                <a:solidFill>
+                  <a:srgbClr val="A87A2E"/>
+                </a:solidFill>
+                <a:latin typeface="Libre Franklin" pitchFamily="34" charset="0"/>
+                <a:ea typeface="Libre Franklin" pitchFamily="34" charset="-122"/>
+                <a:cs typeface="Libre Franklin" pitchFamily="34" charset="-120"/>
+              </a:rPr>
+              <a:t>—</a:t>
+            </a:r>
+            <a:endParaRPr lang="en-US" sz="1700" dirty="0"/>
+          </a:p>
+        </p:txBody>
+      </p:sp>
+      <p:sp>
+        <p:nvSpPr>
+          <p:cNvPr id="12" name="Text 10"/>
+          <p:cNvSpPr/>
+          <p:nvPr/>
+        </p:nvSpPr>
+        <p:spPr>
+          <a:xfrm>
+            <a:off x="927100" y="3271520"/>
+            <a:ext cx="9156700" cy="753110"/>
+          </a:xfrm>
+          <a:prstGeom prst="rect">
+            <a:avLst/>
+          </a:prstGeom>
+          <a:noFill/>
+          <a:ln/>
+        </p:spPr>
+        <p:txBody>
+          <a:bodyPr wrap="square" lIns="0" tIns="0" rIns="0" bIns="0" rtlCol="0" anchor="t"/>
+          <a:lstStyle/>
+          <a:p>
+            <a:pPr algn="l" indent="0" marL="0">
+              <a:lnSpc>
+                <a:spcPct val="145000"/>
+              </a:lnSpc>
+              <a:buNone/>
+            </a:pPr>
+            <a:r>
+              <a:rPr lang="en-US" sz="1700" b="1" dirty="0">
+                <a:solidFill>
+                  <a:srgbClr val="332F2A"/>
+                </a:solidFill>
+                <a:latin typeface="Libre Franklin" pitchFamily="34" charset="0"/>
+                <a:ea typeface="Libre Franklin" pitchFamily="34" charset="-122"/>
+                <a:cs typeface="Libre Franklin" pitchFamily="34" charset="-120"/>
+              </a:rPr>
+              <a:t>It cannot warn you. </a:t>
+            </a:r>
+            <a:pPr algn="l" indent="0" marL="0">
+              <a:lnSpc>
+                <a:spcPct val="145000"/>
+              </a:lnSpc>
+              <a:buNone/>
+            </a:pPr>
+            <a:r>
+              <a:rPr lang="en-US" sz="1700" dirty="0">
+                <a:solidFill>
+                  <a:srgbClr val="332F2A"/>
+                </a:solidFill>
+                <a:latin typeface="Libre Franklin" pitchFamily="34" charset="0"/>
+                <a:ea typeface="Libre Franklin" pitchFamily="34" charset="-122"/>
+                <a:cs typeface="Libre Franklin" pitchFamily="34" charset="-120"/>
+              </a:rPr>
+              <a:t>Not knowing and knowing feel identical from the inside, so both come out equally confident.</a:t>
+            </a:r>
+            <a:endParaRPr lang="en-US" sz="1700" dirty="0"/>
+          </a:p>
+        </p:txBody>
+      </p:sp>
+      <p:sp>
+        <p:nvSpPr>
+          <p:cNvPr id="13" name="Text 11"/>
+          <p:cNvSpPr/>
+          <p:nvPr/>
+        </p:nvSpPr>
+        <p:spPr>
+          <a:xfrm>
+            <a:off x="558800" y="4151630"/>
+            <a:ext cx="190500" cy="317500"/>
+          </a:xfrm>
+          <a:prstGeom prst="rect">
+            <a:avLst/>
+          </a:prstGeom>
+          <a:noFill/>
+          <a:ln/>
+        </p:spPr>
+        <p:txBody>
+          <a:bodyPr wrap="square" lIns="0" tIns="0" rIns="0" bIns="0" rtlCol="0" anchor="t"/>
+          <a:lstStyle/>
+          <a:p>
+            <a:pPr algn="l" indent="0" marL="0">
+              <a:lnSpc>
+                <a:spcPct val="140000"/>
+              </a:lnSpc>
+              <a:buNone/>
+            </a:pPr>
+            <a:r>
+              <a:rPr lang="en-US" sz="1700" dirty="0">
+                <a:solidFill>
+                  <a:srgbClr val="A87A2E"/>
+                </a:solidFill>
+                <a:latin typeface="Libre Franklin" pitchFamily="34" charset="0"/>
+                <a:ea typeface="Libre Franklin" pitchFamily="34" charset="-122"/>
+                <a:cs typeface="Libre Franklin" pitchFamily="34" charset="-120"/>
+              </a:rPr>
+              <a:t>—</a:t>
+            </a:r>
+            <a:endParaRPr lang="en-US" sz="1700" dirty="0"/>
+          </a:p>
+        </p:txBody>
+      </p:sp>
+      <p:sp>
+        <p:nvSpPr>
+          <p:cNvPr id="14" name="Text 12"/>
+          <p:cNvSpPr/>
+          <p:nvPr/>
+        </p:nvSpPr>
+        <p:spPr>
+          <a:xfrm>
+            <a:off x="927100" y="4151630"/>
+            <a:ext cx="9156700" cy="753110"/>
+          </a:xfrm>
+          <a:prstGeom prst="rect">
+            <a:avLst/>
+          </a:prstGeom>
+          <a:noFill/>
+          <a:ln/>
+        </p:spPr>
+        <p:txBody>
+          <a:bodyPr wrap="square" lIns="0" tIns="0" rIns="0" bIns="0" rtlCol="0" anchor="t"/>
+          <a:lstStyle/>
+          <a:p>
+            <a:pPr algn="l" indent="0" marL="0">
+              <a:lnSpc>
+                <a:spcPct val="145000"/>
+              </a:lnSpc>
+              <a:buNone/>
+            </a:pPr>
+            <a:r>
+              <a:rPr lang="en-US" sz="1700" dirty="0">
+                <a:solidFill>
+                  <a:srgbClr val="332F2A"/>
+                </a:solidFill>
+                <a:latin typeface="Libre Franklin" pitchFamily="34" charset="0"/>
+                <a:ea typeface="Libre Franklin" pitchFamily="34" charset="-122"/>
+                <a:cs typeface="Libre Franklin" pitchFamily="34" charset="-120"/>
+              </a:rPr>
+              <a:t>Which leaves one rule: you check by running something, never by reading something that sounds right.</a:t>
+            </a:r>
+            <a:endParaRPr lang="en-US" sz="1700" dirty="0"/>
+          </a:p>
+        </p:txBody>
+      </p:sp>
+    </p:spTree>
+  </p:cSld>
+  <p:clrMapOvr>
+    <a:masterClrMapping/>
+  </p:clrMapOvr>
+</p:sld>
+</file>
+
+<file path=ppt/slides/slide12.xml><?xml version="1.0" encoding="utf-8"?>
+<p:sld xmlns:a="http://schemas.openxmlformats.org/drawingml/2006/main" xmlns:r="http://schemas.openxmlformats.org/officeDocument/2006/relationships" xmlns:p="http://schemas.openxmlformats.org/presentationml/2006/main">
+  <p:cSld name="Slide 12">
     <p:bg>
       <p:bgPr>
         <a:solidFill>
@@ -5992,7 +6832,7 @@
                 <a:ea typeface="IBM Plex Mono" pitchFamily="34" charset="-122"/>
                 <a:cs typeface="IBM Plex Mono" pitchFamily="34" charset="-120"/>
               </a:rPr>
-              <a:t>SECTION 02</a:t>
+              <a:t>SECTION 03</a:t>
             </a:r>
             <a:endParaRPr lang="en-US" sz="1300" dirty="0"/>
           </a:p>
@@ -6034,7 +6874,7 @@
                 <a:ea typeface="Libre Franklin" pitchFamily="34" charset="-122"/>
                 <a:cs typeface="Libre Franklin" pitchFamily="34" charset="-120"/>
               </a:rPr>
-              <a:t>What it costs, and why it fails</a:t>
+              <a:t>Warm-up — build it by asking</a:t>
             </a:r>
             <a:endParaRPr lang="en-US" sz="4000" dirty="0"/>
           </a:p>
@@ -6076,614 +6916,7 @@
                 <a:ea typeface="Libre Franklin" pitchFamily="34" charset="-122"/>
                 <a:cs typeface="Libre Franklin" pitchFamily="34" charset="-120"/>
               </a:rPr>
-              <a:t>Three limits you will meet before lunch, and the reason none of them are bugs.</a:t>
-            </a:r>
-            <a:endParaRPr lang="en-US" sz="1700" dirty="0"/>
-          </a:p>
-        </p:txBody>
-      </p:sp>
-    </p:spTree>
-  </p:cSld>
-  <p:clrMapOvr>
-    <a:masterClrMapping/>
-  </p:clrMapOvr>
-</p:sld>
-</file>
-
-<file path=ppt/slides/slide12.xml><?xml version="1.0" encoding="utf-8"?>
-<p:sld xmlns:a="http://schemas.openxmlformats.org/drawingml/2006/main" xmlns:r="http://schemas.openxmlformats.org/officeDocument/2006/relationships" xmlns:p="http://schemas.openxmlformats.org/presentationml/2006/main">
-  <p:cSld name="Slide 12">
-    <p:bg>
-      <p:bgPr>
-        <a:solidFill>
-          <a:srgbClr val="FCFBF8"/>
-        </a:solidFill>
-      </p:bgPr>
-    </p:bg>
-    <p:spTree>
-      <p:nvGrpSpPr>
-        <p:cNvPr id="1" name=""/>
-        <p:cNvGrpSpPr/>
-        <p:nvPr/>
-      </p:nvGrpSpPr>
-      <p:grpSpPr>
-        <a:xfrm>
-          <a:off x="0" y="0"/>
-          <a:ext cx="0" cy="0"/>
-          <a:chOff x="0" y="0"/>
-          <a:chExt cx="0" cy="0"/>
-        </a:xfrm>
-      </p:grpSpPr>
-      <p:sp>
-        <p:nvSpPr>
-          <p:cNvPr id="2" name="Text 0"/>
-          <p:cNvSpPr/>
-          <p:nvPr/>
-        </p:nvSpPr>
-        <p:spPr>
-          <a:xfrm>
-            <a:off x="558800" y="355600"/>
-            <a:ext cx="11074400" cy="215900"/>
-          </a:xfrm>
-          <a:prstGeom prst="rect">
-            <a:avLst/>
-          </a:prstGeom>
-          <a:noFill/>
-          <a:ln/>
-        </p:spPr>
-        <p:txBody>
-          <a:bodyPr wrap="square" lIns="0" tIns="0" rIns="0" bIns="0" rtlCol="0" anchor="t"/>
-          <a:lstStyle/>
-          <a:p>
-            <a:pPr algn="l" indent="0" marL="0">
-              <a:lnSpc>
-                <a:spcPct val="145000"/>
-              </a:lnSpc>
-              <a:buNone/>
-            </a:pPr>
-            <a:r>
-              <a:rPr lang="en-US" sz="1200" spc="168" kern="0" dirty="0">
-                <a:solidFill>
-                  <a:srgbClr val="77726A"/>
-                </a:solidFill>
-                <a:latin typeface="IBM Plex Mono" pitchFamily="34" charset="0"/>
-                <a:ea typeface="IBM Plex Mono" pitchFamily="34" charset="-122"/>
-                <a:cs typeface="IBM Plex Mono" pitchFamily="34" charset="-120"/>
-              </a:rPr>
-              <a:t>SECTION 02</a:t>
-            </a:r>
-            <a:endParaRPr lang="en-US" sz="1200" dirty="0"/>
-          </a:p>
-        </p:txBody>
-      </p:sp>
-      <p:sp>
-        <p:nvSpPr>
-          <p:cNvPr id="3" name="Text 1"/>
-          <p:cNvSpPr/>
-          <p:nvPr/>
-        </p:nvSpPr>
-        <p:spPr>
-          <a:xfrm>
-            <a:off x="558800" y="635000"/>
-            <a:ext cx="11074400" cy="508000"/>
-          </a:xfrm>
-          <a:prstGeom prst="rect">
-            <a:avLst/>
-          </a:prstGeom>
-          <a:noFill/>
-          <a:ln/>
-        </p:spPr>
-        <p:txBody>
-          <a:bodyPr wrap="square" lIns="0" tIns="0" rIns="0" bIns="0" rtlCol="0" anchor="t"/>
-          <a:lstStyle/>
-          <a:p>
-            <a:pPr algn="l" indent="0" marL="0">
-              <a:lnSpc>
-                <a:spcPct val="110000"/>
-              </a:lnSpc>
-              <a:buNone/>
-            </a:pPr>
-            <a:r>
-              <a:rPr lang="en-US" sz="2800" b="1" dirty="0">
-                <a:solidFill>
-                  <a:srgbClr val="332F2A"/>
-                </a:solidFill>
-                <a:latin typeface="Libre Franklin" pitchFamily="34" charset="0"/>
-                <a:ea typeface="Libre Franklin" pitchFamily="34" charset="-122"/>
-                <a:cs typeface="Libre Franklin" pitchFamily="34" charset="-120"/>
-              </a:rPr>
-              <a:t>Context and its limits</a:t>
-            </a:r>
-            <a:endParaRPr lang="en-US" sz="2800" dirty="0"/>
-          </a:p>
-        </p:txBody>
-      </p:sp>
-      <p:sp>
-        <p:nvSpPr>
-          <p:cNvPr id="4" name="Shape 2"/>
-          <p:cNvSpPr/>
-          <p:nvPr/>
-        </p:nvSpPr>
-        <p:spPr>
-          <a:xfrm>
-            <a:off x="558800" y="1181100"/>
-            <a:ext cx="11074400" cy="6350"/>
-          </a:xfrm>
-          <a:prstGeom prst="rect">
-            <a:avLst/>
-          </a:prstGeom>
-          <a:solidFill>
-            <a:srgbClr val="E1DED7"/>
-          </a:solidFill>
-          <a:ln/>
-        </p:spPr>
-      </p:sp>
-      <p:sp>
-        <p:nvSpPr>
-          <p:cNvPr id="5" name="Text 3"/>
-          <p:cNvSpPr/>
-          <p:nvPr/>
-        </p:nvSpPr>
-        <p:spPr>
-          <a:xfrm>
-            <a:off x="558800" y="6337300"/>
-            <a:ext cx="9804400" cy="215900"/>
-          </a:xfrm>
-          <a:prstGeom prst="rect">
-            <a:avLst/>
-          </a:prstGeom>
-          <a:noFill/>
-          <a:ln/>
-        </p:spPr>
-        <p:txBody>
-          <a:bodyPr wrap="square" lIns="0" tIns="0" rIns="0" bIns="0" rtlCol="0" anchor="t"/>
-          <a:lstStyle/>
-          <a:p>
-            <a:pPr algn="l" indent="0" marL="0">
-              <a:lnSpc>
-                <a:spcPct val="145000"/>
-              </a:lnSpc>
-              <a:buNone/>
-            </a:pPr>
-            <a:r>
-              <a:rPr lang="en-US" sz="1200" dirty="0">
-                <a:solidFill>
-                  <a:srgbClr val="99948B"/>
-                </a:solidFill>
-                <a:latin typeface="IBM Plex Mono" pitchFamily="34" charset="0"/>
-                <a:ea typeface="IBM Plex Mono" pitchFamily="34" charset="-122"/>
-                <a:cs typeface="IBM Plex Mono" pitchFamily="34" charset="-120"/>
-              </a:rPr>
-              <a:t>AI for Software Development · Session 1</a:t>
-            </a:r>
-            <a:endParaRPr lang="en-US" sz="1200" dirty="0"/>
-          </a:p>
-        </p:txBody>
-      </p:sp>
-      <p:sp>
-        <p:nvSpPr>
-          <p:cNvPr id="6" name="Text 4"/>
-          <p:cNvSpPr/>
-          <p:nvPr/>
-        </p:nvSpPr>
-        <p:spPr>
-          <a:xfrm>
-            <a:off x="10363200" y="6337300"/>
-            <a:ext cx="1270000" cy="215900"/>
-          </a:xfrm>
-          <a:prstGeom prst="rect">
-            <a:avLst/>
-          </a:prstGeom>
-          <a:noFill/>
-          <a:ln/>
-        </p:spPr>
-        <p:txBody>
-          <a:bodyPr wrap="square" lIns="0" tIns="0" rIns="0" bIns="0" rtlCol="0" anchor="t"/>
-          <a:lstStyle/>
-          <a:p>
-            <a:pPr algn="r" indent="0" marL="0">
-              <a:lnSpc>
-                <a:spcPct val="145000"/>
-              </a:lnSpc>
-              <a:buNone/>
-            </a:pPr>
-            <a:r>
-              <a:rPr lang="en-US" sz="1200" dirty="0">
-                <a:solidFill>
-                  <a:srgbClr val="99948B"/>
-                </a:solidFill>
-                <a:latin typeface="IBM Plex Mono" pitchFamily="34" charset="0"/>
-                <a:ea typeface="IBM Plex Mono" pitchFamily="34" charset="-122"/>
-                <a:cs typeface="IBM Plex Mono" pitchFamily="34" charset="-120"/>
-              </a:rPr>
-              <a:t>12</a:t>
-            </a:r>
-            <a:endParaRPr lang="en-US" sz="1200" dirty="0"/>
-          </a:p>
-        </p:txBody>
-      </p:sp>
-      <p:sp>
-        <p:nvSpPr>
-          <p:cNvPr id="7" name="Text 5"/>
-          <p:cNvSpPr/>
-          <p:nvPr/>
-        </p:nvSpPr>
-        <p:spPr>
-          <a:xfrm>
-            <a:off x="558800" y="1511300"/>
-            <a:ext cx="190500" cy="317500"/>
-          </a:xfrm>
-          <a:prstGeom prst="rect">
-            <a:avLst/>
-          </a:prstGeom>
-          <a:noFill/>
-          <a:ln/>
-        </p:spPr>
-        <p:txBody>
-          <a:bodyPr wrap="square" lIns="0" tIns="0" rIns="0" bIns="0" rtlCol="0" anchor="t"/>
-          <a:lstStyle/>
-          <a:p>
-            <a:pPr algn="l" indent="0" marL="0">
-              <a:lnSpc>
-                <a:spcPct val="140000"/>
-              </a:lnSpc>
-              <a:buNone/>
-            </a:pPr>
-            <a:r>
-              <a:rPr lang="en-US" sz="1700" dirty="0">
-                <a:solidFill>
-                  <a:srgbClr val="A87A2E"/>
-                </a:solidFill>
-                <a:latin typeface="Libre Franklin" pitchFamily="34" charset="0"/>
-                <a:ea typeface="Libre Franklin" pitchFamily="34" charset="-122"/>
-                <a:cs typeface="Libre Franklin" pitchFamily="34" charset="-120"/>
-              </a:rPr>
-              <a:t>—</a:t>
-            </a:r>
-            <a:endParaRPr lang="en-US" sz="1700" dirty="0"/>
-          </a:p>
-        </p:txBody>
-      </p:sp>
-      <p:sp>
-        <p:nvSpPr>
-          <p:cNvPr id="8" name="Text 6"/>
-          <p:cNvSpPr/>
-          <p:nvPr/>
-        </p:nvSpPr>
-        <p:spPr>
-          <a:xfrm>
-            <a:off x="927100" y="1511300"/>
-            <a:ext cx="9156700" cy="753110"/>
-          </a:xfrm>
-          <a:prstGeom prst="rect">
-            <a:avLst/>
-          </a:prstGeom>
-          <a:noFill/>
-          <a:ln/>
-        </p:spPr>
-        <p:txBody>
-          <a:bodyPr wrap="square" lIns="0" tIns="0" rIns="0" bIns="0" rtlCol="0" anchor="t"/>
-          <a:lstStyle/>
-          <a:p>
-            <a:pPr algn="l" indent="0" marL="0">
-              <a:lnSpc>
-                <a:spcPct val="145000"/>
-              </a:lnSpc>
-              <a:buNone/>
-            </a:pPr>
-            <a:r>
-              <a:rPr lang="en-US" sz="1700" b="1" dirty="0">
-                <a:solidFill>
-                  <a:srgbClr val="332F2A"/>
-                </a:solidFill>
-                <a:latin typeface="Libre Franklin" pitchFamily="34" charset="0"/>
-                <a:ea typeface="Libre Franklin" pitchFamily="34" charset="-122"/>
-                <a:cs typeface="Libre Franklin" pitchFamily="34" charset="-120"/>
-              </a:rPr>
-              <a:t>The model has no memory. </a:t>
-            </a:r>
-            <a:pPr algn="l" indent="0" marL="0">
-              <a:lnSpc>
-                <a:spcPct val="145000"/>
-              </a:lnSpc>
-              <a:buNone/>
-            </a:pPr>
-            <a:r>
-              <a:rPr lang="en-US" sz="1700" dirty="0">
-                <a:solidFill>
-                  <a:srgbClr val="332F2A"/>
-                </a:solidFill>
-                <a:latin typeface="Libre Franklin" pitchFamily="34" charset="0"/>
-                <a:ea typeface="Libre Franklin" pitchFamily="34" charset="-122"/>
-                <a:cs typeface="Libre Franklin" pitchFamily="34" charset="-120"/>
-              </a:rPr>
-              <a:t>Between one request and the next it retains nothing at all.</a:t>
-            </a:r>
-            <a:endParaRPr lang="en-US" sz="1700" dirty="0"/>
-          </a:p>
-        </p:txBody>
-      </p:sp>
-      <p:sp>
-        <p:nvSpPr>
-          <p:cNvPr id="9" name="Text 7"/>
-          <p:cNvSpPr/>
-          <p:nvPr/>
-        </p:nvSpPr>
-        <p:spPr>
-          <a:xfrm>
-            <a:off x="558800" y="2391410"/>
-            <a:ext cx="190500" cy="317500"/>
-          </a:xfrm>
-          <a:prstGeom prst="rect">
-            <a:avLst/>
-          </a:prstGeom>
-          <a:noFill/>
-          <a:ln/>
-        </p:spPr>
-        <p:txBody>
-          <a:bodyPr wrap="square" lIns="0" tIns="0" rIns="0" bIns="0" rtlCol="0" anchor="t"/>
-          <a:lstStyle/>
-          <a:p>
-            <a:pPr algn="l" indent="0" marL="0">
-              <a:lnSpc>
-                <a:spcPct val="140000"/>
-              </a:lnSpc>
-              <a:buNone/>
-            </a:pPr>
-            <a:r>
-              <a:rPr lang="en-US" sz="1700" dirty="0">
-                <a:solidFill>
-                  <a:srgbClr val="A87A2E"/>
-                </a:solidFill>
-                <a:latin typeface="Libre Franklin" pitchFamily="34" charset="0"/>
-                <a:ea typeface="Libre Franklin" pitchFamily="34" charset="-122"/>
-                <a:cs typeface="Libre Franklin" pitchFamily="34" charset="-120"/>
-              </a:rPr>
-              <a:t>—</a:t>
-            </a:r>
-            <a:endParaRPr lang="en-US" sz="1700" dirty="0"/>
-          </a:p>
-        </p:txBody>
-      </p:sp>
-      <p:sp>
-        <p:nvSpPr>
-          <p:cNvPr id="10" name="Text 8"/>
-          <p:cNvSpPr/>
-          <p:nvPr/>
-        </p:nvSpPr>
-        <p:spPr>
-          <a:xfrm>
-            <a:off x="927100" y="2391410"/>
-            <a:ext cx="9156700" cy="753110"/>
-          </a:xfrm>
-          <a:prstGeom prst="rect">
-            <a:avLst/>
-          </a:prstGeom>
-          <a:noFill/>
-          <a:ln/>
-        </p:spPr>
-        <p:txBody>
-          <a:bodyPr wrap="square" lIns="0" tIns="0" rIns="0" bIns="0" rtlCol="0" anchor="t"/>
-          <a:lstStyle/>
-          <a:p>
-            <a:pPr algn="l" indent="0" marL="0">
-              <a:lnSpc>
-                <a:spcPct val="145000"/>
-              </a:lnSpc>
-              <a:buNone/>
-            </a:pPr>
-            <a:r>
-              <a:rPr lang="en-US" sz="1700" b="1" dirty="0">
-                <a:solidFill>
-                  <a:srgbClr val="332F2A"/>
-                </a:solidFill>
-                <a:latin typeface="Libre Franklin" pitchFamily="34" charset="0"/>
-                <a:ea typeface="Libre Franklin" pitchFamily="34" charset="-122"/>
-                <a:cs typeface="Libre Franklin" pitchFamily="34" charset="-120"/>
-              </a:rPr>
-              <a:t>So everything is re-sent. </a:t>
-            </a:r>
-            <a:pPr algn="l" indent="0" marL="0">
-              <a:lnSpc>
-                <a:spcPct val="145000"/>
-              </a:lnSpc>
-              <a:buNone/>
-            </a:pPr>
-            <a:r>
-              <a:rPr lang="en-US" sz="1700" dirty="0">
-                <a:solidFill>
-                  <a:srgbClr val="332F2A"/>
-                </a:solidFill>
-                <a:latin typeface="Libre Franklin" pitchFamily="34" charset="0"/>
-                <a:ea typeface="Libre Franklin" pitchFamily="34" charset="-122"/>
-                <a:cs typeface="Libre Franklin" pitchFamily="34" charset="-120"/>
-              </a:rPr>
-              <a:t>Every request carries the whole conversation and every file read so far.</a:t>
-            </a:r>
-            <a:endParaRPr lang="en-US" sz="1700" dirty="0"/>
-          </a:p>
-        </p:txBody>
-      </p:sp>
-      <p:sp>
-        <p:nvSpPr>
-          <p:cNvPr id="11" name="Text 9"/>
-          <p:cNvSpPr/>
-          <p:nvPr/>
-        </p:nvSpPr>
-        <p:spPr>
-          <a:xfrm>
-            <a:off x="558800" y="3271520"/>
-            <a:ext cx="190500" cy="317500"/>
-          </a:xfrm>
-          <a:prstGeom prst="rect">
-            <a:avLst/>
-          </a:prstGeom>
-          <a:noFill/>
-          <a:ln/>
-        </p:spPr>
-        <p:txBody>
-          <a:bodyPr wrap="square" lIns="0" tIns="0" rIns="0" bIns="0" rtlCol="0" anchor="t"/>
-          <a:lstStyle/>
-          <a:p>
-            <a:pPr algn="l" indent="0" marL="0">
-              <a:lnSpc>
-                <a:spcPct val="140000"/>
-              </a:lnSpc>
-              <a:buNone/>
-            </a:pPr>
-            <a:r>
-              <a:rPr lang="en-US" sz="1700" dirty="0">
-                <a:solidFill>
-                  <a:srgbClr val="A87A2E"/>
-                </a:solidFill>
-                <a:latin typeface="Libre Franklin" pitchFamily="34" charset="0"/>
-                <a:ea typeface="Libre Franklin" pitchFamily="34" charset="-122"/>
-                <a:cs typeface="Libre Franklin" pitchFamily="34" charset="-120"/>
-              </a:rPr>
-              <a:t>—</a:t>
-            </a:r>
-            <a:endParaRPr lang="en-US" sz="1700" dirty="0"/>
-          </a:p>
-        </p:txBody>
-      </p:sp>
-      <p:sp>
-        <p:nvSpPr>
-          <p:cNvPr id="12" name="Text 10"/>
-          <p:cNvSpPr/>
-          <p:nvPr/>
-        </p:nvSpPr>
-        <p:spPr>
-          <a:xfrm>
-            <a:off x="927100" y="3271520"/>
-            <a:ext cx="9156700" cy="753110"/>
-          </a:xfrm>
-          <a:prstGeom prst="rect">
-            <a:avLst/>
-          </a:prstGeom>
-          <a:noFill/>
-          <a:ln/>
-        </p:spPr>
-        <p:txBody>
-          <a:bodyPr wrap="square" lIns="0" tIns="0" rIns="0" bIns="0" rtlCol="0" anchor="t"/>
-          <a:lstStyle/>
-          <a:p>
-            <a:pPr algn="l" indent="0" marL="0">
-              <a:lnSpc>
-                <a:spcPct val="145000"/>
-              </a:lnSpc>
-              <a:buNone/>
-            </a:pPr>
-            <a:r>
-              <a:rPr lang="en-US" sz="1700" b="1" dirty="0">
-                <a:solidFill>
-                  <a:srgbClr val="332F2A"/>
-                </a:solidFill>
-                <a:latin typeface="Libre Franklin" pitchFamily="34" charset="0"/>
-                <a:ea typeface="Libre Franklin" pitchFamily="34" charset="-122"/>
-                <a:cs typeface="Libre Franklin" pitchFamily="34" charset="-120"/>
-              </a:rPr>
-              <a:t>The context window is the ceiling </a:t>
-            </a:r>
-            <a:pPr algn="l" indent="0" marL="0">
-              <a:lnSpc>
-                <a:spcPct val="145000"/>
-              </a:lnSpc>
-              <a:buNone/>
-            </a:pPr>
-            <a:r>
-              <a:rPr lang="en-US" sz="1700" dirty="0">
-                <a:solidFill>
-                  <a:srgbClr val="332F2A"/>
-                </a:solidFill>
-                <a:latin typeface="Libre Franklin" pitchFamily="34" charset="0"/>
-                <a:ea typeface="Libre Franklin" pitchFamily="34" charset="-122"/>
-                <a:cs typeface="Libre Franklin" pitchFamily="34" charset="-120"/>
-              </a:rPr>
-              <a:t>on how much can be re-sent at once. Past it, the earliest parts fall away.</a:t>
-            </a:r>
-            <a:endParaRPr lang="en-US" sz="1700" dirty="0"/>
-          </a:p>
-        </p:txBody>
-      </p:sp>
-      <p:sp>
-        <p:nvSpPr>
-          <p:cNvPr id="13" name="Text 11"/>
-          <p:cNvSpPr/>
-          <p:nvPr/>
-        </p:nvSpPr>
-        <p:spPr>
-          <a:xfrm>
-            <a:off x="558800" y="4151630"/>
-            <a:ext cx="190500" cy="317500"/>
-          </a:xfrm>
-          <a:prstGeom prst="rect">
-            <a:avLst/>
-          </a:prstGeom>
-          <a:noFill/>
-          <a:ln/>
-        </p:spPr>
-        <p:txBody>
-          <a:bodyPr wrap="square" lIns="0" tIns="0" rIns="0" bIns="0" rtlCol="0" anchor="t"/>
-          <a:lstStyle/>
-          <a:p>
-            <a:pPr algn="l" indent="0" marL="0">
-              <a:lnSpc>
-                <a:spcPct val="140000"/>
-              </a:lnSpc>
-              <a:buNone/>
-            </a:pPr>
-            <a:r>
-              <a:rPr lang="en-US" sz="1700" dirty="0">
-                <a:solidFill>
-                  <a:srgbClr val="A87A2E"/>
-                </a:solidFill>
-                <a:latin typeface="Libre Franklin" pitchFamily="34" charset="0"/>
-                <a:ea typeface="Libre Franklin" pitchFamily="34" charset="-122"/>
-                <a:cs typeface="Libre Franklin" pitchFamily="34" charset="-120"/>
-              </a:rPr>
-              <a:t>—</a:t>
-            </a:r>
-            <a:endParaRPr lang="en-US" sz="1700" dirty="0"/>
-          </a:p>
-        </p:txBody>
-      </p:sp>
-      <p:sp>
-        <p:nvSpPr>
-          <p:cNvPr id="14" name="Text 12"/>
-          <p:cNvSpPr/>
-          <p:nvPr/>
-        </p:nvSpPr>
-        <p:spPr>
-          <a:xfrm>
-            <a:off x="927100" y="4151630"/>
-            <a:ext cx="9156700" cy="753110"/>
-          </a:xfrm>
-          <a:prstGeom prst="rect">
-            <a:avLst/>
-          </a:prstGeom>
-          <a:noFill/>
-          <a:ln/>
-        </p:spPr>
-        <p:txBody>
-          <a:bodyPr wrap="square" lIns="0" tIns="0" rIns="0" bIns="0" rtlCol="0" anchor="t"/>
-          <a:lstStyle/>
-          <a:p>
-            <a:pPr algn="l" indent="0" marL="0">
-              <a:lnSpc>
-                <a:spcPct val="145000"/>
-              </a:lnSpc>
-              <a:buNone/>
-            </a:pPr>
-            <a:r>
-              <a:rPr lang="en-US" sz="1700" dirty="0">
-                <a:solidFill>
-                  <a:srgbClr val="332F2A"/>
-                </a:solidFill>
-                <a:latin typeface="Libre Franklin" pitchFamily="34" charset="0"/>
-                <a:ea typeface="Libre Franklin" pitchFamily="34" charset="-122"/>
-                <a:cs typeface="Libre Franklin" pitchFamily="34" charset="-120"/>
-              </a:rPr>
-              <a:t>A long conversation therefore makes an agent worse, not better. Start a new task for each feature.</a:t>
+              <a:t>Set the machine up, then ask for the whole thing with no plan and see what arrives. 15 minutes of setup, 25 of building.</a:t>
             </a:r>
             <a:endParaRPr lang="en-US" sz="1700" dirty="0"/>
           </a:p>
@@ -6757,15 +6990,111 @@
                 <a:ea typeface="IBM Plex Mono" pitchFamily="34" charset="-122"/>
                 <a:cs typeface="IBM Plex Mono" pitchFamily="34" charset="-120"/>
               </a:rPr>
-              <a:t>SECTION 02</a:t>
+              <a:t>WORKSHOP 03</a:t>
             </a:r>
             <a:endParaRPr lang="en-US" sz="1200" dirty="0"/>
           </a:p>
         </p:txBody>
       </p:sp>
-      <p:sp>
-        <p:nvSpPr>
-          <p:cNvPr id="3" name="Text 1"/>
+      <p:pic>
+        <p:nvPicPr>
+          <p:cNvPr id="3" name="Image 0" descr="icons/github.png">    </p:cNvPr>
+          <p:cNvPicPr>
+            <a:picLocks noChangeAspect="1"/>
+          </p:cNvPicPr>
+          <p:nvPr/>
+        </p:nvPicPr>
+        <p:blipFill>
+          <a:blip r:embed="rId1"/>
+          <a:stretch>
+            <a:fillRect/>
+          </a:stretch>
+        </p:blipFill>
+        <p:spPr>
+          <a:xfrm>
+            <a:off x="10401300" y="361950"/>
+            <a:ext cx="203200" cy="203200"/>
+          </a:xfrm>
+          <a:prstGeom prst="rect">
+            <a:avLst/>
+          </a:prstGeom>
+        </p:spPr>
+      </p:pic>
+      <p:pic>
+        <p:nvPicPr>
+          <p:cNvPr id="4" name="Image 1" descr="icons/googlegemini.png">    </p:cNvPr>
+          <p:cNvPicPr>
+            <a:picLocks noChangeAspect="1"/>
+          </p:cNvPicPr>
+          <p:nvPr/>
+        </p:nvPicPr>
+        <p:blipFill>
+          <a:blip r:embed="rId2"/>
+          <a:stretch>
+            <a:fillRect/>
+          </a:stretch>
+        </p:blipFill>
+        <p:spPr>
+          <a:xfrm>
+            <a:off x="10744200" y="361950"/>
+            <a:ext cx="203200" cy="203200"/>
+          </a:xfrm>
+          <a:prstGeom prst="rect">
+            <a:avLst/>
+          </a:prstGeom>
+        </p:spPr>
+      </p:pic>
+      <p:pic>
+        <p:nvPicPr>
+          <p:cNvPr id="5" name="Image 2" descr="icons/mistralai.png">    </p:cNvPr>
+          <p:cNvPicPr>
+            <a:picLocks noChangeAspect="1"/>
+          </p:cNvPicPr>
+          <p:nvPr/>
+        </p:nvPicPr>
+        <p:blipFill>
+          <a:blip r:embed="rId3"/>
+          <a:stretch>
+            <a:fillRect/>
+          </a:stretch>
+        </p:blipFill>
+        <p:spPr>
+          <a:xfrm>
+            <a:off x="11087100" y="361950"/>
+            <a:ext cx="203200" cy="203200"/>
+          </a:xfrm>
+          <a:prstGeom prst="rect">
+            <a:avLst/>
+          </a:prstGeom>
+        </p:spPr>
+      </p:pic>
+      <p:pic>
+        <p:nvPicPr>
+          <p:cNvPr id="6" name="Image 3" descr="icons/python.png">    </p:cNvPr>
+          <p:cNvPicPr>
+            <a:picLocks noChangeAspect="1"/>
+          </p:cNvPicPr>
+          <p:nvPr/>
+        </p:nvPicPr>
+        <p:blipFill>
+          <a:blip r:embed="rId4"/>
+          <a:stretch>
+            <a:fillRect/>
+          </a:stretch>
+        </p:blipFill>
+        <p:spPr>
+          <a:xfrm>
+            <a:off x="11430000" y="361950"/>
+            <a:ext cx="203200" cy="203200"/>
+          </a:xfrm>
+          <a:prstGeom prst="rect">
+            <a:avLst/>
+          </a:prstGeom>
+        </p:spPr>
+      </p:pic>
+      <p:sp>
+        <p:nvSpPr>
+          <p:cNvPr id="7" name="Text 1"/>
           <p:cNvSpPr/>
           <p:nvPr/>
         </p:nvSpPr>
@@ -6799,7 +7128,7 @@
                 <a:ea typeface="Libre Franklin" pitchFamily="34" charset="-122"/>
                 <a:cs typeface="Libre Franklin" pitchFamily="34" charset="-120"/>
               </a:rPr>
-              <a:t>Your free allowance, and its two failures</a:t>
+              <a:t>Before we start</a:t>
             </a:r>
             <a:endParaRPr lang="en-US" sz="2800" dirty="0"/>
           </a:p>
@@ -6807,7 +7136,7 @@
       </p:sp>
       <p:sp>
         <p:nvSpPr>
-          <p:cNvPr id="4" name="Shape 2"/>
+          <p:cNvPr id="8" name="Shape 2"/>
           <p:cNvSpPr/>
           <p:nvPr/>
         </p:nvSpPr>
@@ -6827,7 +7156,7 @@
       </p:sp>
       <p:sp>
         <p:nvSpPr>
-          <p:cNvPr id="5" name="Text 3"/>
+          <p:cNvPr id="9" name="Text 3"/>
           <p:cNvSpPr/>
           <p:nvPr/>
         </p:nvSpPr>
@@ -6869,7 +7198,7 @@
       </p:sp>
       <p:sp>
         <p:nvSpPr>
-          <p:cNvPr id="6" name="Text 4"/>
+          <p:cNvPr id="10" name="Text 4"/>
           <p:cNvSpPr/>
           <p:nvPr/>
         </p:nvSpPr>
@@ -6911,292 +7240,56 @@
       </p:sp>
       <p:sp>
         <p:nvSpPr>
-          <p:cNvPr id="7" name="Shape 5"/>
+          <p:cNvPr id="11" name="Text 5"/>
           <p:cNvSpPr/>
           <p:nvPr/>
         </p:nvSpPr>
         <p:spPr>
           <a:xfrm>
             <a:off x="558800" y="1511300"/>
-            <a:ext cx="6517030" cy="4572000"/>
-          </a:xfrm>
-          <a:prstGeom prst="rect">
-            <a:avLst/>
-          </a:prstGeom>
-          <a:solidFill>
-            <a:srgbClr val="F5F2EC"/>
-          </a:solidFill>
-          <a:ln w="6350">
-            <a:solidFill>
-              <a:srgbClr val="E1DED7"/>
-            </a:solidFill>
-            <a:prstDash val="solid"/>
-          </a:ln>
-        </p:spPr>
-      </p:sp>
-      <p:sp>
-        <p:nvSpPr>
-          <p:cNvPr id="8" name="Text 6"/>
-          <p:cNvSpPr/>
-          <p:nvPr/>
-        </p:nvSpPr>
-        <p:spPr>
-          <a:xfrm>
-            <a:off x="800100" y="1727200"/>
-            <a:ext cx="6034430" cy="4140200"/>
-          </a:xfrm>
-          <a:prstGeom prst="rect">
-            <a:avLst/>
-          </a:prstGeom>
-          <a:noFill/>
-          <a:ln/>
-        </p:spPr>
-        <p:txBody>
-          <a:bodyPr wrap="square" lIns="0" tIns="0" rIns="0" bIns="0" rtlCol="0" anchor="t"/>
-          <a:lstStyle/>
-          <a:p>
-            <a:pPr indent="0" marL="0">
-              <a:lnSpc>
-                <a:spcPct val="160000"/>
-              </a:lnSpc>
-              <a:buNone/>
-            </a:pPr>
-            <a:r>
-              <a:rPr lang="en-US" sz="1400" dirty="0">
-                <a:solidFill>
-                  <a:srgbClr val="332F2A"/>
-                </a:solidFill>
-                <a:latin typeface="IBM Plex Mono" pitchFamily="34" charset="0"/>
-                <a:ea typeface="IBM Plex Mono" pitchFamily="34" charset="-122"/>
-                <a:cs typeface="IBM Plex Mono" pitchFamily="34" charset="-120"/>
-              </a:rPr>
-              <a:t>one instruction from you</a:t>
-            </a:r>
-            <a:endParaRPr lang="en-US" sz="1400" dirty="0"/>
-          </a:p>
-          <a:p>
-            <a:pPr indent="0" marL="0">
-              <a:lnSpc>
-                <a:spcPct val="160000"/>
-              </a:lnSpc>
-              <a:buNone/>
-            </a:pPr>
-            <a:r>
-              <a:rPr lang="en-US" sz="1400" dirty="0">
-                <a:solidFill>
-                  <a:srgbClr val="332F2A"/>
-                </a:solidFill>
-                <a:latin typeface="IBM Plex Mono" pitchFamily="34" charset="0"/>
-                <a:ea typeface="IBM Plex Mono" pitchFamily="34" charset="-122"/>
-                <a:cs typeface="IBM Plex Mono" pitchFamily="34" charset="-120"/>
-              </a:rPr>
-              <a:t>    -&gt; 4 to 10 requests</a:t>
-            </a:r>
-            <a:endParaRPr lang="en-US" sz="1400" dirty="0"/>
-          </a:p>
-          <a:p>
-            <a:pPr indent="0" marL="0">
-              <a:lnSpc>
-                <a:spcPct val="160000"/>
-              </a:lnSpc>
-              <a:buNone/>
-            </a:pPr>
-            <a:r>
-              <a:rPr lang="en-US" sz="1400" dirty="0">
-                <a:solidFill>
-                  <a:srgbClr val="332F2A"/>
-                </a:solidFill>
-                <a:latin typeface="IBM Plex Mono" pitchFamily="34" charset="0"/>
-                <a:ea typeface="IBM Plex Mono" pitchFamily="34" charset="-122"/>
-                <a:cs typeface="IBM Plex Mono" pitchFamily="34" charset="-120"/>
-              </a:rPr>
-              <a:t>a 2-hour lab</a:t>
-            </a:r>
-            <a:endParaRPr lang="en-US" sz="1400" dirty="0"/>
-          </a:p>
-          <a:p>
-            <a:pPr indent="0" marL="0">
-              <a:lnSpc>
-                <a:spcPct val="160000"/>
-              </a:lnSpc>
-              <a:buNone/>
-            </a:pPr>
-            <a:r>
-              <a:rPr lang="en-US" sz="1400" dirty="0">
-                <a:solidFill>
-                  <a:srgbClr val="332F2A"/>
-                </a:solidFill>
-                <a:latin typeface="IBM Plex Mono" pitchFamily="34" charset="0"/>
-                <a:ea typeface="IBM Plex Mono" pitchFamily="34" charset="-122"/>
-                <a:cs typeface="IBM Plex Mono" pitchFamily="34" charset="-120"/>
-              </a:rPr>
-              <a:t>    ~ 100 to 200 requests</a:t>
-            </a:r>
-            <a:endParaRPr lang="en-US" sz="1400" dirty="0"/>
-          </a:p>
-          <a:p>
-            <a:pPr indent="0" marL="0">
-              <a:lnSpc>
-                <a:spcPct val="160000"/>
-              </a:lnSpc>
-              <a:buNone/>
-            </a:pPr>
-            <a:endParaRPr lang="en-US" sz="1400" dirty="0"/>
-          </a:p>
-          <a:p>
-            <a:pPr indent="0" marL="0">
-              <a:lnSpc>
-                <a:spcPct val="160000"/>
-              </a:lnSpc>
-              <a:buNone/>
-            </a:pPr>
-            <a:r>
-              <a:rPr lang="en-US" sz="1400" dirty="0">
-                <a:solidFill>
-                  <a:srgbClr val="332F2A"/>
-                </a:solidFill>
-                <a:latin typeface="IBM Plex Mono" pitchFamily="34" charset="0"/>
-                <a:ea typeface="IBM Plex Mono" pitchFamily="34" charset="-122"/>
-                <a:cs typeface="IBM Plex Mono" pitchFamily="34" charset="-120"/>
-              </a:rPr>
-              <a:t>Gemini   250 req/day, 10/min</a:t>
-            </a:r>
-            <a:endParaRPr lang="en-US" sz="1400" dirty="0"/>
-          </a:p>
-          <a:p>
-            <a:pPr indent="0" marL="0">
-              <a:lnSpc>
-                <a:spcPct val="160000"/>
-              </a:lnSpc>
-              <a:buNone/>
-            </a:pPr>
-            <a:r>
-              <a:rPr lang="en-US" sz="1400" dirty="0">
-                <a:solidFill>
-                  <a:srgbClr val="332F2A"/>
-                </a:solidFill>
-                <a:latin typeface="IBM Plex Mono" pitchFamily="34" charset="0"/>
-                <a:ea typeface="IBM Plex Mono" pitchFamily="34" charset="-122"/>
-                <a:cs typeface="IBM Plex Mono" pitchFamily="34" charset="-120"/>
-              </a:rPr>
-              <a:t>         ~6s between steps</a:t>
-            </a:r>
-            <a:endParaRPr lang="en-US" sz="1400" dirty="0"/>
-          </a:p>
-          <a:p>
-            <a:pPr indent="0" marL="0">
-              <a:lnSpc>
-                <a:spcPct val="160000"/>
-              </a:lnSpc>
-              <a:buNone/>
-            </a:pPr>
-            <a:r>
-              <a:rPr lang="en-US" sz="1400" dirty="0">
-                <a:solidFill>
-                  <a:srgbClr val="332F2A"/>
-                </a:solidFill>
-                <a:latin typeface="IBM Plex Mono" pitchFamily="34" charset="0"/>
-                <a:ea typeface="IBM Plex Mono" pitchFamily="34" charset="-122"/>
-                <a:cs typeface="IBM Plex Mono" pitchFamily="34" charset="-120"/>
-              </a:rPr>
-              <a:t>Mistral  25,000 tokens/min</a:t>
-            </a:r>
-            <a:endParaRPr lang="en-US" sz="1400" dirty="0"/>
-          </a:p>
-          <a:p>
-            <a:pPr indent="0" marL="0">
-              <a:lnSpc>
-                <a:spcPct val="160000"/>
-              </a:lnSpc>
-              <a:buNone/>
-            </a:pPr>
-            <a:r>
-              <a:rPr lang="en-US" sz="1400" dirty="0">
-                <a:solidFill>
-                  <a:srgbClr val="332F2A"/>
-                </a:solidFill>
-                <a:latin typeface="IBM Plex Mono" pitchFamily="34" charset="0"/>
-                <a:ea typeface="IBM Plex Mono" pitchFamily="34" charset="-122"/>
-                <a:cs typeface="IBM Plex Mono" pitchFamily="34" charset="-120"/>
-              </a:rPr>
-              <a:t>         ~3 req/min</a:t>
-            </a:r>
-            <a:endParaRPr lang="en-US" sz="1400" dirty="0"/>
-          </a:p>
-          <a:p>
-            <a:pPr indent="0" marL="0">
-              <a:lnSpc>
-                <a:spcPct val="160000"/>
-              </a:lnSpc>
-              <a:buNone/>
-            </a:pPr>
-            <a:r>
-              <a:rPr lang="en-US" sz="1400" dirty="0">
-                <a:solidFill>
-                  <a:srgbClr val="332F2A"/>
-                </a:solidFill>
-                <a:latin typeface="IBM Plex Mono" pitchFamily="34" charset="0"/>
-                <a:ea typeface="IBM Plex Mono" pitchFamily="34" charset="-122"/>
-                <a:cs typeface="IBM Plex Mono" pitchFamily="34" charset="-120"/>
-              </a:rPr>
-              <a:t>         ~20s between steps</a:t>
-            </a:r>
-            <a:endParaRPr lang="en-US" sz="1400" dirty="0"/>
-          </a:p>
-        </p:txBody>
-      </p:sp>
-      <p:sp>
-        <p:nvSpPr>
-          <p:cNvPr id="9" name="Text 7"/>
-          <p:cNvSpPr/>
-          <p:nvPr/>
-        </p:nvSpPr>
-        <p:spPr>
-          <a:xfrm>
-            <a:off x="7431430" y="1511300"/>
-            <a:ext cx="4201770" cy="1305560"/>
-          </a:xfrm>
-          <a:prstGeom prst="rect">
-            <a:avLst/>
-          </a:prstGeom>
-          <a:noFill/>
-          <a:ln/>
-        </p:spPr>
-        <p:txBody>
-          <a:bodyPr wrap="square" lIns="0" tIns="0" rIns="0" bIns="0" rtlCol="0" anchor="t"/>
-          <a:lstStyle/>
-          <a:p>
-            <a:pPr algn="l" indent="0" marL="0">
-              <a:lnSpc>
-                <a:spcPct val="145000"/>
-              </a:lnSpc>
-              <a:buNone/>
-            </a:pPr>
-            <a:r>
-              <a:rPr lang="en-US" sz="1600" dirty="0">
-                <a:solidFill>
-                  <a:srgbClr val="332F2A"/>
+            <a:ext cx="190500" cy="317500"/>
+          </a:xfrm>
+          <a:prstGeom prst="rect">
+            <a:avLst/>
+          </a:prstGeom>
+          <a:noFill/>
+          <a:ln/>
+        </p:spPr>
+        <p:txBody>
+          <a:bodyPr wrap="square" lIns="0" tIns="0" rIns="0" bIns="0" rtlCol="0" anchor="t"/>
+          <a:lstStyle/>
+          <a:p>
+            <a:pPr algn="l" indent="0" marL="0">
+              <a:lnSpc>
+                <a:spcPct val="140000"/>
+              </a:lnSpc>
+              <a:buNone/>
+            </a:pPr>
+            <a:r>
+              <a:rPr lang="en-US" sz="1700" dirty="0">
+                <a:solidFill>
+                  <a:srgbClr val="A87A2E"/>
                 </a:solidFill>
                 <a:latin typeface="Libre Franklin" pitchFamily="34" charset="0"/>
                 <a:ea typeface="Libre Franklin" pitchFamily="34" charset="-122"/>
                 <a:cs typeface="Libre Franklin" pitchFamily="34" charset="-120"/>
               </a:rPr>
-              <a:t>One lab session is roughly one day of your Gemini allowance, and the pauses between steps are the limit working rather than a fault.</a:t>
-            </a:r>
-            <a:endParaRPr lang="en-US" sz="1600" dirty="0"/>
-          </a:p>
-        </p:txBody>
-      </p:sp>
-      <p:sp>
-        <p:nvSpPr>
-          <p:cNvPr id="10" name="Text 8"/>
-          <p:cNvSpPr/>
-          <p:nvPr/>
-        </p:nvSpPr>
-        <p:spPr>
-          <a:xfrm>
-            <a:off x="7431430" y="2943860"/>
-            <a:ext cx="4201770" cy="1894840"/>
+              <a:t>—</a:t>
+            </a:r>
+            <a:endParaRPr lang="en-US" sz="1700" dirty="0"/>
+          </a:p>
+        </p:txBody>
+      </p:sp>
+      <p:sp>
+        <p:nvSpPr>
+          <p:cNvPr id="12" name="Text 6"/>
+          <p:cNvSpPr/>
+          <p:nvPr/>
+        </p:nvSpPr>
+        <p:spPr>
+          <a:xfrm>
+            <a:off x="927100" y="1511300"/>
+            <a:ext cx="9156700" cy="1066165"/>
           </a:xfrm>
           <a:prstGeom prst="rect">
             <a:avLst/>
@@ -7215,69 +7308,24 @@
               <a:buNone/>
             </a:pPr>
             <a:r>
-              <a:rPr lang="en-US" sz="1600" dirty="0">
-                <a:solidFill>
-                  <a:srgbClr val="77726A"/>
+              <a:rPr lang="en-US" sz="1700" b="1" dirty="0">
+                <a:solidFill>
+                  <a:srgbClr val="332F2A"/>
                 </a:solidFill>
                 <a:latin typeface="Libre Franklin" pitchFamily="34" charset="0"/>
                 <a:ea typeface="Libre Franklin" pitchFamily="34" charset="-122"/>
                 <a:cs typeface="Libre Franklin" pitchFamily="34" charset="-120"/>
               </a:rPr>
-              <a:t>Two different failures, opposite fixes. 429 “rate limited” means wait about a minute. 503 “high demand” means that model is refusing everyone — switch providers, because waiting will not help.</a:t>
-            </a:r>
-            <a:endParaRPr lang="en-US" sz="1600" dirty="0"/>
-          </a:p>
-        </p:txBody>
-      </p:sp>
-      <p:sp>
-        <p:nvSpPr>
-          <p:cNvPr id="11" name="Shape 9"/>
-          <p:cNvSpPr/>
-          <p:nvPr/>
-        </p:nvSpPr>
-        <p:spPr>
-          <a:xfrm>
-            <a:off x="7431430" y="5384800"/>
-            <a:ext cx="12700" cy="698500"/>
-          </a:xfrm>
-          <a:prstGeom prst="rect">
-            <a:avLst/>
-          </a:prstGeom>
-          <a:solidFill>
-            <a:srgbClr val="A87A2E"/>
-          </a:solidFill>
-          <a:ln/>
-        </p:spPr>
-      </p:sp>
-      <p:sp>
-        <p:nvSpPr>
-          <p:cNvPr id="12" name="Text 10"/>
-          <p:cNvSpPr/>
-          <p:nvPr/>
-        </p:nvSpPr>
-        <p:spPr>
-          <a:xfrm>
-            <a:off x="7596530" y="5416550"/>
-            <a:ext cx="4036670" cy="698500"/>
-          </a:xfrm>
-          <a:prstGeom prst="rect">
-            <a:avLst/>
-          </a:prstGeom>
-          <a:noFill/>
-          <a:ln/>
-        </p:spPr>
-        <p:txBody>
-          <a:bodyPr wrap="square" lIns="0" tIns="0" rIns="0" bIns="0" rtlCol="0" anchor="t"/>
-          <a:lstStyle/>
-          <a:p>
-            <a:pPr algn="l" indent="0" marL="0">
-              <a:lnSpc>
-                <a:spcPct val="140000"/>
-              </a:lnSpc>
-              <a:buNone/>
-            </a:pPr>
-            <a:r>
-              <a:rPr lang="en-US" sz="1500" dirty="0">
+              <a:t>A GitHub account, then a Codespace. </a:t>
+            </a:r>
+            <a:pPr algn="l" indent="0" marL="0">
+              <a:lnSpc>
+                <a:spcPct val="145000"/>
+              </a:lnSpc>
+              <a:buNone/>
+            </a:pPr>
+            <a:r>
+              <a:rPr lang="en-US" sz="1700" dirty="0">
                 <a:solidFill>
                   <a:srgbClr val="332F2A"/>
                 </a:solidFill>
@@ -7285,9 +7333,312 @@
                 <a:ea typeface="Libre Franklin" pitchFamily="34" charset="-122"/>
                 <a:cs typeface="Libre Franklin" pitchFamily="34" charset="-120"/>
               </a:rPr>
-              <a:t>Everything that cuts your request count is also just good engineering.</a:t>
-            </a:r>
-            <a:endParaRPr lang="en-US" sz="1500" dirty="0"/>
+              <a:t>The template is at github.com/witchapong/ai-workshop-template — Use this template, then Code, then Codespaces. One click builds a Linux machine in your browser; nothing installs here.</a:t>
+            </a:r>
+            <a:endParaRPr lang="en-US" sz="1700" dirty="0"/>
+          </a:p>
+        </p:txBody>
+      </p:sp>
+      <p:sp>
+        <p:nvSpPr>
+          <p:cNvPr id="13" name="Text 7"/>
+          <p:cNvSpPr/>
+          <p:nvPr/>
+        </p:nvSpPr>
+        <p:spPr>
+          <a:xfrm>
+            <a:off x="558800" y="2704465"/>
+            <a:ext cx="190500" cy="317500"/>
+          </a:xfrm>
+          <a:prstGeom prst="rect">
+            <a:avLst/>
+          </a:prstGeom>
+          <a:noFill/>
+          <a:ln/>
+        </p:spPr>
+        <p:txBody>
+          <a:bodyPr wrap="square" lIns="0" tIns="0" rIns="0" bIns="0" rtlCol="0" anchor="t"/>
+          <a:lstStyle/>
+          <a:p>
+            <a:pPr algn="l" indent="0" marL="0">
+              <a:lnSpc>
+                <a:spcPct val="140000"/>
+              </a:lnSpc>
+              <a:buNone/>
+            </a:pPr>
+            <a:r>
+              <a:rPr lang="en-US" sz="1700" dirty="0">
+                <a:solidFill>
+                  <a:srgbClr val="A87A2E"/>
+                </a:solidFill>
+                <a:latin typeface="Libre Franklin" pitchFamily="34" charset="0"/>
+                <a:ea typeface="Libre Franklin" pitchFamily="34" charset="-122"/>
+                <a:cs typeface="Libre Franklin" pitchFamily="34" charset="-120"/>
+              </a:rPr>
+              <a:t>—</a:t>
+            </a:r>
+            <a:endParaRPr lang="en-US" sz="1700" dirty="0"/>
+          </a:p>
+        </p:txBody>
+      </p:sp>
+      <p:sp>
+        <p:nvSpPr>
+          <p:cNvPr id="14" name="Text 8"/>
+          <p:cNvSpPr/>
+          <p:nvPr/>
+        </p:nvSpPr>
+        <p:spPr>
+          <a:xfrm>
+            <a:off x="927100" y="2704465"/>
+            <a:ext cx="9156700" cy="753110"/>
+          </a:xfrm>
+          <a:prstGeom prst="rect">
+            <a:avLst/>
+          </a:prstGeom>
+          <a:noFill/>
+          <a:ln/>
+        </p:spPr>
+        <p:txBody>
+          <a:bodyPr wrap="square" lIns="0" tIns="0" rIns="0" bIns="0" rtlCol="0" anchor="t"/>
+          <a:lstStyle/>
+          <a:p>
+            <a:pPr algn="l" indent="0" marL="0">
+              <a:lnSpc>
+                <a:spcPct val="145000"/>
+              </a:lnSpc>
+              <a:buNone/>
+            </a:pPr>
+            <a:r>
+              <a:rPr lang="en-US" sz="1700" b="1" dirty="0">
+                <a:solidFill>
+                  <a:srgbClr val="332F2A"/>
+                </a:solidFill>
+                <a:latin typeface="Libre Franklin" pitchFamily="34" charset="0"/>
+                <a:ea typeface="Libre Franklin" pitchFamily="34" charset="-122"/>
+                <a:cs typeface="Libre Franklin" pitchFamily="34" charset="-120"/>
+              </a:rPr>
+              <a:t>TWO API keys, not one. </a:t>
+            </a:r>
+            <a:pPr algn="l" indent="0" marL="0">
+              <a:lnSpc>
+                <a:spcPct val="145000"/>
+              </a:lnSpc>
+              <a:buNone/>
+            </a:pPr>
+            <a:r>
+              <a:rPr lang="en-US" sz="1700" dirty="0">
+                <a:solidFill>
+                  <a:srgbClr val="332F2A"/>
+                </a:solidFill>
+                <a:latin typeface="Libre Franklin" pitchFamily="34" charset="0"/>
+                <a:ea typeface="Libre Franklin" pitchFamily="34" charset="-122"/>
+                <a:cs typeface="Libre Franklin" pitchFamily="34" charset="-120"/>
+              </a:rPr>
+              <a:t>Gemini at aistudio.google.com/apikey, Mistral at console.mistral.ai. Free tiers refuse service without warning.</a:t>
+            </a:r>
+            <a:endParaRPr lang="en-US" sz="1700" dirty="0"/>
+          </a:p>
+        </p:txBody>
+      </p:sp>
+      <p:sp>
+        <p:nvSpPr>
+          <p:cNvPr id="15" name="Text 9"/>
+          <p:cNvSpPr/>
+          <p:nvPr/>
+        </p:nvSpPr>
+        <p:spPr>
+          <a:xfrm>
+            <a:off x="558800" y="3584575"/>
+            <a:ext cx="190500" cy="317500"/>
+          </a:xfrm>
+          <a:prstGeom prst="rect">
+            <a:avLst/>
+          </a:prstGeom>
+          <a:noFill/>
+          <a:ln/>
+        </p:spPr>
+        <p:txBody>
+          <a:bodyPr wrap="square" lIns="0" tIns="0" rIns="0" bIns="0" rtlCol="0" anchor="t"/>
+          <a:lstStyle/>
+          <a:p>
+            <a:pPr algn="l" indent="0" marL="0">
+              <a:lnSpc>
+                <a:spcPct val="140000"/>
+              </a:lnSpc>
+              <a:buNone/>
+            </a:pPr>
+            <a:r>
+              <a:rPr lang="en-US" sz="1700" dirty="0">
+                <a:solidFill>
+                  <a:srgbClr val="A87A2E"/>
+                </a:solidFill>
+                <a:latin typeface="Libre Franklin" pitchFamily="34" charset="0"/>
+                <a:ea typeface="Libre Franklin" pitchFamily="34" charset="-122"/>
+                <a:cs typeface="Libre Franklin" pitchFamily="34" charset="-120"/>
+              </a:rPr>
+              <a:t>—</a:t>
+            </a:r>
+            <a:endParaRPr lang="en-US" sz="1700" dirty="0"/>
+          </a:p>
+        </p:txBody>
+      </p:sp>
+      <p:sp>
+        <p:nvSpPr>
+          <p:cNvPr id="16" name="Text 10"/>
+          <p:cNvSpPr/>
+          <p:nvPr/>
+        </p:nvSpPr>
+        <p:spPr>
+          <a:xfrm>
+            <a:off x="927100" y="3584575"/>
+            <a:ext cx="9156700" cy="753110"/>
+          </a:xfrm>
+          <a:prstGeom prst="rect">
+            <a:avLst/>
+          </a:prstGeom>
+          <a:noFill/>
+          <a:ln/>
+        </p:spPr>
+        <p:txBody>
+          <a:bodyPr wrap="square" lIns="0" tIns="0" rIns="0" bIns="0" rtlCol="0" anchor="t"/>
+          <a:lstStyle/>
+          <a:p>
+            <a:pPr algn="l" indent="0" marL="0">
+              <a:lnSpc>
+                <a:spcPct val="145000"/>
+              </a:lnSpc>
+              <a:buNone/>
+            </a:pPr>
+            <a:r>
+              <a:rPr lang="en-US" sz="1700" b="1" dirty="0">
+                <a:solidFill>
+                  <a:srgbClr val="332F2A"/>
+                </a:solidFill>
+                <a:latin typeface="Libre Franklin" pitchFamily="34" charset="0"/>
+                <a:ea typeface="Libre Franklin" pitchFamily="34" charset="-122"/>
+                <a:cs typeface="Libre Franklin" pitchFamily="34" charset="-120"/>
+              </a:rPr>
+              <a:t>Paste both into .env, save, close the tab. </a:t>
+            </a:r>
+            <a:pPr algn="l" indent="0" marL="0">
+              <a:lnSpc>
+                <a:spcPct val="145000"/>
+              </a:lnSpc>
+              <a:buNone/>
+            </a:pPr>
+            <a:r>
+              <a:rPr lang="en-US" sz="1700" dirty="0">
+                <a:solidFill>
+                  <a:srgbClr val="332F2A"/>
+                </a:solidFill>
+                <a:latin typeface="Libre Franklin" pitchFamily="34" charset="0"/>
+                <a:ea typeface="Libre Franklin" pitchFamily="34" charset="-122"/>
+                <a:cs typeface="Libre Franklin" pitchFamily="34" charset="-120"/>
+              </a:rPr>
+              <a:t>A key is a password, and you will be sharing this screen before the day is out.</a:t>
+            </a:r>
+            <a:endParaRPr lang="en-US" sz="1700" dirty="0"/>
+          </a:p>
+        </p:txBody>
+      </p:sp>
+      <p:sp>
+        <p:nvSpPr>
+          <p:cNvPr id="17" name="Text 11"/>
+          <p:cNvSpPr/>
+          <p:nvPr/>
+        </p:nvSpPr>
+        <p:spPr>
+          <a:xfrm>
+            <a:off x="558800" y="4464685"/>
+            <a:ext cx="190500" cy="317500"/>
+          </a:xfrm>
+          <a:prstGeom prst="rect">
+            <a:avLst/>
+          </a:prstGeom>
+          <a:noFill/>
+          <a:ln/>
+        </p:spPr>
+        <p:txBody>
+          <a:bodyPr wrap="square" lIns="0" tIns="0" rIns="0" bIns="0" rtlCol="0" anchor="t"/>
+          <a:lstStyle/>
+          <a:p>
+            <a:pPr algn="l" indent="0" marL="0">
+              <a:lnSpc>
+                <a:spcPct val="140000"/>
+              </a:lnSpc>
+              <a:buNone/>
+            </a:pPr>
+            <a:r>
+              <a:rPr lang="en-US" sz="1700" dirty="0">
+                <a:solidFill>
+                  <a:srgbClr val="A87A2E"/>
+                </a:solidFill>
+                <a:latin typeface="Libre Franklin" pitchFamily="34" charset="0"/>
+                <a:ea typeface="Libre Franklin" pitchFamily="34" charset="-122"/>
+                <a:cs typeface="Libre Franklin" pitchFamily="34" charset="-120"/>
+              </a:rPr>
+              <a:t>—</a:t>
+            </a:r>
+            <a:endParaRPr lang="en-US" sz="1700" dirty="0"/>
+          </a:p>
+        </p:txBody>
+      </p:sp>
+      <p:sp>
+        <p:nvSpPr>
+          <p:cNvPr id="18" name="Text 12"/>
+          <p:cNvSpPr/>
+          <p:nvPr/>
+        </p:nvSpPr>
+        <p:spPr>
+          <a:xfrm>
+            <a:off x="927100" y="4464685"/>
+            <a:ext cx="9156700" cy="753110"/>
+          </a:xfrm>
+          <a:prstGeom prst="rect">
+            <a:avLst/>
+          </a:prstGeom>
+          <a:noFill/>
+          <a:ln/>
+        </p:spPr>
+        <p:txBody>
+          <a:bodyPr wrap="square" lIns="0" tIns="0" rIns="0" bIns="0" rtlCol="0" anchor="t"/>
+          <a:lstStyle/>
+          <a:p>
+            <a:pPr algn="l" indent="0" marL="0">
+              <a:lnSpc>
+                <a:spcPct val="145000"/>
+              </a:lnSpc>
+              <a:buNone/>
+            </a:pPr>
+            <a:r>
+              <a:rPr lang="en-US" sz="1700" b="1" dirty="0">
+                <a:solidFill>
+                  <a:srgbClr val="332F2A"/>
+                </a:solidFill>
+                <a:latin typeface="Libre Franklin" pitchFamily="34" charset="0"/>
+                <a:ea typeface="Libre Franklin" pitchFamily="34" charset="-122"/>
+                <a:cs typeface="Libre Franklin" pitchFamily="34" charset="-120"/>
+              </a:rPr>
+              <a:t>Then run check_setup.py. </a:t>
+            </a:r>
+            <a:pPr algn="l" indent="0" marL="0">
+              <a:lnSpc>
+                <a:spcPct val="145000"/>
+              </a:lnSpc>
+              <a:buNone/>
+            </a:pPr>
+            <a:r>
+              <a:rPr lang="en-US" sz="1700" dirty="0">
+                <a:solidFill>
+                  <a:srgbClr val="332F2A"/>
+                </a:solidFill>
+                <a:latin typeface="Libre Franklin" pitchFamily="34" charset="0"/>
+                <a:ea typeface="Libre Franklin" pitchFamily="34" charset="-122"/>
+                <a:cs typeface="Libre Franklin" pitchFamily="34" charset="-120"/>
+              </a:rPr>
+              <a:t>Five checks. It names whichever one is not right yet. Do not move on until they are all green.</a:t>
+            </a:r>
+            <a:endParaRPr lang="en-US" sz="1700" dirty="0"/>
           </a:p>
         </p:txBody>
       </p:sp>
@@ -7359,15 +7710,63 @@
                 <a:ea typeface="IBM Plex Mono" pitchFamily="34" charset="-122"/>
                 <a:cs typeface="IBM Plex Mono" pitchFamily="34" charset="-120"/>
               </a:rPr>
-              <a:t>SECTION 02</a:t>
+              <a:t>WORKSHOP 03</a:t>
             </a:r>
             <a:endParaRPr lang="en-US" sz="1200" dirty="0"/>
           </a:p>
         </p:txBody>
       </p:sp>
-      <p:sp>
-        <p:nvSpPr>
-          <p:cNvPr id="3" name="Text 1"/>
+      <p:pic>
+        <p:nvPicPr>
+          <p:cNvPr id="3" name="Image 0" descr="icons/python.png">    </p:cNvPr>
+          <p:cNvPicPr>
+            <a:picLocks noChangeAspect="1"/>
+          </p:cNvPicPr>
+          <p:nvPr/>
+        </p:nvPicPr>
+        <p:blipFill>
+          <a:blip r:embed="rId1"/>
+          <a:stretch>
+            <a:fillRect/>
+          </a:stretch>
+        </p:blipFill>
+        <p:spPr>
+          <a:xfrm>
+            <a:off x="11087100" y="361950"/>
+            <a:ext cx="203200" cy="203200"/>
+          </a:xfrm>
+          <a:prstGeom prst="rect">
+            <a:avLst/>
+          </a:prstGeom>
+        </p:spPr>
+      </p:pic>
+      <p:pic>
+        <p:nvPicPr>
+          <p:cNvPr id="4" name="Image 1" descr="icons/googlegemini.png">    </p:cNvPr>
+          <p:cNvPicPr>
+            <a:picLocks noChangeAspect="1"/>
+          </p:cNvPicPr>
+          <p:nvPr/>
+        </p:nvPicPr>
+        <p:blipFill>
+          <a:blip r:embed="rId2"/>
+          <a:stretch>
+            <a:fillRect/>
+          </a:stretch>
+        </p:blipFill>
+        <p:spPr>
+          <a:xfrm>
+            <a:off x="11430000" y="361950"/>
+            <a:ext cx="203200" cy="203200"/>
+          </a:xfrm>
+          <a:prstGeom prst="rect">
+            <a:avLst/>
+          </a:prstGeom>
+        </p:spPr>
+      </p:pic>
+      <p:sp>
+        <p:nvSpPr>
+          <p:cNvPr id="5" name="Text 1"/>
           <p:cNvSpPr/>
           <p:nvPr/>
         </p:nvSpPr>
@@ -7401,7 +7800,7 @@
                 <a:ea typeface="Libre Franklin" pitchFamily="34" charset="-122"/>
                 <a:cs typeface="Libre Franklin" pitchFamily="34" charset="-120"/>
               </a:rPr>
-              <a:t>Why an agent invents things</a:t>
+              <a:t>The five checks</a:t>
             </a:r>
             <a:endParaRPr lang="en-US" sz="2800" dirty="0"/>
           </a:p>
@@ -7409,7 +7808,7 @@
       </p:sp>
       <p:sp>
         <p:nvSpPr>
-          <p:cNvPr id="4" name="Shape 2"/>
+          <p:cNvPr id="6" name="Shape 2"/>
           <p:cNvSpPr/>
           <p:nvPr/>
         </p:nvSpPr>
@@ -7429,7 +7828,7 @@
       </p:sp>
       <p:sp>
         <p:nvSpPr>
-          <p:cNvPr id="5" name="Text 3"/>
+          <p:cNvPr id="7" name="Text 3"/>
           <p:cNvSpPr/>
           <p:nvPr/>
         </p:nvSpPr>
@@ -7471,7 +7870,7 @@
       </p:sp>
       <p:sp>
         <p:nvSpPr>
-          <p:cNvPr id="6" name="Text 4"/>
+          <p:cNvPr id="8" name="Text 4"/>
           <p:cNvSpPr/>
           <p:nvPr/>
         </p:nvSpPr>
@@ -7513,56 +7912,301 @@
       </p:sp>
       <p:sp>
         <p:nvSpPr>
-          <p:cNvPr id="7" name="Text 5"/>
+          <p:cNvPr id="9" name="Shape 5"/>
           <p:cNvSpPr/>
           <p:nvPr/>
         </p:nvSpPr>
         <p:spPr>
           <a:xfrm>
             <a:off x="558800" y="1511300"/>
-            <a:ext cx="190500" cy="317500"/>
-          </a:xfrm>
-          <a:prstGeom prst="rect">
-            <a:avLst/>
-          </a:prstGeom>
-          <a:noFill/>
-          <a:ln/>
-        </p:spPr>
-        <p:txBody>
-          <a:bodyPr wrap="square" lIns="0" tIns="0" rIns="0" bIns="0" rtlCol="0" anchor="t"/>
-          <a:lstStyle/>
-          <a:p>
-            <a:pPr algn="l" indent="0" marL="0">
-              <a:lnSpc>
-                <a:spcPct val="140000"/>
-              </a:lnSpc>
-              <a:buNone/>
-            </a:pPr>
-            <a:r>
-              <a:rPr lang="en-US" sz="1700" dirty="0">
-                <a:solidFill>
-                  <a:srgbClr val="A87A2E"/>
+            <a:ext cx="6517030" cy="4572000"/>
+          </a:xfrm>
+          <a:prstGeom prst="rect">
+            <a:avLst/>
+          </a:prstGeom>
+          <a:solidFill>
+            <a:srgbClr val="F5F2EC"/>
+          </a:solidFill>
+          <a:ln w="6350">
+            <a:solidFill>
+              <a:srgbClr val="E1DED7"/>
+            </a:solidFill>
+            <a:prstDash val="solid"/>
+          </a:ln>
+        </p:spPr>
+      </p:sp>
+      <p:sp>
+        <p:nvSpPr>
+          <p:cNvPr id="10" name="Text 6"/>
+          <p:cNvSpPr/>
+          <p:nvPr/>
+        </p:nvSpPr>
+        <p:spPr>
+          <a:xfrm>
+            <a:off x="800100" y="1727200"/>
+            <a:ext cx="6034430" cy="4140200"/>
+          </a:xfrm>
+          <a:prstGeom prst="rect">
+            <a:avLst/>
+          </a:prstGeom>
+          <a:noFill/>
+          <a:ln/>
+        </p:spPr>
+        <p:txBody>
+          <a:bodyPr wrap="square" lIns="0" tIns="0" rIns="0" bIns="0" rtlCol="0" anchor="t"/>
+          <a:lstStyle/>
+          <a:p>
+            <a:pPr indent="0" marL="0">
+              <a:lnSpc>
+                <a:spcPct val="160000"/>
+              </a:lnSpc>
+              <a:buNone/>
+            </a:pPr>
+            <a:r>
+              <a:rPr lang="en-US" sz="1400" dirty="0">
+                <a:solidFill>
+                  <a:srgbClr val="332F2A"/>
+                </a:solidFill>
+                <a:latin typeface="IBM Plex Mono" pitchFamily="34" charset="0"/>
+                <a:ea typeface="IBM Plex Mono" pitchFamily="34" charset="-122"/>
+                <a:cs typeface="IBM Plex Mono" pitchFamily="34" charset="-120"/>
+              </a:rPr>
+              <a:t>$ python check_setup.py</a:t>
+            </a:r>
+            <a:endParaRPr lang="en-US" sz="1400" dirty="0"/>
+          </a:p>
+          <a:p>
+            <a:pPr indent="0" marL="0">
+              <a:lnSpc>
+                <a:spcPct val="160000"/>
+              </a:lnSpc>
+              <a:buNone/>
+            </a:pPr>
+            <a:endParaRPr lang="en-US" sz="1400" dirty="0"/>
+          </a:p>
+          <a:p>
+            <a:pPr indent="0" marL="0">
+              <a:lnSpc>
+                <a:spcPct val="160000"/>
+              </a:lnSpc>
+              <a:buNone/>
+            </a:pPr>
+            <a:r>
+              <a:rPr lang="en-US" sz="1400" dirty="0">
+                <a:solidFill>
+                  <a:srgbClr val="332F2A"/>
+                </a:solidFill>
+                <a:latin typeface="IBM Plex Mono" pitchFamily="34" charset="0"/>
+                <a:ea typeface="IBM Plex Mono" pitchFamily="34" charset="-122"/>
+                <a:cs typeface="IBM Plex Mono" pitchFamily="34" charset="-120"/>
+              </a:rPr>
+              <a:t>[PASS] Python version: 3.11</a:t>
+            </a:r>
+            <a:endParaRPr lang="en-US" sz="1400" dirty="0"/>
+          </a:p>
+          <a:p>
+            <a:pPr indent="0" marL="0">
+              <a:lnSpc>
+                <a:spcPct val="160000"/>
+              </a:lnSpc>
+              <a:buNone/>
+            </a:pPr>
+            <a:r>
+              <a:rPr lang="en-US" sz="1400" dirty="0">
+                <a:solidFill>
+                  <a:srgbClr val="332F2A"/>
+                </a:solidFill>
+                <a:latin typeface="IBM Plex Mono" pitchFamily="34" charset="0"/>
+                <a:ea typeface="IBM Plex Mono" pitchFamily="34" charset="-122"/>
+                <a:cs typeface="IBM Plex Mono" pitchFamily="34" charset="-120"/>
+              </a:rPr>
+              <a:t>[PASS] Packages: all 6 installed</a:t>
+            </a:r>
+            <a:endParaRPr lang="en-US" sz="1400" dirty="0"/>
+          </a:p>
+          <a:p>
+            <a:pPr indent="0" marL="0">
+              <a:lnSpc>
+                <a:spcPct val="160000"/>
+              </a:lnSpc>
+              <a:buNone/>
+            </a:pPr>
+            <a:r>
+              <a:rPr lang="en-US" sz="1400" dirty="0">
+                <a:solidFill>
+                  <a:srgbClr val="332F2A"/>
+                </a:solidFill>
+                <a:latin typeface="IBM Plex Mono" pitchFamily="34" charset="0"/>
+                <a:ea typeface="IBM Plex Mono" pitchFamily="34" charset="-122"/>
+                <a:cs typeface="IBM Plex Mono" pitchFamily="34" charset="-120"/>
+              </a:rPr>
+              <a:t>[PASS] API key present</a:t>
+            </a:r>
+            <a:endParaRPr lang="en-US" sz="1400" dirty="0"/>
+          </a:p>
+          <a:p>
+            <a:pPr indent="0" marL="0">
+              <a:lnSpc>
+                <a:spcPct val="160000"/>
+              </a:lnSpc>
+              <a:buNone/>
+            </a:pPr>
+            <a:r>
+              <a:rPr lang="en-US" sz="1400" dirty="0">
+                <a:solidFill>
+                  <a:srgbClr val="332F2A"/>
+                </a:solidFill>
+                <a:latin typeface="IBM Plex Mono" pitchFamily="34" charset="0"/>
+                <a:ea typeface="IBM Plex Mono" pitchFamily="34" charset="-122"/>
+                <a:cs typeface="IBM Plex Mono" pitchFamily="34" charset="-120"/>
+              </a:rPr>
+              <a:t>[PASS] API key works: Gemini</a:t>
+            </a:r>
+            <a:endParaRPr lang="en-US" sz="1400" dirty="0"/>
+          </a:p>
+          <a:p>
+            <a:pPr indent="0" marL="0">
+              <a:lnSpc>
+                <a:spcPct val="160000"/>
+              </a:lnSpc>
+              <a:buNone/>
+            </a:pPr>
+            <a:r>
+              <a:rPr lang="en-US" sz="1400" dirty="0">
+                <a:solidFill>
+                  <a:srgbClr val="332F2A"/>
+                </a:solidFill>
+                <a:latin typeface="IBM Plex Mono" pitchFamily="34" charset="0"/>
+                <a:ea typeface="IBM Plex Mono" pitchFamily="34" charset="-122"/>
+                <a:cs typeface="IBM Plex Mono" pitchFamily="34" charset="-120"/>
+              </a:rPr>
+              <a:t>       replied</a:t>
+            </a:r>
+            <a:endParaRPr lang="en-US" sz="1400" dirty="0"/>
+          </a:p>
+          <a:p>
+            <a:pPr indent="0" marL="0">
+              <a:lnSpc>
+                <a:spcPct val="160000"/>
+              </a:lnSpc>
+              <a:buNone/>
+            </a:pPr>
+            <a:r>
+              <a:rPr lang="en-US" sz="1400" dirty="0">
+                <a:solidFill>
+                  <a:srgbClr val="332F2A"/>
+                </a:solidFill>
+                <a:latin typeface="IBM Plex Mono" pitchFamily="34" charset="0"/>
+                <a:ea typeface="IBM Plex Mono" pitchFamily="34" charset="-122"/>
+                <a:cs typeface="IBM Plex Mono" pitchFamily="34" charset="-120"/>
+              </a:rPr>
+              <a:t>[PASS] Backup provider: both</a:t>
+            </a:r>
+            <a:endParaRPr lang="en-US" sz="1400" dirty="0"/>
+          </a:p>
+          <a:p>
+            <a:pPr indent="0" marL="0">
+              <a:lnSpc>
+                <a:spcPct val="160000"/>
+              </a:lnSpc>
+              <a:buNone/>
+            </a:pPr>
+            <a:r>
+              <a:rPr lang="en-US" sz="1400" dirty="0">
+                <a:solidFill>
+                  <a:srgbClr val="332F2A"/>
+                </a:solidFill>
+                <a:latin typeface="IBM Plex Mono" pitchFamily="34" charset="0"/>
+                <a:ea typeface="IBM Plex Mono" pitchFamily="34" charset="-122"/>
+                <a:cs typeface="IBM Plex Mono" pitchFamily="34" charset="-120"/>
+              </a:rPr>
+              <a:t>       providers configured</a:t>
+            </a:r>
+            <a:endParaRPr lang="en-US" sz="1400" dirty="0"/>
+          </a:p>
+          <a:p>
+            <a:pPr indent="0" marL="0">
+              <a:lnSpc>
+                <a:spcPct val="160000"/>
+              </a:lnSpc>
+              <a:buNone/>
+            </a:pPr>
+            <a:endParaRPr lang="en-US" sz="1400" dirty="0"/>
+          </a:p>
+          <a:p>
+            <a:pPr indent="0" marL="0">
+              <a:lnSpc>
+                <a:spcPct val="160000"/>
+              </a:lnSpc>
+              <a:buNone/>
+            </a:pPr>
+            <a:r>
+              <a:rPr lang="en-US" sz="1400" dirty="0">
+                <a:solidFill>
+                  <a:srgbClr val="332F2A"/>
+                </a:solidFill>
+                <a:latin typeface="IBM Plex Mono" pitchFamily="34" charset="0"/>
+                <a:ea typeface="IBM Plex Mono" pitchFamily="34" charset="-122"/>
+                <a:cs typeface="IBM Plex Mono" pitchFamily="34" charset="-120"/>
+              </a:rPr>
+              <a:t>ALL CHECKS PASSED</a:t>
+            </a:r>
+            <a:endParaRPr lang="en-US" sz="1400" dirty="0"/>
+          </a:p>
+        </p:txBody>
+      </p:sp>
+      <p:sp>
+        <p:nvSpPr>
+          <p:cNvPr id="11" name="Text 7"/>
+          <p:cNvSpPr/>
+          <p:nvPr/>
+        </p:nvSpPr>
+        <p:spPr>
+          <a:xfrm>
+            <a:off x="7431430" y="1511300"/>
+            <a:ext cx="4201770" cy="1305560"/>
+          </a:xfrm>
+          <a:prstGeom prst="rect">
+            <a:avLst/>
+          </a:prstGeom>
+          <a:noFill/>
+          <a:ln/>
+        </p:spPr>
+        <p:txBody>
+          <a:bodyPr wrap="square" lIns="0" tIns="0" rIns="0" bIns="0" rtlCol="0" anchor="t"/>
+          <a:lstStyle/>
+          <a:p>
+            <a:pPr algn="l" indent="0" marL="0">
+              <a:lnSpc>
+                <a:spcPct val="145000"/>
+              </a:lnSpc>
+              <a:buNone/>
+            </a:pPr>
+            <a:r>
+              <a:rPr lang="en-US" sz="1600" dirty="0">
+                <a:solidFill>
+                  <a:srgbClr val="332F2A"/>
                 </a:solidFill>
                 <a:latin typeface="Libre Franklin" pitchFamily="34" charset="0"/>
                 <a:ea typeface="Libre Franklin" pitchFamily="34" charset="-122"/>
                 <a:cs typeface="Libre Franklin" pitchFamily="34" charset="-120"/>
               </a:rPr>
-              <a:t>—</a:t>
-            </a:r>
-            <a:endParaRPr lang="en-US" sz="1700" dirty="0"/>
-          </a:p>
-        </p:txBody>
-      </p:sp>
-      <p:sp>
-        <p:nvSpPr>
-          <p:cNvPr id="8" name="Text 6"/>
-          <p:cNvSpPr/>
-          <p:nvPr/>
-        </p:nvSpPr>
-        <p:spPr>
-          <a:xfrm>
-            <a:off x="927100" y="1511300"/>
-            <a:ext cx="9156700" cy="753110"/>
+              <a:t>Five checks, in the order they can fail. A failing line names the fix; it never just tells you something is wrong.</a:t>
+            </a:r>
+            <a:endParaRPr lang="en-US" sz="1600" dirty="0"/>
+          </a:p>
+        </p:txBody>
+      </p:sp>
+      <p:sp>
+        <p:nvSpPr>
+          <p:cNvPr id="12" name="Text 8"/>
+          <p:cNvSpPr/>
+          <p:nvPr/>
+        </p:nvSpPr>
+        <p:spPr>
+          <a:xfrm>
+            <a:off x="7431430" y="2943860"/>
+            <a:ext cx="4201770" cy="1305560"/>
           </a:xfrm>
           <a:prstGeom prst="rect">
             <a:avLst/>
@@ -7581,24 +8225,69 @@
               <a:buNone/>
             </a:pPr>
             <a:r>
-              <a:rPr lang="en-US" sz="1700" b="1" dirty="0">
-                <a:solidFill>
-                  <a:srgbClr val="332F2A"/>
+              <a:rPr lang="en-US" sz="1600" dirty="0">
+                <a:solidFill>
+                  <a:srgbClr val="77726A"/>
                 </a:solidFill>
                 <a:latin typeface="Libre Franklin" pitchFamily="34" charset="0"/>
                 <a:ea typeface="Libre Franklin" pitchFamily="34" charset="-122"/>
                 <a:cs typeface="Libre Franklin" pitchFamily="34" charset="-120"/>
               </a:rPr>
-              <a:t>It predicts, it does not look up. </a:t>
-            </a:r>
-            <a:pPr algn="l" indent="0" marL="0">
-              <a:lnSpc>
-                <a:spcPct val="145000"/>
-              </a:lnSpc>
-              <a:buNone/>
-            </a:pPr>
-            <a:r>
-              <a:rPr lang="en-US" sz="1700" dirty="0">
+              <a:t>Still stuck after ten minutes? Ask a neighbour before you ask me. TROUBLESHOOTING.md carries the same list with fixes.</a:t>
+            </a:r>
+            <a:endParaRPr lang="en-US" sz="1600" dirty="0"/>
+          </a:p>
+        </p:txBody>
+      </p:sp>
+      <p:sp>
+        <p:nvSpPr>
+          <p:cNvPr id="13" name="Shape 9"/>
+          <p:cNvSpPr/>
+          <p:nvPr/>
+        </p:nvSpPr>
+        <p:spPr>
+          <a:xfrm>
+            <a:off x="7431430" y="5384800"/>
+            <a:ext cx="12700" cy="698500"/>
+          </a:xfrm>
+          <a:prstGeom prst="rect">
+            <a:avLst/>
+          </a:prstGeom>
+          <a:solidFill>
+            <a:srgbClr val="A87A2E"/>
+          </a:solidFill>
+          <a:ln/>
+        </p:spPr>
+      </p:sp>
+      <p:sp>
+        <p:nvSpPr>
+          <p:cNvPr id="14" name="Text 10"/>
+          <p:cNvSpPr/>
+          <p:nvPr/>
+        </p:nvSpPr>
+        <p:spPr>
+          <a:xfrm>
+            <a:off x="7596530" y="5416550"/>
+            <a:ext cx="4036670" cy="698500"/>
+          </a:xfrm>
+          <a:prstGeom prst="rect">
+            <a:avLst/>
+          </a:prstGeom>
+          <a:noFill/>
+          <a:ln/>
+        </p:spPr>
+        <p:txBody>
+          <a:bodyPr wrap="square" lIns="0" tIns="0" rIns="0" bIns="0" rtlCol="0" anchor="t"/>
+          <a:lstStyle/>
+          <a:p>
+            <a:pPr algn="l" indent="0" marL="0">
+              <a:lnSpc>
+                <a:spcPct val="140000"/>
+              </a:lnSpc>
+              <a:buNone/>
+            </a:pPr>
+            <a:r>
+              <a:rPr lang="en-US" sz="1500" dirty="0">
                 <a:solidFill>
                   <a:srgbClr val="332F2A"/>
                 </a:solidFill>
@@ -7606,295 +8295,9 @@
                 <a:ea typeface="Libre Franklin" pitchFamily="34" charset="-122"/>
                 <a:cs typeface="Libre Franklin" pitchFamily="34" charset="-120"/>
               </a:rPr>
-              <a:t>The reply is the text most likely to follow your request, not a fact retrieved from anywhere.</a:t>
-            </a:r>
-            <a:endParaRPr lang="en-US" sz="1700" dirty="0"/>
-          </a:p>
-        </p:txBody>
-      </p:sp>
-      <p:sp>
-        <p:nvSpPr>
-          <p:cNvPr id="9" name="Text 7"/>
-          <p:cNvSpPr/>
-          <p:nvPr/>
-        </p:nvSpPr>
-        <p:spPr>
-          <a:xfrm>
-            <a:off x="558800" y="2391410"/>
-            <a:ext cx="190500" cy="317500"/>
-          </a:xfrm>
-          <a:prstGeom prst="rect">
-            <a:avLst/>
-          </a:prstGeom>
-          <a:noFill/>
-          <a:ln/>
-        </p:spPr>
-        <p:txBody>
-          <a:bodyPr wrap="square" lIns="0" tIns="0" rIns="0" bIns="0" rtlCol="0" anchor="t"/>
-          <a:lstStyle/>
-          <a:p>
-            <a:pPr algn="l" indent="0" marL="0">
-              <a:lnSpc>
-                <a:spcPct val="140000"/>
-              </a:lnSpc>
-              <a:buNone/>
-            </a:pPr>
-            <a:r>
-              <a:rPr lang="en-US" sz="1700" dirty="0">
-                <a:solidFill>
-                  <a:srgbClr val="A87A2E"/>
-                </a:solidFill>
-                <a:latin typeface="Libre Franklin" pitchFamily="34" charset="0"/>
-                <a:ea typeface="Libre Franklin" pitchFamily="34" charset="-122"/>
-                <a:cs typeface="Libre Franklin" pitchFamily="34" charset="-120"/>
-              </a:rPr>
-              <a:t>—</a:t>
-            </a:r>
-            <a:endParaRPr lang="en-US" sz="1700" dirty="0"/>
-          </a:p>
-        </p:txBody>
-      </p:sp>
-      <p:sp>
-        <p:nvSpPr>
-          <p:cNvPr id="10" name="Text 8"/>
-          <p:cNvSpPr/>
-          <p:nvPr/>
-        </p:nvSpPr>
-        <p:spPr>
-          <a:xfrm>
-            <a:off x="927100" y="2391410"/>
-            <a:ext cx="9156700" cy="753110"/>
-          </a:xfrm>
-          <a:prstGeom prst="rect">
-            <a:avLst/>
-          </a:prstGeom>
-          <a:noFill/>
-          <a:ln/>
-        </p:spPr>
-        <p:txBody>
-          <a:bodyPr wrap="square" lIns="0" tIns="0" rIns="0" bIns="0" rtlCol="0" anchor="t"/>
-          <a:lstStyle/>
-          <a:p>
-            <a:pPr algn="l" indent="0" marL="0">
-              <a:lnSpc>
-                <a:spcPct val="145000"/>
-              </a:lnSpc>
-              <a:buNone/>
-            </a:pPr>
-            <a:r>
-              <a:rPr lang="en-US" sz="1700" b="1" dirty="0">
-                <a:solidFill>
-                  <a:srgbClr val="332F2A"/>
-                </a:solidFill>
-                <a:latin typeface="Libre Franklin" pitchFamily="34" charset="0"/>
-                <a:ea typeface="Libre Franklin" pitchFamily="34" charset="-122"/>
-                <a:cs typeface="Libre Franklin" pitchFamily="34" charset="-120"/>
-              </a:rPr>
-              <a:t>A plausible function looks real. </a:t>
-            </a:r>
-            <a:pPr algn="l" indent="0" marL="0">
-              <a:lnSpc>
-                <a:spcPct val="145000"/>
-              </a:lnSpc>
-              <a:buNone/>
-            </a:pPr>
-            <a:r>
-              <a:rPr lang="en-US" sz="1700" dirty="0">
-                <a:solidFill>
-                  <a:srgbClr val="332F2A"/>
-                </a:solidFill>
-                <a:latin typeface="Libre Franklin" pitchFamily="34" charset="0"/>
-                <a:ea typeface="Libre Franklin" pitchFamily="34" charset="-122"/>
-                <a:cs typeface="Libre Franklin" pitchFamily="34" charset="-120"/>
-              </a:rPr>
-              <a:t>A library call that ought to exist looks exactly like one that does.</a:t>
-            </a:r>
-            <a:endParaRPr lang="en-US" sz="1700" dirty="0"/>
-          </a:p>
-        </p:txBody>
-      </p:sp>
-      <p:sp>
-        <p:nvSpPr>
-          <p:cNvPr id="11" name="Text 9"/>
-          <p:cNvSpPr/>
-          <p:nvPr/>
-        </p:nvSpPr>
-        <p:spPr>
-          <a:xfrm>
-            <a:off x="558800" y="3271520"/>
-            <a:ext cx="190500" cy="317500"/>
-          </a:xfrm>
-          <a:prstGeom prst="rect">
-            <a:avLst/>
-          </a:prstGeom>
-          <a:noFill/>
-          <a:ln/>
-        </p:spPr>
-        <p:txBody>
-          <a:bodyPr wrap="square" lIns="0" tIns="0" rIns="0" bIns="0" rtlCol="0" anchor="t"/>
-          <a:lstStyle/>
-          <a:p>
-            <a:pPr algn="l" indent="0" marL="0">
-              <a:lnSpc>
-                <a:spcPct val="140000"/>
-              </a:lnSpc>
-              <a:buNone/>
-            </a:pPr>
-            <a:r>
-              <a:rPr lang="en-US" sz="1700" dirty="0">
-                <a:solidFill>
-                  <a:srgbClr val="A87A2E"/>
-                </a:solidFill>
-                <a:latin typeface="Libre Franklin" pitchFamily="34" charset="0"/>
-                <a:ea typeface="Libre Franklin" pitchFamily="34" charset="-122"/>
-                <a:cs typeface="Libre Franklin" pitchFamily="34" charset="-120"/>
-              </a:rPr>
-              <a:t>—</a:t>
-            </a:r>
-            <a:endParaRPr lang="en-US" sz="1700" dirty="0"/>
-          </a:p>
-        </p:txBody>
-      </p:sp>
-      <p:sp>
-        <p:nvSpPr>
-          <p:cNvPr id="12" name="Text 10"/>
-          <p:cNvSpPr/>
-          <p:nvPr/>
-        </p:nvSpPr>
-        <p:spPr>
-          <a:xfrm>
-            <a:off x="927100" y="3271520"/>
-            <a:ext cx="9156700" cy="753110"/>
-          </a:xfrm>
-          <a:prstGeom prst="rect">
-            <a:avLst/>
-          </a:prstGeom>
-          <a:noFill/>
-          <a:ln/>
-        </p:spPr>
-        <p:txBody>
-          <a:bodyPr wrap="square" lIns="0" tIns="0" rIns="0" bIns="0" rtlCol="0" anchor="t"/>
-          <a:lstStyle/>
-          <a:p>
-            <a:pPr algn="l" indent="0" marL="0">
-              <a:lnSpc>
-                <a:spcPct val="145000"/>
-              </a:lnSpc>
-              <a:buNone/>
-            </a:pPr>
-            <a:r>
-              <a:rPr lang="en-US" sz="1700" b="1" dirty="0">
-                <a:solidFill>
-                  <a:srgbClr val="332F2A"/>
-                </a:solidFill>
-                <a:latin typeface="Libre Franklin" pitchFamily="34" charset="0"/>
-                <a:ea typeface="Libre Franklin" pitchFamily="34" charset="-122"/>
-                <a:cs typeface="Libre Franklin" pitchFamily="34" charset="-120"/>
-              </a:rPr>
-              <a:t>It cannot warn you. </a:t>
-            </a:r>
-            <a:pPr algn="l" indent="0" marL="0">
-              <a:lnSpc>
-                <a:spcPct val="145000"/>
-              </a:lnSpc>
-              <a:buNone/>
-            </a:pPr>
-            <a:r>
-              <a:rPr lang="en-US" sz="1700" dirty="0">
-                <a:solidFill>
-                  <a:srgbClr val="332F2A"/>
-                </a:solidFill>
-                <a:latin typeface="Libre Franklin" pitchFamily="34" charset="0"/>
-                <a:ea typeface="Libre Franklin" pitchFamily="34" charset="-122"/>
-                <a:cs typeface="Libre Franklin" pitchFamily="34" charset="-120"/>
-              </a:rPr>
-              <a:t>Not knowing and knowing feel identical from the inside, so both come out equally confident.</a:t>
-            </a:r>
-            <a:endParaRPr lang="en-US" sz="1700" dirty="0"/>
-          </a:p>
-        </p:txBody>
-      </p:sp>
-      <p:sp>
-        <p:nvSpPr>
-          <p:cNvPr id="13" name="Text 11"/>
-          <p:cNvSpPr/>
-          <p:nvPr/>
-        </p:nvSpPr>
-        <p:spPr>
-          <a:xfrm>
-            <a:off x="558800" y="4151630"/>
-            <a:ext cx="190500" cy="317500"/>
-          </a:xfrm>
-          <a:prstGeom prst="rect">
-            <a:avLst/>
-          </a:prstGeom>
-          <a:noFill/>
-          <a:ln/>
-        </p:spPr>
-        <p:txBody>
-          <a:bodyPr wrap="square" lIns="0" tIns="0" rIns="0" bIns="0" rtlCol="0" anchor="t"/>
-          <a:lstStyle/>
-          <a:p>
-            <a:pPr algn="l" indent="0" marL="0">
-              <a:lnSpc>
-                <a:spcPct val="140000"/>
-              </a:lnSpc>
-              <a:buNone/>
-            </a:pPr>
-            <a:r>
-              <a:rPr lang="en-US" sz="1700" dirty="0">
-                <a:solidFill>
-                  <a:srgbClr val="A87A2E"/>
-                </a:solidFill>
-                <a:latin typeface="Libre Franklin" pitchFamily="34" charset="0"/>
-                <a:ea typeface="Libre Franklin" pitchFamily="34" charset="-122"/>
-                <a:cs typeface="Libre Franklin" pitchFamily="34" charset="-120"/>
-              </a:rPr>
-              <a:t>—</a:t>
-            </a:r>
-            <a:endParaRPr lang="en-US" sz="1700" dirty="0"/>
-          </a:p>
-        </p:txBody>
-      </p:sp>
-      <p:sp>
-        <p:nvSpPr>
-          <p:cNvPr id="14" name="Text 12"/>
-          <p:cNvSpPr/>
-          <p:nvPr/>
-        </p:nvSpPr>
-        <p:spPr>
-          <a:xfrm>
-            <a:off x="927100" y="4151630"/>
-            <a:ext cx="9156700" cy="753110"/>
-          </a:xfrm>
-          <a:prstGeom prst="rect">
-            <a:avLst/>
-          </a:prstGeom>
-          <a:noFill/>
-          <a:ln/>
-        </p:spPr>
-        <p:txBody>
-          <a:bodyPr wrap="square" lIns="0" tIns="0" rIns="0" bIns="0" rtlCol="0" anchor="t"/>
-          <a:lstStyle/>
-          <a:p>
-            <a:pPr algn="l" indent="0" marL="0">
-              <a:lnSpc>
-                <a:spcPct val="145000"/>
-              </a:lnSpc>
-              <a:buNone/>
-            </a:pPr>
-            <a:r>
-              <a:rPr lang="en-US" sz="1700" dirty="0">
-                <a:solidFill>
-                  <a:srgbClr val="332F2A"/>
-                </a:solidFill>
-                <a:latin typeface="Libre Franklin" pitchFamily="34" charset="0"/>
-                <a:ea typeface="Libre Franklin" pitchFamily="34" charset="-122"/>
-                <a:cs typeface="Libre Franklin" pitchFamily="34" charset="-120"/>
-              </a:rPr>
-              <a:t>Which leaves one rule: you check by running something, never by reading something that sounds right.</a:t>
-            </a:r>
-            <a:endParaRPr lang="en-US" sz="1700" dirty="0"/>
+              <a:t>Nothing installs on the lab PC. The machine you are working on is in the browser.</a:t>
+            </a:r>
+            <a:endParaRPr lang="en-US" sz="1500" dirty="0"/>
           </a:p>
         </p:txBody>
       </p:sp>
@@ -7912,7 +8315,7 @@
     <p:bg>
       <p:bgPr>
         <a:solidFill>
-          <a:srgbClr val="F5F2EC"/>
+          <a:srgbClr val="FCFBF8"/>
         </a:solidFill>
       </p:bgPr>
     </p:bg>
@@ -7938,8 +8341,8 @@
         </p:nvSpPr>
         <p:spPr>
           <a:xfrm>
-            <a:off x="558800" y="2286000"/>
-            <a:ext cx="11074400" cy="254000"/>
+            <a:off x="558800" y="355600"/>
+            <a:ext cx="11074400" cy="215900"/>
           </a:xfrm>
           <a:prstGeom prst="rect">
             <a:avLst/>
@@ -7958,49 +8361,121 @@
               <a:buNone/>
             </a:pPr>
             <a:r>
-              <a:rPr lang="en-US" sz="1300" spc="182" kern="0" dirty="0">
-                <a:solidFill>
-                  <a:srgbClr val="A87A2E"/>
-                </a:solidFill>
-                <a:latin typeface="IBM Plex Mono" pitchFamily="34" charset="0"/>
-                <a:ea typeface="IBM Plex Mono" pitchFamily="34" charset="-122"/>
-                <a:cs typeface="IBM Plex Mono" pitchFamily="34" charset="-120"/>
-              </a:rPr>
-              <a:t>SECTION 03</a:t>
-            </a:r>
-            <a:endParaRPr lang="en-US" sz="1300" dirty="0"/>
-          </a:p>
-        </p:txBody>
-      </p:sp>
-      <p:sp>
-        <p:nvSpPr>
-          <p:cNvPr id="3" name="Text 1"/>
-          <p:cNvSpPr/>
-          <p:nvPr/>
-        </p:nvSpPr>
-        <p:spPr>
-          <a:xfrm>
-            <a:off x="558800" y="2667000"/>
-            <a:ext cx="8255000" cy="1206500"/>
-          </a:xfrm>
-          <a:prstGeom prst="rect">
-            <a:avLst/>
-          </a:prstGeom>
-          <a:noFill/>
-          <a:ln/>
-        </p:spPr>
-        <p:txBody>
-          <a:bodyPr wrap="square" lIns="0" tIns="0" rIns="0" bIns="0" rtlCol="0" anchor="t"/>
-          <a:lstStyle/>
-          <a:p>
-            <a:pPr algn="l" indent="0" marL="0">
-              <a:lnSpc>
-                <a:spcPct val="108000"/>
-              </a:lnSpc>
-              <a:buNone/>
-            </a:pPr>
-            <a:r>
-              <a:rPr lang="en-US" sz="4000" b="1" dirty="0">
+              <a:rPr lang="en-US" sz="1200" spc="168" kern="0" dirty="0">
+                <a:solidFill>
+                  <a:srgbClr val="77726A"/>
+                </a:solidFill>
+                <a:latin typeface="IBM Plex Mono" pitchFamily="34" charset="0"/>
+                <a:ea typeface="IBM Plex Mono" pitchFamily="34" charset="-122"/>
+                <a:cs typeface="IBM Plex Mono" pitchFamily="34" charset="-120"/>
+              </a:rPr>
+              <a:t>WORKSHOP 03</a:t>
+            </a:r>
+            <a:endParaRPr lang="en-US" sz="1200" dirty="0"/>
+          </a:p>
+        </p:txBody>
+      </p:sp>
+      <p:pic>
+        <p:nvPicPr>
+          <p:cNvPr id="3" name="Image 0" descr="icons/cline.png">    </p:cNvPr>
+          <p:cNvPicPr>
+            <a:picLocks noChangeAspect="1"/>
+          </p:cNvPicPr>
+          <p:nvPr/>
+        </p:nvPicPr>
+        <p:blipFill>
+          <a:blip r:embed="rId1"/>
+          <a:stretch>
+            <a:fillRect/>
+          </a:stretch>
+        </p:blipFill>
+        <p:spPr>
+          <a:xfrm>
+            <a:off x="10744200" y="361950"/>
+            <a:ext cx="203200" cy="203200"/>
+          </a:xfrm>
+          <a:prstGeom prst="rect">
+            <a:avLst/>
+          </a:prstGeom>
+        </p:spPr>
+      </p:pic>
+      <p:pic>
+        <p:nvPicPr>
+          <p:cNvPr id="4" name="Image 1" descr="icons/mistralai.png">    </p:cNvPr>
+          <p:cNvPicPr>
+            <a:picLocks noChangeAspect="1"/>
+          </p:cNvPicPr>
+          <p:nvPr/>
+        </p:nvPicPr>
+        <p:blipFill>
+          <a:blip r:embed="rId2"/>
+          <a:stretch>
+            <a:fillRect/>
+          </a:stretch>
+        </p:blipFill>
+        <p:spPr>
+          <a:xfrm>
+            <a:off x="11087100" y="361950"/>
+            <a:ext cx="203200" cy="203200"/>
+          </a:xfrm>
+          <a:prstGeom prst="rect">
+            <a:avLst/>
+          </a:prstGeom>
+        </p:spPr>
+      </p:pic>
+      <p:pic>
+        <p:nvPicPr>
+          <p:cNvPr id="5" name="Image 2" descr="icons/googlegemini.png">    </p:cNvPr>
+          <p:cNvPicPr>
+            <a:picLocks noChangeAspect="1"/>
+          </p:cNvPicPr>
+          <p:nvPr/>
+        </p:nvPicPr>
+        <p:blipFill>
+          <a:blip r:embed="rId3"/>
+          <a:stretch>
+            <a:fillRect/>
+          </a:stretch>
+        </p:blipFill>
+        <p:spPr>
+          <a:xfrm>
+            <a:off x="11430000" y="361950"/>
+            <a:ext cx="203200" cy="203200"/>
+          </a:xfrm>
+          <a:prstGeom prst="rect">
+            <a:avLst/>
+          </a:prstGeom>
+        </p:spPr>
+      </p:pic>
+      <p:sp>
+        <p:nvSpPr>
+          <p:cNvPr id="6" name="Text 1"/>
+          <p:cNvSpPr/>
+          <p:nvPr/>
+        </p:nvSpPr>
+        <p:spPr>
+          <a:xfrm>
+            <a:off x="558800" y="635000"/>
+            <a:ext cx="11074400" cy="508000"/>
+          </a:xfrm>
+          <a:prstGeom prst="rect">
+            <a:avLst/>
+          </a:prstGeom>
+          <a:noFill/>
+          <a:ln/>
+        </p:spPr>
+        <p:txBody>
+          <a:bodyPr wrap="square" lIns="0" tIns="0" rIns="0" bIns="0" rtlCol="0" anchor="t"/>
+          <a:lstStyle/>
+          <a:p>
+            <a:pPr algn="l" indent="0" marL="0">
+              <a:lnSpc>
+                <a:spcPct val="110000"/>
+              </a:lnSpc>
+              <a:buNone/>
+            </a:pPr>
+            <a:r>
+              <a:rPr lang="en-US" sz="2800" b="1" dirty="0">
                 <a:solidFill>
                   <a:srgbClr val="332F2A"/>
                 </a:solidFill>
@@ -8008,22 +8483,126 @@
                 <a:ea typeface="Libre Franklin" pitchFamily="34" charset="-122"/>
                 <a:cs typeface="Libre Franklin" pitchFamily="34" charset="-120"/>
               </a:rPr>
-              <a:t>Warm-up — build it by asking</a:t>
-            </a:r>
-            <a:endParaRPr lang="en-US" sz="4000" dirty="0"/>
-          </a:p>
-        </p:txBody>
-      </p:sp>
-      <p:sp>
-        <p:nvSpPr>
-          <p:cNvPr id="4" name="Text 2"/>
-          <p:cNvSpPr/>
-          <p:nvPr/>
-        </p:nvSpPr>
-        <p:spPr>
-          <a:xfrm>
-            <a:off x="558800" y="4064000"/>
-            <a:ext cx="6985000" cy="635000"/>
+              <a:t>Cline needs its own key</a:t>
+            </a:r>
+            <a:endParaRPr lang="en-US" sz="2800" dirty="0"/>
+          </a:p>
+        </p:txBody>
+      </p:sp>
+      <p:sp>
+        <p:nvSpPr>
+          <p:cNvPr id="7" name="Shape 2"/>
+          <p:cNvSpPr/>
+          <p:nvPr/>
+        </p:nvSpPr>
+        <p:spPr>
+          <a:xfrm>
+            <a:off x="558800" y="1181100"/>
+            <a:ext cx="11074400" cy="6350"/>
+          </a:xfrm>
+          <a:prstGeom prst="rect">
+            <a:avLst/>
+          </a:prstGeom>
+          <a:solidFill>
+            <a:srgbClr val="E1DED7"/>
+          </a:solidFill>
+          <a:ln/>
+        </p:spPr>
+      </p:sp>
+      <p:sp>
+        <p:nvSpPr>
+          <p:cNvPr id="8" name="Text 3"/>
+          <p:cNvSpPr/>
+          <p:nvPr/>
+        </p:nvSpPr>
+        <p:spPr>
+          <a:xfrm>
+            <a:off x="558800" y="6337300"/>
+            <a:ext cx="9804400" cy="215900"/>
+          </a:xfrm>
+          <a:prstGeom prst="rect">
+            <a:avLst/>
+          </a:prstGeom>
+          <a:noFill/>
+          <a:ln/>
+        </p:spPr>
+        <p:txBody>
+          <a:bodyPr wrap="square" lIns="0" tIns="0" rIns="0" bIns="0" rtlCol="0" anchor="t"/>
+          <a:lstStyle/>
+          <a:p>
+            <a:pPr algn="l" indent="0" marL="0">
+              <a:lnSpc>
+                <a:spcPct val="145000"/>
+              </a:lnSpc>
+              <a:buNone/>
+            </a:pPr>
+            <a:r>
+              <a:rPr lang="en-US" sz="1200" dirty="0">
+                <a:solidFill>
+                  <a:srgbClr val="99948B"/>
+                </a:solidFill>
+                <a:latin typeface="IBM Plex Mono" pitchFamily="34" charset="0"/>
+                <a:ea typeface="IBM Plex Mono" pitchFamily="34" charset="-122"/>
+                <a:cs typeface="IBM Plex Mono" pitchFamily="34" charset="-120"/>
+              </a:rPr>
+              <a:t>AI for Software Development · Session 1</a:t>
+            </a:r>
+            <a:endParaRPr lang="en-US" sz="1200" dirty="0"/>
+          </a:p>
+        </p:txBody>
+      </p:sp>
+      <p:sp>
+        <p:nvSpPr>
+          <p:cNvPr id="9" name="Text 4"/>
+          <p:cNvSpPr/>
+          <p:nvPr/>
+        </p:nvSpPr>
+        <p:spPr>
+          <a:xfrm>
+            <a:off x="10363200" y="6337300"/>
+            <a:ext cx="1270000" cy="215900"/>
+          </a:xfrm>
+          <a:prstGeom prst="rect">
+            <a:avLst/>
+          </a:prstGeom>
+          <a:noFill/>
+          <a:ln/>
+        </p:spPr>
+        <p:txBody>
+          <a:bodyPr wrap="square" lIns="0" tIns="0" rIns="0" bIns="0" rtlCol="0" anchor="t"/>
+          <a:lstStyle/>
+          <a:p>
+            <a:pPr algn="r" indent="0" marL="0">
+              <a:lnSpc>
+                <a:spcPct val="145000"/>
+              </a:lnSpc>
+              <a:buNone/>
+            </a:pPr>
+            <a:r>
+              <a:rPr lang="en-US" sz="1200" dirty="0">
+                <a:solidFill>
+                  <a:srgbClr val="99948B"/>
+                </a:solidFill>
+                <a:latin typeface="IBM Plex Mono" pitchFamily="34" charset="0"/>
+                <a:ea typeface="IBM Plex Mono" pitchFamily="34" charset="-122"/>
+                <a:cs typeface="IBM Plex Mono" pitchFamily="34" charset="-120"/>
+              </a:rPr>
+              <a:t>15</a:t>
+            </a:r>
+            <a:endParaRPr lang="en-US" sz="1200" dirty="0"/>
+          </a:p>
+        </p:txBody>
+      </p:sp>
+      <p:sp>
+        <p:nvSpPr>
+          <p:cNvPr id="10" name="Text 5"/>
+          <p:cNvSpPr/>
+          <p:nvPr/>
+        </p:nvSpPr>
+        <p:spPr>
+          <a:xfrm>
+            <a:off x="558800" y="1511300"/>
+            <a:ext cx="190500" cy="317500"/>
           </a:xfrm>
           <a:prstGeom prst="rect">
             <a:avLst/>
@@ -8044,13 +8623,358 @@
             <a:r>
               <a:rPr lang="en-US" sz="1700" dirty="0">
                 <a:solidFill>
-                  <a:srgbClr val="77726A"/>
+                  <a:srgbClr val="A87A2E"/>
                 </a:solidFill>
                 <a:latin typeface="Libre Franklin" pitchFamily="34" charset="0"/>
                 <a:ea typeface="Libre Franklin" pitchFamily="34" charset="-122"/>
                 <a:cs typeface="Libre Franklin" pitchFamily="34" charset="-120"/>
               </a:rPr>
-              <a:t>No plan, no specification. Ask for the whole thing and see what arrives. 25 minutes.</a:t>
+              <a:t>—</a:t>
+            </a:r>
+            <a:endParaRPr lang="en-US" sz="1700" dirty="0"/>
+          </a:p>
+        </p:txBody>
+      </p:sp>
+      <p:sp>
+        <p:nvSpPr>
+          <p:cNvPr id="11" name="Text 6"/>
+          <p:cNvSpPr/>
+          <p:nvPr/>
+        </p:nvSpPr>
+        <p:spPr>
+          <a:xfrm>
+            <a:off x="927100" y="1511300"/>
+            <a:ext cx="9156700" cy="753110"/>
+          </a:xfrm>
+          <a:prstGeom prst="rect">
+            <a:avLst/>
+          </a:prstGeom>
+          <a:noFill/>
+          <a:ln/>
+        </p:spPr>
+        <p:txBody>
+          <a:bodyPr wrap="square" lIns="0" tIns="0" rIns="0" bIns="0" rtlCol="0" anchor="t"/>
+          <a:lstStyle/>
+          <a:p>
+            <a:pPr algn="l" indent="0" marL="0">
+              <a:lnSpc>
+                <a:spcPct val="145000"/>
+              </a:lnSpc>
+              <a:buNone/>
+            </a:pPr>
+            <a:r>
+              <a:rPr lang="en-US" sz="1700" b="1" dirty="0">
+                <a:solidFill>
+                  <a:srgbClr val="332F2A"/>
+                </a:solidFill>
+                <a:latin typeface="Libre Franklin" pitchFamily="34" charset="0"/>
+                <a:ea typeface="Libre Franklin" pitchFamily="34" charset="-122"/>
+                <a:cs typeface="Libre Franklin" pitchFamily="34" charset="-120"/>
+              </a:rPr>
+              <a:t>.env is for your app. </a:t>
+            </a:r>
+            <a:pPr algn="l" indent="0" marL="0">
+              <a:lnSpc>
+                <a:spcPct val="145000"/>
+              </a:lnSpc>
+              <a:buNone/>
+            </a:pPr>
+            <a:r>
+              <a:rPr lang="en-US" sz="1700" dirty="0">
+                <a:solidFill>
+                  <a:srgbClr val="332F2A"/>
+                </a:solidFill>
+                <a:latin typeface="Libre Franklin" pitchFamily="34" charset="0"/>
+                <a:ea typeface="Libre Franklin" pitchFamily="34" charset="-122"/>
+                <a:cs typeface="Libre Franklin" pitchFamily="34" charset="-120"/>
+              </a:rPr>
+              <a:t>check_setup.py and core/llm.py read it. Cline never does — separate program, separate settings, its own copy of the key.</a:t>
+            </a:r>
+            <a:endParaRPr lang="en-US" sz="1700" dirty="0"/>
+          </a:p>
+        </p:txBody>
+      </p:sp>
+      <p:sp>
+        <p:nvSpPr>
+          <p:cNvPr id="12" name="Text 7"/>
+          <p:cNvSpPr/>
+          <p:nvPr/>
+        </p:nvSpPr>
+        <p:spPr>
+          <a:xfrm>
+            <a:off x="558800" y="2391410"/>
+            <a:ext cx="190500" cy="317500"/>
+          </a:xfrm>
+          <a:prstGeom prst="rect">
+            <a:avLst/>
+          </a:prstGeom>
+          <a:noFill/>
+          <a:ln/>
+        </p:spPr>
+        <p:txBody>
+          <a:bodyPr wrap="square" lIns="0" tIns="0" rIns="0" bIns="0" rtlCol="0" anchor="t"/>
+          <a:lstStyle/>
+          <a:p>
+            <a:pPr algn="l" indent="0" marL="0">
+              <a:lnSpc>
+                <a:spcPct val="140000"/>
+              </a:lnSpc>
+              <a:buNone/>
+            </a:pPr>
+            <a:r>
+              <a:rPr lang="en-US" sz="1700" dirty="0">
+                <a:solidFill>
+                  <a:srgbClr val="A87A2E"/>
+                </a:solidFill>
+                <a:latin typeface="Libre Franklin" pitchFamily="34" charset="0"/>
+                <a:ea typeface="Libre Franklin" pitchFamily="34" charset="-122"/>
+                <a:cs typeface="Libre Franklin" pitchFamily="34" charset="-120"/>
+              </a:rPr>
+              <a:t>—</a:t>
+            </a:r>
+            <a:endParaRPr lang="en-US" sz="1700" dirty="0"/>
+          </a:p>
+        </p:txBody>
+      </p:sp>
+      <p:sp>
+        <p:nvSpPr>
+          <p:cNvPr id="13" name="Text 8"/>
+          <p:cNvSpPr/>
+          <p:nvPr/>
+        </p:nvSpPr>
+        <p:spPr>
+          <a:xfrm>
+            <a:off x="927100" y="2391410"/>
+            <a:ext cx="9156700" cy="1066165"/>
+          </a:xfrm>
+          <a:prstGeom prst="rect">
+            <a:avLst/>
+          </a:prstGeom>
+          <a:noFill/>
+          <a:ln/>
+        </p:spPr>
+        <p:txBody>
+          <a:bodyPr wrap="square" lIns="0" tIns="0" rIns="0" bIns="0" rtlCol="0" anchor="t"/>
+          <a:lstStyle/>
+          <a:p>
+            <a:pPr algn="l" indent="0" marL="0">
+              <a:lnSpc>
+                <a:spcPct val="145000"/>
+              </a:lnSpc>
+              <a:buNone/>
+            </a:pPr>
+            <a:r>
+              <a:rPr lang="en-US" sz="1700" b="1" dirty="0">
+                <a:solidFill>
+                  <a:srgbClr val="332F2A"/>
+                </a:solidFill>
+                <a:latin typeface="Libre Franklin" pitchFamily="34" charset="0"/>
+                <a:ea typeface="Libre Franklin" pitchFamily="34" charset="-122"/>
+                <a:cs typeface="Libre Franklin" pitchFamily="34" charset="-120"/>
+              </a:rPr>
+              <a:t>It opens on a screen nobody expects. </a:t>
+            </a:r>
+            <a:pPr algn="l" indent="0" marL="0">
+              <a:lnSpc>
+                <a:spcPct val="145000"/>
+              </a:lnSpc>
+              <a:buNone/>
+            </a:pPr>
+            <a:r>
+              <a:rPr lang="en-US" sz="1700" dirty="0">
+                <a:solidFill>
+                  <a:srgbClr val="332F2A"/>
+                </a:solidFill>
+                <a:latin typeface="Libre Franklin" pitchFamily="34" charset="0"/>
+                <a:ea typeface="Libre Franklin" pitchFamily="34" charset="-122"/>
+                <a:cs typeface="Libre Franklin" pitchFamily="34" charset="-120"/>
+              </a:rPr>
+              <a:t>“How will you use Cline?”, with Absolutely Free already ticked. Do not take it — choose Bring my own API key, or your key is never used.</a:t>
+            </a:r>
+            <a:endParaRPr lang="en-US" sz="1700" dirty="0"/>
+          </a:p>
+        </p:txBody>
+      </p:sp>
+      <p:sp>
+        <p:nvSpPr>
+          <p:cNvPr id="14" name="Text 9"/>
+          <p:cNvSpPr/>
+          <p:nvPr/>
+        </p:nvSpPr>
+        <p:spPr>
+          <a:xfrm>
+            <a:off x="558800" y="3584575"/>
+            <a:ext cx="190500" cy="317500"/>
+          </a:xfrm>
+          <a:prstGeom prst="rect">
+            <a:avLst/>
+          </a:prstGeom>
+          <a:noFill/>
+          <a:ln/>
+        </p:spPr>
+        <p:txBody>
+          <a:bodyPr wrap="square" lIns="0" tIns="0" rIns="0" bIns="0" rtlCol="0" anchor="t"/>
+          <a:lstStyle/>
+          <a:p>
+            <a:pPr algn="l" indent="0" marL="0">
+              <a:lnSpc>
+                <a:spcPct val="140000"/>
+              </a:lnSpc>
+              <a:buNone/>
+            </a:pPr>
+            <a:r>
+              <a:rPr lang="en-US" sz="1700" dirty="0">
+                <a:solidFill>
+                  <a:srgbClr val="A87A2E"/>
+                </a:solidFill>
+                <a:latin typeface="Libre Franklin" pitchFamily="34" charset="0"/>
+                <a:ea typeface="Libre Franklin" pitchFamily="34" charset="-122"/>
+                <a:cs typeface="Libre Franklin" pitchFamily="34" charset="-120"/>
+              </a:rPr>
+              <a:t>—</a:t>
+            </a:r>
+            <a:endParaRPr lang="en-US" sz="1700" dirty="0"/>
+          </a:p>
+        </p:txBody>
+      </p:sp>
+      <p:sp>
+        <p:nvSpPr>
+          <p:cNvPr id="15" name="Text 10"/>
+          <p:cNvSpPr/>
+          <p:nvPr/>
+        </p:nvSpPr>
+        <p:spPr>
+          <a:xfrm>
+            <a:off x="927100" y="3584575"/>
+            <a:ext cx="9156700" cy="1066165"/>
+          </a:xfrm>
+          <a:prstGeom prst="rect">
+            <a:avLst/>
+          </a:prstGeom>
+          <a:noFill/>
+          <a:ln/>
+        </p:spPr>
+        <p:txBody>
+          <a:bodyPr wrap="square" lIns="0" tIns="0" rIns="0" bIns="0" rtlCol="0" anchor="t"/>
+          <a:lstStyle/>
+          <a:p>
+            <a:pPr algn="l" indent="0" marL="0">
+              <a:lnSpc>
+                <a:spcPct val="145000"/>
+              </a:lnSpc>
+              <a:buNone/>
+            </a:pPr>
+            <a:r>
+              <a:rPr lang="en-US" sz="1700" b="1" dirty="0">
+                <a:solidFill>
+                  <a:srgbClr val="332F2A"/>
+                </a:solidFill>
+                <a:latin typeface="Libre Franklin" pitchFamily="34" charset="0"/>
+                <a:ea typeface="Libre Franklin" pitchFamily="34" charset="-122"/>
+                <a:cs typeface="Libre Franklin" pitchFamily="34" charset="-120"/>
+              </a:rPr>
+              <a:t>Then provider, then model. </a:t>
+            </a:r>
+            <a:pPr algn="l" indent="0" marL="0">
+              <a:lnSpc>
+                <a:spcPct val="145000"/>
+              </a:lnSpc>
+              <a:buNone/>
+            </a:pPr>
+            <a:r>
+              <a:rPr lang="en-US" sz="1700" dirty="0">
+                <a:solidFill>
+                  <a:srgbClr val="332F2A"/>
+                </a:solidFill>
+                <a:latin typeface="Libre Franklin" pitchFamily="34" charset="0"/>
+                <a:ea typeface="Libre Franklin" pitchFamily="34" charset="-122"/>
+                <a:cs typeface="Libre Franklin" pitchFamily="34" charset="-120"/>
+              </a:rPr>
+              <a:t>Mistral or Gemini, paste the key. Model names carry a date — devstral-2512, not devstral-latest. Prefer a devstral if you see one.</a:t>
+            </a:r>
+            <a:endParaRPr lang="en-US" sz="1700" dirty="0"/>
+          </a:p>
+        </p:txBody>
+      </p:sp>
+      <p:sp>
+        <p:nvSpPr>
+          <p:cNvPr id="16" name="Text 11"/>
+          <p:cNvSpPr/>
+          <p:nvPr/>
+        </p:nvSpPr>
+        <p:spPr>
+          <a:xfrm>
+            <a:off x="558800" y="4777740"/>
+            <a:ext cx="190500" cy="317500"/>
+          </a:xfrm>
+          <a:prstGeom prst="rect">
+            <a:avLst/>
+          </a:prstGeom>
+          <a:noFill/>
+          <a:ln/>
+        </p:spPr>
+        <p:txBody>
+          <a:bodyPr wrap="square" lIns="0" tIns="0" rIns="0" bIns="0" rtlCol="0" anchor="t"/>
+          <a:lstStyle/>
+          <a:p>
+            <a:pPr algn="l" indent="0" marL="0">
+              <a:lnSpc>
+                <a:spcPct val="140000"/>
+              </a:lnSpc>
+              <a:buNone/>
+            </a:pPr>
+            <a:r>
+              <a:rPr lang="en-US" sz="1700" dirty="0">
+                <a:solidFill>
+                  <a:srgbClr val="A87A2E"/>
+                </a:solidFill>
+                <a:latin typeface="Libre Franklin" pitchFamily="34" charset="0"/>
+                <a:ea typeface="Libre Franklin" pitchFamily="34" charset="-122"/>
+                <a:cs typeface="Libre Franklin" pitchFamily="34" charset="-120"/>
+              </a:rPr>
+              <a:t>—</a:t>
+            </a:r>
+            <a:endParaRPr lang="en-US" sz="1700" dirty="0"/>
+          </a:p>
+        </p:txBody>
+      </p:sp>
+      <p:sp>
+        <p:nvSpPr>
+          <p:cNvPr id="17" name="Text 12"/>
+          <p:cNvSpPr/>
+          <p:nvPr/>
+        </p:nvSpPr>
+        <p:spPr>
+          <a:xfrm>
+            <a:off x="927100" y="4777740"/>
+            <a:ext cx="9156700" cy="753110"/>
+          </a:xfrm>
+          <a:prstGeom prst="rect">
+            <a:avLst/>
+          </a:prstGeom>
+          <a:noFill/>
+          <a:ln/>
+        </p:spPr>
+        <p:txBody>
+          <a:bodyPr wrap="square" lIns="0" tIns="0" rIns="0" bIns="0" rtlCol="0" anchor="t"/>
+          <a:lstStyle/>
+          <a:p>
+            <a:pPr algn="l" indent="0" marL="0">
+              <a:lnSpc>
+                <a:spcPct val="145000"/>
+              </a:lnSpc>
+              <a:buNone/>
+            </a:pPr>
+            <a:r>
+              <a:rPr lang="en-US" sz="1700" dirty="0">
+                <a:solidFill>
+                  <a:srgbClr val="332F2A"/>
+                </a:solidFill>
+                <a:latin typeface="Libre Franklin" pitchFamily="34" charset="0"/>
+                <a:ea typeface="Libre Franklin" pitchFamily="34" charset="-122"/>
+                <a:cs typeface="Libre Franklin" pitchFamily="34" charset="-120"/>
+              </a:rPr>
+              <a:t>Check the model name after any reload: Cline can reset itself, sometimes to a paid one. A price per million tokens beside it means change it back.</a:t>
             </a:r>
             <a:endParaRPr lang="en-US" sz="1700" dirty="0"/>
           </a:p>
@@ -9676,111 +10600,15 @@
                 <a:ea typeface="IBM Plex Mono" pitchFamily="34" charset="-122"/>
                 <a:cs typeface="IBM Plex Mono" pitchFamily="34" charset="-120"/>
               </a:rPr>
-              <a:t>SETUP</a:t>
+              <a:t>SESSION 01</a:t>
             </a:r>
             <a:endParaRPr lang="en-US" sz="1200" dirty="0"/>
           </a:p>
         </p:txBody>
       </p:sp>
-      <p:pic>
-        <p:nvPicPr>
-          <p:cNvPr id="3" name="Image 0" descr="icons/github.png">    </p:cNvPr>
-          <p:cNvPicPr>
-            <a:picLocks noChangeAspect="1"/>
-          </p:cNvPicPr>
-          <p:nvPr/>
-        </p:nvPicPr>
-        <p:blipFill>
-          <a:blip r:embed="rId1"/>
-          <a:stretch>
-            <a:fillRect/>
-          </a:stretch>
-        </p:blipFill>
-        <p:spPr>
-          <a:xfrm>
-            <a:off x="10401300" y="361950"/>
-            <a:ext cx="203200" cy="203200"/>
-          </a:xfrm>
-          <a:prstGeom prst="rect">
-            <a:avLst/>
-          </a:prstGeom>
-        </p:spPr>
-      </p:pic>
-      <p:pic>
-        <p:nvPicPr>
-          <p:cNvPr id="4" name="Image 1" descr="icons/googlegemini.png">    </p:cNvPr>
-          <p:cNvPicPr>
-            <a:picLocks noChangeAspect="1"/>
-          </p:cNvPicPr>
-          <p:nvPr/>
-        </p:nvPicPr>
-        <p:blipFill>
-          <a:blip r:embed="rId2"/>
-          <a:stretch>
-            <a:fillRect/>
-          </a:stretch>
-        </p:blipFill>
-        <p:spPr>
-          <a:xfrm>
-            <a:off x="10744200" y="361950"/>
-            <a:ext cx="203200" cy="203200"/>
-          </a:xfrm>
-          <a:prstGeom prst="rect">
-            <a:avLst/>
-          </a:prstGeom>
-        </p:spPr>
-      </p:pic>
-      <p:pic>
-        <p:nvPicPr>
-          <p:cNvPr id="5" name="Image 2" descr="icons/mistralai.png">    </p:cNvPr>
-          <p:cNvPicPr>
-            <a:picLocks noChangeAspect="1"/>
-          </p:cNvPicPr>
-          <p:nvPr/>
-        </p:nvPicPr>
-        <p:blipFill>
-          <a:blip r:embed="rId3"/>
-          <a:stretch>
-            <a:fillRect/>
-          </a:stretch>
-        </p:blipFill>
-        <p:spPr>
-          <a:xfrm>
-            <a:off x="11087100" y="361950"/>
-            <a:ext cx="203200" cy="203200"/>
-          </a:xfrm>
-          <a:prstGeom prst="rect">
-            <a:avLst/>
-          </a:prstGeom>
-        </p:spPr>
-      </p:pic>
-      <p:pic>
-        <p:nvPicPr>
-          <p:cNvPr id="6" name="Image 3" descr="icons/python.png">    </p:cNvPr>
-          <p:cNvPicPr>
-            <a:picLocks noChangeAspect="1"/>
-          </p:cNvPicPr>
-          <p:nvPr/>
-        </p:nvPicPr>
-        <p:blipFill>
-          <a:blip r:embed="rId4"/>
-          <a:stretch>
-            <a:fillRect/>
-          </a:stretch>
-        </p:blipFill>
-        <p:spPr>
-          <a:xfrm>
-            <a:off x="11430000" y="361950"/>
-            <a:ext cx="203200" cy="203200"/>
-          </a:xfrm>
-          <a:prstGeom prst="rect">
-            <a:avLst/>
-          </a:prstGeom>
-        </p:spPr>
-      </p:pic>
-      <p:sp>
-        <p:nvSpPr>
-          <p:cNvPr id="7" name="Text 1"/>
+      <p:sp>
+        <p:nvSpPr>
+          <p:cNvPr id="3" name="Text 1"/>
           <p:cNvSpPr/>
           <p:nvPr/>
         </p:nvSpPr>
@@ -9814,7 +10642,7 @@
                 <a:ea typeface="Libre Franklin" pitchFamily="34" charset="-122"/>
                 <a:cs typeface="Libre Franklin" pitchFamily="34" charset="-120"/>
               </a:rPr>
-              <a:t>Before we start</a:t>
+              <a:t>Agenda</a:t>
             </a:r>
             <a:endParaRPr lang="en-US" sz="2800" dirty="0"/>
           </a:p>
@@ -9822,7 +10650,7 @@
       </p:sp>
       <p:sp>
         <p:nvSpPr>
-          <p:cNvPr id="8" name="Shape 2"/>
+          <p:cNvPr id="4" name="Shape 2"/>
           <p:cNvSpPr/>
           <p:nvPr/>
         </p:nvSpPr>
@@ -9842,7 +10670,7 @@
       </p:sp>
       <p:sp>
         <p:nvSpPr>
-          <p:cNvPr id="9" name="Text 3"/>
+          <p:cNvPr id="5" name="Text 3"/>
           <p:cNvSpPr/>
           <p:nvPr/>
         </p:nvSpPr>
@@ -9884,7 +10712,7 @@
       </p:sp>
       <p:sp>
         <p:nvSpPr>
-          <p:cNvPr id="10" name="Text 4"/>
+          <p:cNvPr id="6" name="Text 4"/>
           <p:cNvSpPr/>
           <p:nvPr/>
         </p:nvSpPr>
@@ -9926,41 +10754,83 @@
       </p:sp>
       <p:sp>
         <p:nvSpPr>
-          <p:cNvPr id="11" name="Text 5"/>
+          <p:cNvPr id="7" name="Text 5"/>
           <p:cNvSpPr/>
           <p:nvPr/>
         </p:nvSpPr>
         <p:spPr>
           <a:xfrm>
             <a:off x="558800" y="1511300"/>
-            <a:ext cx="190500" cy="317500"/>
-          </a:xfrm>
-          <a:prstGeom prst="rect">
-            <a:avLst/>
-          </a:prstGeom>
-          <a:noFill/>
-          <a:ln/>
-        </p:spPr>
-        <p:txBody>
-          <a:bodyPr wrap="square" lIns="0" tIns="0" rIns="0" bIns="0" rtlCol="0" anchor="t"/>
-          <a:lstStyle/>
-          <a:p>
-            <a:pPr algn="l" indent="0" marL="0">
-              <a:lnSpc>
-                <a:spcPct val="140000"/>
+            <a:ext cx="381000" cy="254000"/>
+          </a:xfrm>
+          <a:prstGeom prst="rect">
+            <a:avLst/>
+          </a:prstGeom>
+          <a:noFill/>
+          <a:ln/>
+        </p:spPr>
+        <p:txBody>
+          <a:bodyPr wrap="square" lIns="0" tIns="0" rIns="0" bIns="0" rtlCol="0" anchor="t"/>
+          <a:lstStyle/>
+          <a:p>
+            <a:pPr algn="l" indent="0" marL="0">
+              <a:lnSpc>
+                <a:spcPct val="145000"/>
+              </a:lnSpc>
+              <a:buNone/>
+            </a:pPr>
+            <a:r>
+              <a:rPr lang="en-US" sz="1300" dirty="0">
+                <a:solidFill>
+                  <a:srgbClr val="A87A2E"/>
+                </a:solidFill>
+                <a:latin typeface="IBM Plex Mono" pitchFamily="34" charset="0"/>
+                <a:ea typeface="IBM Plex Mono" pitchFamily="34" charset="-122"/>
+                <a:cs typeface="IBM Plex Mono" pitchFamily="34" charset="-120"/>
+              </a:rPr>
+              <a:t>01</a:t>
+            </a:r>
+            <a:endParaRPr lang="en-US" sz="1300" dirty="0"/>
+          </a:p>
+        </p:txBody>
+      </p:sp>
+      <p:sp>
+        <p:nvSpPr>
+          <p:cNvPr id="8" name="Text 6"/>
+          <p:cNvSpPr/>
+          <p:nvPr/>
+        </p:nvSpPr>
+        <p:spPr>
+          <a:xfrm>
+            <a:off x="939800" y="1485900"/>
+            <a:ext cx="4902200" cy="571500"/>
+          </a:xfrm>
+          <a:prstGeom prst="rect">
+            <a:avLst/>
+          </a:prstGeom>
+          <a:noFill/>
+          <a:ln/>
+        </p:spPr>
+        <p:txBody>
+          <a:bodyPr wrap="square" lIns="0" tIns="0" rIns="0" bIns="0" rtlCol="0" anchor="t"/>
+          <a:lstStyle/>
+          <a:p>
+            <a:pPr algn="l" indent="0" marL="0">
+              <a:lnSpc>
+                <a:spcPct val="135000"/>
               </a:lnSpc>
               <a:buNone/>
             </a:pPr>
             <a:r>
               <a:rPr lang="en-US" sz="1700" dirty="0">
                 <a:solidFill>
-                  <a:srgbClr val="A87A2E"/>
+                  <a:srgbClr val="332F2A"/>
                 </a:solidFill>
                 <a:latin typeface="Libre Franklin" pitchFamily="34" charset="0"/>
                 <a:ea typeface="Libre Franklin" pitchFamily="34" charset="-122"/>
                 <a:cs typeface="Libre Franklin" pitchFamily="34" charset="-120"/>
               </a:rPr>
-              <a:t>—</a:t>
+              <a:t>How an agent works</a:t>
             </a:r>
             <a:endParaRPr lang="en-US" sz="1700" dirty="0"/>
           </a:p>
@@ -9968,14 +10838,14 @@
       </p:sp>
       <p:sp>
         <p:nvSpPr>
-          <p:cNvPr id="12" name="Text 6"/>
-          <p:cNvSpPr/>
-          <p:nvPr/>
-        </p:nvSpPr>
-        <p:spPr>
-          <a:xfrm>
-            <a:off x="927100" y="1511300"/>
-            <a:ext cx="9156700" cy="753110"/>
+          <p:cNvPr id="9" name="Text 7"/>
+          <p:cNvSpPr/>
+          <p:nvPr/>
+        </p:nvSpPr>
+        <p:spPr>
+          <a:xfrm>
+            <a:off x="6350000" y="1511300"/>
+            <a:ext cx="381000" cy="254000"/>
           </a:xfrm>
           <a:prstGeom prst="rect">
             <a:avLst/>
@@ -9994,7 +10864,49 @@
               <a:buNone/>
             </a:pPr>
             <a:r>
-              <a:rPr lang="en-US" sz="1700" b="1" dirty="0">
+              <a:rPr lang="en-US" sz="1300" dirty="0">
+                <a:solidFill>
+                  <a:srgbClr val="A87A2E"/>
+                </a:solidFill>
+                <a:latin typeface="IBM Plex Mono" pitchFamily="34" charset="0"/>
+                <a:ea typeface="IBM Plex Mono" pitchFamily="34" charset="-122"/>
+                <a:cs typeface="IBM Plex Mono" pitchFamily="34" charset="-120"/>
+              </a:rPr>
+              <a:t>02</a:t>
+            </a:r>
+            <a:endParaRPr lang="en-US" sz="1300" dirty="0"/>
+          </a:p>
+        </p:txBody>
+      </p:sp>
+      <p:sp>
+        <p:nvSpPr>
+          <p:cNvPr id="10" name="Text 8"/>
+          <p:cNvSpPr/>
+          <p:nvPr/>
+        </p:nvSpPr>
+        <p:spPr>
+          <a:xfrm>
+            <a:off x="6731000" y="1485900"/>
+            <a:ext cx="4902200" cy="571500"/>
+          </a:xfrm>
+          <a:prstGeom prst="rect">
+            <a:avLst/>
+          </a:prstGeom>
+          <a:noFill/>
+          <a:ln/>
+        </p:spPr>
+        <p:txBody>
+          <a:bodyPr wrap="square" lIns="0" tIns="0" rIns="0" bIns="0" rtlCol="0" anchor="t"/>
+          <a:lstStyle/>
+          <a:p>
+            <a:pPr algn="l" indent="0" marL="0">
+              <a:lnSpc>
+                <a:spcPct val="135000"/>
+              </a:lnSpc>
+              <a:buNone/>
+            </a:pPr>
+            <a:r>
+              <a:rPr lang="en-US" sz="1700" dirty="0">
                 <a:solidFill>
                   <a:srgbClr val="332F2A"/>
                 </a:solidFill>
@@ -10002,11 +10914,78 @@
                 <a:ea typeface="Libre Franklin" pitchFamily="34" charset="-122"/>
                 <a:cs typeface="Libre Franklin" pitchFamily="34" charset="-120"/>
               </a:rPr>
-              <a:t>A GitHub account, then a Codespace. </a:t>
-            </a:r>
+              <a:t>What it costs, and why it fails</a:t>
+            </a:r>
+            <a:endParaRPr lang="en-US" sz="1700" dirty="0"/>
+          </a:p>
+        </p:txBody>
+      </p:sp>
+      <p:sp>
+        <p:nvSpPr>
+          <p:cNvPr id="11" name="Text 9"/>
+          <p:cNvSpPr/>
+          <p:nvPr/>
+        </p:nvSpPr>
+        <p:spPr>
+          <a:xfrm>
+            <a:off x="558800" y="2197100"/>
+            <a:ext cx="381000" cy="254000"/>
+          </a:xfrm>
+          <a:prstGeom prst="rect">
+            <a:avLst/>
+          </a:prstGeom>
+          <a:noFill/>
+          <a:ln/>
+        </p:spPr>
+        <p:txBody>
+          <a:bodyPr wrap="square" lIns="0" tIns="0" rIns="0" bIns="0" rtlCol="0" anchor="t"/>
+          <a:lstStyle/>
+          <a:p>
             <a:pPr algn="l" indent="0" marL="0">
               <a:lnSpc>
                 <a:spcPct val="145000"/>
+              </a:lnSpc>
+              <a:buNone/>
+            </a:pPr>
+            <a:r>
+              <a:rPr lang="en-US" sz="1300" dirty="0">
+                <a:solidFill>
+                  <a:srgbClr val="A87A2E"/>
+                </a:solidFill>
+                <a:latin typeface="IBM Plex Mono" pitchFamily="34" charset="0"/>
+                <a:ea typeface="IBM Plex Mono" pitchFamily="34" charset="-122"/>
+                <a:cs typeface="IBM Plex Mono" pitchFamily="34" charset="-120"/>
+              </a:rPr>
+              <a:t>03</a:t>
+            </a:r>
+            <a:endParaRPr lang="en-US" sz="1300" dirty="0"/>
+          </a:p>
+        </p:txBody>
+      </p:sp>
+      <p:sp>
+        <p:nvSpPr>
+          <p:cNvPr id="12" name="Text 10"/>
+          <p:cNvSpPr/>
+          <p:nvPr/>
+        </p:nvSpPr>
+        <p:spPr>
+          <a:xfrm>
+            <a:off x="939800" y="2171700"/>
+            <a:ext cx="4902200" cy="571500"/>
+          </a:xfrm>
+          <a:prstGeom prst="rect">
+            <a:avLst/>
+          </a:prstGeom>
+          <a:noFill/>
+          <a:ln/>
+        </p:spPr>
+        <p:txBody>
+          <a:bodyPr wrap="square" lIns="0" tIns="0" rIns="0" bIns="0" rtlCol="0" anchor="t"/>
+          <a:lstStyle/>
+          <a:p>
+            <a:pPr algn="l" indent="0" marL="0">
+              <a:lnSpc>
+                <a:spcPct val="135000"/>
               </a:lnSpc>
               <a:buNone/>
             </a:pPr>
@@ -10019,7 +10998,7 @@
                 <a:ea typeface="Libre Franklin" pitchFamily="34" charset="-122"/>
                 <a:cs typeface="Libre Franklin" pitchFamily="34" charset="-120"/>
               </a:rPr>
-              <a:t>Free at github.com. One click from the template page builds a Linux machine in your browser; nothing installs here.</a:t>
+              <a:t>Warm-up — build it by asking</a:t>
             </a:r>
             <a:endParaRPr lang="en-US" sz="1700" dirty="0"/>
           </a:p>
@@ -10027,41 +11006,83 @@
       </p:sp>
       <p:sp>
         <p:nvSpPr>
-          <p:cNvPr id="13" name="Text 7"/>
-          <p:cNvSpPr/>
-          <p:nvPr/>
-        </p:nvSpPr>
-        <p:spPr>
-          <a:xfrm>
-            <a:off x="558800" y="2391410"/>
-            <a:ext cx="190500" cy="317500"/>
-          </a:xfrm>
-          <a:prstGeom prst="rect">
-            <a:avLst/>
-          </a:prstGeom>
-          <a:noFill/>
-          <a:ln/>
-        </p:spPr>
-        <p:txBody>
-          <a:bodyPr wrap="square" lIns="0" tIns="0" rIns="0" bIns="0" rtlCol="0" anchor="t"/>
-          <a:lstStyle/>
-          <a:p>
-            <a:pPr algn="l" indent="0" marL="0">
-              <a:lnSpc>
-                <a:spcPct val="140000"/>
+          <p:cNvPr id="13" name="Text 11"/>
+          <p:cNvSpPr/>
+          <p:nvPr/>
+        </p:nvSpPr>
+        <p:spPr>
+          <a:xfrm>
+            <a:off x="6350000" y="2197100"/>
+            <a:ext cx="381000" cy="254000"/>
+          </a:xfrm>
+          <a:prstGeom prst="rect">
+            <a:avLst/>
+          </a:prstGeom>
+          <a:noFill/>
+          <a:ln/>
+        </p:spPr>
+        <p:txBody>
+          <a:bodyPr wrap="square" lIns="0" tIns="0" rIns="0" bIns="0" rtlCol="0" anchor="t"/>
+          <a:lstStyle/>
+          <a:p>
+            <a:pPr algn="l" indent="0" marL="0">
+              <a:lnSpc>
+                <a:spcPct val="145000"/>
+              </a:lnSpc>
+              <a:buNone/>
+            </a:pPr>
+            <a:r>
+              <a:rPr lang="en-US" sz="1300" dirty="0">
+                <a:solidFill>
+                  <a:srgbClr val="A87A2E"/>
+                </a:solidFill>
+                <a:latin typeface="IBM Plex Mono" pitchFamily="34" charset="0"/>
+                <a:ea typeface="IBM Plex Mono" pitchFamily="34" charset="-122"/>
+                <a:cs typeface="IBM Plex Mono" pitchFamily="34" charset="-120"/>
+              </a:rPr>
+              <a:t>04</a:t>
+            </a:r>
+            <a:endParaRPr lang="en-US" sz="1300" dirty="0"/>
+          </a:p>
+        </p:txBody>
+      </p:sp>
+      <p:sp>
+        <p:nvSpPr>
+          <p:cNvPr id="14" name="Text 12"/>
+          <p:cNvSpPr/>
+          <p:nvPr/>
+        </p:nvSpPr>
+        <p:spPr>
+          <a:xfrm>
+            <a:off x="6731000" y="2171700"/>
+            <a:ext cx="4902200" cy="571500"/>
+          </a:xfrm>
+          <a:prstGeom prst="rect">
+            <a:avLst/>
+          </a:prstGeom>
+          <a:noFill/>
+          <a:ln/>
+        </p:spPr>
+        <p:txBody>
+          <a:bodyPr wrap="square" lIns="0" tIns="0" rIns="0" bIns="0" rtlCol="0" anchor="t"/>
+          <a:lstStyle/>
+          <a:p>
+            <a:pPr algn="l" indent="0" marL="0">
+              <a:lnSpc>
+                <a:spcPct val="135000"/>
               </a:lnSpc>
               <a:buNone/>
             </a:pPr>
             <a:r>
               <a:rPr lang="en-US" sz="1700" dirty="0">
                 <a:solidFill>
-                  <a:srgbClr val="A87A2E"/>
+                  <a:srgbClr val="332F2A"/>
                 </a:solidFill>
                 <a:latin typeface="Libre Franklin" pitchFamily="34" charset="0"/>
                 <a:ea typeface="Libre Franklin" pitchFamily="34" charset="-122"/>
                 <a:cs typeface="Libre Franklin" pitchFamily="34" charset="-120"/>
               </a:rPr>
-              <a:t>—</a:t>
+              <a:t>The Four Gates</a:t>
             </a:r>
             <a:endParaRPr lang="en-US" sz="1700" dirty="0"/>
           </a:p>
@@ -10069,14 +11090,14 @@
       </p:sp>
       <p:sp>
         <p:nvSpPr>
-          <p:cNvPr id="14" name="Text 8"/>
-          <p:cNvSpPr/>
-          <p:nvPr/>
-        </p:nvSpPr>
-        <p:spPr>
-          <a:xfrm>
-            <a:off x="927100" y="2391410"/>
-            <a:ext cx="9156700" cy="753110"/>
+          <p:cNvPr id="15" name="Text 13"/>
+          <p:cNvSpPr/>
+          <p:nvPr/>
+        </p:nvSpPr>
+        <p:spPr>
+          <a:xfrm>
+            <a:off x="558800" y="2882900"/>
+            <a:ext cx="381000" cy="254000"/>
           </a:xfrm>
           <a:prstGeom prst="rect">
             <a:avLst/>
@@ -10095,7 +11116,49 @@
               <a:buNone/>
             </a:pPr>
             <a:r>
-              <a:rPr lang="en-US" sz="1700" b="1" dirty="0">
+              <a:rPr lang="en-US" sz="1300" dirty="0">
+                <a:solidFill>
+                  <a:srgbClr val="A87A2E"/>
+                </a:solidFill>
+                <a:latin typeface="IBM Plex Mono" pitchFamily="34" charset="0"/>
+                <a:ea typeface="IBM Plex Mono" pitchFamily="34" charset="-122"/>
+                <a:cs typeface="IBM Plex Mono" pitchFamily="34" charset="-120"/>
+              </a:rPr>
+              <a:t>05</a:t>
+            </a:r>
+            <a:endParaRPr lang="en-US" sz="1300" dirty="0"/>
+          </a:p>
+        </p:txBody>
+      </p:sp>
+      <p:sp>
+        <p:nvSpPr>
+          <p:cNvPr id="16" name="Text 14"/>
+          <p:cNvSpPr/>
+          <p:nvPr/>
+        </p:nvSpPr>
+        <p:spPr>
+          <a:xfrm>
+            <a:off x="939800" y="2857500"/>
+            <a:ext cx="4902200" cy="571500"/>
+          </a:xfrm>
+          <a:prstGeom prst="rect">
+            <a:avLst/>
+          </a:prstGeom>
+          <a:noFill/>
+          <a:ln/>
+        </p:spPr>
+        <p:txBody>
+          <a:bodyPr wrap="square" lIns="0" tIns="0" rIns="0" bIns="0" rtlCol="0" anchor="t"/>
+          <a:lstStyle/>
+          <a:p>
+            <a:pPr algn="l" indent="0" marL="0">
+              <a:lnSpc>
+                <a:spcPct val="135000"/>
+              </a:lnSpc>
+              <a:buNone/>
+            </a:pPr>
+            <a:r>
+              <a:rPr lang="en-US" sz="1700" dirty="0">
                 <a:solidFill>
                   <a:srgbClr val="332F2A"/>
                 </a:solidFill>
@@ -10103,11 +11166,78 @@
                 <a:ea typeface="Libre Franklin" pitchFamily="34" charset="-122"/>
                 <a:cs typeface="Libre Franklin" pitchFamily="34" charset="-120"/>
               </a:rPr>
-              <a:t>TWO API keys, not one. </a:t>
-            </a:r>
+              <a:t>Lab 1 — the same app, done properly</a:t>
+            </a:r>
+            <a:endParaRPr lang="en-US" sz="1700" dirty="0"/>
+          </a:p>
+        </p:txBody>
+      </p:sp>
+      <p:sp>
+        <p:nvSpPr>
+          <p:cNvPr id="17" name="Text 15"/>
+          <p:cNvSpPr/>
+          <p:nvPr/>
+        </p:nvSpPr>
+        <p:spPr>
+          <a:xfrm>
+            <a:off x="6350000" y="2882900"/>
+            <a:ext cx="381000" cy="254000"/>
+          </a:xfrm>
+          <a:prstGeom prst="rect">
+            <a:avLst/>
+          </a:prstGeom>
+          <a:noFill/>
+          <a:ln/>
+        </p:spPr>
+        <p:txBody>
+          <a:bodyPr wrap="square" lIns="0" tIns="0" rIns="0" bIns="0" rtlCol="0" anchor="t"/>
+          <a:lstStyle/>
+          <a:p>
             <a:pPr algn="l" indent="0" marL="0">
               <a:lnSpc>
                 <a:spcPct val="145000"/>
+              </a:lnSpc>
+              <a:buNone/>
+            </a:pPr>
+            <a:r>
+              <a:rPr lang="en-US" sz="1300" dirty="0">
+                <a:solidFill>
+                  <a:srgbClr val="A87A2E"/>
+                </a:solidFill>
+                <a:latin typeface="IBM Plex Mono" pitchFamily="34" charset="0"/>
+                <a:ea typeface="IBM Plex Mono" pitchFamily="34" charset="-122"/>
+                <a:cs typeface="IBM Plex Mono" pitchFamily="34" charset="-120"/>
+              </a:rPr>
+              <a:t>06</a:t>
+            </a:r>
+            <a:endParaRPr lang="en-US" sz="1300" dirty="0"/>
+          </a:p>
+        </p:txBody>
+      </p:sp>
+      <p:sp>
+        <p:nvSpPr>
+          <p:cNvPr id="18" name="Text 16"/>
+          <p:cNvSpPr/>
+          <p:nvPr/>
+        </p:nvSpPr>
+        <p:spPr>
+          <a:xfrm>
+            <a:off x="6731000" y="2857500"/>
+            <a:ext cx="4902200" cy="571500"/>
+          </a:xfrm>
+          <a:prstGeom prst="rect">
+            <a:avLst/>
+          </a:prstGeom>
+          <a:noFill/>
+          <a:ln/>
+        </p:spPr>
+        <p:txBody>
+          <a:bodyPr wrap="square" lIns="0" tIns="0" rIns="0" bIns="0" rtlCol="0" anchor="t"/>
+          <a:lstStyle/>
+          <a:p>
+            <a:pPr algn="l" indent="0" marL="0">
+              <a:lnSpc>
+                <a:spcPct val="135000"/>
               </a:lnSpc>
               <a:buNone/>
             </a:pPr>
@@ -10120,209 +11250,7 @@
                 <a:ea typeface="Libre Franklin" pitchFamily="34" charset="-122"/>
                 <a:cs typeface="Libre Franklin" pitchFamily="34" charset="-120"/>
               </a:rPr>
-              <a:t>Gemini at aistudio.google.com/apikey, Mistral at console.mistral.ai. Free tiers refuse service without warning.</a:t>
-            </a:r>
-            <a:endParaRPr lang="en-US" sz="1700" dirty="0"/>
-          </a:p>
-        </p:txBody>
-      </p:sp>
-      <p:sp>
-        <p:nvSpPr>
-          <p:cNvPr id="15" name="Text 9"/>
-          <p:cNvSpPr/>
-          <p:nvPr/>
-        </p:nvSpPr>
-        <p:spPr>
-          <a:xfrm>
-            <a:off x="558800" y="3271520"/>
-            <a:ext cx="190500" cy="317500"/>
-          </a:xfrm>
-          <a:prstGeom prst="rect">
-            <a:avLst/>
-          </a:prstGeom>
-          <a:noFill/>
-          <a:ln/>
-        </p:spPr>
-        <p:txBody>
-          <a:bodyPr wrap="square" lIns="0" tIns="0" rIns="0" bIns="0" rtlCol="0" anchor="t"/>
-          <a:lstStyle/>
-          <a:p>
-            <a:pPr algn="l" indent="0" marL="0">
-              <a:lnSpc>
-                <a:spcPct val="140000"/>
-              </a:lnSpc>
-              <a:buNone/>
-            </a:pPr>
-            <a:r>
-              <a:rPr lang="en-US" sz="1700" dirty="0">
-                <a:solidFill>
-                  <a:srgbClr val="A87A2E"/>
-                </a:solidFill>
-                <a:latin typeface="Libre Franklin" pitchFamily="34" charset="0"/>
-                <a:ea typeface="Libre Franklin" pitchFamily="34" charset="-122"/>
-                <a:cs typeface="Libre Franklin" pitchFamily="34" charset="-120"/>
-              </a:rPr>
-              <a:t>—</a:t>
-            </a:r>
-            <a:endParaRPr lang="en-US" sz="1700" dirty="0"/>
-          </a:p>
-        </p:txBody>
-      </p:sp>
-      <p:sp>
-        <p:nvSpPr>
-          <p:cNvPr id="16" name="Text 10"/>
-          <p:cNvSpPr/>
-          <p:nvPr/>
-        </p:nvSpPr>
-        <p:spPr>
-          <a:xfrm>
-            <a:off x="927100" y="3271520"/>
-            <a:ext cx="9156700" cy="753110"/>
-          </a:xfrm>
-          <a:prstGeom prst="rect">
-            <a:avLst/>
-          </a:prstGeom>
-          <a:noFill/>
-          <a:ln/>
-        </p:spPr>
-        <p:txBody>
-          <a:bodyPr wrap="square" lIns="0" tIns="0" rIns="0" bIns="0" rtlCol="0" anchor="t"/>
-          <a:lstStyle/>
-          <a:p>
-            <a:pPr algn="l" indent="0" marL="0">
-              <a:lnSpc>
-                <a:spcPct val="145000"/>
-              </a:lnSpc>
-              <a:buNone/>
-            </a:pPr>
-            <a:r>
-              <a:rPr lang="en-US" sz="1700" b="1" dirty="0">
-                <a:solidFill>
-                  <a:srgbClr val="332F2A"/>
-                </a:solidFill>
-                <a:latin typeface="Libre Franklin" pitchFamily="34" charset="0"/>
-                <a:ea typeface="Libre Franklin" pitchFamily="34" charset="-122"/>
-                <a:cs typeface="Libre Franklin" pitchFamily="34" charset="-120"/>
-              </a:rPr>
-              <a:t>Paste both into .env, save, close the tab. </a:t>
-            </a:r>
-            <a:pPr algn="l" indent="0" marL="0">
-              <a:lnSpc>
-                <a:spcPct val="145000"/>
-              </a:lnSpc>
-              <a:buNone/>
-            </a:pPr>
-            <a:r>
-              <a:rPr lang="en-US" sz="1700" dirty="0">
-                <a:solidFill>
-                  <a:srgbClr val="332F2A"/>
-                </a:solidFill>
-                <a:latin typeface="Libre Franklin" pitchFamily="34" charset="0"/>
-                <a:ea typeface="Libre Franklin" pitchFamily="34" charset="-122"/>
-                <a:cs typeface="Libre Franklin" pitchFamily="34" charset="-120"/>
-              </a:rPr>
-              <a:t>A key is a password, and you will be sharing this screen before the day is out.</a:t>
-            </a:r>
-            <a:endParaRPr lang="en-US" sz="1700" dirty="0"/>
-          </a:p>
-        </p:txBody>
-      </p:sp>
-      <p:sp>
-        <p:nvSpPr>
-          <p:cNvPr id="17" name="Text 11"/>
-          <p:cNvSpPr/>
-          <p:nvPr/>
-        </p:nvSpPr>
-        <p:spPr>
-          <a:xfrm>
-            <a:off x="558800" y="4151630"/>
-            <a:ext cx="190500" cy="317500"/>
-          </a:xfrm>
-          <a:prstGeom prst="rect">
-            <a:avLst/>
-          </a:prstGeom>
-          <a:noFill/>
-          <a:ln/>
-        </p:spPr>
-        <p:txBody>
-          <a:bodyPr wrap="square" lIns="0" tIns="0" rIns="0" bIns="0" rtlCol="0" anchor="t"/>
-          <a:lstStyle/>
-          <a:p>
-            <a:pPr algn="l" indent="0" marL="0">
-              <a:lnSpc>
-                <a:spcPct val="140000"/>
-              </a:lnSpc>
-              <a:buNone/>
-            </a:pPr>
-            <a:r>
-              <a:rPr lang="en-US" sz="1700" dirty="0">
-                <a:solidFill>
-                  <a:srgbClr val="A87A2E"/>
-                </a:solidFill>
-                <a:latin typeface="Libre Franklin" pitchFamily="34" charset="0"/>
-                <a:ea typeface="Libre Franklin" pitchFamily="34" charset="-122"/>
-                <a:cs typeface="Libre Franklin" pitchFamily="34" charset="-120"/>
-              </a:rPr>
-              <a:t>—</a:t>
-            </a:r>
-            <a:endParaRPr lang="en-US" sz="1700" dirty="0"/>
-          </a:p>
-        </p:txBody>
-      </p:sp>
-      <p:sp>
-        <p:nvSpPr>
-          <p:cNvPr id="18" name="Text 12"/>
-          <p:cNvSpPr/>
-          <p:nvPr/>
-        </p:nvSpPr>
-        <p:spPr>
-          <a:xfrm>
-            <a:off x="927100" y="4151630"/>
-            <a:ext cx="9156700" cy="753110"/>
-          </a:xfrm>
-          <a:prstGeom prst="rect">
-            <a:avLst/>
-          </a:prstGeom>
-          <a:noFill/>
-          <a:ln/>
-        </p:spPr>
-        <p:txBody>
-          <a:bodyPr wrap="square" lIns="0" tIns="0" rIns="0" bIns="0" rtlCol="0" anchor="t"/>
-          <a:lstStyle/>
-          <a:p>
-            <a:pPr algn="l" indent="0" marL="0">
-              <a:lnSpc>
-                <a:spcPct val="145000"/>
-              </a:lnSpc>
-              <a:buNone/>
-            </a:pPr>
-            <a:r>
-              <a:rPr lang="en-US" sz="1700" b="1" dirty="0">
-                <a:solidFill>
-                  <a:srgbClr val="332F2A"/>
-                </a:solidFill>
-                <a:latin typeface="Libre Franklin" pitchFamily="34" charset="0"/>
-                <a:ea typeface="Libre Franklin" pitchFamily="34" charset="-122"/>
-                <a:cs typeface="Libre Franklin" pitchFamily="34" charset="-120"/>
-              </a:rPr>
-              <a:t>Then run check_setup.py. </a:t>
-            </a:r>
-            <a:pPr algn="l" indent="0" marL="0">
-              <a:lnSpc>
-                <a:spcPct val="145000"/>
-              </a:lnSpc>
-              <a:buNone/>
-            </a:pPr>
-            <a:r>
-              <a:rPr lang="en-US" sz="1700" dirty="0">
-                <a:solidFill>
-                  <a:srgbClr val="332F2A"/>
-                </a:solidFill>
-                <a:latin typeface="Libre Franklin" pitchFamily="34" charset="0"/>
-                <a:ea typeface="Libre Franklin" pitchFamily="34" charset="-122"/>
-                <a:cs typeface="Libre Franklin" pitchFamily="34" charset="-120"/>
-              </a:rPr>
-              <a:t>Five checks. It names whichever one is not right yet. Do not move on until they are all green.</a:t>
+              <a:t>Read the reference, then ship</a:t>
             </a:r>
             <a:endParaRPr lang="en-US" sz="1700" dirty="0"/>
           </a:p>
@@ -15976,7 +16904,7 @@
     <p:bg>
       <p:bgPr>
         <a:solidFill>
-          <a:srgbClr val="FCFBF8"/>
+          <a:srgbClr val="F5F2EC"/>
         </a:solidFill>
       </p:bgPr>
     </p:bg>
@@ -16002,8 +16930,8 @@
         </p:nvSpPr>
         <p:spPr>
           <a:xfrm>
-            <a:off x="558800" y="355600"/>
-            <a:ext cx="11074400" cy="215900"/>
+            <a:off x="558800" y="2286000"/>
+            <a:ext cx="11074400" cy="254000"/>
           </a:xfrm>
           <a:prstGeom prst="rect">
             <a:avLst/>
@@ -16022,97 +16950,49 @@
               <a:buNone/>
             </a:pPr>
             <a:r>
-              <a:rPr lang="en-US" sz="1200" spc="168" kern="0" dirty="0">
-                <a:solidFill>
-                  <a:srgbClr val="77726A"/>
-                </a:solidFill>
-                <a:latin typeface="IBM Plex Mono" pitchFamily="34" charset="0"/>
-                <a:ea typeface="IBM Plex Mono" pitchFamily="34" charset="-122"/>
-                <a:cs typeface="IBM Plex Mono" pitchFamily="34" charset="-120"/>
-              </a:rPr>
-              <a:t>SETUP</a:t>
-            </a:r>
-            <a:endParaRPr lang="en-US" sz="1200" dirty="0"/>
-          </a:p>
-        </p:txBody>
-      </p:sp>
-      <p:pic>
-        <p:nvPicPr>
-          <p:cNvPr id="3" name="Image 0" descr="icons/python.png">    </p:cNvPr>
-          <p:cNvPicPr>
-            <a:picLocks noChangeAspect="1"/>
-          </p:cNvPicPr>
-          <p:nvPr/>
-        </p:nvPicPr>
-        <p:blipFill>
-          <a:blip r:embed="rId1"/>
-          <a:stretch>
-            <a:fillRect/>
-          </a:stretch>
-        </p:blipFill>
-        <p:spPr>
-          <a:xfrm>
-            <a:off x="11087100" y="361950"/>
-            <a:ext cx="203200" cy="203200"/>
-          </a:xfrm>
-          <a:prstGeom prst="rect">
-            <a:avLst/>
-          </a:prstGeom>
-        </p:spPr>
-      </p:pic>
-      <p:pic>
-        <p:nvPicPr>
-          <p:cNvPr id="4" name="Image 1" descr="icons/googlegemini.png">    </p:cNvPr>
-          <p:cNvPicPr>
-            <a:picLocks noChangeAspect="1"/>
-          </p:cNvPicPr>
-          <p:nvPr/>
-        </p:nvPicPr>
-        <p:blipFill>
-          <a:blip r:embed="rId2"/>
-          <a:stretch>
-            <a:fillRect/>
-          </a:stretch>
-        </p:blipFill>
-        <p:spPr>
-          <a:xfrm>
-            <a:off x="11430000" y="361950"/>
-            <a:ext cx="203200" cy="203200"/>
-          </a:xfrm>
-          <a:prstGeom prst="rect">
-            <a:avLst/>
-          </a:prstGeom>
-        </p:spPr>
-      </p:pic>
-      <p:sp>
-        <p:nvSpPr>
-          <p:cNvPr id="5" name="Text 1"/>
-          <p:cNvSpPr/>
-          <p:nvPr/>
-        </p:nvSpPr>
-        <p:spPr>
-          <a:xfrm>
-            <a:off x="558800" y="635000"/>
-            <a:ext cx="11074400" cy="508000"/>
-          </a:xfrm>
-          <a:prstGeom prst="rect">
-            <a:avLst/>
-          </a:prstGeom>
-          <a:noFill/>
-          <a:ln/>
-        </p:spPr>
-        <p:txBody>
-          <a:bodyPr wrap="square" lIns="0" tIns="0" rIns="0" bIns="0" rtlCol="0" anchor="t"/>
-          <a:lstStyle/>
-          <a:p>
-            <a:pPr algn="l" indent="0" marL="0">
-              <a:lnSpc>
-                <a:spcPct val="110000"/>
-              </a:lnSpc>
-              <a:buNone/>
-            </a:pPr>
-            <a:r>
-              <a:rPr lang="en-US" sz="2800" b="1" dirty="0">
+              <a:rPr lang="en-US" sz="1300" spc="182" kern="0" dirty="0">
+                <a:solidFill>
+                  <a:srgbClr val="A87A2E"/>
+                </a:solidFill>
+                <a:latin typeface="IBM Plex Mono" pitchFamily="34" charset="0"/>
+                <a:ea typeface="IBM Plex Mono" pitchFamily="34" charset="-122"/>
+                <a:cs typeface="IBM Plex Mono" pitchFamily="34" charset="-120"/>
+              </a:rPr>
+              <a:t>SECTION 01</a:t>
+            </a:r>
+            <a:endParaRPr lang="en-US" sz="1300" dirty="0"/>
+          </a:p>
+        </p:txBody>
+      </p:sp>
+      <p:sp>
+        <p:nvSpPr>
+          <p:cNvPr id="3" name="Text 1"/>
+          <p:cNvSpPr/>
+          <p:nvPr/>
+        </p:nvSpPr>
+        <p:spPr>
+          <a:xfrm>
+            <a:off x="558800" y="2667000"/>
+            <a:ext cx="8255000" cy="1206500"/>
+          </a:xfrm>
+          <a:prstGeom prst="rect">
+            <a:avLst/>
+          </a:prstGeom>
+          <a:noFill/>
+          <a:ln/>
+        </p:spPr>
+        <p:txBody>
+          <a:bodyPr wrap="square" lIns="0" tIns="0" rIns="0" bIns="0" rtlCol="0" anchor="t"/>
+          <a:lstStyle/>
+          <a:p>
+            <a:pPr algn="l" indent="0" marL="0">
+              <a:lnSpc>
+                <a:spcPct val="108000"/>
+              </a:lnSpc>
+              <a:buNone/>
+            </a:pPr>
+            <a:r>
+              <a:rPr lang="en-US" sz="4000" b="1" dirty="0">
                 <a:solidFill>
                   <a:srgbClr val="332F2A"/>
                 </a:solidFill>
@@ -16120,504 +17000,51 @@
                 <a:ea typeface="Libre Franklin" pitchFamily="34" charset="-122"/>
                 <a:cs typeface="Libre Franklin" pitchFamily="34" charset="-120"/>
               </a:rPr>
-              <a:t>The five checks</a:t>
-            </a:r>
-            <a:endParaRPr lang="en-US" sz="2800" dirty="0"/>
-          </a:p>
-        </p:txBody>
-      </p:sp>
-      <p:sp>
-        <p:nvSpPr>
-          <p:cNvPr id="6" name="Shape 2"/>
-          <p:cNvSpPr/>
-          <p:nvPr/>
-        </p:nvSpPr>
-        <p:spPr>
-          <a:xfrm>
-            <a:off x="558800" y="1181100"/>
-            <a:ext cx="11074400" cy="6350"/>
-          </a:xfrm>
-          <a:prstGeom prst="rect">
-            <a:avLst/>
-          </a:prstGeom>
-          <a:solidFill>
-            <a:srgbClr val="E1DED7"/>
-          </a:solidFill>
-          <a:ln/>
-        </p:spPr>
-      </p:sp>
-      <p:sp>
-        <p:nvSpPr>
-          <p:cNvPr id="7" name="Text 3"/>
-          <p:cNvSpPr/>
-          <p:nvPr/>
-        </p:nvSpPr>
-        <p:spPr>
-          <a:xfrm>
-            <a:off x="558800" y="6337300"/>
-            <a:ext cx="9804400" cy="215900"/>
-          </a:xfrm>
-          <a:prstGeom prst="rect">
-            <a:avLst/>
-          </a:prstGeom>
-          <a:noFill/>
-          <a:ln/>
-        </p:spPr>
-        <p:txBody>
-          <a:bodyPr wrap="square" lIns="0" tIns="0" rIns="0" bIns="0" rtlCol="0" anchor="t"/>
-          <a:lstStyle/>
-          <a:p>
-            <a:pPr algn="l" indent="0" marL="0">
-              <a:lnSpc>
-                <a:spcPct val="145000"/>
-              </a:lnSpc>
-              <a:buNone/>
-            </a:pPr>
-            <a:r>
-              <a:rPr lang="en-US" sz="1200" dirty="0">
-                <a:solidFill>
-                  <a:srgbClr val="99948B"/>
-                </a:solidFill>
-                <a:latin typeface="IBM Plex Mono" pitchFamily="34" charset="0"/>
-                <a:ea typeface="IBM Plex Mono" pitchFamily="34" charset="-122"/>
-                <a:cs typeface="IBM Plex Mono" pitchFamily="34" charset="-120"/>
-              </a:rPr>
-              <a:t>AI for Software Development · Session 1</a:t>
-            </a:r>
-            <a:endParaRPr lang="en-US" sz="1200" dirty="0"/>
-          </a:p>
-        </p:txBody>
-      </p:sp>
-      <p:sp>
-        <p:nvSpPr>
-          <p:cNvPr id="8" name="Text 4"/>
-          <p:cNvSpPr/>
-          <p:nvPr/>
-        </p:nvSpPr>
-        <p:spPr>
-          <a:xfrm>
-            <a:off x="10363200" y="6337300"/>
-            <a:ext cx="1270000" cy="215900"/>
-          </a:xfrm>
-          <a:prstGeom prst="rect">
-            <a:avLst/>
-          </a:prstGeom>
-          <a:noFill/>
-          <a:ln/>
-        </p:spPr>
-        <p:txBody>
-          <a:bodyPr wrap="square" lIns="0" tIns="0" rIns="0" bIns="0" rtlCol="0" anchor="t"/>
-          <a:lstStyle/>
-          <a:p>
-            <a:pPr algn="r" indent="0" marL="0">
-              <a:lnSpc>
-                <a:spcPct val="145000"/>
-              </a:lnSpc>
-              <a:buNone/>
-            </a:pPr>
-            <a:r>
-              <a:rPr lang="en-US" sz="1200" dirty="0">
-                <a:solidFill>
-                  <a:srgbClr val="99948B"/>
-                </a:solidFill>
-                <a:latin typeface="IBM Plex Mono" pitchFamily="34" charset="0"/>
-                <a:ea typeface="IBM Plex Mono" pitchFamily="34" charset="-122"/>
-                <a:cs typeface="IBM Plex Mono" pitchFamily="34" charset="-120"/>
-              </a:rPr>
-              <a:t>03</a:t>
-            </a:r>
-            <a:endParaRPr lang="en-US" sz="1200" dirty="0"/>
-          </a:p>
-        </p:txBody>
-      </p:sp>
-      <p:sp>
-        <p:nvSpPr>
-          <p:cNvPr id="9" name="Shape 5"/>
-          <p:cNvSpPr/>
-          <p:nvPr/>
-        </p:nvSpPr>
-        <p:spPr>
-          <a:xfrm>
-            <a:off x="558800" y="1511300"/>
-            <a:ext cx="6517030" cy="4572000"/>
-          </a:xfrm>
-          <a:prstGeom prst="rect">
-            <a:avLst/>
-          </a:prstGeom>
-          <a:solidFill>
-            <a:srgbClr val="F5F2EC"/>
-          </a:solidFill>
-          <a:ln w="6350">
-            <a:solidFill>
-              <a:srgbClr val="E1DED7"/>
-            </a:solidFill>
-            <a:prstDash val="solid"/>
-          </a:ln>
-        </p:spPr>
-      </p:sp>
-      <p:sp>
-        <p:nvSpPr>
-          <p:cNvPr id="10" name="Text 6"/>
-          <p:cNvSpPr/>
-          <p:nvPr/>
-        </p:nvSpPr>
-        <p:spPr>
-          <a:xfrm>
-            <a:off x="800100" y="1727200"/>
-            <a:ext cx="6034430" cy="4140200"/>
-          </a:xfrm>
-          <a:prstGeom prst="rect">
-            <a:avLst/>
-          </a:prstGeom>
-          <a:noFill/>
-          <a:ln/>
-        </p:spPr>
-        <p:txBody>
-          <a:bodyPr wrap="square" lIns="0" tIns="0" rIns="0" bIns="0" rtlCol="0" anchor="t"/>
-          <a:lstStyle/>
-          <a:p>
-            <a:pPr indent="0" marL="0">
-              <a:lnSpc>
-                <a:spcPct val="160000"/>
-              </a:lnSpc>
-              <a:buNone/>
-            </a:pPr>
-            <a:r>
-              <a:rPr lang="en-US" sz="1400" dirty="0">
-                <a:solidFill>
-                  <a:srgbClr val="332F2A"/>
-                </a:solidFill>
-                <a:latin typeface="IBM Plex Mono" pitchFamily="34" charset="0"/>
-                <a:ea typeface="IBM Plex Mono" pitchFamily="34" charset="-122"/>
-                <a:cs typeface="IBM Plex Mono" pitchFamily="34" charset="-120"/>
-              </a:rPr>
-              <a:t>$ python check_setup.py</a:t>
-            </a:r>
-            <a:endParaRPr lang="en-US" sz="1400" dirty="0"/>
-          </a:p>
-          <a:p>
-            <a:pPr indent="0" marL="0">
-              <a:lnSpc>
-                <a:spcPct val="160000"/>
-              </a:lnSpc>
-              <a:buNone/>
-            </a:pPr>
-            <a:endParaRPr lang="en-US" sz="1400" dirty="0"/>
-          </a:p>
-          <a:p>
-            <a:pPr indent="0" marL="0">
-              <a:lnSpc>
-                <a:spcPct val="160000"/>
-              </a:lnSpc>
-              <a:buNone/>
-            </a:pPr>
-            <a:r>
-              <a:rPr lang="en-US" sz="1400" dirty="0">
-                <a:solidFill>
-                  <a:srgbClr val="332F2A"/>
-                </a:solidFill>
-                <a:latin typeface="IBM Plex Mono" pitchFamily="34" charset="0"/>
-                <a:ea typeface="IBM Plex Mono" pitchFamily="34" charset="-122"/>
-                <a:cs typeface="IBM Plex Mono" pitchFamily="34" charset="-120"/>
-              </a:rPr>
-              <a:t>[PASS] Python version: 3.11</a:t>
-            </a:r>
-            <a:endParaRPr lang="en-US" sz="1400" dirty="0"/>
-          </a:p>
-          <a:p>
-            <a:pPr indent="0" marL="0">
-              <a:lnSpc>
-                <a:spcPct val="160000"/>
-              </a:lnSpc>
-              <a:buNone/>
-            </a:pPr>
-            <a:r>
-              <a:rPr lang="en-US" sz="1400" dirty="0">
-                <a:solidFill>
-                  <a:srgbClr val="332F2A"/>
-                </a:solidFill>
-                <a:latin typeface="IBM Plex Mono" pitchFamily="34" charset="0"/>
-                <a:ea typeface="IBM Plex Mono" pitchFamily="34" charset="-122"/>
-                <a:cs typeface="IBM Plex Mono" pitchFamily="34" charset="-120"/>
-              </a:rPr>
-              <a:t>[PASS] Packages: all 6 installed</a:t>
-            </a:r>
-            <a:endParaRPr lang="en-US" sz="1400" dirty="0"/>
-          </a:p>
-          <a:p>
-            <a:pPr indent="0" marL="0">
-              <a:lnSpc>
-                <a:spcPct val="160000"/>
-              </a:lnSpc>
-              <a:buNone/>
-            </a:pPr>
-            <a:r>
-              <a:rPr lang="en-US" sz="1400" dirty="0">
-                <a:solidFill>
-                  <a:srgbClr val="332F2A"/>
-                </a:solidFill>
-                <a:latin typeface="IBM Plex Mono" pitchFamily="34" charset="0"/>
-                <a:ea typeface="IBM Plex Mono" pitchFamily="34" charset="-122"/>
-                <a:cs typeface="IBM Plex Mono" pitchFamily="34" charset="-120"/>
-              </a:rPr>
-              <a:t>[PASS] API key present</a:t>
-            </a:r>
-            <a:endParaRPr lang="en-US" sz="1400" dirty="0"/>
-          </a:p>
-          <a:p>
-            <a:pPr indent="0" marL="0">
-              <a:lnSpc>
-                <a:spcPct val="160000"/>
-              </a:lnSpc>
-              <a:buNone/>
-            </a:pPr>
-            <a:r>
-              <a:rPr lang="en-US" sz="1400" dirty="0">
-                <a:solidFill>
-                  <a:srgbClr val="332F2A"/>
-                </a:solidFill>
-                <a:latin typeface="IBM Plex Mono" pitchFamily="34" charset="0"/>
-                <a:ea typeface="IBM Plex Mono" pitchFamily="34" charset="-122"/>
-                <a:cs typeface="IBM Plex Mono" pitchFamily="34" charset="-120"/>
-              </a:rPr>
-              <a:t>[PASS] API key works: Gemini</a:t>
-            </a:r>
-            <a:endParaRPr lang="en-US" sz="1400" dirty="0"/>
-          </a:p>
-          <a:p>
-            <a:pPr indent="0" marL="0">
-              <a:lnSpc>
-                <a:spcPct val="160000"/>
-              </a:lnSpc>
-              <a:buNone/>
-            </a:pPr>
-            <a:r>
-              <a:rPr lang="en-US" sz="1400" dirty="0">
-                <a:solidFill>
-                  <a:srgbClr val="332F2A"/>
-                </a:solidFill>
-                <a:latin typeface="IBM Plex Mono" pitchFamily="34" charset="0"/>
-                <a:ea typeface="IBM Plex Mono" pitchFamily="34" charset="-122"/>
-                <a:cs typeface="IBM Plex Mono" pitchFamily="34" charset="-120"/>
-              </a:rPr>
-              <a:t>       replied</a:t>
-            </a:r>
-            <a:endParaRPr lang="en-US" sz="1400" dirty="0"/>
-          </a:p>
-          <a:p>
-            <a:pPr indent="0" marL="0">
-              <a:lnSpc>
-                <a:spcPct val="160000"/>
-              </a:lnSpc>
-              <a:buNone/>
-            </a:pPr>
-            <a:r>
-              <a:rPr lang="en-US" sz="1400" dirty="0">
-                <a:solidFill>
-                  <a:srgbClr val="332F2A"/>
-                </a:solidFill>
-                <a:latin typeface="IBM Plex Mono" pitchFamily="34" charset="0"/>
-                <a:ea typeface="IBM Plex Mono" pitchFamily="34" charset="-122"/>
-                <a:cs typeface="IBM Plex Mono" pitchFamily="34" charset="-120"/>
-              </a:rPr>
-              <a:t>[PASS] Backup provider: both</a:t>
-            </a:r>
-            <a:endParaRPr lang="en-US" sz="1400" dirty="0"/>
-          </a:p>
-          <a:p>
-            <a:pPr indent="0" marL="0">
-              <a:lnSpc>
-                <a:spcPct val="160000"/>
-              </a:lnSpc>
-              <a:buNone/>
-            </a:pPr>
-            <a:r>
-              <a:rPr lang="en-US" sz="1400" dirty="0">
-                <a:solidFill>
-                  <a:srgbClr val="332F2A"/>
-                </a:solidFill>
-                <a:latin typeface="IBM Plex Mono" pitchFamily="34" charset="0"/>
-                <a:ea typeface="IBM Plex Mono" pitchFamily="34" charset="-122"/>
-                <a:cs typeface="IBM Plex Mono" pitchFamily="34" charset="-120"/>
-              </a:rPr>
-              <a:t>       providers configured</a:t>
-            </a:r>
-            <a:endParaRPr lang="en-US" sz="1400" dirty="0"/>
-          </a:p>
-          <a:p>
-            <a:pPr indent="0" marL="0">
-              <a:lnSpc>
-                <a:spcPct val="160000"/>
-              </a:lnSpc>
-              <a:buNone/>
-            </a:pPr>
-            <a:endParaRPr lang="en-US" sz="1400" dirty="0"/>
-          </a:p>
-          <a:p>
-            <a:pPr indent="0" marL="0">
-              <a:lnSpc>
-                <a:spcPct val="160000"/>
-              </a:lnSpc>
-              <a:buNone/>
-            </a:pPr>
-            <a:r>
-              <a:rPr lang="en-US" sz="1400" dirty="0">
-                <a:solidFill>
-                  <a:srgbClr val="332F2A"/>
-                </a:solidFill>
-                <a:latin typeface="IBM Plex Mono" pitchFamily="34" charset="0"/>
-                <a:ea typeface="IBM Plex Mono" pitchFamily="34" charset="-122"/>
-                <a:cs typeface="IBM Plex Mono" pitchFamily="34" charset="-120"/>
-              </a:rPr>
-              <a:t>ALL CHECKS PASSED</a:t>
-            </a:r>
-            <a:endParaRPr lang="en-US" sz="1400" dirty="0"/>
-          </a:p>
-        </p:txBody>
-      </p:sp>
-      <p:sp>
-        <p:nvSpPr>
-          <p:cNvPr id="11" name="Text 7"/>
-          <p:cNvSpPr/>
-          <p:nvPr/>
-        </p:nvSpPr>
-        <p:spPr>
-          <a:xfrm>
-            <a:off x="7431430" y="1511300"/>
-            <a:ext cx="4201770" cy="1305560"/>
-          </a:xfrm>
-          <a:prstGeom prst="rect">
-            <a:avLst/>
-          </a:prstGeom>
-          <a:noFill/>
-          <a:ln/>
-        </p:spPr>
-        <p:txBody>
-          <a:bodyPr wrap="square" lIns="0" tIns="0" rIns="0" bIns="0" rtlCol="0" anchor="t"/>
-          <a:lstStyle/>
-          <a:p>
-            <a:pPr algn="l" indent="0" marL="0">
-              <a:lnSpc>
-                <a:spcPct val="145000"/>
-              </a:lnSpc>
-              <a:buNone/>
-            </a:pPr>
-            <a:r>
-              <a:rPr lang="en-US" sz="1600" dirty="0">
-                <a:solidFill>
-                  <a:srgbClr val="332F2A"/>
+              <a:t>How an agent works</a:t>
+            </a:r>
+            <a:endParaRPr lang="en-US" sz="4000" dirty="0"/>
+          </a:p>
+        </p:txBody>
+      </p:sp>
+      <p:sp>
+        <p:nvSpPr>
+          <p:cNvPr id="4" name="Text 2"/>
+          <p:cNvSpPr/>
+          <p:nvPr/>
+        </p:nvSpPr>
+        <p:spPr>
+          <a:xfrm>
+            <a:off x="558800" y="4064000"/>
+            <a:ext cx="6985000" cy="635000"/>
+          </a:xfrm>
+          <a:prstGeom prst="rect">
+            <a:avLst/>
+          </a:prstGeom>
+          <a:noFill/>
+          <a:ln/>
+        </p:spPr>
+        <p:txBody>
+          <a:bodyPr wrap="square" lIns="0" tIns="0" rIns="0" bIns="0" rtlCol="0" anchor="t"/>
+          <a:lstStyle/>
+          <a:p>
+            <a:pPr algn="l" indent="0" marL="0">
+              <a:lnSpc>
+                <a:spcPct val="140000"/>
+              </a:lnSpc>
+              <a:buNone/>
+            </a:pPr>
+            <a:r>
+              <a:rPr lang="en-US" sz="1700" dirty="0">
+                <a:solidFill>
+                  <a:srgbClr val="77726A"/>
                 </a:solidFill>
                 <a:latin typeface="Libre Franklin" pitchFamily="34" charset="0"/>
                 <a:ea typeface="Libre Franklin" pitchFamily="34" charset="-122"/>
                 <a:cs typeface="Libre Franklin" pitchFamily="34" charset="-120"/>
               </a:rPr>
-              <a:t>Five checks, in the order they can fail. A failing line names the fix; it never just tells you something is wrong.</a:t>
-            </a:r>
-            <a:endParaRPr lang="en-US" sz="1600" dirty="0"/>
-          </a:p>
-        </p:txBody>
-      </p:sp>
-      <p:sp>
-        <p:nvSpPr>
-          <p:cNvPr id="12" name="Text 8"/>
-          <p:cNvSpPr/>
-          <p:nvPr/>
-        </p:nvSpPr>
-        <p:spPr>
-          <a:xfrm>
-            <a:off x="7431430" y="2943860"/>
-            <a:ext cx="4201770" cy="1305560"/>
-          </a:xfrm>
-          <a:prstGeom prst="rect">
-            <a:avLst/>
-          </a:prstGeom>
-          <a:noFill/>
-          <a:ln/>
-        </p:spPr>
-        <p:txBody>
-          <a:bodyPr wrap="square" lIns="0" tIns="0" rIns="0" bIns="0" rtlCol="0" anchor="t"/>
-          <a:lstStyle/>
-          <a:p>
-            <a:pPr algn="l" indent="0" marL="0">
-              <a:lnSpc>
-                <a:spcPct val="145000"/>
-              </a:lnSpc>
-              <a:buNone/>
-            </a:pPr>
-            <a:r>
-              <a:rPr lang="en-US" sz="1600" dirty="0">
-                <a:solidFill>
-                  <a:srgbClr val="77726A"/>
-                </a:solidFill>
-                <a:latin typeface="Libre Franklin" pitchFamily="34" charset="0"/>
-                <a:ea typeface="Libre Franklin" pitchFamily="34" charset="-122"/>
-                <a:cs typeface="Libre Franklin" pitchFamily="34" charset="-120"/>
-              </a:rPr>
-              <a:t>Still stuck after ten minutes? Ask a neighbour before you ask me. TROUBLESHOOTING.md carries the same list with fixes.</a:t>
-            </a:r>
-            <a:endParaRPr lang="en-US" sz="1600" dirty="0"/>
-          </a:p>
-        </p:txBody>
-      </p:sp>
-      <p:sp>
-        <p:nvSpPr>
-          <p:cNvPr id="13" name="Shape 9"/>
-          <p:cNvSpPr/>
-          <p:nvPr/>
-        </p:nvSpPr>
-        <p:spPr>
-          <a:xfrm>
-            <a:off x="7431430" y="5384800"/>
-            <a:ext cx="12700" cy="698500"/>
-          </a:xfrm>
-          <a:prstGeom prst="rect">
-            <a:avLst/>
-          </a:prstGeom>
-          <a:solidFill>
-            <a:srgbClr val="A87A2E"/>
-          </a:solidFill>
-          <a:ln/>
-        </p:spPr>
-      </p:sp>
-      <p:sp>
-        <p:nvSpPr>
-          <p:cNvPr id="14" name="Text 10"/>
-          <p:cNvSpPr/>
-          <p:nvPr/>
-        </p:nvSpPr>
-        <p:spPr>
-          <a:xfrm>
-            <a:off x="7596530" y="5416550"/>
-            <a:ext cx="4036670" cy="698500"/>
-          </a:xfrm>
-          <a:prstGeom prst="rect">
-            <a:avLst/>
-          </a:prstGeom>
-          <a:noFill/>
-          <a:ln/>
-        </p:spPr>
-        <p:txBody>
-          <a:bodyPr wrap="square" lIns="0" tIns="0" rIns="0" bIns="0" rtlCol="0" anchor="t"/>
-          <a:lstStyle/>
-          <a:p>
-            <a:pPr algn="l" indent="0" marL="0">
-              <a:lnSpc>
-                <a:spcPct val="140000"/>
-              </a:lnSpc>
-              <a:buNone/>
-            </a:pPr>
-            <a:r>
-              <a:rPr lang="en-US" sz="1500" dirty="0">
-                <a:solidFill>
-                  <a:srgbClr val="332F2A"/>
-                </a:solidFill>
-                <a:latin typeface="Libre Franklin" pitchFamily="34" charset="0"/>
-                <a:ea typeface="Libre Franklin" pitchFamily="34" charset="-122"/>
-                <a:cs typeface="Libre Franklin" pitchFamily="34" charset="-120"/>
-              </a:rPr>
-              <a:t>Nothing installs on the lab PC. The machine you are working on is in the browser.</a:t>
-            </a:r>
-            <a:endParaRPr lang="en-US" sz="1500" dirty="0"/>
+              <a:t>What actually happens between typing a request and a file changing on disk.</a:t>
+            </a:r>
+            <a:endParaRPr lang="en-US" sz="1700" dirty="0"/>
           </a:p>
         </p:txBody>
       </p:sp>
@@ -22818,7 +23245,153 @@
                 <a:ea typeface="IBM Plex Mono" pitchFamily="34" charset="-122"/>
                 <a:cs typeface="IBM Plex Mono" pitchFamily="34" charset="-120"/>
               </a:rPr>
-              <a:t>SETUP</a:t>
+              <a:t>SECTION 01</a:t>
+            </a:r>
+            <a:endParaRPr lang="en-US" sz="1200" dirty="0"/>
+          </a:p>
+        </p:txBody>
+      </p:sp>
+      <p:sp>
+        <p:nvSpPr>
+          <p:cNvPr id="3" name="Text 1"/>
+          <p:cNvSpPr/>
+          <p:nvPr/>
+        </p:nvSpPr>
+        <p:spPr>
+          <a:xfrm>
+            <a:off x="558800" y="635000"/>
+            <a:ext cx="11074400" cy="508000"/>
+          </a:xfrm>
+          <a:prstGeom prst="rect">
+            <a:avLst/>
+          </a:prstGeom>
+          <a:noFill/>
+          <a:ln/>
+        </p:spPr>
+        <p:txBody>
+          <a:bodyPr wrap="square" lIns="0" tIns="0" rIns="0" bIns="0" rtlCol="0" anchor="t"/>
+          <a:lstStyle/>
+          <a:p>
+            <a:pPr algn="l" indent="0" marL="0">
+              <a:lnSpc>
+                <a:spcPct val="110000"/>
+              </a:lnSpc>
+              <a:buNone/>
+            </a:pPr>
+            <a:r>
+              <a:rPr lang="en-US" sz="2800" b="1" dirty="0">
+                <a:solidFill>
+                  <a:srgbClr val="332F2A"/>
+                </a:solidFill>
+                <a:latin typeface="Libre Franklin" pitchFamily="34" charset="0"/>
+                <a:ea typeface="Libre Franklin" pitchFamily="34" charset="-122"/>
+                <a:cs typeface="Libre Franklin" pitchFamily="34" charset="-120"/>
+              </a:rPr>
+              <a:t>What a language model is</a:t>
+            </a:r>
+            <a:endParaRPr lang="en-US" sz="2800" dirty="0"/>
+          </a:p>
+        </p:txBody>
+      </p:sp>
+      <p:sp>
+        <p:nvSpPr>
+          <p:cNvPr id="4" name="Shape 2"/>
+          <p:cNvSpPr/>
+          <p:nvPr/>
+        </p:nvSpPr>
+        <p:spPr>
+          <a:xfrm>
+            <a:off x="558800" y="1181100"/>
+            <a:ext cx="11074400" cy="6350"/>
+          </a:xfrm>
+          <a:prstGeom prst="rect">
+            <a:avLst/>
+          </a:prstGeom>
+          <a:solidFill>
+            <a:srgbClr val="E1DED7"/>
+          </a:solidFill>
+          <a:ln/>
+        </p:spPr>
+      </p:sp>
+      <p:sp>
+        <p:nvSpPr>
+          <p:cNvPr id="5" name="Text 3"/>
+          <p:cNvSpPr/>
+          <p:nvPr/>
+        </p:nvSpPr>
+        <p:spPr>
+          <a:xfrm>
+            <a:off x="558800" y="6337300"/>
+            <a:ext cx="9804400" cy="215900"/>
+          </a:xfrm>
+          <a:prstGeom prst="rect">
+            <a:avLst/>
+          </a:prstGeom>
+          <a:noFill/>
+          <a:ln/>
+        </p:spPr>
+        <p:txBody>
+          <a:bodyPr wrap="square" lIns="0" tIns="0" rIns="0" bIns="0" rtlCol="0" anchor="t"/>
+          <a:lstStyle/>
+          <a:p>
+            <a:pPr algn="l" indent="0" marL="0">
+              <a:lnSpc>
+                <a:spcPct val="145000"/>
+              </a:lnSpc>
+              <a:buNone/>
+            </a:pPr>
+            <a:r>
+              <a:rPr lang="en-US" sz="1200" dirty="0">
+                <a:solidFill>
+                  <a:srgbClr val="99948B"/>
+                </a:solidFill>
+                <a:latin typeface="IBM Plex Mono" pitchFamily="34" charset="0"/>
+                <a:ea typeface="IBM Plex Mono" pitchFamily="34" charset="-122"/>
+                <a:cs typeface="IBM Plex Mono" pitchFamily="34" charset="-120"/>
+              </a:rPr>
+              <a:t>AI for Software Development · Session 1</a:t>
+            </a:r>
+            <a:endParaRPr lang="en-US" sz="1200" dirty="0"/>
+          </a:p>
+        </p:txBody>
+      </p:sp>
+      <p:sp>
+        <p:nvSpPr>
+          <p:cNvPr id="6" name="Text 4"/>
+          <p:cNvSpPr/>
+          <p:nvPr/>
+        </p:nvSpPr>
+        <p:spPr>
+          <a:xfrm>
+            <a:off x="10363200" y="6337300"/>
+            <a:ext cx="1270000" cy="215900"/>
+          </a:xfrm>
+          <a:prstGeom prst="rect">
+            <a:avLst/>
+          </a:prstGeom>
+          <a:noFill/>
+          <a:ln/>
+        </p:spPr>
+        <p:txBody>
+          <a:bodyPr wrap="square" lIns="0" tIns="0" rIns="0" bIns="0" rtlCol="0" anchor="t"/>
+          <a:lstStyle/>
+          <a:p>
+            <a:pPr algn="r" indent="0" marL="0">
+              <a:lnSpc>
+                <a:spcPct val="145000"/>
+              </a:lnSpc>
+              <a:buNone/>
+            </a:pPr>
+            <a:r>
+              <a:rPr lang="en-US" sz="1200" dirty="0">
+                <a:solidFill>
+                  <a:srgbClr val="99948B"/>
+                </a:solidFill>
+                <a:latin typeface="IBM Plex Mono" pitchFamily="34" charset="0"/>
+                <a:ea typeface="IBM Plex Mono" pitchFamily="34" charset="-122"/>
+                <a:cs typeface="IBM Plex Mono" pitchFamily="34" charset="-120"/>
+              </a:rPr>
+              <a:t>04</a:t>
             </a:r>
             <a:endParaRPr lang="en-US" sz="1200" dirty="0"/>
           </a:p>
@@ -22826,7 +23399,7 @@
       </p:sp>
       <p:pic>
         <p:nvPicPr>
-          <p:cNvPr id="3" name="Image 0" descr="icons/cline.png">    </p:cNvPr>
+          <p:cNvPr id="7" name="Image 0" descr="figures/fig-language-model.png">    </p:cNvPr>
           <p:cNvPicPr>
             <a:picLocks noChangeAspect="1"/>
           </p:cNvPicPr>
@@ -22834,97 +23407,48 @@
         </p:nvPicPr>
         <p:blipFill>
           <a:blip r:embed="rId1"/>
-          <a:stretch>
-            <a:fillRect/>
-          </a:stretch>
+          <a:srcRect l="0" r="0" t="0" b="0"/>
+          <a:stretch/>
         </p:blipFill>
         <p:spPr>
           <a:xfrm>
-            <a:off x="10744200" y="361950"/>
-            <a:ext cx="203200" cy="203200"/>
+            <a:off x="558800" y="1511300"/>
+            <a:ext cx="6134100" cy="4572000"/>
           </a:xfrm>
           <a:prstGeom prst="rect">
             <a:avLst/>
           </a:prstGeom>
         </p:spPr>
       </p:pic>
-      <p:pic>
-        <p:nvPicPr>
-          <p:cNvPr id="4" name="Image 1" descr="icons/mistralai.png">    </p:cNvPr>
-          <p:cNvPicPr>
-            <a:picLocks noChangeAspect="1"/>
-          </p:cNvPicPr>
-          <p:nvPr/>
-        </p:nvPicPr>
-        <p:blipFill>
-          <a:blip r:embed="rId2"/>
-          <a:stretch>
-            <a:fillRect/>
-          </a:stretch>
-        </p:blipFill>
-        <p:spPr>
-          <a:xfrm>
-            <a:off x="11087100" y="361950"/>
-            <a:ext cx="203200" cy="203200"/>
-          </a:xfrm>
-          <a:prstGeom prst="rect">
-            <a:avLst/>
-          </a:prstGeom>
-        </p:spPr>
-      </p:pic>
-      <p:pic>
-        <p:nvPicPr>
-          <p:cNvPr id="5" name="Image 2" descr="icons/googlegemini.png">    </p:cNvPr>
-          <p:cNvPicPr>
-            <a:picLocks noChangeAspect="1"/>
-          </p:cNvPicPr>
-          <p:nvPr/>
-        </p:nvPicPr>
-        <p:blipFill>
-          <a:blip r:embed="rId3"/>
-          <a:stretch>
-            <a:fillRect/>
-          </a:stretch>
-        </p:blipFill>
-        <p:spPr>
-          <a:xfrm>
-            <a:off x="11430000" y="361950"/>
-            <a:ext cx="203200" cy="203200"/>
-          </a:xfrm>
-          <a:prstGeom prst="rect">
-            <a:avLst/>
-          </a:prstGeom>
-        </p:spPr>
-      </p:pic>
-      <p:sp>
-        <p:nvSpPr>
-          <p:cNvPr id="6" name="Text 1"/>
-          <p:cNvSpPr/>
-          <p:nvPr/>
-        </p:nvSpPr>
-        <p:spPr>
-          <a:xfrm>
-            <a:off x="558800" y="635000"/>
-            <a:ext cx="11074400" cy="508000"/>
-          </a:xfrm>
-          <a:prstGeom prst="rect">
-            <a:avLst/>
-          </a:prstGeom>
-          <a:noFill/>
-          <a:ln/>
-        </p:spPr>
-        <p:txBody>
-          <a:bodyPr wrap="square" lIns="0" tIns="0" rIns="0" bIns="0" rtlCol="0" anchor="t"/>
-          <a:lstStyle/>
-          <a:p>
-            <a:pPr algn="l" indent="0" marL="0">
-              <a:lnSpc>
-                <a:spcPct val="110000"/>
-              </a:lnSpc>
-              <a:buNone/>
-            </a:pPr>
-            <a:r>
-              <a:rPr lang="en-US" sz="2800" b="1" dirty="0">
+      <p:sp>
+        <p:nvSpPr>
+          <p:cNvPr id="8" name="Text 5"/>
+          <p:cNvSpPr/>
+          <p:nvPr/>
+        </p:nvSpPr>
+        <p:spPr>
+          <a:xfrm>
+            <a:off x="7099300" y="1511300"/>
+            <a:ext cx="4533900" cy="1600200"/>
+          </a:xfrm>
+          <a:prstGeom prst="rect">
+            <a:avLst/>
+          </a:prstGeom>
+          <a:noFill/>
+          <a:ln/>
+        </p:spPr>
+        <p:txBody>
+          <a:bodyPr wrap="square" lIns="0" tIns="0" rIns="0" bIns="0" rtlCol="0" anchor="t"/>
+          <a:lstStyle/>
+          <a:p>
+            <a:pPr algn="l" indent="0" marL="0">
+              <a:lnSpc>
+                <a:spcPct val="145000"/>
+              </a:lnSpc>
+              <a:buNone/>
+            </a:pPr>
+            <a:r>
+              <a:rPr lang="en-US" sz="1600" dirty="0">
                 <a:solidFill>
                   <a:srgbClr val="332F2A"/>
                 </a:solidFill>
@@ -22932,42 +23456,22 @@
                 <a:ea typeface="Libre Franklin" pitchFamily="34" charset="-122"/>
                 <a:cs typeface="Libre Franklin" pitchFamily="34" charset="-120"/>
               </a:rPr>
-              <a:t>Cline needs its own key</a:t>
-            </a:r>
-            <a:endParaRPr lang="en-US" sz="2800" dirty="0"/>
-          </a:p>
-        </p:txBody>
-      </p:sp>
-      <p:sp>
-        <p:nvSpPr>
-          <p:cNvPr id="7" name="Shape 2"/>
-          <p:cNvSpPr/>
-          <p:nvPr/>
-        </p:nvSpPr>
-        <p:spPr>
-          <a:xfrm>
-            <a:off x="558800" y="1181100"/>
-            <a:ext cx="11074400" cy="6350"/>
-          </a:xfrm>
-          <a:prstGeom prst="rect">
-            <a:avLst/>
-          </a:prstGeom>
-          <a:solidFill>
-            <a:srgbClr val="E1DED7"/>
-          </a:solidFill>
-          <a:ln/>
-        </p:spPr>
-      </p:sp>
-      <p:sp>
-        <p:nvSpPr>
-          <p:cNvPr id="8" name="Text 3"/>
-          <p:cNvSpPr/>
-          <p:nvPr/>
-        </p:nvSpPr>
-        <p:spPr>
-          <a:xfrm>
-            <a:off x="558800" y="6337300"/>
-            <a:ext cx="9804400" cy="215900"/>
+              <a:t>Trained once, on a very large amount of writing, to do a single thing: given some text, guess what comes next. Everything it appears to do is built on top of that one trick.</a:t>
+            </a:r>
+            <a:endParaRPr lang="en-US" sz="1600" dirty="0"/>
+          </a:p>
+        </p:txBody>
+      </p:sp>
+      <p:sp>
+        <p:nvSpPr>
+          <p:cNvPr id="9" name="Text 6"/>
+          <p:cNvSpPr/>
+          <p:nvPr/>
+        </p:nvSpPr>
+        <p:spPr>
+          <a:xfrm>
+            <a:off x="7099300" y="3238500"/>
+            <a:ext cx="4533900" cy="1305560"/>
           </a:xfrm>
           <a:prstGeom prst="rect">
             <a:avLst/>
@@ -22986,114 +23490,30 @@
               <a:buNone/>
             </a:pPr>
             <a:r>
-              <a:rPr lang="en-US" sz="1200" dirty="0">
-                <a:solidFill>
-                  <a:srgbClr val="99948B"/>
-                </a:solidFill>
-                <a:latin typeface="IBM Plex Mono" pitchFamily="34" charset="0"/>
-                <a:ea typeface="IBM Plex Mono" pitchFamily="34" charset="-122"/>
-                <a:cs typeface="IBM Plex Mono" pitchFamily="34" charset="-120"/>
-              </a:rPr>
-              <a:t>AI for Software Development · Session 1</a:t>
-            </a:r>
-            <a:endParaRPr lang="en-US" sz="1200" dirty="0"/>
-          </a:p>
-        </p:txBody>
-      </p:sp>
-      <p:sp>
-        <p:nvSpPr>
-          <p:cNvPr id="9" name="Text 4"/>
-          <p:cNvSpPr/>
-          <p:nvPr/>
-        </p:nvSpPr>
-        <p:spPr>
-          <a:xfrm>
-            <a:off x="10363200" y="6337300"/>
-            <a:ext cx="1270000" cy="215900"/>
-          </a:xfrm>
-          <a:prstGeom prst="rect">
-            <a:avLst/>
-          </a:prstGeom>
-          <a:noFill/>
-          <a:ln/>
-        </p:spPr>
-        <p:txBody>
-          <a:bodyPr wrap="square" lIns="0" tIns="0" rIns="0" bIns="0" rtlCol="0" anchor="t"/>
-          <a:lstStyle/>
-          <a:p>
-            <a:pPr algn="r" indent="0" marL="0">
-              <a:lnSpc>
-                <a:spcPct val="145000"/>
-              </a:lnSpc>
-              <a:buNone/>
-            </a:pPr>
-            <a:r>
-              <a:rPr lang="en-US" sz="1200" dirty="0">
-                <a:solidFill>
-                  <a:srgbClr val="99948B"/>
-                </a:solidFill>
-                <a:latin typeface="IBM Plex Mono" pitchFamily="34" charset="0"/>
-                <a:ea typeface="IBM Plex Mono" pitchFamily="34" charset="-122"/>
-                <a:cs typeface="IBM Plex Mono" pitchFamily="34" charset="-120"/>
-              </a:rPr>
-              <a:t>04</a:t>
-            </a:r>
-            <a:endParaRPr lang="en-US" sz="1200" dirty="0"/>
-          </a:p>
-        </p:txBody>
-      </p:sp>
-      <p:sp>
-        <p:nvSpPr>
-          <p:cNvPr id="10" name="Text 5"/>
-          <p:cNvSpPr/>
-          <p:nvPr/>
-        </p:nvSpPr>
-        <p:spPr>
-          <a:xfrm>
-            <a:off x="558800" y="1511300"/>
-            <a:ext cx="190500" cy="317500"/>
-          </a:xfrm>
-          <a:prstGeom prst="rect">
-            <a:avLst/>
-          </a:prstGeom>
-          <a:noFill/>
-          <a:ln/>
-        </p:spPr>
-        <p:txBody>
-          <a:bodyPr wrap="square" lIns="0" tIns="0" rIns="0" bIns="0" rtlCol="0" anchor="t"/>
-          <a:lstStyle/>
-          <a:p>
-            <a:pPr algn="l" indent="0" marL="0">
-              <a:lnSpc>
-                <a:spcPct val="140000"/>
-              </a:lnSpc>
-              <a:buNone/>
-            </a:pPr>
-            <a:r>
-              <a:rPr lang="en-US" sz="1700" dirty="0">
-                <a:solidFill>
-                  <a:srgbClr val="A87A2E"/>
+              <a:rPr lang="en-US" sz="1600" dirty="0">
+                <a:solidFill>
+                  <a:srgbClr val="77726A"/>
                 </a:solidFill>
                 <a:latin typeface="Libre Franklin" pitchFamily="34" charset="0"/>
                 <a:ea typeface="Libre Franklin" pitchFamily="34" charset="-122"/>
                 <a:cs typeface="Libre Franklin" pitchFamily="34" charset="-120"/>
               </a:rPr>
-              <a:t>—</a:t>
-            </a:r>
-            <a:endParaRPr lang="en-US" sz="1700" dirty="0"/>
-          </a:p>
-        </p:txBody>
-      </p:sp>
-      <p:sp>
-        <p:nvSpPr>
-          <p:cNvPr id="11" name="Text 6"/>
-          <p:cNvSpPr/>
-          <p:nvPr/>
-        </p:nvSpPr>
-        <p:spPr>
-          <a:xfrm>
-            <a:off x="927100" y="1511300"/>
-            <a:ext cx="9156700" cy="753110"/>
+              <a:t>It consults no database. An answer is reconstructed from patterns, never retrieved — which is the mechanism behind everything on the next three slides.</a:t>
+            </a:r>
+            <a:endParaRPr lang="en-US" sz="1600" dirty="0"/>
+          </a:p>
+        </p:txBody>
+      </p:sp>
+      <p:sp>
+        <p:nvSpPr>
+          <p:cNvPr id="10" name="Text 7"/>
+          <p:cNvSpPr/>
+          <p:nvPr/>
+        </p:nvSpPr>
+        <p:spPr>
+          <a:xfrm>
+            <a:off x="7099300" y="5956300"/>
+            <a:ext cx="4533900" cy="215900"/>
           </a:xfrm>
           <a:prstGeom prst="rect">
             <a:avLst/>
@@ -23112,320 +23532,17 @@
               <a:buNone/>
             </a:pPr>
             <a:r>
-              <a:rPr lang="en-US" sz="1700" b="1" dirty="0">
-                <a:solidFill>
-                  <a:srgbClr val="332F2A"/>
-                </a:solidFill>
-                <a:latin typeface="Libre Franklin" pitchFamily="34" charset="0"/>
-                <a:ea typeface="Libre Franklin" pitchFamily="34" charset="-122"/>
-                <a:cs typeface="Libre Franklin" pitchFamily="34" charset="-120"/>
-              </a:rPr>
-              <a:t>.env is for your app. </a:t>
-            </a:r>
-            <a:pPr algn="l" indent="0" marL="0">
-              <a:lnSpc>
-                <a:spcPct val="145000"/>
-              </a:lnSpc>
-              <a:buNone/>
-            </a:pPr>
-            <a:r>
-              <a:rPr lang="en-US" sz="1700" dirty="0">
-                <a:solidFill>
-                  <a:srgbClr val="332F2A"/>
-                </a:solidFill>
-                <a:latin typeface="Libre Franklin" pitchFamily="34" charset="0"/>
-                <a:ea typeface="Libre Franklin" pitchFamily="34" charset="-122"/>
-                <a:cs typeface="Libre Franklin" pitchFamily="34" charset="-120"/>
-              </a:rPr>
-              <a:t>check_setup.py and core/llm.py read it. Cline never does — separate program, separate settings, its own copy of the key.</a:t>
-            </a:r>
-            <a:endParaRPr lang="en-US" sz="1700" dirty="0"/>
-          </a:p>
-        </p:txBody>
-      </p:sp>
-      <p:sp>
-        <p:nvSpPr>
-          <p:cNvPr id="12" name="Text 7"/>
-          <p:cNvSpPr/>
-          <p:nvPr/>
-        </p:nvSpPr>
-        <p:spPr>
-          <a:xfrm>
-            <a:off x="558800" y="2391410"/>
-            <a:ext cx="190500" cy="317500"/>
-          </a:xfrm>
-          <a:prstGeom prst="rect">
-            <a:avLst/>
-          </a:prstGeom>
-          <a:noFill/>
-          <a:ln/>
-        </p:spPr>
-        <p:txBody>
-          <a:bodyPr wrap="square" lIns="0" tIns="0" rIns="0" bIns="0" rtlCol="0" anchor="t"/>
-          <a:lstStyle/>
-          <a:p>
-            <a:pPr algn="l" indent="0" marL="0">
-              <a:lnSpc>
-                <a:spcPct val="140000"/>
-              </a:lnSpc>
-              <a:buNone/>
-            </a:pPr>
-            <a:r>
-              <a:rPr lang="en-US" sz="1700" dirty="0">
-                <a:solidFill>
-                  <a:srgbClr val="A87A2E"/>
-                </a:solidFill>
-                <a:latin typeface="Libre Franklin" pitchFamily="34" charset="0"/>
-                <a:ea typeface="Libre Franklin" pitchFamily="34" charset="-122"/>
-                <a:cs typeface="Libre Franklin" pitchFamily="34" charset="-120"/>
-              </a:rPr>
-              <a:t>—</a:t>
-            </a:r>
-            <a:endParaRPr lang="en-US" sz="1700" dirty="0"/>
-          </a:p>
-        </p:txBody>
-      </p:sp>
-      <p:sp>
-        <p:nvSpPr>
-          <p:cNvPr id="13" name="Text 8"/>
-          <p:cNvSpPr/>
-          <p:nvPr/>
-        </p:nvSpPr>
-        <p:spPr>
-          <a:xfrm>
-            <a:off x="927100" y="2391410"/>
-            <a:ext cx="9156700" cy="1066165"/>
-          </a:xfrm>
-          <a:prstGeom prst="rect">
-            <a:avLst/>
-          </a:prstGeom>
-          <a:noFill/>
-          <a:ln/>
-        </p:spPr>
-        <p:txBody>
-          <a:bodyPr wrap="square" lIns="0" tIns="0" rIns="0" bIns="0" rtlCol="0" anchor="t"/>
-          <a:lstStyle/>
-          <a:p>
-            <a:pPr algn="l" indent="0" marL="0">
-              <a:lnSpc>
-                <a:spcPct val="145000"/>
-              </a:lnSpc>
-              <a:buNone/>
-            </a:pPr>
-            <a:r>
-              <a:rPr lang="en-US" sz="1700" b="1" dirty="0">
-                <a:solidFill>
-                  <a:srgbClr val="332F2A"/>
-                </a:solidFill>
-                <a:latin typeface="Libre Franklin" pitchFamily="34" charset="0"/>
-                <a:ea typeface="Libre Franklin" pitchFamily="34" charset="-122"/>
-                <a:cs typeface="Libre Franklin" pitchFamily="34" charset="-120"/>
-              </a:rPr>
-              <a:t>It opens on a screen nobody expects. </a:t>
-            </a:r>
-            <a:pPr algn="l" indent="0" marL="0">
-              <a:lnSpc>
-                <a:spcPct val="145000"/>
-              </a:lnSpc>
-              <a:buNone/>
-            </a:pPr>
-            <a:r>
-              <a:rPr lang="en-US" sz="1700" dirty="0">
-                <a:solidFill>
-                  <a:srgbClr val="332F2A"/>
-                </a:solidFill>
-                <a:latin typeface="Libre Franklin" pitchFamily="34" charset="0"/>
-                <a:ea typeface="Libre Franklin" pitchFamily="34" charset="-122"/>
-                <a:cs typeface="Libre Franklin" pitchFamily="34" charset="-120"/>
-              </a:rPr>
-              <a:t>“How will you use Cline?”, with Absolutely Free already ticked. Do not take it — choose Bring my own API key, or your key is never used.</a:t>
-            </a:r>
-            <a:endParaRPr lang="en-US" sz="1700" dirty="0"/>
-          </a:p>
-        </p:txBody>
-      </p:sp>
-      <p:sp>
-        <p:nvSpPr>
-          <p:cNvPr id="14" name="Text 9"/>
-          <p:cNvSpPr/>
-          <p:nvPr/>
-        </p:nvSpPr>
-        <p:spPr>
-          <a:xfrm>
-            <a:off x="558800" y="3584575"/>
-            <a:ext cx="190500" cy="317500"/>
-          </a:xfrm>
-          <a:prstGeom prst="rect">
-            <a:avLst/>
-          </a:prstGeom>
-          <a:noFill/>
-          <a:ln/>
-        </p:spPr>
-        <p:txBody>
-          <a:bodyPr wrap="square" lIns="0" tIns="0" rIns="0" bIns="0" rtlCol="0" anchor="t"/>
-          <a:lstStyle/>
-          <a:p>
-            <a:pPr algn="l" indent="0" marL="0">
-              <a:lnSpc>
-                <a:spcPct val="140000"/>
-              </a:lnSpc>
-              <a:buNone/>
-            </a:pPr>
-            <a:r>
-              <a:rPr lang="en-US" sz="1700" dirty="0">
-                <a:solidFill>
-                  <a:srgbClr val="A87A2E"/>
-                </a:solidFill>
-                <a:latin typeface="Libre Franklin" pitchFamily="34" charset="0"/>
-                <a:ea typeface="Libre Franklin" pitchFamily="34" charset="-122"/>
-                <a:cs typeface="Libre Franklin" pitchFamily="34" charset="-120"/>
-              </a:rPr>
-              <a:t>—</a:t>
-            </a:r>
-            <a:endParaRPr lang="en-US" sz="1700" dirty="0"/>
-          </a:p>
-        </p:txBody>
-      </p:sp>
-      <p:sp>
-        <p:nvSpPr>
-          <p:cNvPr id="15" name="Text 10"/>
-          <p:cNvSpPr/>
-          <p:nvPr/>
-        </p:nvSpPr>
-        <p:spPr>
-          <a:xfrm>
-            <a:off x="927100" y="3584575"/>
-            <a:ext cx="9156700" cy="1066165"/>
-          </a:xfrm>
-          <a:prstGeom prst="rect">
-            <a:avLst/>
-          </a:prstGeom>
-          <a:noFill/>
-          <a:ln/>
-        </p:spPr>
-        <p:txBody>
-          <a:bodyPr wrap="square" lIns="0" tIns="0" rIns="0" bIns="0" rtlCol="0" anchor="t"/>
-          <a:lstStyle/>
-          <a:p>
-            <a:pPr algn="l" indent="0" marL="0">
-              <a:lnSpc>
-                <a:spcPct val="145000"/>
-              </a:lnSpc>
-              <a:buNone/>
-            </a:pPr>
-            <a:r>
-              <a:rPr lang="en-US" sz="1700" b="1" dirty="0">
-                <a:solidFill>
-                  <a:srgbClr val="332F2A"/>
-                </a:solidFill>
-                <a:latin typeface="Libre Franklin" pitchFamily="34" charset="0"/>
-                <a:ea typeface="Libre Franklin" pitchFamily="34" charset="-122"/>
-                <a:cs typeface="Libre Franklin" pitchFamily="34" charset="-120"/>
-              </a:rPr>
-              <a:t>Then provider, then model. </a:t>
-            </a:r>
-            <a:pPr algn="l" indent="0" marL="0">
-              <a:lnSpc>
-                <a:spcPct val="145000"/>
-              </a:lnSpc>
-              <a:buNone/>
-            </a:pPr>
-            <a:r>
-              <a:rPr lang="en-US" sz="1700" dirty="0">
-                <a:solidFill>
-                  <a:srgbClr val="332F2A"/>
-                </a:solidFill>
-                <a:latin typeface="Libre Franklin" pitchFamily="34" charset="0"/>
-                <a:ea typeface="Libre Franklin" pitchFamily="34" charset="-122"/>
-                <a:cs typeface="Libre Franklin" pitchFamily="34" charset="-120"/>
-              </a:rPr>
-              <a:t>Mistral or Gemini, paste the key. Model names carry a date — devstral-2512, not devstral-latest. Prefer a devstral if you see one.</a:t>
-            </a:r>
-            <a:endParaRPr lang="en-US" sz="1700" dirty="0"/>
-          </a:p>
-        </p:txBody>
-      </p:sp>
-      <p:sp>
-        <p:nvSpPr>
-          <p:cNvPr id="16" name="Text 11"/>
-          <p:cNvSpPr/>
-          <p:nvPr/>
-        </p:nvSpPr>
-        <p:spPr>
-          <a:xfrm>
-            <a:off x="558800" y="4777740"/>
-            <a:ext cx="190500" cy="317500"/>
-          </a:xfrm>
-          <a:prstGeom prst="rect">
-            <a:avLst/>
-          </a:prstGeom>
-          <a:noFill/>
-          <a:ln/>
-        </p:spPr>
-        <p:txBody>
-          <a:bodyPr wrap="square" lIns="0" tIns="0" rIns="0" bIns="0" rtlCol="0" anchor="t"/>
-          <a:lstStyle/>
-          <a:p>
-            <a:pPr algn="l" indent="0" marL="0">
-              <a:lnSpc>
-                <a:spcPct val="140000"/>
-              </a:lnSpc>
-              <a:buNone/>
-            </a:pPr>
-            <a:r>
-              <a:rPr lang="en-US" sz="1700" dirty="0">
-                <a:solidFill>
-                  <a:srgbClr val="A87A2E"/>
-                </a:solidFill>
-                <a:latin typeface="Libre Franklin" pitchFamily="34" charset="0"/>
-                <a:ea typeface="Libre Franklin" pitchFamily="34" charset="-122"/>
-                <a:cs typeface="Libre Franklin" pitchFamily="34" charset="-120"/>
-              </a:rPr>
-              <a:t>—</a:t>
-            </a:r>
-            <a:endParaRPr lang="en-US" sz="1700" dirty="0"/>
-          </a:p>
-        </p:txBody>
-      </p:sp>
-      <p:sp>
-        <p:nvSpPr>
-          <p:cNvPr id="17" name="Text 12"/>
-          <p:cNvSpPr/>
-          <p:nvPr/>
-        </p:nvSpPr>
-        <p:spPr>
-          <a:xfrm>
-            <a:off x="927100" y="4777740"/>
-            <a:ext cx="9156700" cy="753110"/>
-          </a:xfrm>
-          <a:prstGeom prst="rect">
-            <a:avLst/>
-          </a:prstGeom>
-          <a:noFill/>
-          <a:ln/>
-        </p:spPr>
-        <p:txBody>
-          <a:bodyPr wrap="square" lIns="0" tIns="0" rIns="0" bIns="0" rtlCol="0" anchor="t"/>
-          <a:lstStyle/>
-          <a:p>
-            <a:pPr algn="l" indent="0" marL="0">
-              <a:lnSpc>
-                <a:spcPct val="145000"/>
-              </a:lnSpc>
-              <a:buNone/>
-            </a:pPr>
-            <a:r>
-              <a:rPr lang="en-US" sz="1700" dirty="0">
-                <a:solidFill>
-                  <a:srgbClr val="332F2A"/>
-                </a:solidFill>
-                <a:latin typeface="Libre Franklin" pitchFamily="34" charset="0"/>
-                <a:ea typeface="Libre Franklin" pitchFamily="34" charset="-122"/>
-                <a:cs typeface="Libre Franklin" pitchFamily="34" charset="-120"/>
-              </a:rPr>
-              <a:t>Check the model name after any reload: Cline can reset itself, sometimes to a paid one. A price per million tokens beside it means change it back.</a:t>
-            </a:r>
-            <a:endParaRPr lang="en-US" sz="1700" dirty="0"/>
+              <a:rPr lang="en-US" sz="1200" dirty="0">
+                <a:solidFill>
+                  <a:srgbClr val="99948B"/>
+                </a:solidFill>
+                <a:latin typeface="IBM Plex Mono" pitchFamily="34" charset="0"/>
+                <a:ea typeface="IBM Plex Mono" pitchFamily="34" charset="-122"/>
+                <a:cs typeface="IBM Plex Mono" pitchFamily="34" charset="-120"/>
+              </a:rPr>
+              <a:t>Fig. 1 — trained once, then rented by the word</a:t>
+            </a:r>
+            <a:endParaRPr lang="en-US" sz="1200" dirty="0"/>
           </a:p>
         </p:txBody>
       </p:sp>
@@ -29366,15 +29483,63 @@
                 <a:ea typeface="IBM Plex Mono" pitchFamily="34" charset="-122"/>
                 <a:cs typeface="IBM Plex Mono" pitchFamily="34" charset="-120"/>
               </a:rPr>
-              <a:t>SESSION 01</a:t>
+              <a:t>SECTION 01</a:t>
             </a:r>
             <a:endParaRPr lang="en-US" sz="1200" dirty="0"/>
           </a:p>
         </p:txBody>
       </p:sp>
-      <p:sp>
-        <p:nvSpPr>
-          <p:cNvPr id="3" name="Text 1"/>
+      <p:pic>
+        <p:nvPicPr>
+          <p:cNvPr id="3" name="Image 0" descr="icons/cline.png">    </p:cNvPr>
+          <p:cNvPicPr>
+            <a:picLocks noChangeAspect="1"/>
+          </p:cNvPicPr>
+          <p:nvPr/>
+        </p:nvPicPr>
+        <p:blipFill>
+          <a:blip r:embed="rId1"/>
+          <a:stretch>
+            <a:fillRect/>
+          </a:stretch>
+        </p:blipFill>
+        <p:spPr>
+          <a:xfrm>
+            <a:off x="11087100" y="361950"/>
+            <a:ext cx="203200" cy="203200"/>
+          </a:xfrm>
+          <a:prstGeom prst="rect">
+            <a:avLst/>
+          </a:prstGeom>
+        </p:spPr>
+      </p:pic>
+      <p:pic>
+        <p:nvPicPr>
+          <p:cNvPr id="4" name="Image 1" descr="icons/googlegemini.png">    </p:cNvPr>
+          <p:cNvPicPr>
+            <a:picLocks noChangeAspect="1"/>
+          </p:cNvPicPr>
+          <p:nvPr/>
+        </p:nvPicPr>
+        <p:blipFill>
+          <a:blip r:embed="rId2"/>
+          <a:stretch>
+            <a:fillRect/>
+          </a:stretch>
+        </p:blipFill>
+        <p:spPr>
+          <a:xfrm>
+            <a:off x="11430000" y="361950"/>
+            <a:ext cx="203200" cy="203200"/>
+          </a:xfrm>
+          <a:prstGeom prst="rect">
+            <a:avLst/>
+          </a:prstGeom>
+        </p:spPr>
+      </p:pic>
+      <p:sp>
+        <p:nvSpPr>
+          <p:cNvPr id="5" name="Text 1"/>
           <p:cNvSpPr/>
           <p:nvPr/>
         </p:nvSpPr>
@@ -29408,7 +29573,7 @@
                 <a:ea typeface="Libre Franklin" pitchFamily="34" charset="-122"/>
                 <a:cs typeface="Libre Franklin" pitchFamily="34" charset="-120"/>
               </a:rPr>
-              <a:t>Agenda</a:t>
+              <a:t>Harness and model</a:t>
             </a:r>
             <a:endParaRPr lang="en-US" sz="2800" dirty="0"/>
           </a:p>
@@ -29416,7 +29581,7 @@
       </p:sp>
       <p:sp>
         <p:nvSpPr>
-          <p:cNvPr id="4" name="Shape 2"/>
+          <p:cNvPr id="6" name="Shape 2"/>
           <p:cNvSpPr/>
           <p:nvPr/>
         </p:nvSpPr>
@@ -29436,7 +29601,7 @@
       </p:sp>
       <p:sp>
         <p:nvSpPr>
-          <p:cNvPr id="5" name="Text 3"/>
+          <p:cNvPr id="7" name="Text 3"/>
           <p:cNvSpPr/>
           <p:nvPr/>
         </p:nvSpPr>
@@ -29478,7 +29643,7 @@
       </p:sp>
       <p:sp>
         <p:nvSpPr>
-          <p:cNvPr id="6" name="Text 4"/>
+          <p:cNvPr id="8" name="Text 4"/>
           <p:cNvSpPr/>
           <p:nvPr/>
         </p:nvSpPr>
@@ -29518,16 +29683,39 @@
           </a:p>
         </p:txBody>
       </p:sp>
-      <p:sp>
-        <p:nvSpPr>
-          <p:cNvPr id="7" name="Text 5"/>
-          <p:cNvSpPr/>
-          <p:nvPr/>
-        </p:nvSpPr>
+      <p:pic>
+        <p:nvPicPr>
+          <p:cNvPr id="9" name="Image 2" descr="figures/fig-harness-model.png">    </p:cNvPr>
+          <p:cNvPicPr>
+            <a:picLocks noChangeAspect="1"/>
+          </p:cNvPicPr>
+          <p:nvPr/>
+        </p:nvPicPr>
+        <p:blipFill>
+          <a:blip r:embed="rId3"/>
+          <a:srcRect l="0" r="0" t="0" b="0"/>
+          <a:stretch/>
+        </p:blipFill>
         <p:spPr>
           <a:xfrm>
             <a:off x="558800" y="1511300"/>
-            <a:ext cx="381000" cy="254000"/>
+            <a:ext cx="6134100" cy="4572000"/>
+          </a:xfrm>
+          <a:prstGeom prst="rect">
+            <a:avLst/>
+          </a:prstGeom>
+        </p:spPr>
+      </p:pic>
+      <p:sp>
+        <p:nvSpPr>
+          <p:cNvPr id="10" name="Text 5"/>
+          <p:cNvSpPr/>
+          <p:nvPr/>
+        </p:nvSpPr>
+        <p:spPr>
+          <a:xfrm>
+            <a:off x="7099300" y="1511300"/>
+            <a:ext cx="4533900" cy="1600200"/>
           </a:xfrm>
           <a:prstGeom prst="rect">
             <a:avLst/>
@@ -29546,49 +29734,7 @@
               <a:buNone/>
             </a:pPr>
             <a:r>
-              <a:rPr lang="en-US" sz="1300" dirty="0">
-                <a:solidFill>
-                  <a:srgbClr val="A87A2E"/>
-                </a:solidFill>
-                <a:latin typeface="IBM Plex Mono" pitchFamily="34" charset="0"/>
-                <a:ea typeface="IBM Plex Mono" pitchFamily="34" charset="-122"/>
-                <a:cs typeface="IBM Plex Mono" pitchFamily="34" charset="-120"/>
-              </a:rPr>
-              <a:t>01</a:t>
-            </a:r>
-            <a:endParaRPr lang="en-US" sz="1300" dirty="0"/>
-          </a:p>
-        </p:txBody>
-      </p:sp>
-      <p:sp>
-        <p:nvSpPr>
-          <p:cNvPr id="8" name="Text 6"/>
-          <p:cNvSpPr/>
-          <p:nvPr/>
-        </p:nvSpPr>
-        <p:spPr>
-          <a:xfrm>
-            <a:off x="939800" y="1485900"/>
-            <a:ext cx="4902200" cy="571500"/>
-          </a:xfrm>
-          <a:prstGeom prst="rect">
-            <a:avLst/>
-          </a:prstGeom>
-          <a:noFill/>
-          <a:ln/>
-        </p:spPr>
-        <p:txBody>
-          <a:bodyPr wrap="square" lIns="0" tIns="0" rIns="0" bIns="0" rtlCol="0" anchor="t"/>
-          <a:lstStyle/>
-          <a:p>
-            <a:pPr algn="l" indent="0" marL="0">
-              <a:lnSpc>
-                <a:spcPct val="135000"/>
-              </a:lnSpc>
-              <a:buNone/>
-            </a:pPr>
-            <a:r>
-              <a:rPr lang="en-US" sz="1700" dirty="0">
+              <a:rPr lang="en-US" sz="1600" dirty="0">
                 <a:solidFill>
                   <a:srgbClr val="332F2A"/>
                 </a:solidFill>
@@ -29596,22 +29742,22 @@
                 <a:ea typeface="Libre Franklin" pitchFamily="34" charset="-122"/>
                 <a:cs typeface="Libre Franklin" pitchFamily="34" charset="-120"/>
               </a:rPr>
-              <a:t>How an agent works</a:t>
-            </a:r>
-            <a:endParaRPr lang="en-US" sz="1700" dirty="0"/>
-          </a:p>
-        </p:txBody>
-      </p:sp>
-      <p:sp>
-        <p:nvSpPr>
-          <p:cNvPr id="9" name="Text 7"/>
-          <p:cNvSpPr/>
-          <p:nvPr/>
-        </p:nvSpPr>
-        <p:spPr>
-          <a:xfrm>
-            <a:off x="6350000" y="1511300"/>
-            <a:ext cx="381000" cy="254000"/>
+              <a:t>A harness is the program that does things. Cline reads your files, writes the edits, runs the commands, and decides when to ask the model what to do next. It has no intelligence of its own.</a:t>
+            </a:r>
+            <a:endParaRPr lang="en-US" sz="1600" dirty="0"/>
+          </a:p>
+        </p:txBody>
+      </p:sp>
+      <p:sp>
+        <p:nvSpPr>
+          <p:cNvPr id="11" name="Text 6"/>
+          <p:cNvSpPr/>
+          <p:nvPr/>
+        </p:nvSpPr>
+        <p:spPr>
+          <a:xfrm>
+            <a:off x="7099300" y="3238500"/>
+            <a:ext cx="4533900" cy="1305560"/>
           </a:xfrm>
           <a:prstGeom prst="rect">
             <a:avLst/>
@@ -29630,72 +29776,30 @@
               <a:buNone/>
             </a:pPr>
             <a:r>
-              <a:rPr lang="en-US" sz="1300" dirty="0">
-                <a:solidFill>
-                  <a:srgbClr val="A87A2E"/>
-                </a:solidFill>
-                <a:latin typeface="IBM Plex Mono" pitchFamily="34" charset="0"/>
-                <a:ea typeface="IBM Plex Mono" pitchFamily="34" charset="-122"/>
-                <a:cs typeface="IBM Plex Mono" pitchFamily="34" charset="-120"/>
-              </a:rPr>
-              <a:t>02</a:t>
-            </a:r>
-            <a:endParaRPr lang="en-US" sz="1300" dirty="0"/>
-          </a:p>
-        </p:txBody>
-      </p:sp>
-      <p:sp>
-        <p:nvSpPr>
-          <p:cNvPr id="10" name="Text 8"/>
-          <p:cNvSpPr/>
-          <p:nvPr/>
-        </p:nvSpPr>
-        <p:spPr>
-          <a:xfrm>
-            <a:off x="6731000" y="1485900"/>
-            <a:ext cx="4902200" cy="571500"/>
-          </a:xfrm>
-          <a:prstGeom prst="rect">
-            <a:avLst/>
-          </a:prstGeom>
-          <a:noFill/>
-          <a:ln/>
-        </p:spPr>
-        <p:txBody>
-          <a:bodyPr wrap="square" lIns="0" tIns="0" rIns="0" bIns="0" rtlCol="0" anchor="t"/>
-          <a:lstStyle/>
-          <a:p>
-            <a:pPr algn="l" indent="0" marL="0">
-              <a:lnSpc>
-                <a:spcPct val="135000"/>
-              </a:lnSpc>
-              <a:buNone/>
-            </a:pPr>
-            <a:r>
-              <a:rPr lang="en-US" sz="1700" dirty="0">
-                <a:solidFill>
-                  <a:srgbClr val="332F2A"/>
+              <a:rPr lang="en-US" sz="1600" dirty="0">
+                <a:solidFill>
+                  <a:srgbClr val="77726A"/>
                 </a:solidFill>
                 <a:latin typeface="Libre Franklin" pitchFamily="34" charset="0"/>
                 <a:ea typeface="Libre Franklin" pitchFamily="34" charset="-122"/>
                 <a:cs typeface="Libre Franklin" pitchFamily="34" charset="-120"/>
               </a:rPr>
-              <a:t>What it costs, and why it fails</a:t>
-            </a:r>
-            <a:endParaRPr lang="en-US" sz="1700" dirty="0"/>
-          </a:p>
-        </p:txBody>
-      </p:sp>
-      <p:sp>
-        <p:nvSpPr>
-          <p:cNvPr id="11" name="Text 9"/>
-          <p:cNvSpPr/>
-          <p:nvPr/>
-        </p:nvSpPr>
-        <p:spPr>
-          <a:xfrm>
-            <a:off x="558800" y="2197100"/>
-            <a:ext cx="381000" cy="254000"/>
+              <a:t>The model is the thing that decides what to say. It runs on someone else’s computer, never sees your disk, and can be swapped for another in three clicks.</a:t>
+            </a:r>
+            <a:endParaRPr lang="en-US" sz="1600" dirty="0"/>
+          </a:p>
+        </p:txBody>
+      </p:sp>
+      <p:sp>
+        <p:nvSpPr>
+          <p:cNvPr id="12" name="Text 7"/>
+          <p:cNvSpPr/>
+          <p:nvPr/>
+        </p:nvSpPr>
+        <p:spPr>
+          <a:xfrm>
+            <a:off x="7099300" y="5956300"/>
+            <a:ext cx="4533900" cy="215900"/>
           </a:xfrm>
           <a:prstGeom prst="rect">
             <a:avLst/>
@@ -29714,311 +29818,17 @@
               <a:buNone/>
             </a:pPr>
             <a:r>
-              <a:rPr lang="en-US" sz="1300" dirty="0">
-                <a:solidFill>
-                  <a:srgbClr val="A87A2E"/>
-                </a:solidFill>
-                <a:latin typeface="IBM Plex Mono" pitchFamily="34" charset="0"/>
-                <a:ea typeface="IBM Plex Mono" pitchFamily="34" charset="-122"/>
-                <a:cs typeface="IBM Plex Mono" pitchFamily="34" charset="-120"/>
-              </a:rPr>
-              <a:t>03</a:t>
-            </a:r>
-            <a:endParaRPr lang="en-US" sz="1300" dirty="0"/>
-          </a:p>
-        </p:txBody>
-      </p:sp>
-      <p:sp>
-        <p:nvSpPr>
-          <p:cNvPr id="12" name="Text 10"/>
-          <p:cNvSpPr/>
-          <p:nvPr/>
-        </p:nvSpPr>
-        <p:spPr>
-          <a:xfrm>
-            <a:off x="939800" y="2171700"/>
-            <a:ext cx="4902200" cy="571500"/>
-          </a:xfrm>
-          <a:prstGeom prst="rect">
-            <a:avLst/>
-          </a:prstGeom>
-          <a:noFill/>
-          <a:ln/>
-        </p:spPr>
-        <p:txBody>
-          <a:bodyPr wrap="square" lIns="0" tIns="0" rIns="0" bIns="0" rtlCol="0" anchor="t"/>
-          <a:lstStyle/>
-          <a:p>
-            <a:pPr algn="l" indent="0" marL="0">
-              <a:lnSpc>
-                <a:spcPct val="135000"/>
-              </a:lnSpc>
-              <a:buNone/>
-            </a:pPr>
-            <a:r>
-              <a:rPr lang="en-US" sz="1700" dirty="0">
-                <a:solidFill>
-                  <a:srgbClr val="332F2A"/>
-                </a:solidFill>
-                <a:latin typeface="Libre Franklin" pitchFamily="34" charset="0"/>
-                <a:ea typeface="Libre Franklin" pitchFamily="34" charset="-122"/>
-                <a:cs typeface="Libre Franklin" pitchFamily="34" charset="-120"/>
-              </a:rPr>
-              <a:t>Warm-up — build it by asking</a:t>
-            </a:r>
-            <a:endParaRPr lang="en-US" sz="1700" dirty="0"/>
-          </a:p>
-        </p:txBody>
-      </p:sp>
-      <p:sp>
-        <p:nvSpPr>
-          <p:cNvPr id="13" name="Text 11"/>
-          <p:cNvSpPr/>
-          <p:nvPr/>
-        </p:nvSpPr>
-        <p:spPr>
-          <a:xfrm>
-            <a:off x="6350000" y="2197100"/>
-            <a:ext cx="381000" cy="254000"/>
-          </a:xfrm>
-          <a:prstGeom prst="rect">
-            <a:avLst/>
-          </a:prstGeom>
-          <a:noFill/>
-          <a:ln/>
-        </p:spPr>
-        <p:txBody>
-          <a:bodyPr wrap="square" lIns="0" tIns="0" rIns="0" bIns="0" rtlCol="0" anchor="t"/>
-          <a:lstStyle/>
-          <a:p>
-            <a:pPr algn="l" indent="0" marL="0">
-              <a:lnSpc>
-                <a:spcPct val="145000"/>
-              </a:lnSpc>
-              <a:buNone/>
-            </a:pPr>
-            <a:r>
-              <a:rPr lang="en-US" sz="1300" dirty="0">
-                <a:solidFill>
-                  <a:srgbClr val="A87A2E"/>
-                </a:solidFill>
-                <a:latin typeface="IBM Plex Mono" pitchFamily="34" charset="0"/>
-                <a:ea typeface="IBM Plex Mono" pitchFamily="34" charset="-122"/>
-                <a:cs typeface="IBM Plex Mono" pitchFamily="34" charset="-120"/>
-              </a:rPr>
-              <a:t>04</a:t>
-            </a:r>
-            <a:endParaRPr lang="en-US" sz="1300" dirty="0"/>
-          </a:p>
-        </p:txBody>
-      </p:sp>
-      <p:sp>
-        <p:nvSpPr>
-          <p:cNvPr id="14" name="Text 12"/>
-          <p:cNvSpPr/>
-          <p:nvPr/>
-        </p:nvSpPr>
-        <p:spPr>
-          <a:xfrm>
-            <a:off x="6731000" y="2171700"/>
-            <a:ext cx="4902200" cy="571500"/>
-          </a:xfrm>
-          <a:prstGeom prst="rect">
-            <a:avLst/>
-          </a:prstGeom>
-          <a:noFill/>
-          <a:ln/>
-        </p:spPr>
-        <p:txBody>
-          <a:bodyPr wrap="square" lIns="0" tIns="0" rIns="0" bIns="0" rtlCol="0" anchor="t"/>
-          <a:lstStyle/>
-          <a:p>
-            <a:pPr algn="l" indent="0" marL="0">
-              <a:lnSpc>
-                <a:spcPct val="135000"/>
-              </a:lnSpc>
-              <a:buNone/>
-            </a:pPr>
-            <a:r>
-              <a:rPr lang="en-US" sz="1700" dirty="0">
-                <a:solidFill>
-                  <a:srgbClr val="332F2A"/>
-                </a:solidFill>
-                <a:latin typeface="Libre Franklin" pitchFamily="34" charset="0"/>
-                <a:ea typeface="Libre Franklin" pitchFamily="34" charset="-122"/>
-                <a:cs typeface="Libre Franklin" pitchFamily="34" charset="-120"/>
-              </a:rPr>
-              <a:t>The Four Gates</a:t>
-            </a:r>
-            <a:endParaRPr lang="en-US" sz="1700" dirty="0"/>
-          </a:p>
-        </p:txBody>
-      </p:sp>
-      <p:sp>
-        <p:nvSpPr>
-          <p:cNvPr id="15" name="Text 13"/>
-          <p:cNvSpPr/>
-          <p:nvPr/>
-        </p:nvSpPr>
-        <p:spPr>
-          <a:xfrm>
-            <a:off x="558800" y="2882900"/>
-            <a:ext cx="381000" cy="254000"/>
-          </a:xfrm>
-          <a:prstGeom prst="rect">
-            <a:avLst/>
-          </a:prstGeom>
-          <a:noFill/>
-          <a:ln/>
-        </p:spPr>
-        <p:txBody>
-          <a:bodyPr wrap="square" lIns="0" tIns="0" rIns="0" bIns="0" rtlCol="0" anchor="t"/>
-          <a:lstStyle/>
-          <a:p>
-            <a:pPr algn="l" indent="0" marL="0">
-              <a:lnSpc>
-                <a:spcPct val="145000"/>
-              </a:lnSpc>
-              <a:buNone/>
-            </a:pPr>
-            <a:r>
-              <a:rPr lang="en-US" sz="1300" dirty="0">
-                <a:solidFill>
-                  <a:srgbClr val="A87A2E"/>
-                </a:solidFill>
-                <a:latin typeface="IBM Plex Mono" pitchFamily="34" charset="0"/>
-                <a:ea typeface="IBM Plex Mono" pitchFamily="34" charset="-122"/>
-                <a:cs typeface="IBM Plex Mono" pitchFamily="34" charset="-120"/>
-              </a:rPr>
-              <a:t>05</a:t>
-            </a:r>
-            <a:endParaRPr lang="en-US" sz="1300" dirty="0"/>
-          </a:p>
-        </p:txBody>
-      </p:sp>
-      <p:sp>
-        <p:nvSpPr>
-          <p:cNvPr id="16" name="Text 14"/>
-          <p:cNvSpPr/>
-          <p:nvPr/>
-        </p:nvSpPr>
-        <p:spPr>
-          <a:xfrm>
-            <a:off x="939800" y="2857500"/>
-            <a:ext cx="4902200" cy="571500"/>
-          </a:xfrm>
-          <a:prstGeom prst="rect">
-            <a:avLst/>
-          </a:prstGeom>
-          <a:noFill/>
-          <a:ln/>
-        </p:spPr>
-        <p:txBody>
-          <a:bodyPr wrap="square" lIns="0" tIns="0" rIns="0" bIns="0" rtlCol="0" anchor="t"/>
-          <a:lstStyle/>
-          <a:p>
-            <a:pPr algn="l" indent="0" marL="0">
-              <a:lnSpc>
-                <a:spcPct val="135000"/>
-              </a:lnSpc>
-              <a:buNone/>
-            </a:pPr>
-            <a:r>
-              <a:rPr lang="en-US" sz="1700" dirty="0">
-                <a:solidFill>
-                  <a:srgbClr val="332F2A"/>
-                </a:solidFill>
-                <a:latin typeface="Libre Franklin" pitchFamily="34" charset="0"/>
-                <a:ea typeface="Libre Franklin" pitchFamily="34" charset="-122"/>
-                <a:cs typeface="Libre Franklin" pitchFamily="34" charset="-120"/>
-              </a:rPr>
-              <a:t>Lab 1 — the same app, done properly</a:t>
-            </a:r>
-            <a:endParaRPr lang="en-US" sz="1700" dirty="0"/>
-          </a:p>
-        </p:txBody>
-      </p:sp>
-      <p:sp>
-        <p:nvSpPr>
-          <p:cNvPr id="17" name="Text 15"/>
-          <p:cNvSpPr/>
-          <p:nvPr/>
-        </p:nvSpPr>
-        <p:spPr>
-          <a:xfrm>
-            <a:off x="6350000" y="2882900"/>
-            <a:ext cx="381000" cy="254000"/>
-          </a:xfrm>
-          <a:prstGeom prst="rect">
-            <a:avLst/>
-          </a:prstGeom>
-          <a:noFill/>
-          <a:ln/>
-        </p:spPr>
-        <p:txBody>
-          <a:bodyPr wrap="square" lIns="0" tIns="0" rIns="0" bIns="0" rtlCol="0" anchor="t"/>
-          <a:lstStyle/>
-          <a:p>
-            <a:pPr algn="l" indent="0" marL="0">
-              <a:lnSpc>
-                <a:spcPct val="145000"/>
-              </a:lnSpc>
-              <a:buNone/>
-            </a:pPr>
-            <a:r>
-              <a:rPr lang="en-US" sz="1300" dirty="0">
-                <a:solidFill>
-                  <a:srgbClr val="A87A2E"/>
-                </a:solidFill>
-                <a:latin typeface="IBM Plex Mono" pitchFamily="34" charset="0"/>
-                <a:ea typeface="IBM Plex Mono" pitchFamily="34" charset="-122"/>
-                <a:cs typeface="IBM Plex Mono" pitchFamily="34" charset="-120"/>
-              </a:rPr>
-              <a:t>06</a:t>
-            </a:r>
-            <a:endParaRPr lang="en-US" sz="1300" dirty="0"/>
-          </a:p>
-        </p:txBody>
-      </p:sp>
-      <p:sp>
-        <p:nvSpPr>
-          <p:cNvPr id="18" name="Text 16"/>
-          <p:cNvSpPr/>
-          <p:nvPr/>
-        </p:nvSpPr>
-        <p:spPr>
-          <a:xfrm>
-            <a:off x="6731000" y="2857500"/>
-            <a:ext cx="4902200" cy="571500"/>
-          </a:xfrm>
-          <a:prstGeom prst="rect">
-            <a:avLst/>
-          </a:prstGeom>
-          <a:noFill/>
-          <a:ln/>
-        </p:spPr>
-        <p:txBody>
-          <a:bodyPr wrap="square" lIns="0" tIns="0" rIns="0" bIns="0" rtlCol="0" anchor="t"/>
-          <a:lstStyle/>
-          <a:p>
-            <a:pPr algn="l" indent="0" marL="0">
-              <a:lnSpc>
-                <a:spcPct val="135000"/>
-              </a:lnSpc>
-              <a:buNone/>
-            </a:pPr>
-            <a:r>
-              <a:rPr lang="en-US" sz="1700" dirty="0">
-                <a:solidFill>
-                  <a:srgbClr val="332F2A"/>
-                </a:solidFill>
-                <a:latin typeface="Libre Franklin" pitchFamily="34" charset="0"/>
-                <a:ea typeface="Libre Franklin" pitchFamily="34" charset="-122"/>
-                <a:cs typeface="Libre Franklin" pitchFamily="34" charset="-120"/>
-              </a:rPr>
-              <a:t>Read the reference, then ship</a:t>
-            </a:r>
-            <a:endParaRPr lang="en-US" sz="1700" dirty="0"/>
+              <a:rPr lang="en-US" sz="1200" dirty="0">
+                <a:solidFill>
+                  <a:srgbClr val="99948B"/>
+                </a:solidFill>
+                <a:latin typeface="IBM Plex Mono" pitchFamily="34" charset="0"/>
+                <a:ea typeface="IBM Plex Mono" pitchFamily="34" charset="-122"/>
+                <a:cs typeface="IBM Plex Mono" pitchFamily="34" charset="-120"/>
+              </a:rPr>
+              <a:t>Fig. 2 — the two pieces you are driving</a:t>
+            </a:r>
+            <a:endParaRPr lang="en-US" sz="1200" dirty="0"/>
           </a:p>
         </p:txBody>
       </p:sp>
@@ -30792,7 +30602,7 @@
                 <a:ea typeface="IBM Plex Mono" pitchFamily="34" charset="-122"/>
                 <a:cs typeface="IBM Plex Mono" pitchFamily="34" charset="-120"/>
               </a:rPr>
-              <a:t>Your Name · you@university.ac.th</a:t>
+              <a:t>Witchapong Daroontham · Department of Electrical Engineering</a:t>
             </a:r>
             <a:endParaRPr lang="en-US" sz="1200" dirty="0"/>
           </a:p>
@@ -30854,7 +30664,7 @@
     <p:bg>
       <p:bgPr>
         <a:solidFill>
-          <a:srgbClr val="F5F2EC"/>
+          <a:srgbClr val="FCFBF8"/>
         </a:solidFill>
       </p:bgPr>
     </p:bg>
@@ -30880,8 +30690,8 @@
         </p:nvSpPr>
         <p:spPr>
           <a:xfrm>
-            <a:off x="558800" y="2286000"/>
-            <a:ext cx="11074400" cy="254000"/>
+            <a:off x="558800" y="355600"/>
+            <a:ext cx="11074400" cy="215900"/>
           </a:xfrm>
           <a:prstGeom prst="rect">
             <a:avLst/>
@@ -30900,9 +30710,9 @@
               <a:buNone/>
             </a:pPr>
             <a:r>
-              <a:rPr lang="en-US" sz="1300" spc="182" kern="0" dirty="0">
-                <a:solidFill>
-                  <a:srgbClr val="A87A2E"/>
+              <a:rPr lang="en-US" sz="1200" spc="168" kern="0" dirty="0">
+                <a:solidFill>
+                  <a:srgbClr val="77726A"/>
                 </a:solidFill>
                 <a:latin typeface="IBM Plex Mono" pitchFamily="34" charset="0"/>
                 <a:ea typeface="IBM Plex Mono" pitchFamily="34" charset="-122"/>
@@ -30910,39 +30720,183 @@
               </a:rPr>
               <a:t>SECTION 01</a:t>
             </a:r>
-            <a:endParaRPr lang="en-US" sz="1300" dirty="0"/>
-          </a:p>
-        </p:txBody>
-      </p:sp>
-      <p:sp>
-        <p:nvSpPr>
-          <p:cNvPr id="3" name="Text 1"/>
-          <p:cNvSpPr/>
-          <p:nvPr/>
-        </p:nvSpPr>
-        <p:spPr>
-          <a:xfrm>
-            <a:off x="558800" y="2667000"/>
-            <a:ext cx="8255000" cy="1206500"/>
-          </a:xfrm>
-          <a:prstGeom prst="rect">
-            <a:avLst/>
-          </a:prstGeom>
-          <a:noFill/>
-          <a:ln/>
-        </p:spPr>
-        <p:txBody>
-          <a:bodyPr wrap="square" lIns="0" tIns="0" rIns="0" bIns="0" rtlCol="0" anchor="t"/>
-          <a:lstStyle/>
-          <a:p>
-            <a:pPr algn="l" indent="0" marL="0">
-              <a:lnSpc>
-                <a:spcPct val="108000"/>
-              </a:lnSpc>
-              <a:buNone/>
-            </a:pPr>
-            <a:r>
-              <a:rPr lang="en-US" sz="4000" b="1" dirty="0">
+            <a:endParaRPr lang="en-US" sz="1200" dirty="0"/>
+          </a:p>
+        </p:txBody>
+      </p:sp>
+      <p:pic>
+        <p:nvPicPr>
+          <p:cNvPr id="3" name="Image 0" descr="icons/cline.png">    </p:cNvPr>
+          <p:cNvPicPr>
+            <a:picLocks noChangeAspect="1"/>
+          </p:cNvPicPr>
+          <p:nvPr/>
+        </p:nvPicPr>
+        <p:blipFill>
+          <a:blip r:embed="rId1"/>
+          <a:stretch>
+            <a:fillRect/>
+          </a:stretch>
+        </p:blipFill>
+        <p:spPr>
+          <a:xfrm>
+            <a:off x="9715500" y="361950"/>
+            <a:ext cx="203200" cy="203200"/>
+          </a:xfrm>
+          <a:prstGeom prst="rect">
+            <a:avLst/>
+          </a:prstGeom>
+        </p:spPr>
+      </p:pic>
+      <p:pic>
+        <p:nvPicPr>
+          <p:cNvPr id="4" name="Image 1" descr="icons/cursor.png">    </p:cNvPr>
+          <p:cNvPicPr>
+            <a:picLocks noChangeAspect="1"/>
+          </p:cNvPicPr>
+          <p:nvPr/>
+        </p:nvPicPr>
+        <p:blipFill>
+          <a:blip r:embed="rId2"/>
+          <a:stretch>
+            <a:fillRect/>
+          </a:stretch>
+        </p:blipFill>
+        <p:spPr>
+          <a:xfrm>
+            <a:off x="10058400" y="361950"/>
+            <a:ext cx="203200" cy="203200"/>
+          </a:xfrm>
+          <a:prstGeom prst="rect">
+            <a:avLst/>
+          </a:prstGeom>
+        </p:spPr>
+      </p:pic>
+      <p:pic>
+        <p:nvPicPr>
+          <p:cNvPr id="5" name="Image 2" descr="icons/githubcopilot.png">    </p:cNvPr>
+          <p:cNvPicPr>
+            <a:picLocks noChangeAspect="1"/>
+          </p:cNvPicPr>
+          <p:nvPr/>
+        </p:nvPicPr>
+        <p:blipFill>
+          <a:blip r:embed="rId3"/>
+          <a:stretch>
+            <a:fillRect/>
+          </a:stretch>
+        </p:blipFill>
+        <p:spPr>
+          <a:xfrm>
+            <a:off x="10401300" y="361950"/>
+            <a:ext cx="203200" cy="203200"/>
+          </a:xfrm>
+          <a:prstGeom prst="rect">
+            <a:avLst/>
+          </a:prstGeom>
+        </p:spPr>
+      </p:pic>
+      <p:pic>
+        <p:nvPicPr>
+          <p:cNvPr id="6" name="Image 3" descr="icons/claude.png">    </p:cNvPr>
+          <p:cNvPicPr>
+            <a:picLocks noChangeAspect="1"/>
+          </p:cNvPicPr>
+          <p:nvPr/>
+        </p:nvPicPr>
+        <p:blipFill>
+          <a:blip r:embed="rId4"/>
+          <a:stretch>
+            <a:fillRect/>
+          </a:stretch>
+        </p:blipFill>
+        <p:spPr>
+          <a:xfrm>
+            <a:off x="10744200" y="361950"/>
+            <a:ext cx="203200" cy="203200"/>
+          </a:xfrm>
+          <a:prstGeom prst="rect">
+            <a:avLst/>
+          </a:prstGeom>
+        </p:spPr>
+      </p:pic>
+      <p:pic>
+        <p:nvPicPr>
+          <p:cNvPr id="7" name="Image 4" descr="icons/googlegemini.png">    </p:cNvPr>
+          <p:cNvPicPr>
+            <a:picLocks noChangeAspect="1"/>
+          </p:cNvPicPr>
+          <p:nvPr/>
+        </p:nvPicPr>
+        <p:blipFill>
+          <a:blip r:embed="rId5"/>
+          <a:stretch>
+            <a:fillRect/>
+          </a:stretch>
+        </p:blipFill>
+        <p:spPr>
+          <a:xfrm>
+            <a:off x="11087100" y="361950"/>
+            <a:ext cx="203200" cy="203200"/>
+          </a:xfrm>
+          <a:prstGeom prst="rect">
+            <a:avLst/>
+          </a:prstGeom>
+        </p:spPr>
+      </p:pic>
+      <p:pic>
+        <p:nvPicPr>
+          <p:cNvPr id="8" name="Image 5" descr="icons/mistralai.png">    </p:cNvPr>
+          <p:cNvPicPr>
+            <a:picLocks noChangeAspect="1"/>
+          </p:cNvPicPr>
+          <p:nvPr/>
+        </p:nvPicPr>
+        <p:blipFill>
+          <a:blip r:embed="rId6"/>
+          <a:stretch>
+            <a:fillRect/>
+          </a:stretch>
+        </p:blipFill>
+        <p:spPr>
+          <a:xfrm>
+            <a:off x="11430000" y="361950"/>
+            <a:ext cx="203200" cy="203200"/>
+          </a:xfrm>
+          <a:prstGeom prst="rect">
+            <a:avLst/>
+          </a:prstGeom>
+        </p:spPr>
+      </p:pic>
+      <p:sp>
+        <p:nvSpPr>
+          <p:cNvPr id="9" name="Text 1"/>
+          <p:cNvSpPr/>
+          <p:nvPr/>
+        </p:nvSpPr>
+        <p:spPr>
+          <a:xfrm>
+            <a:off x="558800" y="635000"/>
+            <a:ext cx="11074400" cy="508000"/>
+          </a:xfrm>
+          <a:prstGeom prst="rect">
+            <a:avLst/>
+          </a:prstGeom>
+          <a:noFill/>
+          <a:ln/>
+        </p:spPr>
+        <p:txBody>
+          <a:bodyPr wrap="square" lIns="0" tIns="0" rIns="0" bIns="0" rtlCol="0" anchor="t"/>
+          <a:lstStyle/>
+          <a:p>
+            <a:pPr algn="l" indent="0" marL="0">
+              <a:lnSpc>
+                <a:spcPct val="110000"/>
+              </a:lnSpc>
+              <a:buNone/>
+            </a:pPr>
+            <a:r>
+              <a:rPr lang="en-US" sz="2800" b="1" dirty="0">
                 <a:solidFill>
                   <a:srgbClr val="332F2A"/>
                 </a:solidFill>
@@ -30950,51 +30904,365 @@
                 <a:ea typeface="Libre Franklin" pitchFamily="34" charset="-122"/>
                 <a:cs typeface="Libre Franklin" pitchFamily="34" charset="-120"/>
               </a:rPr>
-              <a:t>How an agent works</a:t>
-            </a:r>
-            <a:endParaRPr lang="en-US" sz="4000" dirty="0"/>
-          </a:p>
-        </p:txBody>
-      </p:sp>
-      <p:sp>
-        <p:nvSpPr>
-          <p:cNvPr id="4" name="Text 2"/>
-          <p:cNvSpPr/>
-          <p:nvPr/>
-        </p:nvSpPr>
-        <p:spPr>
-          <a:xfrm>
-            <a:off x="558800" y="4064000"/>
-            <a:ext cx="6985000" cy="635000"/>
-          </a:xfrm>
-          <a:prstGeom prst="rect">
-            <a:avLst/>
-          </a:prstGeom>
-          <a:noFill/>
-          <a:ln/>
-        </p:spPr>
-        <p:txBody>
-          <a:bodyPr wrap="square" lIns="0" tIns="0" rIns="0" bIns="0" rtlCol="0" anchor="t"/>
-          <a:lstStyle/>
-          <a:p>
-            <a:pPr algn="l" indent="0" marL="0">
-              <a:lnSpc>
-                <a:spcPct val="140000"/>
-              </a:lnSpc>
-              <a:buNone/>
-            </a:pPr>
-            <a:r>
-              <a:rPr lang="en-US" sz="1700" dirty="0">
-                <a:solidFill>
-                  <a:srgbClr val="77726A"/>
+              <a:t>The tools people actually use</a:t>
+            </a:r>
+            <a:endParaRPr lang="en-US" sz="2800" dirty="0"/>
+          </a:p>
+        </p:txBody>
+      </p:sp>
+      <p:sp>
+        <p:nvSpPr>
+          <p:cNvPr id="10" name="Shape 2"/>
+          <p:cNvSpPr/>
+          <p:nvPr/>
+        </p:nvSpPr>
+        <p:spPr>
+          <a:xfrm>
+            <a:off x="558800" y="1181100"/>
+            <a:ext cx="11074400" cy="6350"/>
+          </a:xfrm>
+          <a:prstGeom prst="rect">
+            <a:avLst/>
+          </a:prstGeom>
+          <a:solidFill>
+            <a:srgbClr val="E1DED7"/>
+          </a:solidFill>
+          <a:ln/>
+        </p:spPr>
+      </p:sp>
+      <p:sp>
+        <p:nvSpPr>
+          <p:cNvPr id="11" name="Text 3"/>
+          <p:cNvSpPr/>
+          <p:nvPr/>
+        </p:nvSpPr>
+        <p:spPr>
+          <a:xfrm>
+            <a:off x="558800" y="6337300"/>
+            <a:ext cx="9804400" cy="215900"/>
+          </a:xfrm>
+          <a:prstGeom prst="rect">
+            <a:avLst/>
+          </a:prstGeom>
+          <a:noFill/>
+          <a:ln/>
+        </p:spPr>
+        <p:txBody>
+          <a:bodyPr wrap="square" lIns="0" tIns="0" rIns="0" bIns="0" rtlCol="0" anchor="t"/>
+          <a:lstStyle/>
+          <a:p>
+            <a:pPr algn="l" indent="0" marL="0">
+              <a:lnSpc>
+                <a:spcPct val="145000"/>
+              </a:lnSpc>
+              <a:buNone/>
+            </a:pPr>
+            <a:r>
+              <a:rPr lang="en-US" sz="1200" dirty="0">
+                <a:solidFill>
+                  <a:srgbClr val="99948B"/>
+                </a:solidFill>
+                <a:latin typeface="IBM Plex Mono" pitchFamily="34" charset="0"/>
+                <a:ea typeface="IBM Plex Mono" pitchFamily="34" charset="-122"/>
+                <a:cs typeface="IBM Plex Mono" pitchFamily="34" charset="-120"/>
+              </a:rPr>
+              <a:t>AI for Software Development · Session 1</a:t>
+            </a:r>
+            <a:endParaRPr lang="en-US" sz="1200" dirty="0"/>
+          </a:p>
+        </p:txBody>
+      </p:sp>
+      <p:sp>
+        <p:nvSpPr>
+          <p:cNvPr id="12" name="Text 4"/>
+          <p:cNvSpPr/>
+          <p:nvPr/>
+        </p:nvSpPr>
+        <p:spPr>
+          <a:xfrm>
+            <a:off x="10363200" y="6337300"/>
+            <a:ext cx="1270000" cy="215900"/>
+          </a:xfrm>
+          <a:prstGeom prst="rect">
+            <a:avLst/>
+          </a:prstGeom>
+          <a:noFill/>
+          <a:ln/>
+        </p:spPr>
+        <p:txBody>
+          <a:bodyPr wrap="square" lIns="0" tIns="0" rIns="0" bIns="0" rtlCol="0" anchor="t"/>
+          <a:lstStyle/>
+          <a:p>
+            <a:pPr algn="r" indent="0" marL="0">
+              <a:lnSpc>
+                <a:spcPct val="145000"/>
+              </a:lnSpc>
+              <a:buNone/>
+            </a:pPr>
+            <a:r>
+              <a:rPr lang="en-US" sz="1200" dirty="0">
+                <a:solidFill>
+                  <a:srgbClr val="99948B"/>
+                </a:solidFill>
+                <a:latin typeface="IBM Plex Mono" pitchFamily="34" charset="0"/>
+                <a:ea typeface="IBM Plex Mono" pitchFamily="34" charset="-122"/>
+                <a:cs typeface="IBM Plex Mono" pitchFamily="34" charset="-120"/>
+              </a:rPr>
+              <a:t>06</a:t>
+            </a:r>
+            <a:endParaRPr lang="en-US" sz="1200" dirty="0"/>
+          </a:p>
+        </p:txBody>
+      </p:sp>
+      <p:sp>
+        <p:nvSpPr>
+          <p:cNvPr id="13" name="Text 5"/>
+          <p:cNvSpPr/>
+          <p:nvPr/>
+        </p:nvSpPr>
+        <p:spPr>
+          <a:xfrm>
+            <a:off x="558800" y="1511300"/>
+            <a:ext cx="5283200" cy="254000"/>
+          </a:xfrm>
+          <a:prstGeom prst="rect">
+            <a:avLst/>
+          </a:prstGeom>
+          <a:noFill/>
+          <a:ln/>
+        </p:spPr>
+        <p:txBody>
+          <a:bodyPr wrap="square" lIns="0" tIns="0" rIns="0" bIns="0" rtlCol="0" anchor="t"/>
+          <a:lstStyle/>
+          <a:p>
+            <a:pPr algn="l" indent="0" marL="0">
+              <a:lnSpc>
+                <a:spcPct val="145000"/>
+              </a:lnSpc>
+              <a:buNone/>
+            </a:pPr>
+            <a:r>
+              <a:rPr lang="en-US" sz="1300" spc="130" kern="0" dirty="0">
+                <a:solidFill>
+                  <a:srgbClr val="A87A2E"/>
+                </a:solidFill>
+                <a:latin typeface="IBM Plex Mono" pitchFamily="34" charset="0"/>
+                <a:ea typeface="IBM Plex Mono" pitchFamily="34" charset="-122"/>
+                <a:cs typeface="IBM Plex Mono" pitchFamily="34" charset="-120"/>
+              </a:rPr>
+              <a:t>HARNESSES</a:t>
+            </a:r>
+            <a:endParaRPr lang="en-US" sz="1300" dirty="0"/>
+          </a:p>
+        </p:txBody>
+      </p:sp>
+      <p:sp>
+        <p:nvSpPr>
+          <p:cNvPr id="14" name="Text 6"/>
+          <p:cNvSpPr/>
+          <p:nvPr/>
+        </p:nvSpPr>
+        <p:spPr>
+          <a:xfrm>
+            <a:off x="558800" y="1917700"/>
+            <a:ext cx="5283200" cy="1270000"/>
+          </a:xfrm>
+          <a:prstGeom prst="rect">
+            <a:avLst/>
+          </a:prstGeom>
+          <a:noFill/>
+          <a:ln/>
+        </p:spPr>
+        <p:txBody>
+          <a:bodyPr wrap="square" lIns="0" tIns="0" rIns="0" bIns="0" rtlCol="0" anchor="t"/>
+          <a:lstStyle/>
+          <a:p>
+            <a:pPr algn="l" indent="0" marL="0">
+              <a:lnSpc>
+                <a:spcPct val="145000"/>
+              </a:lnSpc>
+              <a:buNone/>
+            </a:pPr>
+            <a:r>
+              <a:rPr lang="en-US" sz="1600" dirty="0">
+                <a:solidFill>
+                  <a:srgbClr val="332F2A"/>
                 </a:solidFill>
                 <a:latin typeface="Libre Franklin" pitchFamily="34" charset="0"/>
                 <a:ea typeface="Libre Franklin" pitchFamily="34" charset="-122"/>
                 <a:cs typeface="Libre Franklin" pitchFamily="34" charset="-120"/>
               </a:rPr>
-              <a:t>What actually happens between typing a request and a file changing on disk.</a:t>
-            </a:r>
-            <a:endParaRPr lang="en-US" sz="1700" dirty="0"/>
+              <a:t>Cline and Roo Code, free inside VS Code. Cursor and Windsurf, whole editors. GitHub Copilot. Claude Code and Gemini CLI, in the terminal. Aider.</a:t>
+            </a:r>
+            <a:endParaRPr lang="en-US" sz="1600" dirty="0"/>
+          </a:p>
+        </p:txBody>
+      </p:sp>
+      <p:sp>
+        <p:nvSpPr>
+          <p:cNvPr id="15" name="Text 7"/>
+          <p:cNvSpPr/>
+          <p:nvPr/>
+        </p:nvSpPr>
+        <p:spPr>
+          <a:xfrm>
+            <a:off x="558800" y="3274060"/>
+            <a:ext cx="5283200" cy="1270000"/>
+          </a:xfrm>
+          <a:prstGeom prst="rect">
+            <a:avLst/>
+          </a:prstGeom>
+          <a:noFill/>
+          <a:ln/>
+        </p:spPr>
+        <p:txBody>
+          <a:bodyPr wrap="square" lIns="0" tIns="0" rIns="0" bIns="0" rtlCol="0" anchor="t"/>
+          <a:lstStyle/>
+          <a:p>
+            <a:pPr algn="l" indent="0" marL="0">
+              <a:lnSpc>
+                <a:spcPct val="145000"/>
+              </a:lnSpc>
+              <a:buNone/>
+            </a:pPr>
+            <a:r>
+              <a:rPr lang="en-US" sz="1600" dirty="0">
+                <a:solidFill>
+                  <a:srgbClr val="77726A"/>
+                </a:solidFill>
+                <a:latin typeface="Libre Franklin" pitchFamily="34" charset="0"/>
+                <a:ea typeface="Libre Franklin" pitchFamily="34" charset="-122"/>
+                <a:cs typeface="Libre Franklin" pitchFamily="34" charset="-120"/>
+              </a:rPr>
+              <a:t>All do the same job: read your files, write the edits, run the commands. We use Cline because it is free and shows you every step it takes.</a:t>
+            </a:r>
+            <a:endParaRPr lang="en-US" sz="1600" dirty="0"/>
+          </a:p>
+        </p:txBody>
+      </p:sp>
+      <p:sp>
+        <p:nvSpPr>
+          <p:cNvPr id="16" name="Text 8"/>
+          <p:cNvSpPr/>
+          <p:nvPr/>
+        </p:nvSpPr>
+        <p:spPr>
+          <a:xfrm>
+            <a:off x="6350000" y="1511300"/>
+            <a:ext cx="5283200" cy="254000"/>
+          </a:xfrm>
+          <a:prstGeom prst="rect">
+            <a:avLst/>
+          </a:prstGeom>
+          <a:noFill/>
+          <a:ln/>
+        </p:spPr>
+        <p:txBody>
+          <a:bodyPr wrap="square" lIns="0" tIns="0" rIns="0" bIns="0" rtlCol="0" anchor="t"/>
+          <a:lstStyle/>
+          <a:p>
+            <a:pPr algn="l" indent="0" marL="0">
+              <a:lnSpc>
+                <a:spcPct val="145000"/>
+              </a:lnSpc>
+              <a:buNone/>
+            </a:pPr>
+            <a:r>
+              <a:rPr lang="en-US" sz="1300" spc="130" kern="0" dirty="0">
+                <a:solidFill>
+                  <a:srgbClr val="A87A2E"/>
+                </a:solidFill>
+                <a:latin typeface="IBM Plex Mono" pitchFamily="34" charset="0"/>
+                <a:ea typeface="IBM Plex Mono" pitchFamily="34" charset="-122"/>
+                <a:cs typeface="IBM Plex Mono" pitchFamily="34" charset="-120"/>
+              </a:rPr>
+              <a:t>MODELS</a:t>
+            </a:r>
+            <a:endParaRPr lang="en-US" sz="1300" dirty="0"/>
+          </a:p>
+        </p:txBody>
+      </p:sp>
+      <p:sp>
+        <p:nvSpPr>
+          <p:cNvPr id="17" name="Text 9"/>
+          <p:cNvSpPr/>
+          <p:nvPr/>
+        </p:nvSpPr>
+        <p:spPr>
+          <a:xfrm>
+            <a:off x="6350000" y="1917700"/>
+            <a:ext cx="5283200" cy="1270000"/>
+          </a:xfrm>
+          <a:prstGeom prst="rect">
+            <a:avLst/>
+          </a:prstGeom>
+          <a:noFill/>
+          <a:ln/>
+        </p:spPr>
+        <p:txBody>
+          <a:bodyPr wrap="square" lIns="0" tIns="0" rIns="0" bIns="0" rtlCol="0" anchor="t"/>
+          <a:lstStyle/>
+          <a:p>
+            <a:pPr algn="l" indent="0" marL="0">
+              <a:lnSpc>
+                <a:spcPct val="145000"/>
+              </a:lnSpc>
+              <a:buNone/>
+            </a:pPr>
+            <a:r>
+              <a:rPr lang="en-US" sz="1600" dirty="0">
+                <a:solidFill>
+                  <a:srgbClr val="332F2A"/>
+                </a:solidFill>
+                <a:latin typeface="Libre Franklin" pitchFamily="34" charset="0"/>
+                <a:ea typeface="Libre Franklin" pitchFamily="34" charset="-122"/>
+                <a:cs typeface="Libre Franklin" pitchFamily="34" charset="-120"/>
+              </a:rPr>
+              <a:t>Claude, GPT, Gemini, Mistral, Llama, Qwen, DeepSeek. Some you rent by the word; some you can download and run yourself.</a:t>
+            </a:r>
+            <a:endParaRPr lang="en-US" sz="1600" dirty="0"/>
+          </a:p>
+        </p:txBody>
+      </p:sp>
+      <p:sp>
+        <p:nvSpPr>
+          <p:cNvPr id="18" name="Text 10"/>
+          <p:cNvSpPr/>
+          <p:nvPr/>
+        </p:nvSpPr>
+        <p:spPr>
+          <a:xfrm>
+            <a:off x="6350000" y="3274060"/>
+            <a:ext cx="5283200" cy="1270000"/>
+          </a:xfrm>
+          <a:prstGeom prst="rect">
+            <a:avLst/>
+          </a:prstGeom>
+          <a:noFill/>
+          <a:ln/>
+        </p:spPr>
+        <p:txBody>
+          <a:bodyPr wrap="square" lIns="0" tIns="0" rIns="0" bIns="0" rtlCol="0" anchor="t"/>
+          <a:lstStyle/>
+          <a:p>
+            <a:pPr algn="l" indent="0" marL="0">
+              <a:lnSpc>
+                <a:spcPct val="145000"/>
+              </a:lnSpc>
+              <a:buNone/>
+            </a:pPr>
+            <a:r>
+              <a:rPr lang="en-US" sz="1600" dirty="0">
+                <a:solidFill>
+                  <a:srgbClr val="77726A"/>
+                </a:solidFill>
+                <a:latin typeface="Libre Franklin" pitchFamily="34" charset="0"/>
+                <a:ea typeface="Libre Franklin" pitchFamily="34" charset="-122"/>
+                <a:cs typeface="Libre Franklin" pitchFamily="34" charset="-120"/>
+              </a:rPr>
+              <a:t>Nearly every harness lets you point at any of them. Swapping is a settings change, not a new tool — which is exactly why the split is worth knowing.</a:t>
+            </a:r>
+            <a:endParaRPr lang="en-US" sz="1600" dirty="0"/>
           </a:p>
         </p:txBody>
       </p:sp>
@@ -31108,7 +31376,7 @@
                 <a:ea typeface="Libre Franklin" pitchFamily="34" charset="-122"/>
                 <a:cs typeface="Libre Franklin" pitchFamily="34" charset="-120"/>
               </a:rPr>
-              <a:t>What a language model is</a:t>
+              <a:t>The loop the agent runs</a:t>
             </a:r>
             <a:endParaRPr lang="en-US" sz="2800" dirty="0"/>
           </a:p>
@@ -31220,7 +31488,7 @@
       </p:sp>
       <p:pic>
         <p:nvPicPr>
-          <p:cNvPr id="7" name="Image 0" descr="figures/fig-language-model.png">    </p:cNvPr>
+          <p:cNvPr id="7" name="Image 0" descr="figures/fig-agent-loop.png">    </p:cNvPr>
           <p:cNvPicPr>
             <a:picLocks noChangeAspect="1"/>
           </p:cNvPicPr>
@@ -31250,7 +31518,7 @@
         <p:spPr>
           <a:xfrm>
             <a:off x="7099300" y="1511300"/>
-            <a:ext cx="4533900" cy="1600200"/>
+            <a:ext cx="4533900" cy="1010920"/>
           </a:xfrm>
           <a:prstGeom prst="rect">
             <a:avLst/>
@@ -31277,7 +31545,7 @@
                 <a:ea typeface="Libre Franklin" pitchFamily="34" charset="-122"/>
                 <a:cs typeface="Libre Franklin" pitchFamily="34" charset="-120"/>
               </a:rPr>
-              <a:t>Trained once, on a very large amount of writing, to do a single thing: given some text, guess what comes next. Everything it appears to do is built on top of that one trick.</a:t>
+              <a:t>Read, plan, edit, run, observe — then round again. The harness drives this loop until the task is done or you stop it.</a:t>
             </a:r>
             <a:endParaRPr lang="en-US" sz="1600" dirty="0"/>
           </a:p>
@@ -31291,7 +31559,7 @@
         </p:nvSpPr>
         <p:spPr>
           <a:xfrm>
-            <a:off x="7099300" y="3238500"/>
+            <a:off x="7099300" y="2649220"/>
             <a:ext cx="4533900" cy="1305560"/>
           </a:xfrm>
           <a:prstGeom prst="rect">
@@ -31319,7 +31587,7 @@
                 <a:ea typeface="Libre Franklin" pitchFamily="34" charset="-122"/>
                 <a:cs typeface="Libre Franklin" pitchFamily="34" charset="-120"/>
               </a:rPr>
-              <a:t>It consults no database. An answer is reconstructed from patterns, never retrieved — which is the mechanism behind everything on the next three slides.</a:t>
+              <a:t>One sentence from you becomes four to ten laps, and every lap re-sends everything so far. That is where your allowance goes.</a:t>
             </a:r>
             <a:endParaRPr lang="en-US" sz="1600" dirty="0"/>
           </a:p>
@@ -31361,7 +31629,7 @@
                 <a:ea typeface="IBM Plex Mono" pitchFamily="34" charset="-122"/>
                 <a:cs typeface="IBM Plex Mono" pitchFamily="34" charset="-120"/>
               </a:rPr>
-              <a:t>Fig. 1 — trained once, then rented by the word</a:t>
+              <a:t>Fig. 3 — one instruction, many laps</a:t>
             </a:r>
             <a:endParaRPr lang="en-US" sz="1200" dirty="0"/>
           </a:p>
@@ -31381,7 +31649,7 @@
     <p:bg>
       <p:bgPr>
         <a:solidFill>
-          <a:srgbClr val="FCFBF8"/>
+          <a:srgbClr val="F5F2EC"/>
         </a:solidFill>
       </p:bgPr>
     </p:bg>
@@ -31407,8 +31675,8 @@
         </p:nvSpPr>
         <p:spPr>
           <a:xfrm>
-            <a:off x="558800" y="355600"/>
-            <a:ext cx="11074400" cy="215900"/>
+            <a:off x="558800" y="2286000"/>
+            <a:ext cx="11074400" cy="254000"/>
           </a:xfrm>
           <a:prstGeom prst="rect">
             <a:avLst/>
@@ -31427,97 +31695,49 @@
               <a:buNone/>
             </a:pPr>
             <a:r>
-              <a:rPr lang="en-US" sz="1200" spc="168" kern="0" dirty="0">
-                <a:solidFill>
-                  <a:srgbClr val="77726A"/>
-                </a:solidFill>
-                <a:latin typeface="IBM Plex Mono" pitchFamily="34" charset="0"/>
-                <a:ea typeface="IBM Plex Mono" pitchFamily="34" charset="-122"/>
-                <a:cs typeface="IBM Plex Mono" pitchFamily="34" charset="-120"/>
-              </a:rPr>
-              <a:t>SECTION 01</a:t>
-            </a:r>
-            <a:endParaRPr lang="en-US" sz="1200" dirty="0"/>
-          </a:p>
-        </p:txBody>
-      </p:sp>
-      <p:pic>
-        <p:nvPicPr>
-          <p:cNvPr id="3" name="Image 0" descr="icons/cline.png">    </p:cNvPr>
-          <p:cNvPicPr>
-            <a:picLocks noChangeAspect="1"/>
-          </p:cNvPicPr>
-          <p:nvPr/>
-        </p:nvPicPr>
-        <p:blipFill>
-          <a:blip r:embed="rId1"/>
-          <a:stretch>
-            <a:fillRect/>
-          </a:stretch>
-        </p:blipFill>
-        <p:spPr>
-          <a:xfrm>
-            <a:off x="11087100" y="361950"/>
-            <a:ext cx="203200" cy="203200"/>
-          </a:xfrm>
-          <a:prstGeom prst="rect">
-            <a:avLst/>
-          </a:prstGeom>
-        </p:spPr>
-      </p:pic>
-      <p:pic>
-        <p:nvPicPr>
-          <p:cNvPr id="4" name="Image 1" descr="icons/googlegemini.png">    </p:cNvPr>
-          <p:cNvPicPr>
-            <a:picLocks noChangeAspect="1"/>
-          </p:cNvPicPr>
-          <p:nvPr/>
-        </p:nvPicPr>
-        <p:blipFill>
-          <a:blip r:embed="rId2"/>
-          <a:stretch>
-            <a:fillRect/>
-          </a:stretch>
-        </p:blipFill>
-        <p:spPr>
-          <a:xfrm>
-            <a:off x="11430000" y="361950"/>
-            <a:ext cx="203200" cy="203200"/>
-          </a:xfrm>
-          <a:prstGeom prst="rect">
-            <a:avLst/>
-          </a:prstGeom>
-        </p:spPr>
-      </p:pic>
-      <p:sp>
-        <p:nvSpPr>
-          <p:cNvPr id="5" name="Text 1"/>
-          <p:cNvSpPr/>
-          <p:nvPr/>
-        </p:nvSpPr>
-        <p:spPr>
-          <a:xfrm>
-            <a:off x="558800" y="635000"/>
-            <a:ext cx="11074400" cy="508000"/>
-          </a:xfrm>
-          <a:prstGeom prst="rect">
-            <a:avLst/>
-          </a:prstGeom>
-          <a:noFill/>
-          <a:ln/>
-        </p:spPr>
-        <p:txBody>
-          <a:bodyPr wrap="square" lIns="0" tIns="0" rIns="0" bIns="0" rtlCol="0" anchor="t"/>
-          <a:lstStyle/>
-          <a:p>
-            <a:pPr algn="l" indent="0" marL="0">
-              <a:lnSpc>
-                <a:spcPct val="110000"/>
-              </a:lnSpc>
-              <a:buNone/>
-            </a:pPr>
-            <a:r>
-              <a:rPr lang="en-US" sz="2800" b="1" dirty="0">
+              <a:rPr lang="en-US" sz="1300" spc="182" kern="0" dirty="0">
+                <a:solidFill>
+                  <a:srgbClr val="A87A2E"/>
+                </a:solidFill>
+                <a:latin typeface="IBM Plex Mono" pitchFamily="34" charset="0"/>
+                <a:ea typeface="IBM Plex Mono" pitchFamily="34" charset="-122"/>
+                <a:cs typeface="IBM Plex Mono" pitchFamily="34" charset="-120"/>
+              </a:rPr>
+              <a:t>SECTION 02</a:t>
+            </a:r>
+            <a:endParaRPr lang="en-US" sz="1300" dirty="0"/>
+          </a:p>
+        </p:txBody>
+      </p:sp>
+      <p:sp>
+        <p:nvSpPr>
+          <p:cNvPr id="3" name="Text 1"/>
+          <p:cNvSpPr/>
+          <p:nvPr/>
+        </p:nvSpPr>
+        <p:spPr>
+          <a:xfrm>
+            <a:off x="558800" y="2667000"/>
+            <a:ext cx="8255000" cy="1206500"/>
+          </a:xfrm>
+          <a:prstGeom prst="rect">
+            <a:avLst/>
+          </a:prstGeom>
+          <a:noFill/>
+          <a:ln/>
+        </p:spPr>
+        <p:txBody>
+          <a:bodyPr wrap="square" lIns="0" tIns="0" rIns="0" bIns="0" rtlCol="0" anchor="t"/>
+          <a:lstStyle/>
+          <a:p>
+            <a:pPr algn="l" indent="0" marL="0">
+              <a:lnSpc>
+                <a:spcPct val="108000"/>
+              </a:lnSpc>
+              <a:buNone/>
+            </a:pPr>
+            <a:r>
+              <a:rPr lang="en-US" sz="4000" b="1" dirty="0">
                 <a:solidFill>
                   <a:srgbClr val="332F2A"/>
                 </a:solidFill>
@@ -31525,262 +31745,51 @@
                 <a:ea typeface="Libre Franklin" pitchFamily="34" charset="-122"/>
                 <a:cs typeface="Libre Franklin" pitchFamily="34" charset="-120"/>
               </a:rPr>
-              <a:t>Harness and model</a:t>
-            </a:r>
-            <a:endParaRPr lang="en-US" sz="2800" dirty="0"/>
-          </a:p>
-        </p:txBody>
-      </p:sp>
-      <p:sp>
-        <p:nvSpPr>
-          <p:cNvPr id="6" name="Shape 2"/>
-          <p:cNvSpPr/>
-          <p:nvPr/>
-        </p:nvSpPr>
-        <p:spPr>
-          <a:xfrm>
-            <a:off x="558800" y="1181100"/>
-            <a:ext cx="11074400" cy="6350"/>
-          </a:xfrm>
-          <a:prstGeom prst="rect">
-            <a:avLst/>
-          </a:prstGeom>
-          <a:solidFill>
-            <a:srgbClr val="E1DED7"/>
-          </a:solidFill>
-          <a:ln/>
-        </p:spPr>
-      </p:sp>
-      <p:sp>
-        <p:nvSpPr>
-          <p:cNvPr id="7" name="Text 3"/>
-          <p:cNvSpPr/>
-          <p:nvPr/>
-        </p:nvSpPr>
-        <p:spPr>
-          <a:xfrm>
-            <a:off x="558800" y="6337300"/>
-            <a:ext cx="9804400" cy="215900"/>
-          </a:xfrm>
-          <a:prstGeom prst="rect">
-            <a:avLst/>
-          </a:prstGeom>
-          <a:noFill/>
-          <a:ln/>
-        </p:spPr>
-        <p:txBody>
-          <a:bodyPr wrap="square" lIns="0" tIns="0" rIns="0" bIns="0" rtlCol="0" anchor="t"/>
-          <a:lstStyle/>
-          <a:p>
-            <a:pPr algn="l" indent="0" marL="0">
-              <a:lnSpc>
-                <a:spcPct val="145000"/>
-              </a:lnSpc>
-              <a:buNone/>
-            </a:pPr>
-            <a:r>
-              <a:rPr lang="en-US" sz="1200" dirty="0">
-                <a:solidFill>
-                  <a:srgbClr val="99948B"/>
-                </a:solidFill>
-                <a:latin typeface="IBM Plex Mono" pitchFamily="34" charset="0"/>
-                <a:ea typeface="IBM Plex Mono" pitchFamily="34" charset="-122"/>
-                <a:cs typeface="IBM Plex Mono" pitchFamily="34" charset="-120"/>
-              </a:rPr>
-              <a:t>AI for Software Development · Session 1</a:t>
-            </a:r>
-            <a:endParaRPr lang="en-US" sz="1200" dirty="0"/>
-          </a:p>
-        </p:txBody>
-      </p:sp>
-      <p:sp>
-        <p:nvSpPr>
-          <p:cNvPr id="8" name="Text 4"/>
-          <p:cNvSpPr/>
-          <p:nvPr/>
-        </p:nvSpPr>
-        <p:spPr>
-          <a:xfrm>
-            <a:off x="10363200" y="6337300"/>
-            <a:ext cx="1270000" cy="215900"/>
-          </a:xfrm>
-          <a:prstGeom prst="rect">
-            <a:avLst/>
-          </a:prstGeom>
-          <a:noFill/>
-          <a:ln/>
-        </p:spPr>
-        <p:txBody>
-          <a:bodyPr wrap="square" lIns="0" tIns="0" rIns="0" bIns="0" rtlCol="0" anchor="t"/>
-          <a:lstStyle/>
-          <a:p>
-            <a:pPr algn="r" indent="0" marL="0">
-              <a:lnSpc>
-                <a:spcPct val="145000"/>
-              </a:lnSpc>
-              <a:buNone/>
-            </a:pPr>
-            <a:r>
-              <a:rPr lang="en-US" sz="1200" dirty="0">
-                <a:solidFill>
-                  <a:srgbClr val="99948B"/>
-                </a:solidFill>
-                <a:latin typeface="IBM Plex Mono" pitchFamily="34" charset="0"/>
-                <a:ea typeface="IBM Plex Mono" pitchFamily="34" charset="-122"/>
-                <a:cs typeface="IBM Plex Mono" pitchFamily="34" charset="-120"/>
-              </a:rPr>
-              <a:t>08</a:t>
-            </a:r>
-            <a:endParaRPr lang="en-US" sz="1200" dirty="0"/>
-          </a:p>
-        </p:txBody>
-      </p:sp>
-      <p:pic>
-        <p:nvPicPr>
-          <p:cNvPr id="9" name="Image 2" descr="figures/fig-harness-model.png">    </p:cNvPr>
-          <p:cNvPicPr>
-            <a:picLocks noChangeAspect="1"/>
-          </p:cNvPicPr>
-          <p:nvPr/>
-        </p:nvPicPr>
-        <p:blipFill>
-          <a:blip r:embed="rId3"/>
-          <a:srcRect l="0" r="0" t="0" b="0"/>
-          <a:stretch/>
-        </p:blipFill>
-        <p:spPr>
-          <a:xfrm>
-            <a:off x="558800" y="1511300"/>
-            <a:ext cx="6134100" cy="4572000"/>
-          </a:xfrm>
-          <a:prstGeom prst="rect">
-            <a:avLst/>
-          </a:prstGeom>
-        </p:spPr>
-      </p:pic>
-      <p:sp>
-        <p:nvSpPr>
-          <p:cNvPr id="10" name="Text 5"/>
-          <p:cNvSpPr/>
-          <p:nvPr/>
-        </p:nvSpPr>
-        <p:spPr>
-          <a:xfrm>
-            <a:off x="7099300" y="1511300"/>
-            <a:ext cx="4533900" cy="1600200"/>
-          </a:xfrm>
-          <a:prstGeom prst="rect">
-            <a:avLst/>
-          </a:prstGeom>
-          <a:noFill/>
-          <a:ln/>
-        </p:spPr>
-        <p:txBody>
-          <a:bodyPr wrap="square" lIns="0" tIns="0" rIns="0" bIns="0" rtlCol="0" anchor="t"/>
-          <a:lstStyle/>
-          <a:p>
-            <a:pPr algn="l" indent="0" marL="0">
-              <a:lnSpc>
-                <a:spcPct val="145000"/>
-              </a:lnSpc>
-              <a:buNone/>
-            </a:pPr>
-            <a:r>
-              <a:rPr lang="en-US" sz="1600" dirty="0">
-                <a:solidFill>
-                  <a:srgbClr val="332F2A"/>
+              <a:t>What it costs, and why it fails</a:t>
+            </a:r>
+            <a:endParaRPr lang="en-US" sz="4000" dirty="0"/>
+          </a:p>
+        </p:txBody>
+      </p:sp>
+      <p:sp>
+        <p:nvSpPr>
+          <p:cNvPr id="4" name="Text 2"/>
+          <p:cNvSpPr/>
+          <p:nvPr/>
+        </p:nvSpPr>
+        <p:spPr>
+          <a:xfrm>
+            <a:off x="558800" y="4064000"/>
+            <a:ext cx="6985000" cy="635000"/>
+          </a:xfrm>
+          <a:prstGeom prst="rect">
+            <a:avLst/>
+          </a:prstGeom>
+          <a:noFill/>
+          <a:ln/>
+        </p:spPr>
+        <p:txBody>
+          <a:bodyPr wrap="square" lIns="0" tIns="0" rIns="0" bIns="0" rtlCol="0" anchor="t"/>
+          <a:lstStyle/>
+          <a:p>
+            <a:pPr algn="l" indent="0" marL="0">
+              <a:lnSpc>
+                <a:spcPct val="140000"/>
+              </a:lnSpc>
+              <a:buNone/>
+            </a:pPr>
+            <a:r>
+              <a:rPr lang="en-US" sz="1700" dirty="0">
+                <a:solidFill>
+                  <a:srgbClr val="77726A"/>
                 </a:solidFill>
                 <a:latin typeface="Libre Franklin" pitchFamily="34" charset="0"/>
                 <a:ea typeface="Libre Franklin" pitchFamily="34" charset="-122"/>
                 <a:cs typeface="Libre Franklin" pitchFamily="34" charset="-120"/>
               </a:rPr>
-              <a:t>A harness is the program that does things. Cline reads your files, writes the edits, runs the commands, and decides when to ask the model what to do next. It has no intelligence of its own.</a:t>
-            </a:r>
-            <a:endParaRPr lang="en-US" sz="1600" dirty="0"/>
-          </a:p>
-        </p:txBody>
-      </p:sp>
-      <p:sp>
-        <p:nvSpPr>
-          <p:cNvPr id="11" name="Text 6"/>
-          <p:cNvSpPr/>
-          <p:nvPr/>
-        </p:nvSpPr>
-        <p:spPr>
-          <a:xfrm>
-            <a:off x="7099300" y="3238500"/>
-            <a:ext cx="4533900" cy="1305560"/>
-          </a:xfrm>
-          <a:prstGeom prst="rect">
-            <a:avLst/>
-          </a:prstGeom>
-          <a:noFill/>
-          <a:ln/>
-        </p:spPr>
-        <p:txBody>
-          <a:bodyPr wrap="square" lIns="0" tIns="0" rIns="0" bIns="0" rtlCol="0" anchor="t"/>
-          <a:lstStyle/>
-          <a:p>
-            <a:pPr algn="l" indent="0" marL="0">
-              <a:lnSpc>
-                <a:spcPct val="145000"/>
-              </a:lnSpc>
-              <a:buNone/>
-            </a:pPr>
-            <a:r>
-              <a:rPr lang="en-US" sz="1600" dirty="0">
-                <a:solidFill>
-                  <a:srgbClr val="77726A"/>
-                </a:solidFill>
-                <a:latin typeface="Libre Franklin" pitchFamily="34" charset="0"/>
-                <a:ea typeface="Libre Franklin" pitchFamily="34" charset="-122"/>
-                <a:cs typeface="Libre Franklin" pitchFamily="34" charset="-120"/>
-              </a:rPr>
-              <a:t>The model is the thing that decides what to say. It runs on someone else’s computer, never sees your disk, and can be swapped for another in three clicks.</a:t>
-            </a:r>
-            <a:endParaRPr lang="en-US" sz="1600" dirty="0"/>
-          </a:p>
-        </p:txBody>
-      </p:sp>
-      <p:sp>
-        <p:nvSpPr>
-          <p:cNvPr id="12" name="Text 7"/>
-          <p:cNvSpPr/>
-          <p:nvPr/>
-        </p:nvSpPr>
-        <p:spPr>
-          <a:xfrm>
-            <a:off x="7099300" y="5956300"/>
-            <a:ext cx="4533900" cy="215900"/>
-          </a:xfrm>
-          <a:prstGeom prst="rect">
-            <a:avLst/>
-          </a:prstGeom>
-          <a:noFill/>
-          <a:ln/>
-        </p:spPr>
-        <p:txBody>
-          <a:bodyPr wrap="square" lIns="0" tIns="0" rIns="0" bIns="0" rtlCol="0" anchor="t"/>
-          <a:lstStyle/>
-          <a:p>
-            <a:pPr algn="l" indent="0" marL="0">
-              <a:lnSpc>
-                <a:spcPct val="145000"/>
-              </a:lnSpc>
-              <a:buNone/>
-            </a:pPr>
-            <a:r>
-              <a:rPr lang="en-US" sz="1200" dirty="0">
-                <a:solidFill>
-                  <a:srgbClr val="99948B"/>
-                </a:solidFill>
-                <a:latin typeface="IBM Plex Mono" pitchFamily="34" charset="0"/>
-                <a:ea typeface="IBM Plex Mono" pitchFamily="34" charset="-122"/>
-                <a:cs typeface="IBM Plex Mono" pitchFamily="34" charset="-120"/>
-              </a:rPr>
-              <a:t>Fig. 2 — the two pieces you are driving</a:t>
-            </a:r>
-            <a:endParaRPr lang="en-US" sz="1200" dirty="0"/>
+              <a:t>Three limits you will meet before lunch, and the reason none of them are bugs.</a:t>
+            </a:r>
+            <a:endParaRPr lang="en-US" sz="1700" dirty="0"/>
           </a:p>
         </p:txBody>
       </p:sp>
@@ -31852,159 +31861,15 @@
                 <a:ea typeface="IBM Plex Mono" pitchFamily="34" charset="-122"/>
                 <a:cs typeface="IBM Plex Mono" pitchFamily="34" charset="-120"/>
               </a:rPr>
-              <a:t>SECTION 01</a:t>
+              <a:t>SECTION 02</a:t>
             </a:r>
             <a:endParaRPr lang="en-US" sz="1200" dirty="0"/>
           </a:p>
         </p:txBody>
       </p:sp>
-      <p:pic>
-        <p:nvPicPr>
-          <p:cNvPr id="3" name="Image 0" descr="icons/cline.png">    </p:cNvPr>
-          <p:cNvPicPr>
-            <a:picLocks noChangeAspect="1"/>
-          </p:cNvPicPr>
-          <p:nvPr/>
-        </p:nvPicPr>
-        <p:blipFill>
-          <a:blip r:embed="rId1"/>
-          <a:stretch>
-            <a:fillRect/>
-          </a:stretch>
-        </p:blipFill>
-        <p:spPr>
-          <a:xfrm>
-            <a:off x="9715500" y="361950"/>
-            <a:ext cx="203200" cy="203200"/>
-          </a:xfrm>
-          <a:prstGeom prst="rect">
-            <a:avLst/>
-          </a:prstGeom>
-        </p:spPr>
-      </p:pic>
-      <p:pic>
-        <p:nvPicPr>
-          <p:cNvPr id="4" name="Image 1" descr="icons/cursor.png">    </p:cNvPr>
-          <p:cNvPicPr>
-            <a:picLocks noChangeAspect="1"/>
-          </p:cNvPicPr>
-          <p:nvPr/>
-        </p:nvPicPr>
-        <p:blipFill>
-          <a:blip r:embed="rId2"/>
-          <a:stretch>
-            <a:fillRect/>
-          </a:stretch>
-        </p:blipFill>
-        <p:spPr>
-          <a:xfrm>
-            <a:off x="10058400" y="361950"/>
-            <a:ext cx="203200" cy="203200"/>
-          </a:xfrm>
-          <a:prstGeom prst="rect">
-            <a:avLst/>
-          </a:prstGeom>
-        </p:spPr>
-      </p:pic>
-      <p:pic>
-        <p:nvPicPr>
-          <p:cNvPr id="5" name="Image 2" descr="icons/githubcopilot.png">    </p:cNvPr>
-          <p:cNvPicPr>
-            <a:picLocks noChangeAspect="1"/>
-          </p:cNvPicPr>
-          <p:nvPr/>
-        </p:nvPicPr>
-        <p:blipFill>
-          <a:blip r:embed="rId3"/>
-          <a:stretch>
-            <a:fillRect/>
-          </a:stretch>
-        </p:blipFill>
-        <p:spPr>
-          <a:xfrm>
-            <a:off x="10401300" y="361950"/>
-            <a:ext cx="203200" cy="203200"/>
-          </a:xfrm>
-          <a:prstGeom prst="rect">
-            <a:avLst/>
-          </a:prstGeom>
-        </p:spPr>
-      </p:pic>
-      <p:pic>
-        <p:nvPicPr>
-          <p:cNvPr id="6" name="Image 3" descr="icons/claude.png">    </p:cNvPr>
-          <p:cNvPicPr>
-            <a:picLocks noChangeAspect="1"/>
-          </p:cNvPicPr>
-          <p:nvPr/>
-        </p:nvPicPr>
-        <p:blipFill>
-          <a:blip r:embed="rId4"/>
-          <a:stretch>
-            <a:fillRect/>
-          </a:stretch>
-        </p:blipFill>
-        <p:spPr>
-          <a:xfrm>
-            <a:off x="10744200" y="361950"/>
-            <a:ext cx="203200" cy="203200"/>
-          </a:xfrm>
-          <a:prstGeom prst="rect">
-            <a:avLst/>
-          </a:prstGeom>
-        </p:spPr>
-      </p:pic>
-      <p:pic>
-        <p:nvPicPr>
-          <p:cNvPr id="7" name="Image 4" descr="icons/googlegemini.png">    </p:cNvPr>
-          <p:cNvPicPr>
-            <a:picLocks noChangeAspect="1"/>
-          </p:cNvPicPr>
-          <p:nvPr/>
-        </p:nvPicPr>
-        <p:blipFill>
-          <a:blip r:embed="rId5"/>
-          <a:stretch>
-            <a:fillRect/>
-          </a:stretch>
-        </p:blipFill>
-        <p:spPr>
-          <a:xfrm>
-            <a:off x="11087100" y="361950"/>
-            <a:ext cx="203200" cy="203200"/>
-          </a:xfrm>
-          <a:prstGeom prst="rect">
-            <a:avLst/>
-          </a:prstGeom>
-        </p:spPr>
-      </p:pic>
-      <p:pic>
-        <p:nvPicPr>
-          <p:cNvPr id="8" name="Image 5" descr="icons/mistralai.png">    </p:cNvPr>
-          <p:cNvPicPr>
-            <a:picLocks noChangeAspect="1"/>
-          </p:cNvPicPr>
-          <p:nvPr/>
-        </p:nvPicPr>
-        <p:blipFill>
-          <a:blip r:embed="rId6"/>
-          <a:stretch>
-            <a:fillRect/>
-          </a:stretch>
-        </p:blipFill>
-        <p:spPr>
-          <a:xfrm>
-            <a:off x="11430000" y="361950"/>
-            <a:ext cx="203200" cy="203200"/>
-          </a:xfrm>
-          <a:prstGeom prst="rect">
-            <a:avLst/>
-          </a:prstGeom>
-        </p:spPr>
-      </p:pic>
-      <p:sp>
-        <p:nvSpPr>
-          <p:cNvPr id="9" name="Text 1"/>
+      <p:sp>
+        <p:nvSpPr>
+          <p:cNvPr id="3" name="Text 1"/>
           <p:cNvSpPr/>
           <p:nvPr/>
         </p:nvSpPr>
@@ -32038,7 +31903,7 @@
                 <a:ea typeface="Libre Franklin" pitchFamily="34" charset="-122"/>
                 <a:cs typeface="Libre Franklin" pitchFamily="34" charset="-120"/>
               </a:rPr>
-              <a:t>The tools people actually use</a:t>
+              <a:t>Context and its limits</a:t>
             </a:r>
             <a:endParaRPr lang="en-US" sz="2800" dirty="0"/>
           </a:p>
@@ -32046,7 +31911,7 @@
       </p:sp>
       <p:sp>
         <p:nvSpPr>
-          <p:cNvPr id="10" name="Shape 2"/>
+          <p:cNvPr id="4" name="Shape 2"/>
           <p:cNvSpPr/>
           <p:nvPr/>
         </p:nvSpPr>
@@ -32066,7 +31931,7 @@
       </p:sp>
       <p:sp>
         <p:nvSpPr>
-          <p:cNvPr id="11" name="Text 3"/>
+          <p:cNvPr id="5" name="Text 3"/>
           <p:cNvSpPr/>
           <p:nvPr/>
         </p:nvSpPr>
@@ -32108,7 +31973,7 @@
       </p:sp>
       <p:sp>
         <p:nvSpPr>
-          <p:cNvPr id="12" name="Text 4"/>
+          <p:cNvPr id="6" name="Text 4"/>
           <p:cNvSpPr/>
           <p:nvPr/>
         </p:nvSpPr>
@@ -32150,98 +32015,56 @@
       </p:sp>
       <p:sp>
         <p:nvSpPr>
-          <p:cNvPr id="13" name="Text 5"/>
+          <p:cNvPr id="7" name="Text 5"/>
           <p:cNvSpPr/>
           <p:nvPr/>
         </p:nvSpPr>
         <p:spPr>
           <a:xfrm>
             <a:off x="558800" y="1511300"/>
-            <a:ext cx="5283200" cy="254000"/>
-          </a:xfrm>
-          <a:prstGeom prst="rect">
-            <a:avLst/>
-          </a:prstGeom>
-          <a:noFill/>
-          <a:ln/>
-        </p:spPr>
-        <p:txBody>
-          <a:bodyPr wrap="square" lIns="0" tIns="0" rIns="0" bIns="0" rtlCol="0" anchor="t"/>
-          <a:lstStyle/>
-          <a:p>
-            <a:pPr algn="l" indent="0" marL="0">
-              <a:lnSpc>
-                <a:spcPct val="145000"/>
-              </a:lnSpc>
-              <a:buNone/>
-            </a:pPr>
-            <a:r>
-              <a:rPr lang="en-US" sz="1300" spc="130" kern="0" dirty="0">
+            <a:ext cx="190500" cy="317500"/>
+          </a:xfrm>
+          <a:prstGeom prst="rect">
+            <a:avLst/>
+          </a:prstGeom>
+          <a:noFill/>
+          <a:ln/>
+        </p:spPr>
+        <p:txBody>
+          <a:bodyPr wrap="square" lIns="0" tIns="0" rIns="0" bIns="0" rtlCol="0" anchor="t"/>
+          <a:lstStyle/>
+          <a:p>
+            <a:pPr algn="l" indent="0" marL="0">
+              <a:lnSpc>
+                <a:spcPct val="140000"/>
+              </a:lnSpc>
+              <a:buNone/>
+            </a:pPr>
+            <a:r>
+              <a:rPr lang="en-US" sz="1700" dirty="0">
                 <a:solidFill>
                   <a:srgbClr val="A87A2E"/>
-                </a:solidFill>
-                <a:latin typeface="IBM Plex Mono" pitchFamily="34" charset="0"/>
-                <a:ea typeface="IBM Plex Mono" pitchFamily="34" charset="-122"/>
-                <a:cs typeface="IBM Plex Mono" pitchFamily="34" charset="-120"/>
-              </a:rPr>
-              <a:t>HARNESSES</a:t>
-            </a:r>
-            <a:endParaRPr lang="en-US" sz="1300" dirty="0"/>
-          </a:p>
-        </p:txBody>
-      </p:sp>
-      <p:sp>
-        <p:nvSpPr>
-          <p:cNvPr id="14" name="Text 6"/>
-          <p:cNvSpPr/>
-          <p:nvPr/>
-        </p:nvSpPr>
-        <p:spPr>
-          <a:xfrm>
-            <a:off x="558800" y="1917700"/>
-            <a:ext cx="5283200" cy="1270000"/>
-          </a:xfrm>
-          <a:prstGeom prst="rect">
-            <a:avLst/>
-          </a:prstGeom>
-          <a:noFill/>
-          <a:ln/>
-        </p:spPr>
-        <p:txBody>
-          <a:bodyPr wrap="square" lIns="0" tIns="0" rIns="0" bIns="0" rtlCol="0" anchor="t"/>
-          <a:lstStyle/>
-          <a:p>
-            <a:pPr algn="l" indent="0" marL="0">
-              <a:lnSpc>
-                <a:spcPct val="145000"/>
-              </a:lnSpc>
-              <a:buNone/>
-            </a:pPr>
-            <a:r>
-              <a:rPr lang="en-US" sz="1600" dirty="0">
-                <a:solidFill>
-                  <a:srgbClr val="332F2A"/>
                 </a:solidFill>
                 <a:latin typeface="Libre Franklin" pitchFamily="34" charset="0"/>
                 <a:ea typeface="Libre Franklin" pitchFamily="34" charset="-122"/>
                 <a:cs typeface="Libre Franklin" pitchFamily="34" charset="-120"/>
               </a:rPr>
-              <a:t>Cline and Roo Code, free inside VS Code. Cursor and Windsurf, whole editors. GitHub Copilot. Claude Code and Gemini CLI, in the terminal. Aider.</a:t>
-            </a:r>
-            <a:endParaRPr lang="en-US" sz="1600" dirty="0"/>
-          </a:p>
-        </p:txBody>
-      </p:sp>
-      <p:sp>
-        <p:nvSpPr>
-          <p:cNvPr id="15" name="Text 7"/>
-          <p:cNvSpPr/>
-          <p:nvPr/>
-        </p:nvSpPr>
-        <p:spPr>
-          <a:xfrm>
-            <a:off x="558800" y="3274060"/>
-            <a:ext cx="5283200" cy="1270000"/>
+              <a:t>—</a:t>
+            </a:r>
+            <a:endParaRPr lang="en-US" sz="1700" dirty="0"/>
+          </a:p>
+        </p:txBody>
+      </p:sp>
+      <p:sp>
+        <p:nvSpPr>
+          <p:cNvPr id="8" name="Text 6"/>
+          <p:cNvSpPr/>
+          <p:nvPr/>
+        </p:nvSpPr>
+        <p:spPr>
+          <a:xfrm>
+            <a:off x="927100" y="1511300"/>
+            <a:ext cx="9156700" cy="753110"/>
           </a:xfrm>
           <a:prstGeom prst="rect">
             <a:avLst/>
@@ -32260,41 +32083,16 @@
               <a:buNone/>
             </a:pPr>
             <a:r>
-              <a:rPr lang="en-US" sz="1600" dirty="0">
-                <a:solidFill>
-                  <a:srgbClr val="77726A"/>
+              <a:rPr lang="en-US" sz="1700" b="1" dirty="0">
+                <a:solidFill>
+                  <a:srgbClr val="332F2A"/>
                 </a:solidFill>
                 <a:latin typeface="Libre Franklin" pitchFamily="34" charset="0"/>
                 <a:ea typeface="Libre Franklin" pitchFamily="34" charset="-122"/>
                 <a:cs typeface="Libre Franklin" pitchFamily="34" charset="-120"/>
               </a:rPr>
-              <a:t>All do the same job: read your files, write the edits, run the commands. We use Cline because it is free and shows you every step it takes.</a:t>
-            </a:r>
-            <a:endParaRPr lang="en-US" sz="1600" dirty="0"/>
-          </a:p>
-        </p:txBody>
-      </p:sp>
-      <p:sp>
-        <p:nvSpPr>
-          <p:cNvPr id="16" name="Text 8"/>
-          <p:cNvSpPr/>
-          <p:nvPr/>
-        </p:nvSpPr>
-        <p:spPr>
-          <a:xfrm>
-            <a:off x="6350000" y="1511300"/>
-            <a:ext cx="5283200" cy="254000"/>
-          </a:xfrm>
-          <a:prstGeom prst="rect">
-            <a:avLst/>
-          </a:prstGeom>
-          <a:noFill/>
-          <a:ln/>
-        </p:spPr>
-        <p:txBody>
-          <a:bodyPr wrap="square" lIns="0" tIns="0" rIns="0" bIns="0" rtlCol="0" anchor="t"/>
-          <a:lstStyle/>
-          <a:p>
+              <a:t>The model has no memory. </a:t>
+            </a:r>
             <a:pPr algn="l" indent="0" marL="0">
               <a:lnSpc>
                 <a:spcPct val="145000"/>
@@ -32302,49 +32100,7 @@
               <a:buNone/>
             </a:pPr>
             <a:r>
-              <a:rPr lang="en-US" sz="1300" spc="130" kern="0" dirty="0">
-                <a:solidFill>
-                  <a:srgbClr val="A87A2E"/>
-                </a:solidFill>
-                <a:latin typeface="IBM Plex Mono" pitchFamily="34" charset="0"/>
-                <a:ea typeface="IBM Plex Mono" pitchFamily="34" charset="-122"/>
-                <a:cs typeface="IBM Plex Mono" pitchFamily="34" charset="-120"/>
-              </a:rPr>
-              <a:t>MODELS</a:t>
-            </a:r>
-            <a:endParaRPr lang="en-US" sz="1300" dirty="0"/>
-          </a:p>
-        </p:txBody>
-      </p:sp>
-      <p:sp>
-        <p:nvSpPr>
-          <p:cNvPr id="17" name="Text 9"/>
-          <p:cNvSpPr/>
-          <p:nvPr/>
-        </p:nvSpPr>
-        <p:spPr>
-          <a:xfrm>
-            <a:off x="6350000" y="1917700"/>
-            <a:ext cx="5283200" cy="1270000"/>
-          </a:xfrm>
-          <a:prstGeom prst="rect">
-            <a:avLst/>
-          </a:prstGeom>
-          <a:noFill/>
-          <a:ln/>
-        </p:spPr>
-        <p:txBody>
-          <a:bodyPr wrap="square" lIns="0" tIns="0" rIns="0" bIns="0" rtlCol="0" anchor="t"/>
-          <a:lstStyle/>
-          <a:p>
-            <a:pPr algn="l" indent="0" marL="0">
-              <a:lnSpc>
-                <a:spcPct val="145000"/>
-              </a:lnSpc>
-              <a:buNone/>
-            </a:pPr>
-            <a:r>
-              <a:rPr lang="en-US" sz="1600" dirty="0">
+              <a:rPr lang="en-US" sz="1700" dirty="0">
                 <a:solidFill>
                   <a:srgbClr val="332F2A"/>
                 </a:solidFill>
@@ -32352,51 +32108,295 @@
                 <a:ea typeface="Libre Franklin" pitchFamily="34" charset="-122"/>
                 <a:cs typeface="Libre Franklin" pitchFamily="34" charset="-120"/>
               </a:rPr>
-              <a:t>Claude, GPT, Gemini, Mistral, Llama, Qwen, DeepSeek. Some you rent by the word; some you can download and run yourself.</a:t>
-            </a:r>
-            <a:endParaRPr lang="en-US" sz="1600" dirty="0"/>
-          </a:p>
-        </p:txBody>
-      </p:sp>
-      <p:sp>
-        <p:nvSpPr>
-          <p:cNvPr id="18" name="Text 10"/>
-          <p:cNvSpPr/>
-          <p:nvPr/>
-        </p:nvSpPr>
-        <p:spPr>
-          <a:xfrm>
-            <a:off x="6350000" y="3274060"/>
-            <a:ext cx="5283200" cy="1270000"/>
-          </a:xfrm>
-          <a:prstGeom prst="rect">
-            <a:avLst/>
-          </a:prstGeom>
-          <a:noFill/>
-          <a:ln/>
-        </p:spPr>
-        <p:txBody>
-          <a:bodyPr wrap="square" lIns="0" tIns="0" rIns="0" bIns="0" rtlCol="0" anchor="t"/>
-          <a:lstStyle/>
-          <a:p>
-            <a:pPr algn="l" indent="0" marL="0">
-              <a:lnSpc>
-                <a:spcPct val="145000"/>
-              </a:lnSpc>
-              <a:buNone/>
-            </a:pPr>
-            <a:r>
-              <a:rPr lang="en-US" sz="1600" dirty="0">
-                <a:solidFill>
-                  <a:srgbClr val="77726A"/>
+              <a:t>Between one request and the next it retains nothing at all.</a:t>
+            </a:r>
+            <a:endParaRPr lang="en-US" sz="1700" dirty="0"/>
+          </a:p>
+        </p:txBody>
+      </p:sp>
+      <p:sp>
+        <p:nvSpPr>
+          <p:cNvPr id="9" name="Text 7"/>
+          <p:cNvSpPr/>
+          <p:nvPr/>
+        </p:nvSpPr>
+        <p:spPr>
+          <a:xfrm>
+            <a:off x="558800" y="2391410"/>
+            <a:ext cx="190500" cy="317500"/>
+          </a:xfrm>
+          <a:prstGeom prst="rect">
+            <a:avLst/>
+          </a:prstGeom>
+          <a:noFill/>
+          <a:ln/>
+        </p:spPr>
+        <p:txBody>
+          <a:bodyPr wrap="square" lIns="0" tIns="0" rIns="0" bIns="0" rtlCol="0" anchor="t"/>
+          <a:lstStyle/>
+          <a:p>
+            <a:pPr algn="l" indent="0" marL="0">
+              <a:lnSpc>
+                <a:spcPct val="140000"/>
+              </a:lnSpc>
+              <a:buNone/>
+            </a:pPr>
+            <a:r>
+              <a:rPr lang="en-US" sz="1700" dirty="0">
+                <a:solidFill>
+                  <a:srgbClr val="A87A2E"/>
                 </a:solidFill>
                 <a:latin typeface="Libre Franklin" pitchFamily="34" charset="0"/>
                 <a:ea typeface="Libre Franklin" pitchFamily="34" charset="-122"/>
                 <a:cs typeface="Libre Franklin" pitchFamily="34" charset="-120"/>
               </a:rPr>
-              <a:t>Nearly every harness lets you point at any of them. Swapping is a settings change, not a new tool — which is exactly why the split is worth knowing.</a:t>
-            </a:r>
-            <a:endParaRPr lang="en-US" sz="1600" dirty="0"/>
+              <a:t>—</a:t>
+            </a:r>
+            <a:endParaRPr lang="en-US" sz="1700" dirty="0"/>
+          </a:p>
+        </p:txBody>
+      </p:sp>
+      <p:sp>
+        <p:nvSpPr>
+          <p:cNvPr id="10" name="Text 8"/>
+          <p:cNvSpPr/>
+          <p:nvPr/>
+        </p:nvSpPr>
+        <p:spPr>
+          <a:xfrm>
+            <a:off x="927100" y="2391410"/>
+            <a:ext cx="9156700" cy="753110"/>
+          </a:xfrm>
+          <a:prstGeom prst="rect">
+            <a:avLst/>
+          </a:prstGeom>
+          <a:noFill/>
+          <a:ln/>
+        </p:spPr>
+        <p:txBody>
+          <a:bodyPr wrap="square" lIns="0" tIns="0" rIns="0" bIns="0" rtlCol="0" anchor="t"/>
+          <a:lstStyle/>
+          <a:p>
+            <a:pPr algn="l" indent="0" marL="0">
+              <a:lnSpc>
+                <a:spcPct val="145000"/>
+              </a:lnSpc>
+              <a:buNone/>
+            </a:pPr>
+            <a:r>
+              <a:rPr lang="en-US" sz="1700" b="1" dirty="0">
+                <a:solidFill>
+                  <a:srgbClr val="332F2A"/>
+                </a:solidFill>
+                <a:latin typeface="Libre Franklin" pitchFamily="34" charset="0"/>
+                <a:ea typeface="Libre Franklin" pitchFamily="34" charset="-122"/>
+                <a:cs typeface="Libre Franklin" pitchFamily="34" charset="-120"/>
+              </a:rPr>
+              <a:t>So everything is re-sent. </a:t>
+            </a:r>
+            <a:pPr algn="l" indent="0" marL="0">
+              <a:lnSpc>
+                <a:spcPct val="145000"/>
+              </a:lnSpc>
+              <a:buNone/>
+            </a:pPr>
+            <a:r>
+              <a:rPr lang="en-US" sz="1700" dirty="0">
+                <a:solidFill>
+                  <a:srgbClr val="332F2A"/>
+                </a:solidFill>
+                <a:latin typeface="Libre Franklin" pitchFamily="34" charset="0"/>
+                <a:ea typeface="Libre Franklin" pitchFamily="34" charset="-122"/>
+                <a:cs typeface="Libre Franklin" pitchFamily="34" charset="-120"/>
+              </a:rPr>
+              <a:t>Every request carries the whole conversation and every file read so far.</a:t>
+            </a:r>
+            <a:endParaRPr lang="en-US" sz="1700" dirty="0"/>
+          </a:p>
+        </p:txBody>
+      </p:sp>
+      <p:sp>
+        <p:nvSpPr>
+          <p:cNvPr id="11" name="Text 9"/>
+          <p:cNvSpPr/>
+          <p:nvPr/>
+        </p:nvSpPr>
+        <p:spPr>
+          <a:xfrm>
+            <a:off x="558800" y="3271520"/>
+            <a:ext cx="190500" cy="317500"/>
+          </a:xfrm>
+          <a:prstGeom prst="rect">
+            <a:avLst/>
+          </a:prstGeom>
+          <a:noFill/>
+          <a:ln/>
+        </p:spPr>
+        <p:txBody>
+          <a:bodyPr wrap="square" lIns="0" tIns="0" rIns="0" bIns="0" rtlCol="0" anchor="t"/>
+          <a:lstStyle/>
+          <a:p>
+            <a:pPr algn="l" indent="0" marL="0">
+              <a:lnSpc>
+                <a:spcPct val="140000"/>
+              </a:lnSpc>
+              <a:buNone/>
+            </a:pPr>
+            <a:r>
+              <a:rPr lang="en-US" sz="1700" dirty="0">
+                <a:solidFill>
+                  <a:srgbClr val="A87A2E"/>
+                </a:solidFill>
+                <a:latin typeface="Libre Franklin" pitchFamily="34" charset="0"/>
+                <a:ea typeface="Libre Franklin" pitchFamily="34" charset="-122"/>
+                <a:cs typeface="Libre Franklin" pitchFamily="34" charset="-120"/>
+              </a:rPr>
+              <a:t>—</a:t>
+            </a:r>
+            <a:endParaRPr lang="en-US" sz="1700" dirty="0"/>
+          </a:p>
+        </p:txBody>
+      </p:sp>
+      <p:sp>
+        <p:nvSpPr>
+          <p:cNvPr id="12" name="Text 10"/>
+          <p:cNvSpPr/>
+          <p:nvPr/>
+        </p:nvSpPr>
+        <p:spPr>
+          <a:xfrm>
+            <a:off x="927100" y="3271520"/>
+            <a:ext cx="9156700" cy="753110"/>
+          </a:xfrm>
+          <a:prstGeom prst="rect">
+            <a:avLst/>
+          </a:prstGeom>
+          <a:noFill/>
+          <a:ln/>
+        </p:spPr>
+        <p:txBody>
+          <a:bodyPr wrap="square" lIns="0" tIns="0" rIns="0" bIns="0" rtlCol="0" anchor="t"/>
+          <a:lstStyle/>
+          <a:p>
+            <a:pPr algn="l" indent="0" marL="0">
+              <a:lnSpc>
+                <a:spcPct val="145000"/>
+              </a:lnSpc>
+              <a:buNone/>
+            </a:pPr>
+            <a:r>
+              <a:rPr lang="en-US" sz="1700" b="1" dirty="0">
+                <a:solidFill>
+                  <a:srgbClr val="332F2A"/>
+                </a:solidFill>
+                <a:latin typeface="Libre Franklin" pitchFamily="34" charset="0"/>
+                <a:ea typeface="Libre Franklin" pitchFamily="34" charset="-122"/>
+                <a:cs typeface="Libre Franklin" pitchFamily="34" charset="-120"/>
+              </a:rPr>
+              <a:t>The context window is the ceiling </a:t>
+            </a:r>
+            <a:pPr algn="l" indent="0" marL="0">
+              <a:lnSpc>
+                <a:spcPct val="145000"/>
+              </a:lnSpc>
+              <a:buNone/>
+            </a:pPr>
+            <a:r>
+              <a:rPr lang="en-US" sz="1700" dirty="0">
+                <a:solidFill>
+                  <a:srgbClr val="332F2A"/>
+                </a:solidFill>
+                <a:latin typeface="Libre Franklin" pitchFamily="34" charset="0"/>
+                <a:ea typeface="Libre Franklin" pitchFamily="34" charset="-122"/>
+                <a:cs typeface="Libre Franklin" pitchFamily="34" charset="-120"/>
+              </a:rPr>
+              <a:t>on how much can be re-sent at once. Past it, the earliest parts fall away.</a:t>
+            </a:r>
+            <a:endParaRPr lang="en-US" sz="1700" dirty="0"/>
+          </a:p>
+        </p:txBody>
+      </p:sp>
+      <p:sp>
+        <p:nvSpPr>
+          <p:cNvPr id="13" name="Text 11"/>
+          <p:cNvSpPr/>
+          <p:nvPr/>
+        </p:nvSpPr>
+        <p:spPr>
+          <a:xfrm>
+            <a:off x="558800" y="4151630"/>
+            <a:ext cx="190500" cy="317500"/>
+          </a:xfrm>
+          <a:prstGeom prst="rect">
+            <a:avLst/>
+          </a:prstGeom>
+          <a:noFill/>
+          <a:ln/>
+        </p:spPr>
+        <p:txBody>
+          <a:bodyPr wrap="square" lIns="0" tIns="0" rIns="0" bIns="0" rtlCol="0" anchor="t"/>
+          <a:lstStyle/>
+          <a:p>
+            <a:pPr algn="l" indent="0" marL="0">
+              <a:lnSpc>
+                <a:spcPct val="140000"/>
+              </a:lnSpc>
+              <a:buNone/>
+            </a:pPr>
+            <a:r>
+              <a:rPr lang="en-US" sz="1700" dirty="0">
+                <a:solidFill>
+                  <a:srgbClr val="A87A2E"/>
+                </a:solidFill>
+                <a:latin typeface="Libre Franklin" pitchFamily="34" charset="0"/>
+                <a:ea typeface="Libre Franklin" pitchFamily="34" charset="-122"/>
+                <a:cs typeface="Libre Franklin" pitchFamily="34" charset="-120"/>
+              </a:rPr>
+              <a:t>—</a:t>
+            </a:r>
+            <a:endParaRPr lang="en-US" sz="1700" dirty="0"/>
+          </a:p>
+        </p:txBody>
+      </p:sp>
+      <p:sp>
+        <p:nvSpPr>
+          <p:cNvPr id="14" name="Text 12"/>
+          <p:cNvSpPr/>
+          <p:nvPr/>
+        </p:nvSpPr>
+        <p:spPr>
+          <a:xfrm>
+            <a:off x="927100" y="4151630"/>
+            <a:ext cx="9156700" cy="753110"/>
+          </a:xfrm>
+          <a:prstGeom prst="rect">
+            <a:avLst/>
+          </a:prstGeom>
+          <a:noFill/>
+          <a:ln/>
+        </p:spPr>
+        <p:txBody>
+          <a:bodyPr wrap="square" lIns="0" tIns="0" rIns="0" bIns="0" rtlCol="0" anchor="t"/>
+          <a:lstStyle/>
+          <a:p>
+            <a:pPr algn="l" indent="0" marL="0">
+              <a:lnSpc>
+                <a:spcPct val="145000"/>
+              </a:lnSpc>
+              <a:buNone/>
+            </a:pPr>
+            <a:r>
+              <a:rPr lang="en-US" sz="1700" dirty="0">
+                <a:solidFill>
+                  <a:srgbClr val="332F2A"/>
+                </a:solidFill>
+                <a:latin typeface="Libre Franklin" pitchFamily="34" charset="0"/>
+                <a:ea typeface="Libre Franklin" pitchFamily="34" charset="-122"/>
+                <a:cs typeface="Libre Franklin" pitchFamily="34" charset="-120"/>
+              </a:rPr>
+              <a:t>A long conversation therefore makes an agent worse, not better. Start a new task for each feature.</a:t>
+            </a:r>
+            <a:endParaRPr lang="en-US" sz="1700" dirty="0"/>
           </a:p>
         </p:txBody>
       </p:sp>
